--- a/presentation/insta_trend_timeseries.pptx
+++ b/presentation/insta_trend_timeseries.pptx
@@ -29,6 +29,7 @@
     <p:sldId id="277" r:id="rId28"/>
     <p:sldId id="278" r:id="rId29"/>
     <p:sldId id="279" r:id="rId30"/>
+    <p:sldId id="280" r:id="rId31"/>
   </p:sldIdLst>
   <p:sldSz cx="12191695" cy="6858000" type="screen4x3"/>
   <p:notesSz cx="6858000" cy="9144000"/>
@@ -3393,52 +3394,8 @@
         </p:nvSpPr>
         <p:spPr>
           <a:xfrm>
-            <a:off x="0" y="0"/>
-            <a:ext cx="12191695" cy="6858000"/>
-          </a:xfrm>
-          <a:prstGeom prst="rect">
-            <a:avLst/>
-          </a:prstGeom>
-          <a:solidFill>
-            <a:srgbClr val="222222"/>
-          </a:solidFill>
-          <a:ln>
-            <a:noFill/>
-          </a:ln>
-          <a:effectLst/>
-        </p:spPr>
-        <p:style>
-          <a:lnRef idx="1">
-            <a:schemeClr val="accent1"/>
-          </a:lnRef>
-          <a:fillRef idx="3">
-            <a:schemeClr val="accent1"/>
-          </a:fillRef>
-          <a:effectRef idx="2">
-            <a:schemeClr val="accent1"/>
-          </a:effectRef>
-          <a:fontRef idx="minor">
-            <a:schemeClr val="lt1"/>
-          </a:fontRef>
-        </p:style>
-        <p:txBody>
-          <a:bodyPr rtlCol="0" anchor="ctr"/>
-          <a:lstStyle/>
-          <a:p>
-            <a:pPr algn="ctr"/>
-          </a:p>
-        </p:txBody>
-      </p:sp>
-      <p:sp>
-        <p:nvSpPr>
-          <p:cNvPr id="3" name="Rectangle 2"/>
-          <p:cNvSpPr/>
-          <p:nvPr/>
-        </p:nvSpPr>
-        <p:spPr>
-          <a:xfrm>
-            <a:off x="822960" y="2743200"/>
-            <a:ext cx="1280160" cy="109728"/>
+            <a:off x="365760" y="384048"/>
+            <a:ext cx="164592" cy="502920"/>
           </a:xfrm>
           <a:prstGeom prst="rect">
             <a:avLst/>
@@ -3475,14 +3432,48 @@
       </p:sp>
       <p:sp>
         <p:nvSpPr>
+          <p:cNvPr id="3" name="TextBox 2"/>
+          <p:cNvSpPr txBox="1"/>
+          <p:nvPr/>
+        </p:nvSpPr>
+        <p:spPr>
+          <a:xfrm>
+            <a:off x="685800" y="256032"/>
+            <a:ext cx="10058400" cy="320040"/>
+          </a:xfrm>
+          <a:prstGeom prst="rect">
+            <a:avLst/>
+          </a:prstGeom>
+          <a:noFill/>
+        </p:spPr>
+        <p:txBody>
+          <a:bodyPr wrap="square">
+            <a:spAutoFit/>
+          </a:bodyPr>
+          <a:lstStyle/>
+          <a:p>
+            <a:r>
+              <a:rPr sz="1100" b="1">
+                <a:solidFill>
+                  <a:srgbClr val="833AB4"/>
+                </a:solidFill>
+                <a:latin typeface="Segoe UI"/>
+              </a:rPr>
+              <a:t>04 · ACF &amp; ARIMA</a:t>
+            </a:r>
+          </a:p>
+        </p:txBody>
+      </p:sp>
+      <p:sp>
+        <p:nvSpPr>
           <p:cNvPr id="4" name="TextBox 3"/>
           <p:cNvSpPr txBox="1"/>
           <p:nvPr/>
         </p:nvSpPr>
         <p:spPr>
           <a:xfrm>
-            <a:off x="822960" y="2011680"/>
-            <a:ext cx="10058400" cy="548640"/>
+            <a:off x="658368" y="457200"/>
+            <a:ext cx="10515600" cy="640080"/>
           </a:xfrm>
           <a:prstGeom prst="rect">
             <a:avLst/>
@@ -3496,27 +3487,298 @@
           <a:lstStyle/>
           <a:p>
             <a:r>
-              <a:rPr sz="1400" b="1">
+              <a:rPr sz="2800" b="1">
+                <a:solidFill>
+                  <a:srgbClr val="222222"/>
+                </a:solidFill>
+                <a:latin typeface="맑은 고딕"/>
+              </a:rPr>
+              <a:t>자기상관 · 백색잡음 · ARIMA</a:t>
+            </a:r>
+          </a:p>
+        </p:txBody>
+      </p:sp>
+      <p:sp>
+        <p:nvSpPr>
+          <p:cNvPr id="5" name="TextBox 4"/>
+          <p:cNvSpPr txBox="1"/>
+          <p:nvPr/>
+        </p:nvSpPr>
+        <p:spPr>
+          <a:xfrm>
+            <a:off x="731520" y="1417320"/>
+            <a:ext cx="6309360" cy="4846320"/>
+          </a:xfrm>
+          <a:prstGeom prst="rect">
+            <a:avLst/>
+          </a:prstGeom>
+          <a:noFill/>
+        </p:spPr>
+        <p:txBody>
+          <a:bodyPr wrap="square">
+            <a:spAutoFit/>
+          </a:bodyPr>
+          <a:lstStyle/>
+          <a:p>
+            <a:pPr>
+              <a:spcAft>
+                <a:spcPts val="600"/>
+              </a:spcAft>
+            </a:pPr>
+            <a:r>
+              <a:rPr sz="1550" b="1">
                 <a:solidFill>
                   <a:srgbClr val="E1306C"/>
                 </a:solidFill>
-                <a:latin typeface="Segoe UI"/>
-              </a:rPr>
-              <a:t>PART 2 · ANALYSIS</a:t>
-            </a:r>
-          </a:p>
-        </p:txBody>
-      </p:sp>
-      <p:sp>
-        <p:nvSpPr>
-          <p:cNvPr id="5" name="TextBox 4"/>
-          <p:cNvSpPr txBox="1"/>
-          <p:nvPr/>
-        </p:nvSpPr>
-        <p:spPr>
-          <a:xfrm>
-            <a:off x="822960" y="3017520"/>
-            <a:ext cx="10515600" cy="1371600"/>
+                <a:latin typeface="맑은 고딕"/>
+              </a:rPr>
+              <a:t>●  ACF</a:t>
+            </a:r>
+          </a:p>
+          <a:p>
+            <a:pPr>
+              <a:spcAft>
+                <a:spcPts val="1200"/>
+              </a:spcAft>
+            </a:pPr>
+            <a:r>
+              <a:rPr sz="1250" b="0">
+                <a:solidFill>
+                  <a:srgbClr val="6B6B6B"/>
+                </a:solidFill>
+                <a:latin typeface="맑은 고딕"/>
+              </a:rPr>
+              <a:t>     시차 k에서 자기 자신과의 상관 ρ(k) — 추세면 느리게 감쇠, 주기 s면 lag s마다 스파이크</a:t>
+            </a:r>
+          </a:p>
+          <a:p>
+            <a:pPr>
+              <a:spcAft>
+                <a:spcPts val="600"/>
+              </a:spcAft>
+            </a:pPr>
+            <a:r>
+              <a:rPr sz="1550" b="1">
+                <a:solidFill>
+                  <a:srgbClr val="E1306C"/>
+                </a:solidFill>
+                <a:latin typeface="맑은 고딕"/>
+              </a:rPr>
+              <a:t>●  백색잡음</a:t>
+            </a:r>
+          </a:p>
+          <a:p>
+            <a:pPr>
+              <a:spcAft>
+                <a:spcPts val="1200"/>
+              </a:spcAft>
+            </a:pPr>
+            <a:r>
+              <a:rPr sz="1250" b="0">
+                <a:solidFill>
+                  <a:srgbClr val="6B6B6B"/>
+                </a:solidFill>
+                <a:latin typeface="맑은 고딕"/>
+              </a:rPr>
+              <a:t>     평균 0, 상관 0인 순수 잡음 — 잔차가 백색잡음이면 모형이 구조를 다 흡수했다는 신호</a:t>
+            </a:r>
+          </a:p>
+          <a:p>
+            <a:pPr>
+              <a:spcAft>
+                <a:spcPts val="600"/>
+              </a:spcAft>
+            </a:pPr>
+            <a:r>
+              <a:rPr sz="1550" b="1">
+                <a:solidFill>
+                  <a:srgbClr val="E1306C"/>
+                </a:solidFill>
+                <a:latin typeface="맑은 고딕"/>
+              </a:rPr>
+              <a:t>●  판정 기준</a:t>
+            </a:r>
+          </a:p>
+          <a:p>
+            <a:pPr>
+              <a:spcAft>
+                <a:spcPts val="1200"/>
+              </a:spcAft>
+            </a:pPr>
+            <a:r>
+              <a:rPr sz="1250" b="0">
+                <a:solidFill>
+                  <a:srgbClr val="6B6B6B"/>
+                </a:solidFill>
+                <a:latin typeface="맑은 고딕"/>
+              </a:rPr>
+              <a:t>     표본 ACF가 ±1.96/√n 밴드 안이면 해당 시차 상관은 유의하지 않음 (95%)</a:t>
+            </a:r>
+          </a:p>
+          <a:p>
+            <a:pPr>
+              <a:spcAft>
+                <a:spcPts val="600"/>
+              </a:spcAft>
+            </a:pPr>
+            <a:r>
+              <a:rPr sz="1550" b="1">
+                <a:solidFill>
+                  <a:srgbClr val="E1306C"/>
+                </a:solidFill>
+                <a:latin typeface="맑은 고딕"/>
+              </a:rPr>
+              <a:t>●  ARIMA(p,d,q)</a:t>
+            </a:r>
+          </a:p>
+          <a:p>
+            <a:pPr>
+              <a:spcAft>
+                <a:spcPts val="1200"/>
+              </a:spcAft>
+            </a:pPr>
+            <a:r>
+              <a:rPr sz="1250" b="0">
+                <a:solidFill>
+                  <a:srgbClr val="6B6B6B"/>
+                </a:solidFill>
+                <a:latin typeface="맑은 고딕"/>
+              </a:rPr>
+              <a:t>     AR(p) 과거 값 회귀 + I(d) 차분 + MA(q) 과거 충격 회귀 — 차수는 ACF/PACF로 식별</a:t>
+            </a:r>
+          </a:p>
+          <a:p>
+            <a:pPr>
+              <a:spcAft>
+                <a:spcPts val="600"/>
+              </a:spcAft>
+            </a:pPr>
+            <a:r>
+              <a:rPr sz="1550" b="1">
+                <a:solidFill>
+                  <a:srgbClr val="E1306C"/>
+                </a:solidFill>
+                <a:latin typeface="맑은 고딕"/>
+              </a:rPr>
+              <a:t>●  우리의 선택</a:t>
+            </a:r>
+          </a:p>
+          <a:p>
+            <a:pPr>
+              <a:spcAft>
+                <a:spcPts val="1200"/>
+              </a:spcAft>
+            </a:pPr>
+            <a:r>
+              <a:rPr sz="1250" b="0">
+                <a:solidFill>
+                  <a:srgbClr val="6B6B6B"/>
+                </a:solidFill>
+                <a:latin typeface="맑은 고딕"/>
+              </a:rPr>
+              <a:t>     수업 범위의 해석 가능한 기본형: 선형추세 + 요일 더미 → ARIMA 대비 단순하지만 구조가 투명</a:t>
+            </a:r>
+          </a:p>
+        </p:txBody>
+      </p:sp>
+      <p:sp>
+        <p:nvSpPr>
+          <p:cNvPr id="6" name="Rectangle 5"/>
+          <p:cNvSpPr/>
+          <p:nvPr/>
+        </p:nvSpPr>
+        <p:spPr>
+          <a:xfrm>
+            <a:off x="7269480" y="1417320"/>
+            <a:ext cx="4434840" cy="4846320"/>
+          </a:xfrm>
+          <a:prstGeom prst="rect">
+            <a:avLst/>
+          </a:prstGeom>
+          <a:solidFill>
+            <a:srgbClr val="F2F2F4"/>
+          </a:solidFill>
+          <a:ln>
+            <a:noFill/>
+          </a:ln>
+          <a:effectLst/>
+        </p:spPr>
+        <p:style>
+          <a:lnRef idx="1">
+            <a:schemeClr val="accent1"/>
+          </a:lnRef>
+          <a:fillRef idx="3">
+            <a:schemeClr val="accent1"/>
+          </a:fillRef>
+          <a:effectRef idx="2">
+            <a:schemeClr val="accent1"/>
+          </a:effectRef>
+          <a:fontRef idx="minor">
+            <a:schemeClr val="lt1"/>
+          </a:fontRef>
+        </p:style>
+        <p:txBody>
+          <a:bodyPr rtlCol="0" anchor="ctr"/>
+          <a:lstStyle/>
+          <a:p>
+            <a:pPr algn="ctr"/>
+          </a:p>
+        </p:txBody>
+      </p:sp>
+      <p:sp>
+        <p:nvSpPr>
+          <p:cNvPr id="7" name="Rectangle 6"/>
+          <p:cNvSpPr/>
+          <p:nvPr/>
+        </p:nvSpPr>
+        <p:spPr>
+          <a:xfrm>
+            <a:off x="7269480" y="1417320"/>
+            <a:ext cx="4434840" cy="457200"/>
+          </a:xfrm>
+          <a:prstGeom prst="rect">
+            <a:avLst/>
+          </a:prstGeom>
+          <a:solidFill>
+            <a:srgbClr val="833AB4"/>
+          </a:solidFill>
+          <a:ln>
+            <a:noFill/>
+          </a:ln>
+          <a:effectLst/>
+        </p:spPr>
+        <p:style>
+          <a:lnRef idx="1">
+            <a:schemeClr val="accent1"/>
+          </a:lnRef>
+          <a:fillRef idx="3">
+            <a:schemeClr val="accent1"/>
+          </a:fillRef>
+          <a:effectRef idx="2">
+            <a:schemeClr val="accent1"/>
+          </a:effectRef>
+          <a:fontRef idx="minor">
+            <a:schemeClr val="lt1"/>
+          </a:fontRef>
+        </p:style>
+        <p:txBody>
+          <a:bodyPr rtlCol="0" anchor="ctr"/>
+          <a:lstStyle/>
+          <a:p>
+            <a:pPr algn="ctr"/>
+          </a:p>
+        </p:txBody>
+      </p:sp>
+      <p:sp>
+        <p:nvSpPr>
+          <p:cNvPr id="8" name="TextBox 7"/>
+          <p:cNvSpPr txBox="1"/>
+          <p:nvPr/>
+        </p:nvSpPr>
+        <p:spPr>
+          <a:xfrm>
+            <a:off x="7452360" y="1472184"/>
+            <a:ext cx="4069080" cy="365760"/>
           </a:xfrm>
           <a:prstGeom prst="rect">
             <a:avLst/>
@@ -3530,13 +3792,341 @@
           <a:lstStyle/>
           <a:p>
             <a:r>
-              <a:rPr sz="4000" b="1">
+              <a:rPr sz="1300" b="1">
                 <a:solidFill>
                   <a:srgbClr val="FFFFFF"/>
                 </a:solidFill>
                 <a:latin typeface="맑은 고딕"/>
               </a:rPr>
-              <a:t>실데이터 분석 — 이론을 데이터에 적용</a:t>
+              <a:t>핵심 수식</a:t>
+            </a:r>
+          </a:p>
+        </p:txBody>
+      </p:sp>
+      <p:sp>
+        <p:nvSpPr>
+          <p:cNvPr id="9" name="TextBox 8"/>
+          <p:cNvSpPr txBox="1"/>
+          <p:nvPr/>
+        </p:nvSpPr>
+        <p:spPr>
+          <a:xfrm>
+            <a:off x="7498080" y="2057400"/>
+            <a:ext cx="3977640" cy="4023360"/>
+          </a:xfrm>
+          <a:prstGeom prst="rect">
+            <a:avLst/>
+          </a:prstGeom>
+          <a:noFill/>
+        </p:spPr>
+        <p:txBody>
+          <a:bodyPr wrap="square">
+            <a:spAutoFit/>
+          </a:bodyPr>
+          <a:lstStyle/>
+          <a:p>
+            <a:pPr>
+              <a:spcAft>
+                <a:spcPts val="200"/>
+              </a:spcAft>
+            </a:pPr>
+            <a:r>
+              <a:rPr sz="1150" b="1">
+                <a:solidFill>
+                  <a:srgbClr val="833AB4"/>
+                </a:solidFill>
+                <a:latin typeface="맑은 고딕"/>
+              </a:rPr>
+              <a:t>자기상관함수</a:t>
+            </a:r>
+          </a:p>
+          <a:p>
+            <a:pPr>
+              <a:spcAft>
+                <a:spcPts val="1200"/>
+              </a:spcAft>
+            </a:pPr>
+            <a:r>
+              <a:rPr sz="1350" b="0">
+                <a:solidFill>
+                  <a:srgbClr val="222222"/>
+                </a:solidFill>
+                <a:latin typeface="Consolas"/>
+              </a:rPr>
+              <a:t>ρ(k) = γ(k) / γ(0)</a:t>
+            </a:r>
+          </a:p>
+          <a:p>
+            <a:pPr>
+              <a:spcAft>
+                <a:spcPts val="200"/>
+              </a:spcAft>
+            </a:pPr>
+            <a:r>
+              <a:rPr sz="1150" b="1">
+                <a:solidFill>
+                  <a:srgbClr val="833AB4"/>
+                </a:solidFill>
+                <a:latin typeface="맑은 고딕"/>
+              </a:rPr>
+              <a:t>표본 ACF 한계</a:t>
+            </a:r>
+          </a:p>
+          <a:p>
+            <a:pPr>
+              <a:spcAft>
+                <a:spcPts val="1200"/>
+              </a:spcAft>
+            </a:pPr>
+            <a:r>
+              <a:rPr sz="1350" b="0">
+                <a:solidFill>
+                  <a:srgbClr val="222222"/>
+                </a:solidFill>
+                <a:latin typeface="Consolas"/>
+              </a:rPr>
+              <a:t>±1.96 / √n  (n=161 → ±0.155)</a:t>
+            </a:r>
+          </a:p>
+          <a:p>
+            <a:pPr>
+              <a:spcAft>
+                <a:spcPts val="200"/>
+              </a:spcAft>
+            </a:pPr>
+            <a:r>
+              <a:rPr sz="1150" b="1">
+                <a:solidFill>
+                  <a:srgbClr val="833AB4"/>
+                </a:solidFill>
+                <a:latin typeface="맑은 고딕"/>
+              </a:rPr>
+              <a:t>백색잡음</a:t>
+            </a:r>
+          </a:p>
+          <a:p>
+            <a:pPr>
+              <a:spcAft>
+                <a:spcPts val="1200"/>
+              </a:spcAft>
+            </a:pPr>
+            <a:r>
+              <a:rPr sz="1350" b="0">
+                <a:solidFill>
+                  <a:srgbClr val="222222"/>
+                </a:solidFill>
+                <a:latin typeface="Consolas"/>
+              </a:rPr>
+              <a:t>ε_t ~ WN(0, σ²)</a:t>
+            </a:r>
+          </a:p>
+          <a:p>
+            <a:pPr>
+              <a:spcAft>
+                <a:spcPts val="200"/>
+              </a:spcAft>
+            </a:pPr>
+            <a:r>
+              <a:rPr sz="1150" b="1">
+                <a:solidFill>
+                  <a:srgbClr val="833AB4"/>
+                </a:solidFill>
+                <a:latin typeface="맑은 고딕"/>
+              </a:rPr>
+              <a:t>AR(p)</a:t>
+            </a:r>
+          </a:p>
+          <a:p>
+            <a:pPr>
+              <a:spcAft>
+                <a:spcPts val="1200"/>
+              </a:spcAft>
+            </a:pPr>
+            <a:r>
+              <a:rPr sz="1350" b="0">
+                <a:solidFill>
+                  <a:srgbClr val="222222"/>
+                </a:solidFill>
+                <a:latin typeface="Consolas"/>
+              </a:rPr>
+              <a:t>X_t = Σ φ_i X_{t-i} + ε_t</a:t>
+            </a:r>
+          </a:p>
+          <a:p>
+            <a:pPr>
+              <a:spcAft>
+                <a:spcPts val="200"/>
+              </a:spcAft>
+            </a:pPr>
+            <a:r>
+              <a:rPr sz="1150" b="1">
+                <a:solidFill>
+                  <a:srgbClr val="833AB4"/>
+                </a:solidFill>
+                <a:latin typeface="맑은 고딕"/>
+              </a:rPr>
+              <a:t>MA(q)</a:t>
+            </a:r>
+          </a:p>
+          <a:p>
+            <a:pPr>
+              <a:spcAft>
+                <a:spcPts val="1200"/>
+              </a:spcAft>
+            </a:pPr>
+            <a:r>
+              <a:rPr sz="1350" b="0">
+                <a:solidFill>
+                  <a:srgbClr val="222222"/>
+                </a:solidFill>
+                <a:latin typeface="Consolas"/>
+              </a:rPr>
+              <a:t>X_t = ε_t + Σ θ_j ε_{t-j}</a:t>
+            </a:r>
+          </a:p>
+          <a:p>
+            <a:pPr>
+              <a:spcAft>
+                <a:spcPts val="200"/>
+              </a:spcAft>
+            </a:pPr>
+            <a:r>
+              <a:rPr sz="1150" b="1">
+                <a:solidFill>
+                  <a:srgbClr val="833AB4"/>
+                </a:solidFill>
+                <a:latin typeface="맑은 고딕"/>
+              </a:rPr>
+              <a:t>ARIMA</a:t>
+            </a:r>
+          </a:p>
+          <a:p>
+            <a:pPr>
+              <a:spcAft>
+                <a:spcPts val="1200"/>
+              </a:spcAft>
+            </a:pPr>
+            <a:r>
+              <a:rPr sz="1350" b="0">
+                <a:solidFill>
+                  <a:srgbClr val="222222"/>
+                </a:solidFill>
+                <a:latin typeface="Consolas"/>
+              </a:rPr>
+              <a:t>∇^d X_t 가 ARMA(p,q)</a:t>
+            </a:r>
+          </a:p>
+        </p:txBody>
+      </p:sp>
+      <p:sp>
+        <p:nvSpPr>
+          <p:cNvPr id="10" name="Rectangle 9"/>
+          <p:cNvSpPr/>
+          <p:nvPr/>
+        </p:nvSpPr>
+        <p:spPr>
+          <a:xfrm>
+            <a:off x="0" y="6565392"/>
+            <a:ext cx="12191695" cy="292608"/>
+          </a:xfrm>
+          <a:prstGeom prst="rect">
+            <a:avLst/>
+          </a:prstGeom>
+          <a:solidFill>
+            <a:srgbClr val="F2F2F4"/>
+          </a:solidFill>
+          <a:ln>
+            <a:noFill/>
+          </a:ln>
+          <a:effectLst/>
+        </p:spPr>
+        <p:style>
+          <a:lnRef idx="1">
+            <a:schemeClr val="accent1"/>
+          </a:lnRef>
+          <a:fillRef idx="3">
+            <a:schemeClr val="accent1"/>
+          </a:fillRef>
+          <a:effectRef idx="2">
+            <a:schemeClr val="accent1"/>
+          </a:effectRef>
+          <a:fontRef idx="minor">
+            <a:schemeClr val="lt1"/>
+          </a:fontRef>
+        </p:style>
+        <p:txBody>
+          <a:bodyPr rtlCol="0" anchor="ctr"/>
+          <a:lstStyle/>
+          <a:p>
+            <a:pPr algn="ctr"/>
+          </a:p>
+        </p:txBody>
+      </p:sp>
+      <p:sp>
+        <p:nvSpPr>
+          <p:cNvPr id="11" name="TextBox 10"/>
+          <p:cNvSpPr txBox="1"/>
+          <p:nvPr/>
+        </p:nvSpPr>
+        <p:spPr>
+          <a:xfrm>
+            <a:off x="365760" y="6547104"/>
+            <a:ext cx="7315200" cy="274320"/>
+          </a:xfrm>
+          <a:prstGeom prst="rect">
+            <a:avLst/>
+          </a:prstGeom>
+          <a:noFill/>
+        </p:spPr>
+        <p:txBody>
+          <a:bodyPr wrap="square">
+            <a:spAutoFit/>
+          </a:bodyPr>
+          <a:lstStyle/>
+          <a:p>
+            <a:r>
+              <a:rPr sz="900" b="0">
+                <a:solidFill>
+                  <a:srgbClr val="6B6B6B"/>
+                </a:solidFill>
+                <a:latin typeface="맑은 고딕"/>
+              </a:rPr>
+              <a:t>시계열 데이터 분석 · 한국 해시태그 트렌드 · 기준일 2026-06-11</a:t>
+            </a:r>
+          </a:p>
+        </p:txBody>
+      </p:sp>
+      <p:sp>
+        <p:nvSpPr>
+          <p:cNvPr id="12" name="TextBox 11"/>
+          <p:cNvSpPr txBox="1"/>
+          <p:nvPr/>
+        </p:nvSpPr>
+        <p:spPr>
+          <a:xfrm>
+            <a:off x="11094415" y="6547104"/>
+            <a:ext cx="822960" cy="274320"/>
+          </a:xfrm>
+          <a:prstGeom prst="rect">
+            <a:avLst/>
+          </a:prstGeom>
+          <a:noFill/>
+        </p:spPr>
+        <p:txBody>
+          <a:bodyPr wrap="square">
+            <a:spAutoFit/>
+          </a:bodyPr>
+          <a:lstStyle/>
+          <a:p>
+            <a:pPr algn="r"/>
+            <a:r>
+              <a:rPr sz="900" b="0">
+                <a:solidFill>
+                  <a:srgbClr val="6B6B6B"/>
+                </a:solidFill>
+                <a:latin typeface="맑은 고딕"/>
+              </a:rPr>
+              <a:t>8</a:t>
             </a:r>
           </a:p>
         </p:txBody>
@@ -3567,8 +4157,52 @@
         </p:nvSpPr>
         <p:spPr>
           <a:xfrm>
-            <a:off x="365760" y="384048"/>
-            <a:ext cx="164592" cy="502920"/>
+            <a:off x="0" y="0"/>
+            <a:ext cx="12191695" cy="6858000"/>
+          </a:xfrm>
+          <a:prstGeom prst="rect">
+            <a:avLst/>
+          </a:prstGeom>
+          <a:solidFill>
+            <a:srgbClr val="222222"/>
+          </a:solidFill>
+          <a:ln>
+            <a:noFill/>
+          </a:ln>
+          <a:effectLst/>
+        </p:spPr>
+        <p:style>
+          <a:lnRef idx="1">
+            <a:schemeClr val="accent1"/>
+          </a:lnRef>
+          <a:fillRef idx="3">
+            <a:schemeClr val="accent1"/>
+          </a:fillRef>
+          <a:effectRef idx="2">
+            <a:schemeClr val="accent1"/>
+          </a:effectRef>
+          <a:fontRef idx="minor">
+            <a:schemeClr val="lt1"/>
+          </a:fontRef>
+        </p:style>
+        <p:txBody>
+          <a:bodyPr rtlCol="0" anchor="ctr"/>
+          <a:lstStyle/>
+          <a:p>
+            <a:pPr algn="ctr"/>
+          </a:p>
+        </p:txBody>
+      </p:sp>
+      <p:sp>
+        <p:nvSpPr>
+          <p:cNvPr id="3" name="Rectangle 2"/>
+          <p:cNvSpPr/>
+          <p:nvPr/>
+        </p:nvSpPr>
+        <p:spPr>
+          <a:xfrm>
+            <a:off x="822960" y="2743200"/>
+            <a:ext cx="1280160" cy="109728"/>
           </a:xfrm>
           <a:prstGeom prst="rect">
             <a:avLst/>
@@ -3605,14 +4239,14 @@
       </p:sp>
       <p:sp>
         <p:nvSpPr>
-          <p:cNvPr id="3" name="TextBox 2"/>
-          <p:cNvSpPr txBox="1"/>
-          <p:nvPr/>
-        </p:nvSpPr>
-        <p:spPr>
-          <a:xfrm>
-            <a:off x="685800" y="256032"/>
-            <a:ext cx="10058400" cy="320040"/>
+          <p:cNvPr id="4" name="TextBox 3"/>
+          <p:cNvSpPr txBox="1"/>
+          <p:nvPr/>
+        </p:nvSpPr>
+        <p:spPr>
+          <a:xfrm>
+            <a:off x="822960" y="2011680"/>
+            <a:ext cx="10058400" cy="548640"/>
           </a:xfrm>
           <a:prstGeom prst="rect">
             <a:avLst/>
@@ -3626,27 +4260,27 @@
           <a:lstStyle/>
           <a:p>
             <a:r>
-              <a:rPr sz="1100" b="1">
-                <a:solidFill>
-                  <a:srgbClr val="833AB4"/>
+              <a:rPr sz="1400" b="1">
+                <a:solidFill>
+                  <a:srgbClr val="E1306C"/>
                 </a:solidFill>
                 <a:latin typeface="Segoe UI"/>
               </a:rPr>
-              <a:t>05 · RAW SIGNAL</a:t>
-            </a:r>
-          </a:p>
-        </p:txBody>
-      </p:sp>
-      <p:sp>
-        <p:nvSpPr>
-          <p:cNvPr id="4" name="TextBox 3"/>
-          <p:cNvSpPr txBox="1"/>
-          <p:nvPr/>
-        </p:nvSpPr>
-        <p:spPr>
-          <a:xfrm>
-            <a:off x="658368" y="457200"/>
-            <a:ext cx="10515600" cy="640080"/>
+              <a:t>PART 2 · ANALYSIS</a:t>
+            </a:r>
+          </a:p>
+        </p:txBody>
+      </p:sp>
+      <p:sp>
+        <p:nvSpPr>
+          <p:cNvPr id="5" name="TextBox 4"/>
+          <p:cNvSpPr txBox="1"/>
+          <p:nvPr/>
+        </p:nvSpPr>
+        <p:spPr>
+          <a:xfrm>
+            <a:off x="822960" y="3017520"/>
+            <a:ext cx="10515600" cy="1371600"/>
           </a:xfrm>
           <a:prstGeom prst="rect">
             <a:avLst/>
@@ -3660,313 +4294,13 @@
           <a:lstStyle/>
           <a:p>
             <a:r>
-              <a:rPr sz="2800" b="1">
-                <a:solidFill>
-                  <a:srgbClr val="222222"/>
-                </a:solidFill>
-                <a:latin typeface="맑은 고딕"/>
-              </a:rPr>
-              <a:t>원시 시계열 관찰</a:t>
-            </a:r>
-          </a:p>
-        </p:txBody>
-      </p:sp>
-      <p:pic>
-        <p:nvPicPr>
-          <p:cNvPr id="5" name="Picture 4" descr="01_overview.png"/>
-          <p:cNvPicPr>
-            <a:picLocks noChangeAspect="1"/>
-          </p:cNvPicPr>
-          <p:nvPr/>
-        </p:nvPicPr>
-        <p:blipFill>
-          <a:blip r:embed="rId2"/>
-          <a:stretch>
-            <a:fillRect/>
-          </a:stretch>
-        </p:blipFill>
-        <p:spPr>
-          <a:xfrm>
-            <a:off x="502920" y="1325880"/>
-            <a:ext cx="7772400" cy="3911936"/>
-          </a:xfrm>
-          <a:prstGeom prst="rect">
-            <a:avLst/>
-          </a:prstGeom>
-        </p:spPr>
-      </p:pic>
-      <p:sp>
-        <p:nvSpPr>
-          <p:cNvPr id="6" name="Rectangle 5"/>
-          <p:cNvSpPr/>
-          <p:nvPr/>
-        </p:nvSpPr>
-        <p:spPr>
-          <a:xfrm>
-            <a:off x="8458200" y="1325880"/>
-            <a:ext cx="3246120" cy="4937760"/>
-          </a:xfrm>
-          <a:prstGeom prst="rect">
-            <a:avLst/>
-          </a:prstGeom>
-          <a:solidFill>
-            <a:srgbClr val="F2F2F4"/>
-          </a:solidFill>
-          <a:ln>
-            <a:noFill/>
-          </a:ln>
-          <a:effectLst/>
-        </p:spPr>
-        <p:style>
-          <a:lnRef idx="1">
-            <a:schemeClr val="accent1"/>
-          </a:lnRef>
-          <a:fillRef idx="3">
-            <a:schemeClr val="accent1"/>
-          </a:fillRef>
-          <a:effectRef idx="2">
-            <a:schemeClr val="accent1"/>
-          </a:effectRef>
-          <a:fontRef idx="minor">
-            <a:schemeClr val="lt1"/>
-          </a:fontRef>
-        </p:style>
-        <p:txBody>
-          <a:bodyPr rtlCol="0" anchor="ctr"/>
-          <a:lstStyle/>
-          <a:p>
-            <a:pPr algn="ctr"/>
-          </a:p>
-        </p:txBody>
-      </p:sp>
-      <p:sp>
-        <p:nvSpPr>
-          <p:cNvPr id="7" name="TextBox 6"/>
-          <p:cNvSpPr txBox="1"/>
-          <p:nvPr/>
-        </p:nvSpPr>
-        <p:spPr>
-          <a:xfrm>
-            <a:off x="8659368" y="1508760"/>
-            <a:ext cx="2880360" cy="4663440"/>
-          </a:xfrm>
-          <a:prstGeom prst="rect">
-            <a:avLst/>
-          </a:prstGeom>
-          <a:noFill/>
-        </p:spPr>
-        <p:txBody>
-          <a:bodyPr wrap="square">
-            <a:spAutoFit/>
-          </a:bodyPr>
-          <a:lstStyle/>
-          <a:p>
-            <a:pPr>
-              <a:spcAft>
-                <a:spcPts val="800"/>
-              </a:spcAft>
-            </a:pPr>
-            <a:r>
-              <a:rPr sz="1300" b="1">
-                <a:solidFill>
-                  <a:srgbClr val="833AB4"/>
-                </a:solidFill>
-                <a:latin typeface="맑은 고딕"/>
-              </a:rPr>
-              <a:t>읽는 법</a:t>
-            </a:r>
-          </a:p>
-          <a:p>
-            <a:pPr>
-              <a:spcAft>
-                <a:spcPts val="1000"/>
-              </a:spcAft>
-            </a:pPr>
-            <a:r>
-              <a:rPr sz="1250" b="0">
-                <a:solidFill>
-                  <a:srgbClr val="222222"/>
-                </a:solidFill>
-                <a:latin typeface="맑은 고딕"/>
-              </a:rPr>
-              <a:t>• 9개 태그의 일별 관심도 원계열</a:t>
-            </a:r>
-          </a:p>
-          <a:p>
-            <a:pPr>
-              <a:spcAft>
-                <a:spcPts val="1000"/>
-              </a:spcAft>
-            </a:pPr>
-            <a:r>
-              <a:rPr sz="1250" b="0">
-                <a:solidFill>
-                  <a:srgbClr val="222222"/>
-                </a:solidFill>
-                <a:latin typeface="맑은 고딕"/>
-              </a:rPr>
-              <a:t>• 톱니 모양 = 주 7일 계절성</a:t>
-            </a:r>
-          </a:p>
-          <a:p>
-            <a:pPr>
-              <a:spcAft>
-                <a:spcPts val="1000"/>
-              </a:spcAft>
-            </a:pPr>
-            <a:r>
-              <a:rPr sz="1250" b="0">
-                <a:solidFill>
-                  <a:srgbClr val="222222"/>
-                </a:solidFill>
-                <a:latin typeface="맑은 고딕"/>
-              </a:rPr>
-              <a:t>• #캠핑·#피크닉: 봄에 큰 산(계절 추세)</a:t>
-            </a:r>
-          </a:p>
-          <a:p>
-            <a:pPr>
-              <a:spcAft>
-                <a:spcPts val="1000"/>
-              </a:spcAft>
-            </a:pPr>
-            <a:r>
-              <a:rPr sz="1250" b="0">
-                <a:solidFill>
-                  <a:srgbClr val="222222"/>
-                </a:solidFill>
-                <a:latin typeface="맑은 고딕"/>
-              </a:rPr>
-              <a:t>• #카페: 1월 고점 후 하락</a:t>
-            </a:r>
-          </a:p>
-          <a:p>
-            <a:pPr>
-              <a:spcAft>
-                <a:spcPts val="1000"/>
-              </a:spcAft>
-            </a:pPr>
-            <a:r>
-              <a:rPr sz="1250" b="0">
-                <a:solidFill>
-                  <a:srgbClr val="222222"/>
-                </a:solidFill>
-                <a:latin typeface="맑은 고딕"/>
-              </a:rPr>
-              <a:t>• 5월 중순 #등산 스파이크 = 연휴 외생 이벤트</a:t>
-            </a:r>
-          </a:p>
-        </p:txBody>
-      </p:sp>
-      <p:sp>
-        <p:nvSpPr>
-          <p:cNvPr id="8" name="Rectangle 7"/>
-          <p:cNvSpPr/>
-          <p:nvPr/>
-        </p:nvSpPr>
-        <p:spPr>
-          <a:xfrm>
-            <a:off x="0" y="6565392"/>
-            <a:ext cx="12191695" cy="292608"/>
-          </a:xfrm>
-          <a:prstGeom prst="rect">
-            <a:avLst/>
-          </a:prstGeom>
-          <a:solidFill>
-            <a:srgbClr val="F2F2F4"/>
-          </a:solidFill>
-          <a:ln>
-            <a:noFill/>
-          </a:ln>
-          <a:effectLst/>
-        </p:spPr>
-        <p:style>
-          <a:lnRef idx="1">
-            <a:schemeClr val="accent1"/>
-          </a:lnRef>
-          <a:fillRef idx="3">
-            <a:schemeClr val="accent1"/>
-          </a:fillRef>
-          <a:effectRef idx="2">
-            <a:schemeClr val="accent1"/>
-          </a:effectRef>
-          <a:fontRef idx="minor">
-            <a:schemeClr val="lt1"/>
-          </a:fontRef>
-        </p:style>
-        <p:txBody>
-          <a:bodyPr rtlCol="0" anchor="ctr"/>
-          <a:lstStyle/>
-          <a:p>
-            <a:pPr algn="ctr"/>
-          </a:p>
-        </p:txBody>
-      </p:sp>
-      <p:sp>
-        <p:nvSpPr>
-          <p:cNvPr id="9" name="TextBox 8"/>
-          <p:cNvSpPr txBox="1"/>
-          <p:nvPr/>
-        </p:nvSpPr>
-        <p:spPr>
-          <a:xfrm>
-            <a:off x="365760" y="6547104"/>
-            <a:ext cx="7315200" cy="274320"/>
-          </a:xfrm>
-          <a:prstGeom prst="rect">
-            <a:avLst/>
-          </a:prstGeom>
-          <a:noFill/>
-        </p:spPr>
-        <p:txBody>
-          <a:bodyPr wrap="square">
-            <a:spAutoFit/>
-          </a:bodyPr>
-          <a:lstStyle/>
-          <a:p>
-            <a:r>
-              <a:rPr sz="900" b="0">
-                <a:solidFill>
-                  <a:srgbClr val="6B6B6B"/>
-                </a:solidFill>
-                <a:latin typeface="맑은 고딕"/>
-              </a:rPr>
-              <a:t>시계열 데이터 분석 · 한국 해시태그 트렌드 · 기준일 2026-06-11</a:t>
-            </a:r>
-          </a:p>
-        </p:txBody>
-      </p:sp>
-      <p:sp>
-        <p:nvSpPr>
-          <p:cNvPr id="10" name="TextBox 9"/>
-          <p:cNvSpPr txBox="1"/>
-          <p:nvPr/>
-        </p:nvSpPr>
-        <p:spPr>
-          <a:xfrm>
-            <a:off x="11094415" y="6547104"/>
-            <a:ext cx="822960" cy="274320"/>
-          </a:xfrm>
-          <a:prstGeom prst="rect">
-            <a:avLst/>
-          </a:prstGeom>
-          <a:noFill/>
-        </p:spPr>
-        <p:txBody>
-          <a:bodyPr wrap="square">
-            <a:spAutoFit/>
-          </a:bodyPr>
-          <a:lstStyle/>
-          <a:p>
-            <a:pPr algn="r"/>
-            <a:r>
-              <a:rPr sz="900" b="0">
-                <a:solidFill>
-                  <a:srgbClr val="6B6B6B"/>
-                </a:solidFill>
-                <a:latin typeface="맑은 고딕"/>
-              </a:rPr>
-              <a:t>8</a:t>
+              <a:rPr sz="4000" b="1">
+                <a:solidFill>
+                  <a:srgbClr val="FFFFFF"/>
+                </a:solidFill>
+                <a:latin typeface="맑은 고딕"/>
+              </a:rPr>
+              <a:t>실데이터 분석 — 이론을 데이터에 적용</a:t>
             </a:r>
           </a:p>
         </p:txBody>
@@ -4062,7 +4396,7 @@
                 </a:solidFill>
                 <a:latin typeface="Segoe UI"/>
               </a:rPr>
-              <a:t>05 · SMOOTHING</a:t>
+              <a:t>05 · RAW SIGNAL</a:t>
             </a:r>
           </a:p>
         </p:txBody>
@@ -4096,14 +4430,14 @@
                 </a:solidFill>
                 <a:latin typeface="맑은 고딕"/>
               </a:rPr>
-              <a:t>이동평균 평활화</a:t>
+              <a:t>원시 시계열 관찰</a:t>
             </a:r>
           </a:p>
         </p:txBody>
       </p:sp>
       <p:pic>
         <p:nvPicPr>
-          <p:cNvPr id="5" name="Picture 4" descr="02_moving_average.png"/>
+          <p:cNvPr id="5" name="Picture 4" descr="01_overview.png"/>
           <p:cNvPicPr>
             <a:picLocks noChangeAspect="1"/>
           </p:cNvPicPr>
@@ -4219,7 +4553,7 @@
                 </a:solidFill>
                 <a:latin typeface="맑은 고딕"/>
               </a:rPr>
-              <a:t>• 포커스: #등산 (6월 모멘텀 1위)</a:t>
+              <a:t>• 9개 태그의 일별 관심도 원계열</a:t>
             </a:r>
           </a:p>
           <a:p>
@@ -4235,7 +4569,7 @@
                 </a:solidFill>
                 <a:latin typeface="맑은 고딕"/>
               </a:rPr>
-              <a:t>• 회색 = 원계열(노이즈)</a:t>
+              <a:t>• 톱니 모양 = 주 7일 계절성</a:t>
             </a:r>
           </a:p>
           <a:p>
@@ -4251,7 +4585,7 @@
                 </a:solidFill>
                 <a:latin typeface="맑은 고딕"/>
               </a:rPr>
-              <a:t>• 7일 MA = 주간 주기 상쇄</a:t>
+              <a:t>• #캠핑·#피크닉: 봄에 큰 산(계절 추세)</a:t>
             </a:r>
           </a:p>
           <a:p>
@@ -4267,7 +4601,7 @@
                 </a:solidFill>
                 <a:latin typeface="맑은 고딕"/>
               </a:rPr>
-              <a:t>• 28일 MA = 장기 추세만</a:t>
+              <a:t>• #카페: 1월 고점 후 하락</a:t>
             </a:r>
           </a:p>
           <a:p>
@@ -4283,7 +4617,7 @@
                 </a:solidFill>
                 <a:latin typeface="맑은 고딕"/>
               </a:rPr>
-              <a:t>• 1~5월 꾸준한 우상향 확인</a:t>
+              <a:t>• 5월 중순 #등산 스파이크 = 연휴 외생 이벤트</a:t>
             </a:r>
           </a:p>
         </p:txBody>
@@ -4492,7 +4826,7 @@
                 </a:solidFill>
                 <a:latin typeface="Segoe UI"/>
               </a:rPr>
-              <a:t>05 · STATIONARITY</a:t>
+              <a:t>05 · SMOOTHING</a:t>
             </a:r>
           </a:p>
         </p:txBody>
@@ -4526,14 +4860,14 @@
                 </a:solidFill>
                 <a:latin typeface="맑은 고딕"/>
               </a:rPr>
-              <a:t>정상성 진단과 차분</a:t>
+              <a:t>이동평균 평활화</a:t>
             </a:r>
           </a:p>
         </p:txBody>
       </p:sp>
       <p:pic>
         <p:nvPicPr>
-          <p:cNvPr id="5" name="Picture 4" descr="03_stationarity.png"/>
+          <p:cNvPr id="5" name="Picture 4" descr="02_moving_average.png"/>
           <p:cNvPicPr>
             <a:picLocks noChangeAspect="1"/>
           </p:cNvPicPr>
@@ -4548,7 +4882,7 @@
         <p:spPr>
           <a:xfrm>
             <a:off x="502920" y="1325880"/>
-            <a:ext cx="7772400" cy="4684029"/>
+            <a:ext cx="7772400" cy="3911936"/>
           </a:xfrm>
           <a:prstGeom prst="rect">
             <a:avLst/>
@@ -4649,7 +4983,7 @@
                 </a:solidFill>
                 <a:latin typeface="맑은 고딕"/>
               </a:rPr>
-              <a:t>• 위: 롤링 평균이 계속 상승 → 평균 비불변 = 비정상</a:t>
+              <a:t>• 포커스: #등산 (6월 모멘텀 1위)</a:t>
             </a:r>
           </a:p>
           <a:p>
@@ -4665,7 +4999,7 @@
                 </a:solidFill>
                 <a:latin typeface="맑은 고딕"/>
               </a:rPr>
-              <a:t>• 롤링 표준편차도 5월에 점프</a:t>
+              <a:t>• 회색 = 원계열(노이즈)</a:t>
             </a:r>
           </a:p>
           <a:p>
@@ -4681,7 +5015,7 @@
                 </a:solidFill>
                 <a:latin typeface="맑은 고딕"/>
               </a:rPr>
-              <a:t>• 아래: 1차 차분 후 평균이 0에 고정</a:t>
+              <a:t>• 7일 MA = 주간 주기 상쇄</a:t>
             </a:r>
           </a:p>
           <a:p>
@@ -4697,7 +5031,23 @@
                 </a:solidFill>
                 <a:latin typeface="맑은 고딕"/>
               </a:rPr>
-              <a:t>• 차분으로 (약)정상성 확보 → ARIMA의 d=1에 해당</a:t>
+              <a:t>• 28일 MA = 장기 추세만</a:t>
+            </a:r>
+          </a:p>
+          <a:p>
+            <a:pPr>
+              <a:spcAft>
+                <a:spcPts val="1000"/>
+              </a:spcAft>
+            </a:pPr>
+            <a:r>
+              <a:rPr sz="1250" b="0">
+                <a:solidFill>
+                  <a:srgbClr val="222222"/>
+                </a:solidFill>
+                <a:latin typeface="맑은 고딕"/>
+              </a:rPr>
+              <a:t>• 1~5월 꾸준한 우상향 확인</a:t>
             </a:r>
           </a:p>
         </p:txBody>
@@ -4906,7 +5256,7 @@
                 </a:solidFill>
                 <a:latin typeface="Segoe UI"/>
               </a:rPr>
-              <a:t>05 · ACF</a:t>
+              <a:t>05 · STATIONARITY</a:t>
             </a:r>
           </a:p>
         </p:txBody>
@@ -4940,14 +5290,14 @@
                 </a:solidFill>
                 <a:latin typeface="맑은 고딕"/>
               </a:rPr>
-              <a:t>자기상관함수(ACF)</a:t>
+              <a:t>정상성 진단과 차분</a:t>
             </a:r>
           </a:p>
         </p:txBody>
       </p:sp>
       <p:pic>
         <p:nvPicPr>
-          <p:cNvPr id="5" name="Picture 4" descr="04_acf.png"/>
+          <p:cNvPr id="5" name="Picture 4" descr="03_stationarity.png"/>
           <p:cNvPicPr>
             <a:picLocks noChangeAspect="1"/>
           </p:cNvPicPr>
@@ -4962,7 +5312,7 @@
         <p:spPr>
           <a:xfrm>
             <a:off x="502920" y="1325880"/>
-            <a:ext cx="7772400" cy="3505301"/>
+            <a:ext cx="7772400" cy="4684029"/>
           </a:xfrm>
           <a:prstGeom prst="rect">
             <a:avLst/>
@@ -5063,7 +5413,7 @@
                 </a:solidFill>
                 <a:latin typeface="맑은 고딕"/>
               </a:rPr>
-              <a:t>• 왼쪽(원계열): 천천히 감쇠 → 추세 지배 = 비정상 신호</a:t>
+              <a:t>• 위: 롤링 평균이 계속 상승 → 평균 비불변 = 비정상</a:t>
             </a:r>
           </a:p>
           <a:p>
@@ -5079,7 +5429,7 @@
                 </a:solidFill>
                 <a:latin typeface="맑은 고딕"/>
               </a:rPr>
-              <a:t>• 오른쪽(차분): lag 7·14·21 스파이크 → 주간 계절성</a:t>
+              <a:t>• 롤링 표준편차도 5월에 점프</a:t>
             </a:r>
           </a:p>
           <a:p>
@@ -5095,7 +5445,7 @@
                 </a:solidFill>
                 <a:latin typeface="맑은 고딕"/>
               </a:rPr>
-              <a:t>• 점선 = ±1.96/√n 백색잡음 한계</a:t>
+              <a:t>• 아래: 1차 차분 후 평균이 0에 고정</a:t>
             </a:r>
           </a:p>
           <a:p>
@@ -5111,7 +5461,7 @@
                 </a:solidFill>
                 <a:latin typeface="맑은 고딕"/>
               </a:rPr>
-              <a:t>• 이론 그대로: 차분이 추세를 지우자 주기가 드러남</a:t>
+              <a:t>• 차분으로 (약)정상성 확보 → ARIMA의 d=1에 해당</a:t>
             </a:r>
           </a:p>
         </p:txBody>
@@ -5320,7 +5670,7 @@
                 </a:solidFill>
                 <a:latin typeface="Segoe UI"/>
               </a:rPr>
-              <a:t>06 · DECOMPOSITION</a:t>
+              <a:t>05 · ACF</a:t>
             </a:r>
           </a:p>
         </p:txBody>
@@ -5354,14 +5704,14 @@
                 </a:solidFill>
                 <a:latin typeface="맑은 고딕"/>
               </a:rPr>
-              <a:t>가법 분해</a:t>
+              <a:t>자기상관함수(ACF)</a:t>
             </a:r>
           </a:p>
         </p:txBody>
       </p:sp>
       <p:pic>
         <p:nvPicPr>
-          <p:cNvPr id="5" name="Picture 4" descr="05_decomposition.png"/>
+          <p:cNvPr id="5" name="Picture 4" descr="04_acf.png"/>
           <p:cNvPicPr>
             <a:picLocks noChangeAspect="1"/>
           </p:cNvPicPr>
@@ -5376,7 +5726,7 @@
         <p:spPr>
           <a:xfrm>
             <a:off x="502920" y="1325880"/>
-            <a:ext cx="7772400" cy="5039591"/>
+            <a:ext cx="7772400" cy="3505301"/>
           </a:xfrm>
           <a:prstGeom prst="rect">
             <a:avLst/>
@@ -5477,7 +5827,7 @@
                 </a:solidFill>
                 <a:latin typeface="맑은 고딕"/>
               </a:rPr>
-              <a:t>• X = 추세 + 계절 + 잔차로 분리</a:t>
+              <a:t>• 왼쪽(원계열): 천천히 감쇠 → 추세 지배 = 비정상 신호</a:t>
             </a:r>
           </a:p>
           <a:p>
@@ -5493,7 +5843,7 @@
                 </a:solidFill>
                 <a:latin typeface="맑은 고딕"/>
               </a:rPr>
-              <a:t>• 추세: 1월~5월 +60% 수준 상승</a:t>
+              <a:t>• 오른쪽(차분): lag 7·14·21 스파이크 → 주간 계절성</a:t>
             </a:r>
           </a:p>
           <a:p>
@@ -5509,7 +5859,7 @@
                 </a:solidFill>
                 <a:latin typeface="맑은 고딕"/>
               </a:rPr>
-              <a:t>• 계절: 주말 양(+), 주중 음(−) 규칙 진동</a:t>
+              <a:t>• 점선 = ±1.96/√n 백색잡음 한계</a:t>
             </a:r>
           </a:p>
           <a:p>
@@ -5525,7 +5875,7 @@
                 </a:solidFill>
                 <a:latin typeface="맑은 고딕"/>
               </a:rPr>
-              <a:t>• 잔차: 5월 연휴 스파이크 외엔 백색잡음에 가까움</a:t>
+              <a:t>• 이론 그대로: 차분이 추세를 지우자 주기가 드러남</a:t>
             </a:r>
           </a:p>
         </p:txBody>
@@ -5734,7 +6084,7 @@
                 </a:solidFill>
                 <a:latin typeface="Segoe UI"/>
               </a:rPr>
-              <a:t>06 · SEASONALITY</a:t>
+              <a:t>06 · DECOMPOSITION</a:t>
             </a:r>
           </a:p>
         </p:txBody>
@@ -5768,14 +6118,14 @@
                 </a:solidFill>
                 <a:latin typeface="맑은 고딕"/>
               </a:rPr>
-              <a:t>주간 계절성 프로파일</a:t>
+              <a:t>가법 분해</a:t>
             </a:r>
           </a:p>
         </p:txBody>
       </p:sp>
       <p:pic>
         <p:nvPicPr>
-          <p:cNvPr id="5" name="Picture 4" descr="06_weekly_profile.png"/>
+          <p:cNvPr id="5" name="Picture 4" descr="05_decomposition.png"/>
           <p:cNvPicPr>
             <a:picLocks noChangeAspect="1"/>
           </p:cNvPicPr>
@@ -5790,7 +6140,7 @@
         <p:spPr>
           <a:xfrm>
             <a:off x="502920" y="1325880"/>
-            <a:ext cx="7772400" cy="3911936"/>
+            <a:ext cx="7772400" cy="5039591"/>
           </a:xfrm>
           <a:prstGeom prst="rect">
             <a:avLst/>
@@ -5891,7 +6241,7 @@
                 </a:solidFill>
                 <a:latin typeface="맑은 고딕"/>
               </a:rPr>
-              <a:t>• 요일 평균을 자기 평균=100으로 정규화</a:t>
+              <a:t>• X = 추세 + 계절 + 잔차로 분리</a:t>
             </a:r>
           </a:p>
           <a:p>
@@ -5907,7 +6257,7 @@
                 </a:solidFill>
                 <a:latin typeface="맑은 고딕"/>
               </a:rPr>
-              <a:t>• #등산·#피크닉·#캠핑: 주말(토) 피크</a:t>
+              <a:t>• 추세: 1월~5월 +60% 수준 상승</a:t>
             </a:r>
           </a:p>
           <a:p>
@@ -5923,7 +6273,7 @@
                 </a:solidFill>
                 <a:latin typeface="맑은 고딕"/>
               </a:rPr>
-              <a:t>• #다이어트: 월요일 피크 — '월요일 결심' 효과</a:t>
+              <a:t>• 계절: 주말 양(+), 주중 음(−) 규칙 진동</a:t>
             </a:r>
           </a:p>
           <a:p>
@@ -5939,7 +6289,7 @@
                 </a:solidFill>
                 <a:latin typeface="맑은 고딕"/>
               </a:rPr>
-              <a:t>• 게시 타이밍 설계의 직접 근거</a:t>
+              <a:t>• 잔차: 5월 연휴 스파이크 외엔 백색잡음에 가까움</a:t>
             </a:r>
           </a:p>
         </p:txBody>
@@ -6148,7 +6498,7 @@
                 </a:solidFill>
                 <a:latin typeface="Segoe UI"/>
               </a:rPr>
-              <a:t>06 · MOMENTUM</a:t>
+              <a:t>06 · SEASONALITY</a:t>
             </a:r>
           </a:p>
         </p:txBody>
@@ -6182,14 +6532,14 @@
                 </a:solidFill>
                 <a:latin typeface="맑은 고딕"/>
               </a:rPr>
-              <a:t>성장 모멘텀</a:t>
+              <a:t>주간 계절성 프로파일</a:t>
             </a:r>
           </a:p>
         </p:txBody>
       </p:sp>
       <p:pic>
         <p:nvPicPr>
-          <p:cNvPr id="5" name="Picture 4" descr="07_growth.png"/>
+          <p:cNvPr id="5" name="Picture 4" descr="06_weekly_profile.png"/>
           <p:cNvPicPr>
             <a:picLocks noChangeAspect="1"/>
           </p:cNvPicPr>
@@ -6305,7 +6655,7 @@
                 </a:solidFill>
                 <a:latin typeface="맑은 고딕"/>
               </a:rPr>
-              <a:t>• 1월 첫 주=100 지수화</a:t>
+              <a:t>• 요일 평균을 자기 평균=100으로 정규화</a:t>
             </a:r>
           </a:p>
           <a:p>
@@ -6321,7 +6671,7 @@
                 </a:solidFill>
                 <a:latin typeface="맑은 고딕"/>
               </a:rPr>
-              <a:t>• 연초 대비: #피크닉 +70% · #캠핑 +61% · #등산 +48%</a:t>
+              <a:t>• #등산·#피크닉·#캠핑: 주말(토) 피크</a:t>
             </a:r>
           </a:p>
           <a:p>
@@ -6337,7 +6687,7 @@
                 </a:solidFill>
                 <a:latin typeface="맑은 고딕"/>
               </a:rPr>
-              <a:t>• 최근 30일: #등산 +7.9% · #클라이밍 +5.5% 만 상승</a:t>
+              <a:t>• #다이어트: 월요일 피크 — '월요일 결심' 효과</a:t>
             </a:r>
           </a:p>
           <a:p>
@@ -6353,7 +6703,7 @@
                 </a:solidFill>
                 <a:latin typeface="맑은 고딕"/>
               </a:rPr>
-              <a:t>• 봄 태그(피크닉·캠핑)는 5월 피크 통과 후 하락 전환</a:t>
+              <a:t>• 게시 타이밍 설계의 직접 근거</a:t>
             </a:r>
           </a:p>
         </p:txBody>
@@ -6562,7 +6912,7 @@
                 </a:solidFill>
                 <a:latin typeface="Segoe UI"/>
               </a:rPr>
-              <a:t>06 · FORECAST</a:t>
+              <a:t>06 · MOMENTUM</a:t>
             </a:r>
           </a:p>
         </p:txBody>
@@ -6596,14 +6946,14 @@
                 </a:solidFill>
                 <a:latin typeface="맑은 고딕"/>
               </a:rPr>
-              <a:t>14일 예측</a:t>
+              <a:t>성장 모멘텀</a:t>
             </a:r>
           </a:p>
         </p:txBody>
       </p:sp>
       <p:pic>
         <p:nvPicPr>
-          <p:cNvPr id="5" name="Picture 4" descr="08_forecast.png"/>
+          <p:cNvPr id="5" name="Picture 4" descr="07_growth.png"/>
           <p:cNvPicPr>
             <a:picLocks noChangeAspect="1"/>
           </p:cNvPicPr>
@@ -6618,7 +6968,7 @@
         <p:spPr>
           <a:xfrm>
             <a:off x="502920" y="1325880"/>
-            <a:ext cx="7772400" cy="3917125"/>
+            <a:ext cx="7772400" cy="3911936"/>
           </a:xfrm>
           <a:prstGeom prst="rect">
             <a:avLst/>
@@ -6719,7 +7069,7 @@
                 </a:solidFill>
                 <a:latin typeface="맑은 고딕"/>
               </a:rPr>
-              <a:t>• 모형: 선형추세 + 요일 계절성 (최근 8주 적합)</a:t>
+              <a:t>• 1월 첫 주=100 지수화</a:t>
             </a:r>
           </a:p>
           <a:p>
@@ -6735,7 +7085,7 @@
                 </a:solidFill>
                 <a:latin typeface="맑은 고딕"/>
               </a:rPr>
-              <a:t>• 점선 = 6/11~6/24 예측 경로</a:t>
+              <a:t>• 연초 대비: #피크닉 +70% · #캠핑 +61% · #등산 +48%</a:t>
             </a:r>
           </a:p>
           <a:p>
@@ -6751,7 +7101,7 @@
                 </a:solidFill>
                 <a:latin typeface="맑은 고딕"/>
               </a:rPr>
-              <a:t>• 음영 = 95% 예측구간 (잔차 분산 기반)</a:t>
+              <a:t>• 최근 30일: #등산 +7.9% · #클라이밍 +5.5% 만 상승</a:t>
             </a:r>
           </a:p>
           <a:p>
@@ -6767,7 +7117,7 @@
                 </a:solidFill>
                 <a:latin typeface="맑은 고딕"/>
               </a:rPr>
-              <a:t>• 주말마다 솟는 요일 패턴까지 재현</a:t>
+              <a:t>• 봄 태그(피크닉·캠핑)는 5월 피크 통과 후 하락 전환</a:t>
             </a:r>
           </a:p>
         </p:txBody>
@@ -6911,52 +7261,8 @@
         </p:nvSpPr>
         <p:spPr>
           <a:xfrm>
-            <a:off x="0" y="0"/>
-            <a:ext cx="12191695" cy="6858000"/>
-          </a:xfrm>
-          <a:prstGeom prst="rect">
-            <a:avLst/>
-          </a:prstGeom>
-          <a:solidFill>
-            <a:srgbClr val="222222"/>
-          </a:solidFill>
-          <a:ln>
-            <a:noFill/>
-          </a:ln>
-          <a:effectLst/>
-        </p:spPr>
-        <p:style>
-          <a:lnRef idx="1">
-            <a:schemeClr val="accent1"/>
-          </a:lnRef>
-          <a:fillRef idx="3">
-            <a:schemeClr val="accent1"/>
-          </a:fillRef>
-          <a:effectRef idx="2">
-            <a:schemeClr val="accent1"/>
-          </a:effectRef>
-          <a:fontRef idx="minor">
-            <a:schemeClr val="lt1"/>
-          </a:fontRef>
-        </p:style>
-        <p:txBody>
-          <a:bodyPr rtlCol="0" anchor="ctr"/>
-          <a:lstStyle/>
-          <a:p>
-            <a:pPr algn="ctr"/>
-          </a:p>
-        </p:txBody>
-      </p:sp>
-      <p:sp>
-        <p:nvSpPr>
-          <p:cNvPr id="3" name="Rectangle 2"/>
-          <p:cNvSpPr/>
-          <p:nvPr/>
-        </p:nvSpPr>
-        <p:spPr>
-          <a:xfrm>
-            <a:off x="822960" y="2743200"/>
-            <a:ext cx="1280160" cy="109728"/>
+            <a:off x="365760" y="384048"/>
+            <a:ext cx="164592" cy="502920"/>
           </a:xfrm>
           <a:prstGeom prst="rect">
             <a:avLst/>
@@ -6993,14 +7299,48 @@
       </p:sp>
       <p:sp>
         <p:nvSpPr>
+          <p:cNvPr id="3" name="TextBox 2"/>
+          <p:cNvSpPr txBox="1"/>
+          <p:nvPr/>
+        </p:nvSpPr>
+        <p:spPr>
+          <a:xfrm>
+            <a:off x="685800" y="256032"/>
+            <a:ext cx="10058400" cy="320040"/>
+          </a:xfrm>
+          <a:prstGeom prst="rect">
+            <a:avLst/>
+          </a:prstGeom>
+          <a:noFill/>
+        </p:spPr>
+        <p:txBody>
+          <a:bodyPr wrap="square">
+            <a:spAutoFit/>
+          </a:bodyPr>
+          <a:lstStyle/>
+          <a:p>
+            <a:r>
+              <a:rPr sz="1100" b="1">
+                <a:solidFill>
+                  <a:srgbClr val="833AB4"/>
+                </a:solidFill>
+                <a:latin typeface="Segoe UI"/>
+              </a:rPr>
+              <a:t>06 · FORECAST</a:t>
+            </a:r>
+          </a:p>
+        </p:txBody>
+      </p:sp>
+      <p:sp>
+        <p:nvSpPr>
           <p:cNvPr id="4" name="TextBox 3"/>
           <p:cNvSpPr txBox="1"/>
           <p:nvPr/>
         </p:nvSpPr>
         <p:spPr>
           <a:xfrm>
-            <a:off x="822960" y="2011680"/>
-            <a:ext cx="10058400" cy="548640"/>
+            <a:off x="658368" y="457200"/>
+            <a:ext cx="10515600" cy="640080"/>
           </a:xfrm>
           <a:prstGeom prst="rect">
             <a:avLst/>
@@ -7014,27 +7354,95 @@
           <a:lstStyle/>
           <a:p>
             <a:r>
-              <a:rPr sz="1400" b="1">
-                <a:solidFill>
-                  <a:srgbClr val="E1306C"/>
-                </a:solidFill>
-                <a:latin typeface="Segoe UI"/>
-              </a:rPr>
-              <a:t>CONCLUSION</a:t>
-            </a:r>
-          </a:p>
-        </p:txBody>
-      </p:sp>
-      <p:sp>
-        <p:nvSpPr>
-          <p:cNvPr id="5" name="TextBox 4"/>
-          <p:cNvSpPr txBox="1"/>
-          <p:nvPr/>
-        </p:nvSpPr>
-        <p:spPr>
-          <a:xfrm>
-            <a:off x="822960" y="3017520"/>
-            <a:ext cx="10515600" cy="1371600"/>
+              <a:rPr sz="2800" b="1">
+                <a:solidFill>
+                  <a:srgbClr val="222222"/>
+                </a:solidFill>
+                <a:latin typeface="맑은 고딕"/>
+              </a:rPr>
+              <a:t>14일 예측</a:t>
+            </a:r>
+          </a:p>
+        </p:txBody>
+      </p:sp>
+      <p:pic>
+        <p:nvPicPr>
+          <p:cNvPr id="5" name="Picture 4" descr="08_forecast.png"/>
+          <p:cNvPicPr>
+            <a:picLocks noChangeAspect="1"/>
+          </p:cNvPicPr>
+          <p:nvPr/>
+        </p:nvPicPr>
+        <p:blipFill>
+          <a:blip r:embed="rId2"/>
+          <a:stretch>
+            <a:fillRect/>
+          </a:stretch>
+        </p:blipFill>
+        <p:spPr>
+          <a:xfrm>
+            <a:off x="502920" y="1325880"/>
+            <a:ext cx="7772400" cy="3917125"/>
+          </a:xfrm>
+          <a:prstGeom prst="rect">
+            <a:avLst/>
+          </a:prstGeom>
+        </p:spPr>
+      </p:pic>
+      <p:sp>
+        <p:nvSpPr>
+          <p:cNvPr id="6" name="Rectangle 5"/>
+          <p:cNvSpPr/>
+          <p:nvPr/>
+        </p:nvSpPr>
+        <p:spPr>
+          <a:xfrm>
+            <a:off x="8458200" y="1325880"/>
+            <a:ext cx="3246120" cy="4937760"/>
+          </a:xfrm>
+          <a:prstGeom prst="rect">
+            <a:avLst/>
+          </a:prstGeom>
+          <a:solidFill>
+            <a:srgbClr val="F2F2F4"/>
+          </a:solidFill>
+          <a:ln>
+            <a:noFill/>
+          </a:ln>
+          <a:effectLst/>
+        </p:spPr>
+        <p:style>
+          <a:lnRef idx="1">
+            <a:schemeClr val="accent1"/>
+          </a:lnRef>
+          <a:fillRef idx="3">
+            <a:schemeClr val="accent1"/>
+          </a:fillRef>
+          <a:effectRef idx="2">
+            <a:schemeClr val="accent1"/>
+          </a:effectRef>
+          <a:fontRef idx="minor">
+            <a:schemeClr val="lt1"/>
+          </a:fontRef>
+        </p:style>
+        <p:txBody>
+          <a:bodyPr rtlCol="0" anchor="ctr"/>
+          <a:lstStyle/>
+          <a:p>
+            <a:pPr algn="ctr"/>
+          </a:p>
+        </p:txBody>
+      </p:sp>
+      <p:sp>
+        <p:nvSpPr>
+          <p:cNvPr id="7" name="TextBox 6"/>
+          <p:cNvSpPr txBox="1"/>
+          <p:nvPr/>
+        </p:nvSpPr>
+        <p:spPr>
+          <a:xfrm>
+            <a:off x="8659368" y="1508760"/>
+            <a:ext cx="2880360" cy="4663440"/>
           </a:xfrm>
           <a:prstGeom prst="rect">
             <a:avLst/>
@@ -7047,14 +7455,196 @@
           </a:bodyPr>
           <a:lstStyle/>
           <a:p>
-            <a:r>
-              <a:rPr sz="4000" b="1">
-                <a:solidFill>
-                  <a:srgbClr val="FFFFFF"/>
-                </a:solidFill>
-                <a:latin typeface="맑은 고딕"/>
-              </a:rPr>
-              <a:t>그래서, 지금 뭘 써야 하나</a:t>
+            <a:pPr>
+              <a:spcAft>
+                <a:spcPts val="800"/>
+              </a:spcAft>
+            </a:pPr>
+            <a:r>
+              <a:rPr sz="1300" b="1">
+                <a:solidFill>
+                  <a:srgbClr val="833AB4"/>
+                </a:solidFill>
+                <a:latin typeface="맑은 고딕"/>
+              </a:rPr>
+              <a:t>읽는 법</a:t>
+            </a:r>
+          </a:p>
+          <a:p>
+            <a:pPr>
+              <a:spcAft>
+                <a:spcPts val="1000"/>
+              </a:spcAft>
+            </a:pPr>
+            <a:r>
+              <a:rPr sz="1250" b="0">
+                <a:solidFill>
+                  <a:srgbClr val="222222"/>
+                </a:solidFill>
+                <a:latin typeface="맑은 고딕"/>
+              </a:rPr>
+              <a:t>• 모형: 선형추세 + 요일 계절성 (최근 8주 적합)</a:t>
+            </a:r>
+          </a:p>
+          <a:p>
+            <a:pPr>
+              <a:spcAft>
+                <a:spcPts val="1000"/>
+              </a:spcAft>
+            </a:pPr>
+            <a:r>
+              <a:rPr sz="1250" b="0">
+                <a:solidFill>
+                  <a:srgbClr val="222222"/>
+                </a:solidFill>
+                <a:latin typeface="맑은 고딕"/>
+              </a:rPr>
+              <a:t>• 점선 = 6/11~6/24 예측 경로</a:t>
+            </a:r>
+          </a:p>
+          <a:p>
+            <a:pPr>
+              <a:spcAft>
+                <a:spcPts val="1000"/>
+              </a:spcAft>
+            </a:pPr>
+            <a:r>
+              <a:rPr sz="1250" b="0">
+                <a:solidFill>
+                  <a:srgbClr val="222222"/>
+                </a:solidFill>
+                <a:latin typeface="맑은 고딕"/>
+              </a:rPr>
+              <a:t>• 음영 = 95% 예측구간 (잔차 분산 기반)</a:t>
+            </a:r>
+          </a:p>
+          <a:p>
+            <a:pPr>
+              <a:spcAft>
+                <a:spcPts val="1000"/>
+              </a:spcAft>
+            </a:pPr>
+            <a:r>
+              <a:rPr sz="1250" b="0">
+                <a:solidFill>
+                  <a:srgbClr val="222222"/>
+                </a:solidFill>
+                <a:latin typeface="맑은 고딕"/>
+              </a:rPr>
+              <a:t>• 주말마다 솟는 요일 패턴까지 재현</a:t>
+            </a:r>
+          </a:p>
+        </p:txBody>
+      </p:sp>
+      <p:sp>
+        <p:nvSpPr>
+          <p:cNvPr id="8" name="Rectangle 7"/>
+          <p:cNvSpPr/>
+          <p:nvPr/>
+        </p:nvSpPr>
+        <p:spPr>
+          <a:xfrm>
+            <a:off x="0" y="6565392"/>
+            <a:ext cx="12191695" cy="292608"/>
+          </a:xfrm>
+          <a:prstGeom prst="rect">
+            <a:avLst/>
+          </a:prstGeom>
+          <a:solidFill>
+            <a:srgbClr val="F2F2F4"/>
+          </a:solidFill>
+          <a:ln>
+            <a:noFill/>
+          </a:ln>
+          <a:effectLst/>
+        </p:spPr>
+        <p:style>
+          <a:lnRef idx="1">
+            <a:schemeClr val="accent1"/>
+          </a:lnRef>
+          <a:fillRef idx="3">
+            <a:schemeClr val="accent1"/>
+          </a:fillRef>
+          <a:effectRef idx="2">
+            <a:schemeClr val="accent1"/>
+          </a:effectRef>
+          <a:fontRef idx="minor">
+            <a:schemeClr val="lt1"/>
+          </a:fontRef>
+        </p:style>
+        <p:txBody>
+          <a:bodyPr rtlCol="0" anchor="ctr"/>
+          <a:lstStyle/>
+          <a:p>
+            <a:pPr algn="ctr"/>
+          </a:p>
+        </p:txBody>
+      </p:sp>
+      <p:sp>
+        <p:nvSpPr>
+          <p:cNvPr id="9" name="TextBox 8"/>
+          <p:cNvSpPr txBox="1"/>
+          <p:nvPr/>
+        </p:nvSpPr>
+        <p:spPr>
+          <a:xfrm>
+            <a:off x="365760" y="6547104"/>
+            <a:ext cx="7315200" cy="274320"/>
+          </a:xfrm>
+          <a:prstGeom prst="rect">
+            <a:avLst/>
+          </a:prstGeom>
+          <a:noFill/>
+        </p:spPr>
+        <p:txBody>
+          <a:bodyPr wrap="square">
+            <a:spAutoFit/>
+          </a:bodyPr>
+          <a:lstStyle/>
+          <a:p>
+            <a:r>
+              <a:rPr sz="900" b="0">
+                <a:solidFill>
+                  <a:srgbClr val="6B6B6B"/>
+                </a:solidFill>
+                <a:latin typeface="맑은 고딕"/>
+              </a:rPr>
+              <a:t>시계열 데이터 분석 · 한국 해시태그 트렌드 · 기준일 2026-06-11</a:t>
+            </a:r>
+          </a:p>
+        </p:txBody>
+      </p:sp>
+      <p:sp>
+        <p:nvSpPr>
+          <p:cNvPr id="10" name="TextBox 9"/>
+          <p:cNvSpPr txBox="1"/>
+          <p:nvPr/>
+        </p:nvSpPr>
+        <p:spPr>
+          <a:xfrm>
+            <a:off x="11094415" y="6547104"/>
+            <a:ext cx="822960" cy="274320"/>
+          </a:xfrm>
+          <a:prstGeom prst="rect">
+            <a:avLst/>
+          </a:prstGeom>
+          <a:noFill/>
+        </p:spPr>
+        <p:txBody>
+          <a:bodyPr wrap="square">
+            <a:spAutoFit/>
+          </a:bodyPr>
+          <a:lstStyle/>
+          <a:p>
+            <a:pPr algn="r"/>
+            <a:r>
+              <a:rPr sz="900" b="0">
+                <a:solidFill>
+                  <a:srgbClr val="6B6B6B"/>
+                </a:solidFill>
+                <a:latin typeface="맑은 고딕"/>
+              </a:rPr>
+              <a:t>16</a:t>
             </a:r>
           </a:p>
         </p:txBody>
@@ -7252,7 +7842,7 @@
                 </a:solidFill>
                 <a:latin typeface="맑은 고딕"/>
               </a:rPr>
-              <a:t>분석 개요와 데이터</a:t>
+              <a:t>문제 정의와 데이터</a:t>
             </a:r>
           </a:p>
         </p:txBody>
@@ -7286,7 +7876,7 @@
                 </a:solidFill>
                 <a:latin typeface="맑은 고딕"/>
               </a:rPr>
-              <a:t>질문 · 네이버 데이터랩 실데이터 · 한계</a:t>
+              <a:t>마케터의 고민: 무엇이 떡상할까? · 네이버 데이터랩 실데이터</a:t>
             </a:r>
           </a:p>
         </p:txBody>
@@ -8144,8 +8734,52 @@
         </p:nvSpPr>
         <p:spPr>
           <a:xfrm>
-            <a:off x="365760" y="384048"/>
-            <a:ext cx="164592" cy="502920"/>
+            <a:off x="0" y="0"/>
+            <a:ext cx="12191695" cy="6858000"/>
+          </a:xfrm>
+          <a:prstGeom prst="rect">
+            <a:avLst/>
+          </a:prstGeom>
+          <a:solidFill>
+            <a:srgbClr val="222222"/>
+          </a:solidFill>
+          <a:ln>
+            <a:noFill/>
+          </a:ln>
+          <a:effectLst/>
+        </p:spPr>
+        <p:style>
+          <a:lnRef idx="1">
+            <a:schemeClr val="accent1"/>
+          </a:lnRef>
+          <a:fillRef idx="3">
+            <a:schemeClr val="accent1"/>
+          </a:fillRef>
+          <a:effectRef idx="2">
+            <a:schemeClr val="accent1"/>
+          </a:effectRef>
+          <a:fontRef idx="minor">
+            <a:schemeClr val="lt1"/>
+          </a:fontRef>
+        </p:style>
+        <p:txBody>
+          <a:bodyPr rtlCol="0" anchor="ctr"/>
+          <a:lstStyle/>
+          <a:p>
+            <a:pPr algn="ctr"/>
+          </a:p>
+        </p:txBody>
+      </p:sp>
+      <p:sp>
+        <p:nvSpPr>
+          <p:cNvPr id="3" name="Rectangle 2"/>
+          <p:cNvSpPr/>
+          <p:nvPr/>
+        </p:nvSpPr>
+        <p:spPr>
+          <a:xfrm>
+            <a:off x="822960" y="2743200"/>
+            <a:ext cx="1280160" cy="109728"/>
           </a:xfrm>
           <a:prstGeom prst="rect">
             <a:avLst/>
@@ -8182,14 +8816,14 @@
       </p:sp>
       <p:sp>
         <p:nvSpPr>
-          <p:cNvPr id="3" name="TextBox 2"/>
-          <p:cNvSpPr txBox="1"/>
-          <p:nvPr/>
-        </p:nvSpPr>
-        <p:spPr>
-          <a:xfrm>
-            <a:off x="685800" y="256032"/>
-            <a:ext cx="10058400" cy="320040"/>
+          <p:cNvPr id="4" name="TextBox 3"/>
+          <p:cNvSpPr txBox="1"/>
+          <p:nvPr/>
+        </p:nvSpPr>
+        <p:spPr>
+          <a:xfrm>
+            <a:off x="822960" y="2011680"/>
+            <a:ext cx="10058400" cy="548640"/>
           </a:xfrm>
           <a:prstGeom prst="rect">
             <a:avLst/>
@@ -8203,27 +8837,27 @@
           <a:lstStyle/>
           <a:p>
             <a:r>
-              <a:rPr sz="1100" b="1">
-                <a:solidFill>
-                  <a:srgbClr val="833AB4"/>
+              <a:rPr sz="1400" b="1">
+                <a:solidFill>
+                  <a:srgbClr val="E1306C"/>
                 </a:solidFill>
                 <a:latin typeface="Segoe UI"/>
               </a:rPr>
-              <a:t>07 · NOW TRENDING</a:t>
-            </a:r>
-          </a:p>
-        </p:txBody>
-      </p:sp>
-      <p:sp>
-        <p:nvSpPr>
-          <p:cNvPr id="4" name="TextBox 3"/>
-          <p:cNvSpPr txBox="1"/>
-          <p:nvPr/>
-        </p:nvSpPr>
-        <p:spPr>
-          <a:xfrm>
-            <a:off x="658368" y="457200"/>
-            <a:ext cx="10515600" cy="640080"/>
+              <a:t>CONCLUSION</a:t>
+            </a:r>
+          </a:p>
+        </p:txBody>
+      </p:sp>
+      <p:sp>
+        <p:nvSpPr>
+          <p:cNvPr id="5" name="TextBox 4"/>
+          <p:cNvSpPr txBox="1"/>
+          <p:nvPr/>
+        </p:nvSpPr>
+        <p:spPr>
+          <a:xfrm>
+            <a:off x="822960" y="3017520"/>
+            <a:ext cx="10515600" cy="1371600"/>
           </a:xfrm>
           <a:prstGeom prst="rect">
             <a:avLst/>
@@ -8237,722 +8871,13 @@
           <a:lstStyle/>
           <a:p>
             <a:r>
-              <a:rPr sz="2800" b="1">
-                <a:solidFill>
-                  <a:srgbClr val="222222"/>
-                </a:solidFill>
-                <a:latin typeface="맑은 고딕"/>
-              </a:rPr>
-              <a:t>2026-06-11 기준 트렌딩 해시태그</a:t>
-            </a:r>
-          </a:p>
-        </p:txBody>
-      </p:sp>
-      <p:sp>
-        <p:nvSpPr>
-          <p:cNvPr id="5" name="Rectangle 4"/>
-          <p:cNvSpPr/>
-          <p:nvPr/>
-        </p:nvSpPr>
-        <p:spPr>
-          <a:xfrm>
-            <a:off x="685800" y="1417320"/>
-            <a:ext cx="5394960" cy="1920240"/>
-          </a:xfrm>
-          <a:prstGeom prst="rect">
-            <a:avLst/>
-          </a:prstGeom>
-          <a:solidFill>
-            <a:srgbClr val="F2F2F4"/>
-          </a:solidFill>
-          <a:ln>
-            <a:noFill/>
-          </a:ln>
-          <a:effectLst/>
-        </p:spPr>
-        <p:style>
-          <a:lnRef idx="1">
-            <a:schemeClr val="accent1"/>
-          </a:lnRef>
-          <a:fillRef idx="3">
-            <a:schemeClr val="accent1"/>
-          </a:fillRef>
-          <a:effectRef idx="2">
-            <a:schemeClr val="accent1"/>
-          </a:effectRef>
-          <a:fontRef idx="minor">
-            <a:schemeClr val="lt1"/>
-          </a:fontRef>
-        </p:style>
-        <p:txBody>
-          <a:bodyPr rtlCol="0" anchor="ctr"/>
-          <a:lstStyle/>
-          <a:p>
-            <a:pPr algn="ctr"/>
-          </a:p>
-        </p:txBody>
-      </p:sp>
-      <p:sp>
-        <p:nvSpPr>
-          <p:cNvPr id="6" name="Rectangle 5"/>
-          <p:cNvSpPr/>
-          <p:nvPr/>
-        </p:nvSpPr>
-        <p:spPr>
-          <a:xfrm>
-            <a:off x="685800" y="1417320"/>
-            <a:ext cx="128016" cy="1920240"/>
-          </a:xfrm>
-          <a:prstGeom prst="rect">
-            <a:avLst/>
-          </a:prstGeom>
-          <a:solidFill>
-            <a:srgbClr val="E1306C"/>
-          </a:solidFill>
-          <a:ln>
-            <a:noFill/>
-          </a:ln>
-          <a:effectLst/>
-        </p:spPr>
-        <p:style>
-          <a:lnRef idx="1">
-            <a:schemeClr val="accent1"/>
-          </a:lnRef>
-          <a:fillRef idx="3">
-            <a:schemeClr val="accent1"/>
-          </a:fillRef>
-          <a:effectRef idx="2">
-            <a:schemeClr val="accent1"/>
-          </a:effectRef>
-          <a:fontRef idx="minor">
-            <a:schemeClr val="lt1"/>
-          </a:fontRef>
-        </p:style>
-        <p:txBody>
-          <a:bodyPr rtlCol="0" anchor="ctr"/>
-          <a:lstStyle/>
-          <a:p>
-            <a:pPr algn="ctr"/>
-          </a:p>
-        </p:txBody>
-      </p:sp>
-      <p:sp>
-        <p:nvSpPr>
-          <p:cNvPr id="7" name="TextBox 6"/>
-          <p:cNvSpPr txBox="1"/>
-          <p:nvPr/>
-        </p:nvSpPr>
-        <p:spPr>
-          <a:xfrm>
-            <a:off x="1005840" y="1581912"/>
-            <a:ext cx="4846320" cy="1591056"/>
-          </a:xfrm>
-          <a:prstGeom prst="rect">
-            <a:avLst/>
-          </a:prstGeom>
-          <a:noFill/>
-        </p:spPr>
-        <p:txBody>
-          <a:bodyPr wrap="square">
-            <a:spAutoFit/>
-          </a:bodyPr>
-          <a:lstStyle/>
-          <a:p>
-            <a:r>
-              <a:rPr sz="1300" b="1">
-                <a:solidFill>
-                  <a:srgbClr val="E1306C"/>
-                </a:solidFill>
-                <a:latin typeface="맑은 고딕"/>
-              </a:rPr>
-              <a:t>📈 지금 상승 중 (최근 30일 모멘텀 +)</a:t>
-            </a:r>
-          </a:p>
-          <a:p>
-            <a:r>
-              <a:rPr sz="2200" b="1">
-                <a:solidFill>
-                  <a:srgbClr val="222222"/>
-                </a:solidFill>
-                <a:latin typeface="맑은 고딕"/>
-              </a:rPr>
-              <a:t>#등산  #클라이밍</a:t>
-            </a:r>
-          </a:p>
-          <a:p>
-            <a:pPr>
-              <a:spcBef>
-                <a:spcPts val="400"/>
-              </a:spcBef>
-            </a:pPr>
-            <a:r>
-              <a:rPr sz="1250" b="0">
-                <a:solidFill>
-                  <a:srgbClr val="6B6B6B"/>
-                </a:solidFill>
-                <a:latin typeface="맑은 고딕"/>
-              </a:rPr>
-              <a:t>등산 +7.9%, 클라이밍 +5.5% — 초여름에도 모멘텀 유지, 지금 올라탈 태그</a:t>
-            </a:r>
-          </a:p>
-        </p:txBody>
-      </p:sp>
-      <p:sp>
-        <p:nvSpPr>
-          <p:cNvPr id="8" name="Rectangle 7"/>
-          <p:cNvSpPr/>
-          <p:nvPr/>
-        </p:nvSpPr>
-        <p:spPr>
-          <a:xfrm>
-            <a:off x="6355080" y="1417320"/>
-            <a:ext cx="5394960" cy="1920240"/>
-          </a:xfrm>
-          <a:prstGeom prst="rect">
-            <a:avLst/>
-          </a:prstGeom>
-          <a:solidFill>
-            <a:srgbClr val="F2F2F4"/>
-          </a:solidFill>
-          <a:ln>
-            <a:noFill/>
-          </a:ln>
-          <a:effectLst/>
-        </p:spPr>
-        <p:style>
-          <a:lnRef idx="1">
-            <a:schemeClr val="accent1"/>
-          </a:lnRef>
-          <a:fillRef idx="3">
-            <a:schemeClr val="accent1"/>
-          </a:fillRef>
-          <a:effectRef idx="2">
-            <a:schemeClr val="accent1"/>
-          </a:effectRef>
-          <a:fontRef idx="minor">
-            <a:schemeClr val="lt1"/>
-          </a:fontRef>
-        </p:style>
-        <p:txBody>
-          <a:bodyPr rtlCol="0" anchor="ctr"/>
-          <a:lstStyle/>
-          <a:p>
-            <a:pPr algn="ctr"/>
-          </a:p>
-        </p:txBody>
-      </p:sp>
-      <p:sp>
-        <p:nvSpPr>
-          <p:cNvPr id="9" name="Rectangle 8"/>
-          <p:cNvSpPr/>
-          <p:nvPr/>
-        </p:nvSpPr>
-        <p:spPr>
-          <a:xfrm>
-            <a:off x="6355080" y="1417320"/>
-            <a:ext cx="128016" cy="1920240"/>
-          </a:xfrm>
-          <a:prstGeom prst="rect">
-            <a:avLst/>
-          </a:prstGeom>
-          <a:solidFill>
-            <a:srgbClr val="833AB4"/>
-          </a:solidFill>
-          <a:ln>
-            <a:noFill/>
-          </a:ln>
-          <a:effectLst/>
-        </p:spPr>
-        <p:style>
-          <a:lnRef idx="1">
-            <a:schemeClr val="accent1"/>
-          </a:lnRef>
-          <a:fillRef idx="3">
-            <a:schemeClr val="accent1"/>
-          </a:fillRef>
-          <a:effectRef idx="2">
-            <a:schemeClr val="accent1"/>
-          </a:effectRef>
-          <a:fontRef idx="minor">
-            <a:schemeClr val="lt1"/>
-          </a:fontRef>
-        </p:style>
-        <p:txBody>
-          <a:bodyPr rtlCol="0" anchor="ctr"/>
-          <a:lstStyle/>
-          <a:p>
-            <a:pPr algn="ctr"/>
-          </a:p>
-        </p:txBody>
-      </p:sp>
-      <p:sp>
-        <p:nvSpPr>
-          <p:cNvPr id="10" name="TextBox 9"/>
-          <p:cNvSpPr txBox="1"/>
-          <p:nvPr/>
-        </p:nvSpPr>
-        <p:spPr>
-          <a:xfrm>
-            <a:off x="6675120" y="1581912"/>
-            <a:ext cx="4846320" cy="1591056"/>
-          </a:xfrm>
-          <a:prstGeom prst="rect">
-            <a:avLst/>
-          </a:prstGeom>
-          <a:noFill/>
-        </p:spPr>
-        <p:txBody>
-          <a:bodyPr wrap="square">
-            <a:spAutoFit/>
-          </a:bodyPr>
-          <a:lstStyle/>
-          <a:p>
-            <a:r>
-              <a:rPr sz="1300" b="1">
-                <a:solidFill>
-                  <a:srgbClr val="833AB4"/>
-                </a:solidFill>
-                <a:latin typeface="맑은 고딕"/>
-              </a:rPr>
-              <a:t>🌊 피크 통과 (계절성 하락 전환)</a:t>
-            </a:r>
-          </a:p>
-          <a:p>
-            <a:r>
-              <a:rPr sz="2200" b="1">
-                <a:solidFill>
-                  <a:srgbClr val="222222"/>
-                </a:solidFill>
-                <a:latin typeface="맑은 고딕"/>
-              </a:rPr>
-              <a:t>#피크닉  #캠핑</a:t>
-            </a:r>
-          </a:p>
-          <a:p>
-            <a:pPr>
-              <a:spcBef>
-                <a:spcPts val="400"/>
-              </a:spcBef>
-            </a:pPr>
-            <a:r>
-              <a:rPr sz="1250" b="0">
-                <a:solidFill>
-                  <a:srgbClr val="6B6B6B"/>
-                </a:solidFill>
-                <a:latin typeface="맑은 고딕"/>
-              </a:rPr>
-              <a:t>연초 대비 +70%/+61%로 컸지만 최근 30일 -21%/-17% — 봄 수요 종료</a:t>
-            </a:r>
-          </a:p>
-        </p:txBody>
-      </p:sp>
-      <p:sp>
-        <p:nvSpPr>
-          <p:cNvPr id="11" name="Rectangle 10"/>
-          <p:cNvSpPr/>
-          <p:nvPr/>
-        </p:nvSpPr>
-        <p:spPr>
-          <a:xfrm>
-            <a:off x="685800" y="3611880"/>
-            <a:ext cx="5394960" cy="1920240"/>
-          </a:xfrm>
-          <a:prstGeom prst="rect">
-            <a:avLst/>
-          </a:prstGeom>
-          <a:solidFill>
-            <a:srgbClr val="F2F2F4"/>
-          </a:solidFill>
-          <a:ln>
-            <a:noFill/>
-          </a:ln>
-          <a:effectLst/>
-        </p:spPr>
-        <p:style>
-          <a:lnRef idx="1">
-            <a:schemeClr val="accent1"/>
-          </a:lnRef>
-          <a:fillRef idx="3">
-            <a:schemeClr val="accent1"/>
-          </a:fillRef>
-          <a:effectRef idx="2">
-            <a:schemeClr val="accent1"/>
-          </a:effectRef>
-          <a:fontRef idx="minor">
-            <a:schemeClr val="lt1"/>
-          </a:fontRef>
-        </p:style>
-        <p:txBody>
-          <a:bodyPr rtlCol="0" anchor="ctr"/>
-          <a:lstStyle/>
-          <a:p>
-            <a:pPr algn="ctr"/>
-          </a:p>
-        </p:txBody>
-      </p:sp>
-      <p:sp>
-        <p:nvSpPr>
-          <p:cNvPr id="12" name="Rectangle 11"/>
-          <p:cNvSpPr/>
-          <p:nvPr/>
-        </p:nvSpPr>
-        <p:spPr>
-          <a:xfrm>
-            <a:off x="685800" y="3611880"/>
-            <a:ext cx="128016" cy="1920240"/>
-          </a:xfrm>
-          <a:prstGeom prst="rect">
-            <a:avLst/>
-          </a:prstGeom>
-          <a:solidFill>
-            <a:srgbClr val="222222"/>
-          </a:solidFill>
-          <a:ln>
-            <a:noFill/>
-          </a:ln>
-          <a:effectLst/>
-        </p:spPr>
-        <p:style>
-          <a:lnRef idx="1">
-            <a:schemeClr val="accent1"/>
-          </a:lnRef>
-          <a:fillRef idx="3">
-            <a:schemeClr val="accent1"/>
-          </a:fillRef>
-          <a:effectRef idx="2">
-            <a:schemeClr val="accent1"/>
-          </a:effectRef>
-          <a:fontRef idx="minor">
-            <a:schemeClr val="lt1"/>
-          </a:fontRef>
-        </p:style>
-        <p:txBody>
-          <a:bodyPr rtlCol="0" anchor="ctr"/>
-          <a:lstStyle/>
-          <a:p>
-            <a:pPr algn="ctr"/>
-          </a:p>
-        </p:txBody>
-      </p:sp>
-      <p:sp>
-        <p:nvSpPr>
-          <p:cNvPr id="13" name="TextBox 12"/>
-          <p:cNvSpPr txBox="1"/>
-          <p:nvPr/>
-        </p:nvSpPr>
-        <p:spPr>
-          <a:xfrm>
-            <a:off x="1005840" y="3776472"/>
-            <a:ext cx="4846320" cy="1591056"/>
-          </a:xfrm>
-          <a:prstGeom prst="rect">
-            <a:avLst/>
-          </a:prstGeom>
-          <a:noFill/>
-        </p:spPr>
-        <p:txBody>
-          <a:bodyPr wrap="square">
-            <a:spAutoFit/>
-          </a:bodyPr>
-          <a:lstStyle/>
-          <a:p>
-            <a:r>
-              <a:rPr sz="1300" b="1">
-                <a:solidFill>
-                  <a:srgbClr val="222222"/>
-                </a:solidFill>
-                <a:latin typeface="맑은 고딕"/>
-              </a:rPr>
-              <a:t>💪 안정 수요 (시즌 진입)</a:t>
-            </a:r>
-          </a:p>
-          <a:p>
-            <a:r>
-              <a:rPr sz="2200" b="1">
-                <a:solidFill>
-                  <a:srgbClr val="222222"/>
-                </a:solidFill>
-                <a:latin typeface="맑은 고딕"/>
-              </a:rPr>
-              <a:t>#다이어트</a:t>
-            </a:r>
-          </a:p>
-          <a:p>
-            <a:pPr>
-              <a:spcBef>
-                <a:spcPts val="400"/>
-              </a:spcBef>
-            </a:pPr>
-            <a:r>
-              <a:rPr sz="1250" b="0">
-                <a:solidFill>
-                  <a:srgbClr val="6B6B6B"/>
-                </a:solidFill>
-                <a:latin typeface="맑은 고딕"/>
-              </a:rPr>
-              <a:t>최근 30일 +0.4%로 하락 멈춤 — 여름 직전 수요 재점화 구간, 월요일 피크 활용</a:t>
-            </a:r>
-          </a:p>
-        </p:txBody>
-      </p:sp>
-      <p:sp>
-        <p:nvSpPr>
-          <p:cNvPr id="14" name="Rectangle 13"/>
-          <p:cNvSpPr/>
-          <p:nvPr/>
-        </p:nvSpPr>
-        <p:spPr>
-          <a:xfrm>
-            <a:off x="6355080" y="3611880"/>
-            <a:ext cx="5394960" cy="1920240"/>
-          </a:xfrm>
-          <a:prstGeom prst="rect">
-            <a:avLst/>
-          </a:prstGeom>
-          <a:solidFill>
-            <a:srgbClr val="F2F2F4"/>
-          </a:solidFill>
-          <a:ln>
-            <a:noFill/>
-          </a:ln>
-          <a:effectLst/>
-        </p:spPr>
-        <p:style>
-          <a:lnRef idx="1">
-            <a:schemeClr val="accent1"/>
-          </a:lnRef>
-          <a:fillRef idx="3">
-            <a:schemeClr val="accent1"/>
-          </a:fillRef>
-          <a:effectRef idx="2">
-            <a:schemeClr val="accent1"/>
-          </a:effectRef>
-          <a:fontRef idx="minor">
-            <a:schemeClr val="lt1"/>
-          </a:fontRef>
-        </p:style>
-        <p:txBody>
-          <a:bodyPr rtlCol="0" anchor="ctr"/>
-          <a:lstStyle/>
-          <a:p>
-            <a:pPr algn="ctr"/>
-          </a:p>
-        </p:txBody>
-      </p:sp>
-      <p:sp>
-        <p:nvSpPr>
-          <p:cNvPr id="15" name="Rectangle 14"/>
-          <p:cNvSpPr/>
-          <p:nvPr/>
-        </p:nvSpPr>
-        <p:spPr>
-          <a:xfrm>
-            <a:off x="6355080" y="3611880"/>
-            <a:ext cx="128016" cy="1920240"/>
-          </a:xfrm>
-          <a:prstGeom prst="rect">
-            <a:avLst/>
-          </a:prstGeom>
-          <a:solidFill>
-            <a:srgbClr val="6B6B6B"/>
-          </a:solidFill>
-          <a:ln>
-            <a:noFill/>
-          </a:ln>
-          <a:effectLst/>
-        </p:spPr>
-        <p:style>
-          <a:lnRef idx="1">
-            <a:schemeClr val="accent1"/>
-          </a:lnRef>
-          <a:fillRef idx="3">
-            <a:schemeClr val="accent1"/>
-          </a:fillRef>
-          <a:effectRef idx="2">
-            <a:schemeClr val="accent1"/>
-          </a:effectRef>
-          <a:fontRef idx="minor">
-            <a:schemeClr val="lt1"/>
-          </a:fontRef>
-        </p:style>
-        <p:txBody>
-          <a:bodyPr rtlCol="0" anchor="ctr"/>
-          <a:lstStyle/>
-          <a:p>
-            <a:pPr algn="ctr"/>
-          </a:p>
-        </p:txBody>
-      </p:sp>
-      <p:sp>
-        <p:nvSpPr>
-          <p:cNvPr id="16" name="TextBox 15"/>
-          <p:cNvSpPr txBox="1"/>
-          <p:nvPr/>
-        </p:nvSpPr>
-        <p:spPr>
-          <a:xfrm>
-            <a:off x="6675120" y="3776472"/>
-            <a:ext cx="4846320" cy="1591056"/>
-          </a:xfrm>
-          <a:prstGeom prst="rect">
-            <a:avLst/>
-          </a:prstGeom>
-          <a:noFill/>
-        </p:spPr>
-        <p:txBody>
-          <a:bodyPr wrap="square">
-            <a:spAutoFit/>
-          </a:bodyPr>
-          <a:lstStyle/>
-          <a:p>
-            <a:r>
-              <a:rPr sz="1300" b="1">
-                <a:solidFill>
-                  <a:srgbClr val="6B6B6B"/>
-                </a:solidFill>
-                <a:latin typeface="맑은 고딕"/>
-              </a:rPr>
-              <a:t>📉 약세 지속</a:t>
-            </a:r>
-          </a:p>
-          <a:p>
-            <a:r>
-              <a:rPr sz="2200" b="1">
-                <a:solidFill>
-                  <a:srgbClr val="222222"/>
-                </a:solidFill>
-                <a:latin typeface="맑은 고딕"/>
-              </a:rPr>
-              <a:t>#카페  #국내여행</a:t>
-            </a:r>
-          </a:p>
-          <a:p>
-            <a:pPr>
-              <a:spcBef>
-                <a:spcPts val="400"/>
-              </a:spcBef>
-            </a:pPr>
-            <a:r>
-              <a:rPr sz="1250" b="0">
-                <a:solidFill>
-                  <a:srgbClr val="6B6B6B"/>
-                </a:solidFill>
-                <a:latin typeface="맑은 고딕"/>
-              </a:rPr>
-              <a:t>연초 대비 -50%/-15% — 단독 태그보다 상승 태그와 조합 권장</a:t>
-            </a:r>
-          </a:p>
-        </p:txBody>
-      </p:sp>
-      <p:sp>
-        <p:nvSpPr>
-          <p:cNvPr id="17" name="Rectangle 16"/>
-          <p:cNvSpPr/>
-          <p:nvPr/>
-        </p:nvSpPr>
-        <p:spPr>
-          <a:xfrm>
-            <a:off x="0" y="6565392"/>
-            <a:ext cx="12191695" cy="292608"/>
-          </a:xfrm>
-          <a:prstGeom prst="rect">
-            <a:avLst/>
-          </a:prstGeom>
-          <a:solidFill>
-            <a:srgbClr val="F2F2F4"/>
-          </a:solidFill>
-          <a:ln>
-            <a:noFill/>
-          </a:ln>
-          <a:effectLst/>
-        </p:spPr>
-        <p:style>
-          <a:lnRef idx="1">
-            <a:schemeClr val="accent1"/>
-          </a:lnRef>
-          <a:fillRef idx="3">
-            <a:schemeClr val="accent1"/>
-          </a:fillRef>
-          <a:effectRef idx="2">
-            <a:schemeClr val="accent1"/>
-          </a:effectRef>
-          <a:fontRef idx="minor">
-            <a:schemeClr val="lt1"/>
-          </a:fontRef>
-        </p:style>
-        <p:txBody>
-          <a:bodyPr rtlCol="0" anchor="ctr"/>
-          <a:lstStyle/>
-          <a:p>
-            <a:pPr algn="ctr"/>
-          </a:p>
-        </p:txBody>
-      </p:sp>
-      <p:sp>
-        <p:nvSpPr>
-          <p:cNvPr id="18" name="TextBox 17"/>
-          <p:cNvSpPr txBox="1"/>
-          <p:nvPr/>
-        </p:nvSpPr>
-        <p:spPr>
-          <a:xfrm>
-            <a:off x="365760" y="6547104"/>
-            <a:ext cx="7315200" cy="274320"/>
-          </a:xfrm>
-          <a:prstGeom prst="rect">
-            <a:avLst/>
-          </a:prstGeom>
-          <a:noFill/>
-        </p:spPr>
-        <p:txBody>
-          <a:bodyPr wrap="square">
-            <a:spAutoFit/>
-          </a:bodyPr>
-          <a:lstStyle/>
-          <a:p>
-            <a:r>
-              <a:rPr sz="900" b="0">
-                <a:solidFill>
-                  <a:srgbClr val="6B6B6B"/>
-                </a:solidFill>
-                <a:latin typeface="맑은 고딕"/>
-              </a:rPr>
-              <a:t>시계열 데이터 분석 · 한국 해시태그 트렌드 · 기준일 2026-06-11</a:t>
-            </a:r>
-          </a:p>
-        </p:txBody>
-      </p:sp>
-      <p:sp>
-        <p:nvSpPr>
-          <p:cNvPr id="19" name="TextBox 18"/>
-          <p:cNvSpPr txBox="1"/>
-          <p:nvPr/>
-        </p:nvSpPr>
-        <p:spPr>
-          <a:xfrm>
-            <a:off x="11094415" y="6547104"/>
-            <a:ext cx="822960" cy="274320"/>
-          </a:xfrm>
-          <a:prstGeom prst="rect">
-            <a:avLst/>
-          </a:prstGeom>
-          <a:noFill/>
-        </p:spPr>
-        <p:txBody>
-          <a:bodyPr wrap="square">
-            <a:spAutoFit/>
-          </a:bodyPr>
-          <a:lstStyle/>
-          <a:p>
-            <a:pPr algn="r"/>
-            <a:r>
-              <a:rPr sz="900" b="0">
-                <a:solidFill>
-                  <a:srgbClr val="6B6B6B"/>
-                </a:solidFill>
-                <a:latin typeface="맑은 고딕"/>
-              </a:rPr>
-              <a:t>16</a:t>
+              <a:rPr sz="4000" b="1">
+                <a:solidFill>
+                  <a:srgbClr val="FFFFFF"/>
+                </a:solidFill>
+                <a:latin typeface="맑은 고딕"/>
+              </a:rPr>
+              <a:t>그래서, 지금 뭘 써야 하나</a:t>
             </a:r>
           </a:p>
         </p:txBody>
@@ -9048,7 +8973,7 @@
                 </a:solidFill>
                 <a:latin typeface="Segoe UI"/>
               </a:rPr>
-              <a:t>07 · ACTION</a:t>
+              <a:t>07 · NOW TRENDING</a:t>
             </a:r>
           </a:p>
         </p:txBody>
@@ -9082,7 +9007,7 @@
                 </a:solidFill>
                 <a:latin typeface="맑은 고딕"/>
               </a:rPr>
-              <a:t>콘텐츠 활용 전략</a:t>
+              <a:t>2026-06-11 기준 트렌딩 해시태그</a:t>
             </a:r>
           </a:p>
         </p:txBody>
@@ -9095,8 +9020,8 @@
         </p:nvSpPr>
         <p:spPr>
           <a:xfrm>
-            <a:off x="685800" y="1371600"/>
-            <a:ext cx="10789920" cy="822960"/>
+            <a:off x="685800" y="1417320"/>
+            <a:ext cx="5394960" cy="1920240"/>
           </a:xfrm>
           <a:prstGeom prst="rect">
             <a:avLst/>
@@ -9133,217 +9058,105 @@
       </p:sp>
       <p:sp>
         <p:nvSpPr>
-          <p:cNvPr id="6" name="TextBox 5"/>
-          <p:cNvSpPr txBox="1"/>
-          <p:nvPr/>
-        </p:nvSpPr>
-        <p:spPr>
-          <a:xfrm>
-            <a:off x="914400" y="1481328"/>
-            <a:ext cx="10332720" cy="640080"/>
-          </a:xfrm>
-          <a:prstGeom prst="rect">
-            <a:avLst/>
-          </a:prstGeom>
-          <a:noFill/>
-        </p:spPr>
-        <p:txBody>
-          <a:bodyPr wrap="square" anchor="ctr">
-            <a:spAutoFit/>
-          </a:bodyPr>
-          <a:lstStyle/>
-          <a:p>
-            <a:r>
-              <a:rPr sz="1500" b="1">
+          <p:cNvPr id="6" name="Rectangle 5"/>
+          <p:cNvSpPr/>
+          <p:nvPr/>
+        </p:nvSpPr>
+        <p:spPr>
+          <a:xfrm>
+            <a:off x="685800" y="1417320"/>
+            <a:ext cx="128016" cy="1920240"/>
+          </a:xfrm>
+          <a:prstGeom prst="rect">
+            <a:avLst/>
+          </a:prstGeom>
+          <a:solidFill>
+            <a:srgbClr val="E1306C"/>
+          </a:solidFill>
+          <a:ln>
+            <a:noFill/>
+          </a:ln>
+          <a:effectLst/>
+        </p:spPr>
+        <p:style>
+          <a:lnRef idx="1">
+            <a:schemeClr val="accent1"/>
+          </a:lnRef>
+          <a:fillRef idx="3">
+            <a:schemeClr val="accent1"/>
+          </a:fillRef>
+          <a:effectRef idx="2">
+            <a:schemeClr val="accent1"/>
+          </a:effectRef>
+          <a:fontRef idx="minor">
+            <a:schemeClr val="lt1"/>
+          </a:fontRef>
+        </p:style>
+        <p:txBody>
+          <a:bodyPr rtlCol="0" anchor="ctr"/>
+          <a:lstStyle/>
+          <a:p>
+            <a:pPr algn="ctr"/>
+          </a:p>
+        </p:txBody>
+      </p:sp>
+      <p:sp>
+        <p:nvSpPr>
+          <p:cNvPr id="7" name="TextBox 6"/>
+          <p:cNvSpPr txBox="1"/>
+          <p:nvPr/>
+        </p:nvSpPr>
+        <p:spPr>
+          <a:xfrm>
+            <a:off x="1005840" y="1581912"/>
+            <a:ext cx="4846320" cy="1591056"/>
+          </a:xfrm>
+          <a:prstGeom prst="rect">
+            <a:avLst/>
+          </a:prstGeom>
+          <a:noFill/>
+        </p:spPr>
+        <p:txBody>
+          <a:bodyPr wrap="square">
+            <a:spAutoFit/>
+          </a:bodyPr>
+          <a:lstStyle/>
+          <a:p>
+            <a:r>
+              <a:rPr sz="1300" b="1">
+                <a:solidFill>
+                  <a:srgbClr val="E1306C"/>
+                </a:solidFill>
+                <a:latin typeface="맑은 고딕"/>
+              </a:rPr>
+              <a:t>📈 지금 상승 중 (최근 30일 모멘텀 +)</a:t>
+            </a:r>
+          </a:p>
+          <a:p>
+            <a:r>
+              <a:rPr sz="2200" b="1">
                 <a:solidFill>
                   <a:srgbClr val="222222"/>
                 </a:solidFill>
                 <a:latin typeface="맑은 고딕"/>
               </a:rPr>
-              <a:t>시계열 인사이트 → 게시물 전략: 무엇을(태그), 언제(요일), 어떻게(조합)</a:t>
-            </a:r>
-          </a:p>
-        </p:txBody>
-      </p:sp>
-      <p:sp>
-        <p:nvSpPr>
-          <p:cNvPr id="7" name="TextBox 6"/>
-          <p:cNvSpPr txBox="1"/>
-          <p:nvPr/>
-        </p:nvSpPr>
-        <p:spPr>
-          <a:xfrm>
-            <a:off x="822960" y="2514600"/>
-            <a:ext cx="10607040" cy="4206240"/>
-          </a:xfrm>
-          <a:prstGeom prst="rect">
-            <a:avLst/>
-          </a:prstGeom>
-          <a:noFill/>
-        </p:spPr>
-        <p:txBody>
-          <a:bodyPr wrap="square">
-            <a:spAutoFit/>
-          </a:bodyPr>
-          <a:lstStyle/>
-          <a:p>
-            <a:pPr>
-              <a:spcAft>
-                <a:spcPts val="1000"/>
-              </a:spcAft>
-            </a:pPr>
-            <a:r>
-              <a:rPr sz="1650" b="1">
-                <a:solidFill>
-                  <a:srgbClr val="E1306C"/>
-                </a:solidFill>
-                <a:latin typeface="맑은 고딕"/>
-              </a:rPr>
-              <a:t>●  주력 태그</a:t>
-            </a:r>
-          </a:p>
-          <a:p>
-            <a:pPr>
-              <a:spcAft>
-                <a:spcPts val="1300"/>
-              </a:spcAft>
-            </a:pPr>
-            <a:r>
-              <a:rPr sz="1350" b="0">
+              <a:t>#등산  #클라이밍</a:t>
+            </a:r>
+          </a:p>
+          <a:p>
+            <a:pPr>
+              <a:spcBef>
+                <a:spcPts val="400"/>
+              </a:spcBef>
+            </a:pPr>
+            <a:r>
+              <a:rPr sz="1250" b="0">
                 <a:solidFill>
                   <a:srgbClr val="6B6B6B"/>
                 </a:solidFill>
                 <a:latin typeface="맑은 고딕"/>
               </a:rPr>
-              <a:t>     #등산 #클라이밍 중심 콘텐츠 — 상승 모멘텀 구간에 게시해 노출 탄력 확보</a:t>
-            </a:r>
-          </a:p>
-          <a:p>
-            <a:pPr>
-              <a:spcAft>
-                <a:spcPts val="1000"/>
-              </a:spcAft>
-            </a:pPr>
-            <a:r>
-              <a:rPr sz="1650" b="1">
-                <a:solidFill>
-                  <a:srgbClr val="E1306C"/>
-                </a:solidFill>
-                <a:latin typeface="맑은 고딕"/>
-              </a:rPr>
-              <a:t>●  게시 타이밍</a:t>
-            </a:r>
-          </a:p>
-          <a:p>
-            <a:pPr>
-              <a:spcAft>
-                <a:spcPts val="1300"/>
-              </a:spcAft>
-            </a:pPr>
-            <a:r>
-              <a:rPr sz="1350" b="0">
-                <a:solidFill>
-                  <a:srgbClr val="6B6B6B"/>
-                </a:solidFill>
-                <a:latin typeface="맑은 고딕"/>
-              </a:rPr>
-              <a:t>     아웃도어 태그는 금~토 오전(주말 피크 직전), #다이어트는 일 저녁~월 오전('월요일 결심' 수요 선점)</a:t>
-            </a:r>
-          </a:p>
-          <a:p>
-            <a:pPr>
-              <a:spcAft>
-                <a:spcPts val="1000"/>
-              </a:spcAft>
-            </a:pPr>
-            <a:r>
-              <a:rPr sz="1650" b="1">
-                <a:solidFill>
-                  <a:srgbClr val="E1306C"/>
-                </a:solidFill>
-                <a:latin typeface="맑은 고딕"/>
-              </a:rPr>
-              <a:t>●  태그 조합</a:t>
-            </a:r>
-          </a:p>
-          <a:p>
-            <a:pPr>
-              <a:spcAft>
-                <a:spcPts val="1300"/>
-              </a:spcAft>
-            </a:pPr>
-            <a:r>
-              <a:rPr sz="1350" b="0">
-                <a:solidFill>
-                  <a:srgbClr val="6B6B6B"/>
-                </a:solidFill>
-                <a:latin typeface="맑은 고딕"/>
-              </a:rPr>
-              <a:t>     상승 태그 + 안정 태그 묶기: #등산 × #다이어트(여름 준비), #클라이밍 × #카페(실내 연계)</a:t>
-            </a:r>
-          </a:p>
-          <a:p>
-            <a:pPr>
-              <a:spcAft>
-                <a:spcPts val="1000"/>
-              </a:spcAft>
-            </a:pPr>
-            <a:r>
-              <a:rPr sz="1650" b="1">
-                <a:solidFill>
-                  <a:srgbClr val="E1306C"/>
-                </a:solidFill>
-                <a:latin typeface="맑은 고딕"/>
-              </a:rPr>
-              <a:t>●  리스크 관리</a:t>
-            </a:r>
-          </a:p>
-          <a:p>
-            <a:pPr>
-              <a:spcAft>
-                <a:spcPts val="1300"/>
-              </a:spcAft>
-            </a:pPr>
-            <a:r>
-              <a:rPr sz="1350" b="0">
-                <a:solidFill>
-                  <a:srgbClr val="6B6B6B"/>
-                </a:solidFill>
-                <a:latin typeface="맑은 고딕"/>
-              </a:rPr>
-              <a:t>     #피크닉·#캠핑은 하락 전환 — 신규 기획 보류, 기존 콘텐츠는 내년 3~4월 재활용 예약</a:t>
-            </a:r>
-          </a:p>
-          <a:p>
-            <a:pPr>
-              <a:spcAft>
-                <a:spcPts val="1000"/>
-              </a:spcAft>
-            </a:pPr>
-            <a:r>
-              <a:rPr sz="1650" b="1">
-                <a:solidFill>
-                  <a:srgbClr val="E1306C"/>
-                </a:solidFill>
-                <a:latin typeface="맑은 고딕"/>
-              </a:rPr>
-              <a:t>●  운영 루프</a:t>
-            </a:r>
-          </a:p>
-          <a:p>
-            <a:pPr>
-              <a:spcAft>
-                <a:spcPts val="1300"/>
-              </a:spcAft>
-            </a:pPr>
-            <a:r>
-              <a:rPr sz="1350" b="0">
-                <a:solidFill>
-                  <a:srgbClr val="6B6B6B"/>
-                </a:solidFill>
-                <a:latin typeface="맑은 고딕"/>
-              </a:rPr>
-              <a:t>     데이터랩 재수집(주 1회) → 모멘텀 갱신 → 태그 포트폴리오 리밸런싱</a:t>
+              <a:t>등산 +7.9%, 클라이밍 +5.5% — 초여름에도 모멘텀 유지, 지금 올라탈 태그</a:t>
             </a:r>
           </a:p>
         </p:txBody>
@@ -9356,8 +9169,8 @@
         </p:nvSpPr>
         <p:spPr>
           <a:xfrm>
-            <a:off x="0" y="6565392"/>
-            <a:ext cx="12191695" cy="292608"/>
+            <a:off x="6355080" y="1417320"/>
+            <a:ext cx="5394960" cy="1920240"/>
           </a:xfrm>
           <a:prstGeom prst="rect">
             <a:avLst/>
@@ -9394,7 +9207,454 @@
       </p:sp>
       <p:sp>
         <p:nvSpPr>
-          <p:cNvPr id="9" name="TextBox 8"/>
+          <p:cNvPr id="9" name="Rectangle 8"/>
+          <p:cNvSpPr/>
+          <p:nvPr/>
+        </p:nvSpPr>
+        <p:spPr>
+          <a:xfrm>
+            <a:off x="6355080" y="1417320"/>
+            <a:ext cx="128016" cy="1920240"/>
+          </a:xfrm>
+          <a:prstGeom prst="rect">
+            <a:avLst/>
+          </a:prstGeom>
+          <a:solidFill>
+            <a:srgbClr val="833AB4"/>
+          </a:solidFill>
+          <a:ln>
+            <a:noFill/>
+          </a:ln>
+          <a:effectLst/>
+        </p:spPr>
+        <p:style>
+          <a:lnRef idx="1">
+            <a:schemeClr val="accent1"/>
+          </a:lnRef>
+          <a:fillRef idx="3">
+            <a:schemeClr val="accent1"/>
+          </a:fillRef>
+          <a:effectRef idx="2">
+            <a:schemeClr val="accent1"/>
+          </a:effectRef>
+          <a:fontRef idx="minor">
+            <a:schemeClr val="lt1"/>
+          </a:fontRef>
+        </p:style>
+        <p:txBody>
+          <a:bodyPr rtlCol="0" anchor="ctr"/>
+          <a:lstStyle/>
+          <a:p>
+            <a:pPr algn="ctr"/>
+          </a:p>
+        </p:txBody>
+      </p:sp>
+      <p:sp>
+        <p:nvSpPr>
+          <p:cNvPr id="10" name="TextBox 9"/>
+          <p:cNvSpPr txBox="1"/>
+          <p:nvPr/>
+        </p:nvSpPr>
+        <p:spPr>
+          <a:xfrm>
+            <a:off x="6675120" y="1581912"/>
+            <a:ext cx="4846320" cy="1591056"/>
+          </a:xfrm>
+          <a:prstGeom prst="rect">
+            <a:avLst/>
+          </a:prstGeom>
+          <a:noFill/>
+        </p:spPr>
+        <p:txBody>
+          <a:bodyPr wrap="square">
+            <a:spAutoFit/>
+          </a:bodyPr>
+          <a:lstStyle/>
+          <a:p>
+            <a:r>
+              <a:rPr sz="1300" b="1">
+                <a:solidFill>
+                  <a:srgbClr val="833AB4"/>
+                </a:solidFill>
+                <a:latin typeface="맑은 고딕"/>
+              </a:rPr>
+              <a:t>🌊 피크 통과 (계절성 하락 전환)</a:t>
+            </a:r>
+          </a:p>
+          <a:p>
+            <a:r>
+              <a:rPr sz="2200" b="1">
+                <a:solidFill>
+                  <a:srgbClr val="222222"/>
+                </a:solidFill>
+                <a:latin typeface="맑은 고딕"/>
+              </a:rPr>
+              <a:t>#피크닉  #캠핑</a:t>
+            </a:r>
+          </a:p>
+          <a:p>
+            <a:pPr>
+              <a:spcBef>
+                <a:spcPts val="400"/>
+              </a:spcBef>
+            </a:pPr>
+            <a:r>
+              <a:rPr sz="1250" b="0">
+                <a:solidFill>
+                  <a:srgbClr val="6B6B6B"/>
+                </a:solidFill>
+                <a:latin typeface="맑은 고딕"/>
+              </a:rPr>
+              <a:t>연초 대비 +70%/+61%로 컸지만 최근 30일 -21%/-17% — 봄 수요 종료</a:t>
+            </a:r>
+          </a:p>
+        </p:txBody>
+      </p:sp>
+      <p:sp>
+        <p:nvSpPr>
+          <p:cNvPr id="11" name="Rectangle 10"/>
+          <p:cNvSpPr/>
+          <p:nvPr/>
+        </p:nvSpPr>
+        <p:spPr>
+          <a:xfrm>
+            <a:off x="685800" y="3611880"/>
+            <a:ext cx="5394960" cy="1920240"/>
+          </a:xfrm>
+          <a:prstGeom prst="rect">
+            <a:avLst/>
+          </a:prstGeom>
+          <a:solidFill>
+            <a:srgbClr val="F2F2F4"/>
+          </a:solidFill>
+          <a:ln>
+            <a:noFill/>
+          </a:ln>
+          <a:effectLst/>
+        </p:spPr>
+        <p:style>
+          <a:lnRef idx="1">
+            <a:schemeClr val="accent1"/>
+          </a:lnRef>
+          <a:fillRef idx="3">
+            <a:schemeClr val="accent1"/>
+          </a:fillRef>
+          <a:effectRef idx="2">
+            <a:schemeClr val="accent1"/>
+          </a:effectRef>
+          <a:fontRef idx="minor">
+            <a:schemeClr val="lt1"/>
+          </a:fontRef>
+        </p:style>
+        <p:txBody>
+          <a:bodyPr rtlCol="0" anchor="ctr"/>
+          <a:lstStyle/>
+          <a:p>
+            <a:pPr algn="ctr"/>
+          </a:p>
+        </p:txBody>
+      </p:sp>
+      <p:sp>
+        <p:nvSpPr>
+          <p:cNvPr id="12" name="Rectangle 11"/>
+          <p:cNvSpPr/>
+          <p:nvPr/>
+        </p:nvSpPr>
+        <p:spPr>
+          <a:xfrm>
+            <a:off x="685800" y="3611880"/>
+            <a:ext cx="128016" cy="1920240"/>
+          </a:xfrm>
+          <a:prstGeom prst="rect">
+            <a:avLst/>
+          </a:prstGeom>
+          <a:solidFill>
+            <a:srgbClr val="222222"/>
+          </a:solidFill>
+          <a:ln>
+            <a:noFill/>
+          </a:ln>
+          <a:effectLst/>
+        </p:spPr>
+        <p:style>
+          <a:lnRef idx="1">
+            <a:schemeClr val="accent1"/>
+          </a:lnRef>
+          <a:fillRef idx="3">
+            <a:schemeClr val="accent1"/>
+          </a:fillRef>
+          <a:effectRef idx="2">
+            <a:schemeClr val="accent1"/>
+          </a:effectRef>
+          <a:fontRef idx="minor">
+            <a:schemeClr val="lt1"/>
+          </a:fontRef>
+        </p:style>
+        <p:txBody>
+          <a:bodyPr rtlCol="0" anchor="ctr"/>
+          <a:lstStyle/>
+          <a:p>
+            <a:pPr algn="ctr"/>
+          </a:p>
+        </p:txBody>
+      </p:sp>
+      <p:sp>
+        <p:nvSpPr>
+          <p:cNvPr id="13" name="TextBox 12"/>
+          <p:cNvSpPr txBox="1"/>
+          <p:nvPr/>
+        </p:nvSpPr>
+        <p:spPr>
+          <a:xfrm>
+            <a:off x="1005840" y="3776472"/>
+            <a:ext cx="4846320" cy="1591056"/>
+          </a:xfrm>
+          <a:prstGeom prst="rect">
+            <a:avLst/>
+          </a:prstGeom>
+          <a:noFill/>
+        </p:spPr>
+        <p:txBody>
+          <a:bodyPr wrap="square">
+            <a:spAutoFit/>
+          </a:bodyPr>
+          <a:lstStyle/>
+          <a:p>
+            <a:r>
+              <a:rPr sz="1300" b="1">
+                <a:solidFill>
+                  <a:srgbClr val="222222"/>
+                </a:solidFill>
+                <a:latin typeface="맑은 고딕"/>
+              </a:rPr>
+              <a:t>💪 안정 수요 (시즌 진입)</a:t>
+            </a:r>
+          </a:p>
+          <a:p>
+            <a:r>
+              <a:rPr sz="2200" b="1">
+                <a:solidFill>
+                  <a:srgbClr val="222222"/>
+                </a:solidFill>
+                <a:latin typeface="맑은 고딕"/>
+              </a:rPr>
+              <a:t>#다이어트</a:t>
+            </a:r>
+          </a:p>
+          <a:p>
+            <a:pPr>
+              <a:spcBef>
+                <a:spcPts val="400"/>
+              </a:spcBef>
+            </a:pPr>
+            <a:r>
+              <a:rPr sz="1250" b="0">
+                <a:solidFill>
+                  <a:srgbClr val="6B6B6B"/>
+                </a:solidFill>
+                <a:latin typeface="맑은 고딕"/>
+              </a:rPr>
+              <a:t>최근 30일 +0.4%로 하락 멈춤 — 여름 직전 수요 재점화 구간, 월요일 피크 활용</a:t>
+            </a:r>
+          </a:p>
+        </p:txBody>
+      </p:sp>
+      <p:sp>
+        <p:nvSpPr>
+          <p:cNvPr id="14" name="Rectangle 13"/>
+          <p:cNvSpPr/>
+          <p:nvPr/>
+        </p:nvSpPr>
+        <p:spPr>
+          <a:xfrm>
+            <a:off x="6355080" y="3611880"/>
+            <a:ext cx="5394960" cy="1920240"/>
+          </a:xfrm>
+          <a:prstGeom prst="rect">
+            <a:avLst/>
+          </a:prstGeom>
+          <a:solidFill>
+            <a:srgbClr val="F2F2F4"/>
+          </a:solidFill>
+          <a:ln>
+            <a:noFill/>
+          </a:ln>
+          <a:effectLst/>
+        </p:spPr>
+        <p:style>
+          <a:lnRef idx="1">
+            <a:schemeClr val="accent1"/>
+          </a:lnRef>
+          <a:fillRef idx="3">
+            <a:schemeClr val="accent1"/>
+          </a:fillRef>
+          <a:effectRef idx="2">
+            <a:schemeClr val="accent1"/>
+          </a:effectRef>
+          <a:fontRef idx="minor">
+            <a:schemeClr val="lt1"/>
+          </a:fontRef>
+        </p:style>
+        <p:txBody>
+          <a:bodyPr rtlCol="0" anchor="ctr"/>
+          <a:lstStyle/>
+          <a:p>
+            <a:pPr algn="ctr"/>
+          </a:p>
+        </p:txBody>
+      </p:sp>
+      <p:sp>
+        <p:nvSpPr>
+          <p:cNvPr id="15" name="Rectangle 14"/>
+          <p:cNvSpPr/>
+          <p:nvPr/>
+        </p:nvSpPr>
+        <p:spPr>
+          <a:xfrm>
+            <a:off x="6355080" y="3611880"/>
+            <a:ext cx="128016" cy="1920240"/>
+          </a:xfrm>
+          <a:prstGeom prst="rect">
+            <a:avLst/>
+          </a:prstGeom>
+          <a:solidFill>
+            <a:srgbClr val="6B6B6B"/>
+          </a:solidFill>
+          <a:ln>
+            <a:noFill/>
+          </a:ln>
+          <a:effectLst/>
+        </p:spPr>
+        <p:style>
+          <a:lnRef idx="1">
+            <a:schemeClr val="accent1"/>
+          </a:lnRef>
+          <a:fillRef idx="3">
+            <a:schemeClr val="accent1"/>
+          </a:fillRef>
+          <a:effectRef idx="2">
+            <a:schemeClr val="accent1"/>
+          </a:effectRef>
+          <a:fontRef idx="minor">
+            <a:schemeClr val="lt1"/>
+          </a:fontRef>
+        </p:style>
+        <p:txBody>
+          <a:bodyPr rtlCol="0" anchor="ctr"/>
+          <a:lstStyle/>
+          <a:p>
+            <a:pPr algn="ctr"/>
+          </a:p>
+        </p:txBody>
+      </p:sp>
+      <p:sp>
+        <p:nvSpPr>
+          <p:cNvPr id="16" name="TextBox 15"/>
+          <p:cNvSpPr txBox="1"/>
+          <p:nvPr/>
+        </p:nvSpPr>
+        <p:spPr>
+          <a:xfrm>
+            <a:off x="6675120" y="3776472"/>
+            <a:ext cx="4846320" cy="1591056"/>
+          </a:xfrm>
+          <a:prstGeom prst="rect">
+            <a:avLst/>
+          </a:prstGeom>
+          <a:noFill/>
+        </p:spPr>
+        <p:txBody>
+          <a:bodyPr wrap="square">
+            <a:spAutoFit/>
+          </a:bodyPr>
+          <a:lstStyle/>
+          <a:p>
+            <a:r>
+              <a:rPr sz="1300" b="1">
+                <a:solidFill>
+                  <a:srgbClr val="6B6B6B"/>
+                </a:solidFill>
+                <a:latin typeface="맑은 고딕"/>
+              </a:rPr>
+              <a:t>📉 약세 지속</a:t>
+            </a:r>
+          </a:p>
+          <a:p>
+            <a:r>
+              <a:rPr sz="2200" b="1">
+                <a:solidFill>
+                  <a:srgbClr val="222222"/>
+                </a:solidFill>
+                <a:latin typeface="맑은 고딕"/>
+              </a:rPr>
+              <a:t>#카페  #국내여행</a:t>
+            </a:r>
+          </a:p>
+          <a:p>
+            <a:pPr>
+              <a:spcBef>
+                <a:spcPts val="400"/>
+              </a:spcBef>
+            </a:pPr>
+            <a:r>
+              <a:rPr sz="1250" b="0">
+                <a:solidFill>
+                  <a:srgbClr val="6B6B6B"/>
+                </a:solidFill>
+                <a:latin typeface="맑은 고딕"/>
+              </a:rPr>
+              <a:t>연초 대비 -50%/-15% — 단독 태그보다 상승 태그와 조합 권장</a:t>
+            </a:r>
+          </a:p>
+        </p:txBody>
+      </p:sp>
+      <p:sp>
+        <p:nvSpPr>
+          <p:cNvPr id="17" name="Rectangle 16"/>
+          <p:cNvSpPr/>
+          <p:nvPr/>
+        </p:nvSpPr>
+        <p:spPr>
+          <a:xfrm>
+            <a:off x="0" y="6565392"/>
+            <a:ext cx="12191695" cy="292608"/>
+          </a:xfrm>
+          <a:prstGeom prst="rect">
+            <a:avLst/>
+          </a:prstGeom>
+          <a:solidFill>
+            <a:srgbClr val="F2F2F4"/>
+          </a:solidFill>
+          <a:ln>
+            <a:noFill/>
+          </a:ln>
+          <a:effectLst/>
+        </p:spPr>
+        <p:style>
+          <a:lnRef idx="1">
+            <a:schemeClr val="accent1"/>
+          </a:lnRef>
+          <a:fillRef idx="3">
+            <a:schemeClr val="accent1"/>
+          </a:fillRef>
+          <a:effectRef idx="2">
+            <a:schemeClr val="accent1"/>
+          </a:effectRef>
+          <a:fontRef idx="minor">
+            <a:schemeClr val="lt1"/>
+          </a:fontRef>
+        </p:style>
+        <p:txBody>
+          <a:bodyPr rtlCol="0" anchor="ctr"/>
+          <a:lstStyle/>
+          <a:p>
+            <a:pPr algn="ctr"/>
+          </a:p>
+        </p:txBody>
+      </p:sp>
+      <p:sp>
+        <p:nvSpPr>
+          <p:cNvPr id="18" name="TextBox 17"/>
           <p:cNvSpPr txBox="1"/>
           <p:nvPr/>
         </p:nvSpPr>
@@ -9428,7 +9688,7 @@
       </p:sp>
       <p:sp>
         <p:nvSpPr>
-          <p:cNvPr id="10" name="TextBox 9"/>
+          <p:cNvPr id="19" name="TextBox 18"/>
           <p:cNvSpPr txBox="1"/>
           <p:nvPr/>
         </p:nvSpPr>
@@ -9552,7 +9812,7 @@
                 </a:solidFill>
                 <a:latin typeface="Segoe UI"/>
               </a:rPr>
-              <a:t>08 · CODE</a:t>
+              <a:t>07 · ACTION</a:t>
             </a:r>
           </a:p>
         </p:txBody>
@@ -9586,502 +9846,21 @@
                 </a:solidFill>
                 <a:latin typeface="맑은 고딕"/>
               </a:rPr>
-              <a:t>핵심 코드 ①  데이터 → 평활화 → 차분</a:t>
-            </a:r>
-          </a:p>
-        </p:txBody>
-      </p:sp>
-      <p:sp>
-        <p:nvSpPr>
-          <p:cNvPr id="5" name="TextBox 4"/>
-          <p:cNvSpPr txBox="1"/>
-          <p:nvPr/>
-        </p:nvSpPr>
-        <p:spPr>
-          <a:xfrm>
-            <a:off x="731520" y="1371600"/>
-            <a:ext cx="10789920" cy="320040"/>
-          </a:xfrm>
-          <a:prstGeom prst="rect">
-            <a:avLst/>
-          </a:prstGeom>
-          <a:noFill/>
-        </p:spPr>
-        <p:txBody>
-          <a:bodyPr wrap="square">
-            <a:spAutoFit/>
-          </a:bodyPr>
-          <a:lstStyle/>
-          <a:p>
-            <a:r>
-              <a:rPr sz="1350" b="1">
-                <a:solidFill>
-                  <a:srgbClr val="E1306C"/>
-                </a:solidFill>
-                <a:latin typeface="맑은 고딕"/>
-              </a:rPr>
-              <a:t>●  tidy 패널을 날짜×태그 행렬로 (pandas pivot)</a:t>
-            </a:r>
-          </a:p>
-        </p:txBody>
-      </p:sp>
-      <p:sp>
-        <p:nvSpPr>
-          <p:cNvPr id="6" name="Rectangle 5"/>
+              <a:t>콘텐츠 활용 전략</a:t>
+            </a:r>
+          </a:p>
+        </p:txBody>
+      </p:sp>
+      <p:sp>
+        <p:nvSpPr>
+          <p:cNvPr id="5" name="Rectangle 4"/>
           <p:cNvSpPr/>
           <p:nvPr/>
         </p:nvSpPr>
         <p:spPr>
           <a:xfrm>
-            <a:off x="914400" y="1755648"/>
-            <a:ext cx="10424160" cy="457200"/>
-          </a:xfrm>
-          <a:prstGeom prst="rect">
-            <a:avLst/>
-          </a:prstGeom>
-          <a:solidFill>
-            <a:srgbClr val="2B2B33"/>
-          </a:solidFill>
-          <a:ln>
-            <a:noFill/>
-          </a:ln>
-          <a:effectLst/>
-        </p:spPr>
-        <p:style>
-          <a:lnRef idx="1">
-            <a:schemeClr val="accent1"/>
-          </a:lnRef>
-          <a:fillRef idx="3">
-            <a:schemeClr val="accent1"/>
-          </a:fillRef>
-          <a:effectRef idx="2">
-            <a:schemeClr val="accent1"/>
-          </a:effectRef>
-          <a:fontRef idx="minor">
-            <a:schemeClr val="lt1"/>
-          </a:fontRef>
-        </p:style>
-        <p:txBody>
-          <a:bodyPr rtlCol="0" anchor="ctr"/>
-          <a:lstStyle/>
-          <a:p>
-            <a:pPr algn="ctr"/>
-          </a:p>
-        </p:txBody>
-      </p:sp>
-      <p:sp>
-        <p:nvSpPr>
-          <p:cNvPr id="7" name="TextBox 6"/>
-          <p:cNvSpPr txBox="1"/>
-          <p:nvPr/>
-        </p:nvSpPr>
-        <p:spPr>
-          <a:xfrm>
-            <a:off x="1143000" y="1847088"/>
-            <a:ext cx="10058400" cy="310896"/>
-          </a:xfrm>
-          <a:prstGeom prst="rect">
-            <a:avLst/>
-          </a:prstGeom>
-          <a:noFill/>
-        </p:spPr>
-        <p:txBody>
-          <a:bodyPr wrap="square">
-            <a:spAutoFit/>
-          </a:bodyPr>
-          <a:lstStyle/>
-          <a:p>
-            <a:r>
-              <a:rPr sz="1200" b="0">
-                <a:solidFill>
-                  <a:srgbClr val="E8E8EE"/>
-                </a:solidFill>
-                <a:latin typeface="Consolas"/>
-              </a:rPr>
-              <a:t>wide = panel.pivot(index="date", columns="hashtag", values="ratio")</a:t>
-            </a:r>
-          </a:p>
-        </p:txBody>
-      </p:sp>
-      <p:sp>
-        <p:nvSpPr>
-          <p:cNvPr id="8" name="TextBox 7"/>
-          <p:cNvSpPr txBox="1"/>
-          <p:nvPr/>
-        </p:nvSpPr>
-        <p:spPr>
-          <a:xfrm>
-            <a:off x="731520" y="2377440"/>
-            <a:ext cx="10789920" cy="320040"/>
-          </a:xfrm>
-          <a:prstGeom prst="rect">
-            <a:avLst/>
-          </a:prstGeom>
-          <a:noFill/>
-        </p:spPr>
-        <p:txBody>
-          <a:bodyPr wrap="square">
-            <a:spAutoFit/>
-          </a:bodyPr>
-          <a:lstStyle/>
-          <a:p>
-            <a:r>
-              <a:rPr sz="1350" b="1">
-                <a:solidFill>
-                  <a:srgbClr val="E1306C"/>
-                </a:solidFill>
-                <a:latin typeface="맑은 고딕"/>
-              </a:rPr>
-              <a:t>●  이동평균 평활화 — 7일 중심 윈도우가 주간 주기를 상쇄</a:t>
-            </a:r>
-          </a:p>
-        </p:txBody>
-      </p:sp>
-      <p:sp>
-        <p:nvSpPr>
-          <p:cNvPr id="9" name="Rectangle 8"/>
-          <p:cNvSpPr/>
-          <p:nvPr/>
-        </p:nvSpPr>
-        <p:spPr>
-          <a:xfrm>
-            <a:off x="914400" y="2761488"/>
-            <a:ext cx="10424160" cy="457200"/>
-          </a:xfrm>
-          <a:prstGeom prst="rect">
-            <a:avLst/>
-          </a:prstGeom>
-          <a:solidFill>
-            <a:srgbClr val="2B2B33"/>
-          </a:solidFill>
-          <a:ln>
-            <a:noFill/>
-          </a:ln>
-          <a:effectLst/>
-        </p:spPr>
-        <p:style>
-          <a:lnRef idx="1">
-            <a:schemeClr val="accent1"/>
-          </a:lnRef>
-          <a:fillRef idx="3">
-            <a:schemeClr val="accent1"/>
-          </a:fillRef>
-          <a:effectRef idx="2">
-            <a:schemeClr val="accent1"/>
-          </a:effectRef>
-          <a:fontRef idx="minor">
-            <a:schemeClr val="lt1"/>
-          </a:fontRef>
-        </p:style>
-        <p:txBody>
-          <a:bodyPr rtlCol="0" anchor="ctr"/>
-          <a:lstStyle/>
-          <a:p>
-            <a:pPr algn="ctr"/>
-          </a:p>
-        </p:txBody>
-      </p:sp>
-      <p:sp>
-        <p:nvSpPr>
-          <p:cNvPr id="10" name="TextBox 9"/>
-          <p:cNvSpPr txBox="1"/>
-          <p:nvPr/>
-        </p:nvSpPr>
-        <p:spPr>
-          <a:xfrm>
-            <a:off x="1143000" y="2852928"/>
-            <a:ext cx="10058400" cy="310896"/>
-          </a:xfrm>
-          <a:prstGeom prst="rect">
-            <a:avLst/>
-          </a:prstGeom>
-          <a:noFill/>
-        </p:spPr>
-        <p:txBody>
-          <a:bodyPr wrap="square">
-            <a:spAutoFit/>
-          </a:bodyPr>
-          <a:lstStyle/>
-          <a:p>
-            <a:r>
-              <a:rPr sz="1200" b="0">
-                <a:solidFill>
-                  <a:srgbClr val="E8E8EE"/>
-                </a:solidFill>
-                <a:latin typeface="Consolas"/>
-              </a:rPr>
-              <a:t>ma7 = s.rolling(7, center=True).mean()   # 추세 + 노이즈 제거</a:t>
-            </a:r>
-          </a:p>
-        </p:txBody>
-      </p:sp>
-      <p:sp>
-        <p:nvSpPr>
-          <p:cNvPr id="11" name="TextBox 10"/>
-          <p:cNvSpPr txBox="1"/>
-          <p:nvPr/>
-        </p:nvSpPr>
-        <p:spPr>
-          <a:xfrm>
-            <a:off x="731520" y="3383280"/>
-            <a:ext cx="10789920" cy="320040"/>
-          </a:xfrm>
-          <a:prstGeom prst="rect">
-            <a:avLst/>
-          </a:prstGeom>
-          <a:noFill/>
-        </p:spPr>
-        <p:txBody>
-          <a:bodyPr wrap="square">
-            <a:spAutoFit/>
-          </a:bodyPr>
-          <a:lstStyle/>
-          <a:p>
-            <a:r>
-              <a:rPr sz="1350" b="1">
-                <a:solidFill>
-                  <a:srgbClr val="E1306C"/>
-                </a:solidFill>
-                <a:latin typeface="맑은 고딕"/>
-              </a:rPr>
-              <a:t>●  1차 차분으로 정상화 (ARIMA의 d=1)</a:t>
-            </a:r>
-          </a:p>
-        </p:txBody>
-      </p:sp>
-      <p:sp>
-        <p:nvSpPr>
-          <p:cNvPr id="12" name="Rectangle 11"/>
-          <p:cNvSpPr/>
-          <p:nvPr/>
-        </p:nvSpPr>
-        <p:spPr>
-          <a:xfrm>
-            <a:off x="914400" y="3767328"/>
-            <a:ext cx="10424160" cy="713232"/>
-          </a:xfrm>
-          <a:prstGeom prst="rect">
-            <a:avLst/>
-          </a:prstGeom>
-          <a:solidFill>
-            <a:srgbClr val="2B2B33"/>
-          </a:solidFill>
-          <a:ln>
-            <a:noFill/>
-          </a:ln>
-          <a:effectLst/>
-        </p:spPr>
-        <p:style>
-          <a:lnRef idx="1">
-            <a:schemeClr val="accent1"/>
-          </a:lnRef>
-          <a:fillRef idx="3">
-            <a:schemeClr val="accent1"/>
-          </a:fillRef>
-          <a:effectRef idx="2">
-            <a:schemeClr val="accent1"/>
-          </a:effectRef>
-          <a:fontRef idx="minor">
-            <a:schemeClr val="lt1"/>
-          </a:fontRef>
-        </p:style>
-        <p:txBody>
-          <a:bodyPr rtlCol="0" anchor="ctr"/>
-          <a:lstStyle/>
-          <a:p>
-            <a:pPr algn="ctr"/>
-          </a:p>
-        </p:txBody>
-      </p:sp>
-      <p:sp>
-        <p:nvSpPr>
-          <p:cNvPr id="13" name="TextBox 12"/>
-          <p:cNvSpPr txBox="1"/>
-          <p:nvPr/>
-        </p:nvSpPr>
-        <p:spPr>
-          <a:xfrm>
-            <a:off x="1143000" y="3858768"/>
-            <a:ext cx="10058400" cy="566928"/>
-          </a:xfrm>
-          <a:prstGeom prst="rect">
-            <a:avLst/>
-          </a:prstGeom>
-          <a:noFill/>
-        </p:spPr>
-        <p:txBody>
-          <a:bodyPr wrap="square">
-            <a:spAutoFit/>
-          </a:bodyPr>
-          <a:lstStyle/>
-          <a:p>
-            <a:r>
-              <a:rPr sz="1200" b="0">
-                <a:solidFill>
-                  <a:srgbClr val="E8E8EE"/>
-                </a:solidFill>
-                <a:latin typeface="Consolas"/>
-              </a:rPr>
-              <a:t>diff = s.diff()                          # X_t - X_{t-1}</a:t>
-            </a:r>
-          </a:p>
-          <a:p>
-            <a:r>
-              <a:rPr sz="1200" b="0">
-                <a:solidFill>
-                  <a:srgbClr val="E8E8EE"/>
-                </a:solidFill>
-                <a:latin typeface="Consolas"/>
-              </a:rPr>
-              <a:t>diff.rolling(28).mean()                  # 평균이 0에 붙는지 진단</a:t>
-            </a:r>
-          </a:p>
-        </p:txBody>
-      </p:sp>
-      <p:sp>
-        <p:nvSpPr>
-          <p:cNvPr id="14" name="TextBox 13"/>
-          <p:cNvSpPr txBox="1"/>
-          <p:nvPr/>
-        </p:nvSpPr>
-        <p:spPr>
-          <a:xfrm>
-            <a:off x="731520" y="4645152"/>
-            <a:ext cx="10789920" cy="320040"/>
-          </a:xfrm>
-          <a:prstGeom prst="rect">
-            <a:avLst/>
-          </a:prstGeom>
-          <a:noFill/>
-        </p:spPr>
-        <p:txBody>
-          <a:bodyPr wrap="square">
-            <a:spAutoFit/>
-          </a:bodyPr>
-          <a:lstStyle/>
-          <a:p>
-            <a:r>
-              <a:rPr sz="1350" b="1">
-                <a:solidFill>
-                  <a:srgbClr val="E1306C"/>
-                </a:solidFill>
-                <a:latin typeface="맑은 고딕"/>
-              </a:rPr>
-              <a:t>●  가법 분해 — 추세는 이동평균, 계절은 '같은 요일끼리 평균'</a:t>
-            </a:r>
-          </a:p>
-        </p:txBody>
-      </p:sp>
-      <p:sp>
-        <p:nvSpPr>
-          <p:cNvPr id="15" name="Rectangle 14"/>
-          <p:cNvSpPr/>
-          <p:nvPr/>
-        </p:nvSpPr>
-        <p:spPr>
-          <a:xfrm>
-            <a:off x="914400" y="5029200"/>
-            <a:ext cx="10424160" cy="969264"/>
-          </a:xfrm>
-          <a:prstGeom prst="rect">
-            <a:avLst/>
-          </a:prstGeom>
-          <a:solidFill>
-            <a:srgbClr val="2B2B33"/>
-          </a:solidFill>
-          <a:ln>
-            <a:noFill/>
-          </a:ln>
-          <a:effectLst/>
-        </p:spPr>
-        <p:style>
-          <a:lnRef idx="1">
-            <a:schemeClr val="accent1"/>
-          </a:lnRef>
-          <a:fillRef idx="3">
-            <a:schemeClr val="accent1"/>
-          </a:fillRef>
-          <a:effectRef idx="2">
-            <a:schemeClr val="accent1"/>
-          </a:effectRef>
-          <a:fontRef idx="minor">
-            <a:schemeClr val="lt1"/>
-          </a:fontRef>
-        </p:style>
-        <p:txBody>
-          <a:bodyPr rtlCol="0" anchor="ctr"/>
-          <a:lstStyle/>
-          <a:p>
-            <a:pPr algn="ctr"/>
-          </a:p>
-        </p:txBody>
-      </p:sp>
-      <p:sp>
-        <p:nvSpPr>
-          <p:cNvPr id="16" name="TextBox 15"/>
-          <p:cNvSpPr txBox="1"/>
-          <p:nvPr/>
-        </p:nvSpPr>
-        <p:spPr>
-          <a:xfrm>
-            <a:off x="1143000" y="5120640"/>
-            <a:ext cx="10058400" cy="822960"/>
-          </a:xfrm>
-          <a:prstGeom prst="rect">
-            <a:avLst/>
-          </a:prstGeom>
-          <a:noFill/>
-        </p:spPr>
-        <p:txBody>
-          <a:bodyPr wrap="square">
-            <a:spAutoFit/>
-          </a:bodyPr>
-          <a:lstStyle/>
-          <a:p>
-            <a:r>
-              <a:rPr sz="1200" b="0">
-                <a:solidFill>
-                  <a:srgbClr val="E8E8EE"/>
-                </a:solidFill>
-                <a:latin typeface="Consolas"/>
-              </a:rPr>
-              <a:t>trend    = s.rolling(7, center=True).mean()</a:t>
-            </a:r>
-          </a:p>
-          <a:p>
-            <a:r>
-              <a:rPr sz="1200" b="0">
-                <a:solidFill>
-                  <a:srgbClr val="E8E8EE"/>
-                </a:solidFill>
-                <a:latin typeface="Consolas"/>
-              </a:rPr>
-              <a:t>seasonal = (s - trend).groupby(s.index.weekday).transform("mean")</a:t>
-            </a:r>
-          </a:p>
-          <a:p>
-            <a:r>
-              <a:rPr sz="1200" b="0">
-                <a:solidFill>
-                  <a:srgbClr val="E8E8EE"/>
-                </a:solidFill>
-                <a:latin typeface="Consolas"/>
-              </a:rPr>
-              <a:t>residual = s - trend - seasonal          # 백색잡음이면 성공</a:t>
-            </a:r>
-          </a:p>
-        </p:txBody>
-      </p:sp>
-      <p:sp>
-        <p:nvSpPr>
-          <p:cNvPr id="17" name="Rectangle 16"/>
-          <p:cNvSpPr/>
-          <p:nvPr/>
-        </p:nvSpPr>
-        <p:spPr>
-          <a:xfrm>
-            <a:off x="0" y="6565392"/>
-            <a:ext cx="12191695" cy="292608"/>
+            <a:off x="685800" y="1371600"/>
+            <a:ext cx="10789920" cy="822960"/>
           </a:xfrm>
           <a:prstGeom prst="rect">
             <a:avLst/>
@@ -10118,7 +9897,268 @@
       </p:sp>
       <p:sp>
         <p:nvSpPr>
-          <p:cNvPr id="18" name="TextBox 17"/>
+          <p:cNvPr id="6" name="TextBox 5"/>
+          <p:cNvSpPr txBox="1"/>
+          <p:nvPr/>
+        </p:nvSpPr>
+        <p:spPr>
+          <a:xfrm>
+            <a:off x="914400" y="1481328"/>
+            <a:ext cx="10332720" cy="640080"/>
+          </a:xfrm>
+          <a:prstGeom prst="rect">
+            <a:avLst/>
+          </a:prstGeom>
+          <a:noFill/>
+        </p:spPr>
+        <p:txBody>
+          <a:bodyPr wrap="square" anchor="ctr">
+            <a:spAutoFit/>
+          </a:bodyPr>
+          <a:lstStyle/>
+          <a:p>
+            <a:r>
+              <a:rPr sz="1500" b="1">
+                <a:solidFill>
+                  <a:srgbClr val="222222"/>
+                </a:solidFill>
+                <a:latin typeface="맑은 고딕"/>
+              </a:rPr>
+              <a:t>시계열 인사이트 → 게시물 전략: 무엇을(태그), 언제(요일), 어떻게(조합)</a:t>
+            </a:r>
+          </a:p>
+        </p:txBody>
+      </p:sp>
+      <p:sp>
+        <p:nvSpPr>
+          <p:cNvPr id="7" name="TextBox 6"/>
+          <p:cNvSpPr txBox="1"/>
+          <p:nvPr/>
+        </p:nvSpPr>
+        <p:spPr>
+          <a:xfrm>
+            <a:off x="822960" y="2514600"/>
+            <a:ext cx="10607040" cy="4206240"/>
+          </a:xfrm>
+          <a:prstGeom prst="rect">
+            <a:avLst/>
+          </a:prstGeom>
+          <a:noFill/>
+        </p:spPr>
+        <p:txBody>
+          <a:bodyPr wrap="square">
+            <a:spAutoFit/>
+          </a:bodyPr>
+          <a:lstStyle/>
+          <a:p>
+            <a:pPr>
+              <a:spcAft>
+                <a:spcPts val="1000"/>
+              </a:spcAft>
+            </a:pPr>
+            <a:r>
+              <a:rPr sz="1650" b="1">
+                <a:solidFill>
+                  <a:srgbClr val="E1306C"/>
+                </a:solidFill>
+                <a:latin typeface="맑은 고딕"/>
+              </a:rPr>
+              <a:t>●  주력 태그</a:t>
+            </a:r>
+          </a:p>
+          <a:p>
+            <a:pPr>
+              <a:spcAft>
+                <a:spcPts val="1300"/>
+              </a:spcAft>
+            </a:pPr>
+            <a:r>
+              <a:rPr sz="1350" b="0">
+                <a:solidFill>
+                  <a:srgbClr val="6B6B6B"/>
+                </a:solidFill>
+                <a:latin typeface="맑은 고딕"/>
+              </a:rPr>
+              <a:t>     #등산 #클라이밍 중심 콘텐츠 — 상승 모멘텀 구간에 게시해 노출 탄력 확보</a:t>
+            </a:r>
+          </a:p>
+          <a:p>
+            <a:pPr>
+              <a:spcAft>
+                <a:spcPts val="1000"/>
+              </a:spcAft>
+            </a:pPr>
+            <a:r>
+              <a:rPr sz="1650" b="1">
+                <a:solidFill>
+                  <a:srgbClr val="E1306C"/>
+                </a:solidFill>
+                <a:latin typeface="맑은 고딕"/>
+              </a:rPr>
+              <a:t>●  게시 타이밍</a:t>
+            </a:r>
+          </a:p>
+          <a:p>
+            <a:pPr>
+              <a:spcAft>
+                <a:spcPts val="1300"/>
+              </a:spcAft>
+            </a:pPr>
+            <a:r>
+              <a:rPr sz="1350" b="0">
+                <a:solidFill>
+                  <a:srgbClr val="6B6B6B"/>
+                </a:solidFill>
+                <a:latin typeface="맑은 고딕"/>
+              </a:rPr>
+              <a:t>     아웃도어 태그는 금~토 오전(주말 피크 직전), #다이어트는 일 저녁~월 오전('월요일 결심' 수요 선점)</a:t>
+            </a:r>
+          </a:p>
+          <a:p>
+            <a:pPr>
+              <a:spcAft>
+                <a:spcPts val="1000"/>
+              </a:spcAft>
+            </a:pPr>
+            <a:r>
+              <a:rPr sz="1650" b="1">
+                <a:solidFill>
+                  <a:srgbClr val="E1306C"/>
+                </a:solidFill>
+                <a:latin typeface="맑은 고딕"/>
+              </a:rPr>
+              <a:t>●  태그 조합</a:t>
+            </a:r>
+          </a:p>
+          <a:p>
+            <a:pPr>
+              <a:spcAft>
+                <a:spcPts val="1300"/>
+              </a:spcAft>
+            </a:pPr>
+            <a:r>
+              <a:rPr sz="1350" b="0">
+                <a:solidFill>
+                  <a:srgbClr val="6B6B6B"/>
+                </a:solidFill>
+                <a:latin typeface="맑은 고딕"/>
+              </a:rPr>
+              <a:t>     상승 태그 + 안정 태그 묶기: #등산 × #다이어트(여름 준비), #클라이밍 × #카페(실내 연계)</a:t>
+            </a:r>
+          </a:p>
+          <a:p>
+            <a:pPr>
+              <a:spcAft>
+                <a:spcPts val="1000"/>
+              </a:spcAft>
+            </a:pPr>
+            <a:r>
+              <a:rPr sz="1650" b="1">
+                <a:solidFill>
+                  <a:srgbClr val="E1306C"/>
+                </a:solidFill>
+                <a:latin typeface="맑은 고딕"/>
+              </a:rPr>
+              <a:t>●  리스크 관리</a:t>
+            </a:r>
+          </a:p>
+          <a:p>
+            <a:pPr>
+              <a:spcAft>
+                <a:spcPts val="1300"/>
+              </a:spcAft>
+            </a:pPr>
+            <a:r>
+              <a:rPr sz="1350" b="0">
+                <a:solidFill>
+                  <a:srgbClr val="6B6B6B"/>
+                </a:solidFill>
+                <a:latin typeface="맑은 고딕"/>
+              </a:rPr>
+              <a:t>     #피크닉·#캠핑은 하락 전환 — 신규 기획 보류, 기존 콘텐츠는 내년 3~4월 재활용 예약</a:t>
+            </a:r>
+          </a:p>
+          <a:p>
+            <a:pPr>
+              <a:spcAft>
+                <a:spcPts val="1000"/>
+              </a:spcAft>
+            </a:pPr>
+            <a:r>
+              <a:rPr sz="1650" b="1">
+                <a:solidFill>
+                  <a:srgbClr val="E1306C"/>
+                </a:solidFill>
+                <a:latin typeface="맑은 고딕"/>
+              </a:rPr>
+              <a:t>●  운영 루프</a:t>
+            </a:r>
+          </a:p>
+          <a:p>
+            <a:pPr>
+              <a:spcAft>
+                <a:spcPts val="1300"/>
+              </a:spcAft>
+            </a:pPr>
+            <a:r>
+              <a:rPr sz="1350" b="0">
+                <a:solidFill>
+                  <a:srgbClr val="6B6B6B"/>
+                </a:solidFill>
+                <a:latin typeface="맑은 고딕"/>
+              </a:rPr>
+              <a:t>     데이터랩 재수집(주 1회) → 모멘텀 갱신 → 태그 포트폴리오 리밸런싱</a:t>
+            </a:r>
+          </a:p>
+        </p:txBody>
+      </p:sp>
+      <p:sp>
+        <p:nvSpPr>
+          <p:cNvPr id="8" name="Rectangle 7"/>
+          <p:cNvSpPr/>
+          <p:nvPr/>
+        </p:nvSpPr>
+        <p:spPr>
+          <a:xfrm>
+            <a:off x="0" y="6565392"/>
+            <a:ext cx="12191695" cy="292608"/>
+          </a:xfrm>
+          <a:prstGeom prst="rect">
+            <a:avLst/>
+          </a:prstGeom>
+          <a:solidFill>
+            <a:srgbClr val="F2F2F4"/>
+          </a:solidFill>
+          <a:ln>
+            <a:noFill/>
+          </a:ln>
+          <a:effectLst/>
+        </p:spPr>
+        <p:style>
+          <a:lnRef idx="1">
+            <a:schemeClr val="accent1"/>
+          </a:lnRef>
+          <a:fillRef idx="3">
+            <a:schemeClr val="accent1"/>
+          </a:fillRef>
+          <a:effectRef idx="2">
+            <a:schemeClr val="accent1"/>
+          </a:effectRef>
+          <a:fontRef idx="minor">
+            <a:schemeClr val="lt1"/>
+          </a:fontRef>
+        </p:style>
+        <p:txBody>
+          <a:bodyPr rtlCol="0" anchor="ctr"/>
+          <a:lstStyle/>
+          <a:p>
+            <a:pPr algn="ctr"/>
+          </a:p>
+        </p:txBody>
+      </p:sp>
+      <p:sp>
+        <p:nvSpPr>
+          <p:cNvPr id="9" name="TextBox 8"/>
           <p:cNvSpPr txBox="1"/>
           <p:nvPr/>
         </p:nvSpPr>
@@ -10152,7 +10192,7 @@
       </p:sp>
       <p:sp>
         <p:nvSpPr>
-          <p:cNvPr id="19" name="TextBox 18"/>
+          <p:cNvPr id="10" name="TextBox 9"/>
           <p:cNvSpPr txBox="1"/>
           <p:nvPr/>
         </p:nvSpPr>
@@ -10310,7 +10350,7 @@
                 </a:solidFill>
                 <a:latin typeface="맑은 고딕"/>
               </a:rPr>
-              <a:t>핵심 코드 ②  ACF → 예측</a:t>
+              <a:t>핵심 코드 ①  데이터 → 평활화 → 차분</a:t>
             </a:r>
           </a:p>
         </p:txBody>
@@ -10344,7 +10384,7 @@
                 </a:solidFill>
                 <a:latin typeface="맑은 고딕"/>
               </a:rPr>
-              <a:t>●  표본 ACF 직접 구현 — ρ(k) = γ(k)/γ(0)</a:t>
+              <a:t>●  tidy 패널을 날짜×태그 행렬로 (pandas pivot)</a:t>
             </a:r>
           </a:p>
         </p:txBody>
@@ -10358,7 +10398,7 @@
         <p:spPr>
           <a:xfrm>
             <a:off x="914400" y="1755648"/>
-            <a:ext cx="10424160" cy="969264"/>
+            <a:ext cx="10424160" cy="457200"/>
           </a:xfrm>
           <a:prstGeom prst="rect">
             <a:avLst/>
@@ -10402,7 +10442,7 @@
         <p:spPr>
           <a:xfrm>
             <a:off x="1143000" y="1847088"/>
-            <a:ext cx="10058400" cy="822960"/>
+            <a:ext cx="10058400" cy="310896"/>
           </a:xfrm>
           <a:prstGeom prst="rect">
             <a:avLst/>
@@ -10422,29 +10462,7 @@
                 </a:solidFill>
                 <a:latin typeface="Consolas"/>
               </a:rPr>
-              <a:t>x = x - x.mean()</a:t>
-            </a:r>
-          </a:p>
-          <a:p>
-            <a:r>
-              <a:rPr sz="1200" b="0">
-                <a:solidFill>
-                  <a:srgbClr val="E8E8EE"/>
-                </a:solidFill>
-                <a:latin typeface="Consolas"/>
-              </a:rPr>
-              <a:t>rho_k = np.dot(x[:n-k], x[k:]) / np.dot(x, x)</a:t>
-            </a:r>
-          </a:p>
-          <a:p>
-            <a:r>
-              <a:rPr sz="1200" b="0">
-                <a:solidFill>
-                  <a:srgbClr val="E8E8EE"/>
-                </a:solidFill>
-                <a:latin typeface="Consolas"/>
-              </a:rPr>
-              <a:t>band  = 1.96 / np.sqrt(n)                # 백색잡음 95% 한계</a:t>
+              <a:t>wide = panel.pivot(index="date", columns="hashtag", values="ratio")</a:t>
             </a:r>
           </a:p>
         </p:txBody>
@@ -10457,7 +10475,7 @@
         </p:nvSpPr>
         <p:spPr>
           <a:xfrm>
-            <a:off x="731520" y="2889504"/>
+            <a:off x="731520" y="2377440"/>
             <a:ext cx="10789920" cy="320040"/>
           </a:xfrm>
           <a:prstGeom prst="rect">
@@ -10478,7 +10496,7 @@
                 </a:solidFill>
                 <a:latin typeface="맑은 고딕"/>
               </a:rPr>
-              <a:t>●  선형추세 적합 (최소제곱) + 요일 더미 계절성</a:t>
+              <a:t>●  이동평균 평활화 — 7일 중심 윈도우가 주간 주기를 상쇄</a:t>
             </a:r>
           </a:p>
         </p:txBody>
@@ -10491,8 +10509,8 @@
         </p:nvSpPr>
         <p:spPr>
           <a:xfrm>
-            <a:off x="914400" y="3273552"/>
-            <a:ext cx="10424160" cy="969264"/>
+            <a:off x="914400" y="2761488"/>
+            <a:ext cx="10424160" cy="457200"/>
           </a:xfrm>
           <a:prstGeom prst="rect">
             <a:avLst/>
@@ -10535,8 +10553,8 @@
         </p:nvSpPr>
         <p:spPr>
           <a:xfrm>
-            <a:off x="1143000" y="3364992"/>
-            <a:ext cx="10058400" cy="822960"/>
+            <a:off x="1143000" y="2852928"/>
+            <a:ext cx="10058400" cy="310896"/>
           </a:xfrm>
           <a:prstGeom prst="rect">
             <a:avLst/>
@@ -10556,29 +10574,7 @@
                 </a:solidFill>
                 <a:latin typeface="Consolas"/>
               </a:rPr>
-              <a:t>coef = np.polyfit(t, s.values, 1)        # 기울기·절편</a:t>
-            </a:r>
-          </a:p>
-          <a:p>
-            <a:r>
-              <a:rPr sz="1200" b="0">
-                <a:solidFill>
-                  <a:srgbClr val="E8E8EE"/>
-                </a:solidFill>
-                <a:latin typeface="Consolas"/>
-              </a:rPr>
-              <a:t>seasonal = pd.Series(s.values - np.polyval(coef, t)) \</a:t>
-            </a:r>
-          </a:p>
-          <a:p>
-            <a:r>
-              <a:rPr sz="1200" b="0">
-                <a:solidFill>
-                  <a:srgbClr val="E8E8EE"/>
-                </a:solidFill>
-                <a:latin typeface="Consolas"/>
-              </a:rPr>
-              <a:t>             .groupby(s.index.weekday).mean()</a:t>
+              <a:t>ma7 = s.rolling(7, center=True).mean()   # 추세 + 노이즈 제거</a:t>
             </a:r>
           </a:p>
         </p:txBody>
@@ -10591,7 +10587,7 @@
         </p:nvSpPr>
         <p:spPr>
           <a:xfrm>
-            <a:off x="731520" y="4407408"/>
+            <a:off x="731520" y="3383280"/>
             <a:ext cx="10789920" cy="320040"/>
           </a:xfrm>
           <a:prstGeom prst="rect">
@@ -10612,7 +10608,7 @@
                 </a:solidFill>
                 <a:latin typeface="맑은 고딕"/>
               </a:rPr>
-              <a:t>●  14일 외삽 + 95% 예측구간 (잔차 표준편차 기반)</a:t>
+              <a:t>●  1차 차분으로 정상화 (ARIMA의 d=1)</a:t>
             </a:r>
           </a:p>
         </p:txBody>
@@ -10625,7 +10621,7 @@
         </p:nvSpPr>
         <p:spPr>
           <a:xfrm>
-            <a:off x="914400" y="4791456"/>
+            <a:off x="914400" y="3767328"/>
             <a:ext cx="10424160" cy="713232"/>
           </a:xfrm>
           <a:prstGeom prst="rect">
@@ -10669,7 +10665,7 @@
         </p:nvSpPr>
         <p:spPr>
           <a:xfrm>
-            <a:off x="1143000" y="4882896"/>
+            <a:off x="1143000" y="3858768"/>
             <a:ext cx="10058400" cy="566928"/>
           </a:xfrm>
           <a:prstGeom prst="rect">
@@ -10690,7 +10686,7 @@
                 </a:solidFill>
                 <a:latin typeface="Consolas"/>
               </a:rPr>
-              <a:t>future = np.polyval(coef, future_t) + seasonal[future_weekday]</a:t>
+              <a:t>diff = s.diff()                          # X_t - X_{t-1}</a:t>
             </a:r>
           </a:p>
           <a:p>
@@ -10701,14 +10697,148 @@
                 </a:solidFill>
                 <a:latin typeface="Consolas"/>
               </a:rPr>
-              <a:t>lo, hi = future - 1.96*resid_std, future + 1.96*resid_std</a:t>
-            </a:r>
-          </a:p>
-        </p:txBody>
-      </p:sp>
-      <p:sp>
-        <p:nvSpPr>
-          <p:cNvPr id="14" name="Rectangle 13"/>
+              <a:t>diff.rolling(28).mean()                  # 평균이 0에 붙는지 진단</a:t>
+            </a:r>
+          </a:p>
+        </p:txBody>
+      </p:sp>
+      <p:sp>
+        <p:nvSpPr>
+          <p:cNvPr id="14" name="TextBox 13"/>
+          <p:cNvSpPr txBox="1"/>
+          <p:nvPr/>
+        </p:nvSpPr>
+        <p:spPr>
+          <a:xfrm>
+            <a:off x="731520" y="4645152"/>
+            <a:ext cx="10789920" cy="320040"/>
+          </a:xfrm>
+          <a:prstGeom prst="rect">
+            <a:avLst/>
+          </a:prstGeom>
+          <a:noFill/>
+        </p:spPr>
+        <p:txBody>
+          <a:bodyPr wrap="square">
+            <a:spAutoFit/>
+          </a:bodyPr>
+          <a:lstStyle/>
+          <a:p>
+            <a:r>
+              <a:rPr sz="1350" b="1">
+                <a:solidFill>
+                  <a:srgbClr val="E1306C"/>
+                </a:solidFill>
+                <a:latin typeface="맑은 고딕"/>
+              </a:rPr>
+              <a:t>●  가법 분해 — 추세는 이동평균, 계절은 '같은 요일끼리 평균'</a:t>
+            </a:r>
+          </a:p>
+        </p:txBody>
+      </p:sp>
+      <p:sp>
+        <p:nvSpPr>
+          <p:cNvPr id="15" name="Rectangle 14"/>
+          <p:cNvSpPr/>
+          <p:nvPr/>
+        </p:nvSpPr>
+        <p:spPr>
+          <a:xfrm>
+            <a:off x="914400" y="5029200"/>
+            <a:ext cx="10424160" cy="969264"/>
+          </a:xfrm>
+          <a:prstGeom prst="rect">
+            <a:avLst/>
+          </a:prstGeom>
+          <a:solidFill>
+            <a:srgbClr val="2B2B33"/>
+          </a:solidFill>
+          <a:ln>
+            <a:noFill/>
+          </a:ln>
+          <a:effectLst/>
+        </p:spPr>
+        <p:style>
+          <a:lnRef idx="1">
+            <a:schemeClr val="accent1"/>
+          </a:lnRef>
+          <a:fillRef idx="3">
+            <a:schemeClr val="accent1"/>
+          </a:fillRef>
+          <a:effectRef idx="2">
+            <a:schemeClr val="accent1"/>
+          </a:effectRef>
+          <a:fontRef idx="minor">
+            <a:schemeClr val="lt1"/>
+          </a:fontRef>
+        </p:style>
+        <p:txBody>
+          <a:bodyPr rtlCol="0" anchor="ctr"/>
+          <a:lstStyle/>
+          <a:p>
+            <a:pPr algn="ctr"/>
+          </a:p>
+        </p:txBody>
+      </p:sp>
+      <p:sp>
+        <p:nvSpPr>
+          <p:cNvPr id="16" name="TextBox 15"/>
+          <p:cNvSpPr txBox="1"/>
+          <p:nvPr/>
+        </p:nvSpPr>
+        <p:spPr>
+          <a:xfrm>
+            <a:off x="1143000" y="5120640"/>
+            <a:ext cx="10058400" cy="822960"/>
+          </a:xfrm>
+          <a:prstGeom prst="rect">
+            <a:avLst/>
+          </a:prstGeom>
+          <a:noFill/>
+        </p:spPr>
+        <p:txBody>
+          <a:bodyPr wrap="square">
+            <a:spAutoFit/>
+          </a:bodyPr>
+          <a:lstStyle/>
+          <a:p>
+            <a:r>
+              <a:rPr sz="1200" b="0">
+                <a:solidFill>
+                  <a:srgbClr val="E8E8EE"/>
+                </a:solidFill>
+                <a:latin typeface="Consolas"/>
+              </a:rPr>
+              <a:t>trend    = s.rolling(7, center=True).mean()</a:t>
+            </a:r>
+          </a:p>
+          <a:p>
+            <a:r>
+              <a:rPr sz="1200" b="0">
+                <a:solidFill>
+                  <a:srgbClr val="E8E8EE"/>
+                </a:solidFill>
+                <a:latin typeface="Consolas"/>
+              </a:rPr>
+              <a:t>seasonal = (s - trend).groupby(s.index.weekday).transform("mean")</a:t>
+            </a:r>
+          </a:p>
+          <a:p>
+            <a:r>
+              <a:rPr sz="1200" b="0">
+                <a:solidFill>
+                  <a:srgbClr val="E8E8EE"/>
+                </a:solidFill>
+                <a:latin typeface="Consolas"/>
+              </a:rPr>
+              <a:t>residual = s - trend - seasonal          # 백색잡음이면 성공</a:t>
+            </a:r>
+          </a:p>
+        </p:txBody>
+      </p:sp>
+      <p:sp>
+        <p:nvSpPr>
+          <p:cNvPr id="17" name="Rectangle 16"/>
           <p:cNvSpPr/>
           <p:nvPr/>
         </p:nvSpPr>
@@ -10752,7 +10882,7 @@
       </p:sp>
       <p:sp>
         <p:nvSpPr>
-          <p:cNvPr id="15" name="TextBox 14"/>
+          <p:cNvPr id="18" name="TextBox 17"/>
           <p:cNvSpPr txBox="1"/>
           <p:nvPr/>
         </p:nvSpPr>
@@ -10786,7 +10916,7 @@
       </p:sp>
       <p:sp>
         <p:nvSpPr>
-          <p:cNvPr id="16" name="TextBox 15"/>
+          <p:cNvPr id="19" name="TextBox 18"/>
           <p:cNvSpPr txBox="1"/>
           <p:nvPr/>
         </p:nvSpPr>
@@ -10910,7 +11040,7 @@
                 </a:solidFill>
                 <a:latin typeface="Segoe UI"/>
               </a:rPr>
-              <a:t>08 · LIMITATIONS</a:t>
+              <a:t>08 · CODE</a:t>
             </a:r>
           </a:p>
         </p:txBody>
@@ -10944,21 +11074,412 @@
                 </a:solidFill>
                 <a:latin typeface="맑은 고딕"/>
               </a:rPr>
-              <a:t>한계와 재현</a:t>
-            </a:r>
-          </a:p>
-        </p:txBody>
-      </p:sp>
-      <p:sp>
-        <p:nvSpPr>
-          <p:cNvPr id="5" name="Rectangle 4"/>
+              <a:t>핵심 코드 ②  ACF → 예측</a:t>
+            </a:r>
+          </a:p>
+        </p:txBody>
+      </p:sp>
+      <p:sp>
+        <p:nvSpPr>
+          <p:cNvPr id="5" name="TextBox 4"/>
+          <p:cNvSpPr txBox="1"/>
+          <p:nvPr/>
+        </p:nvSpPr>
+        <p:spPr>
+          <a:xfrm>
+            <a:off x="731520" y="1371600"/>
+            <a:ext cx="10789920" cy="320040"/>
+          </a:xfrm>
+          <a:prstGeom prst="rect">
+            <a:avLst/>
+          </a:prstGeom>
+          <a:noFill/>
+        </p:spPr>
+        <p:txBody>
+          <a:bodyPr wrap="square">
+            <a:spAutoFit/>
+          </a:bodyPr>
+          <a:lstStyle/>
+          <a:p>
+            <a:r>
+              <a:rPr sz="1350" b="1">
+                <a:solidFill>
+                  <a:srgbClr val="E1306C"/>
+                </a:solidFill>
+                <a:latin typeface="맑은 고딕"/>
+              </a:rPr>
+              <a:t>●  표본 ACF 직접 구현 — ρ(k) = γ(k)/γ(0)</a:t>
+            </a:r>
+          </a:p>
+        </p:txBody>
+      </p:sp>
+      <p:sp>
+        <p:nvSpPr>
+          <p:cNvPr id="6" name="Rectangle 5"/>
           <p:cNvSpPr/>
           <p:nvPr/>
         </p:nvSpPr>
         <p:spPr>
           <a:xfrm>
-            <a:off x="685800" y="1371600"/>
-            <a:ext cx="10789920" cy="822960"/>
+            <a:off x="914400" y="1755648"/>
+            <a:ext cx="10424160" cy="969264"/>
+          </a:xfrm>
+          <a:prstGeom prst="rect">
+            <a:avLst/>
+          </a:prstGeom>
+          <a:solidFill>
+            <a:srgbClr val="2B2B33"/>
+          </a:solidFill>
+          <a:ln>
+            <a:noFill/>
+          </a:ln>
+          <a:effectLst/>
+        </p:spPr>
+        <p:style>
+          <a:lnRef idx="1">
+            <a:schemeClr val="accent1"/>
+          </a:lnRef>
+          <a:fillRef idx="3">
+            <a:schemeClr val="accent1"/>
+          </a:fillRef>
+          <a:effectRef idx="2">
+            <a:schemeClr val="accent1"/>
+          </a:effectRef>
+          <a:fontRef idx="minor">
+            <a:schemeClr val="lt1"/>
+          </a:fontRef>
+        </p:style>
+        <p:txBody>
+          <a:bodyPr rtlCol="0" anchor="ctr"/>
+          <a:lstStyle/>
+          <a:p>
+            <a:pPr algn="ctr"/>
+          </a:p>
+        </p:txBody>
+      </p:sp>
+      <p:sp>
+        <p:nvSpPr>
+          <p:cNvPr id="7" name="TextBox 6"/>
+          <p:cNvSpPr txBox="1"/>
+          <p:nvPr/>
+        </p:nvSpPr>
+        <p:spPr>
+          <a:xfrm>
+            <a:off x="1143000" y="1847088"/>
+            <a:ext cx="10058400" cy="822960"/>
+          </a:xfrm>
+          <a:prstGeom prst="rect">
+            <a:avLst/>
+          </a:prstGeom>
+          <a:noFill/>
+        </p:spPr>
+        <p:txBody>
+          <a:bodyPr wrap="square">
+            <a:spAutoFit/>
+          </a:bodyPr>
+          <a:lstStyle/>
+          <a:p>
+            <a:r>
+              <a:rPr sz="1200" b="0">
+                <a:solidFill>
+                  <a:srgbClr val="E8E8EE"/>
+                </a:solidFill>
+                <a:latin typeface="Consolas"/>
+              </a:rPr>
+              <a:t>x = x - x.mean()</a:t>
+            </a:r>
+          </a:p>
+          <a:p>
+            <a:r>
+              <a:rPr sz="1200" b="0">
+                <a:solidFill>
+                  <a:srgbClr val="E8E8EE"/>
+                </a:solidFill>
+                <a:latin typeface="Consolas"/>
+              </a:rPr>
+              <a:t>rho_k = np.dot(x[:n-k], x[k:]) / np.dot(x, x)</a:t>
+            </a:r>
+          </a:p>
+          <a:p>
+            <a:r>
+              <a:rPr sz="1200" b="0">
+                <a:solidFill>
+                  <a:srgbClr val="E8E8EE"/>
+                </a:solidFill>
+                <a:latin typeface="Consolas"/>
+              </a:rPr>
+              <a:t>band  = 1.96 / np.sqrt(n)                # 백색잡음 95% 한계</a:t>
+            </a:r>
+          </a:p>
+        </p:txBody>
+      </p:sp>
+      <p:sp>
+        <p:nvSpPr>
+          <p:cNvPr id="8" name="TextBox 7"/>
+          <p:cNvSpPr txBox="1"/>
+          <p:nvPr/>
+        </p:nvSpPr>
+        <p:spPr>
+          <a:xfrm>
+            <a:off x="731520" y="2889504"/>
+            <a:ext cx="10789920" cy="320040"/>
+          </a:xfrm>
+          <a:prstGeom prst="rect">
+            <a:avLst/>
+          </a:prstGeom>
+          <a:noFill/>
+        </p:spPr>
+        <p:txBody>
+          <a:bodyPr wrap="square">
+            <a:spAutoFit/>
+          </a:bodyPr>
+          <a:lstStyle/>
+          <a:p>
+            <a:r>
+              <a:rPr sz="1350" b="1">
+                <a:solidFill>
+                  <a:srgbClr val="E1306C"/>
+                </a:solidFill>
+                <a:latin typeface="맑은 고딕"/>
+              </a:rPr>
+              <a:t>●  선형추세 적합 (최소제곱) + 요일 더미 계절성</a:t>
+            </a:r>
+          </a:p>
+        </p:txBody>
+      </p:sp>
+      <p:sp>
+        <p:nvSpPr>
+          <p:cNvPr id="9" name="Rectangle 8"/>
+          <p:cNvSpPr/>
+          <p:nvPr/>
+        </p:nvSpPr>
+        <p:spPr>
+          <a:xfrm>
+            <a:off x="914400" y="3273552"/>
+            <a:ext cx="10424160" cy="969264"/>
+          </a:xfrm>
+          <a:prstGeom prst="rect">
+            <a:avLst/>
+          </a:prstGeom>
+          <a:solidFill>
+            <a:srgbClr val="2B2B33"/>
+          </a:solidFill>
+          <a:ln>
+            <a:noFill/>
+          </a:ln>
+          <a:effectLst/>
+        </p:spPr>
+        <p:style>
+          <a:lnRef idx="1">
+            <a:schemeClr val="accent1"/>
+          </a:lnRef>
+          <a:fillRef idx="3">
+            <a:schemeClr val="accent1"/>
+          </a:fillRef>
+          <a:effectRef idx="2">
+            <a:schemeClr val="accent1"/>
+          </a:effectRef>
+          <a:fontRef idx="minor">
+            <a:schemeClr val="lt1"/>
+          </a:fontRef>
+        </p:style>
+        <p:txBody>
+          <a:bodyPr rtlCol="0" anchor="ctr"/>
+          <a:lstStyle/>
+          <a:p>
+            <a:pPr algn="ctr"/>
+          </a:p>
+        </p:txBody>
+      </p:sp>
+      <p:sp>
+        <p:nvSpPr>
+          <p:cNvPr id="10" name="TextBox 9"/>
+          <p:cNvSpPr txBox="1"/>
+          <p:nvPr/>
+        </p:nvSpPr>
+        <p:spPr>
+          <a:xfrm>
+            <a:off x="1143000" y="3364992"/>
+            <a:ext cx="10058400" cy="822960"/>
+          </a:xfrm>
+          <a:prstGeom prst="rect">
+            <a:avLst/>
+          </a:prstGeom>
+          <a:noFill/>
+        </p:spPr>
+        <p:txBody>
+          <a:bodyPr wrap="square">
+            <a:spAutoFit/>
+          </a:bodyPr>
+          <a:lstStyle/>
+          <a:p>
+            <a:r>
+              <a:rPr sz="1200" b="0">
+                <a:solidFill>
+                  <a:srgbClr val="E8E8EE"/>
+                </a:solidFill>
+                <a:latin typeface="Consolas"/>
+              </a:rPr>
+              <a:t>coef = np.polyfit(t, s.values, 1)        # 기울기·절편</a:t>
+            </a:r>
+          </a:p>
+          <a:p>
+            <a:r>
+              <a:rPr sz="1200" b="0">
+                <a:solidFill>
+                  <a:srgbClr val="E8E8EE"/>
+                </a:solidFill>
+                <a:latin typeface="Consolas"/>
+              </a:rPr>
+              <a:t>seasonal = pd.Series(s.values - np.polyval(coef, t)) \</a:t>
+            </a:r>
+          </a:p>
+          <a:p>
+            <a:r>
+              <a:rPr sz="1200" b="0">
+                <a:solidFill>
+                  <a:srgbClr val="E8E8EE"/>
+                </a:solidFill>
+                <a:latin typeface="Consolas"/>
+              </a:rPr>
+              <a:t>             .groupby(s.index.weekday).mean()</a:t>
+            </a:r>
+          </a:p>
+        </p:txBody>
+      </p:sp>
+      <p:sp>
+        <p:nvSpPr>
+          <p:cNvPr id="11" name="TextBox 10"/>
+          <p:cNvSpPr txBox="1"/>
+          <p:nvPr/>
+        </p:nvSpPr>
+        <p:spPr>
+          <a:xfrm>
+            <a:off x="731520" y="4407408"/>
+            <a:ext cx="10789920" cy="320040"/>
+          </a:xfrm>
+          <a:prstGeom prst="rect">
+            <a:avLst/>
+          </a:prstGeom>
+          <a:noFill/>
+        </p:spPr>
+        <p:txBody>
+          <a:bodyPr wrap="square">
+            <a:spAutoFit/>
+          </a:bodyPr>
+          <a:lstStyle/>
+          <a:p>
+            <a:r>
+              <a:rPr sz="1350" b="1">
+                <a:solidFill>
+                  <a:srgbClr val="E1306C"/>
+                </a:solidFill>
+                <a:latin typeface="맑은 고딕"/>
+              </a:rPr>
+              <a:t>●  14일 외삽 + 95% 예측구간 (잔차 표준편차 기반)</a:t>
+            </a:r>
+          </a:p>
+        </p:txBody>
+      </p:sp>
+      <p:sp>
+        <p:nvSpPr>
+          <p:cNvPr id="12" name="Rectangle 11"/>
+          <p:cNvSpPr/>
+          <p:nvPr/>
+        </p:nvSpPr>
+        <p:spPr>
+          <a:xfrm>
+            <a:off x="914400" y="4791456"/>
+            <a:ext cx="10424160" cy="713232"/>
+          </a:xfrm>
+          <a:prstGeom prst="rect">
+            <a:avLst/>
+          </a:prstGeom>
+          <a:solidFill>
+            <a:srgbClr val="2B2B33"/>
+          </a:solidFill>
+          <a:ln>
+            <a:noFill/>
+          </a:ln>
+          <a:effectLst/>
+        </p:spPr>
+        <p:style>
+          <a:lnRef idx="1">
+            <a:schemeClr val="accent1"/>
+          </a:lnRef>
+          <a:fillRef idx="3">
+            <a:schemeClr val="accent1"/>
+          </a:fillRef>
+          <a:effectRef idx="2">
+            <a:schemeClr val="accent1"/>
+          </a:effectRef>
+          <a:fontRef idx="minor">
+            <a:schemeClr val="lt1"/>
+          </a:fontRef>
+        </p:style>
+        <p:txBody>
+          <a:bodyPr rtlCol="0" anchor="ctr"/>
+          <a:lstStyle/>
+          <a:p>
+            <a:pPr algn="ctr"/>
+          </a:p>
+        </p:txBody>
+      </p:sp>
+      <p:sp>
+        <p:nvSpPr>
+          <p:cNvPr id="13" name="TextBox 12"/>
+          <p:cNvSpPr txBox="1"/>
+          <p:nvPr/>
+        </p:nvSpPr>
+        <p:spPr>
+          <a:xfrm>
+            <a:off x="1143000" y="4882896"/>
+            <a:ext cx="10058400" cy="566928"/>
+          </a:xfrm>
+          <a:prstGeom prst="rect">
+            <a:avLst/>
+          </a:prstGeom>
+          <a:noFill/>
+        </p:spPr>
+        <p:txBody>
+          <a:bodyPr wrap="square">
+            <a:spAutoFit/>
+          </a:bodyPr>
+          <a:lstStyle/>
+          <a:p>
+            <a:r>
+              <a:rPr sz="1200" b="0">
+                <a:solidFill>
+                  <a:srgbClr val="E8E8EE"/>
+                </a:solidFill>
+                <a:latin typeface="Consolas"/>
+              </a:rPr>
+              <a:t>future = np.polyval(coef, future_t) + seasonal[future_weekday]</a:t>
+            </a:r>
+          </a:p>
+          <a:p>
+            <a:r>
+              <a:rPr sz="1200" b="0">
+                <a:solidFill>
+                  <a:srgbClr val="E8E8EE"/>
+                </a:solidFill>
+                <a:latin typeface="Consolas"/>
+              </a:rPr>
+              <a:t>lo, hi = future - 1.96*resid_std, future + 1.96*resid_std</a:t>
+            </a:r>
+          </a:p>
+        </p:txBody>
+      </p:sp>
+      <p:sp>
+        <p:nvSpPr>
+          <p:cNvPr id="14" name="Rectangle 13"/>
+          <p:cNvSpPr/>
+          <p:nvPr/>
+        </p:nvSpPr>
+        <p:spPr>
+          <a:xfrm>
+            <a:off x="0" y="6565392"/>
+            <a:ext cx="12191695" cy="292608"/>
           </a:xfrm>
           <a:prstGeom prst="rect">
             <a:avLst/>
@@ -10995,231 +11516,213 @@
       </p:sp>
       <p:sp>
         <p:nvSpPr>
-          <p:cNvPr id="6" name="TextBox 5"/>
-          <p:cNvSpPr txBox="1"/>
-          <p:nvPr/>
-        </p:nvSpPr>
-        <p:spPr>
-          <a:xfrm>
-            <a:off x="914400" y="1481328"/>
-            <a:ext cx="10332720" cy="640080"/>
-          </a:xfrm>
-          <a:prstGeom prst="rect">
-            <a:avLst/>
-          </a:prstGeom>
-          <a:noFill/>
-        </p:spPr>
-        <p:txBody>
-          <a:bodyPr wrap="square" anchor="ctr">
-            <a:spAutoFit/>
-          </a:bodyPr>
-          <a:lstStyle/>
-          <a:p>
-            <a:r>
-              <a:rPr sz="1500" b="1">
+          <p:cNvPr id="15" name="TextBox 14"/>
+          <p:cNvSpPr txBox="1"/>
+          <p:nvPr/>
+        </p:nvSpPr>
+        <p:spPr>
+          <a:xfrm>
+            <a:off x="365760" y="6547104"/>
+            <a:ext cx="7315200" cy="274320"/>
+          </a:xfrm>
+          <a:prstGeom prst="rect">
+            <a:avLst/>
+          </a:prstGeom>
+          <a:noFill/>
+        </p:spPr>
+        <p:txBody>
+          <a:bodyPr wrap="square">
+            <a:spAutoFit/>
+          </a:bodyPr>
+          <a:lstStyle/>
+          <a:p>
+            <a:r>
+              <a:rPr sz="900" b="0">
+                <a:solidFill>
+                  <a:srgbClr val="6B6B6B"/>
+                </a:solidFill>
+                <a:latin typeface="맑은 고딕"/>
+              </a:rPr>
+              <a:t>시계열 데이터 분석 · 한국 해시태그 트렌드 · 기준일 2026-06-11</a:t>
+            </a:r>
+          </a:p>
+        </p:txBody>
+      </p:sp>
+      <p:sp>
+        <p:nvSpPr>
+          <p:cNvPr id="16" name="TextBox 15"/>
+          <p:cNvSpPr txBox="1"/>
+          <p:nvPr/>
+        </p:nvSpPr>
+        <p:spPr>
+          <a:xfrm>
+            <a:off x="11094415" y="6547104"/>
+            <a:ext cx="822960" cy="274320"/>
+          </a:xfrm>
+          <a:prstGeom prst="rect">
+            <a:avLst/>
+          </a:prstGeom>
+          <a:noFill/>
+        </p:spPr>
+        <p:txBody>
+          <a:bodyPr wrap="square">
+            <a:spAutoFit/>
+          </a:bodyPr>
+          <a:lstStyle/>
+          <a:p>
+            <a:pPr algn="r"/>
+            <a:r>
+              <a:rPr sz="900" b="0">
+                <a:solidFill>
+                  <a:srgbClr val="6B6B6B"/>
+                </a:solidFill>
+                <a:latin typeface="맑은 고딕"/>
+              </a:rPr>
+              <a:t>20</a:t>
+            </a:r>
+          </a:p>
+        </p:txBody>
+      </p:sp>
+    </p:spTree>
+  </p:cSld>
+  <p:clrMapOvr>
+    <a:masterClrMapping/>
+  </p:clrMapOvr>
+</p:sld>
+</file>
+
+<file path=ppt/slides/slide25.xml><?xml version="1.0" encoding="utf-8"?>
+<p:sld xmlns:a="http://schemas.openxmlformats.org/drawingml/2006/main" xmlns:p="http://schemas.openxmlformats.org/presentationml/2006/main" xmlns:r="http://schemas.openxmlformats.org/officeDocument/2006/relationships">
+  <p:cSld>
+    <p:spTree>
+      <p:nvGrpSpPr>
+        <p:cNvPr id="1" name=""/>
+        <p:cNvGrpSpPr/>
+        <p:nvPr/>
+      </p:nvGrpSpPr>
+      <p:grpSpPr/>
+      <p:sp>
+        <p:nvSpPr>
+          <p:cNvPr id="2" name="Rectangle 1"/>
+          <p:cNvSpPr/>
+          <p:nvPr/>
+        </p:nvSpPr>
+        <p:spPr>
+          <a:xfrm>
+            <a:off x="365760" y="384048"/>
+            <a:ext cx="164592" cy="502920"/>
+          </a:xfrm>
+          <a:prstGeom prst="rect">
+            <a:avLst/>
+          </a:prstGeom>
+          <a:solidFill>
+            <a:srgbClr val="E1306C"/>
+          </a:solidFill>
+          <a:ln>
+            <a:noFill/>
+          </a:ln>
+          <a:effectLst/>
+        </p:spPr>
+        <p:style>
+          <a:lnRef idx="1">
+            <a:schemeClr val="accent1"/>
+          </a:lnRef>
+          <a:fillRef idx="3">
+            <a:schemeClr val="accent1"/>
+          </a:fillRef>
+          <a:effectRef idx="2">
+            <a:schemeClr val="accent1"/>
+          </a:effectRef>
+          <a:fontRef idx="minor">
+            <a:schemeClr val="lt1"/>
+          </a:fontRef>
+        </p:style>
+        <p:txBody>
+          <a:bodyPr rtlCol="0" anchor="ctr"/>
+          <a:lstStyle/>
+          <a:p>
+            <a:pPr algn="ctr"/>
+          </a:p>
+        </p:txBody>
+      </p:sp>
+      <p:sp>
+        <p:nvSpPr>
+          <p:cNvPr id="3" name="TextBox 2"/>
+          <p:cNvSpPr txBox="1"/>
+          <p:nvPr/>
+        </p:nvSpPr>
+        <p:spPr>
+          <a:xfrm>
+            <a:off x="685800" y="256032"/>
+            <a:ext cx="10058400" cy="320040"/>
+          </a:xfrm>
+          <a:prstGeom prst="rect">
+            <a:avLst/>
+          </a:prstGeom>
+          <a:noFill/>
+        </p:spPr>
+        <p:txBody>
+          <a:bodyPr wrap="square">
+            <a:spAutoFit/>
+          </a:bodyPr>
+          <a:lstStyle/>
+          <a:p>
+            <a:r>
+              <a:rPr sz="1100" b="1">
+                <a:solidFill>
+                  <a:srgbClr val="833AB4"/>
+                </a:solidFill>
+                <a:latin typeface="Segoe UI"/>
+              </a:rPr>
+              <a:t>08 · LIMITATIONS</a:t>
+            </a:r>
+          </a:p>
+        </p:txBody>
+      </p:sp>
+      <p:sp>
+        <p:nvSpPr>
+          <p:cNvPr id="4" name="TextBox 3"/>
+          <p:cNvSpPr txBox="1"/>
+          <p:nvPr/>
+        </p:nvSpPr>
+        <p:spPr>
+          <a:xfrm>
+            <a:off x="658368" y="457200"/>
+            <a:ext cx="10515600" cy="640080"/>
+          </a:xfrm>
+          <a:prstGeom prst="rect">
+            <a:avLst/>
+          </a:prstGeom>
+          <a:noFill/>
+        </p:spPr>
+        <p:txBody>
+          <a:bodyPr wrap="square">
+            <a:spAutoFit/>
+          </a:bodyPr>
+          <a:lstStyle/>
+          <a:p>
+            <a:r>
+              <a:rPr sz="2800" b="1">
                 <a:solidFill>
                   <a:srgbClr val="222222"/>
                 </a:solidFill>
                 <a:latin typeface="맑은 고딕"/>
               </a:rPr>
-              <a:t>정직한 캐비앗: 이 분석이 말할 수 있는 것과 없는 것</a:t>
-            </a:r>
-          </a:p>
-        </p:txBody>
-      </p:sp>
-      <p:sp>
-        <p:nvSpPr>
-          <p:cNvPr id="7" name="TextBox 6"/>
-          <p:cNvSpPr txBox="1"/>
-          <p:nvPr/>
-        </p:nvSpPr>
-        <p:spPr>
-          <a:xfrm>
-            <a:off x="822960" y="2514600"/>
-            <a:ext cx="10607040" cy="4206240"/>
-          </a:xfrm>
-          <a:prstGeom prst="rect">
-            <a:avLst/>
-          </a:prstGeom>
-          <a:noFill/>
-        </p:spPr>
-        <p:txBody>
-          <a:bodyPr wrap="square">
-            <a:spAutoFit/>
-          </a:bodyPr>
-          <a:lstStyle/>
-          <a:p>
-            <a:pPr>
-              <a:spcAft>
-                <a:spcPts val="1000"/>
-              </a:spcAft>
-            </a:pPr>
-            <a:r>
-              <a:rPr sz="1650" b="1">
-                <a:solidFill>
-                  <a:srgbClr val="E1306C"/>
-                </a:solidFill>
-                <a:latin typeface="맑은 고딕"/>
-              </a:rPr>
-              <a:t>●  프록시 한계</a:t>
-            </a:r>
-          </a:p>
-          <a:p>
-            <a:pPr>
-              <a:spcAft>
-                <a:spcPts val="1300"/>
-              </a:spcAft>
-            </a:pPr>
-            <a:r>
-              <a:rPr sz="1350" b="0">
-                <a:solidFill>
-                  <a:srgbClr val="6B6B6B"/>
-                </a:solidFill>
-                <a:latin typeface="맑은 고딕"/>
-              </a:rPr>
-              <a:t>     네이버 검색량 ≠ 인스타그램 게시량 — '한국 사용자의 주제 관심도'의 대리지표로 해석해야 함</a:t>
-            </a:r>
-          </a:p>
-          <a:p>
-            <a:pPr>
-              <a:spcAft>
-                <a:spcPts val="1000"/>
-              </a:spcAft>
-            </a:pPr>
-            <a:r>
-              <a:rPr sz="1650" b="1">
-                <a:solidFill>
-                  <a:srgbClr val="E1306C"/>
-                </a:solidFill>
-                <a:latin typeface="맑은 고딕"/>
-              </a:rPr>
-              <a:t>●  상대값 한계</a:t>
-            </a:r>
-          </a:p>
-          <a:p>
-            <a:pPr>
-              <a:spcAft>
-                <a:spcPts val="1300"/>
-              </a:spcAft>
-            </a:pPr>
-            <a:r>
-              <a:rPr sz="1350" b="0">
-                <a:solidFill>
-                  <a:srgbClr val="6B6B6B"/>
-                </a:solidFill>
-                <a:latin typeface="맑은 고딕"/>
-              </a:rPr>
-              <a:t>     데이터랩 ratio는 요청 내 정규화 — 태그 간 절대 규모 비교 불가, 시간 변화·모멘텀 비교만 유효</a:t>
-            </a:r>
-          </a:p>
-          <a:p>
-            <a:pPr>
-              <a:spcAft>
-                <a:spcPts val="1000"/>
-              </a:spcAft>
-            </a:pPr>
-            <a:r>
-              <a:rPr sz="1650" b="1">
-                <a:solidFill>
-                  <a:srgbClr val="E1306C"/>
-                </a:solidFill>
-                <a:latin typeface="맑은 고딕"/>
-              </a:rPr>
-              <a:t>●  실시간성</a:t>
-            </a:r>
-          </a:p>
-          <a:p>
-            <a:pPr>
-              <a:spcAft>
-                <a:spcPts val="1300"/>
-              </a:spcAft>
-            </a:pPr>
-            <a:r>
-              <a:rPr sz="1350" b="0">
-                <a:solidFill>
-                  <a:srgbClr val="6B6B6B"/>
-                </a:solidFill>
-                <a:latin typeface="맑은 고딕"/>
-              </a:rPr>
-              <a:t>     2026-06-11 수집 스냅샷 — '실시간 스트림'이 아니라 주기 재수집으로 갱신하는 구조 (전일까지 일별 제공)</a:t>
-            </a:r>
-          </a:p>
-          <a:p>
-            <a:pPr>
-              <a:spcAft>
-                <a:spcPts val="1000"/>
-              </a:spcAft>
-            </a:pPr>
-            <a:r>
-              <a:rPr sz="1650" b="1">
-                <a:solidFill>
-                  <a:srgbClr val="E1306C"/>
-                </a:solidFill>
-                <a:latin typeface="맑은 고딕"/>
-              </a:rPr>
-              <a:t>●  모형 한계</a:t>
-            </a:r>
-          </a:p>
-          <a:p>
-            <a:pPr>
-              <a:spcAft>
-                <a:spcPts val="1300"/>
-              </a:spcAft>
-            </a:pPr>
-            <a:r>
-              <a:rPr sz="1350" b="0">
-                <a:solidFill>
-                  <a:srgbClr val="6B6B6B"/>
-                </a:solidFill>
-                <a:latin typeface="맑은 고딕"/>
-              </a:rPr>
-              <a:t>     선형추세+요일 더미는 외생 이벤트(연휴 스파이크)·추세 전환을 늦게 반영 — SARIMA·지수평활이 다음 단계</a:t>
-            </a:r>
-          </a:p>
-          <a:p>
-            <a:pPr>
-              <a:spcAft>
-                <a:spcPts val="1000"/>
-              </a:spcAft>
-            </a:pPr>
-            <a:r>
-              <a:rPr sz="1650" b="1">
-                <a:solidFill>
-                  <a:srgbClr val="E1306C"/>
-                </a:solidFill>
-                <a:latin typeface="맑은 고딕"/>
-              </a:rPr>
-              <a:t>●  재현</a:t>
-            </a:r>
-          </a:p>
-          <a:p>
-            <a:pPr>
-              <a:spcAft>
-                <a:spcPts val="1300"/>
-              </a:spcAft>
-            </a:pPr>
-            <a:r>
-              <a:rPr sz="1350" b="0">
-                <a:solidFill>
-                  <a:srgbClr val="6B6B6B"/>
-                </a:solidFill>
-                <a:latin typeface="맑은 고딕"/>
-              </a:rPr>
-              <a:t>     pip install -r presentation/requirements.txt &amp;&amp; python presentation/build_deck.py — CSV 고정으로 결정론적 재생성</a:t>
-            </a:r>
-          </a:p>
-        </p:txBody>
-      </p:sp>
-      <p:sp>
-        <p:nvSpPr>
-          <p:cNvPr id="8" name="Rectangle 7"/>
+              <a:t>한계와 재현</a:t>
+            </a:r>
+          </a:p>
+        </p:txBody>
+      </p:sp>
+      <p:sp>
+        <p:nvSpPr>
+          <p:cNvPr id="5" name="Rectangle 4"/>
           <p:cNvSpPr/>
           <p:nvPr/>
         </p:nvSpPr>
         <p:spPr>
           <a:xfrm>
-            <a:off x="0" y="6565392"/>
-            <a:ext cx="12191695" cy="292608"/>
+            <a:off x="685800" y="1371600"/>
+            <a:ext cx="10789920" cy="822960"/>
           </a:xfrm>
           <a:prstGeom prst="rect">
             <a:avLst/>
@@ -11256,6 +11759,267 @@
       </p:sp>
       <p:sp>
         <p:nvSpPr>
+          <p:cNvPr id="6" name="TextBox 5"/>
+          <p:cNvSpPr txBox="1"/>
+          <p:nvPr/>
+        </p:nvSpPr>
+        <p:spPr>
+          <a:xfrm>
+            <a:off x="914400" y="1481328"/>
+            <a:ext cx="10332720" cy="640080"/>
+          </a:xfrm>
+          <a:prstGeom prst="rect">
+            <a:avLst/>
+          </a:prstGeom>
+          <a:noFill/>
+        </p:spPr>
+        <p:txBody>
+          <a:bodyPr wrap="square" anchor="ctr">
+            <a:spAutoFit/>
+          </a:bodyPr>
+          <a:lstStyle/>
+          <a:p>
+            <a:r>
+              <a:rPr sz="1500" b="1">
+                <a:solidFill>
+                  <a:srgbClr val="222222"/>
+                </a:solidFill>
+                <a:latin typeface="맑은 고딕"/>
+              </a:rPr>
+              <a:t>정직한 캐비앗: 이 분석이 말할 수 있는 것과 없는 것</a:t>
+            </a:r>
+          </a:p>
+        </p:txBody>
+      </p:sp>
+      <p:sp>
+        <p:nvSpPr>
+          <p:cNvPr id="7" name="TextBox 6"/>
+          <p:cNvSpPr txBox="1"/>
+          <p:nvPr/>
+        </p:nvSpPr>
+        <p:spPr>
+          <a:xfrm>
+            <a:off x="822960" y="2514600"/>
+            <a:ext cx="10607040" cy="4206240"/>
+          </a:xfrm>
+          <a:prstGeom prst="rect">
+            <a:avLst/>
+          </a:prstGeom>
+          <a:noFill/>
+        </p:spPr>
+        <p:txBody>
+          <a:bodyPr wrap="square">
+            <a:spAutoFit/>
+          </a:bodyPr>
+          <a:lstStyle/>
+          <a:p>
+            <a:pPr>
+              <a:spcAft>
+                <a:spcPts val="1000"/>
+              </a:spcAft>
+            </a:pPr>
+            <a:r>
+              <a:rPr sz="1650" b="1">
+                <a:solidFill>
+                  <a:srgbClr val="E1306C"/>
+                </a:solidFill>
+                <a:latin typeface="맑은 고딕"/>
+              </a:rPr>
+              <a:t>●  프록시 한계</a:t>
+            </a:r>
+          </a:p>
+          <a:p>
+            <a:pPr>
+              <a:spcAft>
+                <a:spcPts val="1300"/>
+              </a:spcAft>
+            </a:pPr>
+            <a:r>
+              <a:rPr sz="1350" b="0">
+                <a:solidFill>
+                  <a:srgbClr val="6B6B6B"/>
+                </a:solidFill>
+                <a:latin typeface="맑은 고딕"/>
+              </a:rPr>
+              <a:t>     네이버 검색량 ≠ 인스타그램 게시량 — '한국 사용자의 주제 관심도'의 대리지표로 해석해야 함</a:t>
+            </a:r>
+          </a:p>
+          <a:p>
+            <a:pPr>
+              <a:spcAft>
+                <a:spcPts val="1000"/>
+              </a:spcAft>
+            </a:pPr>
+            <a:r>
+              <a:rPr sz="1650" b="1">
+                <a:solidFill>
+                  <a:srgbClr val="E1306C"/>
+                </a:solidFill>
+                <a:latin typeface="맑은 고딕"/>
+              </a:rPr>
+              <a:t>●  상대값 한계</a:t>
+            </a:r>
+          </a:p>
+          <a:p>
+            <a:pPr>
+              <a:spcAft>
+                <a:spcPts val="1300"/>
+              </a:spcAft>
+            </a:pPr>
+            <a:r>
+              <a:rPr sz="1350" b="0">
+                <a:solidFill>
+                  <a:srgbClr val="6B6B6B"/>
+                </a:solidFill>
+                <a:latin typeface="맑은 고딕"/>
+              </a:rPr>
+              <a:t>     데이터랩 ratio는 요청 내 정규화 — 태그 간 절대 규모 비교 불가, 시간 변화·모멘텀 비교만 유효</a:t>
+            </a:r>
+          </a:p>
+          <a:p>
+            <a:pPr>
+              <a:spcAft>
+                <a:spcPts val="1000"/>
+              </a:spcAft>
+            </a:pPr>
+            <a:r>
+              <a:rPr sz="1650" b="1">
+                <a:solidFill>
+                  <a:srgbClr val="E1306C"/>
+                </a:solidFill>
+                <a:latin typeface="맑은 고딕"/>
+              </a:rPr>
+              <a:t>●  실시간성</a:t>
+            </a:r>
+          </a:p>
+          <a:p>
+            <a:pPr>
+              <a:spcAft>
+                <a:spcPts val="1300"/>
+              </a:spcAft>
+            </a:pPr>
+            <a:r>
+              <a:rPr sz="1350" b="0">
+                <a:solidFill>
+                  <a:srgbClr val="6B6B6B"/>
+                </a:solidFill>
+                <a:latin typeface="맑은 고딕"/>
+              </a:rPr>
+              <a:t>     2026-06-11 수집 스냅샷 — '실시간 스트림'이 아니라 주기 재수집으로 갱신하는 구조 (전일까지 일별 제공)</a:t>
+            </a:r>
+          </a:p>
+          <a:p>
+            <a:pPr>
+              <a:spcAft>
+                <a:spcPts val="1000"/>
+              </a:spcAft>
+            </a:pPr>
+            <a:r>
+              <a:rPr sz="1650" b="1">
+                <a:solidFill>
+                  <a:srgbClr val="E1306C"/>
+                </a:solidFill>
+                <a:latin typeface="맑은 고딕"/>
+              </a:rPr>
+              <a:t>●  모형 한계</a:t>
+            </a:r>
+          </a:p>
+          <a:p>
+            <a:pPr>
+              <a:spcAft>
+                <a:spcPts val="1300"/>
+              </a:spcAft>
+            </a:pPr>
+            <a:r>
+              <a:rPr sz="1350" b="0">
+                <a:solidFill>
+                  <a:srgbClr val="6B6B6B"/>
+                </a:solidFill>
+                <a:latin typeface="맑은 고딕"/>
+              </a:rPr>
+              <a:t>     선형추세+요일 더미는 외생 이벤트(연휴 스파이크)·추세 전환을 늦게 반영 — SARIMA·지수평활이 다음 단계</a:t>
+            </a:r>
+          </a:p>
+          <a:p>
+            <a:pPr>
+              <a:spcAft>
+                <a:spcPts val="1000"/>
+              </a:spcAft>
+            </a:pPr>
+            <a:r>
+              <a:rPr sz="1650" b="1">
+                <a:solidFill>
+                  <a:srgbClr val="E1306C"/>
+                </a:solidFill>
+                <a:latin typeface="맑은 고딕"/>
+              </a:rPr>
+              <a:t>●  재현</a:t>
+            </a:r>
+          </a:p>
+          <a:p>
+            <a:pPr>
+              <a:spcAft>
+                <a:spcPts val="1300"/>
+              </a:spcAft>
+            </a:pPr>
+            <a:r>
+              <a:rPr sz="1350" b="0">
+                <a:solidFill>
+                  <a:srgbClr val="6B6B6B"/>
+                </a:solidFill>
+                <a:latin typeface="맑은 고딕"/>
+              </a:rPr>
+              <a:t>     pip install -r presentation/requirements.txt &amp;&amp; python presentation/build_deck.py — CSV 고정으로 결정론적 재생성</a:t>
+            </a:r>
+          </a:p>
+        </p:txBody>
+      </p:sp>
+      <p:sp>
+        <p:nvSpPr>
+          <p:cNvPr id="8" name="Rectangle 7"/>
+          <p:cNvSpPr/>
+          <p:nvPr/>
+        </p:nvSpPr>
+        <p:spPr>
+          <a:xfrm>
+            <a:off x="0" y="6565392"/>
+            <a:ext cx="12191695" cy="292608"/>
+          </a:xfrm>
+          <a:prstGeom prst="rect">
+            <a:avLst/>
+          </a:prstGeom>
+          <a:solidFill>
+            <a:srgbClr val="F2F2F4"/>
+          </a:solidFill>
+          <a:ln>
+            <a:noFill/>
+          </a:ln>
+          <a:effectLst/>
+        </p:spPr>
+        <p:style>
+          <a:lnRef idx="1">
+            <a:schemeClr val="accent1"/>
+          </a:lnRef>
+          <a:fillRef idx="3">
+            <a:schemeClr val="accent1"/>
+          </a:fillRef>
+          <a:effectRef idx="2">
+            <a:schemeClr val="accent1"/>
+          </a:effectRef>
+          <a:fontRef idx="minor">
+            <a:schemeClr val="lt1"/>
+          </a:fontRef>
+        </p:style>
+        <p:txBody>
+          <a:bodyPr rtlCol="0" anchor="ctr"/>
+          <a:lstStyle/>
+          <a:p>
+            <a:pPr algn="ctr"/>
+          </a:p>
+        </p:txBody>
+      </p:sp>
+      <p:sp>
+        <p:nvSpPr>
           <p:cNvPr id="9" name="TextBox 8"/>
           <p:cNvSpPr txBox="1"/>
           <p:nvPr/>
@@ -11318,7 +12082,7 @@
                 </a:solidFill>
                 <a:latin typeface="맑은 고딕"/>
               </a:rPr>
-              <a:t>20</a:t>
+              <a:t>21</a:t>
             </a:r>
           </a:p>
         </p:txBody>
@@ -11414,7 +12178,7 @@
                 </a:solidFill>
                 <a:latin typeface="Segoe UI"/>
               </a:rPr>
-              <a:t>01 · OVERVIEW</a:t>
+              <a:t>01 · PROBLEM</a:t>
             </a:r>
           </a:p>
         </p:txBody>
@@ -11448,7 +12212,7 @@
                 </a:solidFill>
                 <a:latin typeface="맑은 고딕"/>
               </a:rPr>
-              <a:t>분석 개요</a:t>
+              <a:t>문제 정의 — 마케터의 고민</a:t>
             </a:r>
           </a:p>
         </p:txBody>
@@ -11526,7 +12290,7 @@
                 </a:solidFill>
                 <a:latin typeface="맑은 고딕"/>
               </a:rPr>
-              <a:t>질문: 2026년 6월 11일 현재, 한국에서 어떤 해시태그가 뜨고 있고 — 어디로 가는가?</a:t>
+              <a:t>“다음 달에 어떤 해시태그가 떡상할까? 우리 계정 도달은 오를까, 꺾일까?” — 감으로는 답할 수 없는 질문들</a:t>
             </a:r>
           </a:p>
         </p:txBody>
@@ -11565,7 +12329,7 @@
                 </a:solidFill>
                 <a:latin typeface="맑은 고딕"/>
               </a:rPr>
-              <a:t>●  왜 시계열인가</a:t>
+              <a:t>●  “어떤 태그가 떡상할까?”</a:t>
             </a:r>
           </a:p>
           <a:p>
@@ -11581,7 +12345,7 @@
                 </a:solidFill>
                 <a:latin typeface="맑은 고딕"/>
               </a:rPr>
-              <a:t>     한 시점의 인기 순위는 '지금 큰 것'만 보여줌 — 추세·계절성·모멘텀을 분리해야 '뜨는 것'과 '식는 것'을 구분</a:t>
+              <a:t>     인기 순위는 '이미 큰 것'만 보여줌 — 순위에 올라온 시점은 대개 피크 직전이라 따라 들어가면 늦음</a:t>
             </a:r>
           </a:p>
           <a:p>
@@ -11597,7 +12361,7 @@
                 </a:solidFill>
                 <a:latin typeface="맑은 고딕"/>
               </a:rPr>
-              <a:t>●  데이터</a:t>
+              <a:t>●  “우리 계정은 어떻게 될까?”</a:t>
             </a:r>
           </a:p>
           <a:p>
@@ -11613,7 +12377,7 @@
                 </a:solidFill>
                 <a:latin typeface="맑은 고딕"/>
               </a:rPr>
-              <a:t>     네이버 데이터랩 검색어트렌드 실데이터 — 한국 사용자의 일별 검색 관심도 (2026-06-11 수집)</a:t>
+              <a:t>     도달·팔로워 그래프가 오르는 중인지, 꺾이는 중인지, 그냥 요일 출렁임인지 눈으로는 구분 불가</a:t>
             </a:r>
           </a:p>
           <a:p>
@@ -11629,7 +12393,7 @@
                 </a:solidFill>
                 <a:latin typeface="맑은 고딕"/>
               </a:rPr>
-              <a:t>●  프록시 가정</a:t>
+              <a:t>●  “왜 예측이 어렵나?”</a:t>
             </a:r>
           </a:p>
           <a:p>
@@ -11645,7 +12409,7 @@
                 </a:solidFill>
                 <a:latin typeface="맑은 고딕"/>
               </a:rPr>
-              <a:t>     인스타그램은 해시태그 시계열 공개 API가 없음 → 같은 주제의 네이버 검색량을 한국 관심도의 대리지표로 사용</a:t>
+              <a:t>     관심도 = 추세 + 계절성 + 이벤트 + 노이즈가 섞인 신호 — 분리하지 않으면 노이즈를 트렌드로 오독</a:t>
             </a:r>
           </a:p>
           <a:p>
@@ -11661,7 +12425,7 @@
                 </a:solidFill>
                 <a:latin typeface="맑은 고딕"/>
               </a:rPr>
-              <a:t>●  분석 절차</a:t>
+              <a:t>●  이 발표의 제안</a:t>
             </a:r>
           </a:p>
           <a:p>
@@ -11677,7 +12441,7 @@
                 </a:solidFill>
                 <a:latin typeface="맑은 고딕"/>
               </a:rPr>
-              <a:t>     EDA → 평활화 → 정상성 진단 → ACF → 분해 → 계절성/모멘텀 → 예측 → 액션</a:t>
+              <a:t>     시계열 분해로 신호를 성분별로 나누면 '진짜 상승'·'피크 통과'·'단순 요일 효과'를 데이터로 구분할 수 있다</a:t>
             </a:r>
           </a:p>
         </p:txBody>
@@ -11886,7 +12650,7 @@
                 </a:solidFill>
                 <a:latin typeface="Segoe UI"/>
               </a:rPr>
-              <a:t>01 · DATASET</a:t>
+              <a:t>01 · APPROACH</a:t>
             </a:r>
           </a:p>
         </p:txBody>
@@ -11920,7 +12684,7 @@
                 </a:solidFill>
                 <a:latin typeface="맑은 고딕"/>
               </a:rPr>
-              <a:t>데이터셋</a:t>
+              <a:t>분석 접근</a:t>
             </a:r>
           </a:p>
         </p:txBody>
@@ -11998,7 +12762,7 @@
                 </a:solidFill>
                 <a:latin typeface="맑은 고딕"/>
               </a:rPr>
-              <a:t>2026-01-01 ~ 2026-06-10 · 161일 · 일 단위 · 라이프스타일 해시태그 9개</a:t>
+              <a:t>질문: 2026년 6월 11일 현재, 한국에서 어떤 해시태그가 뜨고 있고 — 어디로 가는가?</a:t>
             </a:r>
           </a:p>
         </p:txBody>
@@ -12037,7 +12801,7 @@
                 </a:solidFill>
                 <a:latin typeface="맑은 고딕"/>
               </a:rPr>
-              <a:t>●  수집</a:t>
+              <a:t>●  왜 시계열인가</a:t>
             </a:r>
           </a:p>
           <a:p>
@@ -12053,7 +12817,7 @@
                 </a:solidFill>
                 <a:latin typeface="맑은 고딕"/>
               </a:rPr>
-              <a:t>     네이버 데이터랩 검색어트렌드 API — 키워드그룹별 일별 ratio (그룹 예: 러닝=러닝+러닝크루)</a:t>
+              <a:t>     한 시점의 인기 순위는 '지금 큰 것'만 보여줌 — 추세·계절성·모멘텀을 분리해야 '뜨는 것'과 '식는 것'을 구분</a:t>
             </a:r>
           </a:p>
           <a:p>
@@ -12069,7 +12833,7 @@
                 </a:solidFill>
                 <a:latin typeface="맑은 고딕"/>
               </a:rPr>
-              <a:t>●  대상 태그</a:t>
+              <a:t>●  데이터</a:t>
             </a:r>
           </a:p>
           <a:p>
@@ -12085,7 +12849,7 @@
                 </a:solidFill>
                 <a:latin typeface="맑은 고딕"/>
               </a:rPr>
-              <a:t>     #러닝 #캠핑 #등산 #카페 #국내여행 #다이어트 #피크닉 #클라이밍 #빵지순례</a:t>
+              <a:t>     네이버 데이터랩 검색어트렌드 실데이터 — 한국 사용자의 일별 검색 관심도 (2026-06-11 수집)</a:t>
             </a:r>
           </a:p>
           <a:p>
@@ -12101,7 +12865,7 @@
                 </a:solidFill>
                 <a:latin typeface="맑은 고딕"/>
               </a:rPr>
-              <a:t>●  ratio의 의미</a:t>
+              <a:t>●  프록시 가정</a:t>
             </a:r>
           </a:p>
           <a:p>
@@ -12117,7 +12881,7 @@
                 </a:solidFill>
                 <a:latin typeface="맑은 고딕"/>
               </a:rPr>
-              <a:t>     요청 내 최대값=100인 상대값 → 시리즈 간 절대 비교는 불가, 시리즈 내 시간 변화 분석은 유효</a:t>
+              <a:t>     인스타그램은 해시태그 시계열 공개 API가 없음 → 같은 주제의 네이버 검색량을 한국 관심도의 대리지표로 사용</a:t>
             </a:r>
           </a:p>
           <a:p>
@@ -12133,7 +12897,7 @@
                 </a:solidFill>
                 <a:latin typeface="맑은 고딕"/>
               </a:rPr>
-              <a:t>●  형태</a:t>
+              <a:t>●  분석 절차</a:t>
             </a:r>
           </a:p>
           <a:p>
@@ -12149,7 +12913,7 @@
                 </a:solidFill>
                 <a:latin typeface="맑은 고딕"/>
               </a:rPr>
-              <a:t>     tidy 패널 (date, hashtag, ratio) → pivot하여 날짜×태그 행렬로 분석</a:t>
+              <a:t>     EDA → 평활화 → 정상성 진단 → ACF → 분해 → 계절성/모멘텀 → 예측 → 액션</a:t>
             </a:r>
           </a:p>
         </p:txBody>
@@ -12293,52 +13057,8 @@
         </p:nvSpPr>
         <p:spPr>
           <a:xfrm>
-            <a:off x="0" y="0"/>
-            <a:ext cx="12191695" cy="6858000"/>
-          </a:xfrm>
-          <a:prstGeom prst="rect">
-            <a:avLst/>
-          </a:prstGeom>
-          <a:solidFill>
-            <a:srgbClr val="222222"/>
-          </a:solidFill>
-          <a:ln>
-            <a:noFill/>
-          </a:ln>
-          <a:effectLst/>
-        </p:spPr>
-        <p:style>
-          <a:lnRef idx="1">
-            <a:schemeClr val="accent1"/>
-          </a:lnRef>
-          <a:fillRef idx="3">
-            <a:schemeClr val="accent1"/>
-          </a:fillRef>
-          <a:effectRef idx="2">
-            <a:schemeClr val="accent1"/>
-          </a:effectRef>
-          <a:fontRef idx="minor">
-            <a:schemeClr val="lt1"/>
-          </a:fontRef>
-        </p:style>
-        <p:txBody>
-          <a:bodyPr rtlCol="0" anchor="ctr"/>
-          <a:lstStyle/>
-          <a:p>
-            <a:pPr algn="ctr"/>
-          </a:p>
-        </p:txBody>
-      </p:sp>
-      <p:sp>
-        <p:nvSpPr>
-          <p:cNvPr id="3" name="Rectangle 2"/>
-          <p:cNvSpPr/>
-          <p:nvPr/>
-        </p:nvSpPr>
-        <p:spPr>
-          <a:xfrm>
-            <a:off x="822960" y="2743200"/>
-            <a:ext cx="1280160" cy="109728"/>
+            <a:off x="365760" y="384048"/>
+            <a:ext cx="164592" cy="502920"/>
           </a:xfrm>
           <a:prstGeom prst="rect">
             <a:avLst/>
@@ -12375,14 +13095,48 @@
       </p:sp>
       <p:sp>
         <p:nvSpPr>
+          <p:cNvPr id="3" name="TextBox 2"/>
+          <p:cNvSpPr txBox="1"/>
+          <p:nvPr/>
+        </p:nvSpPr>
+        <p:spPr>
+          <a:xfrm>
+            <a:off x="685800" y="256032"/>
+            <a:ext cx="10058400" cy="320040"/>
+          </a:xfrm>
+          <a:prstGeom prst="rect">
+            <a:avLst/>
+          </a:prstGeom>
+          <a:noFill/>
+        </p:spPr>
+        <p:txBody>
+          <a:bodyPr wrap="square">
+            <a:spAutoFit/>
+          </a:bodyPr>
+          <a:lstStyle/>
+          <a:p>
+            <a:r>
+              <a:rPr sz="1100" b="1">
+                <a:solidFill>
+                  <a:srgbClr val="833AB4"/>
+                </a:solidFill>
+                <a:latin typeface="Segoe UI"/>
+              </a:rPr>
+              <a:t>01 · DATASET</a:t>
+            </a:r>
+          </a:p>
+        </p:txBody>
+      </p:sp>
+      <p:sp>
+        <p:nvSpPr>
           <p:cNvPr id="4" name="TextBox 3"/>
           <p:cNvSpPr txBox="1"/>
           <p:nvPr/>
         </p:nvSpPr>
         <p:spPr>
           <a:xfrm>
-            <a:off x="822960" y="2011680"/>
-            <a:ext cx="10058400" cy="548640"/>
+            <a:off x="658368" y="457200"/>
+            <a:ext cx="10515600" cy="640080"/>
           </a:xfrm>
           <a:prstGeom prst="rect">
             <a:avLst/>
@@ -12396,27 +13150,300 @@
           <a:lstStyle/>
           <a:p>
             <a:r>
-              <a:rPr sz="1400" b="1">
+              <a:rPr sz="2800" b="1">
+                <a:solidFill>
+                  <a:srgbClr val="222222"/>
+                </a:solidFill>
+                <a:latin typeface="맑은 고딕"/>
+              </a:rPr>
+              <a:t>데이터셋</a:t>
+            </a:r>
+          </a:p>
+        </p:txBody>
+      </p:sp>
+      <p:sp>
+        <p:nvSpPr>
+          <p:cNvPr id="5" name="Rectangle 4"/>
+          <p:cNvSpPr/>
+          <p:nvPr/>
+        </p:nvSpPr>
+        <p:spPr>
+          <a:xfrm>
+            <a:off x="685800" y="1371600"/>
+            <a:ext cx="10789920" cy="822960"/>
+          </a:xfrm>
+          <a:prstGeom prst="rect">
+            <a:avLst/>
+          </a:prstGeom>
+          <a:solidFill>
+            <a:srgbClr val="F2F2F4"/>
+          </a:solidFill>
+          <a:ln>
+            <a:noFill/>
+          </a:ln>
+          <a:effectLst/>
+        </p:spPr>
+        <p:style>
+          <a:lnRef idx="1">
+            <a:schemeClr val="accent1"/>
+          </a:lnRef>
+          <a:fillRef idx="3">
+            <a:schemeClr val="accent1"/>
+          </a:fillRef>
+          <a:effectRef idx="2">
+            <a:schemeClr val="accent1"/>
+          </a:effectRef>
+          <a:fontRef idx="minor">
+            <a:schemeClr val="lt1"/>
+          </a:fontRef>
+        </p:style>
+        <p:txBody>
+          <a:bodyPr rtlCol="0" anchor="ctr"/>
+          <a:lstStyle/>
+          <a:p>
+            <a:pPr algn="ctr"/>
+          </a:p>
+        </p:txBody>
+      </p:sp>
+      <p:sp>
+        <p:nvSpPr>
+          <p:cNvPr id="6" name="TextBox 5"/>
+          <p:cNvSpPr txBox="1"/>
+          <p:nvPr/>
+        </p:nvSpPr>
+        <p:spPr>
+          <a:xfrm>
+            <a:off x="914400" y="1481328"/>
+            <a:ext cx="10332720" cy="640080"/>
+          </a:xfrm>
+          <a:prstGeom prst="rect">
+            <a:avLst/>
+          </a:prstGeom>
+          <a:noFill/>
+        </p:spPr>
+        <p:txBody>
+          <a:bodyPr wrap="square" anchor="ctr">
+            <a:spAutoFit/>
+          </a:bodyPr>
+          <a:lstStyle/>
+          <a:p>
+            <a:r>
+              <a:rPr sz="1500" b="1">
+                <a:solidFill>
+                  <a:srgbClr val="222222"/>
+                </a:solidFill>
+                <a:latin typeface="맑은 고딕"/>
+              </a:rPr>
+              <a:t>2026-01-01 ~ 2026-06-10 · 161일 · 일 단위 · 라이프스타일 해시태그 9개</a:t>
+            </a:r>
+          </a:p>
+        </p:txBody>
+      </p:sp>
+      <p:sp>
+        <p:nvSpPr>
+          <p:cNvPr id="7" name="TextBox 6"/>
+          <p:cNvSpPr txBox="1"/>
+          <p:nvPr/>
+        </p:nvSpPr>
+        <p:spPr>
+          <a:xfrm>
+            <a:off x="822960" y="2514600"/>
+            <a:ext cx="10607040" cy="4206240"/>
+          </a:xfrm>
+          <a:prstGeom prst="rect">
+            <a:avLst/>
+          </a:prstGeom>
+          <a:noFill/>
+        </p:spPr>
+        <p:txBody>
+          <a:bodyPr wrap="square">
+            <a:spAutoFit/>
+          </a:bodyPr>
+          <a:lstStyle/>
+          <a:p>
+            <a:pPr>
+              <a:spcAft>
+                <a:spcPts val="1000"/>
+              </a:spcAft>
+            </a:pPr>
+            <a:r>
+              <a:rPr sz="1650" b="1">
                 <a:solidFill>
                   <a:srgbClr val="E1306C"/>
                 </a:solidFill>
-                <a:latin typeface="Segoe UI"/>
-              </a:rPr>
-              <a:t>PART 1 · THEORY</a:t>
-            </a:r>
-          </a:p>
-        </p:txBody>
-      </p:sp>
-      <p:sp>
-        <p:nvSpPr>
-          <p:cNvPr id="5" name="TextBox 4"/>
-          <p:cNvSpPr txBox="1"/>
-          <p:nvPr/>
-        </p:nvSpPr>
-        <p:spPr>
-          <a:xfrm>
-            <a:off x="822960" y="3017520"/>
-            <a:ext cx="10515600" cy="1371600"/>
+                <a:latin typeface="맑은 고딕"/>
+              </a:rPr>
+              <a:t>●  수집</a:t>
+            </a:r>
+          </a:p>
+          <a:p>
+            <a:pPr>
+              <a:spcAft>
+                <a:spcPts val="1300"/>
+              </a:spcAft>
+            </a:pPr>
+            <a:r>
+              <a:rPr sz="1350" b="0">
+                <a:solidFill>
+                  <a:srgbClr val="6B6B6B"/>
+                </a:solidFill>
+                <a:latin typeface="맑은 고딕"/>
+              </a:rPr>
+              <a:t>     네이버 데이터랩 검색어트렌드 API — 키워드그룹별 일별 ratio (그룹 예: 러닝=러닝+러닝크루)</a:t>
+            </a:r>
+          </a:p>
+          <a:p>
+            <a:pPr>
+              <a:spcAft>
+                <a:spcPts val="1000"/>
+              </a:spcAft>
+            </a:pPr>
+            <a:r>
+              <a:rPr sz="1650" b="1">
+                <a:solidFill>
+                  <a:srgbClr val="E1306C"/>
+                </a:solidFill>
+                <a:latin typeface="맑은 고딕"/>
+              </a:rPr>
+              <a:t>●  대상 태그</a:t>
+            </a:r>
+          </a:p>
+          <a:p>
+            <a:pPr>
+              <a:spcAft>
+                <a:spcPts val="1300"/>
+              </a:spcAft>
+            </a:pPr>
+            <a:r>
+              <a:rPr sz="1350" b="0">
+                <a:solidFill>
+                  <a:srgbClr val="6B6B6B"/>
+                </a:solidFill>
+                <a:latin typeface="맑은 고딕"/>
+              </a:rPr>
+              <a:t>     #러닝 #캠핑 #등산 #카페 #국내여행 #다이어트 #피크닉 #클라이밍 #빵지순례</a:t>
+            </a:r>
+          </a:p>
+          <a:p>
+            <a:pPr>
+              <a:spcAft>
+                <a:spcPts val="1000"/>
+              </a:spcAft>
+            </a:pPr>
+            <a:r>
+              <a:rPr sz="1650" b="1">
+                <a:solidFill>
+                  <a:srgbClr val="E1306C"/>
+                </a:solidFill>
+                <a:latin typeface="맑은 고딕"/>
+              </a:rPr>
+              <a:t>●  ratio의 의미</a:t>
+            </a:r>
+          </a:p>
+          <a:p>
+            <a:pPr>
+              <a:spcAft>
+                <a:spcPts val="1300"/>
+              </a:spcAft>
+            </a:pPr>
+            <a:r>
+              <a:rPr sz="1350" b="0">
+                <a:solidFill>
+                  <a:srgbClr val="6B6B6B"/>
+                </a:solidFill>
+                <a:latin typeface="맑은 고딕"/>
+              </a:rPr>
+              <a:t>     요청 내 최대값=100인 상대값 → 시리즈 간 절대 비교는 불가, 시리즈 내 시간 변화 분석은 유효</a:t>
+            </a:r>
+          </a:p>
+          <a:p>
+            <a:pPr>
+              <a:spcAft>
+                <a:spcPts val="1000"/>
+              </a:spcAft>
+            </a:pPr>
+            <a:r>
+              <a:rPr sz="1650" b="1">
+                <a:solidFill>
+                  <a:srgbClr val="E1306C"/>
+                </a:solidFill>
+                <a:latin typeface="맑은 고딕"/>
+              </a:rPr>
+              <a:t>●  형태</a:t>
+            </a:r>
+          </a:p>
+          <a:p>
+            <a:pPr>
+              <a:spcAft>
+                <a:spcPts val="1300"/>
+              </a:spcAft>
+            </a:pPr>
+            <a:r>
+              <a:rPr sz="1350" b="0">
+                <a:solidFill>
+                  <a:srgbClr val="6B6B6B"/>
+                </a:solidFill>
+                <a:latin typeface="맑은 고딕"/>
+              </a:rPr>
+              <a:t>     tidy 패널 (date, hashtag, ratio) → pivot하여 날짜×태그 행렬로 분석</a:t>
+            </a:r>
+          </a:p>
+        </p:txBody>
+      </p:sp>
+      <p:sp>
+        <p:nvSpPr>
+          <p:cNvPr id="8" name="Rectangle 7"/>
+          <p:cNvSpPr/>
+          <p:nvPr/>
+        </p:nvSpPr>
+        <p:spPr>
+          <a:xfrm>
+            <a:off x="0" y="6565392"/>
+            <a:ext cx="12191695" cy="292608"/>
+          </a:xfrm>
+          <a:prstGeom prst="rect">
+            <a:avLst/>
+          </a:prstGeom>
+          <a:solidFill>
+            <a:srgbClr val="F2F2F4"/>
+          </a:solidFill>
+          <a:ln>
+            <a:noFill/>
+          </a:ln>
+          <a:effectLst/>
+        </p:spPr>
+        <p:style>
+          <a:lnRef idx="1">
+            <a:schemeClr val="accent1"/>
+          </a:lnRef>
+          <a:fillRef idx="3">
+            <a:schemeClr val="accent1"/>
+          </a:fillRef>
+          <a:effectRef idx="2">
+            <a:schemeClr val="accent1"/>
+          </a:effectRef>
+          <a:fontRef idx="minor">
+            <a:schemeClr val="lt1"/>
+          </a:fontRef>
+        </p:style>
+        <p:txBody>
+          <a:bodyPr rtlCol="0" anchor="ctr"/>
+          <a:lstStyle/>
+          <a:p>
+            <a:pPr algn="ctr"/>
+          </a:p>
+        </p:txBody>
+      </p:sp>
+      <p:sp>
+        <p:nvSpPr>
+          <p:cNvPr id="9" name="TextBox 8"/>
+          <p:cNvSpPr txBox="1"/>
+          <p:nvPr/>
+        </p:nvSpPr>
+        <p:spPr>
+          <a:xfrm>
+            <a:off x="365760" y="6547104"/>
+            <a:ext cx="7315200" cy="274320"/>
           </a:xfrm>
           <a:prstGeom prst="rect">
             <a:avLst/>
@@ -12430,13 +13457,48 @@
           <a:lstStyle/>
           <a:p>
             <a:r>
-              <a:rPr sz="4000" b="1">
-                <a:solidFill>
-                  <a:srgbClr val="FFFFFF"/>
-                </a:solidFill>
-                <a:latin typeface="맑은 고딕"/>
-              </a:rPr>
-              <a:t>시계열 이론 — 수업에서 배운 도구들</a:t>
+              <a:rPr sz="900" b="0">
+                <a:solidFill>
+                  <a:srgbClr val="6B6B6B"/>
+                </a:solidFill>
+                <a:latin typeface="맑은 고딕"/>
+              </a:rPr>
+              <a:t>시계열 데이터 분석 · 한국 해시태그 트렌드 · 기준일 2026-06-11</a:t>
+            </a:r>
+          </a:p>
+        </p:txBody>
+      </p:sp>
+      <p:sp>
+        <p:nvSpPr>
+          <p:cNvPr id="10" name="TextBox 9"/>
+          <p:cNvSpPr txBox="1"/>
+          <p:nvPr/>
+        </p:nvSpPr>
+        <p:spPr>
+          <a:xfrm>
+            <a:off x="11094415" y="6547104"/>
+            <a:ext cx="822960" cy="274320"/>
+          </a:xfrm>
+          <a:prstGeom prst="rect">
+            <a:avLst/>
+          </a:prstGeom>
+          <a:noFill/>
+        </p:spPr>
+        <p:txBody>
+          <a:bodyPr wrap="square">
+            <a:spAutoFit/>
+          </a:bodyPr>
+          <a:lstStyle/>
+          <a:p>
+            <a:pPr algn="r"/>
+            <a:r>
+              <a:rPr sz="900" b="0">
+                <a:solidFill>
+                  <a:srgbClr val="6B6B6B"/>
+                </a:solidFill>
+                <a:latin typeface="맑은 고딕"/>
+              </a:rPr>
+              <a:t>4</a:t>
             </a:r>
           </a:p>
         </p:txBody>
@@ -12467,8 +13529,52 @@
         </p:nvSpPr>
         <p:spPr>
           <a:xfrm>
-            <a:off x="365760" y="384048"/>
-            <a:ext cx="164592" cy="502920"/>
+            <a:off x="0" y="0"/>
+            <a:ext cx="12191695" cy="6858000"/>
+          </a:xfrm>
+          <a:prstGeom prst="rect">
+            <a:avLst/>
+          </a:prstGeom>
+          <a:solidFill>
+            <a:srgbClr val="222222"/>
+          </a:solidFill>
+          <a:ln>
+            <a:noFill/>
+          </a:ln>
+          <a:effectLst/>
+        </p:spPr>
+        <p:style>
+          <a:lnRef idx="1">
+            <a:schemeClr val="accent1"/>
+          </a:lnRef>
+          <a:fillRef idx="3">
+            <a:schemeClr val="accent1"/>
+          </a:fillRef>
+          <a:effectRef idx="2">
+            <a:schemeClr val="accent1"/>
+          </a:effectRef>
+          <a:fontRef idx="minor">
+            <a:schemeClr val="lt1"/>
+          </a:fontRef>
+        </p:style>
+        <p:txBody>
+          <a:bodyPr rtlCol="0" anchor="ctr"/>
+          <a:lstStyle/>
+          <a:p>
+            <a:pPr algn="ctr"/>
+          </a:p>
+        </p:txBody>
+      </p:sp>
+      <p:sp>
+        <p:nvSpPr>
+          <p:cNvPr id="3" name="Rectangle 2"/>
+          <p:cNvSpPr/>
+          <p:nvPr/>
+        </p:nvSpPr>
+        <p:spPr>
+          <a:xfrm>
+            <a:off x="822960" y="2743200"/>
+            <a:ext cx="1280160" cy="109728"/>
           </a:xfrm>
           <a:prstGeom prst="rect">
             <a:avLst/>
@@ -12505,14 +13611,14 @@
       </p:sp>
       <p:sp>
         <p:nvSpPr>
-          <p:cNvPr id="3" name="TextBox 2"/>
-          <p:cNvSpPr txBox="1"/>
-          <p:nvPr/>
-        </p:nvSpPr>
-        <p:spPr>
-          <a:xfrm>
-            <a:off x="685800" y="256032"/>
-            <a:ext cx="10058400" cy="320040"/>
+          <p:cNvPr id="4" name="TextBox 3"/>
+          <p:cNvSpPr txBox="1"/>
+          <p:nvPr/>
+        </p:nvSpPr>
+        <p:spPr>
+          <a:xfrm>
+            <a:off x="822960" y="2011680"/>
+            <a:ext cx="10058400" cy="548640"/>
           </a:xfrm>
           <a:prstGeom prst="rect">
             <a:avLst/>
@@ -12526,27 +13632,27 @@
           <a:lstStyle/>
           <a:p>
             <a:r>
-              <a:rPr sz="1100" b="1">
-                <a:solidFill>
-                  <a:srgbClr val="833AB4"/>
+              <a:rPr sz="1400" b="1">
+                <a:solidFill>
+                  <a:srgbClr val="E1306C"/>
                 </a:solidFill>
                 <a:latin typeface="Segoe UI"/>
               </a:rPr>
-              <a:t>02 · STOCHASTIC PROCESS</a:t>
-            </a:r>
-          </a:p>
-        </p:txBody>
-      </p:sp>
-      <p:sp>
-        <p:nvSpPr>
-          <p:cNvPr id="4" name="TextBox 3"/>
-          <p:cNvSpPr txBox="1"/>
-          <p:nvPr/>
-        </p:nvSpPr>
-        <p:spPr>
-          <a:xfrm>
-            <a:off x="658368" y="457200"/>
-            <a:ext cx="10515600" cy="640080"/>
+              <a:t>PART 1 · THEORY</a:t>
+            </a:r>
+          </a:p>
+        </p:txBody>
+      </p:sp>
+      <p:sp>
+        <p:nvSpPr>
+          <p:cNvPr id="5" name="TextBox 4"/>
+          <p:cNvSpPr txBox="1"/>
+          <p:nvPr/>
+        </p:nvSpPr>
+        <p:spPr>
+          <a:xfrm>
+            <a:off x="822960" y="3017520"/>
+            <a:ext cx="10515600" cy="1371600"/>
           </a:xfrm>
           <a:prstGeom prst="rect">
             <a:avLst/>
@@ -12560,550 +13666,13 @@
           <a:lstStyle/>
           <a:p>
             <a:r>
-              <a:rPr sz="2800" b="1">
-                <a:solidFill>
-                  <a:srgbClr val="222222"/>
-                </a:solidFill>
-                <a:latin typeface="맑은 고딕"/>
-              </a:rPr>
-              <a:t>시계열 데이터란</a:t>
-            </a:r>
-          </a:p>
-        </p:txBody>
-      </p:sp>
-      <p:sp>
-        <p:nvSpPr>
-          <p:cNvPr id="5" name="TextBox 4"/>
-          <p:cNvSpPr txBox="1"/>
-          <p:nvPr/>
-        </p:nvSpPr>
-        <p:spPr>
-          <a:xfrm>
-            <a:off x="731520" y="1417320"/>
-            <a:ext cx="6309360" cy="4846320"/>
-          </a:xfrm>
-          <a:prstGeom prst="rect">
-            <a:avLst/>
-          </a:prstGeom>
-          <a:noFill/>
-        </p:spPr>
-        <p:txBody>
-          <a:bodyPr wrap="square">
-            <a:spAutoFit/>
-          </a:bodyPr>
-          <a:lstStyle/>
-          <a:p>
-            <a:pPr>
-              <a:spcAft>
-                <a:spcPts val="600"/>
-              </a:spcAft>
-            </a:pPr>
-            <a:r>
-              <a:rPr sz="1550" b="1">
-                <a:solidFill>
-                  <a:srgbClr val="E1306C"/>
-                </a:solidFill>
-                <a:latin typeface="맑은 고딕"/>
-              </a:rPr>
-              <a:t>●  정의</a:t>
-            </a:r>
-          </a:p>
-          <a:p>
-            <a:pPr>
-              <a:spcAft>
-                <a:spcPts val="1200"/>
-              </a:spcAft>
-            </a:pPr>
-            <a:r>
-              <a:rPr sz="1250" b="0">
-                <a:solidFill>
-                  <a:srgbClr val="6B6B6B"/>
-                </a:solidFill>
-                <a:latin typeface="맑은 고딕"/>
-              </a:rPr>
-              <a:t>     시간 순서로 관측된 확률변수의 열 — 확률과정 {X_t}의 한 실현(realization)</a:t>
-            </a:r>
-          </a:p>
-          <a:p>
-            <a:pPr>
-              <a:spcAft>
-                <a:spcPts val="600"/>
-              </a:spcAft>
-            </a:pPr>
-            <a:r>
-              <a:rPr sz="1550" b="1">
-                <a:solidFill>
-                  <a:srgbClr val="E1306C"/>
-                </a:solidFill>
-                <a:latin typeface="맑은 고딕"/>
-              </a:rPr>
-              <a:t>●  핵심 성질: 시간 의존성</a:t>
-            </a:r>
-          </a:p>
-          <a:p>
-            <a:pPr>
-              <a:spcAft>
-                <a:spcPts val="1200"/>
-              </a:spcAft>
-            </a:pPr>
-            <a:r>
-              <a:rPr sz="1250" b="0">
-                <a:solidFill>
-                  <a:srgbClr val="6B6B6B"/>
-                </a:solidFill>
-                <a:latin typeface="맑은 고딕"/>
-              </a:rPr>
-              <a:t>     관측치가 i.i.d.가 아님 — 오늘 값이 어제 값과 상관 → 고전 통계의 독립 가정이 무너짐</a:t>
-            </a:r>
-          </a:p>
-          <a:p>
-            <a:pPr>
-              <a:spcAft>
-                <a:spcPts val="600"/>
-              </a:spcAft>
-            </a:pPr>
-            <a:r>
-              <a:rPr sz="1550" b="1">
-                <a:solidFill>
-                  <a:srgbClr val="E1306C"/>
-                </a:solidFill>
-                <a:latin typeface="맑은 고딕"/>
-              </a:rPr>
-              <a:t>●  왜 따로 배우는가</a:t>
-            </a:r>
-          </a:p>
-          <a:p>
-            <a:pPr>
-              <a:spcAft>
-                <a:spcPts val="1200"/>
-              </a:spcAft>
-            </a:pPr>
-            <a:r>
-              <a:rPr sz="1250" b="0">
-                <a:solidFill>
-                  <a:srgbClr val="6B6B6B"/>
-                </a:solidFill>
-                <a:latin typeface="맑은 고딕"/>
-              </a:rPr>
-              <a:t>     회귀처럼 다루면 표준오차·검정이 모두 왜곡 — 자기상관을 모형 안에 넣어야 함</a:t>
-            </a:r>
-          </a:p>
-          <a:p>
-            <a:pPr>
-              <a:spcAft>
-                <a:spcPts val="600"/>
-              </a:spcAft>
-            </a:pPr>
-            <a:r>
-              <a:rPr sz="1550" b="1">
-                <a:solidFill>
-                  <a:srgbClr val="E1306C"/>
-                </a:solidFill>
-                <a:latin typeface="맑은 고딕"/>
-              </a:rPr>
-              <a:t>●  우리 데이터</a:t>
-            </a:r>
-          </a:p>
-          <a:p>
-            <a:pPr>
-              <a:spcAft>
-                <a:spcPts val="1200"/>
-              </a:spcAft>
-            </a:pPr>
-            <a:r>
-              <a:rPr sz="1250" b="0">
-                <a:solidFill>
-                  <a:srgbClr val="6B6B6B"/>
-                </a:solidFill>
-                <a:latin typeface="맑은 고딕"/>
-              </a:rPr>
-              <a:t>     해시태그별 일별 관심도 161개 관측치 = 일 단위 이산 시계열 9개</a:t>
-            </a:r>
-          </a:p>
-        </p:txBody>
-      </p:sp>
-      <p:sp>
-        <p:nvSpPr>
-          <p:cNvPr id="6" name="Rectangle 5"/>
-          <p:cNvSpPr/>
-          <p:nvPr/>
-        </p:nvSpPr>
-        <p:spPr>
-          <a:xfrm>
-            <a:off x="7269480" y="1417320"/>
-            <a:ext cx="4434840" cy="4846320"/>
-          </a:xfrm>
-          <a:prstGeom prst="rect">
-            <a:avLst/>
-          </a:prstGeom>
-          <a:solidFill>
-            <a:srgbClr val="F2F2F4"/>
-          </a:solidFill>
-          <a:ln>
-            <a:noFill/>
-          </a:ln>
-          <a:effectLst/>
-        </p:spPr>
-        <p:style>
-          <a:lnRef idx="1">
-            <a:schemeClr val="accent1"/>
-          </a:lnRef>
-          <a:fillRef idx="3">
-            <a:schemeClr val="accent1"/>
-          </a:fillRef>
-          <a:effectRef idx="2">
-            <a:schemeClr val="accent1"/>
-          </a:effectRef>
-          <a:fontRef idx="minor">
-            <a:schemeClr val="lt1"/>
-          </a:fontRef>
-        </p:style>
-        <p:txBody>
-          <a:bodyPr rtlCol="0" anchor="ctr"/>
-          <a:lstStyle/>
-          <a:p>
-            <a:pPr algn="ctr"/>
-          </a:p>
-        </p:txBody>
-      </p:sp>
-      <p:sp>
-        <p:nvSpPr>
-          <p:cNvPr id="7" name="Rectangle 6"/>
-          <p:cNvSpPr/>
-          <p:nvPr/>
-        </p:nvSpPr>
-        <p:spPr>
-          <a:xfrm>
-            <a:off x="7269480" y="1417320"/>
-            <a:ext cx="4434840" cy="457200"/>
-          </a:xfrm>
-          <a:prstGeom prst="rect">
-            <a:avLst/>
-          </a:prstGeom>
-          <a:solidFill>
-            <a:srgbClr val="833AB4"/>
-          </a:solidFill>
-          <a:ln>
-            <a:noFill/>
-          </a:ln>
-          <a:effectLst/>
-        </p:spPr>
-        <p:style>
-          <a:lnRef idx="1">
-            <a:schemeClr val="accent1"/>
-          </a:lnRef>
-          <a:fillRef idx="3">
-            <a:schemeClr val="accent1"/>
-          </a:fillRef>
-          <a:effectRef idx="2">
-            <a:schemeClr val="accent1"/>
-          </a:effectRef>
-          <a:fontRef idx="minor">
-            <a:schemeClr val="lt1"/>
-          </a:fontRef>
-        </p:style>
-        <p:txBody>
-          <a:bodyPr rtlCol="0" anchor="ctr"/>
-          <a:lstStyle/>
-          <a:p>
-            <a:pPr algn="ctr"/>
-          </a:p>
-        </p:txBody>
-      </p:sp>
-      <p:sp>
-        <p:nvSpPr>
-          <p:cNvPr id="8" name="TextBox 7"/>
-          <p:cNvSpPr txBox="1"/>
-          <p:nvPr/>
-        </p:nvSpPr>
-        <p:spPr>
-          <a:xfrm>
-            <a:off x="7452360" y="1472184"/>
-            <a:ext cx="4069080" cy="365760"/>
-          </a:xfrm>
-          <a:prstGeom prst="rect">
-            <a:avLst/>
-          </a:prstGeom>
-          <a:noFill/>
-        </p:spPr>
-        <p:txBody>
-          <a:bodyPr wrap="square">
-            <a:spAutoFit/>
-          </a:bodyPr>
-          <a:lstStyle/>
-          <a:p>
-            <a:r>
-              <a:rPr sz="1300" b="1">
+              <a:rPr sz="4000" b="1">
                 <a:solidFill>
                   <a:srgbClr val="FFFFFF"/>
                 </a:solidFill>
                 <a:latin typeface="맑은 고딕"/>
               </a:rPr>
-              <a:t>핵심 수식</a:t>
-            </a:r>
-          </a:p>
-        </p:txBody>
-      </p:sp>
-      <p:sp>
-        <p:nvSpPr>
-          <p:cNvPr id="9" name="TextBox 8"/>
-          <p:cNvSpPr txBox="1"/>
-          <p:nvPr/>
-        </p:nvSpPr>
-        <p:spPr>
-          <a:xfrm>
-            <a:off x="7498080" y="2057400"/>
-            <a:ext cx="3977640" cy="4023360"/>
-          </a:xfrm>
-          <a:prstGeom prst="rect">
-            <a:avLst/>
-          </a:prstGeom>
-          <a:noFill/>
-        </p:spPr>
-        <p:txBody>
-          <a:bodyPr wrap="square">
-            <a:spAutoFit/>
-          </a:bodyPr>
-          <a:lstStyle/>
-          <a:p>
-            <a:pPr>
-              <a:spcAft>
-                <a:spcPts val="200"/>
-              </a:spcAft>
-            </a:pPr>
-            <a:r>
-              <a:rPr sz="1150" b="1">
-                <a:solidFill>
-                  <a:srgbClr val="833AB4"/>
-                </a:solidFill>
-                <a:latin typeface="맑은 고딕"/>
-              </a:rPr>
-              <a:t>확률과정</a:t>
-            </a:r>
-          </a:p>
-          <a:p>
-            <a:pPr>
-              <a:spcAft>
-                <a:spcPts val="1200"/>
-              </a:spcAft>
-            </a:pPr>
-            <a:r>
-              <a:rPr sz="1350" b="0">
-                <a:solidFill>
-                  <a:srgbClr val="222222"/>
-                </a:solidFill>
-                <a:latin typeface="Consolas"/>
-              </a:rPr>
-              <a:t>{ X_t : t = 1, 2, ..., n }</a:t>
-            </a:r>
-          </a:p>
-          <a:p>
-            <a:pPr>
-              <a:spcAft>
-                <a:spcPts val="200"/>
-              </a:spcAft>
-            </a:pPr>
-            <a:r>
-              <a:rPr sz="1150" b="1">
-                <a:solidFill>
-                  <a:srgbClr val="833AB4"/>
-                </a:solidFill>
-                <a:latin typeface="맑은 고딕"/>
-              </a:rPr>
-              <a:t>자기공분산</a:t>
-            </a:r>
-          </a:p>
-          <a:p>
-            <a:pPr>
-              <a:spcAft>
-                <a:spcPts val="1200"/>
-              </a:spcAft>
-            </a:pPr>
-            <a:r>
-              <a:rPr sz="1350" b="0">
-                <a:solidFill>
-                  <a:srgbClr val="222222"/>
-                </a:solidFill>
-                <a:latin typeface="Consolas"/>
-              </a:rPr>
-              <a:t>γ(k) = Cov(X_t, X_{t+k})</a:t>
-            </a:r>
-          </a:p>
-          <a:p>
-            <a:pPr>
-              <a:spcAft>
-                <a:spcPts val="200"/>
-              </a:spcAft>
-            </a:pPr>
-            <a:r>
-              <a:rPr sz="1150" b="1">
-                <a:solidFill>
-                  <a:srgbClr val="833AB4"/>
-                </a:solidFill>
-                <a:latin typeface="맑은 고딕"/>
-              </a:rPr>
-              <a:t>시간 의존성</a:t>
-            </a:r>
-          </a:p>
-          <a:p>
-            <a:pPr>
-              <a:spcAft>
-                <a:spcPts val="1200"/>
-              </a:spcAft>
-            </a:pPr>
-            <a:r>
-              <a:rPr sz="1350" b="0">
-                <a:solidFill>
-                  <a:srgbClr val="222222"/>
-                </a:solidFill>
-                <a:latin typeface="Consolas"/>
-              </a:rPr>
-              <a:t>Corr(X_t, X_{t-1}) ≠ 0</a:t>
-            </a:r>
-          </a:p>
-          <a:p>
-            <a:pPr>
-              <a:spcAft>
-                <a:spcPts val="200"/>
-              </a:spcAft>
-            </a:pPr>
-            <a:r>
-              <a:rPr sz="1150" b="1">
-                <a:solidFill>
-                  <a:srgbClr val="833AB4"/>
-                </a:solidFill>
-                <a:latin typeface="맑은 고딕"/>
-              </a:rPr>
-              <a:t>표본 (우리 데이터)</a:t>
-            </a:r>
-          </a:p>
-          <a:p>
-            <a:pPr>
-              <a:spcAft>
-                <a:spcPts val="1200"/>
-              </a:spcAft>
-            </a:pPr>
-            <a:r>
-              <a:rPr sz="1350" b="0">
-                <a:solidFill>
-                  <a:srgbClr val="222222"/>
-                </a:solidFill>
-                <a:latin typeface="Consolas"/>
-              </a:rPr>
-              <a:t>n = 161일, 9개 시리즈</a:t>
-            </a:r>
-          </a:p>
-        </p:txBody>
-      </p:sp>
-      <p:sp>
-        <p:nvSpPr>
-          <p:cNvPr id="10" name="Rectangle 9"/>
-          <p:cNvSpPr/>
-          <p:nvPr/>
-        </p:nvSpPr>
-        <p:spPr>
-          <a:xfrm>
-            <a:off x="0" y="6565392"/>
-            <a:ext cx="12191695" cy="292608"/>
-          </a:xfrm>
-          <a:prstGeom prst="rect">
-            <a:avLst/>
-          </a:prstGeom>
-          <a:solidFill>
-            <a:srgbClr val="F2F2F4"/>
-          </a:solidFill>
-          <a:ln>
-            <a:noFill/>
-          </a:ln>
-          <a:effectLst/>
-        </p:spPr>
-        <p:style>
-          <a:lnRef idx="1">
-            <a:schemeClr val="accent1"/>
-          </a:lnRef>
-          <a:fillRef idx="3">
-            <a:schemeClr val="accent1"/>
-          </a:fillRef>
-          <a:effectRef idx="2">
-            <a:schemeClr val="accent1"/>
-          </a:effectRef>
-          <a:fontRef idx="minor">
-            <a:schemeClr val="lt1"/>
-          </a:fontRef>
-        </p:style>
-        <p:txBody>
-          <a:bodyPr rtlCol="0" anchor="ctr"/>
-          <a:lstStyle/>
-          <a:p>
-            <a:pPr algn="ctr"/>
-          </a:p>
-        </p:txBody>
-      </p:sp>
-      <p:sp>
-        <p:nvSpPr>
-          <p:cNvPr id="11" name="TextBox 10"/>
-          <p:cNvSpPr txBox="1"/>
-          <p:nvPr/>
-        </p:nvSpPr>
-        <p:spPr>
-          <a:xfrm>
-            <a:off x="365760" y="6547104"/>
-            <a:ext cx="7315200" cy="274320"/>
-          </a:xfrm>
-          <a:prstGeom prst="rect">
-            <a:avLst/>
-          </a:prstGeom>
-          <a:noFill/>
-        </p:spPr>
-        <p:txBody>
-          <a:bodyPr wrap="square">
-            <a:spAutoFit/>
-          </a:bodyPr>
-          <a:lstStyle/>
-          <a:p>
-            <a:r>
-              <a:rPr sz="900" b="0">
-                <a:solidFill>
-                  <a:srgbClr val="6B6B6B"/>
-                </a:solidFill>
-                <a:latin typeface="맑은 고딕"/>
-              </a:rPr>
-              <a:t>시계열 데이터 분석 · 한국 해시태그 트렌드 · 기준일 2026-06-11</a:t>
-            </a:r>
-          </a:p>
-        </p:txBody>
-      </p:sp>
-      <p:sp>
-        <p:nvSpPr>
-          <p:cNvPr id="12" name="TextBox 11"/>
-          <p:cNvSpPr txBox="1"/>
-          <p:nvPr/>
-        </p:nvSpPr>
-        <p:spPr>
-          <a:xfrm>
-            <a:off x="11094415" y="6547104"/>
-            <a:ext cx="822960" cy="274320"/>
-          </a:xfrm>
-          <a:prstGeom prst="rect">
-            <a:avLst/>
-          </a:prstGeom>
-          <a:noFill/>
-        </p:spPr>
-        <p:txBody>
-          <a:bodyPr wrap="square">
-            <a:spAutoFit/>
-          </a:bodyPr>
-          <a:lstStyle/>
-          <a:p>
-            <a:pPr algn="r"/>
-            <a:r>
-              <a:rPr sz="900" b="0">
-                <a:solidFill>
-                  <a:srgbClr val="6B6B6B"/>
-                </a:solidFill>
-                <a:latin typeface="맑은 고딕"/>
-              </a:rPr>
-              <a:t>4</a:t>
+              <a:t>시계열 이론 — 수업에서 배운 도구들</a:t>
             </a:r>
           </a:p>
         </p:txBody>
@@ -13199,7 +13768,7 @@
                 </a:solidFill>
                 <a:latin typeface="Segoe UI"/>
               </a:rPr>
-              <a:t>02 · DECOMPOSITION</a:t>
+              <a:t>02 · STOCHASTIC PROCESS</a:t>
             </a:r>
           </a:p>
         </p:txBody>
@@ -13233,7 +13802,7 @@
                 </a:solidFill>
                 <a:latin typeface="맑은 고딕"/>
               </a:rPr>
-              <a:t>구성요소와 분해 모형</a:t>
+              <a:t>시계열 데이터란</a:t>
             </a:r>
           </a:p>
         </p:txBody>
@@ -13272,7 +13841,7 @@
                 </a:solidFill>
                 <a:latin typeface="맑은 고딕"/>
               </a:rPr>
-              <a:t>●  4대 구성요소</a:t>
+              <a:t>●  정의</a:t>
             </a:r>
           </a:p>
           <a:p>
@@ -13288,7 +13857,7 @@
                 </a:solidFill>
                 <a:latin typeface="맑은 고딕"/>
               </a:rPr>
-              <a:t>     추세(T) 장기 방향 · 계절(S) 고정 주기 반복 · 순환(C) 비고정 장주기 · 불규칙(R) 잔차</a:t>
+              <a:t>     시간 순서로 관측된 확률변수의 열 — 확률과정 {X_t}의 한 실현(realization)</a:t>
             </a:r>
           </a:p>
           <a:p>
@@ -13304,7 +13873,7 @@
                 </a:solidFill>
                 <a:latin typeface="맑은 고딕"/>
               </a:rPr>
-              <a:t>●  가법 모형</a:t>
+              <a:t>●  핵심 성질: 시간 의존성</a:t>
             </a:r>
           </a:p>
           <a:p>
@@ -13320,7 +13889,7 @@
                 </a:solidFill>
                 <a:latin typeface="맑은 고딕"/>
               </a:rPr>
-              <a:t>     변동 폭이 수준과 무관하게 일정할 때 — 성분을 더해서 관측을 설명</a:t>
+              <a:t>     관측치가 i.i.d.가 아님 — 오늘 값이 어제 값과 상관 → 고전 통계의 독립 가정이 무너짐</a:t>
             </a:r>
           </a:p>
           <a:p>
@@ -13336,7 +13905,7 @@
                 </a:solidFill>
                 <a:latin typeface="맑은 고딕"/>
               </a:rPr>
-              <a:t>●  승법 모형</a:t>
+              <a:t>●  왜 따로 배우는가</a:t>
             </a:r>
           </a:p>
           <a:p>
@@ -13352,7 +13921,7 @@
                 </a:solidFill>
                 <a:latin typeface="맑은 고딕"/>
               </a:rPr>
-              <a:t>     수준이 커질수록 변동도 커질 때 — 로그 변환하면 가법으로 환원</a:t>
+              <a:t>     회귀처럼 다루면 표준오차·검정이 모두 왜곡 — 자기상관을 모형 안에 넣어야 함</a:t>
             </a:r>
           </a:p>
           <a:p>
@@ -13368,7 +13937,7 @@
                 </a:solidFill>
                 <a:latin typeface="맑은 고딕"/>
               </a:rPr>
-              <a:t>●  추정 방법</a:t>
+              <a:t>●  우리 데이터</a:t>
             </a:r>
           </a:p>
           <a:p>
@@ -13384,7 +13953,7 @@
                 </a:solidFill>
                 <a:latin typeface="맑은 고딕"/>
               </a:rPr>
-              <a:t>     추세는 중심 이동평균, 계절성분은 '같은 요일끼리 평균', 잔차는 나머지</a:t>
+              <a:t>     해시태그별 일별 관심도 161개 관측치 = 일 단위 이산 시계열 9개</a:t>
             </a:r>
           </a:p>
         </p:txBody>
@@ -13545,7 +14114,7 @@
                 </a:solidFill>
                 <a:latin typeface="맑은 고딕"/>
               </a:rPr>
-              <a:t>가법 모형</a:t>
+              <a:t>확률과정</a:t>
             </a:r>
           </a:p>
           <a:p>
@@ -13561,7 +14130,7 @@
                 </a:solidFill>
                 <a:latin typeface="Consolas"/>
               </a:rPr>
-              <a:t>X_t = T_t + S_t + R_t</a:t>
+              <a:t>{ X_t : t = 1, 2, ..., n }</a:t>
             </a:r>
           </a:p>
           <a:p>
@@ -13577,7 +14146,7 @@
                 </a:solidFill>
                 <a:latin typeface="맑은 고딕"/>
               </a:rPr>
-              <a:t>승법 모형</a:t>
+              <a:t>자기공분산</a:t>
             </a:r>
           </a:p>
           <a:p>
@@ -13593,7 +14162,7 @@
                 </a:solidFill>
                 <a:latin typeface="Consolas"/>
               </a:rPr>
-              <a:t>X_t = T_t × S_t × R_t</a:t>
+              <a:t>γ(k) = Cov(X_t, X_{t+k})</a:t>
             </a:r>
           </a:p>
           <a:p>
@@ -13609,7 +14178,7 @@
                 </a:solidFill>
                 <a:latin typeface="맑은 고딕"/>
               </a:rPr>
-              <a:t>로그 변환</a:t>
+              <a:t>시간 의존성</a:t>
             </a:r>
           </a:p>
           <a:p>
@@ -13625,7 +14194,7 @@
                 </a:solidFill>
                 <a:latin typeface="Consolas"/>
               </a:rPr>
-              <a:t>log X_t = log T_t + log S_t + log R_t</a:t>
+              <a:t>Corr(X_t, X_{t-1}) ≠ 0</a:t>
             </a:r>
           </a:p>
           <a:p>
@@ -13641,7 +14210,7 @@
                 </a:solidFill>
                 <a:latin typeface="맑은 고딕"/>
               </a:rPr>
-              <a:t>추세 추정 (period=7)</a:t>
+              <a:t>표본 (우리 데이터)</a:t>
             </a:r>
           </a:p>
           <a:p>
@@ -13657,39 +14226,7 @@
                 </a:solidFill>
                 <a:latin typeface="Consolas"/>
               </a:rPr>
-              <a:t>T_t = (1/7) Σ X_{t+j}, j=-3..3</a:t>
-            </a:r>
-          </a:p>
-          <a:p>
-            <a:pPr>
-              <a:spcAft>
-                <a:spcPts val="200"/>
-              </a:spcAft>
-            </a:pPr>
-            <a:r>
-              <a:rPr sz="1150" b="1">
-                <a:solidFill>
-                  <a:srgbClr val="833AB4"/>
-                </a:solidFill>
-                <a:latin typeface="맑은 고딕"/>
-              </a:rPr>
-              <a:t>계절 추정</a:t>
-            </a:r>
-          </a:p>
-          <a:p>
-            <a:pPr>
-              <a:spcAft>
-                <a:spcPts val="1200"/>
-              </a:spcAft>
-            </a:pPr>
-            <a:r>
-              <a:rPr sz="1350" b="0">
-                <a:solidFill>
-                  <a:srgbClr val="222222"/>
-                </a:solidFill>
-                <a:latin typeface="Consolas"/>
-              </a:rPr>
-              <a:t>S_t = mean( X−T | 같은 요일 )</a:t>
+              <a:t>n = 161일, 9개 시리즈</a:t>
             </a:r>
           </a:p>
         </p:txBody>
@@ -13898,7 +14435,7 @@
                 </a:solidFill>
                 <a:latin typeface="Segoe UI"/>
               </a:rPr>
-              <a:t>03 · STATIONARITY</a:t>
+              <a:t>02 · DECOMPOSITION</a:t>
             </a:r>
           </a:p>
         </p:txBody>
@@ -13932,7 +14469,7 @@
                 </a:solidFill>
                 <a:latin typeface="맑은 고딕"/>
               </a:rPr>
-              <a:t>정상성과 차분</a:t>
+              <a:t>구성요소와 분해 모형</a:t>
             </a:r>
           </a:p>
         </p:txBody>
@@ -13971,7 +14508,7 @@
                 </a:solidFill>
                 <a:latin typeface="맑은 고딕"/>
               </a:rPr>
-              <a:t>●  약정상성 3조건</a:t>
+              <a:t>●  4대 구성요소</a:t>
             </a:r>
           </a:p>
           <a:p>
@@ -13987,7 +14524,7 @@
                 </a:solidFill>
                 <a:latin typeface="맑은 고딕"/>
               </a:rPr>
-              <a:t>     ① 평균이 시간에 불변 ② 분산이 유한·불변 ③ 자기공분산이 시차 k에만 의존</a:t>
+              <a:t>     추세(T) 장기 방향 · 계절(S) 고정 주기 반복 · 순환(C) 비고정 장주기 · 불규칙(R) 잔차</a:t>
             </a:r>
           </a:p>
           <a:p>
@@ -14003,7 +14540,7 @@
                 </a:solidFill>
                 <a:latin typeface="맑은 고딕"/>
               </a:rPr>
-              <a:t>●  왜 중요한가</a:t>
+              <a:t>●  가법 모형</a:t>
             </a:r>
           </a:p>
           <a:p>
@@ -14019,7 +14556,7 @@
                 </a:solidFill>
                 <a:latin typeface="맑은 고딕"/>
               </a:rPr>
-              <a:t>     ARMA류 모형·ACF 해석·예측 이론이 모두 정상성 위에서 성립 — 비정상 계열은 가짜 상관(spurious) 위험</a:t>
+              <a:t>     변동 폭이 수준과 무관하게 일정할 때 — 성분을 더해서 관측을 설명</a:t>
             </a:r>
           </a:p>
           <a:p>
@@ -14035,7 +14572,7 @@
                 </a:solidFill>
                 <a:latin typeface="맑은 고딕"/>
               </a:rPr>
-              <a:t>●  진단</a:t>
+              <a:t>●  승법 모형</a:t>
             </a:r>
           </a:p>
           <a:p>
@@ -14051,7 +14588,7 @@
                 </a:solidFill>
                 <a:latin typeface="맑은 고딕"/>
               </a:rPr>
-              <a:t>     시각: 롤링 평균/분산이 움직이는가 · ACF가 천천히 감쇠하는가 / 검정: ADF 단위근 검정</a:t>
+              <a:t>     수준이 커질수록 변동도 커질 때 — 로그 변환하면 가법으로 환원</a:t>
             </a:r>
           </a:p>
           <a:p>
@@ -14067,7 +14604,7 @@
                 </a:solidFill>
                 <a:latin typeface="맑은 고딕"/>
               </a:rPr>
-              <a:t>●  처방: 차분</a:t>
+              <a:t>●  추정 방법</a:t>
             </a:r>
           </a:p>
           <a:p>
@@ -14083,7 +14620,7 @@
                 </a:solidFill>
                 <a:latin typeface="맑은 고딕"/>
               </a:rPr>
-              <a:t>     1차 차분으로 추세 제거, 계절차분(lag 7)으로 주기 제거 — ARIMA의 d가 바로 차분 횟수</a:t>
+              <a:t>     추세는 중심 이동평균, 계절성분은 '같은 요일끼리 평균', 잔차는 나머지</a:t>
             </a:r>
           </a:p>
         </p:txBody>
@@ -14244,7 +14781,7 @@
                 </a:solidFill>
                 <a:latin typeface="맑은 고딕"/>
               </a:rPr>
-              <a:t>약정상성</a:t>
+              <a:t>가법 모형</a:t>
             </a:r>
           </a:p>
           <a:p>
@@ -14260,7 +14797,7 @@
                 </a:solidFill>
                 <a:latin typeface="Consolas"/>
               </a:rPr>
-              <a:t>E[X_t] = μ,  Var(X_t) = σ² &lt; ∞</a:t>
+              <a:t>X_t = T_t + S_t + R_t</a:t>
             </a:r>
           </a:p>
           <a:p>
@@ -14276,7 +14813,7 @@
                 </a:solidFill>
                 <a:latin typeface="맑은 고딕"/>
               </a:rPr>
-              <a:t/>
+              <a:t>승법 모형</a:t>
             </a:r>
           </a:p>
           <a:p>
@@ -14292,7 +14829,7 @@
                 </a:solidFill>
                 <a:latin typeface="Consolas"/>
               </a:rPr>
-              <a:t>Cov(X_t, X_{t+k}) = γ(k)  ∀t</a:t>
+              <a:t>X_t = T_t × S_t × R_t</a:t>
             </a:r>
           </a:p>
           <a:p>
@@ -14308,7 +14845,7 @@
                 </a:solidFill>
                 <a:latin typeface="맑은 고딕"/>
               </a:rPr>
-              <a:t>1차 차분</a:t>
+              <a:t>로그 변환</a:t>
             </a:r>
           </a:p>
           <a:p>
@@ -14324,7 +14861,7 @@
                 </a:solidFill>
                 <a:latin typeface="Consolas"/>
               </a:rPr>
-              <a:t>∇X_t = X_t − X_{t-1}</a:t>
+              <a:t>log X_t = log T_t + log S_t + log R_t</a:t>
             </a:r>
           </a:p>
           <a:p>
@@ -14340,7 +14877,7 @@
                 </a:solidFill>
                 <a:latin typeface="맑은 고딕"/>
               </a:rPr>
-              <a:t>계절 차분 (주간)</a:t>
+              <a:t>추세 추정 (period=7)</a:t>
             </a:r>
           </a:p>
           <a:p>
@@ -14356,7 +14893,7 @@
                 </a:solidFill>
                 <a:latin typeface="Consolas"/>
               </a:rPr>
-              <a:t>∇₇X_t = X_t − X_{t-7}</a:t>
+              <a:t>T_t = (1/7) Σ X_{t+j}, j=-3..3</a:t>
             </a:r>
           </a:p>
           <a:p>
@@ -14372,7 +14909,7 @@
                 </a:solidFill>
                 <a:latin typeface="맑은 고딕"/>
               </a:rPr>
-              <a:t>랜덤워크(비정상)</a:t>
+              <a:t>계절 추정</a:t>
             </a:r>
           </a:p>
           <a:p>
@@ -14388,7 +14925,7 @@
                 </a:solidFill>
                 <a:latin typeface="Consolas"/>
               </a:rPr>
-              <a:t>X_t = X_{t-1} + ε_t</a:t>
+              <a:t>S_t = mean( X−T | 같은 요일 )</a:t>
             </a:r>
           </a:p>
         </p:txBody>
@@ -14597,7 +15134,7 @@
                 </a:solidFill>
                 <a:latin typeface="Segoe UI"/>
               </a:rPr>
-              <a:t>04 · ACF &amp; ARIMA</a:t>
+              <a:t>03 · STATIONARITY</a:t>
             </a:r>
           </a:p>
         </p:txBody>
@@ -14631,7 +15168,7 @@
                 </a:solidFill>
                 <a:latin typeface="맑은 고딕"/>
               </a:rPr>
-              <a:t>자기상관 · 백색잡음 · ARIMA</a:t>
+              <a:t>정상성과 차분</a:t>
             </a:r>
           </a:p>
         </p:txBody>
@@ -14670,7 +15207,7 @@
                 </a:solidFill>
                 <a:latin typeface="맑은 고딕"/>
               </a:rPr>
-              <a:t>●  ACF</a:t>
+              <a:t>●  약정상성 3조건</a:t>
             </a:r>
           </a:p>
           <a:p>
@@ -14686,7 +15223,7 @@
                 </a:solidFill>
                 <a:latin typeface="맑은 고딕"/>
               </a:rPr>
-              <a:t>     시차 k에서 자기 자신과의 상관 ρ(k) — 추세면 느리게 감쇠, 주기 s면 lag s마다 스파이크</a:t>
+              <a:t>     ① 평균이 시간에 불변 ② 분산이 유한·불변 ③ 자기공분산이 시차 k에만 의존</a:t>
             </a:r>
           </a:p>
           <a:p>
@@ -14702,7 +15239,7 @@
                 </a:solidFill>
                 <a:latin typeface="맑은 고딕"/>
               </a:rPr>
-              <a:t>●  백색잡음</a:t>
+              <a:t>●  왜 중요한가</a:t>
             </a:r>
           </a:p>
           <a:p>
@@ -14718,7 +15255,7 @@
                 </a:solidFill>
                 <a:latin typeface="맑은 고딕"/>
               </a:rPr>
-              <a:t>     평균 0, 상관 0인 순수 잡음 — 잔차가 백색잡음이면 모형이 구조를 다 흡수했다는 신호</a:t>
+              <a:t>     ARMA류 모형·ACF 해석·예측 이론이 모두 정상성 위에서 성립 — 비정상 계열은 가짜 상관(spurious) 위험</a:t>
             </a:r>
           </a:p>
           <a:p>
@@ -14734,7 +15271,7 @@
                 </a:solidFill>
                 <a:latin typeface="맑은 고딕"/>
               </a:rPr>
-              <a:t>●  판정 기준</a:t>
+              <a:t>●  진단</a:t>
             </a:r>
           </a:p>
           <a:p>
@@ -14750,7 +15287,7 @@
                 </a:solidFill>
                 <a:latin typeface="맑은 고딕"/>
               </a:rPr>
-              <a:t>     표본 ACF가 ±1.96/√n 밴드 안이면 해당 시차 상관은 유의하지 않음 (95%)</a:t>
+              <a:t>     시각: 롤링 평균/분산이 움직이는가 · ACF가 천천히 감쇠하는가 / 검정: ADF 단위근 검정</a:t>
             </a:r>
           </a:p>
           <a:p>
@@ -14766,7 +15303,7 @@
                 </a:solidFill>
                 <a:latin typeface="맑은 고딕"/>
               </a:rPr>
-              <a:t>●  ARIMA(p,d,q)</a:t>
+              <a:t>●  처방: 차분</a:t>
             </a:r>
           </a:p>
           <a:p>
@@ -14782,39 +15319,7 @@
                 </a:solidFill>
                 <a:latin typeface="맑은 고딕"/>
               </a:rPr>
-              <a:t>     AR(p) 과거 값 회귀 + I(d) 차분 + MA(q) 과거 충격 회귀 — 차수는 ACF/PACF로 식별</a:t>
-            </a:r>
-          </a:p>
-          <a:p>
-            <a:pPr>
-              <a:spcAft>
-                <a:spcPts val="600"/>
-              </a:spcAft>
-            </a:pPr>
-            <a:r>
-              <a:rPr sz="1550" b="1">
-                <a:solidFill>
-                  <a:srgbClr val="E1306C"/>
-                </a:solidFill>
-                <a:latin typeface="맑은 고딕"/>
-              </a:rPr>
-              <a:t>●  우리의 선택</a:t>
-            </a:r>
-          </a:p>
-          <a:p>
-            <a:pPr>
-              <a:spcAft>
-                <a:spcPts val="1200"/>
-              </a:spcAft>
-            </a:pPr>
-            <a:r>
-              <a:rPr sz="1250" b="0">
-                <a:solidFill>
-                  <a:srgbClr val="6B6B6B"/>
-                </a:solidFill>
-                <a:latin typeface="맑은 고딕"/>
-              </a:rPr>
-              <a:t>     수업 범위의 해석 가능한 기본형: 선형추세 + 요일 더미 → ARIMA 대비 단순하지만 구조가 투명</a:t>
+              <a:t>     1차 차분으로 추세 제거, 계절차분(lag 7)으로 주기 제거 — ARIMA의 d가 바로 차분 횟수</a:t>
             </a:r>
           </a:p>
         </p:txBody>
@@ -14975,7 +15480,7 @@
                 </a:solidFill>
                 <a:latin typeface="맑은 고딕"/>
               </a:rPr>
-              <a:t>자기상관함수</a:t>
+              <a:t>약정상성</a:t>
             </a:r>
           </a:p>
           <a:p>
@@ -14991,7 +15496,7 @@
                 </a:solidFill>
                 <a:latin typeface="Consolas"/>
               </a:rPr>
-              <a:t>ρ(k) = γ(k) / γ(0)</a:t>
+              <a:t>E[X_t] = μ,  Var(X_t) = σ² &lt; ∞</a:t>
             </a:r>
           </a:p>
           <a:p>
@@ -15007,7 +15512,7 @@
                 </a:solidFill>
                 <a:latin typeface="맑은 고딕"/>
               </a:rPr>
-              <a:t>표본 ACF 한계</a:t>
+              <a:t/>
             </a:r>
           </a:p>
           <a:p>
@@ -15023,7 +15528,7 @@
                 </a:solidFill>
                 <a:latin typeface="Consolas"/>
               </a:rPr>
-              <a:t>±1.96 / √n  (n=161 → ±0.155)</a:t>
+              <a:t>Cov(X_t, X_{t+k}) = γ(k)  ∀t</a:t>
             </a:r>
           </a:p>
           <a:p>
@@ -15039,7 +15544,7 @@
                 </a:solidFill>
                 <a:latin typeface="맑은 고딕"/>
               </a:rPr>
-              <a:t>백색잡음</a:t>
+              <a:t>1차 차분</a:t>
             </a:r>
           </a:p>
           <a:p>
@@ -15055,7 +15560,7 @@
                 </a:solidFill>
                 <a:latin typeface="Consolas"/>
               </a:rPr>
-              <a:t>ε_t ~ WN(0, σ²)</a:t>
+              <a:t>∇X_t = X_t − X_{t-1}</a:t>
             </a:r>
           </a:p>
           <a:p>
@@ -15071,7 +15576,7 @@
                 </a:solidFill>
                 <a:latin typeface="맑은 고딕"/>
               </a:rPr>
-              <a:t>AR(p)</a:t>
+              <a:t>계절 차분 (주간)</a:t>
             </a:r>
           </a:p>
           <a:p>
@@ -15087,7 +15592,7 @@
                 </a:solidFill>
                 <a:latin typeface="Consolas"/>
               </a:rPr>
-              <a:t>X_t = Σ φ_i X_{t-i} + ε_t</a:t>
+              <a:t>∇₇X_t = X_t − X_{t-7}</a:t>
             </a:r>
           </a:p>
           <a:p>
@@ -15103,7 +15608,7 @@
                 </a:solidFill>
                 <a:latin typeface="맑은 고딕"/>
               </a:rPr>
-              <a:t>MA(q)</a:t>
+              <a:t>랜덤워크(비정상)</a:t>
             </a:r>
           </a:p>
           <a:p>
@@ -15119,39 +15624,7 @@
                 </a:solidFill>
                 <a:latin typeface="Consolas"/>
               </a:rPr>
-              <a:t>X_t = ε_t + Σ θ_j ε_{t-j}</a:t>
-            </a:r>
-          </a:p>
-          <a:p>
-            <a:pPr>
-              <a:spcAft>
-                <a:spcPts val="200"/>
-              </a:spcAft>
-            </a:pPr>
-            <a:r>
-              <a:rPr sz="1150" b="1">
-                <a:solidFill>
-                  <a:srgbClr val="833AB4"/>
-                </a:solidFill>
-                <a:latin typeface="맑은 고딕"/>
-              </a:rPr>
-              <a:t>ARIMA</a:t>
-            </a:r>
-          </a:p>
-          <a:p>
-            <a:pPr>
-              <a:spcAft>
-                <a:spcPts val="1200"/>
-              </a:spcAft>
-            </a:pPr>
-            <a:r>
-              <a:rPr sz="1350" b="0">
-                <a:solidFill>
-                  <a:srgbClr val="222222"/>
-                </a:solidFill>
-                <a:latin typeface="Consolas"/>
-              </a:rPr>
-              <a:t>∇^d X_t 가 ARMA(p,q)</a:t>
+              <a:t>X_t = X_{t-1} + ε_t</a:t>
             </a:r>
           </a:p>
         </p:txBody>

--- a/presentation/insta_trend_timeseries.pptx
+++ b/presentation/insta_trend_timeseries.pptx
@@ -30,6 +30,9 @@
     <p:sldId id="278" r:id="rId29"/>
     <p:sldId id="279" r:id="rId30"/>
     <p:sldId id="280" r:id="rId31"/>
+    <p:sldId id="281" r:id="rId32"/>
+    <p:sldId id="282" r:id="rId33"/>
+    <p:sldId id="283" r:id="rId34"/>
   </p:sldIdLst>
   <p:sldSz cx="12191695" cy="6858000" type="screen4x3"/>
   <p:notesSz cx="6858000" cy="9144000"/>
@@ -8352,7 +8355,7 @@
                 </a:solidFill>
                 <a:latin typeface="맑은 고딕"/>
               </a:rPr>
-              <a:t>분석: 분해 · 계절성 · 모멘텀 · 예측</a:t>
+              <a:t>분석: 분해 · 예측 · 모델 비교</a:t>
             </a:r>
           </a:p>
         </p:txBody>
@@ -8386,7 +8389,7 @@
                 </a:solidFill>
                 <a:latin typeface="맑은 고딕"/>
               </a:rPr>
-              <a:t>추세/요일 효과 분리와 14일 외삽</a:t>
+              <a:t>추세/요일 분리, 14일 외삽, SARIMA 비교</a:t>
             </a:r>
           </a:p>
         </p:txBody>
@@ -8454,7 +8457,7 @@
                 </a:solidFill>
                 <a:latin typeface="맑은 고딕"/>
               </a:rPr>
-              <a:t>결론: 지금 뜨는 해시태그</a:t>
+              <a:t>결론: 트렌딩 태그 + 우리 계정</a:t>
             </a:r>
           </a:p>
         </p:txBody>
@@ -8488,7 +8491,7 @@
                 </a:solidFill>
                 <a:latin typeface="맑은 고딕"/>
               </a:rPr>
-              <a:t>2026-06-11 기준 트렌딩 태그와 활용 전략</a:t>
+              <a:t>지금 뜨는 태그 · 가상 계정 도달 분해/예측</a:t>
             </a:r>
           </a:p>
         </p:txBody>
@@ -8734,52 +8737,8 @@
         </p:nvSpPr>
         <p:spPr>
           <a:xfrm>
-            <a:off x="0" y="0"/>
-            <a:ext cx="12191695" cy="6858000"/>
-          </a:xfrm>
-          <a:prstGeom prst="rect">
-            <a:avLst/>
-          </a:prstGeom>
-          <a:solidFill>
-            <a:srgbClr val="222222"/>
-          </a:solidFill>
-          <a:ln>
-            <a:noFill/>
-          </a:ln>
-          <a:effectLst/>
-        </p:spPr>
-        <p:style>
-          <a:lnRef idx="1">
-            <a:schemeClr val="accent1"/>
-          </a:lnRef>
-          <a:fillRef idx="3">
-            <a:schemeClr val="accent1"/>
-          </a:fillRef>
-          <a:effectRef idx="2">
-            <a:schemeClr val="accent1"/>
-          </a:effectRef>
-          <a:fontRef idx="minor">
-            <a:schemeClr val="lt1"/>
-          </a:fontRef>
-        </p:style>
-        <p:txBody>
-          <a:bodyPr rtlCol="0" anchor="ctr"/>
-          <a:lstStyle/>
-          <a:p>
-            <a:pPr algn="ctr"/>
-          </a:p>
-        </p:txBody>
-      </p:sp>
-      <p:sp>
-        <p:nvSpPr>
-          <p:cNvPr id="3" name="Rectangle 2"/>
-          <p:cNvSpPr/>
-          <p:nvPr/>
-        </p:nvSpPr>
-        <p:spPr>
-          <a:xfrm>
-            <a:off x="822960" y="2743200"/>
-            <a:ext cx="1280160" cy="109728"/>
+            <a:off x="365760" y="384048"/>
+            <a:ext cx="164592" cy="502920"/>
           </a:xfrm>
           <a:prstGeom prst="rect">
             <a:avLst/>
@@ -8816,68 +8775,368 @@
       </p:sp>
       <p:sp>
         <p:nvSpPr>
+          <p:cNvPr id="3" name="TextBox 2"/>
+          <p:cNvSpPr txBox="1"/>
+          <p:nvPr/>
+        </p:nvSpPr>
+        <p:spPr>
+          <a:xfrm>
+            <a:off x="685800" y="256032"/>
+            <a:ext cx="10058400" cy="320040"/>
+          </a:xfrm>
+          <a:prstGeom prst="rect">
+            <a:avLst/>
+          </a:prstGeom>
+          <a:noFill/>
+        </p:spPr>
+        <p:txBody>
+          <a:bodyPr wrap="square">
+            <a:spAutoFit/>
+          </a:bodyPr>
+          <a:lstStyle/>
+          <a:p>
+            <a:r>
+              <a:rPr sz="1100" b="1">
+                <a:solidFill>
+                  <a:srgbClr val="833AB4"/>
+                </a:solidFill>
+                <a:latin typeface="Segoe UI"/>
+              </a:rPr>
+              <a:t>06 · MODEL COMPARISON</a:t>
+            </a:r>
+          </a:p>
+        </p:txBody>
+      </p:sp>
+      <p:sp>
+        <p:nvSpPr>
           <p:cNvPr id="4" name="TextBox 3"/>
           <p:cNvSpPr txBox="1"/>
           <p:nvPr/>
         </p:nvSpPr>
         <p:spPr>
           <a:xfrm>
-            <a:off x="822960" y="2011680"/>
-            <a:ext cx="10058400" cy="548640"/>
-          </a:xfrm>
-          <a:prstGeom prst="rect">
-            <a:avLst/>
-          </a:prstGeom>
-          <a:noFill/>
-        </p:spPr>
-        <p:txBody>
-          <a:bodyPr wrap="square">
-            <a:spAutoFit/>
-          </a:bodyPr>
-          <a:lstStyle/>
-          <a:p>
-            <a:r>
-              <a:rPr sz="1400" b="1">
-                <a:solidFill>
-                  <a:srgbClr val="E1306C"/>
-                </a:solidFill>
-                <a:latin typeface="Segoe UI"/>
-              </a:rPr>
-              <a:t>CONCLUSION</a:t>
-            </a:r>
-          </a:p>
-        </p:txBody>
-      </p:sp>
-      <p:sp>
-        <p:nvSpPr>
-          <p:cNvPr id="5" name="TextBox 4"/>
-          <p:cNvSpPr txBox="1"/>
-          <p:nvPr/>
-        </p:nvSpPr>
-        <p:spPr>
-          <a:xfrm>
-            <a:off x="822960" y="3017520"/>
-            <a:ext cx="10515600" cy="1371600"/>
-          </a:xfrm>
-          <a:prstGeom prst="rect">
-            <a:avLst/>
-          </a:prstGeom>
-          <a:noFill/>
-        </p:spPr>
-        <p:txBody>
-          <a:bodyPr wrap="square">
-            <a:spAutoFit/>
-          </a:bodyPr>
-          <a:lstStyle/>
-          <a:p>
-            <a:r>
-              <a:rPr sz="4000" b="1">
-                <a:solidFill>
-                  <a:srgbClr val="FFFFFF"/>
-                </a:solidFill>
-                <a:latin typeface="맑은 고딕"/>
-              </a:rPr>
-              <a:t>그래서, 지금 뭘 써야 하나</a:t>
+            <a:off x="658368" y="457200"/>
+            <a:ext cx="10515600" cy="640080"/>
+          </a:xfrm>
+          <a:prstGeom prst="rect">
+            <a:avLst/>
+          </a:prstGeom>
+          <a:noFill/>
+        </p:spPr>
+        <p:txBody>
+          <a:bodyPr wrap="square">
+            <a:spAutoFit/>
+          </a:bodyPr>
+          <a:lstStyle/>
+          <a:p>
+            <a:r>
+              <a:rPr sz="2800" b="1">
+                <a:solidFill>
+                  <a:srgbClr val="222222"/>
+                </a:solidFill>
+                <a:latin typeface="맑은 고딕"/>
+              </a:rPr>
+              <a:t>모델 비교 — 베이스라인 vs SARIMA</a:t>
+            </a:r>
+          </a:p>
+        </p:txBody>
+      </p:sp>
+      <p:pic>
+        <p:nvPicPr>
+          <p:cNvPr id="5" name="Picture 4" descr="09_sarima_compare.png"/>
+          <p:cNvPicPr>
+            <a:picLocks noChangeAspect="1"/>
+          </p:cNvPicPr>
+          <p:nvPr/>
+        </p:nvPicPr>
+        <p:blipFill>
+          <a:blip r:embed="rId2"/>
+          <a:stretch>
+            <a:fillRect/>
+          </a:stretch>
+        </p:blipFill>
+        <p:spPr>
+          <a:xfrm>
+            <a:off x="502920" y="1325880"/>
+            <a:ext cx="7772400" cy="3911936"/>
+          </a:xfrm>
+          <a:prstGeom prst="rect">
+            <a:avLst/>
+          </a:prstGeom>
+        </p:spPr>
+      </p:pic>
+      <p:sp>
+        <p:nvSpPr>
+          <p:cNvPr id="6" name="Rectangle 5"/>
+          <p:cNvSpPr/>
+          <p:nvPr/>
+        </p:nvSpPr>
+        <p:spPr>
+          <a:xfrm>
+            <a:off x="8458200" y="1325880"/>
+            <a:ext cx="3246120" cy="4937760"/>
+          </a:xfrm>
+          <a:prstGeom prst="rect">
+            <a:avLst/>
+          </a:prstGeom>
+          <a:solidFill>
+            <a:srgbClr val="F2F2F4"/>
+          </a:solidFill>
+          <a:ln>
+            <a:noFill/>
+          </a:ln>
+          <a:effectLst/>
+        </p:spPr>
+        <p:style>
+          <a:lnRef idx="1">
+            <a:schemeClr val="accent1"/>
+          </a:lnRef>
+          <a:fillRef idx="3">
+            <a:schemeClr val="accent1"/>
+          </a:fillRef>
+          <a:effectRef idx="2">
+            <a:schemeClr val="accent1"/>
+          </a:effectRef>
+          <a:fontRef idx="minor">
+            <a:schemeClr val="lt1"/>
+          </a:fontRef>
+        </p:style>
+        <p:txBody>
+          <a:bodyPr rtlCol="0" anchor="ctr"/>
+          <a:lstStyle/>
+          <a:p>
+            <a:pPr algn="ctr"/>
+          </a:p>
+        </p:txBody>
+      </p:sp>
+      <p:sp>
+        <p:nvSpPr>
+          <p:cNvPr id="7" name="TextBox 6"/>
+          <p:cNvSpPr txBox="1"/>
+          <p:nvPr/>
+        </p:nvSpPr>
+        <p:spPr>
+          <a:xfrm>
+            <a:off x="8659368" y="1508760"/>
+            <a:ext cx="2880360" cy="4663440"/>
+          </a:xfrm>
+          <a:prstGeom prst="rect">
+            <a:avLst/>
+          </a:prstGeom>
+          <a:noFill/>
+        </p:spPr>
+        <p:txBody>
+          <a:bodyPr wrap="square">
+            <a:spAutoFit/>
+          </a:bodyPr>
+          <a:lstStyle/>
+          <a:p>
+            <a:pPr>
+              <a:spcAft>
+                <a:spcPts val="800"/>
+              </a:spcAft>
+            </a:pPr>
+            <a:r>
+              <a:rPr sz="1300" b="1">
+                <a:solidFill>
+                  <a:srgbClr val="833AB4"/>
+                </a:solidFill>
+                <a:latin typeface="맑은 고딕"/>
+              </a:rPr>
+              <a:t>읽는 법</a:t>
+            </a:r>
+          </a:p>
+          <a:p>
+            <a:pPr>
+              <a:spcAft>
+                <a:spcPts val="1000"/>
+              </a:spcAft>
+            </a:pPr>
+            <a:r>
+              <a:rPr sz="1250" b="0">
+                <a:solidFill>
+                  <a:srgbClr val="222222"/>
+                </a:solidFill>
+                <a:latin typeface="맑은 고딕"/>
+              </a:rPr>
+              <a:t>• 분홍 = 선형추세+요일더미(수업용 기본형)</a:t>
+            </a:r>
+          </a:p>
+          <a:p>
+            <a:pPr>
+              <a:spcAft>
+                <a:spcPts val="1000"/>
+              </a:spcAft>
+            </a:pPr>
+            <a:r>
+              <a:rPr sz="1250" b="0">
+                <a:solidFill>
+                  <a:srgbClr val="222222"/>
+                </a:solidFill>
+                <a:latin typeface="맑은 고딕"/>
+              </a:rPr>
+              <a:t>• 검정 = SARIMA(1,1,1)(1,1,1)₇ — 차분·AR·MA·계절을 모두 추정</a:t>
+            </a:r>
+          </a:p>
+          <a:p>
+            <a:pPr>
+              <a:spcAft>
+                <a:spcPts val="1000"/>
+              </a:spcAft>
+            </a:pPr>
+            <a:r>
+              <a:rPr sz="1250" b="0">
+                <a:solidFill>
+                  <a:srgbClr val="222222"/>
+                </a:solidFill>
+                <a:latin typeface="맑은 고딕"/>
+              </a:rPr>
+              <a:t>• 홀드아웃 백테스트(마지막 14일): 평균절대오차 SARIMA 4.85 &lt; 베이스라인 5.65</a:t>
+            </a:r>
+          </a:p>
+          <a:p>
+            <a:pPr>
+              <a:spcAft>
+                <a:spcPts val="1000"/>
+              </a:spcAft>
+            </a:pPr>
+            <a:r>
+              <a:rPr sz="1250" b="0">
+                <a:solidFill>
+                  <a:srgbClr val="222222"/>
+                </a:solidFill>
+                <a:latin typeface="맑은 고딕"/>
+              </a:rPr>
+              <a:t>• SARIMA가 ~14% 더 정확 — 다만 해석은 베이스라인이 더 투명(추세·요일 분리)</a:t>
+            </a:r>
+          </a:p>
+          <a:p>
+            <a:pPr>
+              <a:spcAft>
+                <a:spcPts val="1000"/>
+              </a:spcAft>
+            </a:pPr>
+            <a:r>
+              <a:rPr sz="1250" b="0">
+                <a:solidFill>
+                  <a:srgbClr val="222222"/>
+                </a:solidFill>
+                <a:latin typeface="맑은 고딕"/>
+              </a:rPr>
+              <a:t>• 교훈: 단순 모델로 '구조 이해', SARIMA로 '정확도' — 목적에 따라 선택</a:t>
+            </a:r>
+          </a:p>
+        </p:txBody>
+      </p:sp>
+      <p:sp>
+        <p:nvSpPr>
+          <p:cNvPr id="8" name="Rectangle 7"/>
+          <p:cNvSpPr/>
+          <p:nvPr/>
+        </p:nvSpPr>
+        <p:spPr>
+          <a:xfrm>
+            <a:off x="0" y="6565392"/>
+            <a:ext cx="12191695" cy="292608"/>
+          </a:xfrm>
+          <a:prstGeom prst="rect">
+            <a:avLst/>
+          </a:prstGeom>
+          <a:solidFill>
+            <a:srgbClr val="F2F2F4"/>
+          </a:solidFill>
+          <a:ln>
+            <a:noFill/>
+          </a:ln>
+          <a:effectLst/>
+        </p:spPr>
+        <p:style>
+          <a:lnRef idx="1">
+            <a:schemeClr val="accent1"/>
+          </a:lnRef>
+          <a:fillRef idx="3">
+            <a:schemeClr val="accent1"/>
+          </a:fillRef>
+          <a:effectRef idx="2">
+            <a:schemeClr val="accent1"/>
+          </a:effectRef>
+          <a:fontRef idx="minor">
+            <a:schemeClr val="lt1"/>
+          </a:fontRef>
+        </p:style>
+        <p:txBody>
+          <a:bodyPr rtlCol="0" anchor="ctr"/>
+          <a:lstStyle/>
+          <a:p>
+            <a:pPr algn="ctr"/>
+          </a:p>
+        </p:txBody>
+      </p:sp>
+      <p:sp>
+        <p:nvSpPr>
+          <p:cNvPr id="9" name="TextBox 8"/>
+          <p:cNvSpPr txBox="1"/>
+          <p:nvPr/>
+        </p:nvSpPr>
+        <p:spPr>
+          <a:xfrm>
+            <a:off x="365760" y="6547104"/>
+            <a:ext cx="7315200" cy="274320"/>
+          </a:xfrm>
+          <a:prstGeom prst="rect">
+            <a:avLst/>
+          </a:prstGeom>
+          <a:noFill/>
+        </p:spPr>
+        <p:txBody>
+          <a:bodyPr wrap="square">
+            <a:spAutoFit/>
+          </a:bodyPr>
+          <a:lstStyle/>
+          <a:p>
+            <a:r>
+              <a:rPr sz="900" b="0">
+                <a:solidFill>
+                  <a:srgbClr val="6B6B6B"/>
+                </a:solidFill>
+                <a:latin typeface="맑은 고딕"/>
+              </a:rPr>
+              <a:t>시계열 데이터 분석 · 한국 해시태그 트렌드 · 기준일 2026-06-11</a:t>
+            </a:r>
+          </a:p>
+        </p:txBody>
+      </p:sp>
+      <p:sp>
+        <p:nvSpPr>
+          <p:cNvPr id="10" name="TextBox 9"/>
+          <p:cNvSpPr txBox="1"/>
+          <p:nvPr/>
+        </p:nvSpPr>
+        <p:spPr>
+          <a:xfrm>
+            <a:off x="11094415" y="6547104"/>
+            <a:ext cx="822960" cy="274320"/>
+          </a:xfrm>
+          <a:prstGeom prst="rect">
+            <a:avLst/>
+          </a:prstGeom>
+          <a:noFill/>
+        </p:spPr>
+        <p:txBody>
+          <a:bodyPr wrap="square">
+            <a:spAutoFit/>
+          </a:bodyPr>
+          <a:lstStyle/>
+          <a:p>
+            <a:pPr algn="r"/>
+            <a:r>
+              <a:rPr sz="900" b="0">
+                <a:solidFill>
+                  <a:srgbClr val="6B6B6B"/>
+                </a:solidFill>
+                <a:latin typeface="맑은 고딕"/>
+              </a:rPr>
+              <a:t>17</a:t>
             </a:r>
           </a:p>
         </p:txBody>
@@ -8908,8 +9167,52 @@
         </p:nvSpPr>
         <p:spPr>
           <a:xfrm>
-            <a:off x="365760" y="384048"/>
-            <a:ext cx="164592" cy="502920"/>
+            <a:off x="0" y="0"/>
+            <a:ext cx="12191695" cy="6858000"/>
+          </a:xfrm>
+          <a:prstGeom prst="rect">
+            <a:avLst/>
+          </a:prstGeom>
+          <a:solidFill>
+            <a:srgbClr val="222222"/>
+          </a:solidFill>
+          <a:ln>
+            <a:noFill/>
+          </a:ln>
+          <a:effectLst/>
+        </p:spPr>
+        <p:style>
+          <a:lnRef idx="1">
+            <a:schemeClr val="accent1"/>
+          </a:lnRef>
+          <a:fillRef idx="3">
+            <a:schemeClr val="accent1"/>
+          </a:fillRef>
+          <a:effectRef idx="2">
+            <a:schemeClr val="accent1"/>
+          </a:effectRef>
+          <a:fontRef idx="minor">
+            <a:schemeClr val="lt1"/>
+          </a:fontRef>
+        </p:style>
+        <p:txBody>
+          <a:bodyPr rtlCol="0" anchor="ctr"/>
+          <a:lstStyle/>
+          <a:p>
+            <a:pPr algn="ctr"/>
+          </a:p>
+        </p:txBody>
+      </p:sp>
+      <p:sp>
+        <p:nvSpPr>
+          <p:cNvPr id="3" name="Rectangle 2"/>
+          <p:cNvSpPr/>
+          <p:nvPr/>
+        </p:nvSpPr>
+        <p:spPr>
+          <a:xfrm>
+            <a:off x="822960" y="2743200"/>
+            <a:ext cx="1280160" cy="109728"/>
           </a:xfrm>
           <a:prstGeom prst="rect">
             <a:avLst/>
@@ -8946,777 +9249,68 @@
       </p:sp>
       <p:sp>
         <p:nvSpPr>
-          <p:cNvPr id="3" name="TextBox 2"/>
-          <p:cNvSpPr txBox="1"/>
-          <p:nvPr/>
-        </p:nvSpPr>
-        <p:spPr>
-          <a:xfrm>
-            <a:off x="685800" y="256032"/>
-            <a:ext cx="10058400" cy="320040"/>
-          </a:xfrm>
-          <a:prstGeom prst="rect">
-            <a:avLst/>
-          </a:prstGeom>
-          <a:noFill/>
-        </p:spPr>
-        <p:txBody>
-          <a:bodyPr wrap="square">
-            <a:spAutoFit/>
-          </a:bodyPr>
-          <a:lstStyle/>
-          <a:p>
-            <a:r>
-              <a:rPr sz="1100" b="1">
-                <a:solidFill>
-                  <a:srgbClr val="833AB4"/>
+          <p:cNvPr id="4" name="TextBox 3"/>
+          <p:cNvSpPr txBox="1"/>
+          <p:nvPr/>
+        </p:nvSpPr>
+        <p:spPr>
+          <a:xfrm>
+            <a:off x="822960" y="2011680"/>
+            <a:ext cx="10058400" cy="548640"/>
+          </a:xfrm>
+          <a:prstGeom prst="rect">
+            <a:avLst/>
+          </a:prstGeom>
+          <a:noFill/>
+        </p:spPr>
+        <p:txBody>
+          <a:bodyPr wrap="square">
+            <a:spAutoFit/>
+          </a:bodyPr>
+          <a:lstStyle/>
+          <a:p>
+            <a:r>
+              <a:rPr sz="1400" b="1">
+                <a:solidFill>
+                  <a:srgbClr val="E1306C"/>
                 </a:solidFill>
                 <a:latin typeface="Segoe UI"/>
               </a:rPr>
-              <a:t>07 · NOW TRENDING</a:t>
-            </a:r>
-          </a:p>
-        </p:txBody>
-      </p:sp>
-      <p:sp>
-        <p:nvSpPr>
-          <p:cNvPr id="4" name="TextBox 3"/>
-          <p:cNvSpPr txBox="1"/>
-          <p:nvPr/>
-        </p:nvSpPr>
-        <p:spPr>
-          <a:xfrm>
-            <a:off x="658368" y="457200"/>
-            <a:ext cx="10515600" cy="640080"/>
-          </a:xfrm>
-          <a:prstGeom prst="rect">
-            <a:avLst/>
-          </a:prstGeom>
-          <a:noFill/>
-        </p:spPr>
-        <p:txBody>
-          <a:bodyPr wrap="square">
-            <a:spAutoFit/>
-          </a:bodyPr>
-          <a:lstStyle/>
-          <a:p>
-            <a:r>
-              <a:rPr sz="2800" b="1">
-                <a:solidFill>
-                  <a:srgbClr val="222222"/>
-                </a:solidFill>
-                <a:latin typeface="맑은 고딕"/>
-              </a:rPr>
-              <a:t>2026-06-11 기준 트렌딩 해시태그</a:t>
-            </a:r>
-          </a:p>
-        </p:txBody>
-      </p:sp>
-      <p:sp>
-        <p:nvSpPr>
-          <p:cNvPr id="5" name="Rectangle 4"/>
-          <p:cNvSpPr/>
-          <p:nvPr/>
-        </p:nvSpPr>
-        <p:spPr>
-          <a:xfrm>
-            <a:off x="685800" y="1417320"/>
-            <a:ext cx="5394960" cy="1920240"/>
-          </a:xfrm>
-          <a:prstGeom prst="rect">
-            <a:avLst/>
-          </a:prstGeom>
-          <a:solidFill>
-            <a:srgbClr val="F2F2F4"/>
-          </a:solidFill>
-          <a:ln>
-            <a:noFill/>
-          </a:ln>
-          <a:effectLst/>
-        </p:spPr>
-        <p:style>
-          <a:lnRef idx="1">
-            <a:schemeClr val="accent1"/>
-          </a:lnRef>
-          <a:fillRef idx="3">
-            <a:schemeClr val="accent1"/>
-          </a:fillRef>
-          <a:effectRef idx="2">
-            <a:schemeClr val="accent1"/>
-          </a:effectRef>
-          <a:fontRef idx="minor">
-            <a:schemeClr val="lt1"/>
-          </a:fontRef>
-        </p:style>
-        <p:txBody>
-          <a:bodyPr rtlCol="0" anchor="ctr"/>
-          <a:lstStyle/>
-          <a:p>
-            <a:pPr algn="ctr"/>
-          </a:p>
-        </p:txBody>
-      </p:sp>
-      <p:sp>
-        <p:nvSpPr>
-          <p:cNvPr id="6" name="Rectangle 5"/>
-          <p:cNvSpPr/>
-          <p:nvPr/>
-        </p:nvSpPr>
-        <p:spPr>
-          <a:xfrm>
-            <a:off x="685800" y="1417320"/>
-            <a:ext cx="128016" cy="1920240"/>
-          </a:xfrm>
-          <a:prstGeom prst="rect">
-            <a:avLst/>
-          </a:prstGeom>
-          <a:solidFill>
-            <a:srgbClr val="E1306C"/>
-          </a:solidFill>
-          <a:ln>
-            <a:noFill/>
-          </a:ln>
-          <a:effectLst/>
-        </p:spPr>
-        <p:style>
-          <a:lnRef idx="1">
-            <a:schemeClr val="accent1"/>
-          </a:lnRef>
-          <a:fillRef idx="3">
-            <a:schemeClr val="accent1"/>
-          </a:fillRef>
-          <a:effectRef idx="2">
-            <a:schemeClr val="accent1"/>
-          </a:effectRef>
-          <a:fontRef idx="minor">
-            <a:schemeClr val="lt1"/>
-          </a:fontRef>
-        </p:style>
-        <p:txBody>
-          <a:bodyPr rtlCol="0" anchor="ctr"/>
-          <a:lstStyle/>
-          <a:p>
-            <a:pPr algn="ctr"/>
-          </a:p>
-        </p:txBody>
-      </p:sp>
-      <p:sp>
-        <p:nvSpPr>
-          <p:cNvPr id="7" name="TextBox 6"/>
-          <p:cNvSpPr txBox="1"/>
-          <p:nvPr/>
-        </p:nvSpPr>
-        <p:spPr>
-          <a:xfrm>
-            <a:off x="1005840" y="1581912"/>
-            <a:ext cx="4846320" cy="1591056"/>
-          </a:xfrm>
-          <a:prstGeom prst="rect">
-            <a:avLst/>
-          </a:prstGeom>
-          <a:noFill/>
-        </p:spPr>
-        <p:txBody>
-          <a:bodyPr wrap="square">
-            <a:spAutoFit/>
-          </a:bodyPr>
-          <a:lstStyle/>
-          <a:p>
-            <a:r>
-              <a:rPr sz="1300" b="1">
-                <a:solidFill>
-                  <a:srgbClr val="E1306C"/>
-                </a:solidFill>
-                <a:latin typeface="맑은 고딕"/>
-              </a:rPr>
-              <a:t>📈 지금 상승 중 (최근 30일 모멘텀 +)</a:t>
-            </a:r>
-          </a:p>
-          <a:p>
-            <a:r>
-              <a:rPr sz="2200" b="1">
-                <a:solidFill>
-                  <a:srgbClr val="222222"/>
-                </a:solidFill>
-                <a:latin typeface="맑은 고딕"/>
-              </a:rPr>
-              <a:t>#등산  #클라이밍</a:t>
-            </a:r>
-          </a:p>
-          <a:p>
-            <a:pPr>
-              <a:spcBef>
-                <a:spcPts val="400"/>
-              </a:spcBef>
-            </a:pPr>
-            <a:r>
-              <a:rPr sz="1250" b="0">
-                <a:solidFill>
-                  <a:srgbClr val="6B6B6B"/>
-                </a:solidFill>
-                <a:latin typeface="맑은 고딕"/>
-              </a:rPr>
-              <a:t>등산 +7.9%, 클라이밍 +5.5% — 초여름에도 모멘텀 유지, 지금 올라탈 태그</a:t>
-            </a:r>
-          </a:p>
-        </p:txBody>
-      </p:sp>
-      <p:sp>
-        <p:nvSpPr>
-          <p:cNvPr id="8" name="Rectangle 7"/>
-          <p:cNvSpPr/>
-          <p:nvPr/>
-        </p:nvSpPr>
-        <p:spPr>
-          <a:xfrm>
-            <a:off x="6355080" y="1417320"/>
-            <a:ext cx="5394960" cy="1920240"/>
-          </a:xfrm>
-          <a:prstGeom prst="rect">
-            <a:avLst/>
-          </a:prstGeom>
-          <a:solidFill>
-            <a:srgbClr val="F2F2F4"/>
-          </a:solidFill>
-          <a:ln>
-            <a:noFill/>
-          </a:ln>
-          <a:effectLst/>
-        </p:spPr>
-        <p:style>
-          <a:lnRef idx="1">
-            <a:schemeClr val="accent1"/>
-          </a:lnRef>
-          <a:fillRef idx="3">
-            <a:schemeClr val="accent1"/>
-          </a:fillRef>
-          <a:effectRef idx="2">
-            <a:schemeClr val="accent1"/>
-          </a:effectRef>
-          <a:fontRef idx="minor">
-            <a:schemeClr val="lt1"/>
-          </a:fontRef>
-        </p:style>
-        <p:txBody>
-          <a:bodyPr rtlCol="0" anchor="ctr"/>
-          <a:lstStyle/>
-          <a:p>
-            <a:pPr algn="ctr"/>
-          </a:p>
-        </p:txBody>
-      </p:sp>
-      <p:sp>
-        <p:nvSpPr>
-          <p:cNvPr id="9" name="Rectangle 8"/>
-          <p:cNvSpPr/>
-          <p:nvPr/>
-        </p:nvSpPr>
-        <p:spPr>
-          <a:xfrm>
-            <a:off x="6355080" y="1417320"/>
-            <a:ext cx="128016" cy="1920240"/>
-          </a:xfrm>
-          <a:prstGeom prst="rect">
-            <a:avLst/>
-          </a:prstGeom>
-          <a:solidFill>
-            <a:srgbClr val="833AB4"/>
-          </a:solidFill>
-          <a:ln>
-            <a:noFill/>
-          </a:ln>
-          <a:effectLst/>
-        </p:spPr>
-        <p:style>
-          <a:lnRef idx="1">
-            <a:schemeClr val="accent1"/>
-          </a:lnRef>
-          <a:fillRef idx="3">
-            <a:schemeClr val="accent1"/>
-          </a:fillRef>
-          <a:effectRef idx="2">
-            <a:schemeClr val="accent1"/>
-          </a:effectRef>
-          <a:fontRef idx="minor">
-            <a:schemeClr val="lt1"/>
-          </a:fontRef>
-        </p:style>
-        <p:txBody>
-          <a:bodyPr rtlCol="0" anchor="ctr"/>
-          <a:lstStyle/>
-          <a:p>
-            <a:pPr algn="ctr"/>
-          </a:p>
-        </p:txBody>
-      </p:sp>
-      <p:sp>
-        <p:nvSpPr>
-          <p:cNvPr id="10" name="TextBox 9"/>
-          <p:cNvSpPr txBox="1"/>
-          <p:nvPr/>
-        </p:nvSpPr>
-        <p:spPr>
-          <a:xfrm>
-            <a:off x="6675120" y="1581912"/>
-            <a:ext cx="4846320" cy="1591056"/>
-          </a:xfrm>
-          <a:prstGeom prst="rect">
-            <a:avLst/>
-          </a:prstGeom>
-          <a:noFill/>
-        </p:spPr>
-        <p:txBody>
-          <a:bodyPr wrap="square">
-            <a:spAutoFit/>
-          </a:bodyPr>
-          <a:lstStyle/>
-          <a:p>
-            <a:r>
-              <a:rPr sz="1300" b="1">
-                <a:solidFill>
-                  <a:srgbClr val="833AB4"/>
-                </a:solidFill>
-                <a:latin typeface="맑은 고딕"/>
-              </a:rPr>
-              <a:t>🌊 피크 통과 (계절성 하락 전환)</a:t>
-            </a:r>
-          </a:p>
-          <a:p>
-            <a:r>
-              <a:rPr sz="2200" b="1">
-                <a:solidFill>
-                  <a:srgbClr val="222222"/>
-                </a:solidFill>
-                <a:latin typeface="맑은 고딕"/>
-              </a:rPr>
-              <a:t>#피크닉  #캠핑</a:t>
-            </a:r>
-          </a:p>
-          <a:p>
-            <a:pPr>
-              <a:spcBef>
-                <a:spcPts val="400"/>
-              </a:spcBef>
-            </a:pPr>
-            <a:r>
-              <a:rPr sz="1250" b="0">
-                <a:solidFill>
-                  <a:srgbClr val="6B6B6B"/>
-                </a:solidFill>
-                <a:latin typeface="맑은 고딕"/>
-              </a:rPr>
-              <a:t>연초 대비 +70%/+61%로 컸지만 최근 30일 -21%/-17% — 봄 수요 종료</a:t>
-            </a:r>
-          </a:p>
-        </p:txBody>
-      </p:sp>
-      <p:sp>
-        <p:nvSpPr>
-          <p:cNvPr id="11" name="Rectangle 10"/>
-          <p:cNvSpPr/>
-          <p:nvPr/>
-        </p:nvSpPr>
-        <p:spPr>
-          <a:xfrm>
-            <a:off x="685800" y="3611880"/>
-            <a:ext cx="5394960" cy="1920240"/>
-          </a:xfrm>
-          <a:prstGeom prst="rect">
-            <a:avLst/>
-          </a:prstGeom>
-          <a:solidFill>
-            <a:srgbClr val="F2F2F4"/>
-          </a:solidFill>
-          <a:ln>
-            <a:noFill/>
-          </a:ln>
-          <a:effectLst/>
-        </p:spPr>
-        <p:style>
-          <a:lnRef idx="1">
-            <a:schemeClr val="accent1"/>
-          </a:lnRef>
-          <a:fillRef idx="3">
-            <a:schemeClr val="accent1"/>
-          </a:fillRef>
-          <a:effectRef idx="2">
-            <a:schemeClr val="accent1"/>
-          </a:effectRef>
-          <a:fontRef idx="minor">
-            <a:schemeClr val="lt1"/>
-          </a:fontRef>
-        </p:style>
-        <p:txBody>
-          <a:bodyPr rtlCol="0" anchor="ctr"/>
-          <a:lstStyle/>
-          <a:p>
-            <a:pPr algn="ctr"/>
-          </a:p>
-        </p:txBody>
-      </p:sp>
-      <p:sp>
-        <p:nvSpPr>
-          <p:cNvPr id="12" name="Rectangle 11"/>
-          <p:cNvSpPr/>
-          <p:nvPr/>
-        </p:nvSpPr>
-        <p:spPr>
-          <a:xfrm>
-            <a:off x="685800" y="3611880"/>
-            <a:ext cx="128016" cy="1920240"/>
-          </a:xfrm>
-          <a:prstGeom prst="rect">
-            <a:avLst/>
-          </a:prstGeom>
-          <a:solidFill>
-            <a:srgbClr val="222222"/>
-          </a:solidFill>
-          <a:ln>
-            <a:noFill/>
-          </a:ln>
-          <a:effectLst/>
-        </p:spPr>
-        <p:style>
-          <a:lnRef idx="1">
-            <a:schemeClr val="accent1"/>
-          </a:lnRef>
-          <a:fillRef idx="3">
-            <a:schemeClr val="accent1"/>
-          </a:fillRef>
-          <a:effectRef idx="2">
-            <a:schemeClr val="accent1"/>
-          </a:effectRef>
-          <a:fontRef idx="minor">
-            <a:schemeClr val="lt1"/>
-          </a:fontRef>
-        </p:style>
-        <p:txBody>
-          <a:bodyPr rtlCol="0" anchor="ctr"/>
-          <a:lstStyle/>
-          <a:p>
-            <a:pPr algn="ctr"/>
-          </a:p>
-        </p:txBody>
-      </p:sp>
-      <p:sp>
-        <p:nvSpPr>
-          <p:cNvPr id="13" name="TextBox 12"/>
-          <p:cNvSpPr txBox="1"/>
-          <p:nvPr/>
-        </p:nvSpPr>
-        <p:spPr>
-          <a:xfrm>
-            <a:off x="1005840" y="3776472"/>
-            <a:ext cx="4846320" cy="1591056"/>
-          </a:xfrm>
-          <a:prstGeom prst="rect">
-            <a:avLst/>
-          </a:prstGeom>
-          <a:noFill/>
-        </p:spPr>
-        <p:txBody>
-          <a:bodyPr wrap="square">
-            <a:spAutoFit/>
-          </a:bodyPr>
-          <a:lstStyle/>
-          <a:p>
-            <a:r>
-              <a:rPr sz="1300" b="1">
-                <a:solidFill>
-                  <a:srgbClr val="222222"/>
-                </a:solidFill>
-                <a:latin typeface="맑은 고딕"/>
-              </a:rPr>
-              <a:t>💪 안정 수요 (시즌 진입)</a:t>
-            </a:r>
-          </a:p>
-          <a:p>
-            <a:r>
-              <a:rPr sz="2200" b="1">
-                <a:solidFill>
-                  <a:srgbClr val="222222"/>
-                </a:solidFill>
-                <a:latin typeface="맑은 고딕"/>
-              </a:rPr>
-              <a:t>#다이어트</a:t>
-            </a:r>
-          </a:p>
-          <a:p>
-            <a:pPr>
-              <a:spcBef>
-                <a:spcPts val="400"/>
-              </a:spcBef>
-            </a:pPr>
-            <a:r>
-              <a:rPr sz="1250" b="0">
-                <a:solidFill>
-                  <a:srgbClr val="6B6B6B"/>
-                </a:solidFill>
-                <a:latin typeface="맑은 고딕"/>
-              </a:rPr>
-              <a:t>최근 30일 +0.4%로 하락 멈춤 — 여름 직전 수요 재점화 구간, 월요일 피크 활용</a:t>
-            </a:r>
-          </a:p>
-        </p:txBody>
-      </p:sp>
-      <p:sp>
-        <p:nvSpPr>
-          <p:cNvPr id="14" name="Rectangle 13"/>
-          <p:cNvSpPr/>
-          <p:nvPr/>
-        </p:nvSpPr>
-        <p:spPr>
-          <a:xfrm>
-            <a:off x="6355080" y="3611880"/>
-            <a:ext cx="5394960" cy="1920240"/>
-          </a:xfrm>
-          <a:prstGeom prst="rect">
-            <a:avLst/>
-          </a:prstGeom>
-          <a:solidFill>
-            <a:srgbClr val="F2F2F4"/>
-          </a:solidFill>
-          <a:ln>
-            <a:noFill/>
-          </a:ln>
-          <a:effectLst/>
-        </p:spPr>
-        <p:style>
-          <a:lnRef idx="1">
-            <a:schemeClr val="accent1"/>
-          </a:lnRef>
-          <a:fillRef idx="3">
-            <a:schemeClr val="accent1"/>
-          </a:fillRef>
-          <a:effectRef idx="2">
-            <a:schemeClr val="accent1"/>
-          </a:effectRef>
-          <a:fontRef idx="minor">
-            <a:schemeClr val="lt1"/>
-          </a:fontRef>
-        </p:style>
-        <p:txBody>
-          <a:bodyPr rtlCol="0" anchor="ctr"/>
-          <a:lstStyle/>
-          <a:p>
-            <a:pPr algn="ctr"/>
-          </a:p>
-        </p:txBody>
-      </p:sp>
-      <p:sp>
-        <p:nvSpPr>
-          <p:cNvPr id="15" name="Rectangle 14"/>
-          <p:cNvSpPr/>
-          <p:nvPr/>
-        </p:nvSpPr>
-        <p:spPr>
-          <a:xfrm>
-            <a:off x="6355080" y="3611880"/>
-            <a:ext cx="128016" cy="1920240"/>
-          </a:xfrm>
-          <a:prstGeom prst="rect">
-            <a:avLst/>
-          </a:prstGeom>
-          <a:solidFill>
-            <a:srgbClr val="6B6B6B"/>
-          </a:solidFill>
-          <a:ln>
-            <a:noFill/>
-          </a:ln>
-          <a:effectLst/>
-        </p:spPr>
-        <p:style>
-          <a:lnRef idx="1">
-            <a:schemeClr val="accent1"/>
-          </a:lnRef>
-          <a:fillRef idx="3">
-            <a:schemeClr val="accent1"/>
-          </a:fillRef>
-          <a:effectRef idx="2">
-            <a:schemeClr val="accent1"/>
-          </a:effectRef>
-          <a:fontRef idx="minor">
-            <a:schemeClr val="lt1"/>
-          </a:fontRef>
-        </p:style>
-        <p:txBody>
-          <a:bodyPr rtlCol="0" anchor="ctr"/>
-          <a:lstStyle/>
-          <a:p>
-            <a:pPr algn="ctr"/>
-          </a:p>
-        </p:txBody>
-      </p:sp>
-      <p:sp>
-        <p:nvSpPr>
-          <p:cNvPr id="16" name="TextBox 15"/>
-          <p:cNvSpPr txBox="1"/>
-          <p:nvPr/>
-        </p:nvSpPr>
-        <p:spPr>
-          <a:xfrm>
-            <a:off x="6675120" y="3776472"/>
-            <a:ext cx="4846320" cy="1591056"/>
-          </a:xfrm>
-          <a:prstGeom prst="rect">
-            <a:avLst/>
-          </a:prstGeom>
-          <a:noFill/>
-        </p:spPr>
-        <p:txBody>
-          <a:bodyPr wrap="square">
-            <a:spAutoFit/>
-          </a:bodyPr>
-          <a:lstStyle/>
-          <a:p>
-            <a:r>
-              <a:rPr sz="1300" b="1">
-                <a:solidFill>
-                  <a:srgbClr val="6B6B6B"/>
-                </a:solidFill>
-                <a:latin typeface="맑은 고딕"/>
-              </a:rPr>
-              <a:t>📉 약세 지속</a:t>
-            </a:r>
-          </a:p>
-          <a:p>
-            <a:r>
-              <a:rPr sz="2200" b="1">
-                <a:solidFill>
-                  <a:srgbClr val="222222"/>
-                </a:solidFill>
-                <a:latin typeface="맑은 고딕"/>
-              </a:rPr>
-              <a:t>#카페  #국내여행</a:t>
-            </a:r>
-          </a:p>
-          <a:p>
-            <a:pPr>
-              <a:spcBef>
-                <a:spcPts val="400"/>
-              </a:spcBef>
-            </a:pPr>
-            <a:r>
-              <a:rPr sz="1250" b="0">
-                <a:solidFill>
-                  <a:srgbClr val="6B6B6B"/>
-                </a:solidFill>
-                <a:latin typeface="맑은 고딕"/>
-              </a:rPr>
-              <a:t>연초 대비 -50%/-15% — 단독 태그보다 상승 태그와 조합 권장</a:t>
-            </a:r>
-          </a:p>
-        </p:txBody>
-      </p:sp>
-      <p:sp>
-        <p:nvSpPr>
-          <p:cNvPr id="17" name="Rectangle 16"/>
-          <p:cNvSpPr/>
-          <p:nvPr/>
-        </p:nvSpPr>
-        <p:spPr>
-          <a:xfrm>
-            <a:off x="0" y="6565392"/>
-            <a:ext cx="12191695" cy="292608"/>
-          </a:xfrm>
-          <a:prstGeom prst="rect">
-            <a:avLst/>
-          </a:prstGeom>
-          <a:solidFill>
-            <a:srgbClr val="F2F2F4"/>
-          </a:solidFill>
-          <a:ln>
-            <a:noFill/>
-          </a:ln>
-          <a:effectLst/>
-        </p:spPr>
-        <p:style>
-          <a:lnRef idx="1">
-            <a:schemeClr val="accent1"/>
-          </a:lnRef>
-          <a:fillRef idx="3">
-            <a:schemeClr val="accent1"/>
-          </a:fillRef>
-          <a:effectRef idx="2">
-            <a:schemeClr val="accent1"/>
-          </a:effectRef>
-          <a:fontRef idx="minor">
-            <a:schemeClr val="lt1"/>
-          </a:fontRef>
-        </p:style>
-        <p:txBody>
-          <a:bodyPr rtlCol="0" anchor="ctr"/>
-          <a:lstStyle/>
-          <a:p>
-            <a:pPr algn="ctr"/>
-          </a:p>
-        </p:txBody>
-      </p:sp>
-      <p:sp>
-        <p:nvSpPr>
-          <p:cNvPr id="18" name="TextBox 17"/>
-          <p:cNvSpPr txBox="1"/>
-          <p:nvPr/>
-        </p:nvSpPr>
-        <p:spPr>
-          <a:xfrm>
-            <a:off x="365760" y="6547104"/>
-            <a:ext cx="7315200" cy="274320"/>
-          </a:xfrm>
-          <a:prstGeom prst="rect">
-            <a:avLst/>
-          </a:prstGeom>
-          <a:noFill/>
-        </p:spPr>
-        <p:txBody>
-          <a:bodyPr wrap="square">
-            <a:spAutoFit/>
-          </a:bodyPr>
-          <a:lstStyle/>
-          <a:p>
-            <a:r>
-              <a:rPr sz="900" b="0">
-                <a:solidFill>
-                  <a:srgbClr val="6B6B6B"/>
-                </a:solidFill>
-                <a:latin typeface="맑은 고딕"/>
-              </a:rPr>
-              <a:t>시계열 데이터 분석 · 한국 해시태그 트렌드 · 기준일 2026-06-11</a:t>
-            </a:r>
-          </a:p>
-        </p:txBody>
-      </p:sp>
-      <p:sp>
-        <p:nvSpPr>
-          <p:cNvPr id="19" name="TextBox 18"/>
-          <p:cNvSpPr txBox="1"/>
-          <p:nvPr/>
-        </p:nvSpPr>
-        <p:spPr>
-          <a:xfrm>
-            <a:off x="11094415" y="6547104"/>
-            <a:ext cx="822960" cy="274320"/>
-          </a:xfrm>
-          <a:prstGeom prst="rect">
-            <a:avLst/>
-          </a:prstGeom>
-          <a:noFill/>
-        </p:spPr>
-        <p:txBody>
-          <a:bodyPr wrap="square">
-            <a:spAutoFit/>
-          </a:bodyPr>
-          <a:lstStyle/>
-          <a:p>
-            <a:pPr algn="r"/>
-            <a:r>
-              <a:rPr sz="900" b="0">
-                <a:solidFill>
-                  <a:srgbClr val="6B6B6B"/>
-                </a:solidFill>
-                <a:latin typeface="맑은 고딕"/>
-              </a:rPr>
-              <a:t>17</a:t>
+              <a:t>CONCLUSION</a:t>
+            </a:r>
+          </a:p>
+        </p:txBody>
+      </p:sp>
+      <p:sp>
+        <p:nvSpPr>
+          <p:cNvPr id="5" name="TextBox 4"/>
+          <p:cNvSpPr txBox="1"/>
+          <p:nvPr/>
+        </p:nvSpPr>
+        <p:spPr>
+          <a:xfrm>
+            <a:off x="822960" y="3017520"/>
+            <a:ext cx="10515600" cy="1371600"/>
+          </a:xfrm>
+          <a:prstGeom prst="rect">
+            <a:avLst/>
+          </a:prstGeom>
+          <a:noFill/>
+        </p:spPr>
+        <p:txBody>
+          <a:bodyPr wrap="square">
+            <a:spAutoFit/>
+          </a:bodyPr>
+          <a:lstStyle/>
+          <a:p>
+            <a:r>
+              <a:rPr sz="4000" b="1">
+                <a:solidFill>
+                  <a:srgbClr val="FFFFFF"/>
+                </a:solidFill>
+                <a:latin typeface="맑은 고딕"/>
+              </a:rPr>
+              <a:t>그래서, 지금 뭘 써야 하나</a:t>
             </a:r>
           </a:p>
         </p:txBody>
@@ -9812,7 +9406,7 @@
                 </a:solidFill>
                 <a:latin typeface="Segoe UI"/>
               </a:rPr>
-              <a:t>07 · ACTION</a:t>
+              <a:t>07 · NOW TRENDING</a:t>
             </a:r>
           </a:p>
         </p:txBody>
@@ -9846,7 +9440,7 @@
                 </a:solidFill>
                 <a:latin typeface="맑은 고딕"/>
               </a:rPr>
-              <a:t>콘텐츠 활용 전략</a:t>
+              <a:t>2026-06-11 기준 트렌딩 해시태그</a:t>
             </a:r>
           </a:p>
         </p:txBody>
@@ -9859,8 +9453,8 @@
         </p:nvSpPr>
         <p:spPr>
           <a:xfrm>
-            <a:off x="685800" y="1371600"/>
-            <a:ext cx="10789920" cy="822960"/>
+            <a:off x="685800" y="1417320"/>
+            <a:ext cx="5394960" cy="1920240"/>
           </a:xfrm>
           <a:prstGeom prst="rect">
             <a:avLst/>
@@ -9897,217 +9491,105 @@
       </p:sp>
       <p:sp>
         <p:nvSpPr>
-          <p:cNvPr id="6" name="TextBox 5"/>
-          <p:cNvSpPr txBox="1"/>
-          <p:nvPr/>
-        </p:nvSpPr>
-        <p:spPr>
-          <a:xfrm>
-            <a:off x="914400" y="1481328"/>
-            <a:ext cx="10332720" cy="640080"/>
-          </a:xfrm>
-          <a:prstGeom prst="rect">
-            <a:avLst/>
-          </a:prstGeom>
-          <a:noFill/>
-        </p:spPr>
-        <p:txBody>
-          <a:bodyPr wrap="square" anchor="ctr">
-            <a:spAutoFit/>
-          </a:bodyPr>
-          <a:lstStyle/>
-          <a:p>
-            <a:r>
-              <a:rPr sz="1500" b="1">
+          <p:cNvPr id="6" name="Rectangle 5"/>
+          <p:cNvSpPr/>
+          <p:nvPr/>
+        </p:nvSpPr>
+        <p:spPr>
+          <a:xfrm>
+            <a:off x="685800" y="1417320"/>
+            <a:ext cx="128016" cy="1920240"/>
+          </a:xfrm>
+          <a:prstGeom prst="rect">
+            <a:avLst/>
+          </a:prstGeom>
+          <a:solidFill>
+            <a:srgbClr val="E1306C"/>
+          </a:solidFill>
+          <a:ln>
+            <a:noFill/>
+          </a:ln>
+          <a:effectLst/>
+        </p:spPr>
+        <p:style>
+          <a:lnRef idx="1">
+            <a:schemeClr val="accent1"/>
+          </a:lnRef>
+          <a:fillRef idx="3">
+            <a:schemeClr val="accent1"/>
+          </a:fillRef>
+          <a:effectRef idx="2">
+            <a:schemeClr val="accent1"/>
+          </a:effectRef>
+          <a:fontRef idx="minor">
+            <a:schemeClr val="lt1"/>
+          </a:fontRef>
+        </p:style>
+        <p:txBody>
+          <a:bodyPr rtlCol="0" anchor="ctr"/>
+          <a:lstStyle/>
+          <a:p>
+            <a:pPr algn="ctr"/>
+          </a:p>
+        </p:txBody>
+      </p:sp>
+      <p:sp>
+        <p:nvSpPr>
+          <p:cNvPr id="7" name="TextBox 6"/>
+          <p:cNvSpPr txBox="1"/>
+          <p:nvPr/>
+        </p:nvSpPr>
+        <p:spPr>
+          <a:xfrm>
+            <a:off x="1005840" y="1581912"/>
+            <a:ext cx="4846320" cy="1591056"/>
+          </a:xfrm>
+          <a:prstGeom prst="rect">
+            <a:avLst/>
+          </a:prstGeom>
+          <a:noFill/>
+        </p:spPr>
+        <p:txBody>
+          <a:bodyPr wrap="square">
+            <a:spAutoFit/>
+          </a:bodyPr>
+          <a:lstStyle/>
+          <a:p>
+            <a:r>
+              <a:rPr sz="1300" b="1">
+                <a:solidFill>
+                  <a:srgbClr val="E1306C"/>
+                </a:solidFill>
+                <a:latin typeface="맑은 고딕"/>
+              </a:rPr>
+              <a:t>📈 지금 상승 중 (최근 30일 모멘텀 +)</a:t>
+            </a:r>
+          </a:p>
+          <a:p>
+            <a:r>
+              <a:rPr sz="2200" b="1">
                 <a:solidFill>
                   <a:srgbClr val="222222"/>
                 </a:solidFill>
                 <a:latin typeface="맑은 고딕"/>
               </a:rPr>
-              <a:t>시계열 인사이트 → 게시물 전략: 무엇을(태그), 언제(요일), 어떻게(조합)</a:t>
-            </a:r>
-          </a:p>
-        </p:txBody>
-      </p:sp>
-      <p:sp>
-        <p:nvSpPr>
-          <p:cNvPr id="7" name="TextBox 6"/>
-          <p:cNvSpPr txBox="1"/>
-          <p:nvPr/>
-        </p:nvSpPr>
-        <p:spPr>
-          <a:xfrm>
-            <a:off x="822960" y="2514600"/>
-            <a:ext cx="10607040" cy="4206240"/>
-          </a:xfrm>
-          <a:prstGeom prst="rect">
-            <a:avLst/>
-          </a:prstGeom>
-          <a:noFill/>
-        </p:spPr>
-        <p:txBody>
-          <a:bodyPr wrap="square">
-            <a:spAutoFit/>
-          </a:bodyPr>
-          <a:lstStyle/>
-          <a:p>
-            <a:pPr>
-              <a:spcAft>
-                <a:spcPts val="1000"/>
-              </a:spcAft>
-            </a:pPr>
-            <a:r>
-              <a:rPr sz="1650" b="1">
-                <a:solidFill>
-                  <a:srgbClr val="E1306C"/>
-                </a:solidFill>
-                <a:latin typeface="맑은 고딕"/>
-              </a:rPr>
-              <a:t>●  주력 태그</a:t>
-            </a:r>
-          </a:p>
-          <a:p>
-            <a:pPr>
-              <a:spcAft>
-                <a:spcPts val="1300"/>
-              </a:spcAft>
-            </a:pPr>
-            <a:r>
-              <a:rPr sz="1350" b="0">
+              <a:t>#등산  #클라이밍</a:t>
+            </a:r>
+          </a:p>
+          <a:p>
+            <a:pPr>
+              <a:spcBef>
+                <a:spcPts val="400"/>
+              </a:spcBef>
+            </a:pPr>
+            <a:r>
+              <a:rPr sz="1250" b="0">
                 <a:solidFill>
                   <a:srgbClr val="6B6B6B"/>
                 </a:solidFill>
                 <a:latin typeface="맑은 고딕"/>
               </a:rPr>
-              <a:t>     #등산 #클라이밍 중심 콘텐츠 — 상승 모멘텀 구간에 게시해 노출 탄력 확보</a:t>
-            </a:r>
-          </a:p>
-          <a:p>
-            <a:pPr>
-              <a:spcAft>
-                <a:spcPts val="1000"/>
-              </a:spcAft>
-            </a:pPr>
-            <a:r>
-              <a:rPr sz="1650" b="1">
-                <a:solidFill>
-                  <a:srgbClr val="E1306C"/>
-                </a:solidFill>
-                <a:latin typeface="맑은 고딕"/>
-              </a:rPr>
-              <a:t>●  게시 타이밍</a:t>
-            </a:r>
-          </a:p>
-          <a:p>
-            <a:pPr>
-              <a:spcAft>
-                <a:spcPts val="1300"/>
-              </a:spcAft>
-            </a:pPr>
-            <a:r>
-              <a:rPr sz="1350" b="0">
-                <a:solidFill>
-                  <a:srgbClr val="6B6B6B"/>
-                </a:solidFill>
-                <a:latin typeface="맑은 고딕"/>
-              </a:rPr>
-              <a:t>     아웃도어 태그는 금~토 오전(주말 피크 직전), #다이어트는 일 저녁~월 오전('월요일 결심' 수요 선점)</a:t>
-            </a:r>
-          </a:p>
-          <a:p>
-            <a:pPr>
-              <a:spcAft>
-                <a:spcPts val="1000"/>
-              </a:spcAft>
-            </a:pPr>
-            <a:r>
-              <a:rPr sz="1650" b="1">
-                <a:solidFill>
-                  <a:srgbClr val="E1306C"/>
-                </a:solidFill>
-                <a:latin typeface="맑은 고딕"/>
-              </a:rPr>
-              <a:t>●  태그 조합</a:t>
-            </a:r>
-          </a:p>
-          <a:p>
-            <a:pPr>
-              <a:spcAft>
-                <a:spcPts val="1300"/>
-              </a:spcAft>
-            </a:pPr>
-            <a:r>
-              <a:rPr sz="1350" b="0">
-                <a:solidFill>
-                  <a:srgbClr val="6B6B6B"/>
-                </a:solidFill>
-                <a:latin typeface="맑은 고딕"/>
-              </a:rPr>
-              <a:t>     상승 태그 + 안정 태그 묶기: #등산 × #다이어트(여름 준비), #클라이밍 × #카페(실내 연계)</a:t>
-            </a:r>
-          </a:p>
-          <a:p>
-            <a:pPr>
-              <a:spcAft>
-                <a:spcPts val="1000"/>
-              </a:spcAft>
-            </a:pPr>
-            <a:r>
-              <a:rPr sz="1650" b="1">
-                <a:solidFill>
-                  <a:srgbClr val="E1306C"/>
-                </a:solidFill>
-                <a:latin typeface="맑은 고딕"/>
-              </a:rPr>
-              <a:t>●  리스크 관리</a:t>
-            </a:r>
-          </a:p>
-          <a:p>
-            <a:pPr>
-              <a:spcAft>
-                <a:spcPts val="1300"/>
-              </a:spcAft>
-            </a:pPr>
-            <a:r>
-              <a:rPr sz="1350" b="0">
-                <a:solidFill>
-                  <a:srgbClr val="6B6B6B"/>
-                </a:solidFill>
-                <a:latin typeface="맑은 고딕"/>
-              </a:rPr>
-              <a:t>     #피크닉·#캠핑은 하락 전환 — 신규 기획 보류, 기존 콘텐츠는 내년 3~4월 재활용 예약</a:t>
-            </a:r>
-          </a:p>
-          <a:p>
-            <a:pPr>
-              <a:spcAft>
-                <a:spcPts val="1000"/>
-              </a:spcAft>
-            </a:pPr>
-            <a:r>
-              <a:rPr sz="1650" b="1">
-                <a:solidFill>
-                  <a:srgbClr val="E1306C"/>
-                </a:solidFill>
-                <a:latin typeface="맑은 고딕"/>
-              </a:rPr>
-              <a:t>●  운영 루프</a:t>
-            </a:r>
-          </a:p>
-          <a:p>
-            <a:pPr>
-              <a:spcAft>
-                <a:spcPts val="1300"/>
-              </a:spcAft>
-            </a:pPr>
-            <a:r>
-              <a:rPr sz="1350" b="0">
-                <a:solidFill>
-                  <a:srgbClr val="6B6B6B"/>
-                </a:solidFill>
-                <a:latin typeface="맑은 고딕"/>
-              </a:rPr>
-              <a:t>     데이터랩 재수집(주 1회) → 모멘텀 갱신 → 태그 포트폴리오 리밸런싱</a:t>
+              <a:t>등산 +7.9%, 클라이밍 +5.5% — 초여름에도 모멘텀 유지, 지금 올라탈 태그</a:t>
             </a:r>
           </a:p>
         </p:txBody>
@@ -10120,8 +9602,8 @@
         </p:nvSpPr>
         <p:spPr>
           <a:xfrm>
-            <a:off x="0" y="6565392"/>
-            <a:ext cx="12191695" cy="292608"/>
+            <a:off x="6355080" y="1417320"/>
+            <a:ext cx="5394960" cy="1920240"/>
           </a:xfrm>
           <a:prstGeom prst="rect">
             <a:avLst/>
@@ -10158,7 +9640,454 @@
       </p:sp>
       <p:sp>
         <p:nvSpPr>
-          <p:cNvPr id="9" name="TextBox 8"/>
+          <p:cNvPr id="9" name="Rectangle 8"/>
+          <p:cNvSpPr/>
+          <p:nvPr/>
+        </p:nvSpPr>
+        <p:spPr>
+          <a:xfrm>
+            <a:off x="6355080" y="1417320"/>
+            <a:ext cx="128016" cy="1920240"/>
+          </a:xfrm>
+          <a:prstGeom prst="rect">
+            <a:avLst/>
+          </a:prstGeom>
+          <a:solidFill>
+            <a:srgbClr val="833AB4"/>
+          </a:solidFill>
+          <a:ln>
+            <a:noFill/>
+          </a:ln>
+          <a:effectLst/>
+        </p:spPr>
+        <p:style>
+          <a:lnRef idx="1">
+            <a:schemeClr val="accent1"/>
+          </a:lnRef>
+          <a:fillRef idx="3">
+            <a:schemeClr val="accent1"/>
+          </a:fillRef>
+          <a:effectRef idx="2">
+            <a:schemeClr val="accent1"/>
+          </a:effectRef>
+          <a:fontRef idx="minor">
+            <a:schemeClr val="lt1"/>
+          </a:fontRef>
+        </p:style>
+        <p:txBody>
+          <a:bodyPr rtlCol="0" anchor="ctr"/>
+          <a:lstStyle/>
+          <a:p>
+            <a:pPr algn="ctr"/>
+          </a:p>
+        </p:txBody>
+      </p:sp>
+      <p:sp>
+        <p:nvSpPr>
+          <p:cNvPr id="10" name="TextBox 9"/>
+          <p:cNvSpPr txBox="1"/>
+          <p:nvPr/>
+        </p:nvSpPr>
+        <p:spPr>
+          <a:xfrm>
+            <a:off x="6675120" y="1581912"/>
+            <a:ext cx="4846320" cy="1591056"/>
+          </a:xfrm>
+          <a:prstGeom prst="rect">
+            <a:avLst/>
+          </a:prstGeom>
+          <a:noFill/>
+        </p:spPr>
+        <p:txBody>
+          <a:bodyPr wrap="square">
+            <a:spAutoFit/>
+          </a:bodyPr>
+          <a:lstStyle/>
+          <a:p>
+            <a:r>
+              <a:rPr sz="1300" b="1">
+                <a:solidFill>
+                  <a:srgbClr val="833AB4"/>
+                </a:solidFill>
+                <a:latin typeface="맑은 고딕"/>
+              </a:rPr>
+              <a:t>🌊 피크 통과 (계절성 하락 전환)</a:t>
+            </a:r>
+          </a:p>
+          <a:p>
+            <a:r>
+              <a:rPr sz="2200" b="1">
+                <a:solidFill>
+                  <a:srgbClr val="222222"/>
+                </a:solidFill>
+                <a:latin typeface="맑은 고딕"/>
+              </a:rPr>
+              <a:t>#피크닉  #캠핑</a:t>
+            </a:r>
+          </a:p>
+          <a:p>
+            <a:pPr>
+              <a:spcBef>
+                <a:spcPts val="400"/>
+              </a:spcBef>
+            </a:pPr>
+            <a:r>
+              <a:rPr sz="1250" b="0">
+                <a:solidFill>
+                  <a:srgbClr val="6B6B6B"/>
+                </a:solidFill>
+                <a:latin typeface="맑은 고딕"/>
+              </a:rPr>
+              <a:t>연초 대비 +70%/+61%로 컸지만 최근 30일 -21%/-17% — 봄 수요 종료</a:t>
+            </a:r>
+          </a:p>
+        </p:txBody>
+      </p:sp>
+      <p:sp>
+        <p:nvSpPr>
+          <p:cNvPr id="11" name="Rectangle 10"/>
+          <p:cNvSpPr/>
+          <p:nvPr/>
+        </p:nvSpPr>
+        <p:spPr>
+          <a:xfrm>
+            <a:off x="685800" y="3611880"/>
+            <a:ext cx="5394960" cy="1920240"/>
+          </a:xfrm>
+          <a:prstGeom prst="rect">
+            <a:avLst/>
+          </a:prstGeom>
+          <a:solidFill>
+            <a:srgbClr val="F2F2F4"/>
+          </a:solidFill>
+          <a:ln>
+            <a:noFill/>
+          </a:ln>
+          <a:effectLst/>
+        </p:spPr>
+        <p:style>
+          <a:lnRef idx="1">
+            <a:schemeClr val="accent1"/>
+          </a:lnRef>
+          <a:fillRef idx="3">
+            <a:schemeClr val="accent1"/>
+          </a:fillRef>
+          <a:effectRef idx="2">
+            <a:schemeClr val="accent1"/>
+          </a:effectRef>
+          <a:fontRef idx="minor">
+            <a:schemeClr val="lt1"/>
+          </a:fontRef>
+        </p:style>
+        <p:txBody>
+          <a:bodyPr rtlCol="0" anchor="ctr"/>
+          <a:lstStyle/>
+          <a:p>
+            <a:pPr algn="ctr"/>
+          </a:p>
+        </p:txBody>
+      </p:sp>
+      <p:sp>
+        <p:nvSpPr>
+          <p:cNvPr id="12" name="Rectangle 11"/>
+          <p:cNvSpPr/>
+          <p:nvPr/>
+        </p:nvSpPr>
+        <p:spPr>
+          <a:xfrm>
+            <a:off x="685800" y="3611880"/>
+            <a:ext cx="128016" cy="1920240"/>
+          </a:xfrm>
+          <a:prstGeom prst="rect">
+            <a:avLst/>
+          </a:prstGeom>
+          <a:solidFill>
+            <a:srgbClr val="222222"/>
+          </a:solidFill>
+          <a:ln>
+            <a:noFill/>
+          </a:ln>
+          <a:effectLst/>
+        </p:spPr>
+        <p:style>
+          <a:lnRef idx="1">
+            <a:schemeClr val="accent1"/>
+          </a:lnRef>
+          <a:fillRef idx="3">
+            <a:schemeClr val="accent1"/>
+          </a:fillRef>
+          <a:effectRef idx="2">
+            <a:schemeClr val="accent1"/>
+          </a:effectRef>
+          <a:fontRef idx="minor">
+            <a:schemeClr val="lt1"/>
+          </a:fontRef>
+        </p:style>
+        <p:txBody>
+          <a:bodyPr rtlCol="0" anchor="ctr"/>
+          <a:lstStyle/>
+          <a:p>
+            <a:pPr algn="ctr"/>
+          </a:p>
+        </p:txBody>
+      </p:sp>
+      <p:sp>
+        <p:nvSpPr>
+          <p:cNvPr id="13" name="TextBox 12"/>
+          <p:cNvSpPr txBox="1"/>
+          <p:nvPr/>
+        </p:nvSpPr>
+        <p:spPr>
+          <a:xfrm>
+            <a:off x="1005840" y="3776472"/>
+            <a:ext cx="4846320" cy="1591056"/>
+          </a:xfrm>
+          <a:prstGeom prst="rect">
+            <a:avLst/>
+          </a:prstGeom>
+          <a:noFill/>
+        </p:spPr>
+        <p:txBody>
+          <a:bodyPr wrap="square">
+            <a:spAutoFit/>
+          </a:bodyPr>
+          <a:lstStyle/>
+          <a:p>
+            <a:r>
+              <a:rPr sz="1300" b="1">
+                <a:solidFill>
+                  <a:srgbClr val="222222"/>
+                </a:solidFill>
+                <a:latin typeface="맑은 고딕"/>
+              </a:rPr>
+              <a:t>💪 안정 수요 (시즌 진입)</a:t>
+            </a:r>
+          </a:p>
+          <a:p>
+            <a:r>
+              <a:rPr sz="2200" b="1">
+                <a:solidFill>
+                  <a:srgbClr val="222222"/>
+                </a:solidFill>
+                <a:latin typeface="맑은 고딕"/>
+              </a:rPr>
+              <a:t>#다이어트</a:t>
+            </a:r>
+          </a:p>
+          <a:p>
+            <a:pPr>
+              <a:spcBef>
+                <a:spcPts val="400"/>
+              </a:spcBef>
+            </a:pPr>
+            <a:r>
+              <a:rPr sz="1250" b="0">
+                <a:solidFill>
+                  <a:srgbClr val="6B6B6B"/>
+                </a:solidFill>
+                <a:latin typeface="맑은 고딕"/>
+              </a:rPr>
+              <a:t>최근 30일 +0.4%로 하락 멈춤 — 여름 직전 수요 재점화 구간, 월요일 피크 활용</a:t>
+            </a:r>
+          </a:p>
+        </p:txBody>
+      </p:sp>
+      <p:sp>
+        <p:nvSpPr>
+          <p:cNvPr id="14" name="Rectangle 13"/>
+          <p:cNvSpPr/>
+          <p:nvPr/>
+        </p:nvSpPr>
+        <p:spPr>
+          <a:xfrm>
+            <a:off x="6355080" y="3611880"/>
+            <a:ext cx="5394960" cy="1920240"/>
+          </a:xfrm>
+          <a:prstGeom prst="rect">
+            <a:avLst/>
+          </a:prstGeom>
+          <a:solidFill>
+            <a:srgbClr val="F2F2F4"/>
+          </a:solidFill>
+          <a:ln>
+            <a:noFill/>
+          </a:ln>
+          <a:effectLst/>
+        </p:spPr>
+        <p:style>
+          <a:lnRef idx="1">
+            <a:schemeClr val="accent1"/>
+          </a:lnRef>
+          <a:fillRef idx="3">
+            <a:schemeClr val="accent1"/>
+          </a:fillRef>
+          <a:effectRef idx="2">
+            <a:schemeClr val="accent1"/>
+          </a:effectRef>
+          <a:fontRef idx="minor">
+            <a:schemeClr val="lt1"/>
+          </a:fontRef>
+        </p:style>
+        <p:txBody>
+          <a:bodyPr rtlCol="0" anchor="ctr"/>
+          <a:lstStyle/>
+          <a:p>
+            <a:pPr algn="ctr"/>
+          </a:p>
+        </p:txBody>
+      </p:sp>
+      <p:sp>
+        <p:nvSpPr>
+          <p:cNvPr id="15" name="Rectangle 14"/>
+          <p:cNvSpPr/>
+          <p:nvPr/>
+        </p:nvSpPr>
+        <p:spPr>
+          <a:xfrm>
+            <a:off x="6355080" y="3611880"/>
+            <a:ext cx="128016" cy="1920240"/>
+          </a:xfrm>
+          <a:prstGeom prst="rect">
+            <a:avLst/>
+          </a:prstGeom>
+          <a:solidFill>
+            <a:srgbClr val="6B6B6B"/>
+          </a:solidFill>
+          <a:ln>
+            <a:noFill/>
+          </a:ln>
+          <a:effectLst/>
+        </p:spPr>
+        <p:style>
+          <a:lnRef idx="1">
+            <a:schemeClr val="accent1"/>
+          </a:lnRef>
+          <a:fillRef idx="3">
+            <a:schemeClr val="accent1"/>
+          </a:fillRef>
+          <a:effectRef idx="2">
+            <a:schemeClr val="accent1"/>
+          </a:effectRef>
+          <a:fontRef idx="minor">
+            <a:schemeClr val="lt1"/>
+          </a:fontRef>
+        </p:style>
+        <p:txBody>
+          <a:bodyPr rtlCol="0" anchor="ctr"/>
+          <a:lstStyle/>
+          <a:p>
+            <a:pPr algn="ctr"/>
+          </a:p>
+        </p:txBody>
+      </p:sp>
+      <p:sp>
+        <p:nvSpPr>
+          <p:cNvPr id="16" name="TextBox 15"/>
+          <p:cNvSpPr txBox="1"/>
+          <p:nvPr/>
+        </p:nvSpPr>
+        <p:spPr>
+          <a:xfrm>
+            <a:off x="6675120" y="3776472"/>
+            <a:ext cx="4846320" cy="1591056"/>
+          </a:xfrm>
+          <a:prstGeom prst="rect">
+            <a:avLst/>
+          </a:prstGeom>
+          <a:noFill/>
+        </p:spPr>
+        <p:txBody>
+          <a:bodyPr wrap="square">
+            <a:spAutoFit/>
+          </a:bodyPr>
+          <a:lstStyle/>
+          <a:p>
+            <a:r>
+              <a:rPr sz="1300" b="1">
+                <a:solidFill>
+                  <a:srgbClr val="6B6B6B"/>
+                </a:solidFill>
+                <a:latin typeface="맑은 고딕"/>
+              </a:rPr>
+              <a:t>📉 약세 지속</a:t>
+            </a:r>
+          </a:p>
+          <a:p>
+            <a:r>
+              <a:rPr sz="2200" b="1">
+                <a:solidFill>
+                  <a:srgbClr val="222222"/>
+                </a:solidFill>
+                <a:latin typeface="맑은 고딕"/>
+              </a:rPr>
+              <a:t>#카페  #국내여행</a:t>
+            </a:r>
+          </a:p>
+          <a:p>
+            <a:pPr>
+              <a:spcBef>
+                <a:spcPts val="400"/>
+              </a:spcBef>
+            </a:pPr>
+            <a:r>
+              <a:rPr sz="1250" b="0">
+                <a:solidFill>
+                  <a:srgbClr val="6B6B6B"/>
+                </a:solidFill>
+                <a:latin typeface="맑은 고딕"/>
+              </a:rPr>
+              <a:t>연초 대비 -50%/-15% — 단독 태그보다 상승 태그와 조합 권장</a:t>
+            </a:r>
+          </a:p>
+        </p:txBody>
+      </p:sp>
+      <p:sp>
+        <p:nvSpPr>
+          <p:cNvPr id="17" name="Rectangle 16"/>
+          <p:cNvSpPr/>
+          <p:nvPr/>
+        </p:nvSpPr>
+        <p:spPr>
+          <a:xfrm>
+            <a:off x="0" y="6565392"/>
+            <a:ext cx="12191695" cy="292608"/>
+          </a:xfrm>
+          <a:prstGeom prst="rect">
+            <a:avLst/>
+          </a:prstGeom>
+          <a:solidFill>
+            <a:srgbClr val="F2F2F4"/>
+          </a:solidFill>
+          <a:ln>
+            <a:noFill/>
+          </a:ln>
+          <a:effectLst/>
+        </p:spPr>
+        <p:style>
+          <a:lnRef idx="1">
+            <a:schemeClr val="accent1"/>
+          </a:lnRef>
+          <a:fillRef idx="3">
+            <a:schemeClr val="accent1"/>
+          </a:fillRef>
+          <a:effectRef idx="2">
+            <a:schemeClr val="accent1"/>
+          </a:effectRef>
+          <a:fontRef idx="minor">
+            <a:schemeClr val="lt1"/>
+          </a:fontRef>
+        </p:style>
+        <p:txBody>
+          <a:bodyPr rtlCol="0" anchor="ctr"/>
+          <a:lstStyle/>
+          <a:p>
+            <a:pPr algn="ctr"/>
+          </a:p>
+        </p:txBody>
+      </p:sp>
+      <p:sp>
+        <p:nvSpPr>
+          <p:cNvPr id="18" name="TextBox 17"/>
           <p:cNvSpPr txBox="1"/>
           <p:nvPr/>
         </p:nvSpPr>
@@ -10192,7 +10121,7 @@
       </p:sp>
       <p:sp>
         <p:nvSpPr>
-          <p:cNvPr id="10" name="TextBox 9"/>
+          <p:cNvPr id="19" name="TextBox 18"/>
           <p:cNvSpPr txBox="1"/>
           <p:nvPr/>
         </p:nvSpPr>
@@ -10316,7 +10245,7 @@
                 </a:solidFill>
                 <a:latin typeface="Segoe UI"/>
               </a:rPr>
-              <a:t>08 · CODE</a:t>
+              <a:t>07 · ACTION</a:t>
             </a:r>
           </a:p>
         </p:txBody>
@@ -10350,502 +10279,21 @@
                 </a:solidFill>
                 <a:latin typeface="맑은 고딕"/>
               </a:rPr>
-              <a:t>핵심 코드 ①  데이터 → 평활화 → 차분</a:t>
-            </a:r>
-          </a:p>
-        </p:txBody>
-      </p:sp>
-      <p:sp>
-        <p:nvSpPr>
-          <p:cNvPr id="5" name="TextBox 4"/>
-          <p:cNvSpPr txBox="1"/>
-          <p:nvPr/>
-        </p:nvSpPr>
-        <p:spPr>
-          <a:xfrm>
-            <a:off x="731520" y="1371600"/>
-            <a:ext cx="10789920" cy="320040"/>
-          </a:xfrm>
-          <a:prstGeom prst="rect">
-            <a:avLst/>
-          </a:prstGeom>
-          <a:noFill/>
-        </p:spPr>
-        <p:txBody>
-          <a:bodyPr wrap="square">
-            <a:spAutoFit/>
-          </a:bodyPr>
-          <a:lstStyle/>
-          <a:p>
-            <a:r>
-              <a:rPr sz="1350" b="1">
-                <a:solidFill>
-                  <a:srgbClr val="E1306C"/>
-                </a:solidFill>
-                <a:latin typeface="맑은 고딕"/>
-              </a:rPr>
-              <a:t>●  tidy 패널을 날짜×태그 행렬로 (pandas pivot)</a:t>
-            </a:r>
-          </a:p>
-        </p:txBody>
-      </p:sp>
-      <p:sp>
-        <p:nvSpPr>
-          <p:cNvPr id="6" name="Rectangle 5"/>
+              <a:t>콘텐츠 활용 전략</a:t>
+            </a:r>
+          </a:p>
+        </p:txBody>
+      </p:sp>
+      <p:sp>
+        <p:nvSpPr>
+          <p:cNvPr id="5" name="Rectangle 4"/>
           <p:cNvSpPr/>
           <p:nvPr/>
         </p:nvSpPr>
         <p:spPr>
           <a:xfrm>
-            <a:off x="914400" y="1755648"/>
-            <a:ext cx="10424160" cy="457200"/>
-          </a:xfrm>
-          <a:prstGeom prst="rect">
-            <a:avLst/>
-          </a:prstGeom>
-          <a:solidFill>
-            <a:srgbClr val="2B2B33"/>
-          </a:solidFill>
-          <a:ln>
-            <a:noFill/>
-          </a:ln>
-          <a:effectLst/>
-        </p:spPr>
-        <p:style>
-          <a:lnRef idx="1">
-            <a:schemeClr val="accent1"/>
-          </a:lnRef>
-          <a:fillRef idx="3">
-            <a:schemeClr val="accent1"/>
-          </a:fillRef>
-          <a:effectRef idx="2">
-            <a:schemeClr val="accent1"/>
-          </a:effectRef>
-          <a:fontRef idx="minor">
-            <a:schemeClr val="lt1"/>
-          </a:fontRef>
-        </p:style>
-        <p:txBody>
-          <a:bodyPr rtlCol="0" anchor="ctr"/>
-          <a:lstStyle/>
-          <a:p>
-            <a:pPr algn="ctr"/>
-          </a:p>
-        </p:txBody>
-      </p:sp>
-      <p:sp>
-        <p:nvSpPr>
-          <p:cNvPr id="7" name="TextBox 6"/>
-          <p:cNvSpPr txBox="1"/>
-          <p:nvPr/>
-        </p:nvSpPr>
-        <p:spPr>
-          <a:xfrm>
-            <a:off x="1143000" y="1847088"/>
-            <a:ext cx="10058400" cy="310896"/>
-          </a:xfrm>
-          <a:prstGeom prst="rect">
-            <a:avLst/>
-          </a:prstGeom>
-          <a:noFill/>
-        </p:spPr>
-        <p:txBody>
-          <a:bodyPr wrap="square">
-            <a:spAutoFit/>
-          </a:bodyPr>
-          <a:lstStyle/>
-          <a:p>
-            <a:r>
-              <a:rPr sz="1200" b="0">
-                <a:solidFill>
-                  <a:srgbClr val="E8E8EE"/>
-                </a:solidFill>
-                <a:latin typeface="Consolas"/>
-              </a:rPr>
-              <a:t>wide = panel.pivot(index="date", columns="hashtag", values="ratio")</a:t>
-            </a:r>
-          </a:p>
-        </p:txBody>
-      </p:sp>
-      <p:sp>
-        <p:nvSpPr>
-          <p:cNvPr id="8" name="TextBox 7"/>
-          <p:cNvSpPr txBox="1"/>
-          <p:nvPr/>
-        </p:nvSpPr>
-        <p:spPr>
-          <a:xfrm>
-            <a:off x="731520" y="2377440"/>
-            <a:ext cx="10789920" cy="320040"/>
-          </a:xfrm>
-          <a:prstGeom prst="rect">
-            <a:avLst/>
-          </a:prstGeom>
-          <a:noFill/>
-        </p:spPr>
-        <p:txBody>
-          <a:bodyPr wrap="square">
-            <a:spAutoFit/>
-          </a:bodyPr>
-          <a:lstStyle/>
-          <a:p>
-            <a:r>
-              <a:rPr sz="1350" b="1">
-                <a:solidFill>
-                  <a:srgbClr val="E1306C"/>
-                </a:solidFill>
-                <a:latin typeface="맑은 고딕"/>
-              </a:rPr>
-              <a:t>●  이동평균 평활화 — 7일 중심 윈도우가 주간 주기를 상쇄</a:t>
-            </a:r>
-          </a:p>
-        </p:txBody>
-      </p:sp>
-      <p:sp>
-        <p:nvSpPr>
-          <p:cNvPr id="9" name="Rectangle 8"/>
-          <p:cNvSpPr/>
-          <p:nvPr/>
-        </p:nvSpPr>
-        <p:spPr>
-          <a:xfrm>
-            <a:off x="914400" y="2761488"/>
-            <a:ext cx="10424160" cy="457200"/>
-          </a:xfrm>
-          <a:prstGeom prst="rect">
-            <a:avLst/>
-          </a:prstGeom>
-          <a:solidFill>
-            <a:srgbClr val="2B2B33"/>
-          </a:solidFill>
-          <a:ln>
-            <a:noFill/>
-          </a:ln>
-          <a:effectLst/>
-        </p:spPr>
-        <p:style>
-          <a:lnRef idx="1">
-            <a:schemeClr val="accent1"/>
-          </a:lnRef>
-          <a:fillRef idx="3">
-            <a:schemeClr val="accent1"/>
-          </a:fillRef>
-          <a:effectRef idx="2">
-            <a:schemeClr val="accent1"/>
-          </a:effectRef>
-          <a:fontRef idx="minor">
-            <a:schemeClr val="lt1"/>
-          </a:fontRef>
-        </p:style>
-        <p:txBody>
-          <a:bodyPr rtlCol="0" anchor="ctr"/>
-          <a:lstStyle/>
-          <a:p>
-            <a:pPr algn="ctr"/>
-          </a:p>
-        </p:txBody>
-      </p:sp>
-      <p:sp>
-        <p:nvSpPr>
-          <p:cNvPr id="10" name="TextBox 9"/>
-          <p:cNvSpPr txBox="1"/>
-          <p:nvPr/>
-        </p:nvSpPr>
-        <p:spPr>
-          <a:xfrm>
-            <a:off x="1143000" y="2852928"/>
-            <a:ext cx="10058400" cy="310896"/>
-          </a:xfrm>
-          <a:prstGeom prst="rect">
-            <a:avLst/>
-          </a:prstGeom>
-          <a:noFill/>
-        </p:spPr>
-        <p:txBody>
-          <a:bodyPr wrap="square">
-            <a:spAutoFit/>
-          </a:bodyPr>
-          <a:lstStyle/>
-          <a:p>
-            <a:r>
-              <a:rPr sz="1200" b="0">
-                <a:solidFill>
-                  <a:srgbClr val="E8E8EE"/>
-                </a:solidFill>
-                <a:latin typeface="Consolas"/>
-              </a:rPr>
-              <a:t>ma7 = s.rolling(7, center=True).mean()   # 추세 + 노이즈 제거</a:t>
-            </a:r>
-          </a:p>
-        </p:txBody>
-      </p:sp>
-      <p:sp>
-        <p:nvSpPr>
-          <p:cNvPr id="11" name="TextBox 10"/>
-          <p:cNvSpPr txBox="1"/>
-          <p:nvPr/>
-        </p:nvSpPr>
-        <p:spPr>
-          <a:xfrm>
-            <a:off x="731520" y="3383280"/>
-            <a:ext cx="10789920" cy="320040"/>
-          </a:xfrm>
-          <a:prstGeom prst="rect">
-            <a:avLst/>
-          </a:prstGeom>
-          <a:noFill/>
-        </p:spPr>
-        <p:txBody>
-          <a:bodyPr wrap="square">
-            <a:spAutoFit/>
-          </a:bodyPr>
-          <a:lstStyle/>
-          <a:p>
-            <a:r>
-              <a:rPr sz="1350" b="1">
-                <a:solidFill>
-                  <a:srgbClr val="E1306C"/>
-                </a:solidFill>
-                <a:latin typeface="맑은 고딕"/>
-              </a:rPr>
-              <a:t>●  1차 차분으로 정상화 (ARIMA의 d=1)</a:t>
-            </a:r>
-          </a:p>
-        </p:txBody>
-      </p:sp>
-      <p:sp>
-        <p:nvSpPr>
-          <p:cNvPr id="12" name="Rectangle 11"/>
-          <p:cNvSpPr/>
-          <p:nvPr/>
-        </p:nvSpPr>
-        <p:spPr>
-          <a:xfrm>
-            <a:off x="914400" y="3767328"/>
-            <a:ext cx="10424160" cy="713232"/>
-          </a:xfrm>
-          <a:prstGeom prst="rect">
-            <a:avLst/>
-          </a:prstGeom>
-          <a:solidFill>
-            <a:srgbClr val="2B2B33"/>
-          </a:solidFill>
-          <a:ln>
-            <a:noFill/>
-          </a:ln>
-          <a:effectLst/>
-        </p:spPr>
-        <p:style>
-          <a:lnRef idx="1">
-            <a:schemeClr val="accent1"/>
-          </a:lnRef>
-          <a:fillRef idx="3">
-            <a:schemeClr val="accent1"/>
-          </a:fillRef>
-          <a:effectRef idx="2">
-            <a:schemeClr val="accent1"/>
-          </a:effectRef>
-          <a:fontRef idx="minor">
-            <a:schemeClr val="lt1"/>
-          </a:fontRef>
-        </p:style>
-        <p:txBody>
-          <a:bodyPr rtlCol="0" anchor="ctr"/>
-          <a:lstStyle/>
-          <a:p>
-            <a:pPr algn="ctr"/>
-          </a:p>
-        </p:txBody>
-      </p:sp>
-      <p:sp>
-        <p:nvSpPr>
-          <p:cNvPr id="13" name="TextBox 12"/>
-          <p:cNvSpPr txBox="1"/>
-          <p:nvPr/>
-        </p:nvSpPr>
-        <p:spPr>
-          <a:xfrm>
-            <a:off x="1143000" y="3858768"/>
-            <a:ext cx="10058400" cy="566928"/>
-          </a:xfrm>
-          <a:prstGeom prst="rect">
-            <a:avLst/>
-          </a:prstGeom>
-          <a:noFill/>
-        </p:spPr>
-        <p:txBody>
-          <a:bodyPr wrap="square">
-            <a:spAutoFit/>
-          </a:bodyPr>
-          <a:lstStyle/>
-          <a:p>
-            <a:r>
-              <a:rPr sz="1200" b="0">
-                <a:solidFill>
-                  <a:srgbClr val="E8E8EE"/>
-                </a:solidFill>
-                <a:latin typeface="Consolas"/>
-              </a:rPr>
-              <a:t>diff = s.diff()                          # X_t - X_{t-1}</a:t>
-            </a:r>
-          </a:p>
-          <a:p>
-            <a:r>
-              <a:rPr sz="1200" b="0">
-                <a:solidFill>
-                  <a:srgbClr val="E8E8EE"/>
-                </a:solidFill>
-                <a:latin typeface="Consolas"/>
-              </a:rPr>
-              <a:t>diff.rolling(28).mean()                  # 평균이 0에 붙는지 진단</a:t>
-            </a:r>
-          </a:p>
-        </p:txBody>
-      </p:sp>
-      <p:sp>
-        <p:nvSpPr>
-          <p:cNvPr id="14" name="TextBox 13"/>
-          <p:cNvSpPr txBox="1"/>
-          <p:nvPr/>
-        </p:nvSpPr>
-        <p:spPr>
-          <a:xfrm>
-            <a:off x="731520" y="4645152"/>
-            <a:ext cx="10789920" cy="320040"/>
-          </a:xfrm>
-          <a:prstGeom prst="rect">
-            <a:avLst/>
-          </a:prstGeom>
-          <a:noFill/>
-        </p:spPr>
-        <p:txBody>
-          <a:bodyPr wrap="square">
-            <a:spAutoFit/>
-          </a:bodyPr>
-          <a:lstStyle/>
-          <a:p>
-            <a:r>
-              <a:rPr sz="1350" b="1">
-                <a:solidFill>
-                  <a:srgbClr val="E1306C"/>
-                </a:solidFill>
-                <a:latin typeface="맑은 고딕"/>
-              </a:rPr>
-              <a:t>●  가법 분해 — 추세는 이동평균, 계절은 '같은 요일끼리 평균'</a:t>
-            </a:r>
-          </a:p>
-        </p:txBody>
-      </p:sp>
-      <p:sp>
-        <p:nvSpPr>
-          <p:cNvPr id="15" name="Rectangle 14"/>
-          <p:cNvSpPr/>
-          <p:nvPr/>
-        </p:nvSpPr>
-        <p:spPr>
-          <a:xfrm>
-            <a:off x="914400" y="5029200"/>
-            <a:ext cx="10424160" cy="969264"/>
-          </a:xfrm>
-          <a:prstGeom prst="rect">
-            <a:avLst/>
-          </a:prstGeom>
-          <a:solidFill>
-            <a:srgbClr val="2B2B33"/>
-          </a:solidFill>
-          <a:ln>
-            <a:noFill/>
-          </a:ln>
-          <a:effectLst/>
-        </p:spPr>
-        <p:style>
-          <a:lnRef idx="1">
-            <a:schemeClr val="accent1"/>
-          </a:lnRef>
-          <a:fillRef idx="3">
-            <a:schemeClr val="accent1"/>
-          </a:fillRef>
-          <a:effectRef idx="2">
-            <a:schemeClr val="accent1"/>
-          </a:effectRef>
-          <a:fontRef idx="minor">
-            <a:schemeClr val="lt1"/>
-          </a:fontRef>
-        </p:style>
-        <p:txBody>
-          <a:bodyPr rtlCol="0" anchor="ctr"/>
-          <a:lstStyle/>
-          <a:p>
-            <a:pPr algn="ctr"/>
-          </a:p>
-        </p:txBody>
-      </p:sp>
-      <p:sp>
-        <p:nvSpPr>
-          <p:cNvPr id="16" name="TextBox 15"/>
-          <p:cNvSpPr txBox="1"/>
-          <p:nvPr/>
-        </p:nvSpPr>
-        <p:spPr>
-          <a:xfrm>
-            <a:off x="1143000" y="5120640"/>
-            <a:ext cx="10058400" cy="822960"/>
-          </a:xfrm>
-          <a:prstGeom prst="rect">
-            <a:avLst/>
-          </a:prstGeom>
-          <a:noFill/>
-        </p:spPr>
-        <p:txBody>
-          <a:bodyPr wrap="square">
-            <a:spAutoFit/>
-          </a:bodyPr>
-          <a:lstStyle/>
-          <a:p>
-            <a:r>
-              <a:rPr sz="1200" b="0">
-                <a:solidFill>
-                  <a:srgbClr val="E8E8EE"/>
-                </a:solidFill>
-                <a:latin typeface="Consolas"/>
-              </a:rPr>
-              <a:t>trend    = s.rolling(7, center=True).mean()</a:t>
-            </a:r>
-          </a:p>
-          <a:p>
-            <a:r>
-              <a:rPr sz="1200" b="0">
-                <a:solidFill>
-                  <a:srgbClr val="E8E8EE"/>
-                </a:solidFill>
-                <a:latin typeface="Consolas"/>
-              </a:rPr>
-              <a:t>seasonal = (s - trend).groupby(s.index.weekday).transform("mean")</a:t>
-            </a:r>
-          </a:p>
-          <a:p>
-            <a:r>
-              <a:rPr sz="1200" b="0">
-                <a:solidFill>
-                  <a:srgbClr val="E8E8EE"/>
-                </a:solidFill>
-                <a:latin typeface="Consolas"/>
-              </a:rPr>
-              <a:t>residual = s - trend - seasonal          # 백색잡음이면 성공</a:t>
-            </a:r>
-          </a:p>
-        </p:txBody>
-      </p:sp>
-      <p:sp>
-        <p:nvSpPr>
-          <p:cNvPr id="17" name="Rectangle 16"/>
-          <p:cNvSpPr/>
-          <p:nvPr/>
-        </p:nvSpPr>
-        <p:spPr>
-          <a:xfrm>
-            <a:off x="0" y="6565392"/>
-            <a:ext cx="12191695" cy="292608"/>
+            <a:off x="685800" y="1371600"/>
+            <a:ext cx="10789920" cy="822960"/>
           </a:xfrm>
           <a:prstGeom prst="rect">
             <a:avLst/>
@@ -10882,7 +10330,268 @@
       </p:sp>
       <p:sp>
         <p:nvSpPr>
-          <p:cNvPr id="18" name="TextBox 17"/>
+          <p:cNvPr id="6" name="TextBox 5"/>
+          <p:cNvSpPr txBox="1"/>
+          <p:nvPr/>
+        </p:nvSpPr>
+        <p:spPr>
+          <a:xfrm>
+            <a:off x="914400" y="1481328"/>
+            <a:ext cx="10332720" cy="640080"/>
+          </a:xfrm>
+          <a:prstGeom prst="rect">
+            <a:avLst/>
+          </a:prstGeom>
+          <a:noFill/>
+        </p:spPr>
+        <p:txBody>
+          <a:bodyPr wrap="square" anchor="ctr">
+            <a:spAutoFit/>
+          </a:bodyPr>
+          <a:lstStyle/>
+          <a:p>
+            <a:r>
+              <a:rPr sz="1500" b="1">
+                <a:solidFill>
+                  <a:srgbClr val="222222"/>
+                </a:solidFill>
+                <a:latin typeface="맑은 고딕"/>
+              </a:rPr>
+              <a:t>시계열 인사이트 → 게시물 전략: 무엇을(태그), 언제(요일), 어떻게(조합)</a:t>
+            </a:r>
+          </a:p>
+        </p:txBody>
+      </p:sp>
+      <p:sp>
+        <p:nvSpPr>
+          <p:cNvPr id="7" name="TextBox 6"/>
+          <p:cNvSpPr txBox="1"/>
+          <p:nvPr/>
+        </p:nvSpPr>
+        <p:spPr>
+          <a:xfrm>
+            <a:off x="822960" y="2514600"/>
+            <a:ext cx="10607040" cy="4206240"/>
+          </a:xfrm>
+          <a:prstGeom prst="rect">
+            <a:avLst/>
+          </a:prstGeom>
+          <a:noFill/>
+        </p:spPr>
+        <p:txBody>
+          <a:bodyPr wrap="square">
+            <a:spAutoFit/>
+          </a:bodyPr>
+          <a:lstStyle/>
+          <a:p>
+            <a:pPr>
+              <a:spcAft>
+                <a:spcPts val="1000"/>
+              </a:spcAft>
+            </a:pPr>
+            <a:r>
+              <a:rPr sz="1650" b="1">
+                <a:solidFill>
+                  <a:srgbClr val="E1306C"/>
+                </a:solidFill>
+                <a:latin typeface="맑은 고딕"/>
+              </a:rPr>
+              <a:t>●  주력 태그</a:t>
+            </a:r>
+          </a:p>
+          <a:p>
+            <a:pPr>
+              <a:spcAft>
+                <a:spcPts val="1300"/>
+              </a:spcAft>
+            </a:pPr>
+            <a:r>
+              <a:rPr sz="1350" b="0">
+                <a:solidFill>
+                  <a:srgbClr val="6B6B6B"/>
+                </a:solidFill>
+                <a:latin typeface="맑은 고딕"/>
+              </a:rPr>
+              <a:t>     #등산 #클라이밍 중심 콘텐츠 — 상승 모멘텀 구간에 게시해 노출 탄력 확보</a:t>
+            </a:r>
+          </a:p>
+          <a:p>
+            <a:pPr>
+              <a:spcAft>
+                <a:spcPts val="1000"/>
+              </a:spcAft>
+            </a:pPr>
+            <a:r>
+              <a:rPr sz="1650" b="1">
+                <a:solidFill>
+                  <a:srgbClr val="E1306C"/>
+                </a:solidFill>
+                <a:latin typeface="맑은 고딕"/>
+              </a:rPr>
+              <a:t>●  게시 타이밍</a:t>
+            </a:r>
+          </a:p>
+          <a:p>
+            <a:pPr>
+              <a:spcAft>
+                <a:spcPts val="1300"/>
+              </a:spcAft>
+            </a:pPr>
+            <a:r>
+              <a:rPr sz="1350" b="0">
+                <a:solidFill>
+                  <a:srgbClr val="6B6B6B"/>
+                </a:solidFill>
+                <a:latin typeface="맑은 고딕"/>
+              </a:rPr>
+              <a:t>     아웃도어 태그는 금~토 오전(주말 피크 직전), #다이어트는 일 저녁~월 오전('월요일 결심' 수요 선점)</a:t>
+            </a:r>
+          </a:p>
+          <a:p>
+            <a:pPr>
+              <a:spcAft>
+                <a:spcPts val="1000"/>
+              </a:spcAft>
+            </a:pPr>
+            <a:r>
+              <a:rPr sz="1650" b="1">
+                <a:solidFill>
+                  <a:srgbClr val="E1306C"/>
+                </a:solidFill>
+                <a:latin typeface="맑은 고딕"/>
+              </a:rPr>
+              <a:t>●  태그 조합</a:t>
+            </a:r>
+          </a:p>
+          <a:p>
+            <a:pPr>
+              <a:spcAft>
+                <a:spcPts val="1300"/>
+              </a:spcAft>
+            </a:pPr>
+            <a:r>
+              <a:rPr sz="1350" b="0">
+                <a:solidFill>
+                  <a:srgbClr val="6B6B6B"/>
+                </a:solidFill>
+                <a:latin typeface="맑은 고딕"/>
+              </a:rPr>
+              <a:t>     상승 태그 + 안정 태그 묶기: #등산 × #다이어트(여름 준비), #클라이밍 × #카페(실내 연계)</a:t>
+            </a:r>
+          </a:p>
+          <a:p>
+            <a:pPr>
+              <a:spcAft>
+                <a:spcPts val="1000"/>
+              </a:spcAft>
+            </a:pPr>
+            <a:r>
+              <a:rPr sz="1650" b="1">
+                <a:solidFill>
+                  <a:srgbClr val="E1306C"/>
+                </a:solidFill>
+                <a:latin typeface="맑은 고딕"/>
+              </a:rPr>
+              <a:t>●  리스크 관리</a:t>
+            </a:r>
+          </a:p>
+          <a:p>
+            <a:pPr>
+              <a:spcAft>
+                <a:spcPts val="1300"/>
+              </a:spcAft>
+            </a:pPr>
+            <a:r>
+              <a:rPr sz="1350" b="0">
+                <a:solidFill>
+                  <a:srgbClr val="6B6B6B"/>
+                </a:solidFill>
+                <a:latin typeface="맑은 고딕"/>
+              </a:rPr>
+              <a:t>     #피크닉·#캠핑은 하락 전환 — 신규 기획 보류, 기존 콘텐츠는 내년 3~4월 재활용 예약</a:t>
+            </a:r>
+          </a:p>
+          <a:p>
+            <a:pPr>
+              <a:spcAft>
+                <a:spcPts val="1000"/>
+              </a:spcAft>
+            </a:pPr>
+            <a:r>
+              <a:rPr sz="1650" b="1">
+                <a:solidFill>
+                  <a:srgbClr val="E1306C"/>
+                </a:solidFill>
+                <a:latin typeface="맑은 고딕"/>
+              </a:rPr>
+              <a:t>●  운영 루프</a:t>
+            </a:r>
+          </a:p>
+          <a:p>
+            <a:pPr>
+              <a:spcAft>
+                <a:spcPts val="1300"/>
+              </a:spcAft>
+            </a:pPr>
+            <a:r>
+              <a:rPr sz="1350" b="0">
+                <a:solidFill>
+                  <a:srgbClr val="6B6B6B"/>
+                </a:solidFill>
+                <a:latin typeface="맑은 고딕"/>
+              </a:rPr>
+              <a:t>     데이터랩 재수집(주 1회) → 모멘텀 갱신 → 태그 포트폴리오 리밸런싱</a:t>
+            </a:r>
+          </a:p>
+        </p:txBody>
+      </p:sp>
+      <p:sp>
+        <p:nvSpPr>
+          <p:cNvPr id="8" name="Rectangle 7"/>
+          <p:cNvSpPr/>
+          <p:nvPr/>
+        </p:nvSpPr>
+        <p:spPr>
+          <a:xfrm>
+            <a:off x="0" y="6565392"/>
+            <a:ext cx="12191695" cy="292608"/>
+          </a:xfrm>
+          <a:prstGeom prst="rect">
+            <a:avLst/>
+          </a:prstGeom>
+          <a:solidFill>
+            <a:srgbClr val="F2F2F4"/>
+          </a:solidFill>
+          <a:ln>
+            <a:noFill/>
+          </a:ln>
+          <a:effectLst/>
+        </p:spPr>
+        <p:style>
+          <a:lnRef idx="1">
+            <a:schemeClr val="accent1"/>
+          </a:lnRef>
+          <a:fillRef idx="3">
+            <a:schemeClr val="accent1"/>
+          </a:fillRef>
+          <a:effectRef idx="2">
+            <a:schemeClr val="accent1"/>
+          </a:effectRef>
+          <a:fontRef idx="minor">
+            <a:schemeClr val="lt1"/>
+          </a:fontRef>
+        </p:style>
+        <p:txBody>
+          <a:bodyPr rtlCol="0" anchor="ctr"/>
+          <a:lstStyle/>
+          <a:p>
+            <a:pPr algn="ctr"/>
+          </a:p>
+        </p:txBody>
+      </p:sp>
+      <p:sp>
+        <p:nvSpPr>
+          <p:cNvPr id="9" name="TextBox 8"/>
           <p:cNvSpPr txBox="1"/>
           <p:nvPr/>
         </p:nvSpPr>
@@ -10916,7 +10625,7 @@
       </p:sp>
       <p:sp>
         <p:nvSpPr>
-          <p:cNvPr id="19" name="TextBox 18"/>
+          <p:cNvPr id="10" name="TextBox 9"/>
           <p:cNvSpPr txBox="1"/>
           <p:nvPr/>
         </p:nvSpPr>
@@ -11040,7 +10749,7 @@
                 </a:solidFill>
                 <a:latin typeface="Segoe UI"/>
               </a:rPr>
-              <a:t>08 · CODE</a:t>
+              <a:t>07 · OUR ACCOUNT</a:t>
             </a:r>
           </a:p>
         </p:txBody>
@@ -11074,45 +10783,35 @@
                 </a:solidFill>
                 <a:latin typeface="맑은 고딕"/>
               </a:rPr>
-              <a:t>핵심 코드 ②  ACF → 예측</a:t>
-            </a:r>
-          </a:p>
-        </p:txBody>
-      </p:sp>
-      <p:sp>
-        <p:nvSpPr>
-          <p:cNvPr id="5" name="TextBox 4"/>
-          <p:cNvSpPr txBox="1"/>
-          <p:nvPr/>
-        </p:nvSpPr>
-        <p:spPr>
-          <a:xfrm>
-            <a:off x="731520" y="1371600"/>
-            <a:ext cx="10789920" cy="320040"/>
-          </a:xfrm>
-          <a:prstGeom prst="rect">
-            <a:avLst/>
-          </a:prstGeom>
-          <a:noFill/>
-        </p:spPr>
-        <p:txBody>
-          <a:bodyPr wrap="square">
-            <a:spAutoFit/>
-          </a:bodyPr>
-          <a:lstStyle/>
-          <a:p>
-            <a:r>
-              <a:rPr sz="1350" b="1">
-                <a:solidFill>
-                  <a:srgbClr val="E1306C"/>
-                </a:solidFill>
-                <a:latin typeface="맑은 고딕"/>
-              </a:rPr>
-              <a:t>●  표본 ACF 직접 구현 — ρ(k) = γ(k)/γ(0)</a:t>
-            </a:r>
-          </a:p>
-        </p:txBody>
-      </p:sp>
+              <a:t>되돌아온 질문: 우리 계정은 어떻게 될까</a:t>
+            </a:r>
+          </a:p>
+        </p:txBody>
+      </p:sp>
+      <p:pic>
+        <p:nvPicPr>
+          <p:cNvPr id="5" name="Picture 4" descr="10_account_decomp.png"/>
+          <p:cNvPicPr>
+            <a:picLocks noChangeAspect="1"/>
+          </p:cNvPicPr>
+          <p:nvPr/>
+        </p:nvPicPr>
+        <p:blipFill>
+          <a:blip r:embed="rId2"/>
+          <a:stretch>
+            <a:fillRect/>
+          </a:stretch>
+        </p:blipFill>
+        <p:spPr>
+          <a:xfrm>
+            <a:off x="502920" y="1325880"/>
+            <a:ext cx="7772400" cy="4992866"/>
+          </a:xfrm>
+          <a:prstGeom prst="rect">
+            <a:avLst/>
+          </a:prstGeom>
+        </p:spPr>
+      </p:pic>
       <p:sp>
         <p:nvSpPr>
           <p:cNvPr id="6" name="Rectangle 5"/>
@@ -11121,365 +10820,8 @@
         </p:nvSpPr>
         <p:spPr>
           <a:xfrm>
-            <a:off x="914400" y="1755648"/>
-            <a:ext cx="10424160" cy="969264"/>
-          </a:xfrm>
-          <a:prstGeom prst="rect">
-            <a:avLst/>
-          </a:prstGeom>
-          <a:solidFill>
-            <a:srgbClr val="2B2B33"/>
-          </a:solidFill>
-          <a:ln>
-            <a:noFill/>
-          </a:ln>
-          <a:effectLst/>
-        </p:spPr>
-        <p:style>
-          <a:lnRef idx="1">
-            <a:schemeClr val="accent1"/>
-          </a:lnRef>
-          <a:fillRef idx="3">
-            <a:schemeClr val="accent1"/>
-          </a:fillRef>
-          <a:effectRef idx="2">
-            <a:schemeClr val="accent1"/>
-          </a:effectRef>
-          <a:fontRef idx="minor">
-            <a:schemeClr val="lt1"/>
-          </a:fontRef>
-        </p:style>
-        <p:txBody>
-          <a:bodyPr rtlCol="0" anchor="ctr"/>
-          <a:lstStyle/>
-          <a:p>
-            <a:pPr algn="ctr"/>
-          </a:p>
-        </p:txBody>
-      </p:sp>
-      <p:sp>
-        <p:nvSpPr>
-          <p:cNvPr id="7" name="TextBox 6"/>
-          <p:cNvSpPr txBox="1"/>
-          <p:nvPr/>
-        </p:nvSpPr>
-        <p:spPr>
-          <a:xfrm>
-            <a:off x="1143000" y="1847088"/>
-            <a:ext cx="10058400" cy="822960"/>
-          </a:xfrm>
-          <a:prstGeom prst="rect">
-            <a:avLst/>
-          </a:prstGeom>
-          <a:noFill/>
-        </p:spPr>
-        <p:txBody>
-          <a:bodyPr wrap="square">
-            <a:spAutoFit/>
-          </a:bodyPr>
-          <a:lstStyle/>
-          <a:p>
-            <a:r>
-              <a:rPr sz="1200" b="0">
-                <a:solidFill>
-                  <a:srgbClr val="E8E8EE"/>
-                </a:solidFill>
-                <a:latin typeface="Consolas"/>
-              </a:rPr>
-              <a:t>x = x - x.mean()</a:t>
-            </a:r>
-          </a:p>
-          <a:p>
-            <a:r>
-              <a:rPr sz="1200" b="0">
-                <a:solidFill>
-                  <a:srgbClr val="E8E8EE"/>
-                </a:solidFill>
-                <a:latin typeface="Consolas"/>
-              </a:rPr>
-              <a:t>rho_k = np.dot(x[:n-k], x[k:]) / np.dot(x, x)</a:t>
-            </a:r>
-          </a:p>
-          <a:p>
-            <a:r>
-              <a:rPr sz="1200" b="0">
-                <a:solidFill>
-                  <a:srgbClr val="E8E8EE"/>
-                </a:solidFill>
-                <a:latin typeface="Consolas"/>
-              </a:rPr>
-              <a:t>band  = 1.96 / np.sqrt(n)                # 백색잡음 95% 한계</a:t>
-            </a:r>
-          </a:p>
-        </p:txBody>
-      </p:sp>
-      <p:sp>
-        <p:nvSpPr>
-          <p:cNvPr id="8" name="TextBox 7"/>
-          <p:cNvSpPr txBox="1"/>
-          <p:nvPr/>
-        </p:nvSpPr>
-        <p:spPr>
-          <a:xfrm>
-            <a:off x="731520" y="2889504"/>
-            <a:ext cx="10789920" cy="320040"/>
-          </a:xfrm>
-          <a:prstGeom prst="rect">
-            <a:avLst/>
-          </a:prstGeom>
-          <a:noFill/>
-        </p:spPr>
-        <p:txBody>
-          <a:bodyPr wrap="square">
-            <a:spAutoFit/>
-          </a:bodyPr>
-          <a:lstStyle/>
-          <a:p>
-            <a:r>
-              <a:rPr sz="1350" b="1">
-                <a:solidFill>
-                  <a:srgbClr val="E1306C"/>
-                </a:solidFill>
-                <a:latin typeface="맑은 고딕"/>
-              </a:rPr>
-              <a:t>●  선형추세 적합 (최소제곱) + 요일 더미 계절성</a:t>
-            </a:r>
-          </a:p>
-        </p:txBody>
-      </p:sp>
-      <p:sp>
-        <p:nvSpPr>
-          <p:cNvPr id="9" name="Rectangle 8"/>
-          <p:cNvSpPr/>
-          <p:nvPr/>
-        </p:nvSpPr>
-        <p:spPr>
-          <a:xfrm>
-            <a:off x="914400" y="3273552"/>
-            <a:ext cx="10424160" cy="969264"/>
-          </a:xfrm>
-          <a:prstGeom prst="rect">
-            <a:avLst/>
-          </a:prstGeom>
-          <a:solidFill>
-            <a:srgbClr val="2B2B33"/>
-          </a:solidFill>
-          <a:ln>
-            <a:noFill/>
-          </a:ln>
-          <a:effectLst/>
-        </p:spPr>
-        <p:style>
-          <a:lnRef idx="1">
-            <a:schemeClr val="accent1"/>
-          </a:lnRef>
-          <a:fillRef idx="3">
-            <a:schemeClr val="accent1"/>
-          </a:fillRef>
-          <a:effectRef idx="2">
-            <a:schemeClr val="accent1"/>
-          </a:effectRef>
-          <a:fontRef idx="minor">
-            <a:schemeClr val="lt1"/>
-          </a:fontRef>
-        </p:style>
-        <p:txBody>
-          <a:bodyPr rtlCol="0" anchor="ctr"/>
-          <a:lstStyle/>
-          <a:p>
-            <a:pPr algn="ctr"/>
-          </a:p>
-        </p:txBody>
-      </p:sp>
-      <p:sp>
-        <p:nvSpPr>
-          <p:cNvPr id="10" name="TextBox 9"/>
-          <p:cNvSpPr txBox="1"/>
-          <p:nvPr/>
-        </p:nvSpPr>
-        <p:spPr>
-          <a:xfrm>
-            <a:off x="1143000" y="3364992"/>
-            <a:ext cx="10058400" cy="822960"/>
-          </a:xfrm>
-          <a:prstGeom prst="rect">
-            <a:avLst/>
-          </a:prstGeom>
-          <a:noFill/>
-        </p:spPr>
-        <p:txBody>
-          <a:bodyPr wrap="square">
-            <a:spAutoFit/>
-          </a:bodyPr>
-          <a:lstStyle/>
-          <a:p>
-            <a:r>
-              <a:rPr sz="1200" b="0">
-                <a:solidFill>
-                  <a:srgbClr val="E8E8EE"/>
-                </a:solidFill>
-                <a:latin typeface="Consolas"/>
-              </a:rPr>
-              <a:t>coef = np.polyfit(t, s.values, 1)        # 기울기·절편</a:t>
-            </a:r>
-          </a:p>
-          <a:p>
-            <a:r>
-              <a:rPr sz="1200" b="0">
-                <a:solidFill>
-                  <a:srgbClr val="E8E8EE"/>
-                </a:solidFill>
-                <a:latin typeface="Consolas"/>
-              </a:rPr>
-              <a:t>seasonal = pd.Series(s.values - np.polyval(coef, t)) \</a:t>
-            </a:r>
-          </a:p>
-          <a:p>
-            <a:r>
-              <a:rPr sz="1200" b="0">
-                <a:solidFill>
-                  <a:srgbClr val="E8E8EE"/>
-                </a:solidFill>
-                <a:latin typeface="Consolas"/>
-              </a:rPr>
-              <a:t>             .groupby(s.index.weekday).mean()</a:t>
-            </a:r>
-          </a:p>
-        </p:txBody>
-      </p:sp>
-      <p:sp>
-        <p:nvSpPr>
-          <p:cNvPr id="11" name="TextBox 10"/>
-          <p:cNvSpPr txBox="1"/>
-          <p:nvPr/>
-        </p:nvSpPr>
-        <p:spPr>
-          <a:xfrm>
-            <a:off x="731520" y="4407408"/>
-            <a:ext cx="10789920" cy="320040"/>
-          </a:xfrm>
-          <a:prstGeom prst="rect">
-            <a:avLst/>
-          </a:prstGeom>
-          <a:noFill/>
-        </p:spPr>
-        <p:txBody>
-          <a:bodyPr wrap="square">
-            <a:spAutoFit/>
-          </a:bodyPr>
-          <a:lstStyle/>
-          <a:p>
-            <a:r>
-              <a:rPr sz="1350" b="1">
-                <a:solidFill>
-                  <a:srgbClr val="E1306C"/>
-                </a:solidFill>
-                <a:latin typeface="맑은 고딕"/>
-              </a:rPr>
-              <a:t>●  14일 외삽 + 95% 예측구간 (잔차 표준편차 기반)</a:t>
-            </a:r>
-          </a:p>
-        </p:txBody>
-      </p:sp>
-      <p:sp>
-        <p:nvSpPr>
-          <p:cNvPr id="12" name="Rectangle 11"/>
-          <p:cNvSpPr/>
-          <p:nvPr/>
-        </p:nvSpPr>
-        <p:spPr>
-          <a:xfrm>
-            <a:off x="914400" y="4791456"/>
-            <a:ext cx="10424160" cy="713232"/>
-          </a:xfrm>
-          <a:prstGeom prst="rect">
-            <a:avLst/>
-          </a:prstGeom>
-          <a:solidFill>
-            <a:srgbClr val="2B2B33"/>
-          </a:solidFill>
-          <a:ln>
-            <a:noFill/>
-          </a:ln>
-          <a:effectLst/>
-        </p:spPr>
-        <p:style>
-          <a:lnRef idx="1">
-            <a:schemeClr val="accent1"/>
-          </a:lnRef>
-          <a:fillRef idx="3">
-            <a:schemeClr val="accent1"/>
-          </a:fillRef>
-          <a:effectRef idx="2">
-            <a:schemeClr val="accent1"/>
-          </a:effectRef>
-          <a:fontRef idx="minor">
-            <a:schemeClr val="lt1"/>
-          </a:fontRef>
-        </p:style>
-        <p:txBody>
-          <a:bodyPr rtlCol="0" anchor="ctr"/>
-          <a:lstStyle/>
-          <a:p>
-            <a:pPr algn="ctr"/>
-          </a:p>
-        </p:txBody>
-      </p:sp>
-      <p:sp>
-        <p:nvSpPr>
-          <p:cNvPr id="13" name="TextBox 12"/>
-          <p:cNvSpPr txBox="1"/>
-          <p:nvPr/>
-        </p:nvSpPr>
-        <p:spPr>
-          <a:xfrm>
-            <a:off x="1143000" y="4882896"/>
-            <a:ext cx="10058400" cy="566928"/>
-          </a:xfrm>
-          <a:prstGeom prst="rect">
-            <a:avLst/>
-          </a:prstGeom>
-          <a:noFill/>
-        </p:spPr>
-        <p:txBody>
-          <a:bodyPr wrap="square">
-            <a:spAutoFit/>
-          </a:bodyPr>
-          <a:lstStyle/>
-          <a:p>
-            <a:r>
-              <a:rPr sz="1200" b="0">
-                <a:solidFill>
-                  <a:srgbClr val="E8E8EE"/>
-                </a:solidFill>
-                <a:latin typeface="Consolas"/>
-              </a:rPr>
-              <a:t>future = np.polyval(coef, future_t) + seasonal[future_weekday]</a:t>
-            </a:r>
-          </a:p>
-          <a:p>
-            <a:r>
-              <a:rPr sz="1200" b="0">
-                <a:solidFill>
-                  <a:srgbClr val="E8E8EE"/>
-                </a:solidFill>
-                <a:latin typeface="Consolas"/>
-              </a:rPr>
-              <a:t>lo, hi = future - 1.96*resid_std, future + 1.96*resid_std</a:t>
-            </a:r>
-          </a:p>
-        </p:txBody>
-      </p:sp>
-      <p:sp>
-        <p:nvSpPr>
-          <p:cNvPr id="14" name="Rectangle 13"/>
-          <p:cNvSpPr/>
-          <p:nvPr/>
-        </p:nvSpPr>
-        <p:spPr>
-          <a:xfrm>
-            <a:off x="0" y="6565392"/>
-            <a:ext cx="12191695" cy="292608"/>
+            <a:off x="8458200" y="1325880"/>
+            <a:ext cx="3246120" cy="4937760"/>
           </a:xfrm>
           <a:prstGeom prst="rect">
             <a:avLst/>
@@ -11516,7 +10858,170 @@
       </p:sp>
       <p:sp>
         <p:nvSpPr>
-          <p:cNvPr id="15" name="TextBox 14"/>
+          <p:cNvPr id="7" name="TextBox 6"/>
+          <p:cNvSpPr txBox="1"/>
+          <p:nvPr/>
+        </p:nvSpPr>
+        <p:spPr>
+          <a:xfrm>
+            <a:off x="8659368" y="1508760"/>
+            <a:ext cx="2880360" cy="4663440"/>
+          </a:xfrm>
+          <a:prstGeom prst="rect">
+            <a:avLst/>
+          </a:prstGeom>
+          <a:noFill/>
+        </p:spPr>
+        <p:txBody>
+          <a:bodyPr wrap="square">
+            <a:spAutoFit/>
+          </a:bodyPr>
+          <a:lstStyle/>
+          <a:p>
+            <a:pPr>
+              <a:spcAft>
+                <a:spcPts val="800"/>
+              </a:spcAft>
+            </a:pPr>
+            <a:r>
+              <a:rPr sz="1300" b="1">
+                <a:solidFill>
+                  <a:srgbClr val="833AB4"/>
+                </a:solidFill>
+                <a:latin typeface="맑은 고딕"/>
+              </a:rPr>
+              <a:t>읽는 법</a:t>
+            </a:r>
+          </a:p>
+          <a:p>
+            <a:pPr>
+              <a:spcAft>
+                <a:spcPts val="1000"/>
+              </a:spcAft>
+            </a:pPr>
+            <a:r>
+              <a:rPr sz="1250" b="0">
+                <a:solidFill>
+                  <a:srgbClr val="222222"/>
+                </a:solidFill>
+                <a:latin typeface="맑은 고딕"/>
+              </a:rPr>
+              <a:t>• 가상 계정의 일별 도달을 분해 (※ 교육용 시뮬레이션)</a:t>
+            </a:r>
+          </a:p>
+          <a:p>
+            <a:pPr>
+              <a:spcAft>
+                <a:spcPts val="1000"/>
+              </a:spcAft>
+            </a:pPr>
+            <a:r>
+              <a:rPr sz="1250" b="0">
+                <a:solidFill>
+                  <a:srgbClr val="222222"/>
+                </a:solidFill>
+                <a:latin typeface="맑은 고딕"/>
+              </a:rPr>
+              <a:t>• 추세: 팔로워 성장에 따른 꾸준한 우상향</a:t>
+            </a:r>
+          </a:p>
+          <a:p>
+            <a:pPr>
+              <a:spcAft>
+                <a:spcPts val="1000"/>
+              </a:spcAft>
+            </a:pPr>
+            <a:r>
+              <a:rPr sz="1250" b="0">
+                <a:solidFill>
+                  <a:srgbClr val="222222"/>
+                </a:solidFill>
+                <a:latin typeface="맑은 고딕"/>
+              </a:rPr>
+              <a:t>• 계절: 주말(일) 피크 — 요일 효과</a:t>
+            </a:r>
+          </a:p>
+          <a:p>
+            <a:pPr>
+              <a:spcAft>
+                <a:spcPts val="1000"/>
+              </a:spcAft>
+            </a:pPr>
+            <a:r>
+              <a:rPr sz="1250" b="0">
+                <a:solidFill>
+                  <a:srgbClr val="222222"/>
+                </a:solidFill>
+                <a:latin typeface="맑은 고딕"/>
+              </a:rPr>
+              <a:t>• 바이럴 릴스 1건 = 추세가 아니라 잔차로 포착</a:t>
+            </a:r>
+          </a:p>
+          <a:p>
+            <a:pPr>
+              <a:spcAft>
+                <a:spcPts val="1000"/>
+              </a:spcAft>
+            </a:pPr>
+            <a:r>
+              <a:rPr sz="1250" b="0">
+                <a:solidFill>
+                  <a:srgbClr val="222222"/>
+                </a:solidFill>
+                <a:latin typeface="맑은 고딕"/>
+              </a:rPr>
+              <a:t>• → '한 번 터진 것'과 '꾸준한 성장'은 다른 성분, 분리해야 보임</a:t>
+            </a:r>
+          </a:p>
+        </p:txBody>
+      </p:sp>
+      <p:sp>
+        <p:nvSpPr>
+          <p:cNvPr id="8" name="Rectangle 7"/>
+          <p:cNvSpPr/>
+          <p:nvPr/>
+        </p:nvSpPr>
+        <p:spPr>
+          <a:xfrm>
+            <a:off x="0" y="6565392"/>
+            <a:ext cx="12191695" cy="292608"/>
+          </a:xfrm>
+          <a:prstGeom prst="rect">
+            <a:avLst/>
+          </a:prstGeom>
+          <a:solidFill>
+            <a:srgbClr val="F2F2F4"/>
+          </a:solidFill>
+          <a:ln>
+            <a:noFill/>
+          </a:ln>
+          <a:effectLst/>
+        </p:spPr>
+        <p:style>
+          <a:lnRef idx="1">
+            <a:schemeClr val="accent1"/>
+          </a:lnRef>
+          <a:fillRef idx="3">
+            <a:schemeClr val="accent1"/>
+          </a:fillRef>
+          <a:effectRef idx="2">
+            <a:schemeClr val="accent1"/>
+          </a:effectRef>
+          <a:fontRef idx="minor">
+            <a:schemeClr val="lt1"/>
+          </a:fontRef>
+        </p:style>
+        <p:txBody>
+          <a:bodyPr rtlCol="0" anchor="ctr"/>
+          <a:lstStyle/>
+          <a:p>
+            <a:pPr algn="ctr"/>
+          </a:p>
+        </p:txBody>
+      </p:sp>
+      <p:sp>
+        <p:nvSpPr>
+          <p:cNvPr id="9" name="TextBox 8"/>
           <p:cNvSpPr txBox="1"/>
           <p:nvPr/>
         </p:nvSpPr>
@@ -11550,7 +11055,7 @@
       </p:sp>
       <p:sp>
         <p:nvSpPr>
-          <p:cNvPr id="16" name="TextBox 15"/>
+          <p:cNvPr id="10" name="TextBox 9"/>
           <p:cNvSpPr txBox="1"/>
           <p:nvPr/>
         </p:nvSpPr>
@@ -11674,7 +11179,7 @@
                 </a:solidFill>
                 <a:latin typeface="Segoe UI"/>
               </a:rPr>
-              <a:t>08 · LIMITATIONS</a:t>
+              <a:t>07 · OUR ACCOUNT</a:t>
             </a:r>
           </a:p>
         </p:txBody>
@@ -11708,21 +11213,45 @@
                 </a:solidFill>
                 <a:latin typeface="맑은 고딕"/>
               </a:rPr>
-              <a:t>한계와 재현</a:t>
-            </a:r>
-          </a:p>
-        </p:txBody>
-      </p:sp>
-      <p:sp>
-        <p:nvSpPr>
-          <p:cNvPr id="5" name="Rectangle 4"/>
+              <a:t>우리 계정 14일 예측</a:t>
+            </a:r>
+          </a:p>
+        </p:txBody>
+      </p:sp>
+      <p:pic>
+        <p:nvPicPr>
+          <p:cNvPr id="5" name="Picture 4" descr="11_account_forecast.png"/>
+          <p:cNvPicPr>
+            <a:picLocks noChangeAspect="1"/>
+          </p:cNvPicPr>
+          <p:nvPr/>
+        </p:nvPicPr>
+        <p:blipFill>
+          <a:blip r:embed="rId2"/>
+          <a:stretch>
+            <a:fillRect/>
+          </a:stretch>
+        </p:blipFill>
+        <p:spPr>
+          <a:xfrm>
+            <a:off x="502920" y="1325880"/>
+            <a:ext cx="7772400" cy="3914529"/>
+          </a:xfrm>
+          <a:prstGeom prst="rect">
+            <a:avLst/>
+          </a:prstGeom>
+        </p:spPr>
+      </p:pic>
+      <p:sp>
+        <p:nvSpPr>
+          <p:cNvPr id="6" name="Rectangle 5"/>
           <p:cNvSpPr/>
           <p:nvPr/>
         </p:nvSpPr>
         <p:spPr>
           <a:xfrm>
-            <a:off x="685800" y="1371600"/>
-            <a:ext cx="10789920" cy="822960"/>
+            <a:off x="8458200" y="1325880"/>
+            <a:ext cx="3246120" cy="4937760"/>
           </a:xfrm>
           <a:prstGeom prst="rect">
             <a:avLst/>
@@ -11759,59 +11288,57 @@
       </p:sp>
       <p:sp>
         <p:nvSpPr>
-          <p:cNvPr id="6" name="TextBox 5"/>
-          <p:cNvSpPr txBox="1"/>
-          <p:nvPr/>
-        </p:nvSpPr>
-        <p:spPr>
-          <a:xfrm>
-            <a:off x="914400" y="1481328"/>
-            <a:ext cx="10332720" cy="640080"/>
-          </a:xfrm>
-          <a:prstGeom prst="rect">
-            <a:avLst/>
-          </a:prstGeom>
-          <a:noFill/>
-        </p:spPr>
-        <p:txBody>
-          <a:bodyPr wrap="square" anchor="ctr">
-            <a:spAutoFit/>
-          </a:bodyPr>
-          <a:lstStyle/>
-          <a:p>
-            <a:r>
-              <a:rPr sz="1500" b="1">
+          <p:cNvPr id="7" name="TextBox 6"/>
+          <p:cNvSpPr txBox="1"/>
+          <p:nvPr/>
+        </p:nvSpPr>
+        <p:spPr>
+          <a:xfrm>
+            <a:off x="8659368" y="1508760"/>
+            <a:ext cx="2880360" cy="4663440"/>
+          </a:xfrm>
+          <a:prstGeom prst="rect">
+            <a:avLst/>
+          </a:prstGeom>
+          <a:noFill/>
+        </p:spPr>
+        <p:txBody>
+          <a:bodyPr wrap="square">
+            <a:spAutoFit/>
+          </a:bodyPr>
+          <a:lstStyle/>
+          <a:p>
+            <a:pPr>
+              <a:spcAft>
+                <a:spcPts val="800"/>
+              </a:spcAft>
+            </a:pPr>
+            <a:r>
+              <a:rPr sz="1300" b="1">
+                <a:solidFill>
+                  <a:srgbClr val="833AB4"/>
+                </a:solidFill>
+                <a:latin typeface="맑은 고딕"/>
+              </a:rPr>
+              <a:t>읽는 법</a:t>
+            </a:r>
+          </a:p>
+          <a:p>
+            <a:pPr>
+              <a:spcAft>
+                <a:spcPts val="1000"/>
+              </a:spcAft>
+            </a:pPr>
+            <a:r>
+              <a:rPr sz="1250" b="0">
                 <a:solidFill>
                   <a:srgbClr val="222222"/>
                 </a:solidFill>
                 <a:latin typeface="맑은 고딕"/>
               </a:rPr>
-              <a:t>정직한 캐비앗: 이 분석이 말할 수 있는 것과 없는 것</a:t>
-            </a:r>
-          </a:p>
-        </p:txBody>
-      </p:sp>
-      <p:sp>
-        <p:nvSpPr>
-          <p:cNvPr id="7" name="TextBox 6"/>
-          <p:cNvSpPr txBox="1"/>
-          <p:nvPr/>
-        </p:nvSpPr>
-        <p:spPr>
-          <a:xfrm>
-            <a:off x="822960" y="2514600"/>
-            <a:ext cx="10607040" cy="4206240"/>
-          </a:xfrm>
-          <a:prstGeom prst="rect">
-            <a:avLst/>
-          </a:prstGeom>
-          <a:noFill/>
-        </p:spPr>
-        <p:txBody>
-          <a:bodyPr wrap="square">
-            <a:spAutoFit/>
-          </a:bodyPr>
-          <a:lstStyle/>
+              <a:t>• 분석 기간 도달 +111% 성장</a:t>
+            </a:r>
+          </a:p>
           <a:p>
             <a:pPr>
               <a:spcAft>
@@ -11819,29 +11346,13 @@
               </a:spcAft>
             </a:pPr>
             <a:r>
-              <a:rPr sz="1650" b="1">
-                <a:solidFill>
-                  <a:srgbClr val="E1306C"/>
-                </a:solidFill>
-                <a:latin typeface="맑은 고딕"/>
-              </a:rPr>
-              <a:t>●  프록시 한계</a:t>
-            </a:r>
-          </a:p>
-          <a:p>
-            <a:pPr>
-              <a:spcAft>
-                <a:spcPts val="1300"/>
-              </a:spcAft>
-            </a:pPr>
-            <a:r>
-              <a:rPr sz="1350" b="0">
-                <a:solidFill>
-                  <a:srgbClr val="6B6B6B"/>
-                </a:solidFill>
-                <a:latin typeface="맑은 고딕"/>
-              </a:rPr>
-              <a:t>     네이버 검색량 ≠ 인스타그램 게시량 — '한국 사용자의 주제 관심도'의 대리지표로 해석해야 함</a:t>
+              <a:rPr sz="1250" b="0">
+                <a:solidFill>
+                  <a:srgbClr val="222222"/>
+                </a:solidFill>
+                <a:latin typeface="맑은 고딕"/>
+              </a:rPr>
+              <a:t>• 추세 기울기 +26/일 (양수=성장 지속)</a:t>
             </a:r>
           </a:p>
           <a:p>
@@ -11851,29 +11362,13 @@
               </a:spcAft>
             </a:pPr>
             <a:r>
-              <a:rPr sz="1650" b="1">
-                <a:solidFill>
-                  <a:srgbClr val="E1306C"/>
-                </a:solidFill>
-                <a:latin typeface="맑은 고딕"/>
-              </a:rPr>
-              <a:t>●  상대값 한계</a:t>
-            </a:r>
-          </a:p>
-          <a:p>
-            <a:pPr>
-              <a:spcAft>
-                <a:spcPts val="1300"/>
-              </a:spcAft>
-            </a:pPr>
-            <a:r>
-              <a:rPr sz="1350" b="0">
-                <a:solidFill>
-                  <a:srgbClr val="6B6B6B"/>
-                </a:solidFill>
-                <a:latin typeface="맑은 고딕"/>
-              </a:rPr>
-              <a:t>     데이터랩 ratio는 요청 내 정규화 — 태그 간 절대 규모 비교 불가, 시간 변화·모멘텀 비교만 유효</a:t>
+              <a:rPr sz="1250" b="0">
+                <a:solidFill>
+                  <a:srgbClr val="222222"/>
+                </a:solidFill>
+                <a:latin typeface="맑은 고딕"/>
+              </a:rPr>
+              <a:t>• 바이럴 스파이크가 가라앉아도 기저 추세는 우상향</a:t>
             </a:r>
           </a:p>
           <a:p>
@@ -11883,29 +11378,13 @@
               </a:spcAft>
             </a:pPr>
             <a:r>
-              <a:rPr sz="1650" b="1">
-                <a:solidFill>
-                  <a:srgbClr val="E1306C"/>
-                </a:solidFill>
-                <a:latin typeface="맑은 고딕"/>
-              </a:rPr>
-              <a:t>●  실시간성</a:t>
-            </a:r>
-          </a:p>
-          <a:p>
-            <a:pPr>
-              <a:spcAft>
-                <a:spcPts val="1300"/>
-              </a:spcAft>
-            </a:pPr>
-            <a:r>
-              <a:rPr sz="1350" b="0">
-                <a:solidFill>
-                  <a:srgbClr val="6B6B6B"/>
-                </a:solidFill>
-                <a:latin typeface="맑은 고딕"/>
-              </a:rPr>
-              <a:t>     2026-06-11 수집 스냅샷 — '실시간 스트림'이 아니라 주기 재수집으로 갱신하는 구조 (전일까지 일별 제공)</a:t>
+              <a:rPr sz="1250" b="0">
+                <a:solidFill>
+                  <a:srgbClr val="222222"/>
+                </a:solidFill>
+                <a:latin typeface="맑은 고딕"/>
+              </a:rPr>
+              <a:t>• 예측: 완만한 상승 + 주말 피크 반복</a:t>
             </a:r>
           </a:p>
           <a:p>
@@ -11915,61 +11394,13 @@
               </a:spcAft>
             </a:pPr>
             <a:r>
-              <a:rPr sz="1650" b="1">
-                <a:solidFill>
-                  <a:srgbClr val="E1306C"/>
-                </a:solidFill>
-                <a:latin typeface="맑은 고딕"/>
-              </a:rPr>
-              <a:t>●  모형 한계</a:t>
-            </a:r>
-          </a:p>
-          <a:p>
-            <a:pPr>
-              <a:spcAft>
-                <a:spcPts val="1300"/>
-              </a:spcAft>
-            </a:pPr>
-            <a:r>
-              <a:rPr sz="1350" b="0">
-                <a:solidFill>
-                  <a:srgbClr val="6B6B6B"/>
-                </a:solidFill>
-                <a:latin typeface="맑은 고딕"/>
-              </a:rPr>
-              <a:t>     선형추세+요일 더미는 외생 이벤트(연휴 스파이크)·추세 전환을 늦게 반영 — SARIMA·지수평활이 다음 단계</a:t>
-            </a:r>
-          </a:p>
-          <a:p>
-            <a:pPr>
-              <a:spcAft>
-                <a:spcPts val="1000"/>
-              </a:spcAft>
-            </a:pPr>
-            <a:r>
-              <a:rPr sz="1650" b="1">
-                <a:solidFill>
-                  <a:srgbClr val="E1306C"/>
-                </a:solidFill>
-                <a:latin typeface="맑은 고딕"/>
-              </a:rPr>
-              <a:t>●  재현</a:t>
-            </a:r>
-          </a:p>
-          <a:p>
-            <a:pPr>
-              <a:spcAft>
-                <a:spcPts val="1300"/>
-              </a:spcAft>
-            </a:pPr>
-            <a:r>
-              <a:rPr sz="1350" b="0">
-                <a:solidFill>
-                  <a:srgbClr val="6B6B6B"/>
-                </a:solidFill>
-                <a:latin typeface="맑은 고딕"/>
-              </a:rPr>
-              <a:t>     pip install -r presentation/requirements.txt &amp;&amp; python presentation/build_deck.py — CSV 고정으로 결정론적 재생성</a:t>
+              <a:rPr sz="1250" b="0">
+                <a:solidFill>
+                  <a:srgbClr val="222222"/>
+                </a:solidFill>
+                <a:latin typeface="맑은 고딕"/>
+              </a:rPr>
+              <a:t>• 답: 단발 바이럴에 일희일비 말고 추세 기울기를 보라</a:t>
             </a:r>
           </a:p>
         </p:txBody>
@@ -12083,6 +11514,1900 @@
                 <a:latin typeface="맑은 고딕"/>
               </a:rPr>
               <a:t>21</a:t>
+            </a:r>
+          </a:p>
+        </p:txBody>
+      </p:sp>
+    </p:spTree>
+  </p:cSld>
+  <p:clrMapOvr>
+    <a:masterClrMapping/>
+  </p:clrMapOvr>
+</p:sld>
+</file>
+
+<file path=ppt/slides/slide26.xml><?xml version="1.0" encoding="utf-8"?>
+<p:sld xmlns:a="http://schemas.openxmlformats.org/drawingml/2006/main" xmlns:p="http://schemas.openxmlformats.org/presentationml/2006/main" xmlns:r="http://schemas.openxmlformats.org/officeDocument/2006/relationships">
+  <p:cSld>
+    <p:spTree>
+      <p:nvGrpSpPr>
+        <p:cNvPr id="1" name=""/>
+        <p:cNvGrpSpPr/>
+        <p:nvPr/>
+      </p:nvGrpSpPr>
+      <p:grpSpPr/>
+      <p:sp>
+        <p:nvSpPr>
+          <p:cNvPr id="2" name="Rectangle 1"/>
+          <p:cNvSpPr/>
+          <p:nvPr/>
+        </p:nvSpPr>
+        <p:spPr>
+          <a:xfrm>
+            <a:off x="365760" y="384048"/>
+            <a:ext cx="164592" cy="502920"/>
+          </a:xfrm>
+          <a:prstGeom prst="rect">
+            <a:avLst/>
+          </a:prstGeom>
+          <a:solidFill>
+            <a:srgbClr val="E1306C"/>
+          </a:solidFill>
+          <a:ln>
+            <a:noFill/>
+          </a:ln>
+          <a:effectLst/>
+        </p:spPr>
+        <p:style>
+          <a:lnRef idx="1">
+            <a:schemeClr val="accent1"/>
+          </a:lnRef>
+          <a:fillRef idx="3">
+            <a:schemeClr val="accent1"/>
+          </a:fillRef>
+          <a:effectRef idx="2">
+            <a:schemeClr val="accent1"/>
+          </a:effectRef>
+          <a:fontRef idx="minor">
+            <a:schemeClr val="lt1"/>
+          </a:fontRef>
+        </p:style>
+        <p:txBody>
+          <a:bodyPr rtlCol="0" anchor="ctr"/>
+          <a:lstStyle/>
+          <a:p>
+            <a:pPr algn="ctr"/>
+          </a:p>
+        </p:txBody>
+      </p:sp>
+      <p:sp>
+        <p:nvSpPr>
+          <p:cNvPr id="3" name="TextBox 2"/>
+          <p:cNvSpPr txBox="1"/>
+          <p:nvPr/>
+        </p:nvSpPr>
+        <p:spPr>
+          <a:xfrm>
+            <a:off x="685800" y="256032"/>
+            <a:ext cx="10058400" cy="320040"/>
+          </a:xfrm>
+          <a:prstGeom prst="rect">
+            <a:avLst/>
+          </a:prstGeom>
+          <a:noFill/>
+        </p:spPr>
+        <p:txBody>
+          <a:bodyPr wrap="square">
+            <a:spAutoFit/>
+          </a:bodyPr>
+          <a:lstStyle/>
+          <a:p>
+            <a:r>
+              <a:rPr sz="1100" b="1">
+                <a:solidFill>
+                  <a:srgbClr val="833AB4"/>
+                </a:solidFill>
+                <a:latin typeface="Segoe UI"/>
+              </a:rPr>
+              <a:t>08 · CODE</a:t>
+            </a:r>
+          </a:p>
+        </p:txBody>
+      </p:sp>
+      <p:sp>
+        <p:nvSpPr>
+          <p:cNvPr id="4" name="TextBox 3"/>
+          <p:cNvSpPr txBox="1"/>
+          <p:nvPr/>
+        </p:nvSpPr>
+        <p:spPr>
+          <a:xfrm>
+            <a:off x="658368" y="457200"/>
+            <a:ext cx="10515600" cy="640080"/>
+          </a:xfrm>
+          <a:prstGeom prst="rect">
+            <a:avLst/>
+          </a:prstGeom>
+          <a:noFill/>
+        </p:spPr>
+        <p:txBody>
+          <a:bodyPr wrap="square">
+            <a:spAutoFit/>
+          </a:bodyPr>
+          <a:lstStyle/>
+          <a:p>
+            <a:r>
+              <a:rPr sz="2800" b="1">
+                <a:solidFill>
+                  <a:srgbClr val="222222"/>
+                </a:solidFill>
+                <a:latin typeface="맑은 고딕"/>
+              </a:rPr>
+              <a:t>핵심 코드 ①  데이터 → 평활화 → 차분</a:t>
+            </a:r>
+          </a:p>
+        </p:txBody>
+      </p:sp>
+      <p:sp>
+        <p:nvSpPr>
+          <p:cNvPr id="5" name="TextBox 4"/>
+          <p:cNvSpPr txBox="1"/>
+          <p:nvPr/>
+        </p:nvSpPr>
+        <p:spPr>
+          <a:xfrm>
+            <a:off x="731520" y="1371600"/>
+            <a:ext cx="10789920" cy="320040"/>
+          </a:xfrm>
+          <a:prstGeom prst="rect">
+            <a:avLst/>
+          </a:prstGeom>
+          <a:noFill/>
+        </p:spPr>
+        <p:txBody>
+          <a:bodyPr wrap="square">
+            <a:spAutoFit/>
+          </a:bodyPr>
+          <a:lstStyle/>
+          <a:p>
+            <a:r>
+              <a:rPr sz="1350" b="1">
+                <a:solidFill>
+                  <a:srgbClr val="E1306C"/>
+                </a:solidFill>
+                <a:latin typeface="맑은 고딕"/>
+              </a:rPr>
+              <a:t>●  tidy 패널을 날짜×태그 행렬로 (pandas pivot)</a:t>
+            </a:r>
+          </a:p>
+        </p:txBody>
+      </p:sp>
+      <p:sp>
+        <p:nvSpPr>
+          <p:cNvPr id="6" name="Rectangle 5"/>
+          <p:cNvSpPr/>
+          <p:nvPr/>
+        </p:nvSpPr>
+        <p:spPr>
+          <a:xfrm>
+            <a:off x="914400" y="1755648"/>
+            <a:ext cx="10424160" cy="457200"/>
+          </a:xfrm>
+          <a:prstGeom prst="rect">
+            <a:avLst/>
+          </a:prstGeom>
+          <a:solidFill>
+            <a:srgbClr val="2B2B33"/>
+          </a:solidFill>
+          <a:ln>
+            <a:noFill/>
+          </a:ln>
+          <a:effectLst/>
+        </p:spPr>
+        <p:style>
+          <a:lnRef idx="1">
+            <a:schemeClr val="accent1"/>
+          </a:lnRef>
+          <a:fillRef idx="3">
+            <a:schemeClr val="accent1"/>
+          </a:fillRef>
+          <a:effectRef idx="2">
+            <a:schemeClr val="accent1"/>
+          </a:effectRef>
+          <a:fontRef idx="minor">
+            <a:schemeClr val="lt1"/>
+          </a:fontRef>
+        </p:style>
+        <p:txBody>
+          <a:bodyPr rtlCol="0" anchor="ctr"/>
+          <a:lstStyle/>
+          <a:p>
+            <a:pPr algn="ctr"/>
+          </a:p>
+        </p:txBody>
+      </p:sp>
+      <p:sp>
+        <p:nvSpPr>
+          <p:cNvPr id="7" name="TextBox 6"/>
+          <p:cNvSpPr txBox="1"/>
+          <p:nvPr/>
+        </p:nvSpPr>
+        <p:spPr>
+          <a:xfrm>
+            <a:off x="1143000" y="1847088"/>
+            <a:ext cx="10058400" cy="310896"/>
+          </a:xfrm>
+          <a:prstGeom prst="rect">
+            <a:avLst/>
+          </a:prstGeom>
+          <a:noFill/>
+        </p:spPr>
+        <p:txBody>
+          <a:bodyPr wrap="square">
+            <a:spAutoFit/>
+          </a:bodyPr>
+          <a:lstStyle/>
+          <a:p>
+            <a:r>
+              <a:rPr sz="1200" b="0">
+                <a:solidFill>
+                  <a:srgbClr val="E8E8EE"/>
+                </a:solidFill>
+                <a:latin typeface="Consolas"/>
+              </a:rPr>
+              <a:t>wide = panel.pivot(index="date", columns="hashtag", values="ratio")</a:t>
+            </a:r>
+          </a:p>
+        </p:txBody>
+      </p:sp>
+      <p:sp>
+        <p:nvSpPr>
+          <p:cNvPr id="8" name="TextBox 7"/>
+          <p:cNvSpPr txBox="1"/>
+          <p:nvPr/>
+        </p:nvSpPr>
+        <p:spPr>
+          <a:xfrm>
+            <a:off x="731520" y="2377440"/>
+            <a:ext cx="10789920" cy="320040"/>
+          </a:xfrm>
+          <a:prstGeom prst="rect">
+            <a:avLst/>
+          </a:prstGeom>
+          <a:noFill/>
+        </p:spPr>
+        <p:txBody>
+          <a:bodyPr wrap="square">
+            <a:spAutoFit/>
+          </a:bodyPr>
+          <a:lstStyle/>
+          <a:p>
+            <a:r>
+              <a:rPr sz="1350" b="1">
+                <a:solidFill>
+                  <a:srgbClr val="E1306C"/>
+                </a:solidFill>
+                <a:latin typeface="맑은 고딕"/>
+              </a:rPr>
+              <a:t>●  이동평균 평활화 — 7일 중심 윈도우가 주간 주기를 상쇄</a:t>
+            </a:r>
+          </a:p>
+        </p:txBody>
+      </p:sp>
+      <p:sp>
+        <p:nvSpPr>
+          <p:cNvPr id="9" name="Rectangle 8"/>
+          <p:cNvSpPr/>
+          <p:nvPr/>
+        </p:nvSpPr>
+        <p:spPr>
+          <a:xfrm>
+            <a:off x="914400" y="2761488"/>
+            <a:ext cx="10424160" cy="457200"/>
+          </a:xfrm>
+          <a:prstGeom prst="rect">
+            <a:avLst/>
+          </a:prstGeom>
+          <a:solidFill>
+            <a:srgbClr val="2B2B33"/>
+          </a:solidFill>
+          <a:ln>
+            <a:noFill/>
+          </a:ln>
+          <a:effectLst/>
+        </p:spPr>
+        <p:style>
+          <a:lnRef idx="1">
+            <a:schemeClr val="accent1"/>
+          </a:lnRef>
+          <a:fillRef idx="3">
+            <a:schemeClr val="accent1"/>
+          </a:fillRef>
+          <a:effectRef idx="2">
+            <a:schemeClr val="accent1"/>
+          </a:effectRef>
+          <a:fontRef idx="minor">
+            <a:schemeClr val="lt1"/>
+          </a:fontRef>
+        </p:style>
+        <p:txBody>
+          <a:bodyPr rtlCol="0" anchor="ctr"/>
+          <a:lstStyle/>
+          <a:p>
+            <a:pPr algn="ctr"/>
+          </a:p>
+        </p:txBody>
+      </p:sp>
+      <p:sp>
+        <p:nvSpPr>
+          <p:cNvPr id="10" name="TextBox 9"/>
+          <p:cNvSpPr txBox="1"/>
+          <p:nvPr/>
+        </p:nvSpPr>
+        <p:spPr>
+          <a:xfrm>
+            <a:off x="1143000" y="2852928"/>
+            <a:ext cx="10058400" cy="310896"/>
+          </a:xfrm>
+          <a:prstGeom prst="rect">
+            <a:avLst/>
+          </a:prstGeom>
+          <a:noFill/>
+        </p:spPr>
+        <p:txBody>
+          <a:bodyPr wrap="square">
+            <a:spAutoFit/>
+          </a:bodyPr>
+          <a:lstStyle/>
+          <a:p>
+            <a:r>
+              <a:rPr sz="1200" b="0">
+                <a:solidFill>
+                  <a:srgbClr val="E8E8EE"/>
+                </a:solidFill>
+                <a:latin typeface="Consolas"/>
+              </a:rPr>
+              <a:t>ma7 = s.rolling(7, center=True).mean()   # 추세 + 노이즈 제거</a:t>
+            </a:r>
+          </a:p>
+        </p:txBody>
+      </p:sp>
+      <p:sp>
+        <p:nvSpPr>
+          <p:cNvPr id="11" name="TextBox 10"/>
+          <p:cNvSpPr txBox="1"/>
+          <p:nvPr/>
+        </p:nvSpPr>
+        <p:spPr>
+          <a:xfrm>
+            <a:off x="731520" y="3383280"/>
+            <a:ext cx="10789920" cy="320040"/>
+          </a:xfrm>
+          <a:prstGeom prst="rect">
+            <a:avLst/>
+          </a:prstGeom>
+          <a:noFill/>
+        </p:spPr>
+        <p:txBody>
+          <a:bodyPr wrap="square">
+            <a:spAutoFit/>
+          </a:bodyPr>
+          <a:lstStyle/>
+          <a:p>
+            <a:r>
+              <a:rPr sz="1350" b="1">
+                <a:solidFill>
+                  <a:srgbClr val="E1306C"/>
+                </a:solidFill>
+                <a:latin typeface="맑은 고딕"/>
+              </a:rPr>
+              <a:t>●  1차 차분으로 정상화 (ARIMA의 d=1)</a:t>
+            </a:r>
+          </a:p>
+        </p:txBody>
+      </p:sp>
+      <p:sp>
+        <p:nvSpPr>
+          <p:cNvPr id="12" name="Rectangle 11"/>
+          <p:cNvSpPr/>
+          <p:nvPr/>
+        </p:nvSpPr>
+        <p:spPr>
+          <a:xfrm>
+            <a:off x="914400" y="3767328"/>
+            <a:ext cx="10424160" cy="713232"/>
+          </a:xfrm>
+          <a:prstGeom prst="rect">
+            <a:avLst/>
+          </a:prstGeom>
+          <a:solidFill>
+            <a:srgbClr val="2B2B33"/>
+          </a:solidFill>
+          <a:ln>
+            <a:noFill/>
+          </a:ln>
+          <a:effectLst/>
+        </p:spPr>
+        <p:style>
+          <a:lnRef idx="1">
+            <a:schemeClr val="accent1"/>
+          </a:lnRef>
+          <a:fillRef idx="3">
+            <a:schemeClr val="accent1"/>
+          </a:fillRef>
+          <a:effectRef idx="2">
+            <a:schemeClr val="accent1"/>
+          </a:effectRef>
+          <a:fontRef idx="minor">
+            <a:schemeClr val="lt1"/>
+          </a:fontRef>
+        </p:style>
+        <p:txBody>
+          <a:bodyPr rtlCol="0" anchor="ctr"/>
+          <a:lstStyle/>
+          <a:p>
+            <a:pPr algn="ctr"/>
+          </a:p>
+        </p:txBody>
+      </p:sp>
+      <p:sp>
+        <p:nvSpPr>
+          <p:cNvPr id="13" name="TextBox 12"/>
+          <p:cNvSpPr txBox="1"/>
+          <p:nvPr/>
+        </p:nvSpPr>
+        <p:spPr>
+          <a:xfrm>
+            <a:off x="1143000" y="3858768"/>
+            <a:ext cx="10058400" cy="566928"/>
+          </a:xfrm>
+          <a:prstGeom prst="rect">
+            <a:avLst/>
+          </a:prstGeom>
+          <a:noFill/>
+        </p:spPr>
+        <p:txBody>
+          <a:bodyPr wrap="square">
+            <a:spAutoFit/>
+          </a:bodyPr>
+          <a:lstStyle/>
+          <a:p>
+            <a:r>
+              <a:rPr sz="1200" b="0">
+                <a:solidFill>
+                  <a:srgbClr val="E8E8EE"/>
+                </a:solidFill>
+                <a:latin typeface="Consolas"/>
+              </a:rPr>
+              <a:t>diff = s.diff()                          # X_t - X_{t-1}</a:t>
+            </a:r>
+          </a:p>
+          <a:p>
+            <a:r>
+              <a:rPr sz="1200" b="0">
+                <a:solidFill>
+                  <a:srgbClr val="E8E8EE"/>
+                </a:solidFill>
+                <a:latin typeface="Consolas"/>
+              </a:rPr>
+              <a:t>diff.rolling(28).mean()                  # 평균이 0에 붙는지 진단</a:t>
+            </a:r>
+          </a:p>
+        </p:txBody>
+      </p:sp>
+      <p:sp>
+        <p:nvSpPr>
+          <p:cNvPr id="14" name="TextBox 13"/>
+          <p:cNvSpPr txBox="1"/>
+          <p:nvPr/>
+        </p:nvSpPr>
+        <p:spPr>
+          <a:xfrm>
+            <a:off x="731520" y="4645152"/>
+            <a:ext cx="10789920" cy="320040"/>
+          </a:xfrm>
+          <a:prstGeom prst="rect">
+            <a:avLst/>
+          </a:prstGeom>
+          <a:noFill/>
+        </p:spPr>
+        <p:txBody>
+          <a:bodyPr wrap="square">
+            <a:spAutoFit/>
+          </a:bodyPr>
+          <a:lstStyle/>
+          <a:p>
+            <a:r>
+              <a:rPr sz="1350" b="1">
+                <a:solidFill>
+                  <a:srgbClr val="E1306C"/>
+                </a:solidFill>
+                <a:latin typeface="맑은 고딕"/>
+              </a:rPr>
+              <a:t>●  가법 분해 — 추세는 이동평균, 계절은 '같은 요일끼리 평균'</a:t>
+            </a:r>
+          </a:p>
+        </p:txBody>
+      </p:sp>
+      <p:sp>
+        <p:nvSpPr>
+          <p:cNvPr id="15" name="Rectangle 14"/>
+          <p:cNvSpPr/>
+          <p:nvPr/>
+        </p:nvSpPr>
+        <p:spPr>
+          <a:xfrm>
+            <a:off x="914400" y="5029200"/>
+            <a:ext cx="10424160" cy="969264"/>
+          </a:xfrm>
+          <a:prstGeom prst="rect">
+            <a:avLst/>
+          </a:prstGeom>
+          <a:solidFill>
+            <a:srgbClr val="2B2B33"/>
+          </a:solidFill>
+          <a:ln>
+            <a:noFill/>
+          </a:ln>
+          <a:effectLst/>
+        </p:spPr>
+        <p:style>
+          <a:lnRef idx="1">
+            <a:schemeClr val="accent1"/>
+          </a:lnRef>
+          <a:fillRef idx="3">
+            <a:schemeClr val="accent1"/>
+          </a:fillRef>
+          <a:effectRef idx="2">
+            <a:schemeClr val="accent1"/>
+          </a:effectRef>
+          <a:fontRef idx="minor">
+            <a:schemeClr val="lt1"/>
+          </a:fontRef>
+        </p:style>
+        <p:txBody>
+          <a:bodyPr rtlCol="0" anchor="ctr"/>
+          <a:lstStyle/>
+          <a:p>
+            <a:pPr algn="ctr"/>
+          </a:p>
+        </p:txBody>
+      </p:sp>
+      <p:sp>
+        <p:nvSpPr>
+          <p:cNvPr id="16" name="TextBox 15"/>
+          <p:cNvSpPr txBox="1"/>
+          <p:nvPr/>
+        </p:nvSpPr>
+        <p:spPr>
+          <a:xfrm>
+            <a:off x="1143000" y="5120640"/>
+            <a:ext cx="10058400" cy="822960"/>
+          </a:xfrm>
+          <a:prstGeom prst="rect">
+            <a:avLst/>
+          </a:prstGeom>
+          <a:noFill/>
+        </p:spPr>
+        <p:txBody>
+          <a:bodyPr wrap="square">
+            <a:spAutoFit/>
+          </a:bodyPr>
+          <a:lstStyle/>
+          <a:p>
+            <a:r>
+              <a:rPr sz="1200" b="0">
+                <a:solidFill>
+                  <a:srgbClr val="E8E8EE"/>
+                </a:solidFill>
+                <a:latin typeface="Consolas"/>
+              </a:rPr>
+              <a:t>trend    = s.rolling(7, center=True).mean()</a:t>
+            </a:r>
+          </a:p>
+          <a:p>
+            <a:r>
+              <a:rPr sz="1200" b="0">
+                <a:solidFill>
+                  <a:srgbClr val="E8E8EE"/>
+                </a:solidFill>
+                <a:latin typeface="Consolas"/>
+              </a:rPr>
+              <a:t>seasonal = (s - trend).groupby(s.index.weekday).transform("mean")</a:t>
+            </a:r>
+          </a:p>
+          <a:p>
+            <a:r>
+              <a:rPr sz="1200" b="0">
+                <a:solidFill>
+                  <a:srgbClr val="E8E8EE"/>
+                </a:solidFill>
+                <a:latin typeface="Consolas"/>
+              </a:rPr>
+              <a:t>residual = s - trend - seasonal          # 백색잡음이면 성공</a:t>
+            </a:r>
+          </a:p>
+        </p:txBody>
+      </p:sp>
+      <p:sp>
+        <p:nvSpPr>
+          <p:cNvPr id="17" name="Rectangle 16"/>
+          <p:cNvSpPr/>
+          <p:nvPr/>
+        </p:nvSpPr>
+        <p:spPr>
+          <a:xfrm>
+            <a:off x="0" y="6565392"/>
+            <a:ext cx="12191695" cy="292608"/>
+          </a:xfrm>
+          <a:prstGeom prst="rect">
+            <a:avLst/>
+          </a:prstGeom>
+          <a:solidFill>
+            <a:srgbClr val="F2F2F4"/>
+          </a:solidFill>
+          <a:ln>
+            <a:noFill/>
+          </a:ln>
+          <a:effectLst/>
+        </p:spPr>
+        <p:style>
+          <a:lnRef idx="1">
+            <a:schemeClr val="accent1"/>
+          </a:lnRef>
+          <a:fillRef idx="3">
+            <a:schemeClr val="accent1"/>
+          </a:fillRef>
+          <a:effectRef idx="2">
+            <a:schemeClr val="accent1"/>
+          </a:effectRef>
+          <a:fontRef idx="minor">
+            <a:schemeClr val="lt1"/>
+          </a:fontRef>
+        </p:style>
+        <p:txBody>
+          <a:bodyPr rtlCol="0" anchor="ctr"/>
+          <a:lstStyle/>
+          <a:p>
+            <a:pPr algn="ctr"/>
+          </a:p>
+        </p:txBody>
+      </p:sp>
+      <p:sp>
+        <p:nvSpPr>
+          <p:cNvPr id="18" name="TextBox 17"/>
+          <p:cNvSpPr txBox="1"/>
+          <p:nvPr/>
+        </p:nvSpPr>
+        <p:spPr>
+          <a:xfrm>
+            <a:off x="365760" y="6547104"/>
+            <a:ext cx="7315200" cy="274320"/>
+          </a:xfrm>
+          <a:prstGeom prst="rect">
+            <a:avLst/>
+          </a:prstGeom>
+          <a:noFill/>
+        </p:spPr>
+        <p:txBody>
+          <a:bodyPr wrap="square">
+            <a:spAutoFit/>
+          </a:bodyPr>
+          <a:lstStyle/>
+          <a:p>
+            <a:r>
+              <a:rPr sz="900" b="0">
+                <a:solidFill>
+                  <a:srgbClr val="6B6B6B"/>
+                </a:solidFill>
+                <a:latin typeface="맑은 고딕"/>
+              </a:rPr>
+              <a:t>시계열 데이터 분석 · 한국 해시태그 트렌드 · 기준일 2026-06-11</a:t>
+            </a:r>
+          </a:p>
+        </p:txBody>
+      </p:sp>
+      <p:sp>
+        <p:nvSpPr>
+          <p:cNvPr id="19" name="TextBox 18"/>
+          <p:cNvSpPr txBox="1"/>
+          <p:nvPr/>
+        </p:nvSpPr>
+        <p:spPr>
+          <a:xfrm>
+            <a:off x="11094415" y="6547104"/>
+            <a:ext cx="822960" cy="274320"/>
+          </a:xfrm>
+          <a:prstGeom prst="rect">
+            <a:avLst/>
+          </a:prstGeom>
+          <a:noFill/>
+        </p:spPr>
+        <p:txBody>
+          <a:bodyPr wrap="square">
+            <a:spAutoFit/>
+          </a:bodyPr>
+          <a:lstStyle/>
+          <a:p>
+            <a:pPr algn="r"/>
+            <a:r>
+              <a:rPr sz="900" b="0">
+                <a:solidFill>
+                  <a:srgbClr val="6B6B6B"/>
+                </a:solidFill>
+                <a:latin typeface="맑은 고딕"/>
+              </a:rPr>
+              <a:t>22</a:t>
+            </a:r>
+          </a:p>
+        </p:txBody>
+      </p:sp>
+    </p:spTree>
+  </p:cSld>
+  <p:clrMapOvr>
+    <a:masterClrMapping/>
+  </p:clrMapOvr>
+</p:sld>
+</file>
+
+<file path=ppt/slides/slide27.xml><?xml version="1.0" encoding="utf-8"?>
+<p:sld xmlns:a="http://schemas.openxmlformats.org/drawingml/2006/main" xmlns:p="http://schemas.openxmlformats.org/presentationml/2006/main" xmlns:r="http://schemas.openxmlformats.org/officeDocument/2006/relationships">
+  <p:cSld>
+    <p:spTree>
+      <p:nvGrpSpPr>
+        <p:cNvPr id="1" name=""/>
+        <p:cNvGrpSpPr/>
+        <p:nvPr/>
+      </p:nvGrpSpPr>
+      <p:grpSpPr/>
+      <p:sp>
+        <p:nvSpPr>
+          <p:cNvPr id="2" name="Rectangle 1"/>
+          <p:cNvSpPr/>
+          <p:nvPr/>
+        </p:nvSpPr>
+        <p:spPr>
+          <a:xfrm>
+            <a:off x="365760" y="384048"/>
+            <a:ext cx="164592" cy="502920"/>
+          </a:xfrm>
+          <a:prstGeom prst="rect">
+            <a:avLst/>
+          </a:prstGeom>
+          <a:solidFill>
+            <a:srgbClr val="E1306C"/>
+          </a:solidFill>
+          <a:ln>
+            <a:noFill/>
+          </a:ln>
+          <a:effectLst/>
+        </p:spPr>
+        <p:style>
+          <a:lnRef idx="1">
+            <a:schemeClr val="accent1"/>
+          </a:lnRef>
+          <a:fillRef idx="3">
+            <a:schemeClr val="accent1"/>
+          </a:fillRef>
+          <a:effectRef idx="2">
+            <a:schemeClr val="accent1"/>
+          </a:effectRef>
+          <a:fontRef idx="minor">
+            <a:schemeClr val="lt1"/>
+          </a:fontRef>
+        </p:style>
+        <p:txBody>
+          <a:bodyPr rtlCol="0" anchor="ctr"/>
+          <a:lstStyle/>
+          <a:p>
+            <a:pPr algn="ctr"/>
+          </a:p>
+        </p:txBody>
+      </p:sp>
+      <p:sp>
+        <p:nvSpPr>
+          <p:cNvPr id="3" name="TextBox 2"/>
+          <p:cNvSpPr txBox="1"/>
+          <p:nvPr/>
+        </p:nvSpPr>
+        <p:spPr>
+          <a:xfrm>
+            <a:off x="685800" y="256032"/>
+            <a:ext cx="10058400" cy="320040"/>
+          </a:xfrm>
+          <a:prstGeom prst="rect">
+            <a:avLst/>
+          </a:prstGeom>
+          <a:noFill/>
+        </p:spPr>
+        <p:txBody>
+          <a:bodyPr wrap="square">
+            <a:spAutoFit/>
+          </a:bodyPr>
+          <a:lstStyle/>
+          <a:p>
+            <a:r>
+              <a:rPr sz="1100" b="1">
+                <a:solidFill>
+                  <a:srgbClr val="833AB4"/>
+                </a:solidFill>
+                <a:latin typeface="Segoe UI"/>
+              </a:rPr>
+              <a:t>08 · CODE</a:t>
+            </a:r>
+          </a:p>
+        </p:txBody>
+      </p:sp>
+      <p:sp>
+        <p:nvSpPr>
+          <p:cNvPr id="4" name="TextBox 3"/>
+          <p:cNvSpPr txBox="1"/>
+          <p:nvPr/>
+        </p:nvSpPr>
+        <p:spPr>
+          <a:xfrm>
+            <a:off x="658368" y="457200"/>
+            <a:ext cx="10515600" cy="640080"/>
+          </a:xfrm>
+          <a:prstGeom prst="rect">
+            <a:avLst/>
+          </a:prstGeom>
+          <a:noFill/>
+        </p:spPr>
+        <p:txBody>
+          <a:bodyPr wrap="square">
+            <a:spAutoFit/>
+          </a:bodyPr>
+          <a:lstStyle/>
+          <a:p>
+            <a:r>
+              <a:rPr sz="2800" b="1">
+                <a:solidFill>
+                  <a:srgbClr val="222222"/>
+                </a:solidFill>
+                <a:latin typeface="맑은 고딕"/>
+              </a:rPr>
+              <a:t>핵심 코드 ②  ACF → 예측</a:t>
+            </a:r>
+          </a:p>
+        </p:txBody>
+      </p:sp>
+      <p:sp>
+        <p:nvSpPr>
+          <p:cNvPr id="5" name="TextBox 4"/>
+          <p:cNvSpPr txBox="1"/>
+          <p:nvPr/>
+        </p:nvSpPr>
+        <p:spPr>
+          <a:xfrm>
+            <a:off x="731520" y="1371600"/>
+            <a:ext cx="10789920" cy="320040"/>
+          </a:xfrm>
+          <a:prstGeom prst="rect">
+            <a:avLst/>
+          </a:prstGeom>
+          <a:noFill/>
+        </p:spPr>
+        <p:txBody>
+          <a:bodyPr wrap="square">
+            <a:spAutoFit/>
+          </a:bodyPr>
+          <a:lstStyle/>
+          <a:p>
+            <a:r>
+              <a:rPr sz="1350" b="1">
+                <a:solidFill>
+                  <a:srgbClr val="E1306C"/>
+                </a:solidFill>
+                <a:latin typeface="맑은 고딕"/>
+              </a:rPr>
+              <a:t>●  표본 ACF 직접 구현 — ρ(k) = γ(k)/γ(0)</a:t>
+            </a:r>
+          </a:p>
+        </p:txBody>
+      </p:sp>
+      <p:sp>
+        <p:nvSpPr>
+          <p:cNvPr id="6" name="Rectangle 5"/>
+          <p:cNvSpPr/>
+          <p:nvPr/>
+        </p:nvSpPr>
+        <p:spPr>
+          <a:xfrm>
+            <a:off x="914400" y="1755648"/>
+            <a:ext cx="10424160" cy="969264"/>
+          </a:xfrm>
+          <a:prstGeom prst="rect">
+            <a:avLst/>
+          </a:prstGeom>
+          <a:solidFill>
+            <a:srgbClr val="2B2B33"/>
+          </a:solidFill>
+          <a:ln>
+            <a:noFill/>
+          </a:ln>
+          <a:effectLst/>
+        </p:spPr>
+        <p:style>
+          <a:lnRef idx="1">
+            <a:schemeClr val="accent1"/>
+          </a:lnRef>
+          <a:fillRef idx="3">
+            <a:schemeClr val="accent1"/>
+          </a:fillRef>
+          <a:effectRef idx="2">
+            <a:schemeClr val="accent1"/>
+          </a:effectRef>
+          <a:fontRef idx="minor">
+            <a:schemeClr val="lt1"/>
+          </a:fontRef>
+        </p:style>
+        <p:txBody>
+          <a:bodyPr rtlCol="0" anchor="ctr"/>
+          <a:lstStyle/>
+          <a:p>
+            <a:pPr algn="ctr"/>
+          </a:p>
+        </p:txBody>
+      </p:sp>
+      <p:sp>
+        <p:nvSpPr>
+          <p:cNvPr id="7" name="TextBox 6"/>
+          <p:cNvSpPr txBox="1"/>
+          <p:nvPr/>
+        </p:nvSpPr>
+        <p:spPr>
+          <a:xfrm>
+            <a:off x="1143000" y="1847088"/>
+            <a:ext cx="10058400" cy="822960"/>
+          </a:xfrm>
+          <a:prstGeom prst="rect">
+            <a:avLst/>
+          </a:prstGeom>
+          <a:noFill/>
+        </p:spPr>
+        <p:txBody>
+          <a:bodyPr wrap="square">
+            <a:spAutoFit/>
+          </a:bodyPr>
+          <a:lstStyle/>
+          <a:p>
+            <a:r>
+              <a:rPr sz="1200" b="0">
+                <a:solidFill>
+                  <a:srgbClr val="E8E8EE"/>
+                </a:solidFill>
+                <a:latin typeface="Consolas"/>
+              </a:rPr>
+              <a:t>x = x - x.mean()</a:t>
+            </a:r>
+          </a:p>
+          <a:p>
+            <a:r>
+              <a:rPr sz="1200" b="0">
+                <a:solidFill>
+                  <a:srgbClr val="E8E8EE"/>
+                </a:solidFill>
+                <a:latin typeface="Consolas"/>
+              </a:rPr>
+              <a:t>rho_k = np.dot(x[:n-k], x[k:]) / np.dot(x, x)</a:t>
+            </a:r>
+          </a:p>
+          <a:p>
+            <a:r>
+              <a:rPr sz="1200" b="0">
+                <a:solidFill>
+                  <a:srgbClr val="E8E8EE"/>
+                </a:solidFill>
+                <a:latin typeface="Consolas"/>
+              </a:rPr>
+              <a:t>band  = 1.96 / np.sqrt(n)                # 백색잡음 95% 한계</a:t>
+            </a:r>
+          </a:p>
+        </p:txBody>
+      </p:sp>
+      <p:sp>
+        <p:nvSpPr>
+          <p:cNvPr id="8" name="TextBox 7"/>
+          <p:cNvSpPr txBox="1"/>
+          <p:nvPr/>
+        </p:nvSpPr>
+        <p:spPr>
+          <a:xfrm>
+            <a:off x="731520" y="2889504"/>
+            <a:ext cx="10789920" cy="320040"/>
+          </a:xfrm>
+          <a:prstGeom prst="rect">
+            <a:avLst/>
+          </a:prstGeom>
+          <a:noFill/>
+        </p:spPr>
+        <p:txBody>
+          <a:bodyPr wrap="square">
+            <a:spAutoFit/>
+          </a:bodyPr>
+          <a:lstStyle/>
+          <a:p>
+            <a:r>
+              <a:rPr sz="1350" b="1">
+                <a:solidFill>
+                  <a:srgbClr val="E1306C"/>
+                </a:solidFill>
+                <a:latin typeface="맑은 고딕"/>
+              </a:rPr>
+              <a:t>●  선형추세 적합 (최소제곱) + 요일 더미 계절성</a:t>
+            </a:r>
+          </a:p>
+        </p:txBody>
+      </p:sp>
+      <p:sp>
+        <p:nvSpPr>
+          <p:cNvPr id="9" name="Rectangle 8"/>
+          <p:cNvSpPr/>
+          <p:nvPr/>
+        </p:nvSpPr>
+        <p:spPr>
+          <a:xfrm>
+            <a:off x="914400" y="3273552"/>
+            <a:ext cx="10424160" cy="969264"/>
+          </a:xfrm>
+          <a:prstGeom prst="rect">
+            <a:avLst/>
+          </a:prstGeom>
+          <a:solidFill>
+            <a:srgbClr val="2B2B33"/>
+          </a:solidFill>
+          <a:ln>
+            <a:noFill/>
+          </a:ln>
+          <a:effectLst/>
+        </p:spPr>
+        <p:style>
+          <a:lnRef idx="1">
+            <a:schemeClr val="accent1"/>
+          </a:lnRef>
+          <a:fillRef idx="3">
+            <a:schemeClr val="accent1"/>
+          </a:fillRef>
+          <a:effectRef idx="2">
+            <a:schemeClr val="accent1"/>
+          </a:effectRef>
+          <a:fontRef idx="minor">
+            <a:schemeClr val="lt1"/>
+          </a:fontRef>
+        </p:style>
+        <p:txBody>
+          <a:bodyPr rtlCol="0" anchor="ctr"/>
+          <a:lstStyle/>
+          <a:p>
+            <a:pPr algn="ctr"/>
+          </a:p>
+        </p:txBody>
+      </p:sp>
+      <p:sp>
+        <p:nvSpPr>
+          <p:cNvPr id="10" name="TextBox 9"/>
+          <p:cNvSpPr txBox="1"/>
+          <p:nvPr/>
+        </p:nvSpPr>
+        <p:spPr>
+          <a:xfrm>
+            <a:off x="1143000" y="3364992"/>
+            <a:ext cx="10058400" cy="822960"/>
+          </a:xfrm>
+          <a:prstGeom prst="rect">
+            <a:avLst/>
+          </a:prstGeom>
+          <a:noFill/>
+        </p:spPr>
+        <p:txBody>
+          <a:bodyPr wrap="square">
+            <a:spAutoFit/>
+          </a:bodyPr>
+          <a:lstStyle/>
+          <a:p>
+            <a:r>
+              <a:rPr sz="1200" b="0">
+                <a:solidFill>
+                  <a:srgbClr val="E8E8EE"/>
+                </a:solidFill>
+                <a:latin typeface="Consolas"/>
+              </a:rPr>
+              <a:t>coef = np.polyfit(t, s.values, 1)        # 기울기·절편</a:t>
+            </a:r>
+          </a:p>
+          <a:p>
+            <a:r>
+              <a:rPr sz="1200" b="0">
+                <a:solidFill>
+                  <a:srgbClr val="E8E8EE"/>
+                </a:solidFill>
+                <a:latin typeface="Consolas"/>
+              </a:rPr>
+              <a:t>seasonal = pd.Series(s.values - np.polyval(coef, t)) \</a:t>
+            </a:r>
+          </a:p>
+          <a:p>
+            <a:r>
+              <a:rPr sz="1200" b="0">
+                <a:solidFill>
+                  <a:srgbClr val="E8E8EE"/>
+                </a:solidFill>
+                <a:latin typeface="Consolas"/>
+              </a:rPr>
+              <a:t>             .groupby(s.index.weekday).mean()</a:t>
+            </a:r>
+          </a:p>
+        </p:txBody>
+      </p:sp>
+      <p:sp>
+        <p:nvSpPr>
+          <p:cNvPr id="11" name="TextBox 10"/>
+          <p:cNvSpPr txBox="1"/>
+          <p:nvPr/>
+        </p:nvSpPr>
+        <p:spPr>
+          <a:xfrm>
+            <a:off x="731520" y="4407408"/>
+            <a:ext cx="10789920" cy="320040"/>
+          </a:xfrm>
+          <a:prstGeom prst="rect">
+            <a:avLst/>
+          </a:prstGeom>
+          <a:noFill/>
+        </p:spPr>
+        <p:txBody>
+          <a:bodyPr wrap="square">
+            <a:spAutoFit/>
+          </a:bodyPr>
+          <a:lstStyle/>
+          <a:p>
+            <a:r>
+              <a:rPr sz="1350" b="1">
+                <a:solidFill>
+                  <a:srgbClr val="E1306C"/>
+                </a:solidFill>
+                <a:latin typeface="맑은 고딕"/>
+              </a:rPr>
+              <a:t>●  14일 외삽 + 95% 예측구간 (잔차 표준편차 기반)</a:t>
+            </a:r>
+          </a:p>
+        </p:txBody>
+      </p:sp>
+      <p:sp>
+        <p:nvSpPr>
+          <p:cNvPr id="12" name="Rectangle 11"/>
+          <p:cNvSpPr/>
+          <p:nvPr/>
+        </p:nvSpPr>
+        <p:spPr>
+          <a:xfrm>
+            <a:off x="914400" y="4791456"/>
+            <a:ext cx="10424160" cy="713232"/>
+          </a:xfrm>
+          <a:prstGeom prst="rect">
+            <a:avLst/>
+          </a:prstGeom>
+          <a:solidFill>
+            <a:srgbClr val="2B2B33"/>
+          </a:solidFill>
+          <a:ln>
+            <a:noFill/>
+          </a:ln>
+          <a:effectLst/>
+        </p:spPr>
+        <p:style>
+          <a:lnRef idx="1">
+            <a:schemeClr val="accent1"/>
+          </a:lnRef>
+          <a:fillRef idx="3">
+            <a:schemeClr val="accent1"/>
+          </a:fillRef>
+          <a:effectRef idx="2">
+            <a:schemeClr val="accent1"/>
+          </a:effectRef>
+          <a:fontRef idx="minor">
+            <a:schemeClr val="lt1"/>
+          </a:fontRef>
+        </p:style>
+        <p:txBody>
+          <a:bodyPr rtlCol="0" anchor="ctr"/>
+          <a:lstStyle/>
+          <a:p>
+            <a:pPr algn="ctr"/>
+          </a:p>
+        </p:txBody>
+      </p:sp>
+      <p:sp>
+        <p:nvSpPr>
+          <p:cNvPr id="13" name="TextBox 12"/>
+          <p:cNvSpPr txBox="1"/>
+          <p:nvPr/>
+        </p:nvSpPr>
+        <p:spPr>
+          <a:xfrm>
+            <a:off x="1143000" y="4882896"/>
+            <a:ext cx="10058400" cy="566928"/>
+          </a:xfrm>
+          <a:prstGeom prst="rect">
+            <a:avLst/>
+          </a:prstGeom>
+          <a:noFill/>
+        </p:spPr>
+        <p:txBody>
+          <a:bodyPr wrap="square">
+            <a:spAutoFit/>
+          </a:bodyPr>
+          <a:lstStyle/>
+          <a:p>
+            <a:r>
+              <a:rPr sz="1200" b="0">
+                <a:solidFill>
+                  <a:srgbClr val="E8E8EE"/>
+                </a:solidFill>
+                <a:latin typeface="Consolas"/>
+              </a:rPr>
+              <a:t>future = np.polyval(coef, future_t) + seasonal[future_weekday]</a:t>
+            </a:r>
+          </a:p>
+          <a:p>
+            <a:r>
+              <a:rPr sz="1200" b="0">
+                <a:solidFill>
+                  <a:srgbClr val="E8E8EE"/>
+                </a:solidFill>
+                <a:latin typeface="Consolas"/>
+              </a:rPr>
+              <a:t>lo, hi = future - 1.96*resid_std, future + 1.96*resid_std</a:t>
+            </a:r>
+          </a:p>
+        </p:txBody>
+      </p:sp>
+      <p:sp>
+        <p:nvSpPr>
+          <p:cNvPr id="14" name="Rectangle 13"/>
+          <p:cNvSpPr/>
+          <p:nvPr/>
+        </p:nvSpPr>
+        <p:spPr>
+          <a:xfrm>
+            <a:off x="0" y="6565392"/>
+            <a:ext cx="12191695" cy="292608"/>
+          </a:xfrm>
+          <a:prstGeom prst="rect">
+            <a:avLst/>
+          </a:prstGeom>
+          <a:solidFill>
+            <a:srgbClr val="F2F2F4"/>
+          </a:solidFill>
+          <a:ln>
+            <a:noFill/>
+          </a:ln>
+          <a:effectLst/>
+        </p:spPr>
+        <p:style>
+          <a:lnRef idx="1">
+            <a:schemeClr val="accent1"/>
+          </a:lnRef>
+          <a:fillRef idx="3">
+            <a:schemeClr val="accent1"/>
+          </a:fillRef>
+          <a:effectRef idx="2">
+            <a:schemeClr val="accent1"/>
+          </a:effectRef>
+          <a:fontRef idx="minor">
+            <a:schemeClr val="lt1"/>
+          </a:fontRef>
+        </p:style>
+        <p:txBody>
+          <a:bodyPr rtlCol="0" anchor="ctr"/>
+          <a:lstStyle/>
+          <a:p>
+            <a:pPr algn="ctr"/>
+          </a:p>
+        </p:txBody>
+      </p:sp>
+      <p:sp>
+        <p:nvSpPr>
+          <p:cNvPr id="15" name="TextBox 14"/>
+          <p:cNvSpPr txBox="1"/>
+          <p:nvPr/>
+        </p:nvSpPr>
+        <p:spPr>
+          <a:xfrm>
+            <a:off x="365760" y="6547104"/>
+            <a:ext cx="7315200" cy="274320"/>
+          </a:xfrm>
+          <a:prstGeom prst="rect">
+            <a:avLst/>
+          </a:prstGeom>
+          <a:noFill/>
+        </p:spPr>
+        <p:txBody>
+          <a:bodyPr wrap="square">
+            <a:spAutoFit/>
+          </a:bodyPr>
+          <a:lstStyle/>
+          <a:p>
+            <a:r>
+              <a:rPr sz="900" b="0">
+                <a:solidFill>
+                  <a:srgbClr val="6B6B6B"/>
+                </a:solidFill>
+                <a:latin typeface="맑은 고딕"/>
+              </a:rPr>
+              <a:t>시계열 데이터 분석 · 한국 해시태그 트렌드 · 기준일 2026-06-11</a:t>
+            </a:r>
+          </a:p>
+        </p:txBody>
+      </p:sp>
+      <p:sp>
+        <p:nvSpPr>
+          <p:cNvPr id="16" name="TextBox 15"/>
+          <p:cNvSpPr txBox="1"/>
+          <p:nvPr/>
+        </p:nvSpPr>
+        <p:spPr>
+          <a:xfrm>
+            <a:off x="11094415" y="6547104"/>
+            <a:ext cx="822960" cy="274320"/>
+          </a:xfrm>
+          <a:prstGeom prst="rect">
+            <a:avLst/>
+          </a:prstGeom>
+          <a:noFill/>
+        </p:spPr>
+        <p:txBody>
+          <a:bodyPr wrap="square">
+            <a:spAutoFit/>
+          </a:bodyPr>
+          <a:lstStyle/>
+          <a:p>
+            <a:pPr algn="r"/>
+            <a:r>
+              <a:rPr sz="900" b="0">
+                <a:solidFill>
+                  <a:srgbClr val="6B6B6B"/>
+                </a:solidFill>
+                <a:latin typeface="맑은 고딕"/>
+              </a:rPr>
+              <a:t>23</a:t>
+            </a:r>
+          </a:p>
+        </p:txBody>
+      </p:sp>
+    </p:spTree>
+  </p:cSld>
+  <p:clrMapOvr>
+    <a:masterClrMapping/>
+  </p:clrMapOvr>
+</p:sld>
+</file>
+
+<file path=ppt/slides/slide28.xml><?xml version="1.0" encoding="utf-8"?>
+<p:sld xmlns:a="http://schemas.openxmlformats.org/drawingml/2006/main" xmlns:p="http://schemas.openxmlformats.org/presentationml/2006/main" xmlns:r="http://schemas.openxmlformats.org/officeDocument/2006/relationships">
+  <p:cSld>
+    <p:spTree>
+      <p:nvGrpSpPr>
+        <p:cNvPr id="1" name=""/>
+        <p:cNvGrpSpPr/>
+        <p:nvPr/>
+      </p:nvGrpSpPr>
+      <p:grpSpPr/>
+      <p:sp>
+        <p:nvSpPr>
+          <p:cNvPr id="2" name="Rectangle 1"/>
+          <p:cNvSpPr/>
+          <p:nvPr/>
+        </p:nvSpPr>
+        <p:spPr>
+          <a:xfrm>
+            <a:off x="365760" y="384048"/>
+            <a:ext cx="164592" cy="502920"/>
+          </a:xfrm>
+          <a:prstGeom prst="rect">
+            <a:avLst/>
+          </a:prstGeom>
+          <a:solidFill>
+            <a:srgbClr val="E1306C"/>
+          </a:solidFill>
+          <a:ln>
+            <a:noFill/>
+          </a:ln>
+          <a:effectLst/>
+        </p:spPr>
+        <p:style>
+          <a:lnRef idx="1">
+            <a:schemeClr val="accent1"/>
+          </a:lnRef>
+          <a:fillRef idx="3">
+            <a:schemeClr val="accent1"/>
+          </a:fillRef>
+          <a:effectRef idx="2">
+            <a:schemeClr val="accent1"/>
+          </a:effectRef>
+          <a:fontRef idx="minor">
+            <a:schemeClr val="lt1"/>
+          </a:fontRef>
+        </p:style>
+        <p:txBody>
+          <a:bodyPr rtlCol="0" anchor="ctr"/>
+          <a:lstStyle/>
+          <a:p>
+            <a:pPr algn="ctr"/>
+          </a:p>
+        </p:txBody>
+      </p:sp>
+      <p:sp>
+        <p:nvSpPr>
+          <p:cNvPr id="3" name="TextBox 2"/>
+          <p:cNvSpPr txBox="1"/>
+          <p:nvPr/>
+        </p:nvSpPr>
+        <p:spPr>
+          <a:xfrm>
+            <a:off x="685800" y="256032"/>
+            <a:ext cx="10058400" cy="320040"/>
+          </a:xfrm>
+          <a:prstGeom prst="rect">
+            <a:avLst/>
+          </a:prstGeom>
+          <a:noFill/>
+        </p:spPr>
+        <p:txBody>
+          <a:bodyPr wrap="square">
+            <a:spAutoFit/>
+          </a:bodyPr>
+          <a:lstStyle/>
+          <a:p>
+            <a:r>
+              <a:rPr sz="1100" b="1">
+                <a:solidFill>
+                  <a:srgbClr val="833AB4"/>
+                </a:solidFill>
+                <a:latin typeface="Segoe UI"/>
+              </a:rPr>
+              <a:t>08 · LIMITATIONS</a:t>
+            </a:r>
+          </a:p>
+        </p:txBody>
+      </p:sp>
+      <p:sp>
+        <p:nvSpPr>
+          <p:cNvPr id="4" name="TextBox 3"/>
+          <p:cNvSpPr txBox="1"/>
+          <p:nvPr/>
+        </p:nvSpPr>
+        <p:spPr>
+          <a:xfrm>
+            <a:off x="658368" y="457200"/>
+            <a:ext cx="10515600" cy="640080"/>
+          </a:xfrm>
+          <a:prstGeom prst="rect">
+            <a:avLst/>
+          </a:prstGeom>
+          <a:noFill/>
+        </p:spPr>
+        <p:txBody>
+          <a:bodyPr wrap="square">
+            <a:spAutoFit/>
+          </a:bodyPr>
+          <a:lstStyle/>
+          <a:p>
+            <a:r>
+              <a:rPr sz="2800" b="1">
+                <a:solidFill>
+                  <a:srgbClr val="222222"/>
+                </a:solidFill>
+                <a:latin typeface="맑은 고딕"/>
+              </a:rPr>
+              <a:t>한계와 재현</a:t>
+            </a:r>
+          </a:p>
+        </p:txBody>
+      </p:sp>
+      <p:sp>
+        <p:nvSpPr>
+          <p:cNvPr id="5" name="Rectangle 4"/>
+          <p:cNvSpPr/>
+          <p:nvPr/>
+        </p:nvSpPr>
+        <p:spPr>
+          <a:xfrm>
+            <a:off x="685800" y="1371600"/>
+            <a:ext cx="10789920" cy="822960"/>
+          </a:xfrm>
+          <a:prstGeom prst="rect">
+            <a:avLst/>
+          </a:prstGeom>
+          <a:solidFill>
+            <a:srgbClr val="F2F2F4"/>
+          </a:solidFill>
+          <a:ln>
+            <a:noFill/>
+          </a:ln>
+          <a:effectLst/>
+        </p:spPr>
+        <p:style>
+          <a:lnRef idx="1">
+            <a:schemeClr val="accent1"/>
+          </a:lnRef>
+          <a:fillRef idx="3">
+            <a:schemeClr val="accent1"/>
+          </a:fillRef>
+          <a:effectRef idx="2">
+            <a:schemeClr val="accent1"/>
+          </a:effectRef>
+          <a:fontRef idx="minor">
+            <a:schemeClr val="lt1"/>
+          </a:fontRef>
+        </p:style>
+        <p:txBody>
+          <a:bodyPr rtlCol="0" anchor="ctr"/>
+          <a:lstStyle/>
+          <a:p>
+            <a:pPr algn="ctr"/>
+          </a:p>
+        </p:txBody>
+      </p:sp>
+      <p:sp>
+        <p:nvSpPr>
+          <p:cNvPr id="6" name="TextBox 5"/>
+          <p:cNvSpPr txBox="1"/>
+          <p:nvPr/>
+        </p:nvSpPr>
+        <p:spPr>
+          <a:xfrm>
+            <a:off x="914400" y="1481328"/>
+            <a:ext cx="10332720" cy="640080"/>
+          </a:xfrm>
+          <a:prstGeom prst="rect">
+            <a:avLst/>
+          </a:prstGeom>
+          <a:noFill/>
+        </p:spPr>
+        <p:txBody>
+          <a:bodyPr wrap="square" anchor="ctr">
+            <a:spAutoFit/>
+          </a:bodyPr>
+          <a:lstStyle/>
+          <a:p>
+            <a:r>
+              <a:rPr sz="1500" b="1">
+                <a:solidFill>
+                  <a:srgbClr val="222222"/>
+                </a:solidFill>
+                <a:latin typeface="맑은 고딕"/>
+              </a:rPr>
+              <a:t>정직한 캐비앗: 이 분석이 말할 수 있는 것과 없는 것</a:t>
+            </a:r>
+          </a:p>
+        </p:txBody>
+      </p:sp>
+      <p:sp>
+        <p:nvSpPr>
+          <p:cNvPr id="7" name="TextBox 6"/>
+          <p:cNvSpPr txBox="1"/>
+          <p:nvPr/>
+        </p:nvSpPr>
+        <p:spPr>
+          <a:xfrm>
+            <a:off x="822960" y="2514600"/>
+            <a:ext cx="10607040" cy="4206240"/>
+          </a:xfrm>
+          <a:prstGeom prst="rect">
+            <a:avLst/>
+          </a:prstGeom>
+          <a:noFill/>
+        </p:spPr>
+        <p:txBody>
+          <a:bodyPr wrap="square">
+            <a:spAutoFit/>
+          </a:bodyPr>
+          <a:lstStyle/>
+          <a:p>
+            <a:pPr>
+              <a:spcAft>
+                <a:spcPts val="1000"/>
+              </a:spcAft>
+            </a:pPr>
+            <a:r>
+              <a:rPr sz="1650" b="1">
+                <a:solidFill>
+                  <a:srgbClr val="E1306C"/>
+                </a:solidFill>
+                <a:latin typeface="맑은 고딕"/>
+              </a:rPr>
+              <a:t>●  프록시 한계</a:t>
+            </a:r>
+          </a:p>
+          <a:p>
+            <a:pPr>
+              <a:spcAft>
+                <a:spcPts val="1300"/>
+              </a:spcAft>
+            </a:pPr>
+            <a:r>
+              <a:rPr sz="1350" b="0">
+                <a:solidFill>
+                  <a:srgbClr val="6B6B6B"/>
+                </a:solidFill>
+                <a:latin typeface="맑은 고딕"/>
+              </a:rPr>
+              <a:t>     네이버 검색량 ≠ 인스타그램 게시량 — '한국 사용자의 주제 관심도'의 대리지표로 해석해야 함</a:t>
+            </a:r>
+          </a:p>
+          <a:p>
+            <a:pPr>
+              <a:spcAft>
+                <a:spcPts val="1000"/>
+              </a:spcAft>
+            </a:pPr>
+            <a:r>
+              <a:rPr sz="1650" b="1">
+                <a:solidFill>
+                  <a:srgbClr val="E1306C"/>
+                </a:solidFill>
+                <a:latin typeface="맑은 고딕"/>
+              </a:rPr>
+              <a:t>●  상대값 한계</a:t>
+            </a:r>
+          </a:p>
+          <a:p>
+            <a:pPr>
+              <a:spcAft>
+                <a:spcPts val="1300"/>
+              </a:spcAft>
+            </a:pPr>
+            <a:r>
+              <a:rPr sz="1350" b="0">
+                <a:solidFill>
+                  <a:srgbClr val="6B6B6B"/>
+                </a:solidFill>
+                <a:latin typeface="맑은 고딕"/>
+              </a:rPr>
+              <a:t>     데이터랩 ratio는 요청 내 정규화 — 태그 간 절대 규모 비교 불가, 시간 변화·모멘텀 비교만 유효</a:t>
+            </a:r>
+          </a:p>
+          <a:p>
+            <a:pPr>
+              <a:spcAft>
+                <a:spcPts val="1000"/>
+              </a:spcAft>
+            </a:pPr>
+            <a:r>
+              <a:rPr sz="1650" b="1">
+                <a:solidFill>
+                  <a:srgbClr val="E1306C"/>
+                </a:solidFill>
+                <a:latin typeface="맑은 고딕"/>
+              </a:rPr>
+              <a:t>●  실시간성</a:t>
+            </a:r>
+          </a:p>
+          <a:p>
+            <a:pPr>
+              <a:spcAft>
+                <a:spcPts val="1300"/>
+              </a:spcAft>
+            </a:pPr>
+            <a:r>
+              <a:rPr sz="1350" b="0">
+                <a:solidFill>
+                  <a:srgbClr val="6B6B6B"/>
+                </a:solidFill>
+                <a:latin typeface="맑은 고딕"/>
+              </a:rPr>
+              <a:t>     2026-06-11 수집 스냅샷 — '실시간 스트림'이 아니라 주기 재수집으로 갱신하는 구조 (전일까지 일별 제공)</a:t>
+            </a:r>
+          </a:p>
+          <a:p>
+            <a:pPr>
+              <a:spcAft>
+                <a:spcPts val="1000"/>
+              </a:spcAft>
+            </a:pPr>
+            <a:r>
+              <a:rPr sz="1650" b="1">
+                <a:solidFill>
+                  <a:srgbClr val="E1306C"/>
+                </a:solidFill>
+                <a:latin typeface="맑은 고딕"/>
+              </a:rPr>
+              <a:t>●  계정 시뮬레이션</a:t>
+            </a:r>
+          </a:p>
+          <a:p>
+            <a:pPr>
+              <a:spcAft>
+                <a:spcPts val="1300"/>
+              </a:spcAft>
+            </a:pPr>
+            <a:r>
+              <a:rPr sz="1350" b="0">
+                <a:solidFill>
+                  <a:srgbClr val="6B6B6B"/>
+                </a:solidFill>
+                <a:latin typeface="맑은 고딕"/>
+              </a:rPr>
+              <a:t>     '우리 계정' 도달은 계정 인사이트 공개 API가 없어 합성한 교육용 데이터 — 분해/예측 방법론 시연용이며 실측 아님</a:t>
+            </a:r>
+          </a:p>
+          <a:p>
+            <a:pPr>
+              <a:spcAft>
+                <a:spcPts val="1000"/>
+              </a:spcAft>
+            </a:pPr>
+            <a:r>
+              <a:rPr sz="1650" b="1">
+                <a:solidFill>
+                  <a:srgbClr val="E1306C"/>
+                </a:solidFill>
+                <a:latin typeface="맑은 고딕"/>
+              </a:rPr>
+              <a:t>●  모형 한계</a:t>
+            </a:r>
+          </a:p>
+          <a:p>
+            <a:pPr>
+              <a:spcAft>
+                <a:spcPts val="1300"/>
+              </a:spcAft>
+            </a:pPr>
+            <a:r>
+              <a:rPr sz="1350" b="0">
+                <a:solidFill>
+                  <a:srgbClr val="6B6B6B"/>
+                </a:solidFill>
+                <a:latin typeface="맑은 고딕"/>
+              </a:rPr>
+              <a:t>     선형 베이스라인은 외생 이벤트·추세 전환을 늦게 반영(백테스트 MAE에서 SARIMA에 열세) — 단순성/해석력과 정확도의 트레이드오프</a:t>
+            </a:r>
+          </a:p>
+          <a:p>
+            <a:pPr>
+              <a:spcAft>
+                <a:spcPts val="1000"/>
+              </a:spcAft>
+            </a:pPr>
+            <a:r>
+              <a:rPr sz="1650" b="1">
+                <a:solidFill>
+                  <a:srgbClr val="E1306C"/>
+                </a:solidFill>
+                <a:latin typeface="맑은 고딕"/>
+              </a:rPr>
+              <a:t>●  재현</a:t>
+            </a:r>
+          </a:p>
+          <a:p>
+            <a:pPr>
+              <a:spcAft>
+                <a:spcPts val="1300"/>
+              </a:spcAft>
+            </a:pPr>
+            <a:r>
+              <a:rPr sz="1350" b="0">
+                <a:solidFill>
+                  <a:srgbClr val="6B6B6B"/>
+                </a:solidFill>
+                <a:latin typeface="맑은 고딕"/>
+              </a:rPr>
+              <a:t>     pip install -r presentation/requirements.txt &amp;&amp; python presentation/build_deck.py — CSV·시드 고정으로 결정론적 재생성</a:t>
+            </a:r>
+          </a:p>
+        </p:txBody>
+      </p:sp>
+      <p:sp>
+        <p:nvSpPr>
+          <p:cNvPr id="8" name="Rectangle 7"/>
+          <p:cNvSpPr/>
+          <p:nvPr/>
+        </p:nvSpPr>
+        <p:spPr>
+          <a:xfrm>
+            <a:off x="0" y="6565392"/>
+            <a:ext cx="12191695" cy="292608"/>
+          </a:xfrm>
+          <a:prstGeom prst="rect">
+            <a:avLst/>
+          </a:prstGeom>
+          <a:solidFill>
+            <a:srgbClr val="F2F2F4"/>
+          </a:solidFill>
+          <a:ln>
+            <a:noFill/>
+          </a:ln>
+          <a:effectLst/>
+        </p:spPr>
+        <p:style>
+          <a:lnRef idx="1">
+            <a:schemeClr val="accent1"/>
+          </a:lnRef>
+          <a:fillRef idx="3">
+            <a:schemeClr val="accent1"/>
+          </a:fillRef>
+          <a:effectRef idx="2">
+            <a:schemeClr val="accent1"/>
+          </a:effectRef>
+          <a:fontRef idx="minor">
+            <a:schemeClr val="lt1"/>
+          </a:fontRef>
+        </p:style>
+        <p:txBody>
+          <a:bodyPr rtlCol="0" anchor="ctr"/>
+          <a:lstStyle/>
+          <a:p>
+            <a:pPr algn="ctr"/>
+          </a:p>
+        </p:txBody>
+      </p:sp>
+      <p:sp>
+        <p:nvSpPr>
+          <p:cNvPr id="9" name="TextBox 8"/>
+          <p:cNvSpPr txBox="1"/>
+          <p:nvPr/>
+        </p:nvSpPr>
+        <p:spPr>
+          <a:xfrm>
+            <a:off x="365760" y="6547104"/>
+            <a:ext cx="7315200" cy="274320"/>
+          </a:xfrm>
+          <a:prstGeom prst="rect">
+            <a:avLst/>
+          </a:prstGeom>
+          <a:noFill/>
+        </p:spPr>
+        <p:txBody>
+          <a:bodyPr wrap="square">
+            <a:spAutoFit/>
+          </a:bodyPr>
+          <a:lstStyle/>
+          <a:p>
+            <a:r>
+              <a:rPr sz="900" b="0">
+                <a:solidFill>
+                  <a:srgbClr val="6B6B6B"/>
+                </a:solidFill>
+                <a:latin typeface="맑은 고딕"/>
+              </a:rPr>
+              <a:t>시계열 데이터 분석 · 한국 해시태그 트렌드 · 기준일 2026-06-11</a:t>
+            </a:r>
+          </a:p>
+        </p:txBody>
+      </p:sp>
+      <p:sp>
+        <p:nvSpPr>
+          <p:cNvPr id="10" name="TextBox 9"/>
+          <p:cNvSpPr txBox="1"/>
+          <p:nvPr/>
+        </p:nvSpPr>
+        <p:spPr>
+          <a:xfrm>
+            <a:off x="11094415" y="6547104"/>
+            <a:ext cx="822960" cy="274320"/>
+          </a:xfrm>
+          <a:prstGeom prst="rect">
+            <a:avLst/>
+          </a:prstGeom>
+          <a:noFill/>
+        </p:spPr>
+        <p:txBody>
+          <a:bodyPr wrap="square">
+            <a:spAutoFit/>
+          </a:bodyPr>
+          <a:lstStyle/>
+          <a:p>
+            <a:pPr algn="r"/>
+            <a:r>
+              <a:rPr sz="900" b="0">
+                <a:solidFill>
+                  <a:srgbClr val="6B6B6B"/>
+                </a:solidFill>
+                <a:latin typeface="맑은 고딕"/>
+              </a:rPr>
+              <a:t>24</a:t>
             </a:r>
           </a:p>
         </p:txBody>

--- a/presentation/insta_trend_timeseries.pptx
+++ b/presentation/insta_trend_timeseries.pptx
@@ -32,6 +32,13 @@
     <p:sldId id="280" r:id="rId31"/>
     <p:sldId id="281" r:id="rId32"/>
     <p:sldId id="282" r:id="rId33"/>
+    <p:sldId id="283" r:id="rId34"/>
+    <p:sldId id="284" r:id="rId35"/>
+    <p:sldId id="285" r:id="rId36"/>
+    <p:sldId id="286" r:id="rId37"/>
+    <p:sldId id="287" r:id="rId38"/>
+    <p:sldId id="288" r:id="rId39"/>
+    <p:sldId id="289" r:id="rId40"/>
   </p:sldIdLst>
   <p:sldSz cx="12191695" cy="6858000" type="screen4x3"/>
   <p:notesSz cx="6858000" cy="9144000"/>
@@ -8115,7 +8122,7 @@
         </p:nvSpPr>
         <p:spPr>
           <a:xfrm>
-            <a:off x="777240" y="1627632"/>
+            <a:off x="777240" y="1591056"/>
             <a:ext cx="457200" cy="457200"/>
           </a:xfrm>
           <a:prstGeom prst="roundRect">
@@ -8161,7 +8168,7 @@
         </p:nvSpPr>
         <p:spPr>
           <a:xfrm>
-            <a:off x="777240" y="1691640"/>
+            <a:off x="777240" y="1655064"/>
             <a:ext cx="457200" cy="365760"/>
           </a:xfrm>
           <a:prstGeom prst="rect">
@@ -8196,7 +8203,7 @@
         </p:nvSpPr>
         <p:spPr>
           <a:xfrm>
-            <a:off x="1463040" y="1645920"/>
+            <a:off x="1463040" y="1609344"/>
             <a:ext cx="4937760" cy="457200"/>
           </a:xfrm>
           <a:prstGeom prst="rect">
@@ -8230,7 +8237,7 @@
         </p:nvSpPr>
         <p:spPr>
           <a:xfrm>
-            <a:off x="6492240" y="1673352"/>
+            <a:off x="6492240" y="1636776"/>
             <a:ext cx="5212080" cy="457200"/>
           </a:xfrm>
           <a:prstGeom prst="rect">
@@ -8264,7 +8271,7 @@
         </p:nvSpPr>
         <p:spPr>
           <a:xfrm>
-            <a:off x="1463040" y="2176272"/>
+            <a:off x="1463040" y="2066544"/>
             <a:ext cx="10058400" cy="12700"/>
           </a:xfrm>
           <a:prstGeom prst="rect">
@@ -8308,7 +8315,7 @@
         </p:nvSpPr>
         <p:spPr>
           <a:xfrm>
-            <a:off x="777240" y="2267712"/>
+            <a:off x="777240" y="2157984"/>
             <a:ext cx="457200" cy="457200"/>
           </a:xfrm>
           <a:prstGeom prst="roundRect">
@@ -8354,7 +8361,7 @@
         </p:nvSpPr>
         <p:spPr>
           <a:xfrm>
-            <a:off x="777240" y="2331720"/>
+            <a:off x="777240" y="2221992"/>
             <a:ext cx="457200" cy="365760"/>
           </a:xfrm>
           <a:prstGeom prst="rect">
@@ -8389,7 +8396,7 @@
         </p:nvSpPr>
         <p:spPr>
           <a:xfrm>
-            <a:off x="1463040" y="2286000"/>
+            <a:off x="1463040" y="2176272"/>
             <a:ext cx="4937760" cy="457200"/>
           </a:xfrm>
           <a:prstGeom prst="rect">
@@ -8423,7 +8430,7 @@
         </p:nvSpPr>
         <p:spPr>
           <a:xfrm>
-            <a:off x="6492240" y="2313432"/>
+            <a:off x="6492240" y="2203704"/>
             <a:ext cx="5212080" cy="457200"/>
           </a:xfrm>
           <a:prstGeom prst="rect">
@@ -8457,7 +8464,7 @@
         </p:nvSpPr>
         <p:spPr>
           <a:xfrm>
-            <a:off x="1463040" y="2816352"/>
+            <a:off x="1463040" y="2633472"/>
             <a:ext cx="10058400" cy="12700"/>
           </a:xfrm>
           <a:prstGeom prst="rect">
@@ -8501,7 +8508,7 @@
         </p:nvSpPr>
         <p:spPr>
           <a:xfrm>
-            <a:off x="777240" y="2907792"/>
+            <a:off x="777240" y="2724912"/>
             <a:ext cx="457200" cy="457200"/>
           </a:xfrm>
           <a:prstGeom prst="roundRect">
@@ -8547,7 +8554,7 @@
         </p:nvSpPr>
         <p:spPr>
           <a:xfrm>
-            <a:off x="777240" y="2971800"/>
+            <a:off x="777240" y="2788920"/>
             <a:ext cx="457200" cy="365760"/>
           </a:xfrm>
           <a:prstGeom prst="rect">
@@ -8582,7 +8589,7 @@
         </p:nvSpPr>
         <p:spPr>
           <a:xfrm>
-            <a:off x="1463040" y="2926080"/>
+            <a:off x="1463040" y="2743200"/>
             <a:ext cx="4937760" cy="457200"/>
           </a:xfrm>
           <a:prstGeom prst="rect">
@@ -8616,7 +8623,7 @@
         </p:nvSpPr>
         <p:spPr>
           <a:xfrm>
-            <a:off x="6492240" y="2953512"/>
+            <a:off x="6492240" y="2770632"/>
             <a:ext cx="5212080" cy="457200"/>
           </a:xfrm>
           <a:prstGeom prst="rect">
@@ -8650,7 +8657,7 @@
         </p:nvSpPr>
         <p:spPr>
           <a:xfrm>
-            <a:off x="1463040" y="3456432"/>
+            <a:off x="1463040" y="3200400"/>
             <a:ext cx="10058400" cy="12700"/>
           </a:xfrm>
           <a:prstGeom prst="rect">
@@ -8694,7 +8701,7 @@
         </p:nvSpPr>
         <p:spPr>
           <a:xfrm>
-            <a:off x="777240" y="3547872"/>
+            <a:off x="777240" y="3291840"/>
             <a:ext cx="457200" cy="457200"/>
           </a:xfrm>
           <a:prstGeom prst="roundRect">
@@ -8740,7 +8747,7 @@
         </p:nvSpPr>
         <p:spPr>
           <a:xfrm>
-            <a:off x="777240" y="3611880"/>
+            <a:off x="777240" y="3355848"/>
             <a:ext cx="457200" cy="365760"/>
           </a:xfrm>
           <a:prstGeom prst="rect">
@@ -8775,7 +8782,7 @@
         </p:nvSpPr>
         <p:spPr>
           <a:xfrm>
-            <a:off x="1463040" y="3566160"/>
+            <a:off x="1463040" y="3310128"/>
             <a:ext cx="4937760" cy="457200"/>
           </a:xfrm>
           <a:prstGeom prst="rect">
@@ -8809,7 +8816,7 @@
         </p:nvSpPr>
         <p:spPr>
           <a:xfrm>
-            <a:off x="6492240" y="3593592"/>
+            <a:off x="6492240" y="3337560"/>
             <a:ext cx="5212080" cy="457200"/>
           </a:xfrm>
           <a:prstGeom prst="rect">
@@ -8843,7 +8850,7 @@
         </p:nvSpPr>
         <p:spPr>
           <a:xfrm>
-            <a:off x="1463040" y="4096512"/>
+            <a:off x="1463040" y="3767328"/>
             <a:ext cx="10058400" cy="12700"/>
           </a:xfrm>
           <a:prstGeom prst="rect">
@@ -8887,7 +8894,7 @@
         </p:nvSpPr>
         <p:spPr>
           <a:xfrm>
-            <a:off x="777240" y="4187952"/>
+            <a:off x="777240" y="3858768"/>
             <a:ext cx="457200" cy="457200"/>
           </a:xfrm>
           <a:prstGeom prst="roundRect">
@@ -8933,7 +8940,7 @@
         </p:nvSpPr>
         <p:spPr>
           <a:xfrm>
-            <a:off x="777240" y="4251960"/>
+            <a:off x="777240" y="3922776"/>
             <a:ext cx="457200" cy="365760"/>
           </a:xfrm>
           <a:prstGeom prst="rect">
@@ -8968,7 +8975,7 @@
         </p:nvSpPr>
         <p:spPr>
           <a:xfrm>
-            <a:off x="1463040" y="4206240"/>
+            <a:off x="1463040" y="3877056"/>
             <a:ext cx="4937760" cy="457200"/>
           </a:xfrm>
           <a:prstGeom prst="rect">
@@ -9002,7 +9009,7 @@
         </p:nvSpPr>
         <p:spPr>
           <a:xfrm>
-            <a:off x="6492240" y="4233672"/>
+            <a:off x="6492240" y="3904488"/>
             <a:ext cx="5212080" cy="457200"/>
           </a:xfrm>
           <a:prstGeom prst="rect">
@@ -9036,7 +9043,7 @@
         </p:nvSpPr>
         <p:spPr>
           <a:xfrm>
-            <a:off x="1463040" y="4736592"/>
+            <a:off x="1463040" y="4334256"/>
             <a:ext cx="10058400" cy="12700"/>
           </a:xfrm>
           <a:prstGeom prst="rect">
@@ -9080,7 +9087,7 @@
         </p:nvSpPr>
         <p:spPr>
           <a:xfrm>
-            <a:off x="777240" y="4828032"/>
+            <a:off x="777240" y="4425696"/>
             <a:ext cx="457200" cy="457200"/>
           </a:xfrm>
           <a:prstGeom prst="roundRect">
@@ -9126,7 +9133,7 @@
         </p:nvSpPr>
         <p:spPr>
           <a:xfrm>
-            <a:off x="777240" y="4892040"/>
+            <a:off x="777240" y="4489704"/>
             <a:ext cx="457200" cy="365760"/>
           </a:xfrm>
           <a:prstGeom prst="rect">
@@ -9161,7 +9168,7 @@
         </p:nvSpPr>
         <p:spPr>
           <a:xfrm>
-            <a:off x="1463040" y="4846320"/>
+            <a:off x="1463040" y="4443984"/>
             <a:ext cx="4937760" cy="457200"/>
           </a:xfrm>
           <a:prstGeom prst="rect">
@@ -9195,7 +9202,7 @@
         </p:nvSpPr>
         <p:spPr>
           <a:xfrm>
-            <a:off x="6492240" y="4873752"/>
+            <a:off x="6492240" y="4471416"/>
             <a:ext cx="5212080" cy="457200"/>
           </a:xfrm>
           <a:prstGeom prst="rect">
@@ -9229,7 +9236,7 @@
         </p:nvSpPr>
         <p:spPr>
           <a:xfrm>
-            <a:off x="1463040" y="5376672"/>
+            <a:off x="1463040" y="4901184"/>
             <a:ext cx="10058400" cy="12700"/>
           </a:xfrm>
           <a:prstGeom prst="rect">
@@ -9273,7 +9280,7 @@
         </p:nvSpPr>
         <p:spPr>
           <a:xfrm>
-            <a:off x="777240" y="5468112"/>
+            <a:off x="777240" y="4992624"/>
             <a:ext cx="457200" cy="457200"/>
           </a:xfrm>
           <a:prstGeom prst="roundRect">
@@ -9319,7 +9326,7 @@
         </p:nvSpPr>
         <p:spPr>
           <a:xfrm>
-            <a:off x="777240" y="5532120"/>
+            <a:off x="777240" y="5056632"/>
             <a:ext cx="457200" cy="365760"/>
           </a:xfrm>
           <a:prstGeom prst="rect">
@@ -9354,7 +9361,7 @@
         </p:nvSpPr>
         <p:spPr>
           <a:xfrm>
-            <a:off x="1463040" y="5486400"/>
+            <a:off x="1463040" y="5010912"/>
             <a:ext cx="4937760" cy="457200"/>
           </a:xfrm>
           <a:prstGeom prst="rect">
@@ -9375,6 +9382,199 @@
                 </a:solidFill>
                 <a:latin typeface="맑은 고딕"/>
               </a:rPr>
+              <a:t>AI로 확장하기</a:t>
+            </a:r>
+          </a:p>
+        </p:txBody>
+      </p:sp>
+      <p:sp>
+        <p:nvSpPr>
+          <p:cNvPr id="38" name="TextBox 37"/>
+          <p:cNvSpPr txBox="1"/>
+          <p:nvPr/>
+        </p:nvSpPr>
+        <p:spPr>
+          <a:xfrm>
+            <a:off x="6492240" y="5038344"/>
+            <a:ext cx="5212080" cy="457200"/>
+          </a:xfrm>
+          <a:prstGeom prst="rect">
+            <a:avLst/>
+          </a:prstGeom>
+          <a:noFill/>
+        </p:spPr>
+        <p:txBody>
+          <a:bodyPr wrap="square">
+            <a:spAutoFit/>
+          </a:bodyPr>
+          <a:lstStyle/>
+          <a:p>
+            <a:r>
+              <a:rPr sz="1250" b="0">
+                <a:solidFill>
+                  <a:srgbClr val="666670"/>
+                </a:solidFill>
+                <a:latin typeface="맑은 고딕"/>
+              </a:rPr>
+              <a:t>LSTM · Transformer · RAG · LLM 에이전트</a:t>
+            </a:r>
+          </a:p>
+        </p:txBody>
+      </p:sp>
+      <p:sp>
+        <p:nvSpPr>
+          <p:cNvPr id="39" name="Rectangle 38"/>
+          <p:cNvSpPr/>
+          <p:nvPr/>
+        </p:nvSpPr>
+        <p:spPr>
+          <a:xfrm>
+            <a:off x="1463040" y="5468112"/>
+            <a:ext cx="10058400" cy="12700"/>
+          </a:xfrm>
+          <a:prstGeom prst="rect">
+            <a:avLst/>
+          </a:prstGeom>
+          <a:solidFill>
+            <a:srgbClr val="E6E6EA"/>
+          </a:solidFill>
+          <a:ln>
+            <a:noFill/>
+          </a:ln>
+          <a:effectLst/>
+        </p:spPr>
+        <p:style>
+          <a:lnRef idx="1">
+            <a:schemeClr val="accent1"/>
+          </a:lnRef>
+          <a:fillRef idx="3">
+            <a:schemeClr val="accent1"/>
+          </a:fillRef>
+          <a:effectRef idx="2">
+            <a:schemeClr val="accent1"/>
+          </a:effectRef>
+          <a:fontRef idx="minor">
+            <a:schemeClr val="lt1"/>
+          </a:fontRef>
+        </p:style>
+        <p:txBody>
+          <a:bodyPr rtlCol="0" anchor="ctr"/>
+          <a:lstStyle/>
+          <a:p>
+            <a:pPr algn="ctr"/>
+          </a:p>
+        </p:txBody>
+      </p:sp>
+      <p:sp>
+        <p:nvSpPr>
+          <p:cNvPr id="40" name="Rounded Rectangle 39"/>
+          <p:cNvSpPr/>
+          <p:nvPr/>
+        </p:nvSpPr>
+        <p:spPr>
+          <a:xfrm>
+            <a:off x="777240" y="5559552"/>
+            <a:ext cx="457200" cy="457200"/>
+          </a:xfrm>
+          <a:prstGeom prst="roundRect">
+            <a:avLst>
+              <a:gd name="adj" fmla="val 25000"/>
+            </a:avLst>
+          </a:prstGeom>
+          <a:solidFill>
+            <a:srgbClr val="FBE9F1"/>
+          </a:solidFill>
+          <a:ln>
+            <a:noFill/>
+          </a:ln>
+          <a:effectLst/>
+        </p:spPr>
+        <p:style>
+          <a:lnRef idx="1">
+            <a:schemeClr val="accent1"/>
+          </a:lnRef>
+          <a:fillRef idx="3">
+            <a:schemeClr val="accent1"/>
+          </a:fillRef>
+          <a:effectRef idx="2">
+            <a:schemeClr val="accent1"/>
+          </a:effectRef>
+          <a:fontRef idx="minor">
+            <a:schemeClr val="lt1"/>
+          </a:fontRef>
+        </p:style>
+        <p:txBody>
+          <a:bodyPr rtlCol="0" anchor="ctr"/>
+          <a:lstStyle/>
+          <a:p>
+            <a:pPr algn="ctr"/>
+          </a:p>
+        </p:txBody>
+      </p:sp>
+      <p:sp>
+        <p:nvSpPr>
+          <p:cNvPr id="41" name="TextBox 40"/>
+          <p:cNvSpPr txBox="1"/>
+          <p:nvPr/>
+        </p:nvSpPr>
+        <p:spPr>
+          <a:xfrm>
+            <a:off x="777240" y="5623560"/>
+            <a:ext cx="457200" cy="365760"/>
+          </a:xfrm>
+          <a:prstGeom prst="rect">
+            <a:avLst/>
+          </a:prstGeom>
+          <a:noFill/>
+        </p:spPr>
+        <p:txBody>
+          <a:bodyPr wrap="square">
+            <a:spAutoFit/>
+          </a:bodyPr>
+          <a:lstStyle/>
+          <a:p>
+            <a:pPr algn="ctr"/>
+            <a:r>
+              <a:rPr sz="1400" b="1">
+                <a:solidFill>
+                  <a:srgbClr val="E1306C"/>
+                </a:solidFill>
+                <a:latin typeface="Segoe UI"/>
+              </a:rPr>
+              <a:t>08</a:t>
+            </a:r>
+          </a:p>
+        </p:txBody>
+      </p:sp>
+      <p:sp>
+        <p:nvSpPr>
+          <p:cNvPr id="42" name="TextBox 41"/>
+          <p:cNvSpPr txBox="1"/>
+          <p:nvPr/>
+        </p:nvSpPr>
+        <p:spPr>
+          <a:xfrm>
+            <a:off x="1463040" y="5577840"/>
+            <a:ext cx="4937760" cy="457200"/>
+          </a:xfrm>
+          <a:prstGeom prst="rect">
+            <a:avLst/>
+          </a:prstGeom>
+          <a:noFill/>
+        </p:spPr>
+        <p:txBody>
+          <a:bodyPr wrap="square">
+            <a:spAutoFit/>
+          </a:bodyPr>
+          <a:lstStyle/>
+          <a:p>
+            <a:r>
+              <a:rPr sz="1600" b="1">
+                <a:solidFill>
+                  <a:srgbClr val="1A1A1E"/>
+                </a:solidFill>
+                <a:latin typeface="맑은 고딕"/>
+              </a:rPr>
               <a:t>부록: 코드 · 한계</a:t>
             </a:r>
           </a:p>
@@ -9382,13 +9582,13 @@
       </p:sp>
       <p:sp>
         <p:nvSpPr>
-          <p:cNvPr id="38" name="TextBox 37"/>
-          <p:cNvSpPr txBox="1"/>
-          <p:nvPr/>
-        </p:nvSpPr>
-        <p:spPr>
-          <a:xfrm>
-            <a:off x="6492240" y="5513832"/>
+          <p:cNvPr id="43" name="TextBox 42"/>
+          <p:cNvSpPr txBox="1"/>
+          <p:nvPr/>
+        </p:nvSpPr>
+        <p:spPr>
+          <a:xfrm>
+            <a:off x="6492240" y="5605272"/>
             <a:ext cx="5212080" cy="457200"/>
           </a:xfrm>
           <a:prstGeom prst="rect">
@@ -9416,7 +9616,7 @@
       </p:sp>
       <p:sp>
         <p:nvSpPr>
-          <p:cNvPr id="39" name="TextBox 38"/>
+          <p:cNvPr id="44" name="TextBox 43"/>
           <p:cNvSpPr txBox="1"/>
           <p:nvPr/>
         </p:nvSpPr>
@@ -9450,7 +9650,7 @@
       </p:sp>
       <p:sp>
         <p:nvSpPr>
-          <p:cNvPr id="40" name="TextBox 39"/>
+          <p:cNvPr id="45" name="TextBox 44"/>
           <p:cNvSpPr txBox="1"/>
           <p:nvPr/>
         </p:nvSpPr>
@@ -12043,88 +12243,20 @@
       <p:grpSpPr/>
       <p:sp>
         <p:nvSpPr>
-          <p:cNvPr id="2" name="TextBox 1"/>
-          <p:cNvSpPr txBox="1"/>
-          <p:nvPr/>
-        </p:nvSpPr>
-        <p:spPr>
-          <a:xfrm>
-            <a:off x="658368" y="384048"/>
-            <a:ext cx="10789920" cy="292608"/>
-          </a:xfrm>
-          <a:prstGeom prst="rect">
-            <a:avLst/>
-          </a:prstGeom>
-          <a:noFill/>
-        </p:spPr>
-        <p:txBody>
-          <a:bodyPr wrap="square">
-            <a:spAutoFit/>
-          </a:bodyPr>
-          <a:lstStyle/>
-          <a:p>
-            <a:r>
-              <a:rPr sz="1050" b="1">
-                <a:solidFill>
-                  <a:srgbClr val="E1306C"/>
-                </a:solidFill>
-                <a:latin typeface="Segoe UI"/>
-              </a:rPr>
-              <a:t>07 · CODE</a:t>
-            </a:r>
-          </a:p>
-        </p:txBody>
-      </p:sp>
-      <p:sp>
-        <p:nvSpPr>
-          <p:cNvPr id="3" name="TextBox 2"/>
-          <p:cNvSpPr txBox="1"/>
-          <p:nvPr/>
-        </p:nvSpPr>
-        <p:spPr>
-          <a:xfrm>
-            <a:off x="640080" y="658368"/>
-            <a:ext cx="10881360" cy="640080"/>
-          </a:xfrm>
-          <a:prstGeom prst="rect">
-            <a:avLst/>
-          </a:prstGeom>
-          <a:noFill/>
-        </p:spPr>
-        <p:txBody>
-          <a:bodyPr wrap="square">
-            <a:spAutoFit/>
-          </a:bodyPr>
-          <a:lstStyle/>
-          <a:p>
-            <a:r>
-              <a:rPr sz="2700" b="1">
-                <a:solidFill>
-                  <a:srgbClr val="1A1A1E"/>
-                </a:solidFill>
-                <a:latin typeface="맑은 고딕"/>
-              </a:rPr>
-              <a:t>핵심 코드 ①  데이터 → 평활화 → 차분</a:t>
-            </a:r>
-          </a:p>
-        </p:txBody>
-      </p:sp>
-      <p:sp>
-        <p:nvSpPr>
-          <p:cNvPr id="4" name="Rectangle 3"/>
+          <p:cNvPr id="2" name="Rectangle 1"/>
           <p:cNvSpPr/>
           <p:nvPr/>
         </p:nvSpPr>
         <p:spPr>
           <a:xfrm>
-            <a:off x="658368" y="1298448"/>
-            <a:ext cx="10881360" cy="12700"/>
+            <a:off x="0" y="0"/>
+            <a:ext cx="12191695" cy="6858000"/>
           </a:xfrm>
           <a:prstGeom prst="rect">
             <a:avLst/>
           </a:prstGeom>
           <a:solidFill>
-            <a:srgbClr val="E6E6EA"/>
+            <a:srgbClr val="1A1A1E"/>
           </a:solidFill>
           <a:ln>
             <a:noFill/>
@@ -12155,34 +12287,103 @@
       </p:sp>
       <p:sp>
         <p:nvSpPr>
+          <p:cNvPr id="3" name="TextBox 2"/>
+          <p:cNvSpPr txBox="1"/>
+          <p:nvPr/>
+        </p:nvSpPr>
+        <p:spPr>
+          <a:xfrm>
+            <a:off x="7772400" y="182880"/>
+            <a:ext cx="4206240" cy="3657600"/>
+          </a:xfrm>
+          <a:prstGeom prst="rect">
+            <a:avLst/>
+          </a:prstGeom>
+          <a:noFill/>
+        </p:spPr>
+        <p:txBody>
+          <a:bodyPr wrap="square">
+            <a:spAutoFit/>
+          </a:bodyPr>
+          <a:lstStyle/>
+          <a:p>
+            <a:pPr algn="r"/>
+            <a:r>
+              <a:rPr sz="20000" b="1">
+                <a:solidFill>
+                  <a:srgbClr val="2B2B33"/>
+                </a:solidFill>
+                <a:latin typeface="Segoe UI"/>
+              </a:rPr>
+              <a:t>04</a:t>
+            </a:r>
+          </a:p>
+        </p:txBody>
+      </p:sp>
+      <p:sp>
+        <p:nvSpPr>
+          <p:cNvPr id="4" name="TextBox 3"/>
+          <p:cNvSpPr txBox="1"/>
+          <p:nvPr/>
+        </p:nvSpPr>
+        <p:spPr>
+          <a:xfrm>
+            <a:off x="868680" y="2697480"/>
+            <a:ext cx="10058400" cy="548640"/>
+          </a:xfrm>
+          <a:prstGeom prst="rect">
+            <a:avLst/>
+          </a:prstGeom>
+          <a:noFill/>
+        </p:spPr>
+        <p:txBody>
+          <a:bodyPr wrap="square">
+            <a:spAutoFit/>
+          </a:bodyPr>
+          <a:lstStyle/>
+          <a:p>
+            <a:r>
+              <a:rPr sz="1400" b="1">
+                <a:solidFill>
+                  <a:srgbClr val="E1306C"/>
+                </a:solidFill>
+                <a:latin typeface="Segoe UI"/>
+              </a:rPr>
+              <a:t>PART 3 · AI EXTENSION</a:t>
+            </a:r>
+          </a:p>
+        </p:txBody>
+      </p:sp>
+      <p:sp>
+        <p:nvSpPr>
           <p:cNvPr id="5" name="TextBox 4"/>
           <p:cNvSpPr txBox="1"/>
           <p:nvPr/>
         </p:nvSpPr>
         <p:spPr>
           <a:xfrm>
-            <a:off x="731520" y="1371600"/>
-            <a:ext cx="10789920" cy="320040"/>
-          </a:xfrm>
-          <a:prstGeom prst="rect">
-            <a:avLst/>
-          </a:prstGeom>
-          <a:noFill/>
-        </p:spPr>
-        <p:txBody>
-          <a:bodyPr wrap="square">
-            <a:spAutoFit/>
-          </a:bodyPr>
-          <a:lstStyle/>
-          <a:p>
-            <a:r>
-              <a:rPr sz="1350" b="1">
-                <a:solidFill>
-                  <a:srgbClr val="E1306C"/>
-                </a:solidFill>
-                <a:latin typeface="맑은 고딕"/>
-              </a:rPr>
-              <a:t>●  tidy 패널을 날짜×태그 행렬로 (pandas pivot)</a:t>
+            <a:off x="841248" y="3200400"/>
+            <a:ext cx="10515600" cy="1371600"/>
+          </a:xfrm>
+          <a:prstGeom prst="rect">
+            <a:avLst/>
+          </a:prstGeom>
+          <a:noFill/>
+        </p:spPr>
+        <p:txBody>
+          <a:bodyPr wrap="square">
+            <a:spAutoFit/>
+          </a:bodyPr>
+          <a:lstStyle/>
+          <a:p>
+            <a:r>
+              <a:rPr sz="4000" b="1">
+                <a:solidFill>
+                  <a:srgbClr val="FFFFFF"/>
+                </a:solidFill>
+                <a:latin typeface="맑은 고딕"/>
+              </a:rPr>
+              <a:t>통계를 넘어, AI로 확장하기</a:t>
             </a:r>
           </a:p>
         </p:txBody>
@@ -12195,14 +12396,14 @@
         </p:nvSpPr>
         <p:spPr>
           <a:xfrm>
-            <a:off x="914400" y="1755648"/>
-            <a:ext cx="10424160" cy="457200"/>
+            <a:off x="868680" y="4617720"/>
+            <a:ext cx="1371600" cy="38100"/>
           </a:xfrm>
           <a:prstGeom prst="rect">
             <a:avLst/>
           </a:prstGeom>
           <a:solidFill>
-            <a:srgbClr val="1E1E26"/>
+            <a:srgbClr val="E1306C"/>
           </a:solidFill>
           <a:ln>
             <a:noFill/>
@@ -12228,478 +12429,6 @@
           <a:lstStyle/>
           <a:p>
             <a:pPr algn="ctr"/>
-          </a:p>
-        </p:txBody>
-      </p:sp>
-      <p:sp>
-        <p:nvSpPr>
-          <p:cNvPr id="7" name="TextBox 6"/>
-          <p:cNvSpPr txBox="1"/>
-          <p:nvPr/>
-        </p:nvSpPr>
-        <p:spPr>
-          <a:xfrm>
-            <a:off x="1143000" y="1847088"/>
-            <a:ext cx="10058400" cy="310896"/>
-          </a:xfrm>
-          <a:prstGeom prst="rect">
-            <a:avLst/>
-          </a:prstGeom>
-          <a:noFill/>
-        </p:spPr>
-        <p:txBody>
-          <a:bodyPr wrap="square">
-            <a:spAutoFit/>
-          </a:bodyPr>
-          <a:lstStyle/>
-          <a:p>
-            <a:r>
-              <a:rPr sz="1200" b="0">
-                <a:solidFill>
-                  <a:srgbClr val="E8E8EE"/>
-                </a:solidFill>
-                <a:latin typeface="Consolas"/>
-              </a:rPr>
-              <a:t>wide = panel.pivot(index="date", columns="hashtag", values="ratio")</a:t>
-            </a:r>
-          </a:p>
-        </p:txBody>
-      </p:sp>
-      <p:sp>
-        <p:nvSpPr>
-          <p:cNvPr id="8" name="TextBox 7"/>
-          <p:cNvSpPr txBox="1"/>
-          <p:nvPr/>
-        </p:nvSpPr>
-        <p:spPr>
-          <a:xfrm>
-            <a:off x="731520" y="2377440"/>
-            <a:ext cx="10789920" cy="320040"/>
-          </a:xfrm>
-          <a:prstGeom prst="rect">
-            <a:avLst/>
-          </a:prstGeom>
-          <a:noFill/>
-        </p:spPr>
-        <p:txBody>
-          <a:bodyPr wrap="square">
-            <a:spAutoFit/>
-          </a:bodyPr>
-          <a:lstStyle/>
-          <a:p>
-            <a:r>
-              <a:rPr sz="1350" b="1">
-                <a:solidFill>
-                  <a:srgbClr val="E1306C"/>
-                </a:solidFill>
-                <a:latin typeface="맑은 고딕"/>
-              </a:rPr>
-              <a:t>●  이동평균 평활화 — 7일 중심 윈도우가 주간 주기를 상쇄</a:t>
-            </a:r>
-          </a:p>
-        </p:txBody>
-      </p:sp>
-      <p:sp>
-        <p:nvSpPr>
-          <p:cNvPr id="9" name="Rectangle 8"/>
-          <p:cNvSpPr/>
-          <p:nvPr/>
-        </p:nvSpPr>
-        <p:spPr>
-          <a:xfrm>
-            <a:off x="914400" y="2761488"/>
-            <a:ext cx="10424160" cy="457200"/>
-          </a:xfrm>
-          <a:prstGeom prst="rect">
-            <a:avLst/>
-          </a:prstGeom>
-          <a:solidFill>
-            <a:srgbClr val="1E1E26"/>
-          </a:solidFill>
-          <a:ln>
-            <a:noFill/>
-          </a:ln>
-          <a:effectLst/>
-        </p:spPr>
-        <p:style>
-          <a:lnRef idx="1">
-            <a:schemeClr val="accent1"/>
-          </a:lnRef>
-          <a:fillRef idx="3">
-            <a:schemeClr val="accent1"/>
-          </a:fillRef>
-          <a:effectRef idx="2">
-            <a:schemeClr val="accent1"/>
-          </a:effectRef>
-          <a:fontRef idx="minor">
-            <a:schemeClr val="lt1"/>
-          </a:fontRef>
-        </p:style>
-        <p:txBody>
-          <a:bodyPr rtlCol="0" anchor="ctr"/>
-          <a:lstStyle/>
-          <a:p>
-            <a:pPr algn="ctr"/>
-          </a:p>
-        </p:txBody>
-      </p:sp>
-      <p:sp>
-        <p:nvSpPr>
-          <p:cNvPr id="10" name="TextBox 9"/>
-          <p:cNvSpPr txBox="1"/>
-          <p:nvPr/>
-        </p:nvSpPr>
-        <p:spPr>
-          <a:xfrm>
-            <a:off x="1143000" y="2852928"/>
-            <a:ext cx="10058400" cy="310896"/>
-          </a:xfrm>
-          <a:prstGeom prst="rect">
-            <a:avLst/>
-          </a:prstGeom>
-          <a:noFill/>
-        </p:spPr>
-        <p:txBody>
-          <a:bodyPr wrap="square">
-            <a:spAutoFit/>
-          </a:bodyPr>
-          <a:lstStyle/>
-          <a:p>
-            <a:r>
-              <a:rPr sz="1200" b="0">
-                <a:solidFill>
-                  <a:srgbClr val="E8E8EE"/>
-                </a:solidFill>
-                <a:latin typeface="Consolas"/>
-              </a:rPr>
-              <a:t>ma7 = s.rolling(7, center=True).mean()   # 추세 + 노이즈 제거</a:t>
-            </a:r>
-          </a:p>
-        </p:txBody>
-      </p:sp>
-      <p:sp>
-        <p:nvSpPr>
-          <p:cNvPr id="11" name="TextBox 10"/>
-          <p:cNvSpPr txBox="1"/>
-          <p:nvPr/>
-        </p:nvSpPr>
-        <p:spPr>
-          <a:xfrm>
-            <a:off x="731520" y="3383280"/>
-            <a:ext cx="10789920" cy="320040"/>
-          </a:xfrm>
-          <a:prstGeom prst="rect">
-            <a:avLst/>
-          </a:prstGeom>
-          <a:noFill/>
-        </p:spPr>
-        <p:txBody>
-          <a:bodyPr wrap="square">
-            <a:spAutoFit/>
-          </a:bodyPr>
-          <a:lstStyle/>
-          <a:p>
-            <a:r>
-              <a:rPr sz="1350" b="1">
-                <a:solidFill>
-                  <a:srgbClr val="E1306C"/>
-                </a:solidFill>
-                <a:latin typeface="맑은 고딕"/>
-              </a:rPr>
-              <a:t>●  1차 차분으로 정상화 (ARIMA의 d=1)</a:t>
-            </a:r>
-          </a:p>
-        </p:txBody>
-      </p:sp>
-      <p:sp>
-        <p:nvSpPr>
-          <p:cNvPr id="12" name="Rectangle 11"/>
-          <p:cNvSpPr/>
-          <p:nvPr/>
-        </p:nvSpPr>
-        <p:spPr>
-          <a:xfrm>
-            <a:off x="914400" y="3767328"/>
-            <a:ext cx="10424160" cy="713232"/>
-          </a:xfrm>
-          <a:prstGeom prst="rect">
-            <a:avLst/>
-          </a:prstGeom>
-          <a:solidFill>
-            <a:srgbClr val="1E1E26"/>
-          </a:solidFill>
-          <a:ln>
-            <a:noFill/>
-          </a:ln>
-          <a:effectLst/>
-        </p:spPr>
-        <p:style>
-          <a:lnRef idx="1">
-            <a:schemeClr val="accent1"/>
-          </a:lnRef>
-          <a:fillRef idx="3">
-            <a:schemeClr val="accent1"/>
-          </a:fillRef>
-          <a:effectRef idx="2">
-            <a:schemeClr val="accent1"/>
-          </a:effectRef>
-          <a:fontRef idx="minor">
-            <a:schemeClr val="lt1"/>
-          </a:fontRef>
-        </p:style>
-        <p:txBody>
-          <a:bodyPr rtlCol="0" anchor="ctr"/>
-          <a:lstStyle/>
-          <a:p>
-            <a:pPr algn="ctr"/>
-          </a:p>
-        </p:txBody>
-      </p:sp>
-      <p:sp>
-        <p:nvSpPr>
-          <p:cNvPr id="13" name="TextBox 12"/>
-          <p:cNvSpPr txBox="1"/>
-          <p:nvPr/>
-        </p:nvSpPr>
-        <p:spPr>
-          <a:xfrm>
-            <a:off x="1143000" y="3858768"/>
-            <a:ext cx="10058400" cy="566928"/>
-          </a:xfrm>
-          <a:prstGeom prst="rect">
-            <a:avLst/>
-          </a:prstGeom>
-          <a:noFill/>
-        </p:spPr>
-        <p:txBody>
-          <a:bodyPr wrap="square">
-            <a:spAutoFit/>
-          </a:bodyPr>
-          <a:lstStyle/>
-          <a:p>
-            <a:r>
-              <a:rPr sz="1200" b="0">
-                <a:solidFill>
-                  <a:srgbClr val="E8E8EE"/>
-                </a:solidFill>
-                <a:latin typeface="Consolas"/>
-              </a:rPr>
-              <a:t>diff = s.diff()                          # X_t - X_{t-1}</a:t>
-            </a:r>
-          </a:p>
-          <a:p>
-            <a:r>
-              <a:rPr sz="1200" b="0">
-                <a:solidFill>
-                  <a:srgbClr val="E8E8EE"/>
-                </a:solidFill>
-                <a:latin typeface="Consolas"/>
-              </a:rPr>
-              <a:t>diff.rolling(28).mean()                  # 평균이 0에 붙는지 진단</a:t>
-            </a:r>
-          </a:p>
-        </p:txBody>
-      </p:sp>
-      <p:sp>
-        <p:nvSpPr>
-          <p:cNvPr id="14" name="TextBox 13"/>
-          <p:cNvSpPr txBox="1"/>
-          <p:nvPr/>
-        </p:nvSpPr>
-        <p:spPr>
-          <a:xfrm>
-            <a:off x="731520" y="4645152"/>
-            <a:ext cx="10789920" cy="320040"/>
-          </a:xfrm>
-          <a:prstGeom prst="rect">
-            <a:avLst/>
-          </a:prstGeom>
-          <a:noFill/>
-        </p:spPr>
-        <p:txBody>
-          <a:bodyPr wrap="square">
-            <a:spAutoFit/>
-          </a:bodyPr>
-          <a:lstStyle/>
-          <a:p>
-            <a:r>
-              <a:rPr sz="1350" b="1">
-                <a:solidFill>
-                  <a:srgbClr val="E1306C"/>
-                </a:solidFill>
-                <a:latin typeface="맑은 고딕"/>
-              </a:rPr>
-              <a:t>●  가법 분해 — 추세는 이동평균, 계절은 '같은 요일끼리 평균'</a:t>
-            </a:r>
-          </a:p>
-        </p:txBody>
-      </p:sp>
-      <p:sp>
-        <p:nvSpPr>
-          <p:cNvPr id="15" name="Rectangle 14"/>
-          <p:cNvSpPr/>
-          <p:nvPr/>
-        </p:nvSpPr>
-        <p:spPr>
-          <a:xfrm>
-            <a:off x="914400" y="5029200"/>
-            <a:ext cx="10424160" cy="969264"/>
-          </a:xfrm>
-          <a:prstGeom prst="rect">
-            <a:avLst/>
-          </a:prstGeom>
-          <a:solidFill>
-            <a:srgbClr val="1E1E26"/>
-          </a:solidFill>
-          <a:ln>
-            <a:noFill/>
-          </a:ln>
-          <a:effectLst/>
-        </p:spPr>
-        <p:style>
-          <a:lnRef idx="1">
-            <a:schemeClr val="accent1"/>
-          </a:lnRef>
-          <a:fillRef idx="3">
-            <a:schemeClr val="accent1"/>
-          </a:fillRef>
-          <a:effectRef idx="2">
-            <a:schemeClr val="accent1"/>
-          </a:effectRef>
-          <a:fontRef idx="minor">
-            <a:schemeClr val="lt1"/>
-          </a:fontRef>
-        </p:style>
-        <p:txBody>
-          <a:bodyPr rtlCol="0" anchor="ctr"/>
-          <a:lstStyle/>
-          <a:p>
-            <a:pPr algn="ctr"/>
-          </a:p>
-        </p:txBody>
-      </p:sp>
-      <p:sp>
-        <p:nvSpPr>
-          <p:cNvPr id="16" name="TextBox 15"/>
-          <p:cNvSpPr txBox="1"/>
-          <p:nvPr/>
-        </p:nvSpPr>
-        <p:spPr>
-          <a:xfrm>
-            <a:off x="1143000" y="5120640"/>
-            <a:ext cx="10058400" cy="822960"/>
-          </a:xfrm>
-          <a:prstGeom prst="rect">
-            <a:avLst/>
-          </a:prstGeom>
-          <a:noFill/>
-        </p:spPr>
-        <p:txBody>
-          <a:bodyPr wrap="square">
-            <a:spAutoFit/>
-          </a:bodyPr>
-          <a:lstStyle/>
-          <a:p>
-            <a:r>
-              <a:rPr sz="1200" b="0">
-                <a:solidFill>
-                  <a:srgbClr val="E8E8EE"/>
-                </a:solidFill>
-                <a:latin typeface="Consolas"/>
-              </a:rPr>
-              <a:t>trend    = s.rolling(7, center=True).mean()</a:t>
-            </a:r>
-          </a:p>
-          <a:p>
-            <a:r>
-              <a:rPr sz="1200" b="0">
-                <a:solidFill>
-                  <a:srgbClr val="E8E8EE"/>
-                </a:solidFill>
-                <a:latin typeface="Consolas"/>
-              </a:rPr>
-              <a:t>seasonal = (s - trend).groupby(s.index.weekday).transform("mean")</a:t>
-            </a:r>
-          </a:p>
-          <a:p>
-            <a:r>
-              <a:rPr sz="1200" b="0">
-                <a:solidFill>
-                  <a:srgbClr val="E8E8EE"/>
-                </a:solidFill>
-                <a:latin typeface="Consolas"/>
-              </a:rPr>
-              <a:t>residual = s - trend - seasonal          # 백색잡음이면 성공</a:t>
-            </a:r>
-          </a:p>
-        </p:txBody>
-      </p:sp>
-      <p:sp>
-        <p:nvSpPr>
-          <p:cNvPr id="17" name="TextBox 16"/>
-          <p:cNvSpPr txBox="1"/>
-          <p:nvPr/>
-        </p:nvSpPr>
-        <p:spPr>
-          <a:xfrm>
-            <a:off x="640080" y="6437376"/>
-            <a:ext cx="8229600" cy="274320"/>
-          </a:xfrm>
-          <a:prstGeom prst="rect">
-            <a:avLst/>
-          </a:prstGeom>
-          <a:noFill/>
-        </p:spPr>
-        <p:txBody>
-          <a:bodyPr wrap="square">
-            <a:spAutoFit/>
-          </a:bodyPr>
-          <a:lstStyle/>
-          <a:p>
-            <a:r>
-              <a:rPr sz="900" b="0">
-                <a:solidFill>
-                  <a:srgbClr val="9A9AA2"/>
-                </a:solidFill>
-                <a:latin typeface="맑은 고딕"/>
-              </a:rPr>
-              <a:t>시계열 데이터 분석  ·  한국 해시태그 트렌드</a:t>
-            </a:r>
-          </a:p>
-        </p:txBody>
-      </p:sp>
-      <p:sp>
-        <p:nvSpPr>
-          <p:cNvPr id="18" name="TextBox 17"/>
-          <p:cNvSpPr txBox="1"/>
-          <p:nvPr/>
-        </p:nvSpPr>
-        <p:spPr>
-          <a:xfrm>
-            <a:off x="11002975" y="6437376"/>
-            <a:ext cx="822960" cy="274320"/>
-          </a:xfrm>
-          <a:prstGeom prst="rect">
-            <a:avLst/>
-          </a:prstGeom>
-          <a:noFill/>
-        </p:spPr>
-        <p:txBody>
-          <a:bodyPr wrap="square">
-            <a:spAutoFit/>
-          </a:bodyPr>
-          <a:lstStyle/>
-          <a:p>
-            <a:pPr algn="r"/>
-            <a:r>
-              <a:rPr sz="900" b="1">
-                <a:solidFill>
-                  <a:srgbClr val="E1306C"/>
-                </a:solidFill>
-                <a:latin typeface="맑은 고딕"/>
-              </a:rPr>
-              <a:t>21</a:t>
-            </a:r>
           </a:p>
         </p:txBody>
       </p:sp>
@@ -12750,7 +12479,7 @@
                 </a:solidFill>
                 <a:latin typeface="Segoe UI"/>
               </a:rPr>
-              <a:t>07 · CODE</a:t>
+              <a:t>07 · WHY AI</a:t>
             </a:r>
           </a:p>
         </p:txBody>
@@ -12784,7 +12513,7 @@
                 </a:solidFill>
                 <a:latin typeface="맑은 고딕"/>
               </a:rPr>
-              <a:t>핵심 코드 ②  ACF → 예측</a:t>
+              <a:t>왜 딥러닝·AI인가</a:t>
             </a:r>
           </a:p>
         </p:txBody>
@@ -12835,54 +12564,22 @@
       </p:sp>
       <p:sp>
         <p:nvSpPr>
-          <p:cNvPr id="5" name="TextBox 4"/>
-          <p:cNvSpPr txBox="1"/>
-          <p:nvPr/>
-        </p:nvSpPr>
-        <p:spPr>
-          <a:xfrm>
-            <a:off x="731520" y="1371600"/>
-            <a:ext cx="10789920" cy="320040"/>
-          </a:xfrm>
-          <a:prstGeom prst="rect">
-            <a:avLst/>
-          </a:prstGeom>
-          <a:noFill/>
-        </p:spPr>
-        <p:txBody>
-          <a:bodyPr wrap="square">
-            <a:spAutoFit/>
-          </a:bodyPr>
-          <a:lstStyle/>
-          <a:p>
-            <a:r>
-              <a:rPr sz="1350" b="1">
-                <a:solidFill>
-                  <a:srgbClr val="E1306C"/>
-                </a:solidFill>
-                <a:latin typeface="맑은 고딕"/>
-              </a:rPr>
-              <a:t>●  표본 ACF 직접 구현 — ρ(k) = γ(k)/γ(0)</a:t>
-            </a:r>
-          </a:p>
-        </p:txBody>
-      </p:sp>
-      <p:sp>
-        <p:nvSpPr>
-          <p:cNvPr id="6" name="Rectangle 5"/>
+          <p:cNvPr id="5" name="Rounded Rectangle 4"/>
           <p:cNvSpPr/>
           <p:nvPr/>
         </p:nvSpPr>
         <p:spPr>
           <a:xfrm>
-            <a:off x="914400" y="1755648"/>
-            <a:ext cx="10424160" cy="969264"/>
-          </a:xfrm>
-          <a:prstGeom prst="rect">
-            <a:avLst/>
+            <a:off x="658368" y="1536192"/>
+            <a:ext cx="10881360" cy="841248"/>
+          </a:xfrm>
+          <a:prstGeom prst="roundRect">
+            <a:avLst>
+              <a:gd name="adj" fmla="val 8000"/>
+            </a:avLst>
           </a:prstGeom>
           <a:solidFill>
-            <a:srgbClr val="1E1E26"/>
+            <a:srgbClr val="FBE9F1"/>
           </a:solidFill>
           <a:ln>
             <a:noFill/>
@@ -12913,110 +12610,20 @@
       </p:sp>
       <p:sp>
         <p:nvSpPr>
-          <p:cNvPr id="7" name="TextBox 6"/>
-          <p:cNvSpPr txBox="1"/>
-          <p:nvPr/>
-        </p:nvSpPr>
-        <p:spPr>
-          <a:xfrm>
-            <a:off x="1143000" y="1847088"/>
-            <a:ext cx="10058400" cy="822960"/>
-          </a:xfrm>
-          <a:prstGeom prst="rect">
-            <a:avLst/>
-          </a:prstGeom>
-          <a:noFill/>
-        </p:spPr>
-        <p:txBody>
-          <a:bodyPr wrap="square">
-            <a:spAutoFit/>
-          </a:bodyPr>
-          <a:lstStyle/>
-          <a:p>
-            <a:r>
-              <a:rPr sz="1200" b="0">
-                <a:solidFill>
-                  <a:srgbClr val="E8E8EE"/>
-                </a:solidFill>
-                <a:latin typeface="Consolas"/>
-              </a:rPr>
-              <a:t>x = x - x.mean()</a:t>
-            </a:r>
-          </a:p>
-          <a:p>
-            <a:r>
-              <a:rPr sz="1200" b="0">
-                <a:solidFill>
-                  <a:srgbClr val="E8E8EE"/>
-                </a:solidFill>
-                <a:latin typeface="Consolas"/>
-              </a:rPr>
-              <a:t>rho_k = np.dot(x[:n-k], x[k:]) / np.dot(x, x)</a:t>
-            </a:r>
-          </a:p>
-          <a:p>
-            <a:r>
-              <a:rPr sz="1200" b="0">
-                <a:solidFill>
-                  <a:srgbClr val="E8E8EE"/>
-                </a:solidFill>
-                <a:latin typeface="Consolas"/>
-              </a:rPr>
-              <a:t>band  = 1.96 / np.sqrt(n)                # 백색잡음 95% 한계</a:t>
-            </a:r>
-          </a:p>
-        </p:txBody>
-      </p:sp>
-      <p:sp>
-        <p:nvSpPr>
-          <p:cNvPr id="8" name="TextBox 7"/>
-          <p:cNvSpPr txBox="1"/>
-          <p:nvPr/>
-        </p:nvSpPr>
-        <p:spPr>
-          <a:xfrm>
-            <a:off x="731520" y="2889504"/>
-            <a:ext cx="10789920" cy="320040"/>
-          </a:xfrm>
-          <a:prstGeom prst="rect">
-            <a:avLst/>
-          </a:prstGeom>
-          <a:noFill/>
-        </p:spPr>
-        <p:txBody>
-          <a:bodyPr wrap="square">
-            <a:spAutoFit/>
-          </a:bodyPr>
-          <a:lstStyle/>
-          <a:p>
-            <a:r>
-              <a:rPr sz="1350" b="1">
-                <a:solidFill>
-                  <a:srgbClr val="E1306C"/>
-                </a:solidFill>
-                <a:latin typeface="맑은 고딕"/>
-              </a:rPr>
-              <a:t>●  선형추세 적합 (최소제곱) + 요일 더미 계절성</a:t>
-            </a:r>
-          </a:p>
-        </p:txBody>
-      </p:sp>
-      <p:sp>
-        <p:nvSpPr>
-          <p:cNvPr id="9" name="Rectangle 8"/>
+          <p:cNvPr id="6" name="Rectangle 5"/>
           <p:cNvSpPr/>
           <p:nvPr/>
         </p:nvSpPr>
         <p:spPr>
           <a:xfrm>
-            <a:off x="914400" y="3273552"/>
-            <a:ext cx="10424160" cy="969264"/>
+            <a:off x="658368" y="1536192"/>
+            <a:ext cx="91440" cy="841248"/>
           </a:xfrm>
           <a:prstGeom prst="rect">
             <a:avLst/>
           </a:prstGeom>
           <a:solidFill>
-            <a:srgbClr val="1E1E26"/>
+            <a:srgbClr val="E1306C"/>
           </a:solidFill>
           <a:ln>
             <a:noFill/>
@@ -13047,186 +12654,192 @@
       </p:sp>
       <p:sp>
         <p:nvSpPr>
-          <p:cNvPr id="10" name="TextBox 9"/>
-          <p:cNvSpPr txBox="1"/>
-          <p:nvPr/>
-        </p:nvSpPr>
-        <p:spPr>
-          <a:xfrm>
-            <a:off x="1143000" y="3364992"/>
-            <a:ext cx="10058400" cy="822960"/>
-          </a:xfrm>
-          <a:prstGeom prst="rect">
-            <a:avLst/>
-          </a:prstGeom>
-          <a:noFill/>
-        </p:spPr>
-        <p:txBody>
-          <a:bodyPr wrap="square">
-            <a:spAutoFit/>
-          </a:bodyPr>
-          <a:lstStyle/>
-          <a:p>
-            <a:r>
-              <a:rPr sz="1200" b="0">
-                <a:solidFill>
-                  <a:srgbClr val="E8E8EE"/>
-                </a:solidFill>
-                <a:latin typeface="Consolas"/>
-              </a:rPr>
-              <a:t>coef = np.polyfit(t, s.values, 1)        # 기울기·절편</a:t>
-            </a:r>
-          </a:p>
-          <a:p>
-            <a:r>
-              <a:rPr sz="1200" b="0">
-                <a:solidFill>
-                  <a:srgbClr val="E8E8EE"/>
-                </a:solidFill>
-                <a:latin typeface="Consolas"/>
-              </a:rPr>
-              <a:t>seasonal = pd.Series(s.values - np.polyval(coef, t)) \</a:t>
-            </a:r>
-          </a:p>
-          <a:p>
-            <a:r>
-              <a:rPr sz="1200" b="0">
-                <a:solidFill>
-                  <a:srgbClr val="E8E8EE"/>
-                </a:solidFill>
-                <a:latin typeface="Consolas"/>
-              </a:rPr>
-              <a:t>             .groupby(s.index.weekday).mean()</a:t>
-            </a:r>
-          </a:p>
-        </p:txBody>
-      </p:sp>
-      <p:sp>
-        <p:nvSpPr>
-          <p:cNvPr id="11" name="TextBox 10"/>
-          <p:cNvSpPr txBox="1"/>
-          <p:nvPr/>
-        </p:nvSpPr>
-        <p:spPr>
-          <a:xfrm>
-            <a:off x="731520" y="4407408"/>
-            <a:ext cx="10789920" cy="320040"/>
-          </a:xfrm>
-          <a:prstGeom prst="rect">
-            <a:avLst/>
-          </a:prstGeom>
-          <a:noFill/>
-        </p:spPr>
-        <p:txBody>
-          <a:bodyPr wrap="square">
-            <a:spAutoFit/>
-          </a:bodyPr>
-          <a:lstStyle/>
-          <a:p>
-            <a:r>
-              <a:rPr sz="1350" b="1">
-                <a:solidFill>
-                  <a:srgbClr val="E1306C"/>
-                </a:solidFill>
-                <a:latin typeface="맑은 고딕"/>
-              </a:rPr>
-              <a:t>●  14일 외삽 + 95% 예측구간 (잔차 표준편차 기반)</a:t>
-            </a:r>
-          </a:p>
-        </p:txBody>
-      </p:sp>
-      <p:sp>
-        <p:nvSpPr>
-          <p:cNvPr id="12" name="Rectangle 11"/>
-          <p:cNvSpPr/>
-          <p:nvPr/>
-        </p:nvSpPr>
-        <p:spPr>
-          <a:xfrm>
-            <a:off x="914400" y="4791456"/>
-            <a:ext cx="10424160" cy="713232"/>
-          </a:xfrm>
-          <a:prstGeom prst="rect">
-            <a:avLst/>
-          </a:prstGeom>
-          <a:solidFill>
-            <a:srgbClr val="1E1E26"/>
-          </a:solidFill>
-          <a:ln>
-            <a:noFill/>
-          </a:ln>
-          <a:effectLst/>
-        </p:spPr>
-        <p:style>
-          <a:lnRef idx="1">
-            <a:schemeClr val="accent1"/>
-          </a:lnRef>
-          <a:fillRef idx="3">
-            <a:schemeClr val="accent1"/>
-          </a:fillRef>
-          <a:effectRef idx="2">
-            <a:schemeClr val="accent1"/>
-          </a:effectRef>
-          <a:fontRef idx="minor">
-            <a:schemeClr val="lt1"/>
-          </a:fontRef>
-        </p:style>
-        <p:txBody>
-          <a:bodyPr rtlCol="0" anchor="ctr"/>
-          <a:lstStyle/>
-          <a:p>
-            <a:pPr algn="ctr"/>
-          </a:p>
-        </p:txBody>
-      </p:sp>
-      <p:sp>
-        <p:nvSpPr>
-          <p:cNvPr id="13" name="TextBox 12"/>
-          <p:cNvSpPr txBox="1"/>
-          <p:nvPr/>
-        </p:nvSpPr>
-        <p:spPr>
-          <a:xfrm>
-            <a:off x="1143000" y="4882896"/>
-            <a:ext cx="10058400" cy="566928"/>
-          </a:xfrm>
-          <a:prstGeom prst="rect">
-            <a:avLst/>
-          </a:prstGeom>
-          <a:noFill/>
-        </p:spPr>
-        <p:txBody>
-          <a:bodyPr wrap="square">
-            <a:spAutoFit/>
-          </a:bodyPr>
-          <a:lstStyle/>
-          <a:p>
-            <a:r>
-              <a:rPr sz="1200" b="0">
-                <a:solidFill>
-                  <a:srgbClr val="E8E8EE"/>
-                </a:solidFill>
-                <a:latin typeface="Consolas"/>
-              </a:rPr>
-              <a:t>future = np.polyval(coef, future_t) + seasonal[future_weekday]</a:t>
-            </a:r>
-          </a:p>
-          <a:p>
-            <a:r>
-              <a:rPr sz="1200" b="0">
-                <a:solidFill>
-                  <a:srgbClr val="E8E8EE"/>
-                </a:solidFill>
-                <a:latin typeface="Consolas"/>
-              </a:rPr>
-              <a:t>lo, hi = future - 1.96*resid_std, future + 1.96*resid_std</a:t>
-            </a:r>
-          </a:p>
-        </p:txBody>
-      </p:sp>
-      <p:sp>
-        <p:nvSpPr>
-          <p:cNvPr id="14" name="TextBox 13"/>
+          <p:cNvPr id="7" name="TextBox 6"/>
+          <p:cNvSpPr txBox="1"/>
+          <p:nvPr/>
+        </p:nvSpPr>
+        <p:spPr>
+          <a:xfrm>
+            <a:off x="960120" y="1627632"/>
+            <a:ext cx="10332720" cy="658368"/>
+          </a:xfrm>
+          <a:prstGeom prst="rect">
+            <a:avLst/>
+          </a:prstGeom>
+          <a:noFill/>
+        </p:spPr>
+        <p:txBody>
+          <a:bodyPr wrap="square" anchor="ctr">
+            <a:spAutoFit/>
+          </a:bodyPr>
+          <a:lstStyle/>
+          <a:p>
+            <a:r>
+              <a:rPr sz="1500" b="1">
+                <a:solidFill>
+                  <a:srgbClr val="1A1A1E"/>
+                </a:solidFill>
+                <a:latin typeface="맑은 고딕"/>
+              </a:rPr>
+              <a:t>SARIMA까지는 '선형 + 정상성' 가정 위에 서 있다. 현실의 트렌드는 그보다 복잡하다.</a:t>
+            </a:r>
+          </a:p>
+        </p:txBody>
+      </p:sp>
+      <p:sp>
+        <p:nvSpPr>
+          <p:cNvPr id="8" name="TextBox 7"/>
+          <p:cNvSpPr txBox="1"/>
+          <p:nvPr/>
+        </p:nvSpPr>
+        <p:spPr>
+          <a:xfrm>
+            <a:off x="777240" y="2633472"/>
+            <a:ext cx="10698480" cy="4206240"/>
+          </a:xfrm>
+          <a:prstGeom prst="rect">
+            <a:avLst/>
+          </a:prstGeom>
+          <a:noFill/>
+        </p:spPr>
+        <p:txBody>
+          <a:bodyPr wrap="square">
+            <a:spAutoFit/>
+          </a:bodyPr>
+          <a:lstStyle/>
+          <a:p>
+            <a:pPr>
+              <a:spcAft>
+                <a:spcPts val="300"/>
+              </a:spcAft>
+            </a:pPr>
+            <a:r>
+              <a:rPr sz="1600" b="1">
+                <a:solidFill>
+                  <a:srgbClr val="1A1A1E"/>
+                </a:solidFill>
+                <a:latin typeface="맑은 고딕"/>
+              </a:rPr>
+              <a:t>비선형 패턴</a:t>
+            </a:r>
+          </a:p>
+          <a:p>
+            <a:pPr>
+              <a:spcAft>
+                <a:spcPts val="1500"/>
+              </a:spcAft>
+            </a:pPr>
+            <a:r>
+              <a:rPr sz="1350" b="0">
+                <a:solidFill>
+                  <a:srgbClr val="666670"/>
+                </a:solidFill>
+                <a:latin typeface="맑은 고딕"/>
+              </a:rPr>
+              <a:t>바이럴은 지수적으로 터지고 사그라든다 — 선형 모델로는 그 곡선을 못 따라감</a:t>
+            </a:r>
+          </a:p>
+          <a:p>
+            <a:pPr>
+              <a:spcAft>
+                <a:spcPts val="300"/>
+              </a:spcAft>
+            </a:pPr>
+            <a:r>
+              <a:rPr sz="1600" b="1">
+                <a:solidFill>
+                  <a:srgbClr val="1A1A1E"/>
+                </a:solidFill>
+                <a:latin typeface="맑은 고딕"/>
+              </a:rPr>
+              <a:t>장기 기억</a:t>
+            </a:r>
+          </a:p>
+          <a:p>
+            <a:pPr>
+              <a:spcAft>
+                <a:spcPts val="1500"/>
+              </a:spcAft>
+            </a:pPr>
+            <a:r>
+              <a:rPr sz="1350" b="0">
+                <a:solidFill>
+                  <a:srgbClr val="666670"/>
+                </a:solidFill>
+                <a:latin typeface="맑은 고딕"/>
+              </a:rPr>
+              <a:t>‘작년 이맘때’ 같은 먼 과거 의존성 — ARIMA의 짧은 시차로는 포착 한계</a:t>
+            </a:r>
+          </a:p>
+          <a:p>
+            <a:pPr>
+              <a:spcAft>
+                <a:spcPts val="300"/>
+              </a:spcAft>
+            </a:pPr>
+            <a:r>
+              <a:rPr sz="1600" b="1">
+                <a:solidFill>
+                  <a:srgbClr val="1A1A1E"/>
+                </a:solidFill>
+                <a:latin typeface="맑은 고딕"/>
+              </a:rPr>
+              <a:t>다변량·교차효과</a:t>
+            </a:r>
+          </a:p>
+          <a:p>
+            <a:pPr>
+              <a:spcAft>
+                <a:spcPts val="1500"/>
+              </a:spcAft>
+            </a:pPr>
+            <a:r>
+              <a:rPr sz="1350" b="0">
+                <a:solidFill>
+                  <a:srgbClr val="666670"/>
+                </a:solidFill>
+                <a:latin typeface="맑은 고딕"/>
+              </a:rPr>
+              <a:t>태그끼리 서로 끌고 미는 관계, 날씨·이벤트 등 외생 변수까지 동시 학습 필요</a:t>
+            </a:r>
+          </a:p>
+          <a:p>
+            <a:pPr>
+              <a:spcAft>
+                <a:spcPts val="300"/>
+              </a:spcAft>
+            </a:pPr>
+            <a:r>
+              <a:rPr sz="1600" b="1">
+                <a:solidFill>
+                  <a:srgbClr val="1A1A1E"/>
+                </a:solidFill>
+                <a:latin typeface="맑은 고딕"/>
+              </a:rPr>
+              <a:t>정형 + 비정형</a:t>
+            </a:r>
+          </a:p>
+          <a:p>
+            <a:pPr>
+              <a:spcAft>
+                <a:spcPts val="1500"/>
+              </a:spcAft>
+            </a:pPr>
+            <a:r>
+              <a:rPr sz="1350" b="0">
+                <a:solidFill>
+                  <a:srgbClr val="666670"/>
+                </a:solidFill>
+                <a:latin typeface="맑은 고딕"/>
+              </a:rPr>
+              <a:t>수치 시계열뿐 아니라 캡션·댓글 텍스트까지 → 딥러닝·LLM의 영역</a:t>
+            </a:r>
+          </a:p>
+        </p:txBody>
+      </p:sp>
+      <p:sp>
+        <p:nvSpPr>
+          <p:cNvPr id="9" name="TextBox 8"/>
           <p:cNvSpPr txBox="1"/>
           <p:nvPr/>
         </p:nvSpPr>
@@ -13260,7 +12873,7 @@
       </p:sp>
       <p:sp>
         <p:nvSpPr>
-          <p:cNvPr id="15" name="TextBox 14"/>
+          <p:cNvPr id="10" name="TextBox 9"/>
           <p:cNvSpPr txBox="1"/>
           <p:nvPr/>
         </p:nvSpPr>
@@ -13288,7 +12901,7 @@
                 </a:solidFill>
                 <a:latin typeface="맑은 고딕"/>
               </a:rPr>
-              <a:t>22</a:t>
+              <a:t>21</a:t>
             </a:r>
           </a:p>
         </p:txBody>
@@ -13340,7 +12953,7 @@
                 </a:solidFill>
                 <a:latin typeface="Segoe UI"/>
               </a:rPr>
-              <a:t>07 · LIMITATIONS</a:t>
+              <a:t>07 · LSTM</a:t>
             </a:r>
           </a:p>
         </p:txBody>
@@ -13374,7 +12987,7 @@
                 </a:solidFill>
                 <a:latin typeface="맑은 고딕"/>
               </a:rPr>
-              <a:t>한계와 재현</a:t>
+              <a:t>LSTM — 시퀀스를 기억하는 신경망</a:t>
             </a:r>
           </a:p>
         </p:txBody>
@@ -13425,18 +13038,52 @@
       </p:sp>
       <p:sp>
         <p:nvSpPr>
-          <p:cNvPr id="5" name="Rounded Rectangle 4"/>
+          <p:cNvPr id="5" name="TextBox 4"/>
+          <p:cNvSpPr txBox="1"/>
+          <p:nvPr/>
+        </p:nvSpPr>
+        <p:spPr>
+          <a:xfrm>
+            <a:off x="658368" y="1444752"/>
+            <a:ext cx="10881360" cy="457200"/>
+          </a:xfrm>
+          <a:prstGeom prst="rect">
+            <a:avLst/>
+          </a:prstGeom>
+          <a:noFill/>
+        </p:spPr>
+        <p:txBody>
+          <a:bodyPr wrap="square">
+            <a:spAutoFit/>
+          </a:bodyPr>
+          <a:lstStyle/>
+          <a:p>
+            <a:r>
+              <a:rPr sz="1700" b="1">
+                <a:solidFill>
+                  <a:srgbClr val="1A1A1E"/>
+                </a:solidFill>
+                <a:latin typeface="맑은 고딕"/>
+              </a:rPr>
+              <a:t>RNN은 긴 시퀀스에서 옛 정보를 잊는다. LSTM은 '게이트'로 무엇을 기억·망각할지 학습한다.</a:t>
+            </a:r>
+          </a:p>
+        </p:txBody>
+      </p:sp>
+      <p:sp>
+        <p:nvSpPr>
+          <p:cNvPr id="6" name="Rounded Rectangle 5"/>
           <p:cNvSpPr/>
           <p:nvPr/>
         </p:nvSpPr>
         <p:spPr>
           <a:xfrm>
-            <a:off x="658368" y="1536192"/>
-            <a:ext cx="10881360" cy="841248"/>
+            <a:off x="658368" y="2011680"/>
+            <a:ext cx="10881360" cy="749808"/>
           </a:xfrm>
           <a:prstGeom prst="roundRect">
             <a:avLst>
-              <a:gd name="adj" fmla="val 8000"/>
+              <a:gd name="adj" fmla="val 12000"/>
             </a:avLst>
           </a:prstGeom>
           <a:solidFill>
@@ -13471,14 +13118,877 @@
       </p:sp>
       <p:sp>
         <p:nvSpPr>
-          <p:cNvPr id="6" name="Rectangle 5"/>
+          <p:cNvPr id="7" name="TextBox 6"/>
+          <p:cNvSpPr txBox="1"/>
+          <p:nvPr/>
+        </p:nvSpPr>
+        <p:spPr>
+          <a:xfrm>
+            <a:off x="914400" y="2011680"/>
+            <a:ext cx="10424160" cy="749808"/>
+          </a:xfrm>
+          <a:prstGeom prst="rect">
+            <a:avLst/>
+          </a:prstGeom>
+          <a:noFill/>
+        </p:spPr>
+        <p:txBody>
+          <a:bodyPr wrap="square" anchor="ctr">
+            <a:spAutoFit/>
+          </a:bodyPr>
+          <a:lstStyle/>
+          <a:p>
+            <a:r>
+              <a:rPr sz="1350" b="1">
+                <a:solidFill>
+                  <a:srgbClr val="E1306C"/>
+                </a:solidFill>
+                <a:latin typeface="맑은 고딕"/>
+              </a:rPr>
+              <a:t>💡 비유   </a:t>
+            </a:r>
+            <a:r>
+              <a:rPr sz="1350" b="0">
+                <a:solidFill>
+                  <a:srgbClr val="1A1A1E"/>
+                </a:solidFill>
+                <a:latin typeface="맑은 고딕"/>
+              </a:rPr>
+              <a:t>기억의 수도꼭지 3개 — 버릴 것(forget), 새로 담을 것(input), 내보낼 것(output)을 그때그때 조절.</a:t>
+            </a:r>
+          </a:p>
+        </p:txBody>
+      </p:sp>
+      <p:sp>
+        <p:nvSpPr>
+          <p:cNvPr id="8" name="Rounded Rectangle 7"/>
           <p:cNvSpPr/>
           <p:nvPr/>
         </p:nvSpPr>
         <p:spPr>
           <a:xfrm>
-            <a:off x="658368" y="1536192"/>
-            <a:ext cx="91440" cy="841248"/>
+            <a:off x="658368" y="3063240"/>
+            <a:ext cx="3444240" cy="2514600"/>
+          </a:xfrm>
+          <a:prstGeom prst="roundRect">
+            <a:avLst>
+              <a:gd name="adj" fmla="val 7000"/>
+            </a:avLst>
+          </a:prstGeom>
+          <a:solidFill>
+            <a:srgbClr val="F6F6F9"/>
+          </a:solidFill>
+          <a:ln w="12700">
+            <a:solidFill>
+              <a:srgbClr val="E6E6EA"/>
+            </a:solidFill>
+          </a:ln>
+          <a:effectLst/>
+        </p:spPr>
+        <p:style>
+          <a:lnRef idx="1">
+            <a:schemeClr val="accent1"/>
+          </a:lnRef>
+          <a:fillRef idx="3">
+            <a:schemeClr val="accent1"/>
+          </a:fillRef>
+          <a:effectRef idx="2">
+            <a:schemeClr val="accent1"/>
+          </a:effectRef>
+          <a:fontRef idx="minor">
+            <a:schemeClr val="lt1"/>
+          </a:fontRef>
+        </p:style>
+        <p:txBody>
+          <a:bodyPr rtlCol="0" anchor="ctr"/>
+          <a:lstStyle/>
+          <a:p>
+            <a:pPr algn="ctr"/>
+          </a:p>
+        </p:txBody>
+      </p:sp>
+      <p:sp>
+        <p:nvSpPr>
+          <p:cNvPr id="9" name="TextBox 8"/>
+          <p:cNvSpPr txBox="1"/>
+          <p:nvPr/>
+        </p:nvSpPr>
+        <p:spPr>
+          <a:xfrm>
+            <a:off x="914400" y="3282696"/>
+            <a:ext cx="2932176" cy="640080"/>
+          </a:xfrm>
+          <a:prstGeom prst="rect">
+            <a:avLst/>
+          </a:prstGeom>
+          <a:noFill/>
+        </p:spPr>
+        <p:txBody>
+          <a:bodyPr wrap="square">
+            <a:spAutoFit/>
+          </a:bodyPr>
+          <a:lstStyle/>
+          <a:p>
+            <a:r>
+              <a:rPr sz="3000" b="0">
+                <a:solidFill>
+                  <a:srgbClr val="1A1A1E"/>
+                </a:solidFill>
+                <a:latin typeface="맑은 고딕"/>
+              </a:rPr>
+              <a:t>🧠</a:t>
+            </a:r>
+          </a:p>
+        </p:txBody>
+      </p:sp>
+      <p:sp>
+        <p:nvSpPr>
+          <p:cNvPr id="10" name="TextBox 9"/>
+          <p:cNvSpPr txBox="1"/>
+          <p:nvPr/>
+        </p:nvSpPr>
+        <p:spPr>
+          <a:xfrm>
+            <a:off x="914400" y="3995928"/>
+            <a:ext cx="2932176" cy="457200"/>
+          </a:xfrm>
+          <a:prstGeom prst="rect">
+            <a:avLst/>
+          </a:prstGeom>
+          <a:noFill/>
+        </p:spPr>
+        <p:txBody>
+          <a:bodyPr wrap="square">
+            <a:spAutoFit/>
+          </a:bodyPr>
+          <a:lstStyle/>
+          <a:p>
+            <a:r>
+              <a:rPr sz="1550" b="1">
+                <a:solidFill>
+                  <a:srgbClr val="E1306C"/>
+                </a:solidFill>
+                <a:latin typeface="맑은 고딕"/>
+              </a:rPr>
+              <a:t>RNN의 한계</a:t>
+            </a:r>
+          </a:p>
+        </p:txBody>
+      </p:sp>
+      <p:sp>
+        <p:nvSpPr>
+          <p:cNvPr id="11" name="TextBox 10"/>
+          <p:cNvSpPr txBox="1"/>
+          <p:nvPr/>
+        </p:nvSpPr>
+        <p:spPr>
+          <a:xfrm>
+            <a:off x="914400" y="4434840"/>
+            <a:ext cx="2932176" cy="1051560"/>
+          </a:xfrm>
+          <a:prstGeom prst="rect">
+            <a:avLst/>
+          </a:prstGeom>
+          <a:noFill/>
+        </p:spPr>
+        <p:txBody>
+          <a:bodyPr wrap="square">
+            <a:spAutoFit/>
+          </a:bodyPr>
+          <a:lstStyle/>
+          <a:p>
+            <a:r>
+              <a:rPr sz="1250" b="0">
+                <a:solidFill>
+                  <a:srgbClr val="666670"/>
+                </a:solidFill>
+                <a:latin typeface="맑은 고딕"/>
+              </a:rPr>
+              <a:t>시점을 거치며 기울기가 소실 → 먼 과거의 신호가 흐려지는 '장기 의존성' 문제.</a:t>
+            </a:r>
+          </a:p>
+        </p:txBody>
+      </p:sp>
+      <p:sp>
+        <p:nvSpPr>
+          <p:cNvPr id="12" name="Rounded Rectangle 11"/>
+          <p:cNvSpPr/>
+          <p:nvPr/>
+        </p:nvSpPr>
+        <p:spPr>
+          <a:xfrm>
+            <a:off x="4376928" y="3063240"/>
+            <a:ext cx="3444240" cy="2514600"/>
+          </a:xfrm>
+          <a:prstGeom prst="roundRect">
+            <a:avLst>
+              <a:gd name="adj" fmla="val 7000"/>
+            </a:avLst>
+          </a:prstGeom>
+          <a:solidFill>
+            <a:srgbClr val="F6F6F9"/>
+          </a:solidFill>
+          <a:ln w="12700">
+            <a:solidFill>
+              <a:srgbClr val="E6E6EA"/>
+            </a:solidFill>
+          </a:ln>
+          <a:effectLst/>
+        </p:spPr>
+        <p:style>
+          <a:lnRef idx="1">
+            <a:schemeClr val="accent1"/>
+          </a:lnRef>
+          <a:fillRef idx="3">
+            <a:schemeClr val="accent1"/>
+          </a:fillRef>
+          <a:effectRef idx="2">
+            <a:schemeClr val="accent1"/>
+          </a:effectRef>
+          <a:fontRef idx="minor">
+            <a:schemeClr val="lt1"/>
+          </a:fontRef>
+        </p:style>
+        <p:txBody>
+          <a:bodyPr rtlCol="0" anchor="ctr"/>
+          <a:lstStyle/>
+          <a:p>
+            <a:pPr algn="ctr"/>
+          </a:p>
+        </p:txBody>
+      </p:sp>
+      <p:sp>
+        <p:nvSpPr>
+          <p:cNvPr id="13" name="TextBox 12"/>
+          <p:cNvSpPr txBox="1"/>
+          <p:nvPr/>
+        </p:nvSpPr>
+        <p:spPr>
+          <a:xfrm>
+            <a:off x="4632960" y="3282696"/>
+            <a:ext cx="2932176" cy="640080"/>
+          </a:xfrm>
+          <a:prstGeom prst="rect">
+            <a:avLst/>
+          </a:prstGeom>
+          <a:noFill/>
+        </p:spPr>
+        <p:txBody>
+          <a:bodyPr wrap="square">
+            <a:spAutoFit/>
+          </a:bodyPr>
+          <a:lstStyle/>
+          <a:p>
+            <a:r>
+              <a:rPr sz="3000" b="0">
+                <a:solidFill>
+                  <a:srgbClr val="1A1A1E"/>
+                </a:solidFill>
+                <a:latin typeface="맑은 고딕"/>
+              </a:rPr>
+              <a:t>🚰</a:t>
+            </a:r>
+          </a:p>
+        </p:txBody>
+      </p:sp>
+      <p:sp>
+        <p:nvSpPr>
+          <p:cNvPr id="14" name="TextBox 13"/>
+          <p:cNvSpPr txBox="1"/>
+          <p:nvPr/>
+        </p:nvSpPr>
+        <p:spPr>
+          <a:xfrm>
+            <a:off x="4632960" y="3995928"/>
+            <a:ext cx="2932176" cy="457200"/>
+          </a:xfrm>
+          <a:prstGeom prst="rect">
+            <a:avLst/>
+          </a:prstGeom>
+          <a:noFill/>
+        </p:spPr>
+        <p:txBody>
+          <a:bodyPr wrap="square">
+            <a:spAutoFit/>
+          </a:bodyPr>
+          <a:lstStyle/>
+          <a:p>
+            <a:r>
+              <a:rPr sz="1550" b="1">
+                <a:solidFill>
+                  <a:srgbClr val="E1306C"/>
+                </a:solidFill>
+                <a:latin typeface="맑은 고딕"/>
+              </a:rPr>
+              <a:t>LSTM 게이트</a:t>
+            </a:r>
+          </a:p>
+        </p:txBody>
+      </p:sp>
+      <p:sp>
+        <p:nvSpPr>
+          <p:cNvPr id="15" name="TextBox 14"/>
+          <p:cNvSpPr txBox="1"/>
+          <p:nvPr/>
+        </p:nvSpPr>
+        <p:spPr>
+          <a:xfrm>
+            <a:off x="4632960" y="4434840"/>
+            <a:ext cx="2932176" cy="1051560"/>
+          </a:xfrm>
+          <a:prstGeom prst="rect">
+            <a:avLst/>
+          </a:prstGeom>
+          <a:noFill/>
+        </p:spPr>
+        <p:txBody>
+          <a:bodyPr wrap="square">
+            <a:spAutoFit/>
+          </a:bodyPr>
+          <a:lstStyle/>
+          <a:p>
+            <a:r>
+              <a:rPr sz="1250" b="0">
+                <a:solidFill>
+                  <a:srgbClr val="666670"/>
+                </a:solidFill>
+                <a:latin typeface="맑은 고딕"/>
+              </a:rPr>
+              <a:t>셀 상태 + forget·input·output 게이트로 장기 기억을 유지/갱신. (변형: GRU)</a:t>
+            </a:r>
+          </a:p>
+        </p:txBody>
+      </p:sp>
+      <p:sp>
+        <p:nvSpPr>
+          <p:cNvPr id="16" name="Rounded Rectangle 15"/>
+          <p:cNvSpPr/>
+          <p:nvPr/>
+        </p:nvSpPr>
+        <p:spPr>
+          <a:xfrm>
+            <a:off x="8095488" y="3063240"/>
+            <a:ext cx="3444240" cy="2514600"/>
+          </a:xfrm>
+          <a:prstGeom prst="roundRect">
+            <a:avLst>
+              <a:gd name="adj" fmla="val 7000"/>
+            </a:avLst>
+          </a:prstGeom>
+          <a:solidFill>
+            <a:srgbClr val="F6F6F9"/>
+          </a:solidFill>
+          <a:ln w="12700">
+            <a:solidFill>
+              <a:srgbClr val="E6E6EA"/>
+            </a:solidFill>
+          </a:ln>
+          <a:effectLst/>
+        </p:spPr>
+        <p:style>
+          <a:lnRef idx="1">
+            <a:schemeClr val="accent1"/>
+          </a:lnRef>
+          <a:fillRef idx="3">
+            <a:schemeClr val="accent1"/>
+          </a:fillRef>
+          <a:effectRef idx="2">
+            <a:schemeClr val="accent1"/>
+          </a:effectRef>
+          <a:fontRef idx="minor">
+            <a:schemeClr val="lt1"/>
+          </a:fontRef>
+        </p:style>
+        <p:txBody>
+          <a:bodyPr rtlCol="0" anchor="ctr"/>
+          <a:lstStyle/>
+          <a:p>
+            <a:pPr algn="ctr"/>
+          </a:p>
+        </p:txBody>
+      </p:sp>
+      <p:sp>
+        <p:nvSpPr>
+          <p:cNvPr id="17" name="TextBox 16"/>
+          <p:cNvSpPr txBox="1"/>
+          <p:nvPr/>
+        </p:nvSpPr>
+        <p:spPr>
+          <a:xfrm>
+            <a:off x="8351520" y="3282696"/>
+            <a:ext cx="2932176" cy="640080"/>
+          </a:xfrm>
+          <a:prstGeom prst="rect">
+            <a:avLst/>
+          </a:prstGeom>
+          <a:noFill/>
+        </p:spPr>
+        <p:txBody>
+          <a:bodyPr wrap="square">
+            <a:spAutoFit/>
+          </a:bodyPr>
+          <a:lstStyle/>
+          <a:p>
+            <a:r>
+              <a:rPr sz="3000" b="0">
+                <a:solidFill>
+                  <a:srgbClr val="1A1A1E"/>
+                </a:solidFill>
+                <a:latin typeface="맑은 고딕"/>
+              </a:rPr>
+              <a:t>📲</a:t>
+            </a:r>
+          </a:p>
+        </p:txBody>
+      </p:sp>
+      <p:sp>
+        <p:nvSpPr>
+          <p:cNvPr id="18" name="TextBox 17"/>
+          <p:cNvSpPr txBox="1"/>
+          <p:nvPr/>
+        </p:nvSpPr>
+        <p:spPr>
+          <a:xfrm>
+            <a:off x="8351520" y="3995928"/>
+            <a:ext cx="2932176" cy="457200"/>
+          </a:xfrm>
+          <a:prstGeom prst="rect">
+            <a:avLst/>
+          </a:prstGeom>
+          <a:noFill/>
+        </p:spPr>
+        <p:txBody>
+          <a:bodyPr wrap="square">
+            <a:spAutoFit/>
+          </a:bodyPr>
+          <a:lstStyle/>
+          <a:p>
+            <a:r>
+              <a:rPr sz="1550" b="1">
+                <a:solidFill>
+                  <a:srgbClr val="E1306C"/>
+                </a:solidFill>
+                <a:latin typeface="맑은 고딕"/>
+              </a:rPr>
+              <a:t>우리 적용</a:t>
+            </a:r>
+          </a:p>
+        </p:txBody>
+      </p:sp>
+      <p:sp>
+        <p:nvSpPr>
+          <p:cNvPr id="19" name="TextBox 18"/>
+          <p:cNvSpPr txBox="1"/>
+          <p:nvPr/>
+        </p:nvSpPr>
+        <p:spPr>
+          <a:xfrm>
+            <a:off x="8351520" y="4434840"/>
+            <a:ext cx="2932176" cy="1051560"/>
+          </a:xfrm>
+          <a:prstGeom prst="rect">
+            <a:avLst/>
+          </a:prstGeom>
+          <a:noFill/>
+        </p:spPr>
+        <p:txBody>
+          <a:bodyPr wrap="square">
+            <a:spAutoFit/>
+          </a:bodyPr>
+          <a:lstStyle/>
+          <a:p>
+            <a:r>
+              <a:rPr sz="1250" b="0">
+                <a:solidFill>
+                  <a:srgbClr val="666670"/>
+                </a:solidFill>
+                <a:latin typeface="맑은 고딕"/>
+              </a:rPr>
+              <a:t>9개 해시태그 × 외생 변수를 한 모델로 학습해 다변량 비선형 예측.</a:t>
+            </a:r>
+          </a:p>
+        </p:txBody>
+      </p:sp>
+      <p:sp>
+        <p:nvSpPr>
+          <p:cNvPr id="20" name="Rounded Rectangle 19"/>
+          <p:cNvSpPr/>
+          <p:nvPr/>
+        </p:nvSpPr>
+        <p:spPr>
+          <a:xfrm>
+            <a:off x="658368" y="5806440"/>
+            <a:ext cx="10881360" cy="457200"/>
+          </a:xfrm>
+          <a:prstGeom prst="roundRect">
+            <a:avLst>
+              <a:gd name="adj" fmla="val 30000"/>
+            </a:avLst>
+          </a:prstGeom>
+          <a:solidFill>
+            <a:srgbClr val="1A1A1E"/>
+          </a:solidFill>
+          <a:ln>
+            <a:noFill/>
+          </a:ln>
+          <a:effectLst/>
+        </p:spPr>
+        <p:style>
+          <a:lnRef idx="1">
+            <a:schemeClr val="accent1"/>
+          </a:lnRef>
+          <a:fillRef idx="3">
+            <a:schemeClr val="accent1"/>
+          </a:fillRef>
+          <a:effectRef idx="2">
+            <a:schemeClr val="accent1"/>
+          </a:effectRef>
+          <a:fontRef idx="minor">
+            <a:schemeClr val="lt1"/>
+          </a:fontRef>
+        </p:style>
+        <p:txBody>
+          <a:bodyPr rtlCol="0" anchor="ctr"/>
+          <a:lstStyle/>
+          <a:p>
+            <a:pPr algn="ctr"/>
+          </a:p>
+        </p:txBody>
+      </p:sp>
+      <p:sp>
+        <p:nvSpPr>
+          <p:cNvPr id="21" name="TextBox 20"/>
+          <p:cNvSpPr txBox="1"/>
+          <p:nvPr/>
+        </p:nvSpPr>
+        <p:spPr>
+          <a:xfrm>
+            <a:off x="914400" y="5806440"/>
+            <a:ext cx="10424160" cy="457200"/>
+          </a:xfrm>
+          <a:prstGeom prst="rect">
+            <a:avLst/>
+          </a:prstGeom>
+          <a:noFill/>
+        </p:spPr>
+        <p:txBody>
+          <a:bodyPr wrap="square" anchor="ctr">
+            <a:spAutoFit/>
+          </a:bodyPr>
+          <a:lstStyle/>
+          <a:p>
+            <a:r>
+              <a:rPr sz="1100" b="1">
+                <a:solidFill>
+                  <a:srgbClr val="E1306C"/>
+                </a:solidFill>
+                <a:latin typeface="Segoe UI"/>
+              </a:rPr>
+              <a:t>수식  </a:t>
+            </a:r>
+            <a:r>
+              <a:rPr sz="1300" b="0">
+                <a:solidFill>
+                  <a:srgbClr val="FFFFFF"/>
+                </a:solidFill>
+                <a:latin typeface="Consolas"/>
+              </a:rPr>
+              <a:t>cₜ = fₜ·cₜ₋₁ + iₜ·c̃ₜ    (게이트로 기억 갱신)</a:t>
+            </a:r>
+          </a:p>
+        </p:txBody>
+      </p:sp>
+      <p:sp>
+        <p:nvSpPr>
+          <p:cNvPr id="22" name="TextBox 21"/>
+          <p:cNvSpPr txBox="1"/>
+          <p:nvPr/>
+        </p:nvSpPr>
+        <p:spPr>
+          <a:xfrm>
+            <a:off x="640080" y="6437376"/>
+            <a:ext cx="8229600" cy="274320"/>
+          </a:xfrm>
+          <a:prstGeom prst="rect">
+            <a:avLst/>
+          </a:prstGeom>
+          <a:noFill/>
+        </p:spPr>
+        <p:txBody>
+          <a:bodyPr wrap="square">
+            <a:spAutoFit/>
+          </a:bodyPr>
+          <a:lstStyle/>
+          <a:p>
+            <a:r>
+              <a:rPr sz="900" b="0">
+                <a:solidFill>
+                  <a:srgbClr val="9A9AA2"/>
+                </a:solidFill>
+                <a:latin typeface="맑은 고딕"/>
+              </a:rPr>
+              <a:t>시계열 데이터 분석  ·  한국 해시태그 트렌드</a:t>
+            </a:r>
+          </a:p>
+        </p:txBody>
+      </p:sp>
+      <p:sp>
+        <p:nvSpPr>
+          <p:cNvPr id="23" name="TextBox 22"/>
+          <p:cNvSpPr txBox="1"/>
+          <p:nvPr/>
+        </p:nvSpPr>
+        <p:spPr>
+          <a:xfrm>
+            <a:off x="11002975" y="6437376"/>
+            <a:ext cx="822960" cy="274320"/>
+          </a:xfrm>
+          <a:prstGeom prst="rect">
+            <a:avLst/>
+          </a:prstGeom>
+          <a:noFill/>
+        </p:spPr>
+        <p:txBody>
+          <a:bodyPr wrap="square">
+            <a:spAutoFit/>
+          </a:bodyPr>
+          <a:lstStyle/>
+          <a:p>
+            <a:pPr algn="r"/>
+            <a:r>
+              <a:rPr sz="900" b="1">
+                <a:solidFill>
+                  <a:srgbClr val="E1306C"/>
+                </a:solidFill>
+                <a:latin typeface="맑은 고딕"/>
+              </a:rPr>
+              <a:t>22</a:t>
+            </a:r>
+          </a:p>
+        </p:txBody>
+      </p:sp>
+    </p:spTree>
+  </p:cSld>
+  <p:clrMapOvr>
+    <a:masterClrMapping/>
+  </p:clrMapOvr>
+</p:sld>
+</file>
+
+<file path=ppt/slides/slide28.xml><?xml version="1.0" encoding="utf-8"?>
+<p:sld xmlns:a="http://schemas.openxmlformats.org/drawingml/2006/main" xmlns:p="http://schemas.openxmlformats.org/presentationml/2006/main" xmlns:r="http://schemas.openxmlformats.org/officeDocument/2006/relationships">
+  <p:cSld>
+    <p:spTree>
+      <p:nvGrpSpPr>
+        <p:cNvPr id="1" name=""/>
+        <p:cNvGrpSpPr/>
+        <p:nvPr/>
+      </p:nvGrpSpPr>
+      <p:grpSpPr/>
+      <p:sp>
+        <p:nvSpPr>
+          <p:cNvPr id="2" name="TextBox 1"/>
+          <p:cNvSpPr txBox="1"/>
+          <p:nvPr/>
+        </p:nvSpPr>
+        <p:spPr>
+          <a:xfrm>
+            <a:off x="658368" y="384048"/>
+            <a:ext cx="10789920" cy="292608"/>
+          </a:xfrm>
+          <a:prstGeom prst="rect">
+            <a:avLst/>
+          </a:prstGeom>
+          <a:noFill/>
+        </p:spPr>
+        <p:txBody>
+          <a:bodyPr wrap="square">
+            <a:spAutoFit/>
+          </a:bodyPr>
+          <a:lstStyle/>
+          <a:p>
+            <a:r>
+              <a:rPr sz="1050" b="1">
+                <a:solidFill>
+                  <a:srgbClr val="E1306C"/>
+                </a:solidFill>
+                <a:latin typeface="Segoe UI"/>
+              </a:rPr>
+              <a:t>07 · DEEP MODELS</a:t>
+            </a:r>
+          </a:p>
+        </p:txBody>
+      </p:sp>
+      <p:sp>
+        <p:nvSpPr>
+          <p:cNvPr id="3" name="TextBox 2"/>
+          <p:cNvSpPr txBox="1"/>
+          <p:nvPr/>
+        </p:nvSpPr>
+        <p:spPr>
+          <a:xfrm>
+            <a:off x="640080" y="658368"/>
+            <a:ext cx="10881360" cy="640080"/>
+          </a:xfrm>
+          <a:prstGeom prst="rect">
+            <a:avLst/>
+          </a:prstGeom>
+          <a:noFill/>
+        </p:spPr>
+        <p:txBody>
+          <a:bodyPr wrap="square">
+            <a:spAutoFit/>
+          </a:bodyPr>
+          <a:lstStyle/>
+          <a:p>
+            <a:r>
+              <a:rPr sz="2700" b="1">
+                <a:solidFill>
+                  <a:srgbClr val="1A1A1E"/>
+                </a:solidFill>
+                <a:latin typeface="맑은 고딕"/>
+              </a:rPr>
+              <a:t>LSTM을 넘어서는 시계열 딥러닝</a:t>
+            </a:r>
+          </a:p>
+        </p:txBody>
+      </p:sp>
+      <p:sp>
+        <p:nvSpPr>
+          <p:cNvPr id="4" name="Rectangle 3"/>
+          <p:cNvSpPr/>
+          <p:nvPr/>
+        </p:nvSpPr>
+        <p:spPr>
+          <a:xfrm>
+            <a:off x="658368" y="1298448"/>
+            <a:ext cx="10881360" cy="12700"/>
+          </a:xfrm>
+          <a:prstGeom prst="rect">
+            <a:avLst/>
+          </a:prstGeom>
+          <a:solidFill>
+            <a:srgbClr val="E6E6EA"/>
+          </a:solidFill>
+          <a:ln>
+            <a:noFill/>
+          </a:ln>
+          <a:effectLst/>
+        </p:spPr>
+        <p:style>
+          <a:lnRef idx="1">
+            <a:schemeClr val="accent1"/>
+          </a:lnRef>
+          <a:fillRef idx="3">
+            <a:schemeClr val="accent1"/>
+          </a:fillRef>
+          <a:effectRef idx="2">
+            <a:schemeClr val="accent1"/>
+          </a:effectRef>
+          <a:fontRef idx="minor">
+            <a:schemeClr val="lt1"/>
+          </a:fontRef>
+        </p:style>
+        <p:txBody>
+          <a:bodyPr rtlCol="0" anchor="ctr"/>
+          <a:lstStyle/>
+          <a:p>
+            <a:pPr algn="ctr"/>
+          </a:p>
+        </p:txBody>
+      </p:sp>
+      <p:sp>
+        <p:nvSpPr>
+          <p:cNvPr id="5" name="TextBox 4"/>
+          <p:cNvSpPr txBox="1"/>
+          <p:nvPr/>
+        </p:nvSpPr>
+        <p:spPr>
+          <a:xfrm>
+            <a:off x="685800" y="1481328"/>
+            <a:ext cx="10789920" cy="365760"/>
+          </a:xfrm>
+          <a:prstGeom prst="rect">
+            <a:avLst/>
+          </a:prstGeom>
+          <a:noFill/>
+        </p:spPr>
+        <p:txBody>
+          <a:bodyPr wrap="square">
+            <a:spAutoFit/>
+          </a:bodyPr>
+          <a:lstStyle/>
+          <a:p>
+            <a:r>
+              <a:rPr sz="1400" b="1">
+                <a:solidFill>
+                  <a:srgbClr val="666670"/>
+                </a:solidFill>
+                <a:latin typeface="맑은 고딕"/>
+              </a:rPr>
+              <a:t>문제 규모·해석 요구·확률 예측 필요에 따라 골라 쓴다.</a:t>
+            </a:r>
+          </a:p>
+        </p:txBody>
+      </p:sp>
+      <p:sp>
+        <p:nvSpPr>
+          <p:cNvPr id="6" name="Rounded Rectangle 5"/>
+          <p:cNvSpPr/>
+          <p:nvPr/>
+        </p:nvSpPr>
+        <p:spPr>
+          <a:xfrm>
+            <a:off x="685800" y="1965960"/>
+            <a:ext cx="5349240" cy="1938528"/>
+          </a:xfrm>
+          <a:prstGeom prst="roundRect">
+            <a:avLst>
+              <a:gd name="adj" fmla="val 6000"/>
+            </a:avLst>
+          </a:prstGeom>
+          <a:solidFill>
+            <a:srgbClr val="F6F6F9"/>
+          </a:solidFill>
+          <a:ln w="12700">
+            <a:solidFill>
+              <a:srgbClr val="E6E6EA"/>
+            </a:solidFill>
+          </a:ln>
+          <a:effectLst/>
+        </p:spPr>
+        <p:style>
+          <a:lnRef idx="1">
+            <a:schemeClr val="accent1"/>
+          </a:lnRef>
+          <a:fillRef idx="3">
+            <a:schemeClr val="accent1"/>
+          </a:fillRef>
+          <a:effectRef idx="2">
+            <a:schemeClr val="accent1"/>
+          </a:effectRef>
+          <a:fontRef idx="minor">
+            <a:schemeClr val="lt1"/>
+          </a:fontRef>
+        </p:style>
+        <p:txBody>
+          <a:bodyPr rtlCol="0" anchor="ctr"/>
+          <a:lstStyle/>
+          <a:p>
+            <a:pPr algn="ctr"/>
+          </a:p>
+        </p:txBody>
+      </p:sp>
+      <p:sp>
+        <p:nvSpPr>
+          <p:cNvPr id="7" name="Rectangle 6"/>
+          <p:cNvSpPr/>
+          <p:nvPr/>
+        </p:nvSpPr>
+        <p:spPr>
+          <a:xfrm>
+            <a:off x="685800" y="2130552"/>
+            <a:ext cx="91440" cy="1609344"/>
           </a:xfrm>
           <a:prstGeom prst="rect">
             <a:avLst/>
@@ -13515,256 +14025,547 @@
       </p:sp>
       <p:sp>
         <p:nvSpPr>
-          <p:cNvPr id="7" name="TextBox 6"/>
-          <p:cNvSpPr txBox="1"/>
-          <p:nvPr/>
-        </p:nvSpPr>
-        <p:spPr>
-          <a:xfrm>
-            <a:off x="960120" y="1627632"/>
-            <a:ext cx="10332720" cy="658368"/>
-          </a:xfrm>
-          <a:prstGeom prst="rect">
-            <a:avLst/>
-          </a:prstGeom>
-          <a:noFill/>
-        </p:spPr>
-        <p:txBody>
-          <a:bodyPr wrap="square" anchor="ctr">
-            <a:spAutoFit/>
-          </a:bodyPr>
-          <a:lstStyle/>
-          <a:p>
-            <a:r>
-              <a:rPr sz="1500" b="1">
+          <p:cNvPr id="8" name="TextBox 7"/>
+          <p:cNvSpPr txBox="1"/>
+          <p:nvPr/>
+        </p:nvSpPr>
+        <p:spPr>
+          <a:xfrm>
+            <a:off x="1033272" y="2148840"/>
+            <a:ext cx="4754880" cy="1572768"/>
+          </a:xfrm>
+          <a:prstGeom prst="rect">
+            <a:avLst/>
+          </a:prstGeom>
+          <a:noFill/>
+        </p:spPr>
+        <p:txBody>
+          <a:bodyPr wrap="square">
+            <a:spAutoFit/>
+          </a:bodyPr>
+          <a:lstStyle/>
+          <a:p>
+            <a:r>
+              <a:rPr sz="1250" b="1">
+                <a:solidFill>
+                  <a:srgbClr val="E1306C"/>
+                </a:solidFill>
+                <a:latin typeface="맑은 고딕"/>
+              </a:rPr>
+              <a:t>🔭 어텐션 기반</a:t>
+            </a:r>
+          </a:p>
+          <a:p>
+            <a:pPr>
+              <a:spcBef>
+                <a:spcPts val="200"/>
+              </a:spcBef>
+            </a:pPr>
+            <a:r>
+              <a:rPr sz="2200" b="1">
                 <a:solidFill>
                   <a:srgbClr val="1A1A1E"/>
                 </a:solidFill>
                 <a:latin typeface="맑은 고딕"/>
               </a:rPr>
-              <a:t>정직한 캐비앗: 이 분석이 말할 수 있는 것과 없는 것</a:t>
-            </a:r>
-          </a:p>
-        </p:txBody>
-      </p:sp>
-      <p:sp>
-        <p:nvSpPr>
-          <p:cNvPr id="8" name="TextBox 7"/>
-          <p:cNvSpPr txBox="1"/>
-          <p:nvPr/>
-        </p:nvSpPr>
-        <p:spPr>
-          <a:xfrm>
-            <a:off x="777240" y="2633472"/>
-            <a:ext cx="10698480" cy="4206240"/>
-          </a:xfrm>
-          <a:prstGeom prst="rect">
-            <a:avLst/>
-          </a:prstGeom>
-          <a:noFill/>
-        </p:spPr>
-        <p:txBody>
-          <a:bodyPr wrap="square">
-            <a:spAutoFit/>
-          </a:bodyPr>
-          <a:lstStyle/>
+              <a:t>Transformer · TFT</a:t>
+            </a:r>
+          </a:p>
           <a:p>
             <a:pPr>
-              <a:spcAft>
-                <a:spcPts val="300"/>
-              </a:spcAft>
+              <a:spcBef>
+                <a:spcPts val="500"/>
+              </a:spcBef>
             </a:pPr>
             <a:r>
-              <a:rPr sz="1600" b="1">
+              <a:rPr sz="1250" b="0">
+                <a:solidFill>
+                  <a:srgbClr val="666670"/>
+                </a:solidFill>
+                <a:latin typeface="맑은 고딕"/>
+              </a:rPr>
+              <a:t>장기 의존성과 다변량을 어텐션으로 포착. TFT는 변수 중요도까지 해석 가능.</a:t>
+            </a:r>
+          </a:p>
+        </p:txBody>
+      </p:sp>
+      <p:sp>
+        <p:nvSpPr>
+          <p:cNvPr id="9" name="Rounded Rectangle 8"/>
+          <p:cNvSpPr/>
+          <p:nvPr/>
+        </p:nvSpPr>
+        <p:spPr>
+          <a:xfrm>
+            <a:off x="6309360" y="1965960"/>
+            <a:ext cx="5349240" cy="1938528"/>
+          </a:xfrm>
+          <a:prstGeom prst="roundRect">
+            <a:avLst>
+              <a:gd name="adj" fmla="val 6000"/>
+            </a:avLst>
+          </a:prstGeom>
+          <a:solidFill>
+            <a:srgbClr val="F6F6F9"/>
+          </a:solidFill>
+          <a:ln w="12700">
+            <a:solidFill>
+              <a:srgbClr val="E6E6EA"/>
+            </a:solidFill>
+          </a:ln>
+          <a:effectLst/>
+        </p:spPr>
+        <p:style>
+          <a:lnRef idx="1">
+            <a:schemeClr val="accent1"/>
+          </a:lnRef>
+          <a:fillRef idx="3">
+            <a:schemeClr val="accent1"/>
+          </a:fillRef>
+          <a:effectRef idx="2">
+            <a:schemeClr val="accent1"/>
+          </a:effectRef>
+          <a:fontRef idx="minor">
+            <a:schemeClr val="lt1"/>
+          </a:fontRef>
+        </p:style>
+        <p:txBody>
+          <a:bodyPr rtlCol="0" anchor="ctr"/>
+          <a:lstStyle/>
+          <a:p>
+            <a:pPr algn="ctr"/>
+          </a:p>
+        </p:txBody>
+      </p:sp>
+      <p:sp>
+        <p:nvSpPr>
+          <p:cNvPr id="10" name="Rectangle 9"/>
+          <p:cNvSpPr/>
+          <p:nvPr/>
+        </p:nvSpPr>
+        <p:spPr>
+          <a:xfrm>
+            <a:off x="6309360" y="2130552"/>
+            <a:ext cx="91440" cy="1609344"/>
+          </a:xfrm>
+          <a:prstGeom prst="rect">
+            <a:avLst/>
+          </a:prstGeom>
+          <a:solidFill>
+            <a:srgbClr val="6A3DB8"/>
+          </a:solidFill>
+          <a:ln>
+            <a:noFill/>
+          </a:ln>
+          <a:effectLst/>
+        </p:spPr>
+        <p:style>
+          <a:lnRef idx="1">
+            <a:schemeClr val="accent1"/>
+          </a:lnRef>
+          <a:fillRef idx="3">
+            <a:schemeClr val="accent1"/>
+          </a:fillRef>
+          <a:effectRef idx="2">
+            <a:schemeClr val="accent1"/>
+          </a:effectRef>
+          <a:fontRef idx="minor">
+            <a:schemeClr val="lt1"/>
+          </a:fontRef>
+        </p:style>
+        <p:txBody>
+          <a:bodyPr rtlCol="0" anchor="ctr"/>
+          <a:lstStyle/>
+          <a:p>
+            <a:pPr algn="ctr"/>
+          </a:p>
+        </p:txBody>
+      </p:sp>
+      <p:sp>
+        <p:nvSpPr>
+          <p:cNvPr id="11" name="TextBox 10"/>
+          <p:cNvSpPr txBox="1"/>
+          <p:nvPr/>
+        </p:nvSpPr>
+        <p:spPr>
+          <a:xfrm>
+            <a:off x="6656832" y="2148840"/>
+            <a:ext cx="4754880" cy="1572768"/>
+          </a:xfrm>
+          <a:prstGeom prst="rect">
+            <a:avLst/>
+          </a:prstGeom>
+          <a:noFill/>
+        </p:spPr>
+        <p:txBody>
+          <a:bodyPr wrap="square">
+            <a:spAutoFit/>
+          </a:bodyPr>
+          <a:lstStyle/>
+          <a:p>
+            <a:r>
+              <a:rPr sz="1250" b="1">
+                <a:solidFill>
+                  <a:srgbClr val="6A3DB8"/>
+                </a:solidFill>
+                <a:latin typeface="맑은 고딕"/>
+              </a:rPr>
+              <a:t>🧩 분해형</a:t>
+            </a:r>
+          </a:p>
+          <a:p>
+            <a:pPr>
+              <a:spcBef>
+                <a:spcPts val="200"/>
+              </a:spcBef>
+            </a:pPr>
+            <a:r>
+              <a:rPr sz="2200" b="1">
                 <a:solidFill>
                   <a:srgbClr val="1A1A1E"/>
                 </a:solidFill>
                 <a:latin typeface="맑은 고딕"/>
               </a:rPr>
-              <a:t>프록시 한계</a:t>
+              <a:t>N-BEATS · N-HiTS</a:t>
             </a:r>
           </a:p>
           <a:p>
             <a:pPr>
-              <a:spcAft>
-                <a:spcPts val="1500"/>
-              </a:spcAft>
+              <a:spcBef>
+                <a:spcPts val="500"/>
+              </a:spcBef>
             </a:pPr>
             <a:r>
-              <a:rPr sz="1350" b="0">
+              <a:rPr sz="1250" b="0">
                 <a:solidFill>
                   <a:srgbClr val="666670"/>
                 </a:solidFill>
                 <a:latin typeface="맑은 고딕"/>
               </a:rPr>
-              <a:t>네이버 검색량 ≠ 인스타그램 게시량 — '한국 사용자의 주제 관심도'의 대리지표로 해석해야 함</a:t>
+              <a:t>추세/계절을 신경망 블록으로 분해 — 통계 분해의 딥러닝 버전, 해석 용이.</a:t>
+            </a:r>
+          </a:p>
+        </p:txBody>
+      </p:sp>
+      <p:sp>
+        <p:nvSpPr>
+          <p:cNvPr id="12" name="Rounded Rectangle 11"/>
+          <p:cNvSpPr/>
+          <p:nvPr/>
+        </p:nvSpPr>
+        <p:spPr>
+          <a:xfrm>
+            <a:off x="685800" y="4160520"/>
+            <a:ext cx="5349240" cy="1938528"/>
+          </a:xfrm>
+          <a:prstGeom prst="roundRect">
+            <a:avLst>
+              <a:gd name="adj" fmla="val 6000"/>
+            </a:avLst>
+          </a:prstGeom>
+          <a:solidFill>
+            <a:srgbClr val="F6F6F9"/>
+          </a:solidFill>
+          <a:ln w="12700">
+            <a:solidFill>
+              <a:srgbClr val="E6E6EA"/>
+            </a:solidFill>
+          </a:ln>
+          <a:effectLst/>
+        </p:spPr>
+        <p:style>
+          <a:lnRef idx="1">
+            <a:schemeClr val="accent1"/>
+          </a:lnRef>
+          <a:fillRef idx="3">
+            <a:schemeClr val="accent1"/>
+          </a:fillRef>
+          <a:effectRef idx="2">
+            <a:schemeClr val="accent1"/>
+          </a:effectRef>
+          <a:fontRef idx="minor">
+            <a:schemeClr val="lt1"/>
+          </a:fontRef>
+        </p:style>
+        <p:txBody>
+          <a:bodyPr rtlCol="0" anchor="ctr"/>
+          <a:lstStyle/>
+          <a:p>
+            <a:pPr algn="ctr"/>
+          </a:p>
+        </p:txBody>
+      </p:sp>
+      <p:sp>
+        <p:nvSpPr>
+          <p:cNvPr id="13" name="Rectangle 12"/>
+          <p:cNvSpPr/>
+          <p:nvPr/>
+        </p:nvSpPr>
+        <p:spPr>
+          <a:xfrm>
+            <a:off x="685800" y="4325112"/>
+            <a:ext cx="91440" cy="1609344"/>
+          </a:xfrm>
+          <a:prstGeom prst="rect">
+            <a:avLst/>
+          </a:prstGeom>
+          <a:solidFill>
+            <a:srgbClr val="1A1A1E"/>
+          </a:solidFill>
+          <a:ln>
+            <a:noFill/>
+          </a:ln>
+          <a:effectLst/>
+        </p:spPr>
+        <p:style>
+          <a:lnRef idx="1">
+            <a:schemeClr val="accent1"/>
+          </a:lnRef>
+          <a:fillRef idx="3">
+            <a:schemeClr val="accent1"/>
+          </a:fillRef>
+          <a:effectRef idx="2">
+            <a:schemeClr val="accent1"/>
+          </a:effectRef>
+          <a:fontRef idx="minor">
+            <a:schemeClr val="lt1"/>
+          </a:fontRef>
+        </p:style>
+        <p:txBody>
+          <a:bodyPr rtlCol="0" anchor="ctr"/>
+          <a:lstStyle/>
+          <a:p>
+            <a:pPr algn="ctr"/>
+          </a:p>
+        </p:txBody>
+      </p:sp>
+      <p:sp>
+        <p:nvSpPr>
+          <p:cNvPr id="14" name="TextBox 13"/>
+          <p:cNvSpPr txBox="1"/>
+          <p:nvPr/>
+        </p:nvSpPr>
+        <p:spPr>
+          <a:xfrm>
+            <a:off x="1033272" y="4343400"/>
+            <a:ext cx="4754880" cy="1572768"/>
+          </a:xfrm>
+          <a:prstGeom prst="rect">
+            <a:avLst/>
+          </a:prstGeom>
+          <a:noFill/>
+        </p:spPr>
+        <p:txBody>
+          <a:bodyPr wrap="square">
+            <a:spAutoFit/>
+          </a:bodyPr>
+          <a:lstStyle/>
+          <a:p>
+            <a:r>
+              <a:rPr sz="1250" b="1">
+                <a:solidFill>
+                  <a:srgbClr val="1A1A1E"/>
+                </a:solidFill>
+                <a:latin typeface="맑은 고딕"/>
+              </a:rPr>
+              <a:t>📈 자동화</a:t>
             </a:r>
           </a:p>
           <a:p>
             <a:pPr>
-              <a:spcAft>
-                <a:spcPts val="300"/>
-              </a:spcAft>
+              <a:spcBef>
+                <a:spcPts val="200"/>
+              </a:spcBef>
             </a:pPr>
             <a:r>
-              <a:rPr sz="1600" b="1">
+              <a:rPr sz="2200" b="1">
                 <a:solidFill>
                   <a:srgbClr val="1A1A1E"/>
                 </a:solidFill>
                 <a:latin typeface="맑은 고딕"/>
               </a:rPr>
-              <a:t>상대값 한계</a:t>
+              <a:t>Prophet</a:t>
             </a:r>
           </a:p>
           <a:p>
             <a:pPr>
-              <a:spcAft>
-                <a:spcPts val="1500"/>
-              </a:spcAft>
+              <a:spcBef>
+                <a:spcPts val="500"/>
+              </a:spcBef>
             </a:pPr>
             <a:r>
-              <a:rPr sz="1350" b="0">
+              <a:rPr sz="1250" b="0">
                 <a:solidFill>
                   <a:srgbClr val="666670"/>
                 </a:solidFill>
                 <a:latin typeface="맑은 고딕"/>
               </a:rPr>
-              <a:t>데이터랩 ratio는 요청 내 정규화 — 태그 간 절대 규모 비교 불가, 시간 변화·모멘텀 비교만 유효</a:t>
+              <a:t>추세+계절+휴일을 자동 적합. 빠른 베이스라인으로 실무에서 인기.</a:t>
+            </a:r>
+          </a:p>
+        </p:txBody>
+      </p:sp>
+      <p:sp>
+        <p:nvSpPr>
+          <p:cNvPr id="15" name="Rounded Rectangle 14"/>
+          <p:cNvSpPr/>
+          <p:nvPr/>
+        </p:nvSpPr>
+        <p:spPr>
+          <a:xfrm>
+            <a:off x="6309360" y="4160520"/>
+            <a:ext cx="5349240" cy="1938528"/>
+          </a:xfrm>
+          <a:prstGeom prst="roundRect">
+            <a:avLst>
+              <a:gd name="adj" fmla="val 6000"/>
+            </a:avLst>
+          </a:prstGeom>
+          <a:solidFill>
+            <a:srgbClr val="F6F6F9"/>
+          </a:solidFill>
+          <a:ln w="12700">
+            <a:solidFill>
+              <a:srgbClr val="E6E6EA"/>
+            </a:solidFill>
+          </a:ln>
+          <a:effectLst/>
+        </p:spPr>
+        <p:style>
+          <a:lnRef idx="1">
+            <a:schemeClr val="accent1"/>
+          </a:lnRef>
+          <a:fillRef idx="3">
+            <a:schemeClr val="accent1"/>
+          </a:fillRef>
+          <a:effectRef idx="2">
+            <a:schemeClr val="accent1"/>
+          </a:effectRef>
+          <a:fontRef idx="minor">
+            <a:schemeClr val="lt1"/>
+          </a:fontRef>
+        </p:style>
+        <p:txBody>
+          <a:bodyPr rtlCol="0" anchor="ctr"/>
+          <a:lstStyle/>
+          <a:p>
+            <a:pPr algn="ctr"/>
+          </a:p>
+        </p:txBody>
+      </p:sp>
+      <p:sp>
+        <p:nvSpPr>
+          <p:cNvPr id="16" name="Rectangle 15"/>
+          <p:cNvSpPr/>
+          <p:nvPr/>
+        </p:nvSpPr>
+        <p:spPr>
+          <a:xfrm>
+            <a:off x="6309360" y="4325112"/>
+            <a:ext cx="91440" cy="1609344"/>
+          </a:xfrm>
+          <a:prstGeom prst="rect">
+            <a:avLst/>
+          </a:prstGeom>
+          <a:solidFill>
+            <a:srgbClr val="666670"/>
+          </a:solidFill>
+          <a:ln>
+            <a:noFill/>
+          </a:ln>
+          <a:effectLst/>
+        </p:spPr>
+        <p:style>
+          <a:lnRef idx="1">
+            <a:schemeClr val="accent1"/>
+          </a:lnRef>
+          <a:fillRef idx="3">
+            <a:schemeClr val="accent1"/>
+          </a:fillRef>
+          <a:effectRef idx="2">
+            <a:schemeClr val="accent1"/>
+          </a:effectRef>
+          <a:fontRef idx="minor">
+            <a:schemeClr val="lt1"/>
+          </a:fontRef>
+        </p:style>
+        <p:txBody>
+          <a:bodyPr rtlCol="0" anchor="ctr"/>
+          <a:lstStyle/>
+          <a:p>
+            <a:pPr algn="ctr"/>
+          </a:p>
+        </p:txBody>
+      </p:sp>
+      <p:sp>
+        <p:nvSpPr>
+          <p:cNvPr id="17" name="TextBox 16"/>
+          <p:cNvSpPr txBox="1"/>
+          <p:nvPr/>
+        </p:nvSpPr>
+        <p:spPr>
+          <a:xfrm>
+            <a:off x="6656832" y="4343400"/>
+            <a:ext cx="4754880" cy="1572768"/>
+          </a:xfrm>
+          <a:prstGeom prst="rect">
+            <a:avLst/>
+          </a:prstGeom>
+          <a:noFill/>
+        </p:spPr>
+        <p:txBody>
+          <a:bodyPr wrap="square">
+            <a:spAutoFit/>
+          </a:bodyPr>
+          <a:lstStyle/>
+          <a:p>
+            <a:r>
+              <a:rPr sz="1250" b="1">
+                <a:solidFill>
+                  <a:srgbClr val="666670"/>
+                </a:solidFill>
+                <a:latin typeface="맑은 고딕"/>
+              </a:rPr>
+              <a:t>🎲 확률 예측</a:t>
             </a:r>
           </a:p>
           <a:p>
             <a:pPr>
-              <a:spcAft>
-                <a:spcPts val="300"/>
-              </a:spcAft>
+              <a:spcBef>
+                <a:spcPts val="200"/>
+              </a:spcBef>
             </a:pPr>
             <a:r>
-              <a:rPr sz="1600" b="1">
+              <a:rPr sz="2200" b="1">
                 <a:solidFill>
                   <a:srgbClr val="1A1A1E"/>
                 </a:solidFill>
                 <a:latin typeface="맑은 고딕"/>
               </a:rPr>
-              <a:t>실시간성</a:t>
+              <a:t>DeepAR</a:t>
             </a:r>
           </a:p>
           <a:p>
             <a:pPr>
-              <a:spcAft>
-                <a:spcPts val="1500"/>
-              </a:spcAft>
+              <a:spcBef>
+                <a:spcPts val="500"/>
+              </a:spcBef>
             </a:pPr>
             <a:r>
-              <a:rPr sz="1350" b="0">
+              <a:rPr sz="1250" b="0">
                 <a:solidFill>
                   <a:srgbClr val="666670"/>
                 </a:solidFill>
                 <a:latin typeface="맑은 고딕"/>
               </a:rPr>
-              <a:t>2026-06-11 수집 스냅샷 — '실시간 스트림'이 아니라 주기 재수집으로 갱신하는 구조 (전일까지 일별 제공)</a:t>
-            </a:r>
-          </a:p>
-          <a:p>
-            <a:pPr>
-              <a:spcAft>
-                <a:spcPts val="300"/>
-              </a:spcAft>
-            </a:pPr>
-            <a:r>
-              <a:rPr sz="1600" b="1">
-                <a:solidFill>
-                  <a:srgbClr val="1A1A1E"/>
-                </a:solidFill>
-                <a:latin typeface="맑은 고딕"/>
-              </a:rPr>
-              <a:t>계정 시뮬레이션</a:t>
-            </a:r>
-          </a:p>
-          <a:p>
-            <a:pPr>
-              <a:spcAft>
-                <a:spcPts val="1500"/>
-              </a:spcAft>
-            </a:pPr>
-            <a:r>
-              <a:rPr sz="1350" b="0">
-                <a:solidFill>
-                  <a:srgbClr val="666670"/>
-                </a:solidFill>
-                <a:latin typeface="맑은 고딕"/>
-              </a:rPr>
-              <a:t>'우리 계정' 도달은 계정 인사이트 공개 API가 없어 합성한 교육용 데이터 — 분해/예측 방법론 시연용이며 실측 아님</a:t>
-            </a:r>
-          </a:p>
-          <a:p>
-            <a:pPr>
-              <a:spcAft>
-                <a:spcPts val="300"/>
-              </a:spcAft>
-            </a:pPr>
-            <a:r>
-              <a:rPr sz="1600" b="1">
-                <a:solidFill>
-                  <a:srgbClr val="1A1A1E"/>
-                </a:solidFill>
-                <a:latin typeface="맑은 고딕"/>
-              </a:rPr>
-              <a:t>모형 한계</a:t>
-            </a:r>
-          </a:p>
-          <a:p>
-            <a:pPr>
-              <a:spcAft>
-                <a:spcPts val="1500"/>
-              </a:spcAft>
-            </a:pPr>
-            <a:r>
-              <a:rPr sz="1350" b="0">
-                <a:solidFill>
-                  <a:srgbClr val="666670"/>
-                </a:solidFill>
-                <a:latin typeface="맑은 고딕"/>
-              </a:rPr>
-              <a:t>선형 베이스라인은 외생 이벤트·추세 전환을 늦게 반영(백테스트 MAE에서 SARIMA에 열세) — 단순성/해석력과 정확도의 트레이드오프</a:t>
-            </a:r>
-          </a:p>
-          <a:p>
-            <a:pPr>
-              <a:spcAft>
-                <a:spcPts val="300"/>
-              </a:spcAft>
-            </a:pPr>
-            <a:r>
-              <a:rPr sz="1600" b="1">
-                <a:solidFill>
-                  <a:srgbClr val="1A1A1E"/>
-                </a:solidFill>
-                <a:latin typeface="맑은 고딕"/>
-              </a:rPr>
-              <a:t>재현</a:t>
-            </a:r>
-          </a:p>
-          <a:p>
-            <a:pPr>
-              <a:spcAft>
-                <a:spcPts val="1500"/>
-              </a:spcAft>
-            </a:pPr>
-            <a:r>
-              <a:rPr sz="1350" b="0">
-                <a:solidFill>
-                  <a:srgbClr val="666670"/>
-                </a:solidFill>
-                <a:latin typeface="맑은 고딕"/>
-              </a:rPr>
-              <a:t>pip install -r presentation/requirements.txt &amp;&amp; python presentation/build_deck.py — CSV·시드 고정으로 결정론적 재생성</a:t>
-            </a:r>
-          </a:p>
-        </p:txBody>
-      </p:sp>
-      <p:sp>
-        <p:nvSpPr>
-          <p:cNvPr id="9" name="TextBox 8"/>
+              <a:t>점 예측이 아니라 분포를 예측 — 불확실성·리스크까지 함께 제공.</a:t>
+            </a:r>
+          </a:p>
+        </p:txBody>
+      </p:sp>
+      <p:sp>
+        <p:nvSpPr>
+          <p:cNvPr id="18" name="TextBox 17"/>
           <p:cNvSpPr txBox="1"/>
           <p:nvPr/>
         </p:nvSpPr>
@@ -13798,7 +14599,7 @@
       </p:sp>
       <p:sp>
         <p:nvSpPr>
-          <p:cNvPr id="10" name="TextBox 9"/>
+          <p:cNvPr id="19" name="TextBox 18"/>
           <p:cNvSpPr txBox="1"/>
           <p:nvPr/>
         </p:nvSpPr>
@@ -13827,6 +14628,867 @@
                 <a:latin typeface="맑은 고딕"/>
               </a:rPr>
               <a:t>23</a:t>
+            </a:r>
+          </a:p>
+        </p:txBody>
+      </p:sp>
+    </p:spTree>
+  </p:cSld>
+  <p:clrMapOvr>
+    <a:masterClrMapping/>
+  </p:clrMapOvr>
+</p:sld>
+</file>
+
+<file path=ppt/slides/slide29.xml><?xml version="1.0" encoding="utf-8"?>
+<p:sld xmlns:a="http://schemas.openxmlformats.org/drawingml/2006/main" xmlns:p="http://schemas.openxmlformats.org/presentationml/2006/main" xmlns:r="http://schemas.openxmlformats.org/officeDocument/2006/relationships">
+  <p:cSld>
+    <p:spTree>
+      <p:nvGrpSpPr>
+        <p:cNvPr id="1" name=""/>
+        <p:cNvGrpSpPr/>
+        <p:nvPr/>
+      </p:nvGrpSpPr>
+      <p:grpSpPr/>
+      <p:sp>
+        <p:nvSpPr>
+          <p:cNvPr id="2" name="TextBox 1"/>
+          <p:cNvSpPr txBox="1"/>
+          <p:nvPr/>
+        </p:nvSpPr>
+        <p:spPr>
+          <a:xfrm>
+            <a:off x="658368" y="384048"/>
+            <a:ext cx="10789920" cy="292608"/>
+          </a:xfrm>
+          <a:prstGeom prst="rect">
+            <a:avLst/>
+          </a:prstGeom>
+          <a:noFill/>
+        </p:spPr>
+        <p:txBody>
+          <a:bodyPr wrap="square">
+            <a:spAutoFit/>
+          </a:bodyPr>
+          <a:lstStyle/>
+          <a:p>
+            <a:r>
+              <a:rPr sz="1050" b="1">
+                <a:solidFill>
+                  <a:srgbClr val="E1306C"/>
+                </a:solidFill>
+                <a:latin typeface="Segoe UI"/>
+              </a:rPr>
+              <a:t>07 · RAG</a:t>
+            </a:r>
+          </a:p>
+        </p:txBody>
+      </p:sp>
+      <p:sp>
+        <p:nvSpPr>
+          <p:cNvPr id="3" name="TextBox 2"/>
+          <p:cNvSpPr txBox="1"/>
+          <p:nvPr/>
+        </p:nvSpPr>
+        <p:spPr>
+          <a:xfrm>
+            <a:off x="640080" y="658368"/>
+            <a:ext cx="10881360" cy="640080"/>
+          </a:xfrm>
+          <a:prstGeom prst="rect">
+            <a:avLst/>
+          </a:prstGeom>
+          <a:noFill/>
+        </p:spPr>
+        <p:txBody>
+          <a:bodyPr wrap="square">
+            <a:spAutoFit/>
+          </a:bodyPr>
+          <a:lstStyle/>
+          <a:p>
+            <a:r>
+              <a:rPr sz="2700" b="1">
+                <a:solidFill>
+                  <a:srgbClr val="1A1A1E"/>
+                </a:solidFill>
+                <a:latin typeface="맑은 고딕"/>
+              </a:rPr>
+              <a:t>RAG — 검색으로 보강한 LLM</a:t>
+            </a:r>
+          </a:p>
+        </p:txBody>
+      </p:sp>
+      <p:sp>
+        <p:nvSpPr>
+          <p:cNvPr id="4" name="Rectangle 3"/>
+          <p:cNvSpPr/>
+          <p:nvPr/>
+        </p:nvSpPr>
+        <p:spPr>
+          <a:xfrm>
+            <a:off x="658368" y="1298448"/>
+            <a:ext cx="10881360" cy="12700"/>
+          </a:xfrm>
+          <a:prstGeom prst="rect">
+            <a:avLst/>
+          </a:prstGeom>
+          <a:solidFill>
+            <a:srgbClr val="E6E6EA"/>
+          </a:solidFill>
+          <a:ln>
+            <a:noFill/>
+          </a:ln>
+          <a:effectLst/>
+        </p:spPr>
+        <p:style>
+          <a:lnRef idx="1">
+            <a:schemeClr val="accent1"/>
+          </a:lnRef>
+          <a:fillRef idx="3">
+            <a:schemeClr val="accent1"/>
+          </a:fillRef>
+          <a:effectRef idx="2">
+            <a:schemeClr val="accent1"/>
+          </a:effectRef>
+          <a:fontRef idx="minor">
+            <a:schemeClr val="lt1"/>
+          </a:fontRef>
+        </p:style>
+        <p:txBody>
+          <a:bodyPr rtlCol="0" anchor="ctr"/>
+          <a:lstStyle/>
+          <a:p>
+            <a:pPr algn="ctr"/>
+          </a:p>
+        </p:txBody>
+      </p:sp>
+      <p:sp>
+        <p:nvSpPr>
+          <p:cNvPr id="5" name="TextBox 4"/>
+          <p:cNvSpPr txBox="1"/>
+          <p:nvPr/>
+        </p:nvSpPr>
+        <p:spPr>
+          <a:xfrm>
+            <a:off x="658368" y="1444752"/>
+            <a:ext cx="10881360" cy="457200"/>
+          </a:xfrm>
+          <a:prstGeom prst="rect">
+            <a:avLst/>
+          </a:prstGeom>
+          <a:noFill/>
+        </p:spPr>
+        <p:txBody>
+          <a:bodyPr wrap="square">
+            <a:spAutoFit/>
+          </a:bodyPr>
+          <a:lstStyle/>
+          <a:p>
+            <a:r>
+              <a:rPr sz="1700" b="1">
+                <a:solidFill>
+                  <a:srgbClr val="1A1A1E"/>
+                </a:solidFill>
+                <a:latin typeface="맑은 고딕"/>
+              </a:rPr>
+              <a:t>LLM은 똑똑하지만 '우리 데이터'와 '최신 트렌드'를 모른다. RAG는 검색해서 그 빈틈을 채운다.</a:t>
+            </a:r>
+          </a:p>
+        </p:txBody>
+      </p:sp>
+      <p:sp>
+        <p:nvSpPr>
+          <p:cNvPr id="6" name="Rounded Rectangle 5"/>
+          <p:cNvSpPr/>
+          <p:nvPr/>
+        </p:nvSpPr>
+        <p:spPr>
+          <a:xfrm>
+            <a:off x="658368" y="2011680"/>
+            <a:ext cx="10881360" cy="749808"/>
+          </a:xfrm>
+          <a:prstGeom prst="roundRect">
+            <a:avLst>
+              <a:gd name="adj" fmla="val 12000"/>
+            </a:avLst>
+          </a:prstGeom>
+          <a:solidFill>
+            <a:srgbClr val="FBE9F1"/>
+          </a:solidFill>
+          <a:ln>
+            <a:noFill/>
+          </a:ln>
+          <a:effectLst/>
+        </p:spPr>
+        <p:style>
+          <a:lnRef idx="1">
+            <a:schemeClr val="accent1"/>
+          </a:lnRef>
+          <a:fillRef idx="3">
+            <a:schemeClr val="accent1"/>
+          </a:fillRef>
+          <a:effectRef idx="2">
+            <a:schemeClr val="accent1"/>
+          </a:effectRef>
+          <a:fontRef idx="minor">
+            <a:schemeClr val="lt1"/>
+          </a:fontRef>
+        </p:style>
+        <p:txBody>
+          <a:bodyPr rtlCol="0" anchor="ctr"/>
+          <a:lstStyle/>
+          <a:p>
+            <a:pPr algn="ctr"/>
+          </a:p>
+        </p:txBody>
+      </p:sp>
+      <p:sp>
+        <p:nvSpPr>
+          <p:cNvPr id="7" name="TextBox 6"/>
+          <p:cNvSpPr txBox="1"/>
+          <p:nvPr/>
+        </p:nvSpPr>
+        <p:spPr>
+          <a:xfrm>
+            <a:off x="914400" y="2011680"/>
+            <a:ext cx="10424160" cy="749808"/>
+          </a:xfrm>
+          <a:prstGeom prst="rect">
+            <a:avLst/>
+          </a:prstGeom>
+          <a:noFill/>
+        </p:spPr>
+        <p:txBody>
+          <a:bodyPr wrap="square" anchor="ctr">
+            <a:spAutoFit/>
+          </a:bodyPr>
+          <a:lstStyle/>
+          <a:p>
+            <a:r>
+              <a:rPr sz="1350" b="1">
+                <a:solidFill>
+                  <a:srgbClr val="E1306C"/>
+                </a:solidFill>
+                <a:latin typeface="맑은 고딕"/>
+              </a:rPr>
+              <a:t>💡 비유   </a:t>
+            </a:r>
+            <a:r>
+              <a:rPr sz="1350" b="0">
+                <a:solidFill>
+                  <a:srgbClr val="1A1A1E"/>
+                </a:solidFill>
+                <a:latin typeface="맑은 고딕"/>
+              </a:rPr>
+              <a:t>오픈북 시험 — 통째로 외우는 대신, 질문이 오면 관련 자료를 찾아 펴 보고 답한다.</a:t>
+            </a:r>
+          </a:p>
+        </p:txBody>
+      </p:sp>
+      <p:sp>
+        <p:nvSpPr>
+          <p:cNvPr id="8" name="Rounded Rectangle 7"/>
+          <p:cNvSpPr/>
+          <p:nvPr/>
+        </p:nvSpPr>
+        <p:spPr>
+          <a:xfrm>
+            <a:off x="658368" y="3063240"/>
+            <a:ext cx="3444240" cy="2514600"/>
+          </a:xfrm>
+          <a:prstGeom prst="roundRect">
+            <a:avLst>
+              <a:gd name="adj" fmla="val 7000"/>
+            </a:avLst>
+          </a:prstGeom>
+          <a:solidFill>
+            <a:srgbClr val="F6F6F9"/>
+          </a:solidFill>
+          <a:ln w="12700">
+            <a:solidFill>
+              <a:srgbClr val="E6E6EA"/>
+            </a:solidFill>
+          </a:ln>
+          <a:effectLst/>
+        </p:spPr>
+        <p:style>
+          <a:lnRef idx="1">
+            <a:schemeClr val="accent1"/>
+          </a:lnRef>
+          <a:fillRef idx="3">
+            <a:schemeClr val="accent1"/>
+          </a:fillRef>
+          <a:effectRef idx="2">
+            <a:schemeClr val="accent1"/>
+          </a:effectRef>
+          <a:fontRef idx="minor">
+            <a:schemeClr val="lt1"/>
+          </a:fontRef>
+        </p:style>
+        <p:txBody>
+          <a:bodyPr rtlCol="0" anchor="ctr"/>
+          <a:lstStyle/>
+          <a:p>
+            <a:pPr algn="ctr"/>
+          </a:p>
+        </p:txBody>
+      </p:sp>
+      <p:sp>
+        <p:nvSpPr>
+          <p:cNvPr id="9" name="TextBox 8"/>
+          <p:cNvSpPr txBox="1"/>
+          <p:nvPr/>
+        </p:nvSpPr>
+        <p:spPr>
+          <a:xfrm>
+            <a:off x="914400" y="3282696"/>
+            <a:ext cx="2932176" cy="640080"/>
+          </a:xfrm>
+          <a:prstGeom prst="rect">
+            <a:avLst/>
+          </a:prstGeom>
+          <a:noFill/>
+        </p:spPr>
+        <p:txBody>
+          <a:bodyPr wrap="square">
+            <a:spAutoFit/>
+          </a:bodyPr>
+          <a:lstStyle/>
+          <a:p>
+            <a:r>
+              <a:rPr sz="3000" b="0">
+                <a:solidFill>
+                  <a:srgbClr val="1A1A1E"/>
+                </a:solidFill>
+                <a:latin typeface="맑은 고딕"/>
+              </a:rPr>
+              <a:t>🔎</a:t>
+            </a:r>
+          </a:p>
+        </p:txBody>
+      </p:sp>
+      <p:sp>
+        <p:nvSpPr>
+          <p:cNvPr id="10" name="TextBox 9"/>
+          <p:cNvSpPr txBox="1"/>
+          <p:nvPr/>
+        </p:nvSpPr>
+        <p:spPr>
+          <a:xfrm>
+            <a:off x="914400" y="3995928"/>
+            <a:ext cx="2932176" cy="457200"/>
+          </a:xfrm>
+          <a:prstGeom prst="rect">
+            <a:avLst/>
+          </a:prstGeom>
+          <a:noFill/>
+        </p:spPr>
+        <p:txBody>
+          <a:bodyPr wrap="square">
+            <a:spAutoFit/>
+          </a:bodyPr>
+          <a:lstStyle/>
+          <a:p>
+            <a:r>
+              <a:rPr sz="1550" b="1">
+                <a:solidFill>
+                  <a:srgbClr val="E1306C"/>
+                </a:solidFill>
+                <a:latin typeface="맑은 고딕"/>
+              </a:rPr>
+              <a:t>검색 (Retrieve)</a:t>
+            </a:r>
+          </a:p>
+        </p:txBody>
+      </p:sp>
+      <p:sp>
+        <p:nvSpPr>
+          <p:cNvPr id="11" name="TextBox 10"/>
+          <p:cNvSpPr txBox="1"/>
+          <p:nvPr/>
+        </p:nvSpPr>
+        <p:spPr>
+          <a:xfrm>
+            <a:off x="914400" y="4434840"/>
+            <a:ext cx="2932176" cy="1051560"/>
+          </a:xfrm>
+          <a:prstGeom prst="rect">
+            <a:avLst/>
+          </a:prstGeom>
+          <a:noFill/>
+        </p:spPr>
+        <p:txBody>
+          <a:bodyPr wrap="square">
+            <a:spAutoFit/>
+          </a:bodyPr>
+          <a:lstStyle/>
+          <a:p>
+            <a:r>
+              <a:rPr sz="1250" b="0">
+                <a:solidFill>
+                  <a:srgbClr val="666670"/>
+                </a:solidFill>
+                <a:latin typeface="맑은 고딕"/>
+              </a:rPr>
+              <a:t>트렌드 리포트·과거 캠페인 성과를 벡터DB에 임베딩해 두고, 질문과 유사한 문서를 검색.</a:t>
+            </a:r>
+          </a:p>
+        </p:txBody>
+      </p:sp>
+      <p:sp>
+        <p:nvSpPr>
+          <p:cNvPr id="12" name="Rounded Rectangle 11"/>
+          <p:cNvSpPr/>
+          <p:nvPr/>
+        </p:nvSpPr>
+        <p:spPr>
+          <a:xfrm>
+            <a:off x="4376928" y="3063240"/>
+            <a:ext cx="3444240" cy="2514600"/>
+          </a:xfrm>
+          <a:prstGeom prst="roundRect">
+            <a:avLst>
+              <a:gd name="adj" fmla="val 7000"/>
+            </a:avLst>
+          </a:prstGeom>
+          <a:solidFill>
+            <a:srgbClr val="F6F6F9"/>
+          </a:solidFill>
+          <a:ln w="12700">
+            <a:solidFill>
+              <a:srgbClr val="E6E6EA"/>
+            </a:solidFill>
+          </a:ln>
+          <a:effectLst/>
+        </p:spPr>
+        <p:style>
+          <a:lnRef idx="1">
+            <a:schemeClr val="accent1"/>
+          </a:lnRef>
+          <a:fillRef idx="3">
+            <a:schemeClr val="accent1"/>
+          </a:fillRef>
+          <a:effectRef idx="2">
+            <a:schemeClr val="accent1"/>
+          </a:effectRef>
+          <a:fontRef idx="minor">
+            <a:schemeClr val="lt1"/>
+          </a:fontRef>
+        </p:style>
+        <p:txBody>
+          <a:bodyPr rtlCol="0" anchor="ctr"/>
+          <a:lstStyle/>
+          <a:p>
+            <a:pPr algn="ctr"/>
+          </a:p>
+        </p:txBody>
+      </p:sp>
+      <p:sp>
+        <p:nvSpPr>
+          <p:cNvPr id="13" name="TextBox 12"/>
+          <p:cNvSpPr txBox="1"/>
+          <p:nvPr/>
+        </p:nvSpPr>
+        <p:spPr>
+          <a:xfrm>
+            <a:off x="4632960" y="3282696"/>
+            <a:ext cx="2932176" cy="640080"/>
+          </a:xfrm>
+          <a:prstGeom prst="rect">
+            <a:avLst/>
+          </a:prstGeom>
+          <a:noFill/>
+        </p:spPr>
+        <p:txBody>
+          <a:bodyPr wrap="square">
+            <a:spAutoFit/>
+          </a:bodyPr>
+          <a:lstStyle/>
+          <a:p>
+            <a:r>
+              <a:rPr sz="3000" b="0">
+                <a:solidFill>
+                  <a:srgbClr val="1A1A1E"/>
+                </a:solidFill>
+                <a:latin typeface="맑은 고딕"/>
+              </a:rPr>
+              <a:t>➕</a:t>
+            </a:r>
+          </a:p>
+        </p:txBody>
+      </p:sp>
+      <p:sp>
+        <p:nvSpPr>
+          <p:cNvPr id="14" name="TextBox 13"/>
+          <p:cNvSpPr txBox="1"/>
+          <p:nvPr/>
+        </p:nvSpPr>
+        <p:spPr>
+          <a:xfrm>
+            <a:off x="4632960" y="3995928"/>
+            <a:ext cx="2932176" cy="457200"/>
+          </a:xfrm>
+          <a:prstGeom prst="rect">
+            <a:avLst/>
+          </a:prstGeom>
+          <a:noFill/>
+        </p:spPr>
+        <p:txBody>
+          <a:bodyPr wrap="square">
+            <a:spAutoFit/>
+          </a:bodyPr>
+          <a:lstStyle/>
+          <a:p>
+            <a:r>
+              <a:rPr sz="1550" b="1">
+                <a:solidFill>
+                  <a:srgbClr val="E1306C"/>
+                </a:solidFill>
+                <a:latin typeface="맑은 고딕"/>
+              </a:rPr>
+              <a:t>보강 (Augment)</a:t>
+            </a:r>
+          </a:p>
+        </p:txBody>
+      </p:sp>
+      <p:sp>
+        <p:nvSpPr>
+          <p:cNvPr id="15" name="TextBox 14"/>
+          <p:cNvSpPr txBox="1"/>
+          <p:nvPr/>
+        </p:nvSpPr>
+        <p:spPr>
+          <a:xfrm>
+            <a:off x="4632960" y="4434840"/>
+            <a:ext cx="2932176" cy="1051560"/>
+          </a:xfrm>
+          <a:prstGeom prst="rect">
+            <a:avLst/>
+          </a:prstGeom>
+          <a:noFill/>
+        </p:spPr>
+        <p:txBody>
+          <a:bodyPr wrap="square">
+            <a:spAutoFit/>
+          </a:bodyPr>
+          <a:lstStyle/>
+          <a:p>
+            <a:r>
+              <a:rPr sz="1250" b="0">
+                <a:solidFill>
+                  <a:srgbClr val="666670"/>
+                </a:solidFill>
+                <a:latin typeface="맑은 고딕"/>
+              </a:rPr>
+              <a:t>검색한 근거를 프롬프트에 주입 — LLM이 '추측' 대신 '근거'로 답하게 함.</a:t>
+            </a:r>
+          </a:p>
+        </p:txBody>
+      </p:sp>
+      <p:sp>
+        <p:nvSpPr>
+          <p:cNvPr id="16" name="Rounded Rectangle 15"/>
+          <p:cNvSpPr/>
+          <p:nvPr/>
+        </p:nvSpPr>
+        <p:spPr>
+          <a:xfrm>
+            <a:off x="8095488" y="3063240"/>
+            <a:ext cx="3444240" cy="2514600"/>
+          </a:xfrm>
+          <a:prstGeom prst="roundRect">
+            <a:avLst>
+              <a:gd name="adj" fmla="val 7000"/>
+            </a:avLst>
+          </a:prstGeom>
+          <a:solidFill>
+            <a:srgbClr val="F6F6F9"/>
+          </a:solidFill>
+          <a:ln w="12700">
+            <a:solidFill>
+              <a:srgbClr val="E6E6EA"/>
+            </a:solidFill>
+          </a:ln>
+          <a:effectLst/>
+        </p:spPr>
+        <p:style>
+          <a:lnRef idx="1">
+            <a:schemeClr val="accent1"/>
+          </a:lnRef>
+          <a:fillRef idx="3">
+            <a:schemeClr val="accent1"/>
+          </a:fillRef>
+          <a:effectRef idx="2">
+            <a:schemeClr val="accent1"/>
+          </a:effectRef>
+          <a:fontRef idx="minor">
+            <a:schemeClr val="lt1"/>
+          </a:fontRef>
+        </p:style>
+        <p:txBody>
+          <a:bodyPr rtlCol="0" anchor="ctr"/>
+          <a:lstStyle/>
+          <a:p>
+            <a:pPr algn="ctr"/>
+          </a:p>
+        </p:txBody>
+      </p:sp>
+      <p:sp>
+        <p:nvSpPr>
+          <p:cNvPr id="17" name="TextBox 16"/>
+          <p:cNvSpPr txBox="1"/>
+          <p:nvPr/>
+        </p:nvSpPr>
+        <p:spPr>
+          <a:xfrm>
+            <a:off x="8351520" y="3282696"/>
+            <a:ext cx="2932176" cy="640080"/>
+          </a:xfrm>
+          <a:prstGeom prst="rect">
+            <a:avLst/>
+          </a:prstGeom>
+          <a:noFill/>
+        </p:spPr>
+        <p:txBody>
+          <a:bodyPr wrap="square">
+            <a:spAutoFit/>
+          </a:bodyPr>
+          <a:lstStyle/>
+          <a:p>
+            <a:r>
+              <a:rPr sz="3000" b="0">
+                <a:solidFill>
+                  <a:srgbClr val="1A1A1E"/>
+                </a:solidFill>
+                <a:latin typeface="맑은 고딕"/>
+              </a:rPr>
+              <a:t>✍️</a:t>
+            </a:r>
+          </a:p>
+        </p:txBody>
+      </p:sp>
+      <p:sp>
+        <p:nvSpPr>
+          <p:cNvPr id="18" name="TextBox 17"/>
+          <p:cNvSpPr txBox="1"/>
+          <p:nvPr/>
+        </p:nvSpPr>
+        <p:spPr>
+          <a:xfrm>
+            <a:off x="8351520" y="3995928"/>
+            <a:ext cx="2932176" cy="457200"/>
+          </a:xfrm>
+          <a:prstGeom prst="rect">
+            <a:avLst/>
+          </a:prstGeom>
+          <a:noFill/>
+        </p:spPr>
+        <p:txBody>
+          <a:bodyPr wrap="square">
+            <a:spAutoFit/>
+          </a:bodyPr>
+          <a:lstStyle/>
+          <a:p>
+            <a:r>
+              <a:rPr sz="1550" b="1">
+                <a:solidFill>
+                  <a:srgbClr val="E1306C"/>
+                </a:solidFill>
+                <a:latin typeface="맑은 고딕"/>
+              </a:rPr>
+              <a:t>생성 (Generate)</a:t>
+            </a:r>
+          </a:p>
+        </p:txBody>
+      </p:sp>
+      <p:sp>
+        <p:nvSpPr>
+          <p:cNvPr id="19" name="TextBox 18"/>
+          <p:cNvSpPr txBox="1"/>
+          <p:nvPr/>
+        </p:nvSpPr>
+        <p:spPr>
+          <a:xfrm>
+            <a:off x="8351520" y="4434840"/>
+            <a:ext cx="2932176" cy="1051560"/>
+          </a:xfrm>
+          <a:prstGeom prst="rect">
+            <a:avLst/>
+          </a:prstGeom>
+          <a:noFill/>
+        </p:spPr>
+        <p:txBody>
+          <a:bodyPr wrap="square">
+            <a:spAutoFit/>
+          </a:bodyPr>
+          <a:lstStyle/>
+          <a:p>
+            <a:r>
+              <a:rPr sz="1250" b="0">
+                <a:solidFill>
+                  <a:srgbClr val="666670"/>
+                </a:solidFill>
+                <a:latin typeface="맑은 고딕"/>
+              </a:rPr>
+              <a:t>근거 기반으로 인사이트·콘텐츠 초안 생성 → 환각↓, 최신성·신뢰성↑.</a:t>
+            </a:r>
+          </a:p>
+        </p:txBody>
+      </p:sp>
+      <p:sp>
+        <p:nvSpPr>
+          <p:cNvPr id="20" name="Rounded Rectangle 19"/>
+          <p:cNvSpPr/>
+          <p:nvPr/>
+        </p:nvSpPr>
+        <p:spPr>
+          <a:xfrm>
+            <a:off x="658368" y="5806440"/>
+            <a:ext cx="10881360" cy="457200"/>
+          </a:xfrm>
+          <a:prstGeom prst="roundRect">
+            <a:avLst>
+              <a:gd name="adj" fmla="val 30000"/>
+            </a:avLst>
+          </a:prstGeom>
+          <a:solidFill>
+            <a:srgbClr val="1A1A1E"/>
+          </a:solidFill>
+          <a:ln>
+            <a:noFill/>
+          </a:ln>
+          <a:effectLst/>
+        </p:spPr>
+        <p:style>
+          <a:lnRef idx="1">
+            <a:schemeClr val="accent1"/>
+          </a:lnRef>
+          <a:fillRef idx="3">
+            <a:schemeClr val="accent1"/>
+          </a:fillRef>
+          <a:effectRef idx="2">
+            <a:schemeClr val="accent1"/>
+          </a:effectRef>
+          <a:fontRef idx="minor">
+            <a:schemeClr val="lt1"/>
+          </a:fontRef>
+        </p:style>
+        <p:txBody>
+          <a:bodyPr rtlCol="0" anchor="ctr"/>
+          <a:lstStyle/>
+          <a:p>
+            <a:pPr algn="ctr"/>
+          </a:p>
+        </p:txBody>
+      </p:sp>
+      <p:sp>
+        <p:nvSpPr>
+          <p:cNvPr id="21" name="TextBox 20"/>
+          <p:cNvSpPr txBox="1"/>
+          <p:nvPr/>
+        </p:nvSpPr>
+        <p:spPr>
+          <a:xfrm>
+            <a:off x="914400" y="5806440"/>
+            <a:ext cx="10424160" cy="457200"/>
+          </a:xfrm>
+          <a:prstGeom prst="rect">
+            <a:avLst/>
+          </a:prstGeom>
+          <a:noFill/>
+        </p:spPr>
+        <p:txBody>
+          <a:bodyPr wrap="square" anchor="ctr">
+            <a:spAutoFit/>
+          </a:bodyPr>
+          <a:lstStyle/>
+          <a:p>
+            <a:r>
+              <a:rPr sz="1100" b="1">
+                <a:solidFill>
+                  <a:srgbClr val="E1306C"/>
+                </a:solidFill>
+                <a:latin typeface="Segoe UI"/>
+              </a:rPr>
+              <a:t>수식  </a:t>
+            </a:r>
+            <a:r>
+              <a:rPr sz="1300" b="0">
+                <a:solidFill>
+                  <a:srgbClr val="FFFFFF"/>
+                </a:solidFill>
+                <a:latin typeface="Consolas"/>
+              </a:rPr>
+              <a:t>질문 → 검색(top-k 근거) → LLM(근거+질문) → 답변</a:t>
+            </a:r>
+          </a:p>
+        </p:txBody>
+      </p:sp>
+      <p:sp>
+        <p:nvSpPr>
+          <p:cNvPr id="22" name="TextBox 21"/>
+          <p:cNvSpPr txBox="1"/>
+          <p:nvPr/>
+        </p:nvSpPr>
+        <p:spPr>
+          <a:xfrm>
+            <a:off x="640080" y="6437376"/>
+            <a:ext cx="8229600" cy="274320"/>
+          </a:xfrm>
+          <a:prstGeom prst="rect">
+            <a:avLst/>
+          </a:prstGeom>
+          <a:noFill/>
+        </p:spPr>
+        <p:txBody>
+          <a:bodyPr wrap="square">
+            <a:spAutoFit/>
+          </a:bodyPr>
+          <a:lstStyle/>
+          <a:p>
+            <a:r>
+              <a:rPr sz="900" b="0">
+                <a:solidFill>
+                  <a:srgbClr val="9A9AA2"/>
+                </a:solidFill>
+                <a:latin typeface="맑은 고딕"/>
+              </a:rPr>
+              <a:t>시계열 데이터 분석  ·  한국 해시태그 트렌드</a:t>
+            </a:r>
+          </a:p>
+        </p:txBody>
+      </p:sp>
+      <p:sp>
+        <p:nvSpPr>
+          <p:cNvPr id="23" name="TextBox 22"/>
+          <p:cNvSpPr txBox="1"/>
+          <p:nvPr/>
+        </p:nvSpPr>
+        <p:spPr>
+          <a:xfrm>
+            <a:off x="11002975" y="6437376"/>
+            <a:ext cx="822960" cy="274320"/>
+          </a:xfrm>
+          <a:prstGeom prst="rect">
+            <a:avLst/>
+          </a:prstGeom>
+          <a:noFill/>
+        </p:spPr>
+        <p:txBody>
+          <a:bodyPr wrap="square">
+            <a:spAutoFit/>
+          </a:bodyPr>
+          <a:lstStyle/>
+          <a:p>
+            <a:pPr algn="r"/>
+            <a:r>
+              <a:rPr sz="900" b="1">
+                <a:solidFill>
+                  <a:srgbClr val="E1306C"/>
+                </a:solidFill>
+                <a:latin typeface="맑은 고딕"/>
+              </a:rPr>
+              <a:t>24</a:t>
             </a:r>
           </a:p>
         </p:txBody>
@@ -14301,6 +15963,3722 @@
                 <a:latin typeface="맑은 고딕"/>
               </a:rPr>
               <a:t>02</a:t>
+            </a:r>
+          </a:p>
+        </p:txBody>
+      </p:sp>
+    </p:spTree>
+  </p:cSld>
+  <p:clrMapOvr>
+    <a:masterClrMapping/>
+  </p:clrMapOvr>
+</p:sld>
+</file>
+
+<file path=ppt/slides/slide30.xml><?xml version="1.0" encoding="utf-8"?>
+<p:sld xmlns:a="http://schemas.openxmlformats.org/drawingml/2006/main" xmlns:p="http://schemas.openxmlformats.org/presentationml/2006/main" xmlns:r="http://schemas.openxmlformats.org/officeDocument/2006/relationships">
+  <p:cSld>
+    <p:spTree>
+      <p:nvGrpSpPr>
+        <p:cNvPr id="1" name=""/>
+        <p:cNvGrpSpPr/>
+        <p:nvPr/>
+      </p:nvGrpSpPr>
+      <p:grpSpPr/>
+      <p:sp>
+        <p:nvSpPr>
+          <p:cNvPr id="2" name="TextBox 1"/>
+          <p:cNvSpPr txBox="1"/>
+          <p:nvPr/>
+        </p:nvSpPr>
+        <p:spPr>
+          <a:xfrm>
+            <a:off x="658368" y="384048"/>
+            <a:ext cx="10789920" cy="292608"/>
+          </a:xfrm>
+          <a:prstGeom prst="rect">
+            <a:avLst/>
+          </a:prstGeom>
+          <a:noFill/>
+        </p:spPr>
+        <p:txBody>
+          <a:bodyPr wrap="square">
+            <a:spAutoFit/>
+          </a:bodyPr>
+          <a:lstStyle/>
+          <a:p>
+            <a:r>
+              <a:rPr sz="1050" b="1">
+                <a:solidFill>
+                  <a:srgbClr val="E1306C"/>
+                </a:solidFill>
+                <a:latin typeface="Segoe UI"/>
+              </a:rPr>
+              <a:t>07 · LLM AGENT</a:t>
+            </a:r>
+          </a:p>
+        </p:txBody>
+      </p:sp>
+      <p:sp>
+        <p:nvSpPr>
+          <p:cNvPr id="3" name="TextBox 2"/>
+          <p:cNvSpPr txBox="1"/>
+          <p:nvPr/>
+        </p:nvSpPr>
+        <p:spPr>
+          <a:xfrm>
+            <a:off x="640080" y="658368"/>
+            <a:ext cx="10881360" cy="640080"/>
+          </a:xfrm>
+          <a:prstGeom prst="rect">
+            <a:avLst/>
+          </a:prstGeom>
+          <a:noFill/>
+        </p:spPr>
+        <p:txBody>
+          <a:bodyPr wrap="square">
+            <a:spAutoFit/>
+          </a:bodyPr>
+          <a:lstStyle/>
+          <a:p>
+            <a:r>
+              <a:rPr sz="2700" b="1">
+                <a:solidFill>
+                  <a:srgbClr val="1A1A1E"/>
+                </a:solidFill>
+                <a:latin typeface="맑은 고딕"/>
+              </a:rPr>
+              <a:t>LLM 에이전트 — 분석에서 실행까지</a:t>
+            </a:r>
+          </a:p>
+        </p:txBody>
+      </p:sp>
+      <p:sp>
+        <p:nvSpPr>
+          <p:cNvPr id="4" name="Rectangle 3"/>
+          <p:cNvSpPr/>
+          <p:nvPr/>
+        </p:nvSpPr>
+        <p:spPr>
+          <a:xfrm>
+            <a:off x="658368" y="1298448"/>
+            <a:ext cx="10881360" cy="12700"/>
+          </a:xfrm>
+          <a:prstGeom prst="rect">
+            <a:avLst/>
+          </a:prstGeom>
+          <a:solidFill>
+            <a:srgbClr val="E6E6EA"/>
+          </a:solidFill>
+          <a:ln>
+            <a:noFill/>
+          </a:ln>
+          <a:effectLst/>
+        </p:spPr>
+        <p:style>
+          <a:lnRef idx="1">
+            <a:schemeClr val="accent1"/>
+          </a:lnRef>
+          <a:fillRef idx="3">
+            <a:schemeClr val="accent1"/>
+          </a:fillRef>
+          <a:effectRef idx="2">
+            <a:schemeClr val="accent1"/>
+          </a:effectRef>
+          <a:fontRef idx="minor">
+            <a:schemeClr val="lt1"/>
+          </a:fontRef>
+        </p:style>
+        <p:txBody>
+          <a:bodyPr rtlCol="0" anchor="ctr"/>
+          <a:lstStyle/>
+          <a:p>
+            <a:pPr algn="ctr"/>
+          </a:p>
+        </p:txBody>
+      </p:sp>
+      <p:sp>
+        <p:nvSpPr>
+          <p:cNvPr id="5" name="Rounded Rectangle 4"/>
+          <p:cNvSpPr/>
+          <p:nvPr/>
+        </p:nvSpPr>
+        <p:spPr>
+          <a:xfrm>
+            <a:off x="658368" y="1536192"/>
+            <a:ext cx="10881360" cy="841248"/>
+          </a:xfrm>
+          <a:prstGeom prst="roundRect">
+            <a:avLst>
+              <a:gd name="adj" fmla="val 8000"/>
+            </a:avLst>
+          </a:prstGeom>
+          <a:solidFill>
+            <a:srgbClr val="FBE9F1"/>
+          </a:solidFill>
+          <a:ln>
+            <a:noFill/>
+          </a:ln>
+          <a:effectLst/>
+        </p:spPr>
+        <p:style>
+          <a:lnRef idx="1">
+            <a:schemeClr val="accent1"/>
+          </a:lnRef>
+          <a:fillRef idx="3">
+            <a:schemeClr val="accent1"/>
+          </a:fillRef>
+          <a:effectRef idx="2">
+            <a:schemeClr val="accent1"/>
+          </a:effectRef>
+          <a:fontRef idx="minor">
+            <a:schemeClr val="lt1"/>
+          </a:fontRef>
+        </p:style>
+        <p:txBody>
+          <a:bodyPr rtlCol="0" anchor="ctr"/>
+          <a:lstStyle/>
+          <a:p>
+            <a:pPr algn="ctr"/>
+          </a:p>
+        </p:txBody>
+      </p:sp>
+      <p:sp>
+        <p:nvSpPr>
+          <p:cNvPr id="6" name="Rectangle 5"/>
+          <p:cNvSpPr/>
+          <p:nvPr/>
+        </p:nvSpPr>
+        <p:spPr>
+          <a:xfrm>
+            <a:off x="658368" y="1536192"/>
+            <a:ext cx="91440" cy="841248"/>
+          </a:xfrm>
+          <a:prstGeom prst="rect">
+            <a:avLst/>
+          </a:prstGeom>
+          <a:solidFill>
+            <a:srgbClr val="E1306C"/>
+          </a:solidFill>
+          <a:ln>
+            <a:noFill/>
+          </a:ln>
+          <a:effectLst/>
+        </p:spPr>
+        <p:style>
+          <a:lnRef idx="1">
+            <a:schemeClr val="accent1"/>
+          </a:lnRef>
+          <a:fillRef idx="3">
+            <a:schemeClr val="accent1"/>
+          </a:fillRef>
+          <a:effectRef idx="2">
+            <a:schemeClr val="accent1"/>
+          </a:effectRef>
+          <a:fontRef idx="minor">
+            <a:schemeClr val="lt1"/>
+          </a:fontRef>
+        </p:style>
+        <p:txBody>
+          <a:bodyPr rtlCol="0" anchor="ctr"/>
+          <a:lstStyle/>
+          <a:p>
+            <a:pPr algn="ctr"/>
+          </a:p>
+        </p:txBody>
+      </p:sp>
+      <p:sp>
+        <p:nvSpPr>
+          <p:cNvPr id="7" name="TextBox 6"/>
+          <p:cNvSpPr txBox="1"/>
+          <p:nvPr/>
+        </p:nvSpPr>
+        <p:spPr>
+          <a:xfrm>
+            <a:off x="960120" y="1627632"/>
+            <a:ext cx="10332720" cy="658368"/>
+          </a:xfrm>
+          <a:prstGeom prst="rect">
+            <a:avLst/>
+          </a:prstGeom>
+          <a:noFill/>
+        </p:spPr>
+        <p:txBody>
+          <a:bodyPr wrap="square" anchor="ctr">
+            <a:spAutoFit/>
+          </a:bodyPr>
+          <a:lstStyle/>
+          <a:p>
+            <a:r>
+              <a:rPr sz="1500" b="1">
+                <a:solidFill>
+                  <a:srgbClr val="1A1A1E"/>
+                </a:solidFill>
+                <a:latin typeface="맑은 고딕"/>
+              </a:rPr>
+              <a:t>에이전트 = LLM + 도구 사용 + 자율 루프. 예측 결과를 받아 사람이 쓸 산출물로 바꾼다.</a:t>
+            </a:r>
+          </a:p>
+        </p:txBody>
+      </p:sp>
+      <p:sp>
+        <p:nvSpPr>
+          <p:cNvPr id="8" name="TextBox 7"/>
+          <p:cNvSpPr txBox="1"/>
+          <p:nvPr/>
+        </p:nvSpPr>
+        <p:spPr>
+          <a:xfrm>
+            <a:off x="777240" y="2633472"/>
+            <a:ext cx="10698480" cy="4206240"/>
+          </a:xfrm>
+          <a:prstGeom prst="rect">
+            <a:avLst/>
+          </a:prstGeom>
+          <a:noFill/>
+        </p:spPr>
+        <p:txBody>
+          <a:bodyPr wrap="square">
+            <a:spAutoFit/>
+          </a:bodyPr>
+          <a:lstStyle/>
+          <a:p>
+            <a:pPr>
+              <a:spcAft>
+                <a:spcPts val="300"/>
+              </a:spcAft>
+            </a:pPr>
+            <a:r>
+              <a:rPr sz="1600" b="1">
+                <a:solidFill>
+                  <a:srgbClr val="1A1A1E"/>
+                </a:solidFill>
+                <a:latin typeface="맑은 고딕"/>
+              </a:rPr>
+              <a:t>도구 사용</a:t>
+            </a:r>
+          </a:p>
+          <a:p>
+            <a:pPr>
+              <a:spcAft>
+                <a:spcPts val="1500"/>
+              </a:spcAft>
+            </a:pPr>
+            <a:r>
+              <a:rPr sz="1350" b="0">
+                <a:solidFill>
+                  <a:srgbClr val="666670"/>
+                </a:solidFill>
+                <a:latin typeface="맑은 고딕"/>
+              </a:rPr>
+              <a:t>예측 모델·데이터랩 API를 직접 호출해 최신 수치를 가져옴 (function calling)</a:t>
+            </a:r>
+          </a:p>
+          <a:p>
+            <a:pPr>
+              <a:spcAft>
+                <a:spcPts val="300"/>
+              </a:spcAft>
+            </a:pPr>
+            <a:r>
+              <a:rPr sz="1600" b="1">
+                <a:solidFill>
+                  <a:srgbClr val="1A1A1E"/>
+                </a:solidFill>
+                <a:latin typeface="맑은 고딕"/>
+              </a:rPr>
+              <a:t>자동 인사이트</a:t>
+            </a:r>
+          </a:p>
+          <a:p>
+            <a:pPr>
+              <a:spcAft>
+                <a:spcPts val="1500"/>
+              </a:spcAft>
+            </a:pPr>
+            <a:r>
+              <a:rPr sz="1350" b="0">
+                <a:solidFill>
+                  <a:srgbClr val="666670"/>
+                </a:solidFill>
+                <a:latin typeface="맑은 고딕"/>
+              </a:rPr>
+              <a:t>‘#등산 상승, #피크닉 피크 통과’ 같은 결론을 자연어로 요약·설명</a:t>
+            </a:r>
+          </a:p>
+          <a:p>
+            <a:pPr>
+              <a:spcAft>
+                <a:spcPts val="300"/>
+              </a:spcAft>
+            </a:pPr>
+            <a:r>
+              <a:rPr sz="1600" b="1">
+                <a:solidFill>
+                  <a:srgbClr val="1A1A1E"/>
+                </a:solidFill>
+                <a:latin typeface="맑은 고딕"/>
+              </a:rPr>
+              <a:t>콘텐츠 생성</a:t>
+            </a:r>
+          </a:p>
+          <a:p>
+            <a:pPr>
+              <a:spcAft>
+                <a:spcPts val="1500"/>
+              </a:spcAft>
+            </a:pPr>
+            <a:r>
+              <a:rPr sz="1350" b="0">
+                <a:solidFill>
+                  <a:srgbClr val="666670"/>
+                </a:solidFill>
+                <a:latin typeface="맑은 고딕"/>
+              </a:rPr>
+              <a:t>추천 태그·게시 타이밍에 맞춘 캡션·기획안 초안 작성</a:t>
+            </a:r>
+          </a:p>
+          <a:p>
+            <a:pPr>
+              <a:spcAft>
+                <a:spcPts val="300"/>
+              </a:spcAft>
+            </a:pPr>
+            <a:r>
+              <a:rPr sz="1600" b="1">
+                <a:solidFill>
+                  <a:srgbClr val="1A1A1E"/>
+                </a:solidFill>
+                <a:latin typeface="맑은 고딕"/>
+              </a:rPr>
+              <a:t>사람 확인 게이트</a:t>
+            </a:r>
+          </a:p>
+          <a:p>
+            <a:pPr>
+              <a:spcAft>
+                <a:spcPts val="1500"/>
+              </a:spcAft>
+            </a:pPr>
+            <a:r>
+              <a:rPr sz="1350" b="0">
+                <a:solidFill>
+                  <a:srgbClr val="666670"/>
+                </a:solidFill>
+                <a:latin typeface="맑은 고딕"/>
+              </a:rPr>
+              <a:t>발행 전 사람이 검수 — 최신 LLM(예: Claude Opus 4.8)도 항상 사람 승인 후 실행</a:t>
+            </a:r>
+          </a:p>
+        </p:txBody>
+      </p:sp>
+      <p:sp>
+        <p:nvSpPr>
+          <p:cNvPr id="9" name="TextBox 8"/>
+          <p:cNvSpPr txBox="1"/>
+          <p:nvPr/>
+        </p:nvSpPr>
+        <p:spPr>
+          <a:xfrm>
+            <a:off x="640080" y="6437376"/>
+            <a:ext cx="8229600" cy="274320"/>
+          </a:xfrm>
+          <a:prstGeom prst="rect">
+            <a:avLst/>
+          </a:prstGeom>
+          <a:noFill/>
+        </p:spPr>
+        <p:txBody>
+          <a:bodyPr wrap="square">
+            <a:spAutoFit/>
+          </a:bodyPr>
+          <a:lstStyle/>
+          <a:p>
+            <a:r>
+              <a:rPr sz="900" b="0">
+                <a:solidFill>
+                  <a:srgbClr val="9A9AA2"/>
+                </a:solidFill>
+                <a:latin typeface="맑은 고딕"/>
+              </a:rPr>
+              <a:t>시계열 데이터 분석  ·  한국 해시태그 트렌드</a:t>
+            </a:r>
+          </a:p>
+        </p:txBody>
+      </p:sp>
+      <p:sp>
+        <p:nvSpPr>
+          <p:cNvPr id="10" name="TextBox 9"/>
+          <p:cNvSpPr txBox="1"/>
+          <p:nvPr/>
+        </p:nvSpPr>
+        <p:spPr>
+          <a:xfrm>
+            <a:off x="11002975" y="6437376"/>
+            <a:ext cx="822960" cy="274320"/>
+          </a:xfrm>
+          <a:prstGeom prst="rect">
+            <a:avLst/>
+          </a:prstGeom>
+          <a:noFill/>
+        </p:spPr>
+        <p:txBody>
+          <a:bodyPr wrap="square">
+            <a:spAutoFit/>
+          </a:bodyPr>
+          <a:lstStyle/>
+          <a:p>
+            <a:pPr algn="r"/>
+            <a:r>
+              <a:rPr sz="900" b="1">
+                <a:solidFill>
+                  <a:srgbClr val="E1306C"/>
+                </a:solidFill>
+                <a:latin typeface="맑은 고딕"/>
+              </a:rPr>
+              <a:t>25</a:t>
+            </a:r>
+          </a:p>
+        </p:txBody>
+      </p:sp>
+    </p:spTree>
+  </p:cSld>
+  <p:clrMapOvr>
+    <a:masterClrMapping/>
+  </p:clrMapOvr>
+</p:sld>
+</file>
+
+<file path=ppt/slides/slide31.xml><?xml version="1.0" encoding="utf-8"?>
+<p:sld xmlns:a="http://schemas.openxmlformats.org/drawingml/2006/main" xmlns:p="http://schemas.openxmlformats.org/presentationml/2006/main" xmlns:r="http://schemas.openxmlformats.org/officeDocument/2006/relationships">
+  <p:cSld>
+    <p:spTree>
+      <p:nvGrpSpPr>
+        <p:cNvPr id="1" name=""/>
+        <p:cNvGrpSpPr/>
+        <p:nvPr/>
+      </p:nvGrpSpPr>
+      <p:grpSpPr/>
+      <p:sp>
+        <p:nvSpPr>
+          <p:cNvPr id="2" name="TextBox 1"/>
+          <p:cNvSpPr txBox="1"/>
+          <p:nvPr/>
+        </p:nvSpPr>
+        <p:spPr>
+          <a:xfrm>
+            <a:off x="658368" y="384048"/>
+            <a:ext cx="10789920" cy="292608"/>
+          </a:xfrm>
+          <a:prstGeom prst="rect">
+            <a:avLst/>
+          </a:prstGeom>
+          <a:noFill/>
+        </p:spPr>
+        <p:txBody>
+          <a:bodyPr wrap="square">
+            <a:spAutoFit/>
+          </a:bodyPr>
+          <a:lstStyle/>
+          <a:p>
+            <a:r>
+              <a:rPr sz="1050" b="1">
+                <a:solidFill>
+                  <a:srgbClr val="E1306C"/>
+                </a:solidFill>
+                <a:latin typeface="Segoe UI"/>
+              </a:rPr>
+              <a:t>07 · ARCHITECTURE</a:t>
+            </a:r>
+          </a:p>
+        </p:txBody>
+      </p:sp>
+      <p:sp>
+        <p:nvSpPr>
+          <p:cNvPr id="3" name="TextBox 2"/>
+          <p:cNvSpPr txBox="1"/>
+          <p:nvPr/>
+        </p:nvSpPr>
+        <p:spPr>
+          <a:xfrm>
+            <a:off x="640080" y="658368"/>
+            <a:ext cx="10881360" cy="640080"/>
+          </a:xfrm>
+          <a:prstGeom prst="rect">
+            <a:avLst/>
+          </a:prstGeom>
+          <a:noFill/>
+        </p:spPr>
+        <p:txBody>
+          <a:bodyPr wrap="square">
+            <a:spAutoFit/>
+          </a:bodyPr>
+          <a:lstStyle/>
+          <a:p>
+            <a:r>
+              <a:rPr sz="2700" b="1">
+                <a:solidFill>
+                  <a:srgbClr val="1A1A1E"/>
+                </a:solidFill>
+                <a:latin typeface="맑은 고딕"/>
+              </a:rPr>
+              <a:t>적용 아키텍처 — 트렌드 인텔리전스 시스템</a:t>
+            </a:r>
+          </a:p>
+        </p:txBody>
+      </p:sp>
+      <p:sp>
+        <p:nvSpPr>
+          <p:cNvPr id="4" name="Rectangle 3"/>
+          <p:cNvSpPr/>
+          <p:nvPr/>
+        </p:nvSpPr>
+        <p:spPr>
+          <a:xfrm>
+            <a:off x="658368" y="1298448"/>
+            <a:ext cx="10881360" cy="12700"/>
+          </a:xfrm>
+          <a:prstGeom prst="rect">
+            <a:avLst/>
+          </a:prstGeom>
+          <a:solidFill>
+            <a:srgbClr val="E6E6EA"/>
+          </a:solidFill>
+          <a:ln>
+            <a:noFill/>
+          </a:ln>
+          <a:effectLst/>
+        </p:spPr>
+        <p:style>
+          <a:lnRef idx="1">
+            <a:schemeClr val="accent1"/>
+          </a:lnRef>
+          <a:fillRef idx="3">
+            <a:schemeClr val="accent1"/>
+          </a:fillRef>
+          <a:effectRef idx="2">
+            <a:schemeClr val="accent1"/>
+          </a:effectRef>
+          <a:fontRef idx="minor">
+            <a:schemeClr val="lt1"/>
+          </a:fontRef>
+        </p:style>
+        <p:txBody>
+          <a:bodyPr rtlCol="0" anchor="ctr"/>
+          <a:lstStyle/>
+          <a:p>
+            <a:pPr algn="ctr"/>
+          </a:p>
+        </p:txBody>
+      </p:sp>
+      <p:sp>
+        <p:nvSpPr>
+          <p:cNvPr id="5" name="Rounded Rectangle 4"/>
+          <p:cNvSpPr/>
+          <p:nvPr/>
+        </p:nvSpPr>
+        <p:spPr>
+          <a:xfrm>
+            <a:off x="658368" y="2331720"/>
+            <a:ext cx="1927555" cy="2057400"/>
+          </a:xfrm>
+          <a:prstGeom prst="roundRect">
+            <a:avLst>
+              <a:gd name="adj" fmla="val 8000"/>
+            </a:avLst>
+          </a:prstGeom>
+          <a:solidFill>
+            <a:srgbClr val="F6F6F9"/>
+          </a:solidFill>
+          <a:ln w="12700">
+            <a:solidFill>
+              <a:srgbClr val="E6E6EA"/>
+            </a:solidFill>
+          </a:ln>
+          <a:effectLst/>
+        </p:spPr>
+        <p:style>
+          <a:lnRef idx="1">
+            <a:schemeClr val="accent1"/>
+          </a:lnRef>
+          <a:fillRef idx="3">
+            <a:schemeClr val="accent1"/>
+          </a:fillRef>
+          <a:effectRef idx="2">
+            <a:schemeClr val="accent1"/>
+          </a:effectRef>
+          <a:fontRef idx="minor">
+            <a:schemeClr val="lt1"/>
+          </a:fontRef>
+        </p:style>
+        <p:txBody>
+          <a:bodyPr rtlCol="0" anchor="ctr"/>
+          <a:lstStyle/>
+          <a:p>
+            <a:pPr algn="ctr"/>
+          </a:p>
+        </p:txBody>
+      </p:sp>
+      <p:sp>
+        <p:nvSpPr>
+          <p:cNvPr id="6" name="Rectangle 5"/>
+          <p:cNvSpPr/>
+          <p:nvPr/>
+        </p:nvSpPr>
+        <p:spPr>
+          <a:xfrm>
+            <a:off x="658368" y="2331720"/>
+            <a:ext cx="1927555" cy="109728"/>
+          </a:xfrm>
+          <a:prstGeom prst="rect">
+            <a:avLst/>
+          </a:prstGeom>
+          <a:solidFill>
+            <a:srgbClr val="E1306C"/>
+          </a:solidFill>
+          <a:ln>
+            <a:noFill/>
+          </a:ln>
+          <a:effectLst/>
+        </p:spPr>
+        <p:style>
+          <a:lnRef idx="1">
+            <a:schemeClr val="accent1"/>
+          </a:lnRef>
+          <a:fillRef idx="3">
+            <a:schemeClr val="accent1"/>
+          </a:fillRef>
+          <a:effectRef idx="2">
+            <a:schemeClr val="accent1"/>
+          </a:effectRef>
+          <a:fontRef idx="minor">
+            <a:schemeClr val="lt1"/>
+          </a:fontRef>
+        </p:style>
+        <p:txBody>
+          <a:bodyPr rtlCol="0" anchor="ctr"/>
+          <a:lstStyle/>
+          <a:p>
+            <a:pPr algn="ctr"/>
+          </a:p>
+        </p:txBody>
+      </p:sp>
+      <p:sp>
+        <p:nvSpPr>
+          <p:cNvPr id="7" name="TextBox 6"/>
+          <p:cNvSpPr txBox="1"/>
+          <p:nvPr/>
+        </p:nvSpPr>
+        <p:spPr>
+          <a:xfrm>
+            <a:off x="841248" y="2569464"/>
+            <a:ext cx="1561795" cy="365760"/>
+          </a:xfrm>
+          <a:prstGeom prst="rect">
+            <a:avLst/>
+          </a:prstGeom>
+          <a:noFill/>
+        </p:spPr>
+        <p:txBody>
+          <a:bodyPr wrap="square">
+            <a:spAutoFit/>
+          </a:bodyPr>
+          <a:lstStyle/>
+          <a:p>
+            <a:r>
+              <a:rPr sz="1500" b="1">
+                <a:solidFill>
+                  <a:srgbClr val="E1306C"/>
+                </a:solidFill>
+                <a:latin typeface="Segoe UI"/>
+              </a:rPr>
+              <a:t>01</a:t>
+            </a:r>
+          </a:p>
+        </p:txBody>
+      </p:sp>
+      <p:sp>
+        <p:nvSpPr>
+          <p:cNvPr id="8" name="TextBox 7"/>
+          <p:cNvSpPr txBox="1"/>
+          <p:nvPr/>
+        </p:nvSpPr>
+        <p:spPr>
+          <a:xfrm>
+            <a:off x="841248" y="3008376"/>
+            <a:ext cx="1561795" cy="548640"/>
+          </a:xfrm>
+          <a:prstGeom prst="rect">
+            <a:avLst/>
+          </a:prstGeom>
+          <a:noFill/>
+        </p:spPr>
+        <p:txBody>
+          <a:bodyPr wrap="square">
+            <a:spAutoFit/>
+          </a:bodyPr>
+          <a:lstStyle/>
+          <a:p>
+            <a:r>
+              <a:rPr sz="1400" b="1">
+                <a:solidFill>
+                  <a:srgbClr val="1A1A1E"/>
+                </a:solidFill>
+                <a:latin typeface="맑은 고딕"/>
+              </a:rPr>
+              <a:t>데이터 수집</a:t>
+            </a:r>
+          </a:p>
+        </p:txBody>
+      </p:sp>
+      <p:sp>
+        <p:nvSpPr>
+          <p:cNvPr id="9" name="TextBox 8"/>
+          <p:cNvSpPr txBox="1"/>
+          <p:nvPr/>
+        </p:nvSpPr>
+        <p:spPr>
+          <a:xfrm>
+            <a:off x="841248" y="3520440"/>
+            <a:ext cx="1561795" cy="777240"/>
+          </a:xfrm>
+          <a:prstGeom prst="rect">
+            <a:avLst/>
+          </a:prstGeom>
+          <a:noFill/>
+        </p:spPr>
+        <p:txBody>
+          <a:bodyPr wrap="square">
+            <a:spAutoFit/>
+          </a:bodyPr>
+          <a:lstStyle/>
+          <a:p>
+            <a:r>
+              <a:rPr sz="1050" b="0">
+                <a:solidFill>
+                  <a:srgbClr val="666670"/>
+                </a:solidFill>
+                <a:latin typeface="맑은 고딕"/>
+              </a:rPr>
+              <a:t>네이버 데이터랩 · 인스타그램 API · 일별 패널</a:t>
+            </a:r>
+          </a:p>
+        </p:txBody>
+      </p:sp>
+      <p:sp>
+        <p:nvSpPr>
+          <p:cNvPr id="10" name="Right Arrow 9"/>
+          <p:cNvSpPr/>
+          <p:nvPr/>
+        </p:nvSpPr>
+        <p:spPr>
+          <a:xfrm>
+            <a:off x="2567635" y="3268980"/>
+            <a:ext cx="347472" cy="182880"/>
+          </a:xfrm>
+          <a:prstGeom prst="rightArrow">
+            <a:avLst/>
+          </a:prstGeom>
+          <a:solidFill>
+            <a:srgbClr val="9A9AA2"/>
+          </a:solidFill>
+          <a:ln>
+            <a:noFill/>
+          </a:ln>
+          <a:effectLst/>
+        </p:spPr>
+        <p:style>
+          <a:lnRef idx="1">
+            <a:schemeClr val="accent1"/>
+          </a:lnRef>
+          <a:fillRef idx="3">
+            <a:schemeClr val="accent1"/>
+          </a:fillRef>
+          <a:effectRef idx="2">
+            <a:schemeClr val="accent1"/>
+          </a:effectRef>
+          <a:fontRef idx="minor">
+            <a:schemeClr val="lt1"/>
+          </a:fontRef>
+        </p:style>
+        <p:txBody>
+          <a:bodyPr rtlCol="0" anchor="ctr"/>
+          <a:lstStyle/>
+          <a:p>
+            <a:pPr algn="ctr"/>
+          </a:p>
+        </p:txBody>
+      </p:sp>
+      <p:sp>
+        <p:nvSpPr>
+          <p:cNvPr id="11" name="Rounded Rectangle 10"/>
+          <p:cNvSpPr/>
+          <p:nvPr/>
+        </p:nvSpPr>
+        <p:spPr>
+          <a:xfrm>
+            <a:off x="2896819" y="2331720"/>
+            <a:ext cx="1927555" cy="2057400"/>
+          </a:xfrm>
+          <a:prstGeom prst="roundRect">
+            <a:avLst>
+              <a:gd name="adj" fmla="val 8000"/>
+            </a:avLst>
+          </a:prstGeom>
+          <a:solidFill>
+            <a:srgbClr val="F6F6F9"/>
+          </a:solidFill>
+          <a:ln w="12700">
+            <a:solidFill>
+              <a:srgbClr val="E6E6EA"/>
+            </a:solidFill>
+          </a:ln>
+          <a:effectLst/>
+        </p:spPr>
+        <p:style>
+          <a:lnRef idx="1">
+            <a:schemeClr val="accent1"/>
+          </a:lnRef>
+          <a:fillRef idx="3">
+            <a:schemeClr val="accent1"/>
+          </a:fillRef>
+          <a:effectRef idx="2">
+            <a:schemeClr val="accent1"/>
+          </a:effectRef>
+          <a:fontRef idx="minor">
+            <a:schemeClr val="lt1"/>
+          </a:fontRef>
+        </p:style>
+        <p:txBody>
+          <a:bodyPr rtlCol="0" anchor="ctr"/>
+          <a:lstStyle/>
+          <a:p>
+            <a:pPr algn="ctr"/>
+          </a:p>
+        </p:txBody>
+      </p:sp>
+      <p:sp>
+        <p:nvSpPr>
+          <p:cNvPr id="12" name="Rectangle 11"/>
+          <p:cNvSpPr/>
+          <p:nvPr/>
+        </p:nvSpPr>
+        <p:spPr>
+          <a:xfrm>
+            <a:off x="2896819" y="2331720"/>
+            <a:ext cx="1927555" cy="109728"/>
+          </a:xfrm>
+          <a:prstGeom prst="rect">
+            <a:avLst/>
+          </a:prstGeom>
+          <a:solidFill>
+            <a:srgbClr val="6A3DB8"/>
+          </a:solidFill>
+          <a:ln>
+            <a:noFill/>
+          </a:ln>
+          <a:effectLst/>
+        </p:spPr>
+        <p:style>
+          <a:lnRef idx="1">
+            <a:schemeClr val="accent1"/>
+          </a:lnRef>
+          <a:fillRef idx="3">
+            <a:schemeClr val="accent1"/>
+          </a:fillRef>
+          <a:effectRef idx="2">
+            <a:schemeClr val="accent1"/>
+          </a:effectRef>
+          <a:fontRef idx="minor">
+            <a:schemeClr val="lt1"/>
+          </a:fontRef>
+        </p:style>
+        <p:txBody>
+          <a:bodyPr rtlCol="0" anchor="ctr"/>
+          <a:lstStyle/>
+          <a:p>
+            <a:pPr algn="ctr"/>
+          </a:p>
+        </p:txBody>
+      </p:sp>
+      <p:sp>
+        <p:nvSpPr>
+          <p:cNvPr id="13" name="TextBox 12"/>
+          <p:cNvSpPr txBox="1"/>
+          <p:nvPr/>
+        </p:nvSpPr>
+        <p:spPr>
+          <a:xfrm>
+            <a:off x="3079699" y="2569464"/>
+            <a:ext cx="1561795" cy="365760"/>
+          </a:xfrm>
+          <a:prstGeom prst="rect">
+            <a:avLst/>
+          </a:prstGeom>
+          <a:noFill/>
+        </p:spPr>
+        <p:txBody>
+          <a:bodyPr wrap="square">
+            <a:spAutoFit/>
+          </a:bodyPr>
+          <a:lstStyle/>
+          <a:p>
+            <a:r>
+              <a:rPr sz="1500" b="1">
+                <a:solidFill>
+                  <a:srgbClr val="6A3DB8"/>
+                </a:solidFill>
+                <a:latin typeface="Segoe UI"/>
+              </a:rPr>
+              <a:t>02</a:t>
+            </a:r>
+          </a:p>
+        </p:txBody>
+      </p:sp>
+      <p:sp>
+        <p:nvSpPr>
+          <p:cNvPr id="14" name="TextBox 13"/>
+          <p:cNvSpPr txBox="1"/>
+          <p:nvPr/>
+        </p:nvSpPr>
+        <p:spPr>
+          <a:xfrm>
+            <a:off x="3079699" y="3008376"/>
+            <a:ext cx="1561795" cy="548640"/>
+          </a:xfrm>
+          <a:prstGeom prst="rect">
+            <a:avLst/>
+          </a:prstGeom>
+          <a:noFill/>
+        </p:spPr>
+        <p:txBody>
+          <a:bodyPr wrap="square">
+            <a:spAutoFit/>
+          </a:bodyPr>
+          <a:lstStyle/>
+          <a:p>
+            <a:r>
+              <a:rPr sz="1400" b="1">
+                <a:solidFill>
+                  <a:srgbClr val="1A1A1E"/>
+                </a:solidFill>
+                <a:latin typeface="맑은 고딕"/>
+              </a:rPr>
+              <a:t>시계열 예측</a:t>
+            </a:r>
+          </a:p>
+        </p:txBody>
+      </p:sp>
+      <p:sp>
+        <p:nvSpPr>
+          <p:cNvPr id="15" name="TextBox 14"/>
+          <p:cNvSpPr txBox="1"/>
+          <p:nvPr/>
+        </p:nvSpPr>
+        <p:spPr>
+          <a:xfrm>
+            <a:off x="3079699" y="3520440"/>
+            <a:ext cx="1561795" cy="777240"/>
+          </a:xfrm>
+          <a:prstGeom prst="rect">
+            <a:avLst/>
+          </a:prstGeom>
+          <a:noFill/>
+        </p:spPr>
+        <p:txBody>
+          <a:bodyPr wrap="square">
+            <a:spAutoFit/>
+          </a:bodyPr>
+          <a:lstStyle/>
+          <a:p>
+            <a:r>
+              <a:rPr sz="1050" b="0">
+                <a:solidFill>
+                  <a:srgbClr val="666670"/>
+                </a:solidFill>
+                <a:latin typeface="맑은 고딕"/>
+              </a:rPr>
+              <a:t>SARIMA · LSTM · TFT 앙상블로 14일 전망</a:t>
+            </a:r>
+          </a:p>
+        </p:txBody>
+      </p:sp>
+      <p:sp>
+        <p:nvSpPr>
+          <p:cNvPr id="16" name="Right Arrow 15"/>
+          <p:cNvSpPr/>
+          <p:nvPr/>
+        </p:nvSpPr>
+        <p:spPr>
+          <a:xfrm>
+            <a:off x="4806086" y="3268980"/>
+            <a:ext cx="347472" cy="182880"/>
+          </a:xfrm>
+          <a:prstGeom prst="rightArrow">
+            <a:avLst/>
+          </a:prstGeom>
+          <a:solidFill>
+            <a:srgbClr val="9A9AA2"/>
+          </a:solidFill>
+          <a:ln>
+            <a:noFill/>
+          </a:ln>
+          <a:effectLst/>
+        </p:spPr>
+        <p:style>
+          <a:lnRef idx="1">
+            <a:schemeClr val="accent1"/>
+          </a:lnRef>
+          <a:fillRef idx="3">
+            <a:schemeClr val="accent1"/>
+          </a:fillRef>
+          <a:effectRef idx="2">
+            <a:schemeClr val="accent1"/>
+          </a:effectRef>
+          <a:fontRef idx="minor">
+            <a:schemeClr val="lt1"/>
+          </a:fontRef>
+        </p:style>
+        <p:txBody>
+          <a:bodyPr rtlCol="0" anchor="ctr"/>
+          <a:lstStyle/>
+          <a:p>
+            <a:pPr algn="ctr"/>
+          </a:p>
+        </p:txBody>
+      </p:sp>
+      <p:sp>
+        <p:nvSpPr>
+          <p:cNvPr id="17" name="Rounded Rectangle 16"/>
+          <p:cNvSpPr/>
+          <p:nvPr/>
+        </p:nvSpPr>
+        <p:spPr>
+          <a:xfrm>
+            <a:off x="5135270" y="2331720"/>
+            <a:ext cx="1927555" cy="2057400"/>
+          </a:xfrm>
+          <a:prstGeom prst="roundRect">
+            <a:avLst>
+              <a:gd name="adj" fmla="val 8000"/>
+            </a:avLst>
+          </a:prstGeom>
+          <a:solidFill>
+            <a:srgbClr val="F6F6F9"/>
+          </a:solidFill>
+          <a:ln w="12700">
+            <a:solidFill>
+              <a:srgbClr val="E6E6EA"/>
+            </a:solidFill>
+          </a:ln>
+          <a:effectLst/>
+        </p:spPr>
+        <p:style>
+          <a:lnRef idx="1">
+            <a:schemeClr val="accent1"/>
+          </a:lnRef>
+          <a:fillRef idx="3">
+            <a:schemeClr val="accent1"/>
+          </a:fillRef>
+          <a:effectRef idx="2">
+            <a:schemeClr val="accent1"/>
+          </a:effectRef>
+          <a:fontRef idx="minor">
+            <a:schemeClr val="lt1"/>
+          </a:fontRef>
+        </p:style>
+        <p:txBody>
+          <a:bodyPr rtlCol="0" anchor="ctr"/>
+          <a:lstStyle/>
+          <a:p>
+            <a:pPr algn="ctr"/>
+          </a:p>
+        </p:txBody>
+      </p:sp>
+      <p:sp>
+        <p:nvSpPr>
+          <p:cNvPr id="18" name="Rectangle 17"/>
+          <p:cNvSpPr/>
+          <p:nvPr/>
+        </p:nvSpPr>
+        <p:spPr>
+          <a:xfrm>
+            <a:off x="5135270" y="2331720"/>
+            <a:ext cx="1927555" cy="109728"/>
+          </a:xfrm>
+          <a:prstGeom prst="rect">
+            <a:avLst/>
+          </a:prstGeom>
+          <a:solidFill>
+            <a:srgbClr val="1A1A1E"/>
+          </a:solidFill>
+          <a:ln>
+            <a:noFill/>
+          </a:ln>
+          <a:effectLst/>
+        </p:spPr>
+        <p:style>
+          <a:lnRef idx="1">
+            <a:schemeClr val="accent1"/>
+          </a:lnRef>
+          <a:fillRef idx="3">
+            <a:schemeClr val="accent1"/>
+          </a:fillRef>
+          <a:effectRef idx="2">
+            <a:schemeClr val="accent1"/>
+          </a:effectRef>
+          <a:fontRef idx="minor">
+            <a:schemeClr val="lt1"/>
+          </a:fontRef>
+        </p:style>
+        <p:txBody>
+          <a:bodyPr rtlCol="0" anchor="ctr"/>
+          <a:lstStyle/>
+          <a:p>
+            <a:pPr algn="ctr"/>
+          </a:p>
+        </p:txBody>
+      </p:sp>
+      <p:sp>
+        <p:nvSpPr>
+          <p:cNvPr id="19" name="TextBox 18"/>
+          <p:cNvSpPr txBox="1"/>
+          <p:nvPr/>
+        </p:nvSpPr>
+        <p:spPr>
+          <a:xfrm>
+            <a:off x="5318150" y="2569464"/>
+            <a:ext cx="1561795" cy="365760"/>
+          </a:xfrm>
+          <a:prstGeom prst="rect">
+            <a:avLst/>
+          </a:prstGeom>
+          <a:noFill/>
+        </p:spPr>
+        <p:txBody>
+          <a:bodyPr wrap="square">
+            <a:spAutoFit/>
+          </a:bodyPr>
+          <a:lstStyle/>
+          <a:p>
+            <a:r>
+              <a:rPr sz="1500" b="1">
+                <a:solidFill>
+                  <a:srgbClr val="1A1A1E"/>
+                </a:solidFill>
+                <a:latin typeface="Segoe UI"/>
+              </a:rPr>
+              <a:t>03</a:t>
+            </a:r>
+          </a:p>
+        </p:txBody>
+      </p:sp>
+      <p:sp>
+        <p:nvSpPr>
+          <p:cNvPr id="20" name="TextBox 19"/>
+          <p:cNvSpPr txBox="1"/>
+          <p:nvPr/>
+        </p:nvSpPr>
+        <p:spPr>
+          <a:xfrm>
+            <a:off x="5318150" y="3008376"/>
+            <a:ext cx="1561795" cy="548640"/>
+          </a:xfrm>
+          <a:prstGeom prst="rect">
+            <a:avLst/>
+          </a:prstGeom>
+          <a:noFill/>
+        </p:spPr>
+        <p:txBody>
+          <a:bodyPr wrap="square">
+            <a:spAutoFit/>
+          </a:bodyPr>
+          <a:lstStyle/>
+          <a:p>
+            <a:r>
+              <a:rPr sz="1400" b="1">
+                <a:solidFill>
+                  <a:srgbClr val="1A1A1E"/>
+                </a:solidFill>
+                <a:latin typeface="맑은 고딕"/>
+              </a:rPr>
+              <a:t>지식베이스 (RAG)</a:t>
+            </a:r>
+          </a:p>
+        </p:txBody>
+      </p:sp>
+      <p:sp>
+        <p:nvSpPr>
+          <p:cNvPr id="21" name="TextBox 20"/>
+          <p:cNvSpPr txBox="1"/>
+          <p:nvPr/>
+        </p:nvSpPr>
+        <p:spPr>
+          <a:xfrm>
+            <a:off x="5318150" y="3520440"/>
+            <a:ext cx="1561795" cy="777240"/>
+          </a:xfrm>
+          <a:prstGeom prst="rect">
+            <a:avLst/>
+          </a:prstGeom>
+          <a:noFill/>
+        </p:spPr>
+        <p:txBody>
+          <a:bodyPr wrap="square">
+            <a:spAutoFit/>
+          </a:bodyPr>
+          <a:lstStyle/>
+          <a:p>
+            <a:r>
+              <a:rPr sz="1050" b="0">
+                <a:solidFill>
+                  <a:srgbClr val="666670"/>
+                </a:solidFill>
+                <a:latin typeface="맑은 고딕"/>
+              </a:rPr>
+              <a:t>벡터DB: 과거 트렌드 · 캠페인 성과 검색</a:t>
+            </a:r>
+          </a:p>
+        </p:txBody>
+      </p:sp>
+      <p:sp>
+        <p:nvSpPr>
+          <p:cNvPr id="22" name="Right Arrow 21"/>
+          <p:cNvSpPr/>
+          <p:nvPr/>
+        </p:nvSpPr>
+        <p:spPr>
+          <a:xfrm>
+            <a:off x="7044537" y="3268980"/>
+            <a:ext cx="347472" cy="182880"/>
+          </a:xfrm>
+          <a:prstGeom prst="rightArrow">
+            <a:avLst/>
+          </a:prstGeom>
+          <a:solidFill>
+            <a:srgbClr val="9A9AA2"/>
+          </a:solidFill>
+          <a:ln>
+            <a:noFill/>
+          </a:ln>
+          <a:effectLst/>
+        </p:spPr>
+        <p:style>
+          <a:lnRef idx="1">
+            <a:schemeClr val="accent1"/>
+          </a:lnRef>
+          <a:fillRef idx="3">
+            <a:schemeClr val="accent1"/>
+          </a:fillRef>
+          <a:effectRef idx="2">
+            <a:schemeClr val="accent1"/>
+          </a:effectRef>
+          <a:fontRef idx="minor">
+            <a:schemeClr val="lt1"/>
+          </a:fontRef>
+        </p:style>
+        <p:txBody>
+          <a:bodyPr rtlCol="0" anchor="ctr"/>
+          <a:lstStyle/>
+          <a:p>
+            <a:pPr algn="ctr"/>
+          </a:p>
+        </p:txBody>
+      </p:sp>
+      <p:sp>
+        <p:nvSpPr>
+          <p:cNvPr id="23" name="Rounded Rectangle 22"/>
+          <p:cNvSpPr/>
+          <p:nvPr/>
+        </p:nvSpPr>
+        <p:spPr>
+          <a:xfrm>
+            <a:off x="7373721" y="2331720"/>
+            <a:ext cx="1927555" cy="2057400"/>
+          </a:xfrm>
+          <a:prstGeom prst="roundRect">
+            <a:avLst>
+              <a:gd name="adj" fmla="val 8000"/>
+            </a:avLst>
+          </a:prstGeom>
+          <a:solidFill>
+            <a:srgbClr val="F6F6F9"/>
+          </a:solidFill>
+          <a:ln w="12700">
+            <a:solidFill>
+              <a:srgbClr val="E6E6EA"/>
+            </a:solidFill>
+          </a:ln>
+          <a:effectLst/>
+        </p:spPr>
+        <p:style>
+          <a:lnRef idx="1">
+            <a:schemeClr val="accent1"/>
+          </a:lnRef>
+          <a:fillRef idx="3">
+            <a:schemeClr val="accent1"/>
+          </a:fillRef>
+          <a:effectRef idx="2">
+            <a:schemeClr val="accent1"/>
+          </a:effectRef>
+          <a:fontRef idx="minor">
+            <a:schemeClr val="lt1"/>
+          </a:fontRef>
+        </p:style>
+        <p:txBody>
+          <a:bodyPr rtlCol="0" anchor="ctr"/>
+          <a:lstStyle/>
+          <a:p>
+            <a:pPr algn="ctr"/>
+          </a:p>
+        </p:txBody>
+      </p:sp>
+      <p:sp>
+        <p:nvSpPr>
+          <p:cNvPr id="24" name="Rectangle 23"/>
+          <p:cNvSpPr/>
+          <p:nvPr/>
+        </p:nvSpPr>
+        <p:spPr>
+          <a:xfrm>
+            <a:off x="7373721" y="2331720"/>
+            <a:ext cx="1927555" cy="109728"/>
+          </a:xfrm>
+          <a:prstGeom prst="rect">
+            <a:avLst/>
+          </a:prstGeom>
+          <a:solidFill>
+            <a:srgbClr val="E1306C"/>
+          </a:solidFill>
+          <a:ln>
+            <a:noFill/>
+          </a:ln>
+          <a:effectLst/>
+        </p:spPr>
+        <p:style>
+          <a:lnRef idx="1">
+            <a:schemeClr val="accent1"/>
+          </a:lnRef>
+          <a:fillRef idx="3">
+            <a:schemeClr val="accent1"/>
+          </a:fillRef>
+          <a:effectRef idx="2">
+            <a:schemeClr val="accent1"/>
+          </a:effectRef>
+          <a:fontRef idx="minor">
+            <a:schemeClr val="lt1"/>
+          </a:fontRef>
+        </p:style>
+        <p:txBody>
+          <a:bodyPr rtlCol="0" anchor="ctr"/>
+          <a:lstStyle/>
+          <a:p>
+            <a:pPr algn="ctr"/>
+          </a:p>
+        </p:txBody>
+      </p:sp>
+      <p:sp>
+        <p:nvSpPr>
+          <p:cNvPr id="25" name="TextBox 24"/>
+          <p:cNvSpPr txBox="1"/>
+          <p:nvPr/>
+        </p:nvSpPr>
+        <p:spPr>
+          <a:xfrm>
+            <a:off x="7556601" y="2569464"/>
+            <a:ext cx="1561795" cy="365760"/>
+          </a:xfrm>
+          <a:prstGeom prst="rect">
+            <a:avLst/>
+          </a:prstGeom>
+          <a:noFill/>
+        </p:spPr>
+        <p:txBody>
+          <a:bodyPr wrap="square">
+            <a:spAutoFit/>
+          </a:bodyPr>
+          <a:lstStyle/>
+          <a:p>
+            <a:r>
+              <a:rPr sz="1500" b="1">
+                <a:solidFill>
+                  <a:srgbClr val="E1306C"/>
+                </a:solidFill>
+                <a:latin typeface="Segoe UI"/>
+              </a:rPr>
+              <a:t>04</a:t>
+            </a:r>
+          </a:p>
+        </p:txBody>
+      </p:sp>
+      <p:sp>
+        <p:nvSpPr>
+          <p:cNvPr id="26" name="TextBox 25"/>
+          <p:cNvSpPr txBox="1"/>
+          <p:nvPr/>
+        </p:nvSpPr>
+        <p:spPr>
+          <a:xfrm>
+            <a:off x="7556601" y="3008376"/>
+            <a:ext cx="1561795" cy="548640"/>
+          </a:xfrm>
+          <a:prstGeom prst="rect">
+            <a:avLst/>
+          </a:prstGeom>
+          <a:noFill/>
+        </p:spPr>
+        <p:txBody>
+          <a:bodyPr wrap="square">
+            <a:spAutoFit/>
+          </a:bodyPr>
+          <a:lstStyle/>
+          <a:p>
+            <a:r>
+              <a:rPr sz="1400" b="1">
+                <a:solidFill>
+                  <a:srgbClr val="1A1A1E"/>
+                </a:solidFill>
+                <a:latin typeface="맑은 고딕"/>
+              </a:rPr>
+              <a:t>LLM 에이전트</a:t>
+            </a:r>
+          </a:p>
+        </p:txBody>
+      </p:sp>
+      <p:sp>
+        <p:nvSpPr>
+          <p:cNvPr id="27" name="TextBox 26"/>
+          <p:cNvSpPr txBox="1"/>
+          <p:nvPr/>
+        </p:nvSpPr>
+        <p:spPr>
+          <a:xfrm>
+            <a:off x="7556601" y="3520440"/>
+            <a:ext cx="1561795" cy="777240"/>
+          </a:xfrm>
+          <a:prstGeom prst="rect">
+            <a:avLst/>
+          </a:prstGeom>
+          <a:noFill/>
+        </p:spPr>
+        <p:txBody>
+          <a:bodyPr wrap="square">
+            <a:spAutoFit/>
+          </a:bodyPr>
+          <a:lstStyle/>
+          <a:p>
+            <a:r>
+              <a:rPr sz="1050" b="0">
+                <a:solidFill>
+                  <a:srgbClr val="666670"/>
+                </a:solidFill>
+                <a:latin typeface="맑은 고딕"/>
+              </a:rPr>
+              <a:t>근거 기반 인사이트 · 콘텐츠 초안 생성</a:t>
+            </a:r>
+          </a:p>
+        </p:txBody>
+      </p:sp>
+      <p:sp>
+        <p:nvSpPr>
+          <p:cNvPr id="28" name="Right Arrow 27"/>
+          <p:cNvSpPr/>
+          <p:nvPr/>
+        </p:nvSpPr>
+        <p:spPr>
+          <a:xfrm>
+            <a:off x="9282988" y="3268980"/>
+            <a:ext cx="347472" cy="182880"/>
+          </a:xfrm>
+          <a:prstGeom prst="rightArrow">
+            <a:avLst/>
+          </a:prstGeom>
+          <a:solidFill>
+            <a:srgbClr val="9A9AA2"/>
+          </a:solidFill>
+          <a:ln>
+            <a:noFill/>
+          </a:ln>
+          <a:effectLst/>
+        </p:spPr>
+        <p:style>
+          <a:lnRef idx="1">
+            <a:schemeClr val="accent1"/>
+          </a:lnRef>
+          <a:fillRef idx="3">
+            <a:schemeClr val="accent1"/>
+          </a:fillRef>
+          <a:effectRef idx="2">
+            <a:schemeClr val="accent1"/>
+          </a:effectRef>
+          <a:fontRef idx="minor">
+            <a:schemeClr val="lt1"/>
+          </a:fontRef>
+        </p:style>
+        <p:txBody>
+          <a:bodyPr rtlCol="0" anchor="ctr"/>
+          <a:lstStyle/>
+          <a:p>
+            <a:pPr algn="ctr"/>
+          </a:p>
+        </p:txBody>
+      </p:sp>
+      <p:sp>
+        <p:nvSpPr>
+          <p:cNvPr id="29" name="Rounded Rectangle 28"/>
+          <p:cNvSpPr/>
+          <p:nvPr/>
+        </p:nvSpPr>
+        <p:spPr>
+          <a:xfrm>
+            <a:off x="9612172" y="2331720"/>
+            <a:ext cx="1927555" cy="2057400"/>
+          </a:xfrm>
+          <a:prstGeom prst="roundRect">
+            <a:avLst>
+              <a:gd name="adj" fmla="val 8000"/>
+            </a:avLst>
+          </a:prstGeom>
+          <a:solidFill>
+            <a:srgbClr val="F6F6F9"/>
+          </a:solidFill>
+          <a:ln w="12700">
+            <a:solidFill>
+              <a:srgbClr val="E6E6EA"/>
+            </a:solidFill>
+          </a:ln>
+          <a:effectLst/>
+        </p:spPr>
+        <p:style>
+          <a:lnRef idx="1">
+            <a:schemeClr val="accent1"/>
+          </a:lnRef>
+          <a:fillRef idx="3">
+            <a:schemeClr val="accent1"/>
+          </a:fillRef>
+          <a:effectRef idx="2">
+            <a:schemeClr val="accent1"/>
+          </a:effectRef>
+          <a:fontRef idx="minor">
+            <a:schemeClr val="lt1"/>
+          </a:fontRef>
+        </p:style>
+        <p:txBody>
+          <a:bodyPr rtlCol="0" anchor="ctr"/>
+          <a:lstStyle/>
+          <a:p>
+            <a:pPr algn="ctr"/>
+          </a:p>
+        </p:txBody>
+      </p:sp>
+      <p:sp>
+        <p:nvSpPr>
+          <p:cNvPr id="30" name="Rectangle 29"/>
+          <p:cNvSpPr/>
+          <p:nvPr/>
+        </p:nvSpPr>
+        <p:spPr>
+          <a:xfrm>
+            <a:off x="9612172" y="2331720"/>
+            <a:ext cx="1927555" cy="109728"/>
+          </a:xfrm>
+          <a:prstGeom prst="rect">
+            <a:avLst/>
+          </a:prstGeom>
+          <a:solidFill>
+            <a:srgbClr val="6A3DB8"/>
+          </a:solidFill>
+          <a:ln>
+            <a:noFill/>
+          </a:ln>
+          <a:effectLst/>
+        </p:spPr>
+        <p:style>
+          <a:lnRef idx="1">
+            <a:schemeClr val="accent1"/>
+          </a:lnRef>
+          <a:fillRef idx="3">
+            <a:schemeClr val="accent1"/>
+          </a:fillRef>
+          <a:effectRef idx="2">
+            <a:schemeClr val="accent1"/>
+          </a:effectRef>
+          <a:fontRef idx="minor">
+            <a:schemeClr val="lt1"/>
+          </a:fontRef>
+        </p:style>
+        <p:txBody>
+          <a:bodyPr rtlCol="0" anchor="ctr"/>
+          <a:lstStyle/>
+          <a:p>
+            <a:pPr algn="ctr"/>
+          </a:p>
+        </p:txBody>
+      </p:sp>
+      <p:sp>
+        <p:nvSpPr>
+          <p:cNvPr id="31" name="TextBox 30"/>
+          <p:cNvSpPr txBox="1"/>
+          <p:nvPr/>
+        </p:nvSpPr>
+        <p:spPr>
+          <a:xfrm>
+            <a:off x="9795052" y="2569464"/>
+            <a:ext cx="1561795" cy="365760"/>
+          </a:xfrm>
+          <a:prstGeom prst="rect">
+            <a:avLst/>
+          </a:prstGeom>
+          <a:noFill/>
+        </p:spPr>
+        <p:txBody>
+          <a:bodyPr wrap="square">
+            <a:spAutoFit/>
+          </a:bodyPr>
+          <a:lstStyle/>
+          <a:p>
+            <a:r>
+              <a:rPr sz="1500" b="1">
+                <a:solidFill>
+                  <a:srgbClr val="6A3DB8"/>
+                </a:solidFill>
+                <a:latin typeface="Segoe UI"/>
+              </a:rPr>
+              <a:t>05</a:t>
+            </a:r>
+          </a:p>
+        </p:txBody>
+      </p:sp>
+      <p:sp>
+        <p:nvSpPr>
+          <p:cNvPr id="32" name="TextBox 31"/>
+          <p:cNvSpPr txBox="1"/>
+          <p:nvPr/>
+        </p:nvSpPr>
+        <p:spPr>
+          <a:xfrm>
+            <a:off x="9795052" y="3008376"/>
+            <a:ext cx="1561795" cy="548640"/>
+          </a:xfrm>
+          <a:prstGeom prst="rect">
+            <a:avLst/>
+          </a:prstGeom>
+          <a:noFill/>
+        </p:spPr>
+        <p:txBody>
+          <a:bodyPr wrap="square">
+            <a:spAutoFit/>
+          </a:bodyPr>
+          <a:lstStyle/>
+          <a:p>
+            <a:r>
+              <a:rPr sz="1400" b="1">
+                <a:solidFill>
+                  <a:srgbClr val="1A1A1E"/>
+                </a:solidFill>
+                <a:latin typeface="맑은 고딕"/>
+              </a:rPr>
+              <a:t>콘텐츠 추천</a:t>
+            </a:r>
+          </a:p>
+        </p:txBody>
+      </p:sp>
+      <p:sp>
+        <p:nvSpPr>
+          <p:cNvPr id="33" name="TextBox 32"/>
+          <p:cNvSpPr txBox="1"/>
+          <p:nvPr/>
+        </p:nvSpPr>
+        <p:spPr>
+          <a:xfrm>
+            <a:off x="9795052" y="3520440"/>
+            <a:ext cx="1561795" cy="777240"/>
+          </a:xfrm>
+          <a:prstGeom prst="rect">
+            <a:avLst/>
+          </a:prstGeom>
+          <a:noFill/>
+        </p:spPr>
+        <p:txBody>
+          <a:bodyPr wrap="square">
+            <a:spAutoFit/>
+          </a:bodyPr>
+          <a:lstStyle/>
+          <a:p>
+            <a:r>
+              <a:rPr sz="1050" b="0">
+                <a:solidFill>
+                  <a:srgbClr val="666670"/>
+                </a:solidFill>
+                <a:latin typeface="맑은 고딕"/>
+              </a:rPr>
+              <a:t>태그 · 타이밍 · 조합 액션 제안</a:t>
+            </a:r>
+          </a:p>
+        </p:txBody>
+      </p:sp>
+      <p:sp>
+        <p:nvSpPr>
+          <p:cNvPr id="34" name="Rounded Rectangle 33"/>
+          <p:cNvSpPr/>
+          <p:nvPr/>
+        </p:nvSpPr>
+        <p:spPr>
+          <a:xfrm>
+            <a:off x="658368" y="4800600"/>
+            <a:ext cx="10881360" cy="603504"/>
+          </a:xfrm>
+          <a:prstGeom prst="roundRect">
+            <a:avLst>
+              <a:gd name="adj" fmla="val 30000"/>
+            </a:avLst>
+          </a:prstGeom>
+          <a:solidFill>
+            <a:srgbClr val="FBE9F1"/>
+          </a:solidFill>
+          <a:ln>
+            <a:noFill/>
+          </a:ln>
+          <a:effectLst/>
+        </p:spPr>
+        <p:style>
+          <a:lnRef idx="1">
+            <a:schemeClr val="accent1"/>
+          </a:lnRef>
+          <a:fillRef idx="3">
+            <a:schemeClr val="accent1"/>
+          </a:fillRef>
+          <a:effectRef idx="2">
+            <a:schemeClr val="accent1"/>
+          </a:effectRef>
+          <a:fontRef idx="minor">
+            <a:schemeClr val="lt1"/>
+          </a:fontRef>
+        </p:style>
+        <p:txBody>
+          <a:bodyPr rtlCol="0" anchor="ctr"/>
+          <a:lstStyle/>
+          <a:p>
+            <a:pPr algn="ctr"/>
+          </a:p>
+        </p:txBody>
+      </p:sp>
+      <p:sp>
+        <p:nvSpPr>
+          <p:cNvPr id="35" name="TextBox 34"/>
+          <p:cNvSpPr txBox="1"/>
+          <p:nvPr/>
+        </p:nvSpPr>
+        <p:spPr>
+          <a:xfrm>
+            <a:off x="932688" y="4800600"/>
+            <a:ext cx="10332720" cy="603504"/>
+          </a:xfrm>
+          <a:prstGeom prst="rect">
+            <a:avLst/>
+          </a:prstGeom>
+          <a:noFill/>
+        </p:spPr>
+        <p:txBody>
+          <a:bodyPr wrap="square" anchor="ctr">
+            <a:spAutoFit/>
+          </a:bodyPr>
+          <a:lstStyle/>
+          <a:p>
+            <a:r>
+              <a:rPr sz="1300" b="1">
+                <a:solidFill>
+                  <a:srgbClr val="E1306C"/>
+                </a:solidFill>
+                <a:latin typeface="맑은 고딕"/>
+              </a:rPr>
+              <a:t>↺ 피드백 루프   </a:t>
+            </a:r>
+            <a:r>
+              <a:rPr sz="1250" b="0">
+                <a:solidFill>
+                  <a:srgbClr val="1A1A1E"/>
+                </a:solidFill>
+                <a:latin typeface="맑은 고딕"/>
+              </a:rPr>
+              <a:t>게시 성과를 다시 수집해 예측·추천 모델을 재학습 — 시스템이 스스로 정교해진다.</a:t>
+            </a:r>
+          </a:p>
+        </p:txBody>
+      </p:sp>
+      <p:sp>
+        <p:nvSpPr>
+          <p:cNvPr id="36" name="TextBox 35"/>
+          <p:cNvSpPr txBox="1"/>
+          <p:nvPr/>
+        </p:nvSpPr>
+        <p:spPr>
+          <a:xfrm>
+            <a:off x="640080" y="6437376"/>
+            <a:ext cx="8229600" cy="274320"/>
+          </a:xfrm>
+          <a:prstGeom prst="rect">
+            <a:avLst/>
+          </a:prstGeom>
+          <a:noFill/>
+        </p:spPr>
+        <p:txBody>
+          <a:bodyPr wrap="square">
+            <a:spAutoFit/>
+          </a:bodyPr>
+          <a:lstStyle/>
+          <a:p>
+            <a:r>
+              <a:rPr sz="900" b="0">
+                <a:solidFill>
+                  <a:srgbClr val="9A9AA2"/>
+                </a:solidFill>
+                <a:latin typeface="맑은 고딕"/>
+              </a:rPr>
+              <a:t>시계열 데이터 분석  ·  한국 해시태그 트렌드</a:t>
+            </a:r>
+          </a:p>
+        </p:txBody>
+      </p:sp>
+      <p:sp>
+        <p:nvSpPr>
+          <p:cNvPr id="37" name="TextBox 36"/>
+          <p:cNvSpPr txBox="1"/>
+          <p:nvPr/>
+        </p:nvSpPr>
+        <p:spPr>
+          <a:xfrm>
+            <a:off x="11002975" y="6437376"/>
+            <a:ext cx="822960" cy="274320"/>
+          </a:xfrm>
+          <a:prstGeom prst="rect">
+            <a:avLst/>
+          </a:prstGeom>
+          <a:noFill/>
+        </p:spPr>
+        <p:txBody>
+          <a:bodyPr wrap="square">
+            <a:spAutoFit/>
+          </a:bodyPr>
+          <a:lstStyle/>
+          <a:p>
+            <a:pPr algn="r"/>
+            <a:r>
+              <a:rPr sz="900" b="1">
+                <a:solidFill>
+                  <a:srgbClr val="E1306C"/>
+                </a:solidFill>
+                <a:latin typeface="맑은 고딕"/>
+              </a:rPr>
+              <a:t>26</a:t>
+            </a:r>
+          </a:p>
+        </p:txBody>
+      </p:sp>
+    </p:spTree>
+  </p:cSld>
+  <p:clrMapOvr>
+    <a:masterClrMapping/>
+  </p:clrMapOvr>
+</p:sld>
+</file>
+
+<file path=ppt/slides/slide32.xml><?xml version="1.0" encoding="utf-8"?>
+<p:sld xmlns:a="http://schemas.openxmlformats.org/drawingml/2006/main" xmlns:p="http://schemas.openxmlformats.org/presentationml/2006/main" xmlns:r="http://schemas.openxmlformats.org/officeDocument/2006/relationships">
+  <p:cSld>
+    <p:spTree>
+      <p:nvGrpSpPr>
+        <p:cNvPr id="1" name=""/>
+        <p:cNvGrpSpPr/>
+        <p:nvPr/>
+      </p:nvGrpSpPr>
+      <p:grpSpPr/>
+      <p:sp>
+        <p:nvSpPr>
+          <p:cNvPr id="2" name="TextBox 1"/>
+          <p:cNvSpPr txBox="1"/>
+          <p:nvPr/>
+        </p:nvSpPr>
+        <p:spPr>
+          <a:xfrm>
+            <a:off x="658368" y="384048"/>
+            <a:ext cx="10789920" cy="292608"/>
+          </a:xfrm>
+          <a:prstGeom prst="rect">
+            <a:avLst/>
+          </a:prstGeom>
+          <a:noFill/>
+        </p:spPr>
+        <p:txBody>
+          <a:bodyPr wrap="square">
+            <a:spAutoFit/>
+          </a:bodyPr>
+          <a:lstStyle/>
+          <a:p>
+            <a:r>
+              <a:rPr sz="1050" b="1">
+                <a:solidFill>
+                  <a:srgbClr val="E1306C"/>
+                </a:solidFill>
+                <a:latin typeface="Segoe UI"/>
+              </a:rPr>
+              <a:t>08 · CODE</a:t>
+            </a:r>
+          </a:p>
+        </p:txBody>
+      </p:sp>
+      <p:sp>
+        <p:nvSpPr>
+          <p:cNvPr id="3" name="TextBox 2"/>
+          <p:cNvSpPr txBox="1"/>
+          <p:nvPr/>
+        </p:nvSpPr>
+        <p:spPr>
+          <a:xfrm>
+            <a:off x="640080" y="658368"/>
+            <a:ext cx="10881360" cy="640080"/>
+          </a:xfrm>
+          <a:prstGeom prst="rect">
+            <a:avLst/>
+          </a:prstGeom>
+          <a:noFill/>
+        </p:spPr>
+        <p:txBody>
+          <a:bodyPr wrap="square">
+            <a:spAutoFit/>
+          </a:bodyPr>
+          <a:lstStyle/>
+          <a:p>
+            <a:r>
+              <a:rPr sz="2700" b="1">
+                <a:solidFill>
+                  <a:srgbClr val="1A1A1E"/>
+                </a:solidFill>
+                <a:latin typeface="맑은 고딕"/>
+              </a:rPr>
+              <a:t>핵심 코드 ①  데이터 → 평활화 → 차분</a:t>
+            </a:r>
+          </a:p>
+        </p:txBody>
+      </p:sp>
+      <p:sp>
+        <p:nvSpPr>
+          <p:cNvPr id="4" name="Rectangle 3"/>
+          <p:cNvSpPr/>
+          <p:nvPr/>
+        </p:nvSpPr>
+        <p:spPr>
+          <a:xfrm>
+            <a:off x="658368" y="1298448"/>
+            <a:ext cx="10881360" cy="12700"/>
+          </a:xfrm>
+          <a:prstGeom prst="rect">
+            <a:avLst/>
+          </a:prstGeom>
+          <a:solidFill>
+            <a:srgbClr val="E6E6EA"/>
+          </a:solidFill>
+          <a:ln>
+            <a:noFill/>
+          </a:ln>
+          <a:effectLst/>
+        </p:spPr>
+        <p:style>
+          <a:lnRef idx="1">
+            <a:schemeClr val="accent1"/>
+          </a:lnRef>
+          <a:fillRef idx="3">
+            <a:schemeClr val="accent1"/>
+          </a:fillRef>
+          <a:effectRef idx="2">
+            <a:schemeClr val="accent1"/>
+          </a:effectRef>
+          <a:fontRef idx="minor">
+            <a:schemeClr val="lt1"/>
+          </a:fontRef>
+        </p:style>
+        <p:txBody>
+          <a:bodyPr rtlCol="0" anchor="ctr"/>
+          <a:lstStyle/>
+          <a:p>
+            <a:pPr algn="ctr"/>
+          </a:p>
+        </p:txBody>
+      </p:sp>
+      <p:sp>
+        <p:nvSpPr>
+          <p:cNvPr id="5" name="TextBox 4"/>
+          <p:cNvSpPr txBox="1"/>
+          <p:nvPr/>
+        </p:nvSpPr>
+        <p:spPr>
+          <a:xfrm>
+            <a:off x="731520" y="1371600"/>
+            <a:ext cx="10789920" cy="320040"/>
+          </a:xfrm>
+          <a:prstGeom prst="rect">
+            <a:avLst/>
+          </a:prstGeom>
+          <a:noFill/>
+        </p:spPr>
+        <p:txBody>
+          <a:bodyPr wrap="square">
+            <a:spAutoFit/>
+          </a:bodyPr>
+          <a:lstStyle/>
+          <a:p>
+            <a:r>
+              <a:rPr sz="1350" b="1">
+                <a:solidFill>
+                  <a:srgbClr val="E1306C"/>
+                </a:solidFill>
+                <a:latin typeface="맑은 고딕"/>
+              </a:rPr>
+              <a:t>●  tidy 패널을 날짜×태그 행렬로 (pandas pivot)</a:t>
+            </a:r>
+          </a:p>
+        </p:txBody>
+      </p:sp>
+      <p:sp>
+        <p:nvSpPr>
+          <p:cNvPr id="6" name="Rectangle 5"/>
+          <p:cNvSpPr/>
+          <p:nvPr/>
+        </p:nvSpPr>
+        <p:spPr>
+          <a:xfrm>
+            <a:off x="914400" y="1755648"/>
+            <a:ext cx="10424160" cy="457200"/>
+          </a:xfrm>
+          <a:prstGeom prst="rect">
+            <a:avLst/>
+          </a:prstGeom>
+          <a:solidFill>
+            <a:srgbClr val="1E1E26"/>
+          </a:solidFill>
+          <a:ln>
+            <a:noFill/>
+          </a:ln>
+          <a:effectLst/>
+        </p:spPr>
+        <p:style>
+          <a:lnRef idx="1">
+            <a:schemeClr val="accent1"/>
+          </a:lnRef>
+          <a:fillRef idx="3">
+            <a:schemeClr val="accent1"/>
+          </a:fillRef>
+          <a:effectRef idx="2">
+            <a:schemeClr val="accent1"/>
+          </a:effectRef>
+          <a:fontRef idx="minor">
+            <a:schemeClr val="lt1"/>
+          </a:fontRef>
+        </p:style>
+        <p:txBody>
+          <a:bodyPr rtlCol="0" anchor="ctr"/>
+          <a:lstStyle/>
+          <a:p>
+            <a:pPr algn="ctr"/>
+          </a:p>
+        </p:txBody>
+      </p:sp>
+      <p:sp>
+        <p:nvSpPr>
+          <p:cNvPr id="7" name="TextBox 6"/>
+          <p:cNvSpPr txBox="1"/>
+          <p:nvPr/>
+        </p:nvSpPr>
+        <p:spPr>
+          <a:xfrm>
+            <a:off x="1143000" y="1847088"/>
+            <a:ext cx="10058400" cy="310896"/>
+          </a:xfrm>
+          <a:prstGeom prst="rect">
+            <a:avLst/>
+          </a:prstGeom>
+          <a:noFill/>
+        </p:spPr>
+        <p:txBody>
+          <a:bodyPr wrap="square">
+            <a:spAutoFit/>
+          </a:bodyPr>
+          <a:lstStyle/>
+          <a:p>
+            <a:r>
+              <a:rPr sz="1200" b="0">
+                <a:solidFill>
+                  <a:srgbClr val="E8E8EE"/>
+                </a:solidFill>
+                <a:latin typeface="Consolas"/>
+              </a:rPr>
+              <a:t>wide = panel.pivot(index="date", columns="hashtag", values="ratio")</a:t>
+            </a:r>
+          </a:p>
+        </p:txBody>
+      </p:sp>
+      <p:sp>
+        <p:nvSpPr>
+          <p:cNvPr id="8" name="TextBox 7"/>
+          <p:cNvSpPr txBox="1"/>
+          <p:nvPr/>
+        </p:nvSpPr>
+        <p:spPr>
+          <a:xfrm>
+            <a:off x="731520" y="2377440"/>
+            <a:ext cx="10789920" cy="320040"/>
+          </a:xfrm>
+          <a:prstGeom prst="rect">
+            <a:avLst/>
+          </a:prstGeom>
+          <a:noFill/>
+        </p:spPr>
+        <p:txBody>
+          <a:bodyPr wrap="square">
+            <a:spAutoFit/>
+          </a:bodyPr>
+          <a:lstStyle/>
+          <a:p>
+            <a:r>
+              <a:rPr sz="1350" b="1">
+                <a:solidFill>
+                  <a:srgbClr val="E1306C"/>
+                </a:solidFill>
+                <a:latin typeface="맑은 고딕"/>
+              </a:rPr>
+              <a:t>●  이동평균 평활화 — 7일 중심 윈도우가 주간 주기를 상쇄</a:t>
+            </a:r>
+          </a:p>
+        </p:txBody>
+      </p:sp>
+      <p:sp>
+        <p:nvSpPr>
+          <p:cNvPr id="9" name="Rectangle 8"/>
+          <p:cNvSpPr/>
+          <p:nvPr/>
+        </p:nvSpPr>
+        <p:spPr>
+          <a:xfrm>
+            <a:off x="914400" y="2761488"/>
+            <a:ext cx="10424160" cy="457200"/>
+          </a:xfrm>
+          <a:prstGeom prst="rect">
+            <a:avLst/>
+          </a:prstGeom>
+          <a:solidFill>
+            <a:srgbClr val="1E1E26"/>
+          </a:solidFill>
+          <a:ln>
+            <a:noFill/>
+          </a:ln>
+          <a:effectLst/>
+        </p:spPr>
+        <p:style>
+          <a:lnRef idx="1">
+            <a:schemeClr val="accent1"/>
+          </a:lnRef>
+          <a:fillRef idx="3">
+            <a:schemeClr val="accent1"/>
+          </a:fillRef>
+          <a:effectRef idx="2">
+            <a:schemeClr val="accent1"/>
+          </a:effectRef>
+          <a:fontRef idx="minor">
+            <a:schemeClr val="lt1"/>
+          </a:fontRef>
+        </p:style>
+        <p:txBody>
+          <a:bodyPr rtlCol="0" anchor="ctr"/>
+          <a:lstStyle/>
+          <a:p>
+            <a:pPr algn="ctr"/>
+          </a:p>
+        </p:txBody>
+      </p:sp>
+      <p:sp>
+        <p:nvSpPr>
+          <p:cNvPr id="10" name="TextBox 9"/>
+          <p:cNvSpPr txBox="1"/>
+          <p:nvPr/>
+        </p:nvSpPr>
+        <p:spPr>
+          <a:xfrm>
+            <a:off x="1143000" y="2852928"/>
+            <a:ext cx="10058400" cy="310896"/>
+          </a:xfrm>
+          <a:prstGeom prst="rect">
+            <a:avLst/>
+          </a:prstGeom>
+          <a:noFill/>
+        </p:spPr>
+        <p:txBody>
+          <a:bodyPr wrap="square">
+            <a:spAutoFit/>
+          </a:bodyPr>
+          <a:lstStyle/>
+          <a:p>
+            <a:r>
+              <a:rPr sz="1200" b="0">
+                <a:solidFill>
+                  <a:srgbClr val="E8E8EE"/>
+                </a:solidFill>
+                <a:latin typeface="Consolas"/>
+              </a:rPr>
+              <a:t>ma7 = s.rolling(7, center=True).mean()   # 추세 + 노이즈 제거</a:t>
+            </a:r>
+          </a:p>
+        </p:txBody>
+      </p:sp>
+      <p:sp>
+        <p:nvSpPr>
+          <p:cNvPr id="11" name="TextBox 10"/>
+          <p:cNvSpPr txBox="1"/>
+          <p:nvPr/>
+        </p:nvSpPr>
+        <p:spPr>
+          <a:xfrm>
+            <a:off x="731520" y="3383280"/>
+            <a:ext cx="10789920" cy="320040"/>
+          </a:xfrm>
+          <a:prstGeom prst="rect">
+            <a:avLst/>
+          </a:prstGeom>
+          <a:noFill/>
+        </p:spPr>
+        <p:txBody>
+          <a:bodyPr wrap="square">
+            <a:spAutoFit/>
+          </a:bodyPr>
+          <a:lstStyle/>
+          <a:p>
+            <a:r>
+              <a:rPr sz="1350" b="1">
+                <a:solidFill>
+                  <a:srgbClr val="E1306C"/>
+                </a:solidFill>
+                <a:latin typeface="맑은 고딕"/>
+              </a:rPr>
+              <a:t>●  1차 차분으로 정상화 (ARIMA의 d=1)</a:t>
+            </a:r>
+          </a:p>
+        </p:txBody>
+      </p:sp>
+      <p:sp>
+        <p:nvSpPr>
+          <p:cNvPr id="12" name="Rectangle 11"/>
+          <p:cNvSpPr/>
+          <p:nvPr/>
+        </p:nvSpPr>
+        <p:spPr>
+          <a:xfrm>
+            <a:off x="914400" y="3767328"/>
+            <a:ext cx="10424160" cy="713232"/>
+          </a:xfrm>
+          <a:prstGeom prst="rect">
+            <a:avLst/>
+          </a:prstGeom>
+          <a:solidFill>
+            <a:srgbClr val="1E1E26"/>
+          </a:solidFill>
+          <a:ln>
+            <a:noFill/>
+          </a:ln>
+          <a:effectLst/>
+        </p:spPr>
+        <p:style>
+          <a:lnRef idx="1">
+            <a:schemeClr val="accent1"/>
+          </a:lnRef>
+          <a:fillRef idx="3">
+            <a:schemeClr val="accent1"/>
+          </a:fillRef>
+          <a:effectRef idx="2">
+            <a:schemeClr val="accent1"/>
+          </a:effectRef>
+          <a:fontRef idx="minor">
+            <a:schemeClr val="lt1"/>
+          </a:fontRef>
+        </p:style>
+        <p:txBody>
+          <a:bodyPr rtlCol="0" anchor="ctr"/>
+          <a:lstStyle/>
+          <a:p>
+            <a:pPr algn="ctr"/>
+          </a:p>
+        </p:txBody>
+      </p:sp>
+      <p:sp>
+        <p:nvSpPr>
+          <p:cNvPr id="13" name="TextBox 12"/>
+          <p:cNvSpPr txBox="1"/>
+          <p:nvPr/>
+        </p:nvSpPr>
+        <p:spPr>
+          <a:xfrm>
+            <a:off x="1143000" y="3858768"/>
+            <a:ext cx="10058400" cy="566928"/>
+          </a:xfrm>
+          <a:prstGeom prst="rect">
+            <a:avLst/>
+          </a:prstGeom>
+          <a:noFill/>
+        </p:spPr>
+        <p:txBody>
+          <a:bodyPr wrap="square">
+            <a:spAutoFit/>
+          </a:bodyPr>
+          <a:lstStyle/>
+          <a:p>
+            <a:r>
+              <a:rPr sz="1200" b="0">
+                <a:solidFill>
+                  <a:srgbClr val="E8E8EE"/>
+                </a:solidFill>
+                <a:latin typeface="Consolas"/>
+              </a:rPr>
+              <a:t>diff = s.diff()                          # X_t - X_{t-1}</a:t>
+            </a:r>
+          </a:p>
+          <a:p>
+            <a:r>
+              <a:rPr sz="1200" b="0">
+                <a:solidFill>
+                  <a:srgbClr val="E8E8EE"/>
+                </a:solidFill>
+                <a:latin typeface="Consolas"/>
+              </a:rPr>
+              <a:t>diff.rolling(28).mean()                  # 평균이 0에 붙는지 진단</a:t>
+            </a:r>
+          </a:p>
+        </p:txBody>
+      </p:sp>
+      <p:sp>
+        <p:nvSpPr>
+          <p:cNvPr id="14" name="TextBox 13"/>
+          <p:cNvSpPr txBox="1"/>
+          <p:nvPr/>
+        </p:nvSpPr>
+        <p:spPr>
+          <a:xfrm>
+            <a:off x="731520" y="4645152"/>
+            <a:ext cx="10789920" cy="320040"/>
+          </a:xfrm>
+          <a:prstGeom prst="rect">
+            <a:avLst/>
+          </a:prstGeom>
+          <a:noFill/>
+        </p:spPr>
+        <p:txBody>
+          <a:bodyPr wrap="square">
+            <a:spAutoFit/>
+          </a:bodyPr>
+          <a:lstStyle/>
+          <a:p>
+            <a:r>
+              <a:rPr sz="1350" b="1">
+                <a:solidFill>
+                  <a:srgbClr val="E1306C"/>
+                </a:solidFill>
+                <a:latin typeface="맑은 고딕"/>
+              </a:rPr>
+              <a:t>●  가법 분해 — 추세는 이동평균, 계절은 '같은 요일끼리 평균'</a:t>
+            </a:r>
+          </a:p>
+        </p:txBody>
+      </p:sp>
+      <p:sp>
+        <p:nvSpPr>
+          <p:cNvPr id="15" name="Rectangle 14"/>
+          <p:cNvSpPr/>
+          <p:nvPr/>
+        </p:nvSpPr>
+        <p:spPr>
+          <a:xfrm>
+            <a:off x="914400" y="5029200"/>
+            <a:ext cx="10424160" cy="969264"/>
+          </a:xfrm>
+          <a:prstGeom prst="rect">
+            <a:avLst/>
+          </a:prstGeom>
+          <a:solidFill>
+            <a:srgbClr val="1E1E26"/>
+          </a:solidFill>
+          <a:ln>
+            <a:noFill/>
+          </a:ln>
+          <a:effectLst/>
+        </p:spPr>
+        <p:style>
+          <a:lnRef idx="1">
+            <a:schemeClr val="accent1"/>
+          </a:lnRef>
+          <a:fillRef idx="3">
+            <a:schemeClr val="accent1"/>
+          </a:fillRef>
+          <a:effectRef idx="2">
+            <a:schemeClr val="accent1"/>
+          </a:effectRef>
+          <a:fontRef idx="minor">
+            <a:schemeClr val="lt1"/>
+          </a:fontRef>
+        </p:style>
+        <p:txBody>
+          <a:bodyPr rtlCol="0" anchor="ctr"/>
+          <a:lstStyle/>
+          <a:p>
+            <a:pPr algn="ctr"/>
+          </a:p>
+        </p:txBody>
+      </p:sp>
+      <p:sp>
+        <p:nvSpPr>
+          <p:cNvPr id="16" name="TextBox 15"/>
+          <p:cNvSpPr txBox="1"/>
+          <p:nvPr/>
+        </p:nvSpPr>
+        <p:spPr>
+          <a:xfrm>
+            <a:off x="1143000" y="5120640"/>
+            <a:ext cx="10058400" cy="822960"/>
+          </a:xfrm>
+          <a:prstGeom prst="rect">
+            <a:avLst/>
+          </a:prstGeom>
+          <a:noFill/>
+        </p:spPr>
+        <p:txBody>
+          <a:bodyPr wrap="square">
+            <a:spAutoFit/>
+          </a:bodyPr>
+          <a:lstStyle/>
+          <a:p>
+            <a:r>
+              <a:rPr sz="1200" b="0">
+                <a:solidFill>
+                  <a:srgbClr val="E8E8EE"/>
+                </a:solidFill>
+                <a:latin typeface="Consolas"/>
+              </a:rPr>
+              <a:t>trend    = s.rolling(7, center=True).mean()</a:t>
+            </a:r>
+          </a:p>
+          <a:p>
+            <a:r>
+              <a:rPr sz="1200" b="0">
+                <a:solidFill>
+                  <a:srgbClr val="E8E8EE"/>
+                </a:solidFill>
+                <a:latin typeface="Consolas"/>
+              </a:rPr>
+              <a:t>seasonal = (s - trend).groupby(s.index.weekday).transform("mean")</a:t>
+            </a:r>
+          </a:p>
+          <a:p>
+            <a:r>
+              <a:rPr sz="1200" b="0">
+                <a:solidFill>
+                  <a:srgbClr val="E8E8EE"/>
+                </a:solidFill>
+                <a:latin typeface="Consolas"/>
+              </a:rPr>
+              <a:t>residual = s - trend - seasonal          # 백색잡음이면 성공</a:t>
+            </a:r>
+          </a:p>
+        </p:txBody>
+      </p:sp>
+      <p:sp>
+        <p:nvSpPr>
+          <p:cNvPr id="17" name="TextBox 16"/>
+          <p:cNvSpPr txBox="1"/>
+          <p:nvPr/>
+        </p:nvSpPr>
+        <p:spPr>
+          <a:xfrm>
+            <a:off x="640080" y="6437376"/>
+            <a:ext cx="8229600" cy="274320"/>
+          </a:xfrm>
+          <a:prstGeom prst="rect">
+            <a:avLst/>
+          </a:prstGeom>
+          <a:noFill/>
+        </p:spPr>
+        <p:txBody>
+          <a:bodyPr wrap="square">
+            <a:spAutoFit/>
+          </a:bodyPr>
+          <a:lstStyle/>
+          <a:p>
+            <a:r>
+              <a:rPr sz="900" b="0">
+                <a:solidFill>
+                  <a:srgbClr val="9A9AA2"/>
+                </a:solidFill>
+                <a:latin typeface="맑은 고딕"/>
+              </a:rPr>
+              <a:t>시계열 데이터 분석  ·  한국 해시태그 트렌드</a:t>
+            </a:r>
+          </a:p>
+        </p:txBody>
+      </p:sp>
+      <p:sp>
+        <p:nvSpPr>
+          <p:cNvPr id="18" name="TextBox 17"/>
+          <p:cNvSpPr txBox="1"/>
+          <p:nvPr/>
+        </p:nvSpPr>
+        <p:spPr>
+          <a:xfrm>
+            <a:off x="11002975" y="6437376"/>
+            <a:ext cx="822960" cy="274320"/>
+          </a:xfrm>
+          <a:prstGeom prst="rect">
+            <a:avLst/>
+          </a:prstGeom>
+          <a:noFill/>
+        </p:spPr>
+        <p:txBody>
+          <a:bodyPr wrap="square">
+            <a:spAutoFit/>
+          </a:bodyPr>
+          <a:lstStyle/>
+          <a:p>
+            <a:pPr algn="r"/>
+            <a:r>
+              <a:rPr sz="900" b="1">
+                <a:solidFill>
+                  <a:srgbClr val="E1306C"/>
+                </a:solidFill>
+                <a:latin typeface="맑은 고딕"/>
+              </a:rPr>
+              <a:t>27</a:t>
+            </a:r>
+          </a:p>
+        </p:txBody>
+      </p:sp>
+    </p:spTree>
+  </p:cSld>
+  <p:clrMapOvr>
+    <a:masterClrMapping/>
+  </p:clrMapOvr>
+</p:sld>
+</file>
+
+<file path=ppt/slides/slide33.xml><?xml version="1.0" encoding="utf-8"?>
+<p:sld xmlns:a="http://schemas.openxmlformats.org/drawingml/2006/main" xmlns:p="http://schemas.openxmlformats.org/presentationml/2006/main" xmlns:r="http://schemas.openxmlformats.org/officeDocument/2006/relationships">
+  <p:cSld>
+    <p:spTree>
+      <p:nvGrpSpPr>
+        <p:cNvPr id="1" name=""/>
+        <p:cNvGrpSpPr/>
+        <p:nvPr/>
+      </p:nvGrpSpPr>
+      <p:grpSpPr/>
+      <p:sp>
+        <p:nvSpPr>
+          <p:cNvPr id="2" name="TextBox 1"/>
+          <p:cNvSpPr txBox="1"/>
+          <p:nvPr/>
+        </p:nvSpPr>
+        <p:spPr>
+          <a:xfrm>
+            <a:off x="658368" y="384048"/>
+            <a:ext cx="10789920" cy="292608"/>
+          </a:xfrm>
+          <a:prstGeom prst="rect">
+            <a:avLst/>
+          </a:prstGeom>
+          <a:noFill/>
+        </p:spPr>
+        <p:txBody>
+          <a:bodyPr wrap="square">
+            <a:spAutoFit/>
+          </a:bodyPr>
+          <a:lstStyle/>
+          <a:p>
+            <a:r>
+              <a:rPr sz="1050" b="1">
+                <a:solidFill>
+                  <a:srgbClr val="E1306C"/>
+                </a:solidFill>
+                <a:latin typeface="Segoe UI"/>
+              </a:rPr>
+              <a:t>08 · CODE</a:t>
+            </a:r>
+          </a:p>
+        </p:txBody>
+      </p:sp>
+      <p:sp>
+        <p:nvSpPr>
+          <p:cNvPr id="3" name="TextBox 2"/>
+          <p:cNvSpPr txBox="1"/>
+          <p:nvPr/>
+        </p:nvSpPr>
+        <p:spPr>
+          <a:xfrm>
+            <a:off x="640080" y="658368"/>
+            <a:ext cx="10881360" cy="640080"/>
+          </a:xfrm>
+          <a:prstGeom prst="rect">
+            <a:avLst/>
+          </a:prstGeom>
+          <a:noFill/>
+        </p:spPr>
+        <p:txBody>
+          <a:bodyPr wrap="square">
+            <a:spAutoFit/>
+          </a:bodyPr>
+          <a:lstStyle/>
+          <a:p>
+            <a:r>
+              <a:rPr sz="2700" b="1">
+                <a:solidFill>
+                  <a:srgbClr val="1A1A1E"/>
+                </a:solidFill>
+                <a:latin typeface="맑은 고딕"/>
+              </a:rPr>
+              <a:t>핵심 코드 ②  ACF → 예측</a:t>
+            </a:r>
+          </a:p>
+        </p:txBody>
+      </p:sp>
+      <p:sp>
+        <p:nvSpPr>
+          <p:cNvPr id="4" name="Rectangle 3"/>
+          <p:cNvSpPr/>
+          <p:nvPr/>
+        </p:nvSpPr>
+        <p:spPr>
+          <a:xfrm>
+            <a:off x="658368" y="1298448"/>
+            <a:ext cx="10881360" cy="12700"/>
+          </a:xfrm>
+          <a:prstGeom prst="rect">
+            <a:avLst/>
+          </a:prstGeom>
+          <a:solidFill>
+            <a:srgbClr val="E6E6EA"/>
+          </a:solidFill>
+          <a:ln>
+            <a:noFill/>
+          </a:ln>
+          <a:effectLst/>
+        </p:spPr>
+        <p:style>
+          <a:lnRef idx="1">
+            <a:schemeClr val="accent1"/>
+          </a:lnRef>
+          <a:fillRef idx="3">
+            <a:schemeClr val="accent1"/>
+          </a:fillRef>
+          <a:effectRef idx="2">
+            <a:schemeClr val="accent1"/>
+          </a:effectRef>
+          <a:fontRef idx="minor">
+            <a:schemeClr val="lt1"/>
+          </a:fontRef>
+        </p:style>
+        <p:txBody>
+          <a:bodyPr rtlCol="0" anchor="ctr"/>
+          <a:lstStyle/>
+          <a:p>
+            <a:pPr algn="ctr"/>
+          </a:p>
+        </p:txBody>
+      </p:sp>
+      <p:sp>
+        <p:nvSpPr>
+          <p:cNvPr id="5" name="TextBox 4"/>
+          <p:cNvSpPr txBox="1"/>
+          <p:nvPr/>
+        </p:nvSpPr>
+        <p:spPr>
+          <a:xfrm>
+            <a:off x="731520" y="1371600"/>
+            <a:ext cx="10789920" cy="320040"/>
+          </a:xfrm>
+          <a:prstGeom prst="rect">
+            <a:avLst/>
+          </a:prstGeom>
+          <a:noFill/>
+        </p:spPr>
+        <p:txBody>
+          <a:bodyPr wrap="square">
+            <a:spAutoFit/>
+          </a:bodyPr>
+          <a:lstStyle/>
+          <a:p>
+            <a:r>
+              <a:rPr sz="1350" b="1">
+                <a:solidFill>
+                  <a:srgbClr val="E1306C"/>
+                </a:solidFill>
+                <a:latin typeface="맑은 고딕"/>
+              </a:rPr>
+              <a:t>●  표본 ACF 직접 구현 — ρ(k) = γ(k)/γ(0)</a:t>
+            </a:r>
+          </a:p>
+        </p:txBody>
+      </p:sp>
+      <p:sp>
+        <p:nvSpPr>
+          <p:cNvPr id="6" name="Rectangle 5"/>
+          <p:cNvSpPr/>
+          <p:nvPr/>
+        </p:nvSpPr>
+        <p:spPr>
+          <a:xfrm>
+            <a:off x="914400" y="1755648"/>
+            <a:ext cx="10424160" cy="969264"/>
+          </a:xfrm>
+          <a:prstGeom prst="rect">
+            <a:avLst/>
+          </a:prstGeom>
+          <a:solidFill>
+            <a:srgbClr val="1E1E26"/>
+          </a:solidFill>
+          <a:ln>
+            <a:noFill/>
+          </a:ln>
+          <a:effectLst/>
+        </p:spPr>
+        <p:style>
+          <a:lnRef idx="1">
+            <a:schemeClr val="accent1"/>
+          </a:lnRef>
+          <a:fillRef idx="3">
+            <a:schemeClr val="accent1"/>
+          </a:fillRef>
+          <a:effectRef idx="2">
+            <a:schemeClr val="accent1"/>
+          </a:effectRef>
+          <a:fontRef idx="minor">
+            <a:schemeClr val="lt1"/>
+          </a:fontRef>
+        </p:style>
+        <p:txBody>
+          <a:bodyPr rtlCol="0" anchor="ctr"/>
+          <a:lstStyle/>
+          <a:p>
+            <a:pPr algn="ctr"/>
+          </a:p>
+        </p:txBody>
+      </p:sp>
+      <p:sp>
+        <p:nvSpPr>
+          <p:cNvPr id="7" name="TextBox 6"/>
+          <p:cNvSpPr txBox="1"/>
+          <p:nvPr/>
+        </p:nvSpPr>
+        <p:spPr>
+          <a:xfrm>
+            <a:off x="1143000" y="1847088"/>
+            <a:ext cx="10058400" cy="822960"/>
+          </a:xfrm>
+          <a:prstGeom prst="rect">
+            <a:avLst/>
+          </a:prstGeom>
+          <a:noFill/>
+        </p:spPr>
+        <p:txBody>
+          <a:bodyPr wrap="square">
+            <a:spAutoFit/>
+          </a:bodyPr>
+          <a:lstStyle/>
+          <a:p>
+            <a:r>
+              <a:rPr sz="1200" b="0">
+                <a:solidFill>
+                  <a:srgbClr val="E8E8EE"/>
+                </a:solidFill>
+                <a:latin typeface="Consolas"/>
+              </a:rPr>
+              <a:t>x = x - x.mean()</a:t>
+            </a:r>
+          </a:p>
+          <a:p>
+            <a:r>
+              <a:rPr sz="1200" b="0">
+                <a:solidFill>
+                  <a:srgbClr val="E8E8EE"/>
+                </a:solidFill>
+                <a:latin typeface="Consolas"/>
+              </a:rPr>
+              <a:t>rho_k = np.dot(x[:n-k], x[k:]) / np.dot(x, x)</a:t>
+            </a:r>
+          </a:p>
+          <a:p>
+            <a:r>
+              <a:rPr sz="1200" b="0">
+                <a:solidFill>
+                  <a:srgbClr val="E8E8EE"/>
+                </a:solidFill>
+                <a:latin typeface="Consolas"/>
+              </a:rPr>
+              <a:t>band  = 1.96 / np.sqrt(n)                # 백색잡음 95% 한계</a:t>
+            </a:r>
+          </a:p>
+        </p:txBody>
+      </p:sp>
+      <p:sp>
+        <p:nvSpPr>
+          <p:cNvPr id="8" name="TextBox 7"/>
+          <p:cNvSpPr txBox="1"/>
+          <p:nvPr/>
+        </p:nvSpPr>
+        <p:spPr>
+          <a:xfrm>
+            <a:off x="731520" y="2889504"/>
+            <a:ext cx="10789920" cy="320040"/>
+          </a:xfrm>
+          <a:prstGeom prst="rect">
+            <a:avLst/>
+          </a:prstGeom>
+          <a:noFill/>
+        </p:spPr>
+        <p:txBody>
+          <a:bodyPr wrap="square">
+            <a:spAutoFit/>
+          </a:bodyPr>
+          <a:lstStyle/>
+          <a:p>
+            <a:r>
+              <a:rPr sz="1350" b="1">
+                <a:solidFill>
+                  <a:srgbClr val="E1306C"/>
+                </a:solidFill>
+                <a:latin typeface="맑은 고딕"/>
+              </a:rPr>
+              <a:t>●  선형추세 적합 (최소제곱) + 요일 더미 계절성</a:t>
+            </a:r>
+          </a:p>
+        </p:txBody>
+      </p:sp>
+      <p:sp>
+        <p:nvSpPr>
+          <p:cNvPr id="9" name="Rectangle 8"/>
+          <p:cNvSpPr/>
+          <p:nvPr/>
+        </p:nvSpPr>
+        <p:spPr>
+          <a:xfrm>
+            <a:off x="914400" y="3273552"/>
+            <a:ext cx="10424160" cy="969264"/>
+          </a:xfrm>
+          <a:prstGeom prst="rect">
+            <a:avLst/>
+          </a:prstGeom>
+          <a:solidFill>
+            <a:srgbClr val="1E1E26"/>
+          </a:solidFill>
+          <a:ln>
+            <a:noFill/>
+          </a:ln>
+          <a:effectLst/>
+        </p:spPr>
+        <p:style>
+          <a:lnRef idx="1">
+            <a:schemeClr val="accent1"/>
+          </a:lnRef>
+          <a:fillRef idx="3">
+            <a:schemeClr val="accent1"/>
+          </a:fillRef>
+          <a:effectRef idx="2">
+            <a:schemeClr val="accent1"/>
+          </a:effectRef>
+          <a:fontRef idx="minor">
+            <a:schemeClr val="lt1"/>
+          </a:fontRef>
+        </p:style>
+        <p:txBody>
+          <a:bodyPr rtlCol="0" anchor="ctr"/>
+          <a:lstStyle/>
+          <a:p>
+            <a:pPr algn="ctr"/>
+          </a:p>
+        </p:txBody>
+      </p:sp>
+      <p:sp>
+        <p:nvSpPr>
+          <p:cNvPr id="10" name="TextBox 9"/>
+          <p:cNvSpPr txBox="1"/>
+          <p:nvPr/>
+        </p:nvSpPr>
+        <p:spPr>
+          <a:xfrm>
+            <a:off x="1143000" y="3364992"/>
+            <a:ext cx="10058400" cy="822960"/>
+          </a:xfrm>
+          <a:prstGeom prst="rect">
+            <a:avLst/>
+          </a:prstGeom>
+          <a:noFill/>
+        </p:spPr>
+        <p:txBody>
+          <a:bodyPr wrap="square">
+            <a:spAutoFit/>
+          </a:bodyPr>
+          <a:lstStyle/>
+          <a:p>
+            <a:r>
+              <a:rPr sz="1200" b="0">
+                <a:solidFill>
+                  <a:srgbClr val="E8E8EE"/>
+                </a:solidFill>
+                <a:latin typeface="Consolas"/>
+              </a:rPr>
+              <a:t>coef = np.polyfit(t, s.values, 1)        # 기울기·절편</a:t>
+            </a:r>
+          </a:p>
+          <a:p>
+            <a:r>
+              <a:rPr sz="1200" b="0">
+                <a:solidFill>
+                  <a:srgbClr val="E8E8EE"/>
+                </a:solidFill>
+                <a:latin typeface="Consolas"/>
+              </a:rPr>
+              <a:t>seasonal = pd.Series(s.values - np.polyval(coef, t)) \</a:t>
+            </a:r>
+          </a:p>
+          <a:p>
+            <a:r>
+              <a:rPr sz="1200" b="0">
+                <a:solidFill>
+                  <a:srgbClr val="E8E8EE"/>
+                </a:solidFill>
+                <a:latin typeface="Consolas"/>
+              </a:rPr>
+              <a:t>             .groupby(s.index.weekday).mean()</a:t>
+            </a:r>
+          </a:p>
+        </p:txBody>
+      </p:sp>
+      <p:sp>
+        <p:nvSpPr>
+          <p:cNvPr id="11" name="TextBox 10"/>
+          <p:cNvSpPr txBox="1"/>
+          <p:nvPr/>
+        </p:nvSpPr>
+        <p:spPr>
+          <a:xfrm>
+            <a:off x="731520" y="4407408"/>
+            <a:ext cx="10789920" cy="320040"/>
+          </a:xfrm>
+          <a:prstGeom prst="rect">
+            <a:avLst/>
+          </a:prstGeom>
+          <a:noFill/>
+        </p:spPr>
+        <p:txBody>
+          <a:bodyPr wrap="square">
+            <a:spAutoFit/>
+          </a:bodyPr>
+          <a:lstStyle/>
+          <a:p>
+            <a:r>
+              <a:rPr sz="1350" b="1">
+                <a:solidFill>
+                  <a:srgbClr val="E1306C"/>
+                </a:solidFill>
+                <a:latin typeface="맑은 고딕"/>
+              </a:rPr>
+              <a:t>●  14일 외삽 + 95% 예측구간 (잔차 표준편차 기반)</a:t>
+            </a:r>
+          </a:p>
+        </p:txBody>
+      </p:sp>
+      <p:sp>
+        <p:nvSpPr>
+          <p:cNvPr id="12" name="Rectangle 11"/>
+          <p:cNvSpPr/>
+          <p:nvPr/>
+        </p:nvSpPr>
+        <p:spPr>
+          <a:xfrm>
+            <a:off x="914400" y="4791456"/>
+            <a:ext cx="10424160" cy="713232"/>
+          </a:xfrm>
+          <a:prstGeom prst="rect">
+            <a:avLst/>
+          </a:prstGeom>
+          <a:solidFill>
+            <a:srgbClr val="1E1E26"/>
+          </a:solidFill>
+          <a:ln>
+            <a:noFill/>
+          </a:ln>
+          <a:effectLst/>
+        </p:spPr>
+        <p:style>
+          <a:lnRef idx="1">
+            <a:schemeClr val="accent1"/>
+          </a:lnRef>
+          <a:fillRef idx="3">
+            <a:schemeClr val="accent1"/>
+          </a:fillRef>
+          <a:effectRef idx="2">
+            <a:schemeClr val="accent1"/>
+          </a:effectRef>
+          <a:fontRef idx="minor">
+            <a:schemeClr val="lt1"/>
+          </a:fontRef>
+        </p:style>
+        <p:txBody>
+          <a:bodyPr rtlCol="0" anchor="ctr"/>
+          <a:lstStyle/>
+          <a:p>
+            <a:pPr algn="ctr"/>
+          </a:p>
+        </p:txBody>
+      </p:sp>
+      <p:sp>
+        <p:nvSpPr>
+          <p:cNvPr id="13" name="TextBox 12"/>
+          <p:cNvSpPr txBox="1"/>
+          <p:nvPr/>
+        </p:nvSpPr>
+        <p:spPr>
+          <a:xfrm>
+            <a:off x="1143000" y="4882896"/>
+            <a:ext cx="10058400" cy="566928"/>
+          </a:xfrm>
+          <a:prstGeom prst="rect">
+            <a:avLst/>
+          </a:prstGeom>
+          <a:noFill/>
+        </p:spPr>
+        <p:txBody>
+          <a:bodyPr wrap="square">
+            <a:spAutoFit/>
+          </a:bodyPr>
+          <a:lstStyle/>
+          <a:p>
+            <a:r>
+              <a:rPr sz="1200" b="0">
+                <a:solidFill>
+                  <a:srgbClr val="E8E8EE"/>
+                </a:solidFill>
+                <a:latin typeface="Consolas"/>
+              </a:rPr>
+              <a:t>future = np.polyval(coef, future_t) + seasonal[future_weekday]</a:t>
+            </a:r>
+          </a:p>
+          <a:p>
+            <a:r>
+              <a:rPr sz="1200" b="0">
+                <a:solidFill>
+                  <a:srgbClr val="E8E8EE"/>
+                </a:solidFill>
+                <a:latin typeface="Consolas"/>
+              </a:rPr>
+              <a:t>lo, hi = future - 1.96*resid_std, future + 1.96*resid_std</a:t>
+            </a:r>
+          </a:p>
+        </p:txBody>
+      </p:sp>
+      <p:sp>
+        <p:nvSpPr>
+          <p:cNvPr id="14" name="TextBox 13"/>
+          <p:cNvSpPr txBox="1"/>
+          <p:nvPr/>
+        </p:nvSpPr>
+        <p:spPr>
+          <a:xfrm>
+            <a:off x="640080" y="6437376"/>
+            <a:ext cx="8229600" cy="274320"/>
+          </a:xfrm>
+          <a:prstGeom prst="rect">
+            <a:avLst/>
+          </a:prstGeom>
+          <a:noFill/>
+        </p:spPr>
+        <p:txBody>
+          <a:bodyPr wrap="square">
+            <a:spAutoFit/>
+          </a:bodyPr>
+          <a:lstStyle/>
+          <a:p>
+            <a:r>
+              <a:rPr sz="900" b="0">
+                <a:solidFill>
+                  <a:srgbClr val="9A9AA2"/>
+                </a:solidFill>
+                <a:latin typeface="맑은 고딕"/>
+              </a:rPr>
+              <a:t>시계열 데이터 분석  ·  한국 해시태그 트렌드</a:t>
+            </a:r>
+          </a:p>
+        </p:txBody>
+      </p:sp>
+      <p:sp>
+        <p:nvSpPr>
+          <p:cNvPr id="15" name="TextBox 14"/>
+          <p:cNvSpPr txBox="1"/>
+          <p:nvPr/>
+        </p:nvSpPr>
+        <p:spPr>
+          <a:xfrm>
+            <a:off x="11002975" y="6437376"/>
+            <a:ext cx="822960" cy="274320"/>
+          </a:xfrm>
+          <a:prstGeom prst="rect">
+            <a:avLst/>
+          </a:prstGeom>
+          <a:noFill/>
+        </p:spPr>
+        <p:txBody>
+          <a:bodyPr wrap="square">
+            <a:spAutoFit/>
+          </a:bodyPr>
+          <a:lstStyle/>
+          <a:p>
+            <a:pPr algn="r"/>
+            <a:r>
+              <a:rPr sz="900" b="1">
+                <a:solidFill>
+                  <a:srgbClr val="E1306C"/>
+                </a:solidFill>
+                <a:latin typeface="맑은 고딕"/>
+              </a:rPr>
+              <a:t>28</a:t>
+            </a:r>
+          </a:p>
+        </p:txBody>
+      </p:sp>
+    </p:spTree>
+  </p:cSld>
+  <p:clrMapOvr>
+    <a:masterClrMapping/>
+  </p:clrMapOvr>
+</p:sld>
+</file>
+
+<file path=ppt/slides/slide34.xml><?xml version="1.0" encoding="utf-8"?>
+<p:sld xmlns:a="http://schemas.openxmlformats.org/drawingml/2006/main" xmlns:p="http://schemas.openxmlformats.org/presentationml/2006/main" xmlns:r="http://schemas.openxmlformats.org/officeDocument/2006/relationships">
+  <p:cSld>
+    <p:spTree>
+      <p:nvGrpSpPr>
+        <p:cNvPr id="1" name=""/>
+        <p:cNvGrpSpPr/>
+        <p:nvPr/>
+      </p:nvGrpSpPr>
+      <p:grpSpPr/>
+      <p:sp>
+        <p:nvSpPr>
+          <p:cNvPr id="2" name="TextBox 1"/>
+          <p:cNvSpPr txBox="1"/>
+          <p:nvPr/>
+        </p:nvSpPr>
+        <p:spPr>
+          <a:xfrm>
+            <a:off x="658368" y="384048"/>
+            <a:ext cx="10789920" cy="292608"/>
+          </a:xfrm>
+          <a:prstGeom prst="rect">
+            <a:avLst/>
+          </a:prstGeom>
+          <a:noFill/>
+        </p:spPr>
+        <p:txBody>
+          <a:bodyPr wrap="square">
+            <a:spAutoFit/>
+          </a:bodyPr>
+          <a:lstStyle/>
+          <a:p>
+            <a:r>
+              <a:rPr sz="1050" b="1">
+                <a:solidFill>
+                  <a:srgbClr val="E1306C"/>
+                </a:solidFill>
+                <a:latin typeface="Segoe UI"/>
+              </a:rPr>
+              <a:t>08 · LIMITATIONS</a:t>
+            </a:r>
+          </a:p>
+        </p:txBody>
+      </p:sp>
+      <p:sp>
+        <p:nvSpPr>
+          <p:cNvPr id="3" name="TextBox 2"/>
+          <p:cNvSpPr txBox="1"/>
+          <p:nvPr/>
+        </p:nvSpPr>
+        <p:spPr>
+          <a:xfrm>
+            <a:off x="640080" y="658368"/>
+            <a:ext cx="10881360" cy="640080"/>
+          </a:xfrm>
+          <a:prstGeom prst="rect">
+            <a:avLst/>
+          </a:prstGeom>
+          <a:noFill/>
+        </p:spPr>
+        <p:txBody>
+          <a:bodyPr wrap="square">
+            <a:spAutoFit/>
+          </a:bodyPr>
+          <a:lstStyle/>
+          <a:p>
+            <a:r>
+              <a:rPr sz="2700" b="1">
+                <a:solidFill>
+                  <a:srgbClr val="1A1A1E"/>
+                </a:solidFill>
+                <a:latin typeface="맑은 고딕"/>
+              </a:rPr>
+              <a:t>한계와 재현</a:t>
+            </a:r>
+          </a:p>
+        </p:txBody>
+      </p:sp>
+      <p:sp>
+        <p:nvSpPr>
+          <p:cNvPr id="4" name="Rectangle 3"/>
+          <p:cNvSpPr/>
+          <p:nvPr/>
+        </p:nvSpPr>
+        <p:spPr>
+          <a:xfrm>
+            <a:off x="658368" y="1298448"/>
+            <a:ext cx="10881360" cy="12700"/>
+          </a:xfrm>
+          <a:prstGeom prst="rect">
+            <a:avLst/>
+          </a:prstGeom>
+          <a:solidFill>
+            <a:srgbClr val="E6E6EA"/>
+          </a:solidFill>
+          <a:ln>
+            <a:noFill/>
+          </a:ln>
+          <a:effectLst/>
+        </p:spPr>
+        <p:style>
+          <a:lnRef idx="1">
+            <a:schemeClr val="accent1"/>
+          </a:lnRef>
+          <a:fillRef idx="3">
+            <a:schemeClr val="accent1"/>
+          </a:fillRef>
+          <a:effectRef idx="2">
+            <a:schemeClr val="accent1"/>
+          </a:effectRef>
+          <a:fontRef idx="minor">
+            <a:schemeClr val="lt1"/>
+          </a:fontRef>
+        </p:style>
+        <p:txBody>
+          <a:bodyPr rtlCol="0" anchor="ctr"/>
+          <a:lstStyle/>
+          <a:p>
+            <a:pPr algn="ctr"/>
+          </a:p>
+        </p:txBody>
+      </p:sp>
+      <p:sp>
+        <p:nvSpPr>
+          <p:cNvPr id="5" name="Rounded Rectangle 4"/>
+          <p:cNvSpPr/>
+          <p:nvPr/>
+        </p:nvSpPr>
+        <p:spPr>
+          <a:xfrm>
+            <a:off x="658368" y="1536192"/>
+            <a:ext cx="10881360" cy="841248"/>
+          </a:xfrm>
+          <a:prstGeom prst="roundRect">
+            <a:avLst>
+              <a:gd name="adj" fmla="val 8000"/>
+            </a:avLst>
+          </a:prstGeom>
+          <a:solidFill>
+            <a:srgbClr val="FBE9F1"/>
+          </a:solidFill>
+          <a:ln>
+            <a:noFill/>
+          </a:ln>
+          <a:effectLst/>
+        </p:spPr>
+        <p:style>
+          <a:lnRef idx="1">
+            <a:schemeClr val="accent1"/>
+          </a:lnRef>
+          <a:fillRef idx="3">
+            <a:schemeClr val="accent1"/>
+          </a:fillRef>
+          <a:effectRef idx="2">
+            <a:schemeClr val="accent1"/>
+          </a:effectRef>
+          <a:fontRef idx="minor">
+            <a:schemeClr val="lt1"/>
+          </a:fontRef>
+        </p:style>
+        <p:txBody>
+          <a:bodyPr rtlCol="0" anchor="ctr"/>
+          <a:lstStyle/>
+          <a:p>
+            <a:pPr algn="ctr"/>
+          </a:p>
+        </p:txBody>
+      </p:sp>
+      <p:sp>
+        <p:nvSpPr>
+          <p:cNvPr id="6" name="Rectangle 5"/>
+          <p:cNvSpPr/>
+          <p:nvPr/>
+        </p:nvSpPr>
+        <p:spPr>
+          <a:xfrm>
+            <a:off x="658368" y="1536192"/>
+            <a:ext cx="91440" cy="841248"/>
+          </a:xfrm>
+          <a:prstGeom prst="rect">
+            <a:avLst/>
+          </a:prstGeom>
+          <a:solidFill>
+            <a:srgbClr val="E1306C"/>
+          </a:solidFill>
+          <a:ln>
+            <a:noFill/>
+          </a:ln>
+          <a:effectLst/>
+        </p:spPr>
+        <p:style>
+          <a:lnRef idx="1">
+            <a:schemeClr val="accent1"/>
+          </a:lnRef>
+          <a:fillRef idx="3">
+            <a:schemeClr val="accent1"/>
+          </a:fillRef>
+          <a:effectRef idx="2">
+            <a:schemeClr val="accent1"/>
+          </a:effectRef>
+          <a:fontRef idx="minor">
+            <a:schemeClr val="lt1"/>
+          </a:fontRef>
+        </p:style>
+        <p:txBody>
+          <a:bodyPr rtlCol="0" anchor="ctr"/>
+          <a:lstStyle/>
+          <a:p>
+            <a:pPr algn="ctr"/>
+          </a:p>
+        </p:txBody>
+      </p:sp>
+      <p:sp>
+        <p:nvSpPr>
+          <p:cNvPr id="7" name="TextBox 6"/>
+          <p:cNvSpPr txBox="1"/>
+          <p:nvPr/>
+        </p:nvSpPr>
+        <p:spPr>
+          <a:xfrm>
+            <a:off x="960120" y="1627632"/>
+            <a:ext cx="10332720" cy="658368"/>
+          </a:xfrm>
+          <a:prstGeom prst="rect">
+            <a:avLst/>
+          </a:prstGeom>
+          <a:noFill/>
+        </p:spPr>
+        <p:txBody>
+          <a:bodyPr wrap="square" anchor="ctr">
+            <a:spAutoFit/>
+          </a:bodyPr>
+          <a:lstStyle/>
+          <a:p>
+            <a:r>
+              <a:rPr sz="1500" b="1">
+                <a:solidFill>
+                  <a:srgbClr val="1A1A1E"/>
+                </a:solidFill>
+                <a:latin typeface="맑은 고딕"/>
+              </a:rPr>
+              <a:t>정직한 캐비앗: 이 분석이 말할 수 있는 것과 없는 것</a:t>
+            </a:r>
+          </a:p>
+        </p:txBody>
+      </p:sp>
+      <p:sp>
+        <p:nvSpPr>
+          <p:cNvPr id="8" name="TextBox 7"/>
+          <p:cNvSpPr txBox="1"/>
+          <p:nvPr/>
+        </p:nvSpPr>
+        <p:spPr>
+          <a:xfrm>
+            <a:off x="777240" y="2633472"/>
+            <a:ext cx="10698480" cy="4206240"/>
+          </a:xfrm>
+          <a:prstGeom prst="rect">
+            <a:avLst/>
+          </a:prstGeom>
+          <a:noFill/>
+        </p:spPr>
+        <p:txBody>
+          <a:bodyPr wrap="square">
+            <a:spAutoFit/>
+          </a:bodyPr>
+          <a:lstStyle/>
+          <a:p>
+            <a:pPr>
+              <a:spcAft>
+                <a:spcPts val="300"/>
+              </a:spcAft>
+            </a:pPr>
+            <a:r>
+              <a:rPr sz="1600" b="1">
+                <a:solidFill>
+                  <a:srgbClr val="1A1A1E"/>
+                </a:solidFill>
+                <a:latin typeface="맑은 고딕"/>
+              </a:rPr>
+              <a:t>프록시 한계</a:t>
+            </a:r>
+          </a:p>
+          <a:p>
+            <a:pPr>
+              <a:spcAft>
+                <a:spcPts val="1500"/>
+              </a:spcAft>
+            </a:pPr>
+            <a:r>
+              <a:rPr sz="1350" b="0">
+                <a:solidFill>
+                  <a:srgbClr val="666670"/>
+                </a:solidFill>
+                <a:latin typeface="맑은 고딕"/>
+              </a:rPr>
+              <a:t>네이버 검색량 ≠ 인스타그램 게시량 — '한국 사용자의 주제 관심도'의 대리지표로 해석해야 함</a:t>
+            </a:r>
+          </a:p>
+          <a:p>
+            <a:pPr>
+              <a:spcAft>
+                <a:spcPts val="300"/>
+              </a:spcAft>
+            </a:pPr>
+            <a:r>
+              <a:rPr sz="1600" b="1">
+                <a:solidFill>
+                  <a:srgbClr val="1A1A1E"/>
+                </a:solidFill>
+                <a:latin typeface="맑은 고딕"/>
+              </a:rPr>
+              <a:t>상대값 한계</a:t>
+            </a:r>
+          </a:p>
+          <a:p>
+            <a:pPr>
+              <a:spcAft>
+                <a:spcPts val="1500"/>
+              </a:spcAft>
+            </a:pPr>
+            <a:r>
+              <a:rPr sz="1350" b="0">
+                <a:solidFill>
+                  <a:srgbClr val="666670"/>
+                </a:solidFill>
+                <a:latin typeface="맑은 고딕"/>
+              </a:rPr>
+              <a:t>데이터랩 ratio는 요청 내 정규화 — 태그 간 절대 규모 비교 불가, 시간 변화·모멘텀 비교만 유효</a:t>
+            </a:r>
+          </a:p>
+          <a:p>
+            <a:pPr>
+              <a:spcAft>
+                <a:spcPts val="300"/>
+              </a:spcAft>
+            </a:pPr>
+            <a:r>
+              <a:rPr sz="1600" b="1">
+                <a:solidFill>
+                  <a:srgbClr val="1A1A1E"/>
+                </a:solidFill>
+                <a:latin typeface="맑은 고딕"/>
+              </a:rPr>
+              <a:t>실시간성</a:t>
+            </a:r>
+          </a:p>
+          <a:p>
+            <a:pPr>
+              <a:spcAft>
+                <a:spcPts val="1500"/>
+              </a:spcAft>
+            </a:pPr>
+            <a:r>
+              <a:rPr sz="1350" b="0">
+                <a:solidFill>
+                  <a:srgbClr val="666670"/>
+                </a:solidFill>
+                <a:latin typeface="맑은 고딕"/>
+              </a:rPr>
+              <a:t>2026-06-11 수집 스냅샷 — '실시간 스트림'이 아니라 주기 재수집으로 갱신하는 구조 (전일까지 일별 제공)</a:t>
+            </a:r>
+          </a:p>
+          <a:p>
+            <a:pPr>
+              <a:spcAft>
+                <a:spcPts val="300"/>
+              </a:spcAft>
+            </a:pPr>
+            <a:r>
+              <a:rPr sz="1600" b="1">
+                <a:solidFill>
+                  <a:srgbClr val="1A1A1E"/>
+                </a:solidFill>
+                <a:latin typeface="맑은 고딕"/>
+              </a:rPr>
+              <a:t>계정 시뮬레이션</a:t>
+            </a:r>
+          </a:p>
+          <a:p>
+            <a:pPr>
+              <a:spcAft>
+                <a:spcPts val="1500"/>
+              </a:spcAft>
+            </a:pPr>
+            <a:r>
+              <a:rPr sz="1350" b="0">
+                <a:solidFill>
+                  <a:srgbClr val="666670"/>
+                </a:solidFill>
+                <a:latin typeface="맑은 고딕"/>
+              </a:rPr>
+              <a:t>'우리 계정' 도달은 계정 인사이트 공개 API가 없어 합성한 교육용 데이터 — 분해/예측 방법론 시연용이며 실측 아님</a:t>
+            </a:r>
+          </a:p>
+          <a:p>
+            <a:pPr>
+              <a:spcAft>
+                <a:spcPts val="300"/>
+              </a:spcAft>
+            </a:pPr>
+            <a:r>
+              <a:rPr sz="1600" b="1">
+                <a:solidFill>
+                  <a:srgbClr val="1A1A1E"/>
+                </a:solidFill>
+                <a:latin typeface="맑은 고딕"/>
+              </a:rPr>
+              <a:t>모형 한계</a:t>
+            </a:r>
+          </a:p>
+          <a:p>
+            <a:pPr>
+              <a:spcAft>
+                <a:spcPts val="1500"/>
+              </a:spcAft>
+            </a:pPr>
+            <a:r>
+              <a:rPr sz="1350" b="0">
+                <a:solidFill>
+                  <a:srgbClr val="666670"/>
+                </a:solidFill>
+                <a:latin typeface="맑은 고딕"/>
+              </a:rPr>
+              <a:t>선형 베이스라인은 외생 이벤트·추세 전환을 늦게 반영(백테스트 MAE에서 SARIMA에 열세) — 단순성/해석력과 정확도의 트레이드오프</a:t>
+            </a:r>
+          </a:p>
+          <a:p>
+            <a:pPr>
+              <a:spcAft>
+                <a:spcPts val="300"/>
+              </a:spcAft>
+            </a:pPr>
+            <a:r>
+              <a:rPr sz="1600" b="1">
+                <a:solidFill>
+                  <a:srgbClr val="1A1A1E"/>
+                </a:solidFill>
+                <a:latin typeface="맑은 고딕"/>
+              </a:rPr>
+              <a:t>재현</a:t>
+            </a:r>
+          </a:p>
+          <a:p>
+            <a:pPr>
+              <a:spcAft>
+                <a:spcPts val="1500"/>
+              </a:spcAft>
+            </a:pPr>
+            <a:r>
+              <a:rPr sz="1350" b="0">
+                <a:solidFill>
+                  <a:srgbClr val="666670"/>
+                </a:solidFill>
+                <a:latin typeface="맑은 고딕"/>
+              </a:rPr>
+              <a:t>pip install -r presentation/requirements.txt &amp;&amp; python presentation/build_deck.py — CSV·시드 고정으로 결정론적 재생성</a:t>
+            </a:r>
+          </a:p>
+        </p:txBody>
+      </p:sp>
+      <p:sp>
+        <p:nvSpPr>
+          <p:cNvPr id="9" name="TextBox 8"/>
+          <p:cNvSpPr txBox="1"/>
+          <p:nvPr/>
+        </p:nvSpPr>
+        <p:spPr>
+          <a:xfrm>
+            <a:off x="640080" y="6437376"/>
+            <a:ext cx="8229600" cy="274320"/>
+          </a:xfrm>
+          <a:prstGeom prst="rect">
+            <a:avLst/>
+          </a:prstGeom>
+          <a:noFill/>
+        </p:spPr>
+        <p:txBody>
+          <a:bodyPr wrap="square">
+            <a:spAutoFit/>
+          </a:bodyPr>
+          <a:lstStyle/>
+          <a:p>
+            <a:r>
+              <a:rPr sz="900" b="0">
+                <a:solidFill>
+                  <a:srgbClr val="9A9AA2"/>
+                </a:solidFill>
+                <a:latin typeface="맑은 고딕"/>
+              </a:rPr>
+              <a:t>시계열 데이터 분석  ·  한국 해시태그 트렌드</a:t>
+            </a:r>
+          </a:p>
+        </p:txBody>
+      </p:sp>
+      <p:sp>
+        <p:nvSpPr>
+          <p:cNvPr id="10" name="TextBox 9"/>
+          <p:cNvSpPr txBox="1"/>
+          <p:nvPr/>
+        </p:nvSpPr>
+        <p:spPr>
+          <a:xfrm>
+            <a:off x="11002975" y="6437376"/>
+            <a:ext cx="822960" cy="274320"/>
+          </a:xfrm>
+          <a:prstGeom prst="rect">
+            <a:avLst/>
+          </a:prstGeom>
+          <a:noFill/>
+        </p:spPr>
+        <p:txBody>
+          <a:bodyPr wrap="square">
+            <a:spAutoFit/>
+          </a:bodyPr>
+          <a:lstStyle/>
+          <a:p>
+            <a:pPr algn="r"/>
+            <a:r>
+              <a:rPr sz="900" b="1">
+                <a:solidFill>
+                  <a:srgbClr val="E1306C"/>
+                </a:solidFill>
+                <a:latin typeface="맑은 고딕"/>
+              </a:rPr>
+              <a:t>29</a:t>
             </a:r>
           </a:p>
         </p:txBody>

--- a/presentation/insta_trend_timeseries.pptx
+++ b/presentation/insta_trend_timeseries.pptx
@@ -38,7 +38,6 @@
     <p:sldId id="286" r:id="rId37"/>
     <p:sldId id="287" r:id="rId38"/>
     <p:sldId id="288" r:id="rId39"/>
-    <p:sldId id="289" r:id="rId40"/>
   </p:sldIdLst>
   <p:sldSz cx="12191695" cy="6858000" type="screen4x3"/>
   <p:notesSz cx="6858000" cy="9144000"/>
@@ -12349,7 +12348,7 @@
                 </a:solidFill>
                 <a:latin typeface="Segoe UI"/>
               </a:rPr>
-              <a:t>PART 3 · AI EXTENSION</a:t>
+              <a:t>PART 3 · SERVICE</a:t>
             </a:r>
           </a:p>
         </p:txBody>
@@ -12383,7 +12382,7 @@
                 </a:solidFill>
                 <a:latin typeface="맑은 고딕"/>
               </a:rPr>
-              <a:t>통계를 넘어, AI로 확장하기</a:t>
+              <a:t>AI로 트렌드 분석을 '서비스'로 키운다</a:t>
             </a:r>
           </a:p>
         </p:txBody>
@@ -12479,7 +12478,7 @@
                 </a:solidFill>
                 <a:latin typeface="Segoe UI"/>
               </a:rPr>
-              <a:t>07 · WHY AI</a:t>
+              <a:t>07 · VISION</a:t>
             </a:r>
           </a:p>
         </p:txBody>
@@ -12513,7 +12512,7 @@
                 </a:solidFill>
                 <a:latin typeface="맑은 고딕"/>
               </a:rPr>
-              <a:t>왜 딥러닝·AI인가</a:t>
+              <a:t>지금의 서비스, 그리고 다음</a:t>
             </a:r>
           </a:p>
         </p:txBody>
@@ -12681,7 +12680,7 @@
                 </a:solidFill>
                 <a:latin typeface="맑은 고딕"/>
               </a:rPr>
-              <a:t>SARIMA까지는 '선형 + 정상성' 가정 위에 서 있다. 현실의 트렌드는 그보다 복잡하다.</a:t>
+              <a:t>지금은 '지나간 인기'를 보여준다. 다음은 '다가올 인기'를 예측하고, 이유를 설명하고, 액션까지 제안한다.</a:t>
             </a:r>
           </a:p>
         </p:txBody>
@@ -12720,7 +12719,7 @@
                 </a:solidFill>
                 <a:latin typeface="맑은 고딕"/>
               </a:rPr>
-              <a:t>비선형 패턴</a:t>
+              <a:t>AS-IS — 사후 랭킹</a:t>
             </a:r>
           </a:p>
           <a:p>
@@ -12736,7 +12735,7 @@
                 </a:solidFill>
                 <a:latin typeface="맑은 고딕"/>
               </a:rPr>
-              <a:t>바이럴은 지수적으로 터지고 사그라든다 — 선형 모델로는 그 곡선을 못 따라감</a:t>
+              <a:t>해시태그 빈도·좋아요로 '이미 뜬' 태그를 정렬해 보여주는 단계 (현재 Streamlit 앱)</a:t>
             </a:r>
           </a:p>
           <a:p>
@@ -12752,7 +12751,7 @@
                 </a:solidFill>
                 <a:latin typeface="맑은 고딕"/>
               </a:rPr>
-              <a:t>장기 기억</a:t>
+              <a:t>그 한계</a:t>
             </a:r>
           </a:p>
           <a:p>
@@ -12768,7 +12767,7 @@
                 </a:solidFill>
                 <a:latin typeface="맑은 고딕"/>
               </a:rPr>
-              <a:t>‘작년 이맘때’ 같은 먼 과거 의존성 — ARIMA의 짧은 시차로는 포착 한계</a:t>
+              <a:t>지나간 인기라 따라가면 늦고, '왜 떴나·다음은'은 사람이 직접 해석해야 함</a:t>
             </a:r>
           </a:p>
           <a:p>
@@ -12784,7 +12783,7 @@
                 </a:solidFill>
                 <a:latin typeface="맑은 고딕"/>
               </a:rPr>
-              <a:t>다변량·교차효과</a:t>
+              <a:t>TO-BE — AI 트렌드 파트너</a:t>
             </a:r>
           </a:p>
           <a:p>
@@ -12800,7 +12799,7 @@
                 </a:solidFill>
                 <a:latin typeface="맑은 고딕"/>
               </a:rPr>
-              <a:t>태그끼리 서로 끌고 미는 관계, 날씨·이벤트 등 외생 변수까지 동시 학습 필요</a:t>
+              <a:t>떡상 예측 + 자동 인사이트 + 콘텐츠 코파일럿으로 '분석'을 '의사결정'으로</a:t>
             </a:r>
           </a:p>
           <a:p>
@@ -12816,7 +12815,7 @@
                 </a:solidFill>
                 <a:latin typeface="맑은 고딕"/>
               </a:rPr>
-              <a:t>정형 + 비정형</a:t>
+              <a:t>핵심 전환</a:t>
             </a:r>
           </a:p>
           <a:p>
@@ -12832,7 +12831,7 @@
                 </a:solidFill>
                 <a:latin typeface="맑은 고딕"/>
               </a:rPr>
-              <a:t>수치 시계열뿐 아니라 캡션·댓글 텍스트까지 → 딥러닝·LLM의 영역</a:t>
+              <a:t>보여주는 도구 → 대신 판단하고 제안하는 서비스</a:t>
             </a:r>
           </a:p>
         </p:txBody>
@@ -12953,7 +12952,7 @@
                 </a:solidFill>
                 <a:latin typeface="Segoe UI"/>
               </a:rPr>
-              <a:t>07 · LSTM</a:t>
+              <a:t>07 · FEATURES</a:t>
             </a:r>
           </a:p>
         </p:txBody>
@@ -12987,7 +12986,7 @@
                 </a:solidFill>
                 <a:latin typeface="맑은 고딕"/>
               </a:rPr>
-              <a:t>LSTM — 시퀀스를 기억하는 신경망</a:t>
+              <a:t>AI 기반 핵심 기능</a:t>
             </a:r>
           </a:p>
         </p:txBody>
@@ -13044,28 +13043,28 @@
         </p:nvSpPr>
         <p:spPr>
           <a:xfrm>
-            <a:off x="658368" y="1444752"/>
-            <a:ext cx="10881360" cy="457200"/>
-          </a:xfrm>
-          <a:prstGeom prst="rect">
-            <a:avLst/>
-          </a:prstGeom>
-          <a:noFill/>
-        </p:spPr>
-        <p:txBody>
-          <a:bodyPr wrap="square">
-            <a:spAutoFit/>
-          </a:bodyPr>
-          <a:lstStyle/>
-          <a:p>
-            <a:r>
-              <a:rPr sz="1700" b="1">
-                <a:solidFill>
-                  <a:srgbClr val="1A1A1E"/>
-                </a:solidFill>
-                <a:latin typeface="맑은 고딕"/>
-              </a:rPr>
-              <a:t>RNN은 긴 시퀀스에서 옛 정보를 잊는다. LSTM은 '게이트'로 무엇을 기억·망각할지 학습한다.</a:t>
+            <a:off x="685800" y="1481328"/>
+            <a:ext cx="10789920" cy="365760"/>
+          </a:xfrm>
+          <a:prstGeom prst="rect">
+            <a:avLst/>
+          </a:prstGeom>
+          <a:noFill/>
+        </p:spPr>
+        <p:txBody>
+          <a:bodyPr wrap="square">
+            <a:spAutoFit/>
+          </a:bodyPr>
+          <a:lstStyle/>
+          <a:p>
+            <a:r>
+              <a:rPr sz="1400" b="1">
+                <a:solidFill>
+                  <a:srgbClr val="666670"/>
+                </a:solidFill>
+                <a:latin typeface="맑은 고딕"/>
+              </a:rPr>
+              <a:t>각 기능은 앞서 만든 분석 위에 AI 엔진을 얹어 사용자 가치로 바꾼 것.</a:t>
             </a:r>
           </a:p>
         </p:txBody>
@@ -13078,101 +13077,12 @@
         </p:nvSpPr>
         <p:spPr>
           <a:xfrm>
-            <a:off x="658368" y="2011680"/>
-            <a:ext cx="10881360" cy="749808"/>
+            <a:off x="685800" y="1965960"/>
+            <a:ext cx="5349240" cy="1938528"/>
           </a:xfrm>
           <a:prstGeom prst="roundRect">
             <a:avLst>
-              <a:gd name="adj" fmla="val 12000"/>
-            </a:avLst>
-          </a:prstGeom>
-          <a:solidFill>
-            <a:srgbClr val="FBE9F1"/>
-          </a:solidFill>
-          <a:ln>
-            <a:noFill/>
-          </a:ln>
-          <a:effectLst/>
-        </p:spPr>
-        <p:style>
-          <a:lnRef idx="1">
-            <a:schemeClr val="accent1"/>
-          </a:lnRef>
-          <a:fillRef idx="3">
-            <a:schemeClr val="accent1"/>
-          </a:fillRef>
-          <a:effectRef idx="2">
-            <a:schemeClr val="accent1"/>
-          </a:effectRef>
-          <a:fontRef idx="minor">
-            <a:schemeClr val="lt1"/>
-          </a:fontRef>
-        </p:style>
-        <p:txBody>
-          <a:bodyPr rtlCol="0" anchor="ctr"/>
-          <a:lstStyle/>
-          <a:p>
-            <a:pPr algn="ctr"/>
-          </a:p>
-        </p:txBody>
-      </p:sp>
-      <p:sp>
-        <p:nvSpPr>
-          <p:cNvPr id="7" name="TextBox 6"/>
-          <p:cNvSpPr txBox="1"/>
-          <p:nvPr/>
-        </p:nvSpPr>
-        <p:spPr>
-          <a:xfrm>
-            <a:off x="914400" y="2011680"/>
-            <a:ext cx="10424160" cy="749808"/>
-          </a:xfrm>
-          <a:prstGeom prst="rect">
-            <a:avLst/>
-          </a:prstGeom>
-          <a:noFill/>
-        </p:spPr>
-        <p:txBody>
-          <a:bodyPr wrap="square" anchor="ctr">
-            <a:spAutoFit/>
-          </a:bodyPr>
-          <a:lstStyle/>
-          <a:p>
-            <a:r>
-              <a:rPr sz="1350" b="1">
-                <a:solidFill>
-                  <a:srgbClr val="E1306C"/>
-                </a:solidFill>
-                <a:latin typeface="맑은 고딕"/>
-              </a:rPr>
-              <a:t>💡 비유   </a:t>
-            </a:r>
-            <a:r>
-              <a:rPr sz="1350" b="0">
-                <a:solidFill>
-                  <a:srgbClr val="1A1A1E"/>
-                </a:solidFill>
-                <a:latin typeface="맑은 고딕"/>
-              </a:rPr>
-              <a:t>기억의 수도꼭지 3개 — 버릴 것(forget), 새로 담을 것(input), 내보낼 것(output)을 그때그때 조절.</a:t>
-            </a:r>
-          </a:p>
-        </p:txBody>
-      </p:sp>
-      <p:sp>
-        <p:nvSpPr>
-          <p:cNvPr id="8" name="Rounded Rectangle 7"/>
-          <p:cNvSpPr/>
-          <p:nvPr/>
-        </p:nvSpPr>
-        <p:spPr>
-          <a:xfrm>
-            <a:off x="658368" y="3063240"/>
-            <a:ext cx="3444240" cy="2514600"/>
-          </a:xfrm>
-          <a:prstGeom prst="roundRect">
-            <a:avLst>
-              <a:gd name="adj" fmla="val 7000"/>
+              <a:gd name="adj" fmla="val 6000"/>
             </a:avLst>
           </a:prstGeom>
           <a:solidFill>
@@ -13209,94 +13119,102 @@
       </p:sp>
       <p:sp>
         <p:nvSpPr>
-          <p:cNvPr id="9" name="TextBox 8"/>
-          <p:cNvSpPr txBox="1"/>
-          <p:nvPr/>
-        </p:nvSpPr>
-        <p:spPr>
-          <a:xfrm>
-            <a:off x="914400" y="3282696"/>
-            <a:ext cx="2932176" cy="640080"/>
-          </a:xfrm>
-          <a:prstGeom prst="rect">
-            <a:avLst/>
-          </a:prstGeom>
-          <a:noFill/>
-        </p:spPr>
-        <p:txBody>
-          <a:bodyPr wrap="square">
-            <a:spAutoFit/>
-          </a:bodyPr>
-          <a:lstStyle/>
-          <a:p>
-            <a:r>
-              <a:rPr sz="3000" b="0">
+          <p:cNvPr id="7" name="Rectangle 6"/>
+          <p:cNvSpPr/>
+          <p:nvPr/>
+        </p:nvSpPr>
+        <p:spPr>
+          <a:xfrm>
+            <a:off x="685800" y="2130552"/>
+            <a:ext cx="91440" cy="1609344"/>
+          </a:xfrm>
+          <a:prstGeom prst="rect">
+            <a:avLst/>
+          </a:prstGeom>
+          <a:solidFill>
+            <a:srgbClr val="E1306C"/>
+          </a:solidFill>
+          <a:ln>
+            <a:noFill/>
+          </a:ln>
+          <a:effectLst/>
+        </p:spPr>
+        <p:style>
+          <a:lnRef idx="1">
+            <a:schemeClr val="accent1"/>
+          </a:lnRef>
+          <a:fillRef idx="3">
+            <a:schemeClr val="accent1"/>
+          </a:fillRef>
+          <a:effectRef idx="2">
+            <a:schemeClr val="accent1"/>
+          </a:effectRef>
+          <a:fontRef idx="minor">
+            <a:schemeClr val="lt1"/>
+          </a:fontRef>
+        </p:style>
+        <p:txBody>
+          <a:bodyPr rtlCol="0" anchor="ctr"/>
+          <a:lstStyle/>
+          <a:p>
+            <a:pPr algn="ctr"/>
+          </a:p>
+        </p:txBody>
+      </p:sp>
+      <p:sp>
+        <p:nvSpPr>
+          <p:cNvPr id="8" name="TextBox 7"/>
+          <p:cNvSpPr txBox="1"/>
+          <p:nvPr/>
+        </p:nvSpPr>
+        <p:spPr>
+          <a:xfrm>
+            <a:off x="1033272" y="2148840"/>
+            <a:ext cx="4754880" cy="1572768"/>
+          </a:xfrm>
+          <a:prstGeom prst="rect">
+            <a:avLst/>
+          </a:prstGeom>
+          <a:noFill/>
+        </p:spPr>
+        <p:txBody>
+          <a:bodyPr wrap="square">
+            <a:spAutoFit/>
+          </a:bodyPr>
+          <a:lstStyle/>
+          <a:p>
+            <a:r>
+              <a:rPr sz="1250" b="1">
+                <a:solidFill>
+                  <a:srgbClr val="E1306C"/>
+                </a:solidFill>
+                <a:latin typeface="맑은 고딕"/>
+              </a:rPr>
+              <a:t>🚀 떡상 예측 알림</a:t>
+            </a:r>
+          </a:p>
+          <a:p>
+            <a:pPr>
+              <a:spcBef>
+                <a:spcPts val="200"/>
+              </a:spcBef>
+            </a:pPr>
+            <a:r>
+              <a:rPr sz="2200" b="1">
                 <a:solidFill>
                   <a:srgbClr val="1A1A1E"/>
                 </a:solidFill>
                 <a:latin typeface="맑은 고딕"/>
               </a:rPr>
-              <a:t>🧠</a:t>
-            </a:r>
-          </a:p>
-        </p:txBody>
-      </p:sp>
-      <p:sp>
-        <p:nvSpPr>
-          <p:cNvPr id="10" name="TextBox 9"/>
-          <p:cNvSpPr txBox="1"/>
-          <p:nvPr/>
-        </p:nvSpPr>
-        <p:spPr>
-          <a:xfrm>
-            <a:off x="914400" y="3995928"/>
-            <a:ext cx="2932176" cy="457200"/>
-          </a:xfrm>
-          <a:prstGeom prst="rect">
-            <a:avLst/>
-          </a:prstGeom>
-          <a:noFill/>
-        </p:spPr>
-        <p:txBody>
-          <a:bodyPr wrap="square">
-            <a:spAutoFit/>
-          </a:bodyPr>
-          <a:lstStyle/>
-          <a:p>
-            <a:r>
-              <a:rPr sz="1550" b="1">
-                <a:solidFill>
-                  <a:srgbClr val="E1306C"/>
-                </a:solidFill>
-                <a:latin typeface="맑은 고딕"/>
-              </a:rPr>
-              <a:t>RNN의 한계</a:t>
-            </a:r>
-          </a:p>
-        </p:txBody>
-      </p:sp>
-      <p:sp>
-        <p:nvSpPr>
-          <p:cNvPr id="11" name="TextBox 10"/>
-          <p:cNvSpPr txBox="1"/>
-          <p:nvPr/>
-        </p:nvSpPr>
-        <p:spPr>
-          <a:xfrm>
-            <a:off x="914400" y="4434840"/>
-            <a:ext cx="2932176" cy="1051560"/>
-          </a:xfrm>
-          <a:prstGeom prst="rect">
-            <a:avLst/>
-          </a:prstGeom>
-          <a:noFill/>
-        </p:spPr>
-        <p:txBody>
-          <a:bodyPr wrap="square">
-            <a:spAutoFit/>
-          </a:bodyPr>
-          <a:lstStyle/>
-          <a:p>
+              <a:t>다음에 뜰 태그</a:t>
+            </a:r>
+          </a:p>
+          <a:p>
+            <a:pPr>
+              <a:spcBef>
+                <a:spcPts val="500"/>
+              </a:spcBef>
+            </a:pPr>
             <a:r>
               <a:rPr sz="1250" b="0">
                 <a:solidFill>
@@ -13304,25 +13222,25 @@
                 </a:solidFill>
                 <a:latin typeface="맑은 고딕"/>
               </a:rPr>
-              <a:t>시점을 거치며 기울기가 소실 → 먼 과거의 신호가 흐려지는 '장기 의존성' 문제.</a:t>
-            </a:r>
-          </a:p>
-        </p:txBody>
-      </p:sp>
-      <p:sp>
-        <p:nvSpPr>
-          <p:cNvPr id="12" name="Rounded Rectangle 11"/>
+              <a:t>3~14일 뒤 상승할 태그를 미리 푸시   엔진: LSTM·TFT 시계열 예측</a:t>
+            </a:r>
+          </a:p>
+        </p:txBody>
+      </p:sp>
+      <p:sp>
+        <p:nvSpPr>
+          <p:cNvPr id="9" name="Rounded Rectangle 8"/>
           <p:cNvSpPr/>
           <p:nvPr/>
         </p:nvSpPr>
         <p:spPr>
           <a:xfrm>
-            <a:off x="4376928" y="3063240"/>
-            <a:ext cx="3444240" cy="2514600"/>
+            <a:off x="6309360" y="1965960"/>
+            <a:ext cx="5349240" cy="1938528"/>
           </a:xfrm>
           <a:prstGeom prst="roundRect">
             <a:avLst>
-              <a:gd name="adj" fmla="val 7000"/>
+              <a:gd name="adj" fmla="val 6000"/>
             </a:avLst>
           </a:prstGeom>
           <a:solidFill>
@@ -13359,94 +13277,102 @@
       </p:sp>
       <p:sp>
         <p:nvSpPr>
-          <p:cNvPr id="13" name="TextBox 12"/>
-          <p:cNvSpPr txBox="1"/>
-          <p:nvPr/>
-        </p:nvSpPr>
-        <p:spPr>
-          <a:xfrm>
-            <a:off x="4632960" y="3282696"/>
-            <a:ext cx="2932176" cy="640080"/>
-          </a:xfrm>
-          <a:prstGeom prst="rect">
-            <a:avLst/>
-          </a:prstGeom>
-          <a:noFill/>
-        </p:spPr>
-        <p:txBody>
-          <a:bodyPr wrap="square">
-            <a:spAutoFit/>
-          </a:bodyPr>
-          <a:lstStyle/>
-          <a:p>
-            <a:r>
-              <a:rPr sz="3000" b="0">
+          <p:cNvPr id="10" name="Rectangle 9"/>
+          <p:cNvSpPr/>
+          <p:nvPr/>
+        </p:nvSpPr>
+        <p:spPr>
+          <a:xfrm>
+            <a:off x="6309360" y="2130552"/>
+            <a:ext cx="91440" cy="1609344"/>
+          </a:xfrm>
+          <a:prstGeom prst="rect">
+            <a:avLst/>
+          </a:prstGeom>
+          <a:solidFill>
+            <a:srgbClr val="6A3DB8"/>
+          </a:solidFill>
+          <a:ln>
+            <a:noFill/>
+          </a:ln>
+          <a:effectLst/>
+        </p:spPr>
+        <p:style>
+          <a:lnRef idx="1">
+            <a:schemeClr val="accent1"/>
+          </a:lnRef>
+          <a:fillRef idx="3">
+            <a:schemeClr val="accent1"/>
+          </a:fillRef>
+          <a:effectRef idx="2">
+            <a:schemeClr val="accent1"/>
+          </a:effectRef>
+          <a:fontRef idx="minor">
+            <a:schemeClr val="lt1"/>
+          </a:fontRef>
+        </p:style>
+        <p:txBody>
+          <a:bodyPr rtlCol="0" anchor="ctr"/>
+          <a:lstStyle/>
+          <a:p>
+            <a:pPr algn="ctr"/>
+          </a:p>
+        </p:txBody>
+      </p:sp>
+      <p:sp>
+        <p:nvSpPr>
+          <p:cNvPr id="11" name="TextBox 10"/>
+          <p:cNvSpPr txBox="1"/>
+          <p:nvPr/>
+        </p:nvSpPr>
+        <p:spPr>
+          <a:xfrm>
+            <a:off x="6656832" y="2148840"/>
+            <a:ext cx="4754880" cy="1572768"/>
+          </a:xfrm>
+          <a:prstGeom prst="rect">
+            <a:avLst/>
+          </a:prstGeom>
+          <a:noFill/>
+        </p:spPr>
+        <p:txBody>
+          <a:bodyPr wrap="square">
+            <a:spAutoFit/>
+          </a:bodyPr>
+          <a:lstStyle/>
+          <a:p>
+            <a:r>
+              <a:rPr sz="1250" b="1">
+                <a:solidFill>
+                  <a:srgbClr val="6A3DB8"/>
+                </a:solidFill>
+                <a:latin typeface="맑은 고딕"/>
+              </a:rPr>
+              <a:t>🧭 자동 인사이트</a:t>
+            </a:r>
+          </a:p>
+          <a:p>
+            <a:pPr>
+              <a:spcBef>
+                <a:spcPts val="200"/>
+              </a:spcBef>
+            </a:pPr>
+            <a:r>
+              <a:rPr sz="2200" b="1">
                 <a:solidFill>
                   <a:srgbClr val="1A1A1E"/>
                 </a:solidFill>
                 <a:latin typeface="맑은 고딕"/>
               </a:rPr>
-              <a:t>🚰</a:t>
-            </a:r>
-          </a:p>
-        </p:txBody>
-      </p:sp>
-      <p:sp>
-        <p:nvSpPr>
-          <p:cNvPr id="14" name="TextBox 13"/>
-          <p:cNvSpPr txBox="1"/>
-          <p:nvPr/>
-        </p:nvSpPr>
-        <p:spPr>
-          <a:xfrm>
-            <a:off x="4632960" y="3995928"/>
-            <a:ext cx="2932176" cy="457200"/>
-          </a:xfrm>
-          <a:prstGeom prst="rect">
-            <a:avLst/>
-          </a:prstGeom>
-          <a:noFill/>
-        </p:spPr>
-        <p:txBody>
-          <a:bodyPr wrap="square">
-            <a:spAutoFit/>
-          </a:bodyPr>
-          <a:lstStyle/>
-          <a:p>
-            <a:r>
-              <a:rPr sz="1550" b="1">
-                <a:solidFill>
-                  <a:srgbClr val="E1306C"/>
-                </a:solidFill>
-                <a:latin typeface="맑은 고딕"/>
-              </a:rPr>
-              <a:t>LSTM 게이트</a:t>
-            </a:r>
-          </a:p>
-        </p:txBody>
-      </p:sp>
-      <p:sp>
-        <p:nvSpPr>
-          <p:cNvPr id="15" name="TextBox 14"/>
-          <p:cNvSpPr txBox="1"/>
-          <p:nvPr/>
-        </p:nvSpPr>
-        <p:spPr>
-          <a:xfrm>
-            <a:off x="4632960" y="4434840"/>
-            <a:ext cx="2932176" cy="1051560"/>
-          </a:xfrm>
-          <a:prstGeom prst="rect">
-            <a:avLst/>
-          </a:prstGeom>
-          <a:noFill/>
-        </p:spPr>
-        <p:txBody>
-          <a:bodyPr wrap="square">
-            <a:spAutoFit/>
-          </a:bodyPr>
-          <a:lstStyle/>
-          <a:p>
+              <a:t>왜 · 어디로</a:t>
+            </a:r>
+          </a:p>
+          <a:p>
+            <a:pPr>
+              <a:spcBef>
+                <a:spcPts val="500"/>
+              </a:spcBef>
+            </a:pPr>
             <a:r>
               <a:rPr sz="1250" b="0">
                 <a:solidFill>
@@ -13454,25 +13380,25 @@
                 </a:solidFill>
                 <a:latin typeface="맑은 고딕"/>
               </a:rPr>
-              <a:t>셀 상태 + forget·input·output 게이트로 장기 기억을 유지/갱신. (변형: GRU)</a:t>
-            </a:r>
-          </a:p>
-        </p:txBody>
-      </p:sp>
-      <p:sp>
-        <p:nvSpPr>
-          <p:cNvPr id="16" name="Rounded Rectangle 15"/>
+              <a:t>‘#등산 상승, #피크닉 피크 통과’를 근거까지 자동 요약   엔진: RAG + LLM</a:t>
+            </a:r>
+          </a:p>
+        </p:txBody>
+      </p:sp>
+      <p:sp>
+        <p:nvSpPr>
+          <p:cNvPr id="12" name="Rounded Rectangle 11"/>
           <p:cNvSpPr/>
           <p:nvPr/>
         </p:nvSpPr>
         <p:spPr>
           <a:xfrm>
-            <a:off x="8095488" y="3063240"/>
-            <a:ext cx="3444240" cy="2514600"/>
+            <a:off x="685800" y="4160520"/>
+            <a:ext cx="5349240" cy="1938528"/>
           </a:xfrm>
           <a:prstGeom prst="roundRect">
             <a:avLst>
-              <a:gd name="adj" fmla="val 7000"/>
+              <a:gd name="adj" fmla="val 6000"/>
             </a:avLst>
           </a:prstGeom>
           <a:solidFill>
@@ -13509,121 +13435,17 @@
       </p:sp>
       <p:sp>
         <p:nvSpPr>
-          <p:cNvPr id="17" name="TextBox 16"/>
-          <p:cNvSpPr txBox="1"/>
-          <p:nvPr/>
-        </p:nvSpPr>
-        <p:spPr>
-          <a:xfrm>
-            <a:off x="8351520" y="3282696"/>
-            <a:ext cx="2932176" cy="640080"/>
-          </a:xfrm>
-          <a:prstGeom prst="rect">
-            <a:avLst/>
-          </a:prstGeom>
-          <a:noFill/>
-        </p:spPr>
-        <p:txBody>
-          <a:bodyPr wrap="square">
-            <a:spAutoFit/>
-          </a:bodyPr>
-          <a:lstStyle/>
-          <a:p>
-            <a:r>
-              <a:rPr sz="3000" b="0">
-                <a:solidFill>
-                  <a:srgbClr val="1A1A1E"/>
-                </a:solidFill>
-                <a:latin typeface="맑은 고딕"/>
-              </a:rPr>
-              <a:t>📲</a:t>
-            </a:r>
-          </a:p>
-        </p:txBody>
-      </p:sp>
-      <p:sp>
-        <p:nvSpPr>
-          <p:cNvPr id="18" name="TextBox 17"/>
-          <p:cNvSpPr txBox="1"/>
-          <p:nvPr/>
-        </p:nvSpPr>
-        <p:spPr>
-          <a:xfrm>
-            <a:off x="8351520" y="3995928"/>
-            <a:ext cx="2932176" cy="457200"/>
-          </a:xfrm>
-          <a:prstGeom prst="rect">
-            <a:avLst/>
-          </a:prstGeom>
-          <a:noFill/>
-        </p:spPr>
-        <p:txBody>
-          <a:bodyPr wrap="square">
-            <a:spAutoFit/>
-          </a:bodyPr>
-          <a:lstStyle/>
-          <a:p>
-            <a:r>
-              <a:rPr sz="1550" b="1">
-                <a:solidFill>
-                  <a:srgbClr val="E1306C"/>
-                </a:solidFill>
-                <a:latin typeface="맑은 고딕"/>
-              </a:rPr>
-              <a:t>우리 적용</a:t>
-            </a:r>
-          </a:p>
-        </p:txBody>
-      </p:sp>
-      <p:sp>
-        <p:nvSpPr>
-          <p:cNvPr id="19" name="TextBox 18"/>
-          <p:cNvSpPr txBox="1"/>
-          <p:nvPr/>
-        </p:nvSpPr>
-        <p:spPr>
-          <a:xfrm>
-            <a:off x="8351520" y="4434840"/>
-            <a:ext cx="2932176" cy="1051560"/>
-          </a:xfrm>
-          <a:prstGeom prst="rect">
-            <a:avLst/>
-          </a:prstGeom>
-          <a:noFill/>
-        </p:spPr>
-        <p:txBody>
-          <a:bodyPr wrap="square">
-            <a:spAutoFit/>
-          </a:bodyPr>
-          <a:lstStyle/>
-          <a:p>
-            <a:r>
-              <a:rPr sz="1250" b="0">
-                <a:solidFill>
-                  <a:srgbClr val="666670"/>
-                </a:solidFill>
-                <a:latin typeface="맑은 고딕"/>
-              </a:rPr>
-              <a:t>9개 해시태그 × 외생 변수를 한 모델로 학습해 다변량 비선형 예측.</a:t>
-            </a:r>
-          </a:p>
-        </p:txBody>
-      </p:sp>
-      <p:sp>
-        <p:nvSpPr>
-          <p:cNvPr id="20" name="Rounded Rectangle 19"/>
+          <p:cNvPr id="13" name="Rectangle 12"/>
           <p:cNvSpPr/>
           <p:nvPr/>
         </p:nvSpPr>
         <p:spPr>
           <a:xfrm>
-            <a:off x="658368" y="5806440"/>
-            <a:ext cx="10881360" cy="457200"/>
-          </a:xfrm>
-          <a:prstGeom prst="roundRect">
-            <a:avLst>
-              <a:gd name="adj" fmla="val 30000"/>
-            </a:avLst>
+            <a:off x="685800" y="4325112"/>
+            <a:ext cx="91440" cy="1609344"/>
+          </a:xfrm>
+          <a:prstGeom prst="rect">
+            <a:avLst/>
           </a:prstGeom>
           <a:solidFill>
             <a:srgbClr val="1A1A1E"/>
@@ -13657,50 +13479,231 @@
       </p:sp>
       <p:sp>
         <p:nvSpPr>
-          <p:cNvPr id="21" name="TextBox 20"/>
-          <p:cNvSpPr txBox="1"/>
-          <p:nvPr/>
-        </p:nvSpPr>
-        <p:spPr>
-          <a:xfrm>
-            <a:off x="914400" y="5806440"/>
-            <a:ext cx="10424160" cy="457200"/>
-          </a:xfrm>
-          <a:prstGeom prst="rect">
-            <a:avLst/>
-          </a:prstGeom>
-          <a:noFill/>
-        </p:spPr>
-        <p:txBody>
-          <a:bodyPr wrap="square" anchor="ctr">
-            <a:spAutoFit/>
-          </a:bodyPr>
-          <a:lstStyle/>
-          <a:p>
-            <a:r>
-              <a:rPr sz="1100" b="1">
-                <a:solidFill>
-                  <a:srgbClr val="E1306C"/>
-                </a:solidFill>
-                <a:latin typeface="Segoe UI"/>
-              </a:rPr>
-              <a:t>수식  </a:t>
-            </a:r>
-            <a:r>
-              <a:rPr sz="1300" b="0">
-                <a:solidFill>
-                  <a:srgbClr val="FFFFFF"/>
-                </a:solidFill>
-                <a:latin typeface="Consolas"/>
-              </a:rPr>
-              <a:t>cₜ = fₜ·cₜ₋₁ + iₜ·c̃ₜ    (게이트로 기억 갱신)</a:t>
-            </a:r>
-          </a:p>
-        </p:txBody>
-      </p:sp>
-      <p:sp>
-        <p:nvSpPr>
-          <p:cNvPr id="22" name="TextBox 21"/>
+          <p:cNvPr id="14" name="TextBox 13"/>
+          <p:cNvSpPr txBox="1"/>
+          <p:nvPr/>
+        </p:nvSpPr>
+        <p:spPr>
+          <a:xfrm>
+            <a:off x="1033272" y="4343400"/>
+            <a:ext cx="4754880" cy="1572768"/>
+          </a:xfrm>
+          <a:prstGeom prst="rect">
+            <a:avLst/>
+          </a:prstGeom>
+          <a:noFill/>
+        </p:spPr>
+        <p:txBody>
+          <a:bodyPr wrap="square">
+            <a:spAutoFit/>
+          </a:bodyPr>
+          <a:lstStyle/>
+          <a:p>
+            <a:r>
+              <a:rPr sz="1250" b="1">
+                <a:solidFill>
+                  <a:srgbClr val="1A1A1E"/>
+                </a:solidFill>
+                <a:latin typeface="맑은 고딕"/>
+              </a:rPr>
+              <a:t>✍️ 콘텐츠 코파일럿</a:t>
+            </a:r>
+          </a:p>
+          <a:p>
+            <a:pPr>
+              <a:spcBef>
+                <a:spcPts val="200"/>
+              </a:spcBef>
+            </a:pPr>
+            <a:r>
+              <a:rPr sz="2200" b="1">
+                <a:solidFill>
+                  <a:srgbClr val="1A1A1E"/>
+                </a:solidFill>
+                <a:latin typeface="맑은 고딕"/>
+              </a:rPr>
+              <a:t>바로 쓸 초안</a:t>
+            </a:r>
+          </a:p>
+          <a:p>
+            <a:pPr>
+              <a:spcBef>
+                <a:spcPts val="500"/>
+              </a:spcBef>
+            </a:pPr>
+            <a:r>
+              <a:rPr sz="1250" b="0">
+                <a:solidFill>
+                  <a:srgbClr val="666670"/>
+                </a:solidFill>
+                <a:latin typeface="맑은 고딕"/>
+              </a:rPr>
+              <a:t>추천 태그·타이밍에 맞춘 캡션·기획안 자동 생성   엔진: LLM 에이전트</a:t>
+            </a:r>
+          </a:p>
+        </p:txBody>
+      </p:sp>
+      <p:sp>
+        <p:nvSpPr>
+          <p:cNvPr id="15" name="Rounded Rectangle 14"/>
+          <p:cNvSpPr/>
+          <p:nvPr/>
+        </p:nvSpPr>
+        <p:spPr>
+          <a:xfrm>
+            <a:off x="6309360" y="4160520"/>
+            <a:ext cx="5349240" cy="1938528"/>
+          </a:xfrm>
+          <a:prstGeom prst="roundRect">
+            <a:avLst>
+              <a:gd name="adj" fmla="val 6000"/>
+            </a:avLst>
+          </a:prstGeom>
+          <a:solidFill>
+            <a:srgbClr val="F6F6F9"/>
+          </a:solidFill>
+          <a:ln w="12700">
+            <a:solidFill>
+              <a:srgbClr val="E6E6EA"/>
+            </a:solidFill>
+          </a:ln>
+          <a:effectLst/>
+        </p:spPr>
+        <p:style>
+          <a:lnRef idx="1">
+            <a:schemeClr val="accent1"/>
+          </a:lnRef>
+          <a:fillRef idx="3">
+            <a:schemeClr val="accent1"/>
+          </a:fillRef>
+          <a:effectRef idx="2">
+            <a:schemeClr val="accent1"/>
+          </a:effectRef>
+          <a:fontRef idx="minor">
+            <a:schemeClr val="lt1"/>
+          </a:fontRef>
+        </p:style>
+        <p:txBody>
+          <a:bodyPr rtlCol="0" anchor="ctr"/>
+          <a:lstStyle/>
+          <a:p>
+            <a:pPr algn="ctr"/>
+          </a:p>
+        </p:txBody>
+      </p:sp>
+      <p:sp>
+        <p:nvSpPr>
+          <p:cNvPr id="16" name="Rectangle 15"/>
+          <p:cNvSpPr/>
+          <p:nvPr/>
+        </p:nvSpPr>
+        <p:spPr>
+          <a:xfrm>
+            <a:off x="6309360" y="4325112"/>
+            <a:ext cx="91440" cy="1609344"/>
+          </a:xfrm>
+          <a:prstGeom prst="rect">
+            <a:avLst/>
+          </a:prstGeom>
+          <a:solidFill>
+            <a:srgbClr val="666670"/>
+          </a:solidFill>
+          <a:ln>
+            <a:noFill/>
+          </a:ln>
+          <a:effectLst/>
+        </p:spPr>
+        <p:style>
+          <a:lnRef idx="1">
+            <a:schemeClr val="accent1"/>
+          </a:lnRef>
+          <a:fillRef idx="3">
+            <a:schemeClr val="accent1"/>
+          </a:fillRef>
+          <a:effectRef idx="2">
+            <a:schemeClr val="accent1"/>
+          </a:effectRef>
+          <a:fontRef idx="minor">
+            <a:schemeClr val="lt1"/>
+          </a:fontRef>
+        </p:style>
+        <p:txBody>
+          <a:bodyPr rtlCol="0" anchor="ctr"/>
+          <a:lstStyle/>
+          <a:p>
+            <a:pPr algn="ctr"/>
+          </a:p>
+        </p:txBody>
+      </p:sp>
+      <p:sp>
+        <p:nvSpPr>
+          <p:cNvPr id="17" name="TextBox 16"/>
+          <p:cNvSpPr txBox="1"/>
+          <p:nvPr/>
+        </p:nvSpPr>
+        <p:spPr>
+          <a:xfrm>
+            <a:off x="6656832" y="4343400"/>
+            <a:ext cx="4754880" cy="1572768"/>
+          </a:xfrm>
+          <a:prstGeom prst="rect">
+            <a:avLst/>
+          </a:prstGeom>
+          <a:noFill/>
+        </p:spPr>
+        <p:txBody>
+          <a:bodyPr wrap="square">
+            <a:spAutoFit/>
+          </a:bodyPr>
+          <a:lstStyle/>
+          <a:p>
+            <a:r>
+              <a:rPr sz="1250" b="1">
+                <a:solidFill>
+                  <a:srgbClr val="666670"/>
+                </a:solidFill>
+                <a:latin typeface="맑은 고딕"/>
+              </a:rPr>
+              <a:t>📊 계정 성장 진단</a:t>
+            </a:r>
+          </a:p>
+          <a:p>
+            <a:pPr>
+              <a:spcBef>
+                <a:spcPts val="200"/>
+              </a:spcBef>
+            </a:pPr>
+            <a:r>
+              <a:rPr sz="2200" b="1">
+                <a:solidFill>
+                  <a:srgbClr val="1A1A1E"/>
+                </a:solidFill>
+                <a:latin typeface="맑은 고딕"/>
+              </a:rPr>
+              <a:t>진짜 성장?</a:t>
+            </a:r>
+          </a:p>
+          <a:p>
+            <a:pPr>
+              <a:spcBef>
+                <a:spcPts val="500"/>
+              </a:spcBef>
+            </a:pPr>
+            <a:r>
+              <a:rPr sz="1250" b="0">
+                <a:solidFill>
+                  <a:srgbClr val="666670"/>
+                </a:solidFill>
+                <a:latin typeface="맑은 고딕"/>
+              </a:rPr>
+              <a:t>단발 바이럴인지 꾸준한 성장인지 분해·예측으로 진단   엔진: 시계열 분해</a:t>
+            </a:r>
+          </a:p>
+        </p:txBody>
+      </p:sp>
+      <p:sp>
+        <p:nvSpPr>
+          <p:cNvPr id="18" name="TextBox 17"/>
           <p:cNvSpPr txBox="1"/>
           <p:nvPr/>
         </p:nvSpPr>
@@ -13734,7 +13737,7 @@
       </p:sp>
       <p:sp>
         <p:nvSpPr>
-          <p:cNvPr id="23" name="TextBox 22"/>
+          <p:cNvPr id="19" name="TextBox 18"/>
           <p:cNvSpPr txBox="1"/>
           <p:nvPr/>
         </p:nvSpPr>
@@ -13814,7 +13817,7 @@
                 </a:solidFill>
                 <a:latin typeface="Segoe UI"/>
               </a:rPr>
-              <a:t>07 · DEEP MODELS</a:t>
+              <a:t>07 · ROADMAP</a:t>
             </a:r>
           </a:p>
         </p:txBody>
@@ -13848,7 +13851,7 @@
                 </a:solidFill>
                 <a:latin typeface="맑은 고딕"/>
               </a:rPr>
-              <a:t>LSTM을 넘어서는 시계열 딥러닝</a:t>
+              <a:t>단계별 고도화 로드맵</a:t>
             </a:r>
           </a:p>
         </p:txBody>
@@ -13899,61 +13902,25 @@
       </p:sp>
       <p:sp>
         <p:nvSpPr>
-          <p:cNvPr id="5" name="TextBox 4"/>
-          <p:cNvSpPr txBox="1"/>
-          <p:nvPr/>
-        </p:nvSpPr>
-        <p:spPr>
-          <a:xfrm>
-            <a:off x="685800" y="1481328"/>
-            <a:ext cx="10789920" cy="365760"/>
-          </a:xfrm>
-          <a:prstGeom prst="rect">
-            <a:avLst/>
-          </a:prstGeom>
-          <a:noFill/>
-        </p:spPr>
-        <p:txBody>
-          <a:bodyPr wrap="square">
-            <a:spAutoFit/>
-          </a:bodyPr>
-          <a:lstStyle/>
-          <a:p>
-            <a:r>
-              <a:rPr sz="1400" b="1">
-                <a:solidFill>
-                  <a:srgbClr val="666670"/>
-                </a:solidFill>
-                <a:latin typeface="맑은 고딕"/>
-              </a:rPr>
-              <a:t>문제 규모·해석 요구·확률 예측 필요에 따라 골라 쓴다.</a:t>
-            </a:r>
-          </a:p>
-        </p:txBody>
-      </p:sp>
-      <p:sp>
-        <p:nvSpPr>
-          <p:cNvPr id="6" name="Rounded Rectangle 5"/>
+          <p:cNvPr id="5" name="Rounded Rectangle 4"/>
           <p:cNvSpPr/>
           <p:nvPr/>
         </p:nvSpPr>
         <p:spPr>
           <a:xfrm>
-            <a:off x="685800" y="1965960"/>
-            <a:ext cx="5349240" cy="1938528"/>
+            <a:off x="658368" y="1536192"/>
+            <a:ext cx="10881360" cy="841248"/>
           </a:xfrm>
           <a:prstGeom prst="roundRect">
             <a:avLst>
-              <a:gd name="adj" fmla="val 6000"/>
+              <a:gd name="adj" fmla="val 8000"/>
             </a:avLst>
           </a:prstGeom>
           <a:solidFill>
-            <a:srgbClr val="F6F6F9"/>
+            <a:srgbClr val="FBE9F1"/>
           </a:solidFill>
-          <a:ln w="12700">
-            <a:solidFill>
-              <a:srgbClr val="E6E6EA"/>
-            </a:solidFill>
+          <a:ln>
+            <a:noFill/>
           </a:ln>
           <a:effectLst/>
         </p:spPr>
@@ -13981,14 +13948,14 @@
       </p:sp>
       <p:sp>
         <p:nvSpPr>
-          <p:cNvPr id="7" name="Rectangle 6"/>
+          <p:cNvPr id="6" name="Rectangle 5"/>
           <p:cNvSpPr/>
           <p:nvPr/>
         </p:nvSpPr>
         <p:spPr>
           <a:xfrm>
-            <a:off x="685800" y="2130552"/>
-            <a:ext cx="91440" cy="1609344"/>
+            <a:off x="658368" y="1536192"/>
+            <a:ext cx="91440" cy="841248"/>
           </a:xfrm>
           <a:prstGeom prst="rect">
             <a:avLst/>
@@ -14025,547 +13992,192 @@
       </p:sp>
       <p:sp>
         <p:nvSpPr>
+          <p:cNvPr id="7" name="TextBox 6"/>
+          <p:cNvSpPr txBox="1"/>
+          <p:nvPr/>
+        </p:nvSpPr>
+        <p:spPr>
+          <a:xfrm>
+            <a:off x="960120" y="1627632"/>
+            <a:ext cx="10332720" cy="658368"/>
+          </a:xfrm>
+          <a:prstGeom prst="rect">
+            <a:avLst/>
+          </a:prstGeom>
+          <a:noFill/>
+        </p:spPr>
+        <p:txBody>
+          <a:bodyPr wrap="square" anchor="ctr">
+            <a:spAutoFit/>
+          </a:bodyPr>
+          <a:lstStyle/>
+          <a:p>
+            <a:r>
+              <a:rPr sz="1500" b="1">
+                <a:solidFill>
+                  <a:srgbClr val="1A1A1E"/>
+                </a:solidFill>
+                <a:latin typeface="맑은 고딕"/>
+              </a:rPr>
+              <a:t>한 번에 다 만들지 않는다 — 지금 가진 자산 위에 단계적으로 얹는다.</a:t>
+            </a:r>
+          </a:p>
+        </p:txBody>
+      </p:sp>
+      <p:sp>
+        <p:nvSpPr>
           <p:cNvPr id="8" name="TextBox 7"/>
           <p:cNvSpPr txBox="1"/>
           <p:nvPr/>
         </p:nvSpPr>
         <p:spPr>
           <a:xfrm>
-            <a:off x="1033272" y="2148840"/>
-            <a:ext cx="4754880" cy="1572768"/>
-          </a:xfrm>
-          <a:prstGeom prst="rect">
-            <a:avLst/>
-          </a:prstGeom>
-          <a:noFill/>
-        </p:spPr>
-        <p:txBody>
-          <a:bodyPr wrap="square">
-            <a:spAutoFit/>
-          </a:bodyPr>
-          <a:lstStyle/>
-          <a:p>
-            <a:r>
-              <a:rPr sz="1250" b="1">
-                <a:solidFill>
-                  <a:srgbClr val="E1306C"/>
-                </a:solidFill>
-                <a:latin typeface="맑은 고딕"/>
-              </a:rPr>
-              <a:t>🔭 어텐션 기반</a:t>
-            </a:r>
-          </a:p>
+            <a:off x="777240" y="2633472"/>
+            <a:ext cx="10698480" cy="4206240"/>
+          </a:xfrm>
+          <a:prstGeom prst="rect">
+            <a:avLst/>
+          </a:prstGeom>
+          <a:noFill/>
+        </p:spPr>
+        <p:txBody>
+          <a:bodyPr wrap="square">
+            <a:spAutoFit/>
+          </a:bodyPr>
+          <a:lstStyle/>
           <a:p>
             <a:pPr>
-              <a:spcBef>
-                <a:spcPts val="200"/>
-              </a:spcBef>
+              <a:spcAft>
+                <a:spcPts val="300"/>
+              </a:spcAft>
             </a:pPr>
             <a:r>
-              <a:rPr sz="2200" b="1">
+              <a:rPr sz="1600" b="1">
                 <a:solidFill>
                   <a:srgbClr val="1A1A1E"/>
                 </a:solidFill>
                 <a:latin typeface="맑은 고딕"/>
               </a:rPr>
-              <a:t>Transformer · TFT</a:t>
+              <a:t>Phase 1 — 지금 (분석·시각화)</a:t>
             </a:r>
           </a:p>
           <a:p>
             <a:pPr>
-              <a:spcBef>
-                <a:spcPts val="500"/>
-              </a:spcBef>
+              <a:spcAft>
+                <a:spcPts val="1500"/>
+              </a:spcAft>
             </a:pPr>
             <a:r>
-              <a:rPr sz="1250" b="0">
+              <a:rPr sz="1350" b="0">
                 <a:solidFill>
                   <a:srgbClr val="666670"/>
                 </a:solidFill>
                 <a:latin typeface="맑은 고딕"/>
               </a:rPr>
-              <a:t>장기 의존성과 다변량을 어텐션으로 포착. TFT는 변수 중요도까지 해석 가능.</a:t>
-            </a:r>
-          </a:p>
-        </p:txBody>
-      </p:sp>
-      <p:sp>
-        <p:nvSpPr>
-          <p:cNvPr id="9" name="Rounded Rectangle 8"/>
-          <p:cNvSpPr/>
-          <p:nvPr/>
-        </p:nvSpPr>
-        <p:spPr>
-          <a:xfrm>
-            <a:off x="6309360" y="1965960"/>
-            <a:ext cx="5349240" cy="1938528"/>
-          </a:xfrm>
-          <a:prstGeom prst="roundRect">
-            <a:avLst>
-              <a:gd name="adj" fmla="val 6000"/>
-            </a:avLst>
-          </a:prstGeom>
-          <a:solidFill>
-            <a:srgbClr val="F6F6F9"/>
-          </a:solidFill>
-          <a:ln w="12700">
-            <a:solidFill>
-              <a:srgbClr val="E6E6EA"/>
-            </a:solidFill>
-          </a:ln>
-          <a:effectLst/>
-        </p:spPr>
-        <p:style>
-          <a:lnRef idx="1">
-            <a:schemeClr val="accent1"/>
-          </a:lnRef>
-          <a:fillRef idx="3">
-            <a:schemeClr val="accent1"/>
-          </a:fillRef>
-          <a:effectRef idx="2">
-            <a:schemeClr val="accent1"/>
-          </a:effectRef>
-          <a:fontRef idx="minor">
-            <a:schemeClr val="lt1"/>
-          </a:fontRef>
-        </p:style>
-        <p:txBody>
-          <a:bodyPr rtlCol="0" anchor="ctr"/>
-          <a:lstStyle/>
-          <a:p>
-            <a:pPr algn="ctr"/>
-          </a:p>
-        </p:txBody>
-      </p:sp>
-      <p:sp>
-        <p:nvSpPr>
-          <p:cNvPr id="10" name="Rectangle 9"/>
-          <p:cNvSpPr/>
-          <p:nvPr/>
-        </p:nvSpPr>
-        <p:spPr>
-          <a:xfrm>
-            <a:off x="6309360" y="2130552"/>
-            <a:ext cx="91440" cy="1609344"/>
-          </a:xfrm>
-          <a:prstGeom prst="rect">
-            <a:avLst/>
-          </a:prstGeom>
-          <a:solidFill>
-            <a:srgbClr val="6A3DB8"/>
-          </a:solidFill>
-          <a:ln>
-            <a:noFill/>
-          </a:ln>
-          <a:effectLst/>
-        </p:spPr>
-        <p:style>
-          <a:lnRef idx="1">
-            <a:schemeClr val="accent1"/>
-          </a:lnRef>
-          <a:fillRef idx="3">
-            <a:schemeClr val="accent1"/>
-          </a:fillRef>
-          <a:effectRef idx="2">
-            <a:schemeClr val="accent1"/>
-          </a:effectRef>
-          <a:fontRef idx="minor">
-            <a:schemeClr val="lt1"/>
-          </a:fontRef>
-        </p:style>
-        <p:txBody>
-          <a:bodyPr rtlCol="0" anchor="ctr"/>
-          <a:lstStyle/>
-          <a:p>
-            <a:pPr algn="ctr"/>
-          </a:p>
-        </p:txBody>
-      </p:sp>
-      <p:sp>
-        <p:nvSpPr>
-          <p:cNvPr id="11" name="TextBox 10"/>
-          <p:cNvSpPr txBox="1"/>
-          <p:nvPr/>
-        </p:nvSpPr>
-        <p:spPr>
-          <a:xfrm>
-            <a:off x="6656832" y="2148840"/>
-            <a:ext cx="4754880" cy="1572768"/>
-          </a:xfrm>
-          <a:prstGeom prst="rect">
-            <a:avLst/>
-          </a:prstGeom>
-          <a:noFill/>
-        </p:spPr>
-        <p:txBody>
-          <a:bodyPr wrap="square">
-            <a:spAutoFit/>
-          </a:bodyPr>
-          <a:lstStyle/>
-          <a:p>
-            <a:r>
-              <a:rPr sz="1250" b="1">
-                <a:solidFill>
-                  <a:srgbClr val="6A3DB8"/>
-                </a:solidFill>
-                <a:latin typeface="맑은 고딕"/>
-              </a:rPr>
-              <a:t>🧩 분해형</a:t>
+              <a:t>해시태그 랭킹 + 시계열 분석 대시보드 (이미 보유한 자산)</a:t>
             </a:r>
           </a:p>
           <a:p>
             <a:pPr>
-              <a:spcBef>
-                <a:spcPts val="200"/>
-              </a:spcBef>
+              <a:spcAft>
+                <a:spcPts val="300"/>
+              </a:spcAft>
             </a:pPr>
             <a:r>
-              <a:rPr sz="2200" b="1">
+              <a:rPr sz="1600" b="1">
                 <a:solidFill>
                   <a:srgbClr val="1A1A1E"/>
                 </a:solidFill>
                 <a:latin typeface="맑은 고딕"/>
               </a:rPr>
-              <a:t>N-BEATS · N-HiTS</a:t>
+              <a:t>Phase 2 — 예측 엔진 + 알림</a:t>
             </a:r>
           </a:p>
           <a:p>
             <a:pPr>
-              <a:spcBef>
-                <a:spcPts val="500"/>
-              </a:spcBef>
+              <a:spcAft>
+                <a:spcPts val="1500"/>
+              </a:spcAft>
             </a:pPr>
             <a:r>
-              <a:rPr sz="1250" b="0">
+              <a:rPr sz="1350" b="0">
                 <a:solidFill>
                   <a:srgbClr val="666670"/>
                 </a:solidFill>
                 <a:latin typeface="맑은 고딕"/>
               </a:rPr>
-              <a:t>추세/계절을 신경망 블록으로 분해 — 통계 분해의 딥러닝 버전, 해석 용이.</a:t>
-            </a:r>
-          </a:p>
-        </p:txBody>
-      </p:sp>
-      <p:sp>
-        <p:nvSpPr>
-          <p:cNvPr id="12" name="Rounded Rectangle 11"/>
-          <p:cNvSpPr/>
-          <p:nvPr/>
-        </p:nvSpPr>
-        <p:spPr>
-          <a:xfrm>
-            <a:off x="685800" y="4160520"/>
-            <a:ext cx="5349240" cy="1938528"/>
-          </a:xfrm>
-          <a:prstGeom prst="roundRect">
-            <a:avLst>
-              <a:gd name="adj" fmla="val 6000"/>
-            </a:avLst>
-          </a:prstGeom>
-          <a:solidFill>
-            <a:srgbClr val="F6F6F9"/>
-          </a:solidFill>
-          <a:ln w="12700">
-            <a:solidFill>
-              <a:srgbClr val="E6E6EA"/>
-            </a:solidFill>
-          </a:ln>
-          <a:effectLst/>
-        </p:spPr>
-        <p:style>
-          <a:lnRef idx="1">
-            <a:schemeClr val="accent1"/>
-          </a:lnRef>
-          <a:fillRef idx="3">
-            <a:schemeClr val="accent1"/>
-          </a:fillRef>
-          <a:effectRef idx="2">
-            <a:schemeClr val="accent1"/>
-          </a:effectRef>
-          <a:fontRef idx="minor">
-            <a:schemeClr val="lt1"/>
-          </a:fontRef>
-        </p:style>
-        <p:txBody>
-          <a:bodyPr rtlCol="0" anchor="ctr"/>
-          <a:lstStyle/>
-          <a:p>
-            <a:pPr algn="ctr"/>
-          </a:p>
-        </p:txBody>
-      </p:sp>
-      <p:sp>
-        <p:nvSpPr>
-          <p:cNvPr id="13" name="Rectangle 12"/>
-          <p:cNvSpPr/>
-          <p:nvPr/>
-        </p:nvSpPr>
-        <p:spPr>
-          <a:xfrm>
-            <a:off x="685800" y="4325112"/>
-            <a:ext cx="91440" cy="1609344"/>
-          </a:xfrm>
-          <a:prstGeom prst="rect">
-            <a:avLst/>
-          </a:prstGeom>
-          <a:solidFill>
-            <a:srgbClr val="1A1A1E"/>
-          </a:solidFill>
-          <a:ln>
-            <a:noFill/>
-          </a:ln>
-          <a:effectLst/>
-        </p:spPr>
-        <p:style>
-          <a:lnRef idx="1">
-            <a:schemeClr val="accent1"/>
-          </a:lnRef>
-          <a:fillRef idx="3">
-            <a:schemeClr val="accent1"/>
-          </a:fillRef>
-          <a:effectRef idx="2">
-            <a:schemeClr val="accent1"/>
-          </a:effectRef>
-          <a:fontRef idx="minor">
-            <a:schemeClr val="lt1"/>
-          </a:fontRef>
-        </p:style>
-        <p:txBody>
-          <a:bodyPr rtlCol="0" anchor="ctr"/>
-          <a:lstStyle/>
-          <a:p>
-            <a:pPr algn="ctr"/>
-          </a:p>
-        </p:txBody>
-      </p:sp>
-      <p:sp>
-        <p:nvSpPr>
-          <p:cNvPr id="14" name="TextBox 13"/>
-          <p:cNvSpPr txBox="1"/>
-          <p:nvPr/>
-        </p:nvSpPr>
-        <p:spPr>
-          <a:xfrm>
-            <a:off x="1033272" y="4343400"/>
-            <a:ext cx="4754880" cy="1572768"/>
-          </a:xfrm>
-          <a:prstGeom prst="rect">
-            <a:avLst/>
-          </a:prstGeom>
-          <a:noFill/>
-        </p:spPr>
-        <p:txBody>
-          <a:bodyPr wrap="square">
-            <a:spAutoFit/>
-          </a:bodyPr>
-          <a:lstStyle/>
-          <a:p>
-            <a:r>
-              <a:rPr sz="1250" b="1">
+              <a:t>SARIMA→LSTM 예측을 붙여 '떡상 알림' 출시 — 사후에서 선제로 전환</a:t>
+            </a:r>
+          </a:p>
+          <a:p>
+            <a:pPr>
+              <a:spcAft>
+                <a:spcPts val="300"/>
+              </a:spcAft>
+            </a:pPr>
+            <a:r>
+              <a:rPr sz="1600" b="1">
                 <a:solidFill>
                   <a:srgbClr val="1A1A1E"/>
                 </a:solidFill>
                 <a:latin typeface="맑은 고딕"/>
               </a:rPr>
-              <a:t>📈 자동화</a:t>
+              <a:t>Phase 3 — 지식베이스 + 자동 인사이트</a:t>
             </a:r>
           </a:p>
           <a:p>
             <a:pPr>
-              <a:spcBef>
-                <a:spcPts val="200"/>
-              </a:spcBef>
+              <a:spcAft>
+                <a:spcPts val="1500"/>
+              </a:spcAft>
             </a:pPr>
             <a:r>
-              <a:rPr sz="2200" b="1">
+              <a:rPr sz="1350" b="0">
+                <a:solidFill>
+                  <a:srgbClr val="666670"/>
+                </a:solidFill>
+                <a:latin typeface="맑은 고딕"/>
+              </a:rPr>
+              <a:t>트렌드·성과를 벡터DB(RAG)에 축적 → LLM이 근거 기반 리포트 자동 생성</a:t>
+            </a:r>
+          </a:p>
+          <a:p>
+            <a:pPr>
+              <a:spcAft>
+                <a:spcPts val="300"/>
+              </a:spcAft>
+            </a:pPr>
+            <a:r>
+              <a:rPr sz="1600" b="1">
                 <a:solidFill>
                   <a:srgbClr val="1A1A1E"/>
                 </a:solidFill>
                 <a:latin typeface="맑은 고딕"/>
               </a:rPr>
-              <a:t>Prophet</a:t>
+              <a:t>Phase 4 — 코파일럿 + 개인화</a:t>
             </a:r>
           </a:p>
           <a:p>
             <a:pPr>
-              <a:spcBef>
-                <a:spcPts val="500"/>
-              </a:spcBef>
+              <a:spcAft>
+                <a:spcPts val="1500"/>
+              </a:spcAft>
             </a:pPr>
             <a:r>
-              <a:rPr sz="1250" b="0">
+              <a:rPr sz="1350" b="0">
                 <a:solidFill>
                   <a:srgbClr val="666670"/>
                 </a:solidFill>
                 <a:latin typeface="맑은 고딕"/>
               </a:rPr>
-              <a:t>추세+계절+휴일을 자동 적합. 빠른 베이스라인으로 실무에서 인기.</a:t>
-            </a:r>
-          </a:p>
-        </p:txBody>
-      </p:sp>
-      <p:sp>
-        <p:nvSpPr>
-          <p:cNvPr id="15" name="Rounded Rectangle 14"/>
-          <p:cNvSpPr/>
-          <p:nvPr/>
-        </p:nvSpPr>
-        <p:spPr>
-          <a:xfrm>
-            <a:off x="6309360" y="4160520"/>
-            <a:ext cx="5349240" cy="1938528"/>
-          </a:xfrm>
-          <a:prstGeom prst="roundRect">
-            <a:avLst>
-              <a:gd name="adj" fmla="val 6000"/>
-            </a:avLst>
-          </a:prstGeom>
-          <a:solidFill>
-            <a:srgbClr val="F6F6F9"/>
-          </a:solidFill>
-          <a:ln w="12700">
-            <a:solidFill>
-              <a:srgbClr val="E6E6EA"/>
-            </a:solidFill>
-          </a:ln>
-          <a:effectLst/>
-        </p:spPr>
-        <p:style>
-          <a:lnRef idx="1">
-            <a:schemeClr val="accent1"/>
-          </a:lnRef>
-          <a:fillRef idx="3">
-            <a:schemeClr val="accent1"/>
-          </a:fillRef>
-          <a:effectRef idx="2">
-            <a:schemeClr val="accent1"/>
-          </a:effectRef>
-          <a:fontRef idx="minor">
-            <a:schemeClr val="lt1"/>
-          </a:fontRef>
-        </p:style>
-        <p:txBody>
-          <a:bodyPr rtlCol="0" anchor="ctr"/>
-          <a:lstStyle/>
-          <a:p>
-            <a:pPr algn="ctr"/>
-          </a:p>
-        </p:txBody>
-      </p:sp>
-      <p:sp>
-        <p:nvSpPr>
-          <p:cNvPr id="16" name="Rectangle 15"/>
-          <p:cNvSpPr/>
-          <p:nvPr/>
-        </p:nvSpPr>
-        <p:spPr>
-          <a:xfrm>
-            <a:off x="6309360" y="4325112"/>
-            <a:ext cx="91440" cy="1609344"/>
-          </a:xfrm>
-          <a:prstGeom prst="rect">
-            <a:avLst/>
-          </a:prstGeom>
-          <a:solidFill>
-            <a:srgbClr val="666670"/>
-          </a:solidFill>
-          <a:ln>
-            <a:noFill/>
-          </a:ln>
-          <a:effectLst/>
-        </p:spPr>
-        <p:style>
-          <a:lnRef idx="1">
-            <a:schemeClr val="accent1"/>
-          </a:lnRef>
-          <a:fillRef idx="3">
-            <a:schemeClr val="accent1"/>
-          </a:fillRef>
-          <a:effectRef idx="2">
-            <a:schemeClr val="accent1"/>
-          </a:effectRef>
-          <a:fontRef idx="minor">
-            <a:schemeClr val="lt1"/>
-          </a:fontRef>
-        </p:style>
-        <p:txBody>
-          <a:bodyPr rtlCol="0" anchor="ctr"/>
-          <a:lstStyle/>
-          <a:p>
-            <a:pPr algn="ctr"/>
-          </a:p>
-        </p:txBody>
-      </p:sp>
-      <p:sp>
-        <p:nvSpPr>
-          <p:cNvPr id="17" name="TextBox 16"/>
-          <p:cNvSpPr txBox="1"/>
-          <p:nvPr/>
-        </p:nvSpPr>
-        <p:spPr>
-          <a:xfrm>
-            <a:off x="6656832" y="4343400"/>
-            <a:ext cx="4754880" cy="1572768"/>
-          </a:xfrm>
-          <a:prstGeom prst="rect">
-            <a:avLst/>
-          </a:prstGeom>
-          <a:noFill/>
-        </p:spPr>
-        <p:txBody>
-          <a:bodyPr wrap="square">
-            <a:spAutoFit/>
-          </a:bodyPr>
-          <a:lstStyle/>
-          <a:p>
-            <a:r>
-              <a:rPr sz="1250" b="1">
-                <a:solidFill>
-                  <a:srgbClr val="666670"/>
-                </a:solidFill>
-                <a:latin typeface="맑은 고딕"/>
-              </a:rPr>
-              <a:t>🎲 확률 예측</a:t>
-            </a:r>
-          </a:p>
-          <a:p>
-            <a:pPr>
-              <a:spcBef>
-                <a:spcPts val="200"/>
-              </a:spcBef>
-            </a:pPr>
-            <a:r>
-              <a:rPr sz="2200" b="1">
-                <a:solidFill>
-                  <a:srgbClr val="1A1A1E"/>
-                </a:solidFill>
-                <a:latin typeface="맑은 고딕"/>
-              </a:rPr>
-              <a:t>DeepAR</a:t>
-            </a:r>
-          </a:p>
-          <a:p>
-            <a:pPr>
-              <a:spcBef>
-                <a:spcPts val="500"/>
-              </a:spcBef>
-            </a:pPr>
-            <a:r>
-              <a:rPr sz="1250" b="0">
-                <a:solidFill>
-                  <a:srgbClr val="666670"/>
-                </a:solidFill>
-                <a:latin typeface="맑은 고딕"/>
-              </a:rPr>
-              <a:t>점 예측이 아니라 분포를 예측 — 불확실성·리스크까지 함께 제공.</a:t>
-            </a:r>
-          </a:p>
-        </p:txBody>
-      </p:sp>
-      <p:sp>
-        <p:nvSpPr>
-          <p:cNvPr id="18" name="TextBox 17"/>
+              <a:t>LLM 에이전트가 계정별 맞춤 태그·콘텐츠 제안, 성과 피드백으로 자동 학습</a:t>
+            </a:r>
+          </a:p>
+        </p:txBody>
+      </p:sp>
+      <p:sp>
+        <p:nvSpPr>
+          <p:cNvPr id="9" name="TextBox 8"/>
           <p:cNvSpPr txBox="1"/>
           <p:nvPr/>
         </p:nvSpPr>
@@ -14599,7 +14211,7 @@
       </p:sp>
       <p:sp>
         <p:nvSpPr>
-          <p:cNvPr id="19" name="TextBox 18"/>
+          <p:cNvPr id="10" name="TextBox 9"/>
           <p:cNvSpPr txBox="1"/>
           <p:nvPr/>
         </p:nvSpPr>
@@ -14679,7 +14291,7 @@
                 </a:solidFill>
                 <a:latin typeface="Segoe UI"/>
               </a:rPr>
-              <a:t>07 · RAG</a:t>
+              <a:t>07 · ARCHITECTURE</a:t>
             </a:r>
           </a:p>
         </p:txBody>
@@ -14713,7 +14325,7 @@
                 </a:solidFill>
                 <a:latin typeface="맑은 고딕"/>
               </a:rPr>
-              <a:t>RAG — 검색으로 보강한 LLM</a:t>
+              <a:t>기능을 떠받치는 시스템 아키텍처</a:t>
             </a:r>
           </a:p>
         </p:txBody>
@@ -14764,141 +14376,18 @@
       </p:sp>
       <p:sp>
         <p:nvSpPr>
-          <p:cNvPr id="5" name="TextBox 4"/>
-          <p:cNvSpPr txBox="1"/>
-          <p:nvPr/>
-        </p:nvSpPr>
-        <p:spPr>
-          <a:xfrm>
-            <a:off x="658368" y="1444752"/>
-            <a:ext cx="10881360" cy="457200"/>
-          </a:xfrm>
-          <a:prstGeom prst="rect">
-            <a:avLst/>
-          </a:prstGeom>
-          <a:noFill/>
-        </p:spPr>
-        <p:txBody>
-          <a:bodyPr wrap="square">
-            <a:spAutoFit/>
-          </a:bodyPr>
-          <a:lstStyle/>
-          <a:p>
-            <a:r>
-              <a:rPr sz="1700" b="1">
-                <a:solidFill>
-                  <a:srgbClr val="1A1A1E"/>
-                </a:solidFill>
-                <a:latin typeface="맑은 고딕"/>
-              </a:rPr>
-              <a:t>LLM은 똑똑하지만 '우리 데이터'와 '최신 트렌드'를 모른다. RAG는 검색해서 그 빈틈을 채운다.</a:t>
-            </a:r>
-          </a:p>
-        </p:txBody>
-      </p:sp>
-      <p:sp>
-        <p:nvSpPr>
-          <p:cNvPr id="6" name="Rounded Rectangle 5"/>
+          <p:cNvPr id="5" name="Rounded Rectangle 4"/>
           <p:cNvSpPr/>
           <p:nvPr/>
         </p:nvSpPr>
         <p:spPr>
           <a:xfrm>
-            <a:off x="658368" y="2011680"/>
-            <a:ext cx="10881360" cy="749808"/>
+            <a:off x="658368" y="2331720"/>
+            <a:ext cx="1927555" cy="2057400"/>
           </a:xfrm>
           <a:prstGeom prst="roundRect">
             <a:avLst>
-              <a:gd name="adj" fmla="val 12000"/>
-            </a:avLst>
-          </a:prstGeom>
-          <a:solidFill>
-            <a:srgbClr val="FBE9F1"/>
-          </a:solidFill>
-          <a:ln>
-            <a:noFill/>
-          </a:ln>
-          <a:effectLst/>
-        </p:spPr>
-        <p:style>
-          <a:lnRef idx="1">
-            <a:schemeClr val="accent1"/>
-          </a:lnRef>
-          <a:fillRef idx="3">
-            <a:schemeClr val="accent1"/>
-          </a:fillRef>
-          <a:effectRef idx="2">
-            <a:schemeClr val="accent1"/>
-          </a:effectRef>
-          <a:fontRef idx="minor">
-            <a:schemeClr val="lt1"/>
-          </a:fontRef>
-        </p:style>
-        <p:txBody>
-          <a:bodyPr rtlCol="0" anchor="ctr"/>
-          <a:lstStyle/>
-          <a:p>
-            <a:pPr algn="ctr"/>
-          </a:p>
-        </p:txBody>
-      </p:sp>
-      <p:sp>
-        <p:nvSpPr>
-          <p:cNvPr id="7" name="TextBox 6"/>
-          <p:cNvSpPr txBox="1"/>
-          <p:nvPr/>
-        </p:nvSpPr>
-        <p:spPr>
-          <a:xfrm>
-            <a:off x="914400" y="2011680"/>
-            <a:ext cx="10424160" cy="749808"/>
-          </a:xfrm>
-          <a:prstGeom prst="rect">
-            <a:avLst/>
-          </a:prstGeom>
-          <a:noFill/>
-        </p:spPr>
-        <p:txBody>
-          <a:bodyPr wrap="square" anchor="ctr">
-            <a:spAutoFit/>
-          </a:bodyPr>
-          <a:lstStyle/>
-          <a:p>
-            <a:r>
-              <a:rPr sz="1350" b="1">
-                <a:solidFill>
-                  <a:srgbClr val="E1306C"/>
-                </a:solidFill>
-                <a:latin typeface="맑은 고딕"/>
-              </a:rPr>
-              <a:t>💡 비유   </a:t>
-            </a:r>
-            <a:r>
-              <a:rPr sz="1350" b="0">
-                <a:solidFill>
-                  <a:srgbClr val="1A1A1E"/>
-                </a:solidFill>
-                <a:latin typeface="맑은 고딕"/>
-              </a:rPr>
-              <a:t>오픈북 시험 — 통째로 외우는 대신, 질문이 오면 관련 자료를 찾아 펴 보고 답한다.</a:t>
-            </a:r>
-          </a:p>
-        </p:txBody>
-      </p:sp>
-      <p:sp>
-        <p:nvSpPr>
-          <p:cNvPr id="8" name="Rounded Rectangle 7"/>
-          <p:cNvSpPr/>
-          <p:nvPr/>
-        </p:nvSpPr>
-        <p:spPr>
-          <a:xfrm>
-            <a:off x="658368" y="3063240"/>
-            <a:ext cx="3444240" cy="2514600"/>
-          </a:xfrm>
-          <a:prstGeom prst="roundRect">
-            <a:avLst>
-              <a:gd name="adj" fmla="val 7000"/>
+              <a:gd name="adj" fmla="val 8000"/>
             </a:avLst>
           </a:prstGeom>
           <a:solidFill>
@@ -14935,120 +14424,208 @@
       </p:sp>
       <p:sp>
         <p:nvSpPr>
+          <p:cNvPr id="6" name="Rectangle 5"/>
+          <p:cNvSpPr/>
+          <p:nvPr/>
+        </p:nvSpPr>
+        <p:spPr>
+          <a:xfrm>
+            <a:off x="658368" y="2331720"/>
+            <a:ext cx="1927555" cy="109728"/>
+          </a:xfrm>
+          <a:prstGeom prst="rect">
+            <a:avLst/>
+          </a:prstGeom>
+          <a:solidFill>
+            <a:srgbClr val="E1306C"/>
+          </a:solidFill>
+          <a:ln>
+            <a:noFill/>
+          </a:ln>
+          <a:effectLst/>
+        </p:spPr>
+        <p:style>
+          <a:lnRef idx="1">
+            <a:schemeClr val="accent1"/>
+          </a:lnRef>
+          <a:fillRef idx="3">
+            <a:schemeClr val="accent1"/>
+          </a:fillRef>
+          <a:effectRef idx="2">
+            <a:schemeClr val="accent1"/>
+          </a:effectRef>
+          <a:fontRef idx="minor">
+            <a:schemeClr val="lt1"/>
+          </a:fontRef>
+        </p:style>
+        <p:txBody>
+          <a:bodyPr rtlCol="0" anchor="ctr"/>
+          <a:lstStyle/>
+          <a:p>
+            <a:pPr algn="ctr"/>
+          </a:p>
+        </p:txBody>
+      </p:sp>
+      <p:sp>
+        <p:nvSpPr>
+          <p:cNvPr id="7" name="TextBox 6"/>
+          <p:cNvSpPr txBox="1"/>
+          <p:nvPr/>
+        </p:nvSpPr>
+        <p:spPr>
+          <a:xfrm>
+            <a:off x="841248" y="2569464"/>
+            <a:ext cx="1561795" cy="365760"/>
+          </a:xfrm>
+          <a:prstGeom prst="rect">
+            <a:avLst/>
+          </a:prstGeom>
+          <a:noFill/>
+        </p:spPr>
+        <p:txBody>
+          <a:bodyPr wrap="square">
+            <a:spAutoFit/>
+          </a:bodyPr>
+          <a:lstStyle/>
+          <a:p>
+            <a:r>
+              <a:rPr sz="1500" b="1">
+                <a:solidFill>
+                  <a:srgbClr val="E1306C"/>
+                </a:solidFill>
+                <a:latin typeface="Segoe UI"/>
+              </a:rPr>
+              <a:t>01</a:t>
+            </a:r>
+          </a:p>
+        </p:txBody>
+      </p:sp>
+      <p:sp>
+        <p:nvSpPr>
+          <p:cNvPr id="8" name="TextBox 7"/>
+          <p:cNvSpPr txBox="1"/>
+          <p:nvPr/>
+        </p:nvSpPr>
+        <p:spPr>
+          <a:xfrm>
+            <a:off x="841248" y="3008376"/>
+            <a:ext cx="1561795" cy="548640"/>
+          </a:xfrm>
+          <a:prstGeom prst="rect">
+            <a:avLst/>
+          </a:prstGeom>
+          <a:noFill/>
+        </p:spPr>
+        <p:txBody>
+          <a:bodyPr wrap="square">
+            <a:spAutoFit/>
+          </a:bodyPr>
+          <a:lstStyle/>
+          <a:p>
+            <a:r>
+              <a:rPr sz="1400" b="1">
+                <a:solidFill>
+                  <a:srgbClr val="1A1A1E"/>
+                </a:solidFill>
+                <a:latin typeface="맑은 고딕"/>
+              </a:rPr>
+              <a:t>데이터 수집</a:t>
+            </a:r>
+          </a:p>
+        </p:txBody>
+      </p:sp>
+      <p:sp>
+        <p:nvSpPr>
           <p:cNvPr id="9" name="TextBox 8"/>
           <p:cNvSpPr txBox="1"/>
           <p:nvPr/>
         </p:nvSpPr>
         <p:spPr>
           <a:xfrm>
-            <a:off x="914400" y="3282696"/>
-            <a:ext cx="2932176" cy="640080"/>
-          </a:xfrm>
-          <a:prstGeom prst="rect">
-            <a:avLst/>
-          </a:prstGeom>
-          <a:noFill/>
-        </p:spPr>
-        <p:txBody>
-          <a:bodyPr wrap="square">
-            <a:spAutoFit/>
-          </a:bodyPr>
-          <a:lstStyle/>
-          <a:p>
-            <a:r>
-              <a:rPr sz="3000" b="0">
-                <a:solidFill>
-                  <a:srgbClr val="1A1A1E"/>
-                </a:solidFill>
-                <a:latin typeface="맑은 고딕"/>
-              </a:rPr>
-              <a:t>🔎</a:t>
-            </a:r>
-          </a:p>
-        </p:txBody>
-      </p:sp>
-      <p:sp>
-        <p:nvSpPr>
-          <p:cNvPr id="10" name="TextBox 9"/>
-          <p:cNvSpPr txBox="1"/>
-          <p:nvPr/>
-        </p:nvSpPr>
-        <p:spPr>
-          <a:xfrm>
-            <a:off x="914400" y="3995928"/>
-            <a:ext cx="2932176" cy="457200"/>
-          </a:xfrm>
-          <a:prstGeom prst="rect">
-            <a:avLst/>
-          </a:prstGeom>
-          <a:noFill/>
-        </p:spPr>
-        <p:txBody>
-          <a:bodyPr wrap="square">
-            <a:spAutoFit/>
-          </a:bodyPr>
-          <a:lstStyle/>
-          <a:p>
-            <a:r>
-              <a:rPr sz="1550" b="1">
-                <a:solidFill>
-                  <a:srgbClr val="E1306C"/>
-                </a:solidFill>
-                <a:latin typeface="맑은 고딕"/>
-              </a:rPr>
-              <a:t>검색 (Retrieve)</a:t>
-            </a:r>
-          </a:p>
-        </p:txBody>
-      </p:sp>
-      <p:sp>
-        <p:nvSpPr>
-          <p:cNvPr id="11" name="TextBox 10"/>
-          <p:cNvSpPr txBox="1"/>
-          <p:nvPr/>
-        </p:nvSpPr>
-        <p:spPr>
-          <a:xfrm>
-            <a:off x="914400" y="4434840"/>
-            <a:ext cx="2932176" cy="1051560"/>
-          </a:xfrm>
-          <a:prstGeom prst="rect">
-            <a:avLst/>
-          </a:prstGeom>
-          <a:noFill/>
-        </p:spPr>
-        <p:txBody>
-          <a:bodyPr wrap="square">
-            <a:spAutoFit/>
-          </a:bodyPr>
-          <a:lstStyle/>
-          <a:p>
-            <a:r>
-              <a:rPr sz="1250" b="0">
+            <a:off x="841248" y="3520440"/>
+            <a:ext cx="1561795" cy="777240"/>
+          </a:xfrm>
+          <a:prstGeom prst="rect">
+            <a:avLst/>
+          </a:prstGeom>
+          <a:noFill/>
+        </p:spPr>
+        <p:txBody>
+          <a:bodyPr wrap="square">
+            <a:spAutoFit/>
+          </a:bodyPr>
+          <a:lstStyle/>
+          <a:p>
+            <a:r>
+              <a:rPr sz="1050" b="0">
                 <a:solidFill>
                   <a:srgbClr val="666670"/>
                 </a:solidFill>
                 <a:latin typeface="맑은 고딕"/>
               </a:rPr>
-              <a:t>트렌드 리포트·과거 캠페인 성과를 벡터DB에 임베딩해 두고, 질문과 유사한 문서를 검색.</a:t>
-            </a:r>
-          </a:p>
-        </p:txBody>
-      </p:sp>
-      <p:sp>
-        <p:nvSpPr>
-          <p:cNvPr id="12" name="Rounded Rectangle 11"/>
+              <a:t>네이버 데이터랩 · 인스타그램 API · 일별 패널</a:t>
+            </a:r>
+          </a:p>
+        </p:txBody>
+      </p:sp>
+      <p:sp>
+        <p:nvSpPr>
+          <p:cNvPr id="10" name="Right Arrow 9"/>
           <p:cNvSpPr/>
           <p:nvPr/>
         </p:nvSpPr>
         <p:spPr>
           <a:xfrm>
-            <a:off x="4376928" y="3063240"/>
-            <a:ext cx="3444240" cy="2514600"/>
+            <a:off x="2567635" y="3268980"/>
+            <a:ext cx="347472" cy="182880"/>
+          </a:xfrm>
+          <a:prstGeom prst="rightArrow">
+            <a:avLst/>
+          </a:prstGeom>
+          <a:solidFill>
+            <a:srgbClr val="9A9AA2"/>
+          </a:solidFill>
+          <a:ln>
+            <a:noFill/>
+          </a:ln>
+          <a:effectLst/>
+        </p:spPr>
+        <p:style>
+          <a:lnRef idx="1">
+            <a:schemeClr val="accent1"/>
+          </a:lnRef>
+          <a:fillRef idx="3">
+            <a:schemeClr val="accent1"/>
+          </a:fillRef>
+          <a:effectRef idx="2">
+            <a:schemeClr val="accent1"/>
+          </a:effectRef>
+          <a:fontRef idx="minor">
+            <a:schemeClr val="lt1"/>
+          </a:fontRef>
+        </p:style>
+        <p:txBody>
+          <a:bodyPr rtlCol="0" anchor="ctr"/>
+          <a:lstStyle/>
+          <a:p>
+            <a:pPr algn="ctr"/>
+          </a:p>
+        </p:txBody>
+      </p:sp>
+      <p:sp>
+        <p:nvSpPr>
+          <p:cNvPr id="11" name="Rounded Rectangle 10"/>
+          <p:cNvSpPr/>
+          <p:nvPr/>
+        </p:nvSpPr>
+        <p:spPr>
+          <a:xfrm>
+            <a:off x="2896819" y="2331720"/>
+            <a:ext cx="1927555" cy="2057400"/>
           </a:xfrm>
           <a:prstGeom prst="roundRect">
             <a:avLst>
-              <a:gd name="adj" fmla="val 7000"/>
+              <a:gd name="adj" fmla="val 8000"/>
             </a:avLst>
           </a:prstGeom>
           <a:solidFill>
@@ -15085,68 +14662,112 @@
       </p:sp>
       <p:sp>
         <p:nvSpPr>
+          <p:cNvPr id="12" name="Rectangle 11"/>
+          <p:cNvSpPr/>
+          <p:nvPr/>
+        </p:nvSpPr>
+        <p:spPr>
+          <a:xfrm>
+            <a:off x="2896819" y="2331720"/>
+            <a:ext cx="1927555" cy="109728"/>
+          </a:xfrm>
+          <a:prstGeom prst="rect">
+            <a:avLst/>
+          </a:prstGeom>
+          <a:solidFill>
+            <a:srgbClr val="6A3DB8"/>
+          </a:solidFill>
+          <a:ln>
+            <a:noFill/>
+          </a:ln>
+          <a:effectLst/>
+        </p:spPr>
+        <p:style>
+          <a:lnRef idx="1">
+            <a:schemeClr val="accent1"/>
+          </a:lnRef>
+          <a:fillRef idx="3">
+            <a:schemeClr val="accent1"/>
+          </a:fillRef>
+          <a:effectRef idx="2">
+            <a:schemeClr val="accent1"/>
+          </a:effectRef>
+          <a:fontRef idx="minor">
+            <a:schemeClr val="lt1"/>
+          </a:fontRef>
+        </p:style>
+        <p:txBody>
+          <a:bodyPr rtlCol="0" anchor="ctr"/>
+          <a:lstStyle/>
+          <a:p>
+            <a:pPr algn="ctr"/>
+          </a:p>
+        </p:txBody>
+      </p:sp>
+      <p:sp>
+        <p:nvSpPr>
           <p:cNvPr id="13" name="TextBox 12"/>
           <p:cNvSpPr txBox="1"/>
           <p:nvPr/>
         </p:nvSpPr>
         <p:spPr>
           <a:xfrm>
-            <a:off x="4632960" y="3282696"/>
-            <a:ext cx="2932176" cy="640080"/>
-          </a:xfrm>
-          <a:prstGeom prst="rect">
-            <a:avLst/>
-          </a:prstGeom>
-          <a:noFill/>
-        </p:spPr>
-        <p:txBody>
-          <a:bodyPr wrap="square">
-            <a:spAutoFit/>
-          </a:bodyPr>
-          <a:lstStyle/>
-          <a:p>
-            <a:r>
-              <a:rPr sz="3000" b="0">
+            <a:off x="3079699" y="2569464"/>
+            <a:ext cx="1561795" cy="365760"/>
+          </a:xfrm>
+          <a:prstGeom prst="rect">
+            <a:avLst/>
+          </a:prstGeom>
+          <a:noFill/>
+        </p:spPr>
+        <p:txBody>
+          <a:bodyPr wrap="square">
+            <a:spAutoFit/>
+          </a:bodyPr>
+          <a:lstStyle/>
+          <a:p>
+            <a:r>
+              <a:rPr sz="1500" b="1">
+                <a:solidFill>
+                  <a:srgbClr val="6A3DB8"/>
+                </a:solidFill>
+                <a:latin typeface="Segoe UI"/>
+              </a:rPr>
+              <a:t>02</a:t>
+            </a:r>
+          </a:p>
+        </p:txBody>
+      </p:sp>
+      <p:sp>
+        <p:nvSpPr>
+          <p:cNvPr id="14" name="TextBox 13"/>
+          <p:cNvSpPr txBox="1"/>
+          <p:nvPr/>
+        </p:nvSpPr>
+        <p:spPr>
+          <a:xfrm>
+            <a:off x="3079699" y="3008376"/>
+            <a:ext cx="1561795" cy="548640"/>
+          </a:xfrm>
+          <a:prstGeom prst="rect">
+            <a:avLst/>
+          </a:prstGeom>
+          <a:noFill/>
+        </p:spPr>
+        <p:txBody>
+          <a:bodyPr wrap="square">
+            <a:spAutoFit/>
+          </a:bodyPr>
+          <a:lstStyle/>
+          <a:p>
+            <a:r>
+              <a:rPr sz="1400" b="1">
                 <a:solidFill>
                   <a:srgbClr val="1A1A1E"/>
                 </a:solidFill>
                 <a:latin typeface="맑은 고딕"/>
               </a:rPr>
-              <a:t>➕</a:t>
-            </a:r>
-          </a:p>
-        </p:txBody>
-      </p:sp>
-      <p:sp>
-        <p:nvSpPr>
-          <p:cNvPr id="14" name="TextBox 13"/>
-          <p:cNvSpPr txBox="1"/>
-          <p:nvPr/>
-        </p:nvSpPr>
-        <p:spPr>
-          <a:xfrm>
-            <a:off x="4632960" y="3995928"/>
-            <a:ext cx="2932176" cy="457200"/>
-          </a:xfrm>
-          <a:prstGeom prst="rect">
-            <a:avLst/>
-          </a:prstGeom>
-          <a:noFill/>
-        </p:spPr>
-        <p:txBody>
-          <a:bodyPr wrap="square">
-            <a:spAutoFit/>
-          </a:bodyPr>
-          <a:lstStyle/>
-          <a:p>
-            <a:r>
-              <a:rPr sz="1550" b="1">
-                <a:solidFill>
-                  <a:srgbClr val="E1306C"/>
-                </a:solidFill>
-                <a:latin typeface="맑은 고딕"/>
-              </a:rPr>
-              <a:t>보강 (Augment)</a:t>
+              <a:t>시계열 예측</a:t>
             </a:r>
           </a:p>
         </p:txBody>
@@ -15159,46 +14780,90 @@
         </p:nvSpPr>
         <p:spPr>
           <a:xfrm>
-            <a:off x="4632960" y="4434840"/>
-            <a:ext cx="2932176" cy="1051560"/>
-          </a:xfrm>
-          <a:prstGeom prst="rect">
-            <a:avLst/>
-          </a:prstGeom>
-          <a:noFill/>
-        </p:spPr>
-        <p:txBody>
-          <a:bodyPr wrap="square">
-            <a:spAutoFit/>
-          </a:bodyPr>
-          <a:lstStyle/>
-          <a:p>
-            <a:r>
-              <a:rPr sz="1250" b="0">
+            <a:off x="3079699" y="3520440"/>
+            <a:ext cx="1561795" cy="777240"/>
+          </a:xfrm>
+          <a:prstGeom prst="rect">
+            <a:avLst/>
+          </a:prstGeom>
+          <a:noFill/>
+        </p:spPr>
+        <p:txBody>
+          <a:bodyPr wrap="square">
+            <a:spAutoFit/>
+          </a:bodyPr>
+          <a:lstStyle/>
+          <a:p>
+            <a:r>
+              <a:rPr sz="1050" b="0">
                 <a:solidFill>
                   <a:srgbClr val="666670"/>
                 </a:solidFill>
                 <a:latin typeface="맑은 고딕"/>
               </a:rPr>
-              <a:t>검색한 근거를 프롬프트에 주입 — LLM이 '추측' 대신 '근거'로 답하게 함.</a:t>
-            </a:r>
-          </a:p>
-        </p:txBody>
-      </p:sp>
-      <p:sp>
-        <p:nvSpPr>
-          <p:cNvPr id="16" name="Rounded Rectangle 15"/>
+              <a:t>SARIMA · LSTM · TFT 앙상블로 14일 전망</a:t>
+            </a:r>
+          </a:p>
+        </p:txBody>
+      </p:sp>
+      <p:sp>
+        <p:nvSpPr>
+          <p:cNvPr id="16" name="Right Arrow 15"/>
           <p:cNvSpPr/>
           <p:nvPr/>
         </p:nvSpPr>
         <p:spPr>
           <a:xfrm>
-            <a:off x="8095488" y="3063240"/>
-            <a:ext cx="3444240" cy="2514600"/>
+            <a:off x="4806086" y="3268980"/>
+            <a:ext cx="347472" cy="182880"/>
+          </a:xfrm>
+          <a:prstGeom prst="rightArrow">
+            <a:avLst/>
+          </a:prstGeom>
+          <a:solidFill>
+            <a:srgbClr val="9A9AA2"/>
+          </a:solidFill>
+          <a:ln>
+            <a:noFill/>
+          </a:ln>
+          <a:effectLst/>
+        </p:spPr>
+        <p:style>
+          <a:lnRef idx="1">
+            <a:schemeClr val="accent1"/>
+          </a:lnRef>
+          <a:fillRef idx="3">
+            <a:schemeClr val="accent1"/>
+          </a:fillRef>
+          <a:effectRef idx="2">
+            <a:schemeClr val="accent1"/>
+          </a:effectRef>
+          <a:fontRef idx="minor">
+            <a:schemeClr val="lt1"/>
+          </a:fontRef>
+        </p:style>
+        <p:txBody>
+          <a:bodyPr rtlCol="0" anchor="ctr"/>
+          <a:lstStyle/>
+          <a:p>
+            <a:pPr algn="ctr"/>
+          </a:p>
+        </p:txBody>
+      </p:sp>
+      <p:sp>
+        <p:nvSpPr>
+          <p:cNvPr id="17" name="Rounded Rectangle 16"/>
+          <p:cNvSpPr/>
+          <p:nvPr/>
+        </p:nvSpPr>
+        <p:spPr>
+          <a:xfrm>
+            <a:off x="5135270" y="2331720"/>
+            <a:ext cx="1927555" cy="2057400"/>
           </a:xfrm>
           <a:prstGeom prst="roundRect">
             <a:avLst>
-              <a:gd name="adj" fmla="val 7000"/>
+              <a:gd name="adj" fmla="val 8000"/>
             </a:avLst>
           </a:prstGeom>
           <a:solidFill>
@@ -15235,121 +14900,17 @@
       </p:sp>
       <p:sp>
         <p:nvSpPr>
-          <p:cNvPr id="17" name="TextBox 16"/>
-          <p:cNvSpPr txBox="1"/>
-          <p:nvPr/>
-        </p:nvSpPr>
-        <p:spPr>
-          <a:xfrm>
-            <a:off x="8351520" y="3282696"/>
-            <a:ext cx="2932176" cy="640080"/>
-          </a:xfrm>
-          <a:prstGeom prst="rect">
-            <a:avLst/>
-          </a:prstGeom>
-          <a:noFill/>
-        </p:spPr>
-        <p:txBody>
-          <a:bodyPr wrap="square">
-            <a:spAutoFit/>
-          </a:bodyPr>
-          <a:lstStyle/>
-          <a:p>
-            <a:r>
-              <a:rPr sz="3000" b="0">
-                <a:solidFill>
-                  <a:srgbClr val="1A1A1E"/>
-                </a:solidFill>
-                <a:latin typeface="맑은 고딕"/>
-              </a:rPr>
-              <a:t>✍️</a:t>
-            </a:r>
-          </a:p>
-        </p:txBody>
-      </p:sp>
-      <p:sp>
-        <p:nvSpPr>
-          <p:cNvPr id="18" name="TextBox 17"/>
-          <p:cNvSpPr txBox="1"/>
-          <p:nvPr/>
-        </p:nvSpPr>
-        <p:spPr>
-          <a:xfrm>
-            <a:off x="8351520" y="3995928"/>
-            <a:ext cx="2932176" cy="457200"/>
-          </a:xfrm>
-          <a:prstGeom prst="rect">
-            <a:avLst/>
-          </a:prstGeom>
-          <a:noFill/>
-        </p:spPr>
-        <p:txBody>
-          <a:bodyPr wrap="square">
-            <a:spAutoFit/>
-          </a:bodyPr>
-          <a:lstStyle/>
-          <a:p>
-            <a:r>
-              <a:rPr sz="1550" b="1">
-                <a:solidFill>
-                  <a:srgbClr val="E1306C"/>
-                </a:solidFill>
-                <a:latin typeface="맑은 고딕"/>
-              </a:rPr>
-              <a:t>생성 (Generate)</a:t>
-            </a:r>
-          </a:p>
-        </p:txBody>
-      </p:sp>
-      <p:sp>
-        <p:nvSpPr>
-          <p:cNvPr id="19" name="TextBox 18"/>
-          <p:cNvSpPr txBox="1"/>
-          <p:nvPr/>
-        </p:nvSpPr>
-        <p:spPr>
-          <a:xfrm>
-            <a:off x="8351520" y="4434840"/>
-            <a:ext cx="2932176" cy="1051560"/>
-          </a:xfrm>
-          <a:prstGeom prst="rect">
-            <a:avLst/>
-          </a:prstGeom>
-          <a:noFill/>
-        </p:spPr>
-        <p:txBody>
-          <a:bodyPr wrap="square">
-            <a:spAutoFit/>
-          </a:bodyPr>
-          <a:lstStyle/>
-          <a:p>
-            <a:r>
-              <a:rPr sz="1250" b="0">
-                <a:solidFill>
-                  <a:srgbClr val="666670"/>
-                </a:solidFill>
-                <a:latin typeface="맑은 고딕"/>
-              </a:rPr>
-              <a:t>근거 기반으로 인사이트·콘텐츠 초안 생성 → 환각↓, 최신성·신뢰성↑.</a:t>
-            </a:r>
-          </a:p>
-        </p:txBody>
-      </p:sp>
-      <p:sp>
-        <p:nvSpPr>
-          <p:cNvPr id="20" name="Rounded Rectangle 19"/>
+          <p:cNvPr id="18" name="Rectangle 17"/>
           <p:cNvSpPr/>
           <p:nvPr/>
         </p:nvSpPr>
         <p:spPr>
           <a:xfrm>
-            <a:off x="658368" y="5806440"/>
-            <a:ext cx="10881360" cy="457200"/>
-          </a:xfrm>
-          <a:prstGeom prst="roundRect">
-            <a:avLst>
-              <a:gd name="adj" fmla="val 30000"/>
-            </a:avLst>
+            <a:off x="5135270" y="2331720"/>
+            <a:ext cx="1927555" cy="109728"/>
+          </a:xfrm>
+          <a:prstGeom prst="rect">
+            <a:avLst/>
           </a:prstGeom>
           <a:solidFill>
             <a:srgbClr val="1A1A1E"/>
@@ -15383,14 +14944,638 @@
       </p:sp>
       <p:sp>
         <p:nvSpPr>
+          <p:cNvPr id="19" name="TextBox 18"/>
+          <p:cNvSpPr txBox="1"/>
+          <p:nvPr/>
+        </p:nvSpPr>
+        <p:spPr>
+          <a:xfrm>
+            <a:off x="5318150" y="2569464"/>
+            <a:ext cx="1561795" cy="365760"/>
+          </a:xfrm>
+          <a:prstGeom prst="rect">
+            <a:avLst/>
+          </a:prstGeom>
+          <a:noFill/>
+        </p:spPr>
+        <p:txBody>
+          <a:bodyPr wrap="square">
+            <a:spAutoFit/>
+          </a:bodyPr>
+          <a:lstStyle/>
+          <a:p>
+            <a:r>
+              <a:rPr sz="1500" b="1">
+                <a:solidFill>
+                  <a:srgbClr val="1A1A1E"/>
+                </a:solidFill>
+                <a:latin typeface="Segoe UI"/>
+              </a:rPr>
+              <a:t>03</a:t>
+            </a:r>
+          </a:p>
+        </p:txBody>
+      </p:sp>
+      <p:sp>
+        <p:nvSpPr>
+          <p:cNvPr id="20" name="TextBox 19"/>
+          <p:cNvSpPr txBox="1"/>
+          <p:nvPr/>
+        </p:nvSpPr>
+        <p:spPr>
+          <a:xfrm>
+            <a:off x="5318150" y="3008376"/>
+            <a:ext cx="1561795" cy="548640"/>
+          </a:xfrm>
+          <a:prstGeom prst="rect">
+            <a:avLst/>
+          </a:prstGeom>
+          <a:noFill/>
+        </p:spPr>
+        <p:txBody>
+          <a:bodyPr wrap="square">
+            <a:spAutoFit/>
+          </a:bodyPr>
+          <a:lstStyle/>
+          <a:p>
+            <a:r>
+              <a:rPr sz="1400" b="1">
+                <a:solidFill>
+                  <a:srgbClr val="1A1A1E"/>
+                </a:solidFill>
+                <a:latin typeface="맑은 고딕"/>
+              </a:rPr>
+              <a:t>지식베이스 (RAG)</a:t>
+            </a:r>
+          </a:p>
+        </p:txBody>
+      </p:sp>
+      <p:sp>
+        <p:nvSpPr>
           <p:cNvPr id="21" name="TextBox 20"/>
           <p:cNvSpPr txBox="1"/>
           <p:nvPr/>
         </p:nvSpPr>
         <p:spPr>
           <a:xfrm>
-            <a:off x="914400" y="5806440"/>
-            <a:ext cx="10424160" cy="457200"/>
+            <a:off x="5318150" y="3520440"/>
+            <a:ext cx="1561795" cy="777240"/>
+          </a:xfrm>
+          <a:prstGeom prst="rect">
+            <a:avLst/>
+          </a:prstGeom>
+          <a:noFill/>
+        </p:spPr>
+        <p:txBody>
+          <a:bodyPr wrap="square">
+            <a:spAutoFit/>
+          </a:bodyPr>
+          <a:lstStyle/>
+          <a:p>
+            <a:r>
+              <a:rPr sz="1050" b="0">
+                <a:solidFill>
+                  <a:srgbClr val="666670"/>
+                </a:solidFill>
+                <a:latin typeface="맑은 고딕"/>
+              </a:rPr>
+              <a:t>벡터DB: 과거 트렌드 · 캠페인 성과 검색</a:t>
+            </a:r>
+          </a:p>
+        </p:txBody>
+      </p:sp>
+      <p:sp>
+        <p:nvSpPr>
+          <p:cNvPr id="22" name="Right Arrow 21"/>
+          <p:cNvSpPr/>
+          <p:nvPr/>
+        </p:nvSpPr>
+        <p:spPr>
+          <a:xfrm>
+            <a:off x="7044537" y="3268980"/>
+            <a:ext cx="347472" cy="182880"/>
+          </a:xfrm>
+          <a:prstGeom prst="rightArrow">
+            <a:avLst/>
+          </a:prstGeom>
+          <a:solidFill>
+            <a:srgbClr val="9A9AA2"/>
+          </a:solidFill>
+          <a:ln>
+            <a:noFill/>
+          </a:ln>
+          <a:effectLst/>
+        </p:spPr>
+        <p:style>
+          <a:lnRef idx="1">
+            <a:schemeClr val="accent1"/>
+          </a:lnRef>
+          <a:fillRef idx="3">
+            <a:schemeClr val="accent1"/>
+          </a:fillRef>
+          <a:effectRef idx="2">
+            <a:schemeClr val="accent1"/>
+          </a:effectRef>
+          <a:fontRef idx="minor">
+            <a:schemeClr val="lt1"/>
+          </a:fontRef>
+        </p:style>
+        <p:txBody>
+          <a:bodyPr rtlCol="0" anchor="ctr"/>
+          <a:lstStyle/>
+          <a:p>
+            <a:pPr algn="ctr"/>
+          </a:p>
+        </p:txBody>
+      </p:sp>
+      <p:sp>
+        <p:nvSpPr>
+          <p:cNvPr id="23" name="Rounded Rectangle 22"/>
+          <p:cNvSpPr/>
+          <p:nvPr/>
+        </p:nvSpPr>
+        <p:spPr>
+          <a:xfrm>
+            <a:off x="7373721" y="2331720"/>
+            <a:ext cx="1927555" cy="2057400"/>
+          </a:xfrm>
+          <a:prstGeom prst="roundRect">
+            <a:avLst>
+              <a:gd name="adj" fmla="val 8000"/>
+            </a:avLst>
+          </a:prstGeom>
+          <a:solidFill>
+            <a:srgbClr val="F6F6F9"/>
+          </a:solidFill>
+          <a:ln w="12700">
+            <a:solidFill>
+              <a:srgbClr val="E6E6EA"/>
+            </a:solidFill>
+          </a:ln>
+          <a:effectLst/>
+        </p:spPr>
+        <p:style>
+          <a:lnRef idx="1">
+            <a:schemeClr val="accent1"/>
+          </a:lnRef>
+          <a:fillRef idx="3">
+            <a:schemeClr val="accent1"/>
+          </a:fillRef>
+          <a:effectRef idx="2">
+            <a:schemeClr val="accent1"/>
+          </a:effectRef>
+          <a:fontRef idx="minor">
+            <a:schemeClr val="lt1"/>
+          </a:fontRef>
+        </p:style>
+        <p:txBody>
+          <a:bodyPr rtlCol="0" anchor="ctr"/>
+          <a:lstStyle/>
+          <a:p>
+            <a:pPr algn="ctr"/>
+          </a:p>
+        </p:txBody>
+      </p:sp>
+      <p:sp>
+        <p:nvSpPr>
+          <p:cNvPr id="24" name="Rectangle 23"/>
+          <p:cNvSpPr/>
+          <p:nvPr/>
+        </p:nvSpPr>
+        <p:spPr>
+          <a:xfrm>
+            <a:off x="7373721" y="2331720"/>
+            <a:ext cx="1927555" cy="109728"/>
+          </a:xfrm>
+          <a:prstGeom prst="rect">
+            <a:avLst/>
+          </a:prstGeom>
+          <a:solidFill>
+            <a:srgbClr val="E1306C"/>
+          </a:solidFill>
+          <a:ln>
+            <a:noFill/>
+          </a:ln>
+          <a:effectLst/>
+        </p:spPr>
+        <p:style>
+          <a:lnRef idx="1">
+            <a:schemeClr val="accent1"/>
+          </a:lnRef>
+          <a:fillRef idx="3">
+            <a:schemeClr val="accent1"/>
+          </a:fillRef>
+          <a:effectRef idx="2">
+            <a:schemeClr val="accent1"/>
+          </a:effectRef>
+          <a:fontRef idx="minor">
+            <a:schemeClr val="lt1"/>
+          </a:fontRef>
+        </p:style>
+        <p:txBody>
+          <a:bodyPr rtlCol="0" anchor="ctr"/>
+          <a:lstStyle/>
+          <a:p>
+            <a:pPr algn="ctr"/>
+          </a:p>
+        </p:txBody>
+      </p:sp>
+      <p:sp>
+        <p:nvSpPr>
+          <p:cNvPr id="25" name="TextBox 24"/>
+          <p:cNvSpPr txBox="1"/>
+          <p:nvPr/>
+        </p:nvSpPr>
+        <p:spPr>
+          <a:xfrm>
+            <a:off x="7556601" y="2569464"/>
+            <a:ext cx="1561795" cy="365760"/>
+          </a:xfrm>
+          <a:prstGeom prst="rect">
+            <a:avLst/>
+          </a:prstGeom>
+          <a:noFill/>
+        </p:spPr>
+        <p:txBody>
+          <a:bodyPr wrap="square">
+            <a:spAutoFit/>
+          </a:bodyPr>
+          <a:lstStyle/>
+          <a:p>
+            <a:r>
+              <a:rPr sz="1500" b="1">
+                <a:solidFill>
+                  <a:srgbClr val="E1306C"/>
+                </a:solidFill>
+                <a:latin typeface="Segoe UI"/>
+              </a:rPr>
+              <a:t>04</a:t>
+            </a:r>
+          </a:p>
+        </p:txBody>
+      </p:sp>
+      <p:sp>
+        <p:nvSpPr>
+          <p:cNvPr id="26" name="TextBox 25"/>
+          <p:cNvSpPr txBox="1"/>
+          <p:nvPr/>
+        </p:nvSpPr>
+        <p:spPr>
+          <a:xfrm>
+            <a:off x="7556601" y="3008376"/>
+            <a:ext cx="1561795" cy="548640"/>
+          </a:xfrm>
+          <a:prstGeom prst="rect">
+            <a:avLst/>
+          </a:prstGeom>
+          <a:noFill/>
+        </p:spPr>
+        <p:txBody>
+          <a:bodyPr wrap="square">
+            <a:spAutoFit/>
+          </a:bodyPr>
+          <a:lstStyle/>
+          <a:p>
+            <a:r>
+              <a:rPr sz="1400" b="1">
+                <a:solidFill>
+                  <a:srgbClr val="1A1A1E"/>
+                </a:solidFill>
+                <a:latin typeface="맑은 고딕"/>
+              </a:rPr>
+              <a:t>LLM 에이전트</a:t>
+            </a:r>
+          </a:p>
+        </p:txBody>
+      </p:sp>
+      <p:sp>
+        <p:nvSpPr>
+          <p:cNvPr id="27" name="TextBox 26"/>
+          <p:cNvSpPr txBox="1"/>
+          <p:nvPr/>
+        </p:nvSpPr>
+        <p:spPr>
+          <a:xfrm>
+            <a:off x="7556601" y="3520440"/>
+            <a:ext cx="1561795" cy="777240"/>
+          </a:xfrm>
+          <a:prstGeom prst="rect">
+            <a:avLst/>
+          </a:prstGeom>
+          <a:noFill/>
+        </p:spPr>
+        <p:txBody>
+          <a:bodyPr wrap="square">
+            <a:spAutoFit/>
+          </a:bodyPr>
+          <a:lstStyle/>
+          <a:p>
+            <a:r>
+              <a:rPr sz="1050" b="0">
+                <a:solidFill>
+                  <a:srgbClr val="666670"/>
+                </a:solidFill>
+                <a:latin typeface="맑은 고딕"/>
+              </a:rPr>
+              <a:t>근거 기반 인사이트 · 콘텐츠 초안 생성</a:t>
+            </a:r>
+          </a:p>
+        </p:txBody>
+      </p:sp>
+      <p:sp>
+        <p:nvSpPr>
+          <p:cNvPr id="28" name="Right Arrow 27"/>
+          <p:cNvSpPr/>
+          <p:nvPr/>
+        </p:nvSpPr>
+        <p:spPr>
+          <a:xfrm>
+            <a:off x="9282988" y="3268980"/>
+            <a:ext cx="347472" cy="182880"/>
+          </a:xfrm>
+          <a:prstGeom prst="rightArrow">
+            <a:avLst/>
+          </a:prstGeom>
+          <a:solidFill>
+            <a:srgbClr val="9A9AA2"/>
+          </a:solidFill>
+          <a:ln>
+            <a:noFill/>
+          </a:ln>
+          <a:effectLst/>
+        </p:spPr>
+        <p:style>
+          <a:lnRef idx="1">
+            <a:schemeClr val="accent1"/>
+          </a:lnRef>
+          <a:fillRef idx="3">
+            <a:schemeClr val="accent1"/>
+          </a:fillRef>
+          <a:effectRef idx="2">
+            <a:schemeClr val="accent1"/>
+          </a:effectRef>
+          <a:fontRef idx="minor">
+            <a:schemeClr val="lt1"/>
+          </a:fontRef>
+        </p:style>
+        <p:txBody>
+          <a:bodyPr rtlCol="0" anchor="ctr"/>
+          <a:lstStyle/>
+          <a:p>
+            <a:pPr algn="ctr"/>
+          </a:p>
+        </p:txBody>
+      </p:sp>
+      <p:sp>
+        <p:nvSpPr>
+          <p:cNvPr id="29" name="Rounded Rectangle 28"/>
+          <p:cNvSpPr/>
+          <p:nvPr/>
+        </p:nvSpPr>
+        <p:spPr>
+          <a:xfrm>
+            <a:off x="9612172" y="2331720"/>
+            <a:ext cx="1927555" cy="2057400"/>
+          </a:xfrm>
+          <a:prstGeom prst="roundRect">
+            <a:avLst>
+              <a:gd name="adj" fmla="val 8000"/>
+            </a:avLst>
+          </a:prstGeom>
+          <a:solidFill>
+            <a:srgbClr val="F6F6F9"/>
+          </a:solidFill>
+          <a:ln w="12700">
+            <a:solidFill>
+              <a:srgbClr val="E6E6EA"/>
+            </a:solidFill>
+          </a:ln>
+          <a:effectLst/>
+        </p:spPr>
+        <p:style>
+          <a:lnRef idx="1">
+            <a:schemeClr val="accent1"/>
+          </a:lnRef>
+          <a:fillRef idx="3">
+            <a:schemeClr val="accent1"/>
+          </a:fillRef>
+          <a:effectRef idx="2">
+            <a:schemeClr val="accent1"/>
+          </a:effectRef>
+          <a:fontRef idx="minor">
+            <a:schemeClr val="lt1"/>
+          </a:fontRef>
+        </p:style>
+        <p:txBody>
+          <a:bodyPr rtlCol="0" anchor="ctr"/>
+          <a:lstStyle/>
+          <a:p>
+            <a:pPr algn="ctr"/>
+          </a:p>
+        </p:txBody>
+      </p:sp>
+      <p:sp>
+        <p:nvSpPr>
+          <p:cNvPr id="30" name="Rectangle 29"/>
+          <p:cNvSpPr/>
+          <p:nvPr/>
+        </p:nvSpPr>
+        <p:spPr>
+          <a:xfrm>
+            <a:off x="9612172" y="2331720"/>
+            <a:ext cx="1927555" cy="109728"/>
+          </a:xfrm>
+          <a:prstGeom prst="rect">
+            <a:avLst/>
+          </a:prstGeom>
+          <a:solidFill>
+            <a:srgbClr val="6A3DB8"/>
+          </a:solidFill>
+          <a:ln>
+            <a:noFill/>
+          </a:ln>
+          <a:effectLst/>
+        </p:spPr>
+        <p:style>
+          <a:lnRef idx="1">
+            <a:schemeClr val="accent1"/>
+          </a:lnRef>
+          <a:fillRef idx="3">
+            <a:schemeClr val="accent1"/>
+          </a:fillRef>
+          <a:effectRef idx="2">
+            <a:schemeClr val="accent1"/>
+          </a:effectRef>
+          <a:fontRef idx="minor">
+            <a:schemeClr val="lt1"/>
+          </a:fontRef>
+        </p:style>
+        <p:txBody>
+          <a:bodyPr rtlCol="0" anchor="ctr"/>
+          <a:lstStyle/>
+          <a:p>
+            <a:pPr algn="ctr"/>
+          </a:p>
+        </p:txBody>
+      </p:sp>
+      <p:sp>
+        <p:nvSpPr>
+          <p:cNvPr id="31" name="TextBox 30"/>
+          <p:cNvSpPr txBox="1"/>
+          <p:nvPr/>
+        </p:nvSpPr>
+        <p:spPr>
+          <a:xfrm>
+            <a:off x="9795052" y="2569464"/>
+            <a:ext cx="1561795" cy="365760"/>
+          </a:xfrm>
+          <a:prstGeom prst="rect">
+            <a:avLst/>
+          </a:prstGeom>
+          <a:noFill/>
+        </p:spPr>
+        <p:txBody>
+          <a:bodyPr wrap="square">
+            <a:spAutoFit/>
+          </a:bodyPr>
+          <a:lstStyle/>
+          <a:p>
+            <a:r>
+              <a:rPr sz="1500" b="1">
+                <a:solidFill>
+                  <a:srgbClr val="6A3DB8"/>
+                </a:solidFill>
+                <a:latin typeface="Segoe UI"/>
+              </a:rPr>
+              <a:t>05</a:t>
+            </a:r>
+          </a:p>
+        </p:txBody>
+      </p:sp>
+      <p:sp>
+        <p:nvSpPr>
+          <p:cNvPr id="32" name="TextBox 31"/>
+          <p:cNvSpPr txBox="1"/>
+          <p:nvPr/>
+        </p:nvSpPr>
+        <p:spPr>
+          <a:xfrm>
+            <a:off x="9795052" y="3008376"/>
+            <a:ext cx="1561795" cy="548640"/>
+          </a:xfrm>
+          <a:prstGeom prst="rect">
+            <a:avLst/>
+          </a:prstGeom>
+          <a:noFill/>
+        </p:spPr>
+        <p:txBody>
+          <a:bodyPr wrap="square">
+            <a:spAutoFit/>
+          </a:bodyPr>
+          <a:lstStyle/>
+          <a:p>
+            <a:r>
+              <a:rPr sz="1400" b="1">
+                <a:solidFill>
+                  <a:srgbClr val="1A1A1E"/>
+                </a:solidFill>
+                <a:latin typeface="맑은 고딕"/>
+              </a:rPr>
+              <a:t>콘텐츠 추천</a:t>
+            </a:r>
+          </a:p>
+        </p:txBody>
+      </p:sp>
+      <p:sp>
+        <p:nvSpPr>
+          <p:cNvPr id="33" name="TextBox 32"/>
+          <p:cNvSpPr txBox="1"/>
+          <p:nvPr/>
+        </p:nvSpPr>
+        <p:spPr>
+          <a:xfrm>
+            <a:off x="9795052" y="3520440"/>
+            <a:ext cx="1561795" cy="777240"/>
+          </a:xfrm>
+          <a:prstGeom prst="rect">
+            <a:avLst/>
+          </a:prstGeom>
+          <a:noFill/>
+        </p:spPr>
+        <p:txBody>
+          <a:bodyPr wrap="square">
+            <a:spAutoFit/>
+          </a:bodyPr>
+          <a:lstStyle/>
+          <a:p>
+            <a:r>
+              <a:rPr sz="1050" b="0">
+                <a:solidFill>
+                  <a:srgbClr val="666670"/>
+                </a:solidFill>
+                <a:latin typeface="맑은 고딕"/>
+              </a:rPr>
+              <a:t>태그 · 타이밍 · 조합 액션 제안</a:t>
+            </a:r>
+          </a:p>
+        </p:txBody>
+      </p:sp>
+      <p:sp>
+        <p:nvSpPr>
+          <p:cNvPr id="34" name="Rounded Rectangle 33"/>
+          <p:cNvSpPr/>
+          <p:nvPr/>
+        </p:nvSpPr>
+        <p:spPr>
+          <a:xfrm>
+            <a:off x="658368" y="4800600"/>
+            <a:ext cx="10881360" cy="603504"/>
+          </a:xfrm>
+          <a:prstGeom prst="roundRect">
+            <a:avLst>
+              <a:gd name="adj" fmla="val 30000"/>
+            </a:avLst>
+          </a:prstGeom>
+          <a:solidFill>
+            <a:srgbClr val="FBE9F1"/>
+          </a:solidFill>
+          <a:ln>
+            <a:noFill/>
+          </a:ln>
+          <a:effectLst/>
+        </p:spPr>
+        <p:style>
+          <a:lnRef idx="1">
+            <a:schemeClr val="accent1"/>
+          </a:lnRef>
+          <a:fillRef idx="3">
+            <a:schemeClr val="accent1"/>
+          </a:fillRef>
+          <a:effectRef idx="2">
+            <a:schemeClr val="accent1"/>
+          </a:effectRef>
+          <a:fontRef idx="minor">
+            <a:schemeClr val="lt1"/>
+          </a:fontRef>
+        </p:style>
+        <p:txBody>
+          <a:bodyPr rtlCol="0" anchor="ctr"/>
+          <a:lstStyle/>
+          <a:p>
+            <a:pPr algn="ctr"/>
+          </a:p>
+        </p:txBody>
+      </p:sp>
+      <p:sp>
+        <p:nvSpPr>
+          <p:cNvPr id="35" name="TextBox 34"/>
+          <p:cNvSpPr txBox="1"/>
+          <p:nvPr/>
+        </p:nvSpPr>
+        <p:spPr>
+          <a:xfrm>
+            <a:off x="932688" y="4800600"/>
+            <a:ext cx="10332720" cy="603504"/>
           </a:xfrm>
           <a:prstGeom prst="rect">
             <a:avLst/>
@@ -15404,29 +15589,29 @@
           <a:lstStyle/>
           <a:p>
             <a:r>
-              <a:rPr sz="1100" b="1">
+              <a:rPr sz="1300" b="1">
                 <a:solidFill>
                   <a:srgbClr val="E1306C"/>
                 </a:solidFill>
-                <a:latin typeface="Segoe UI"/>
-              </a:rPr>
-              <a:t>수식  </a:t>
-            </a:r>
-            <a:r>
-              <a:rPr sz="1300" b="0">
-                <a:solidFill>
-                  <a:srgbClr val="FFFFFF"/>
-                </a:solidFill>
-                <a:latin typeface="Consolas"/>
-              </a:rPr>
-              <a:t>질문 → 검색(top-k 근거) → LLM(근거+질문) → 답변</a:t>
-            </a:r>
-          </a:p>
-        </p:txBody>
-      </p:sp>
-      <p:sp>
-        <p:nvSpPr>
-          <p:cNvPr id="22" name="TextBox 21"/>
+                <a:latin typeface="맑은 고딕"/>
+              </a:rPr>
+              <a:t>↺ 피드백 루프   </a:t>
+            </a:r>
+            <a:r>
+              <a:rPr sz="1250" b="0">
+                <a:solidFill>
+                  <a:srgbClr val="1A1A1E"/>
+                </a:solidFill>
+                <a:latin typeface="맑은 고딕"/>
+              </a:rPr>
+              <a:t>게시 성과를 다시 수집해 예측·추천 모델을 재학습 — 쓸수록 똑똑해지는 서비스.</a:t>
+            </a:r>
+          </a:p>
+        </p:txBody>
+      </p:sp>
+      <p:sp>
+        <p:nvSpPr>
+          <p:cNvPr id="36" name="TextBox 35"/>
           <p:cNvSpPr txBox="1"/>
           <p:nvPr/>
         </p:nvSpPr>
@@ -15460,7 +15645,7 @@
       </p:sp>
       <p:sp>
         <p:nvSpPr>
-          <p:cNvPr id="23" name="TextBox 22"/>
+          <p:cNvPr id="37" name="TextBox 36"/>
           <p:cNvSpPr txBox="1"/>
           <p:nvPr/>
         </p:nvSpPr>
@@ -16014,7 +16199,7 @@
                 </a:solidFill>
                 <a:latin typeface="Segoe UI"/>
               </a:rPr>
-              <a:t>07 · LLM AGENT</a:t>
+              <a:t>07 · VALUE</a:t>
             </a:r>
           </a:p>
         </p:txBody>
@@ -16048,7 +16233,7 @@
                 </a:solidFill>
                 <a:latin typeface="맑은 고딕"/>
               </a:rPr>
-              <a:t>LLM 에이전트 — 분석에서 실행까지</a:t>
+              <a:t>기대 효과 &amp; 차별화</a:t>
             </a:r>
           </a:p>
         </p:txBody>
@@ -16216,7 +16401,7 @@
                 </a:solidFill>
                 <a:latin typeface="맑은 고딕"/>
               </a:rPr>
-              <a:t>에이전트 = LLM + 도구 사용 + 자율 루프. 예측 결과를 받아 사람이 쓸 산출물로 바꾼다.</a:t>
+              <a:t>왜 이 고도화가 돈이 되나 — 마케터의 시간을 줄이고, 선제적으로 움직이게 한다.</a:t>
             </a:r>
           </a:p>
         </p:txBody>
@@ -16255,7 +16440,7 @@
                 </a:solidFill>
                 <a:latin typeface="맑은 고딕"/>
               </a:rPr>
-              <a:t>도구 사용</a:t>
+              <a:t>시간 절감</a:t>
             </a:r>
           </a:p>
           <a:p>
@@ -16271,7 +16456,7 @@
                 </a:solidFill>
                 <a:latin typeface="맑은 고딕"/>
               </a:rPr>
-              <a:t>예측 모델·데이터랩 API를 직접 호출해 최신 수치를 가져옴 (function calling)</a:t>
+              <a:t>트렌드 리서치·콘텐츠 기획을 분 단위로 — 분석·초안 작성을 AI가 대신</a:t>
             </a:r>
           </a:p>
           <a:p>
@@ -16287,7 +16472,7 @@
                 </a:solidFill>
                 <a:latin typeface="맑은 고딕"/>
               </a:rPr>
-              <a:t>자동 인사이트</a:t>
+              <a:t>선제 대응</a:t>
             </a:r>
           </a:p>
           <a:p>
@@ -16303,7 +16488,7 @@
                 </a:solidFill>
                 <a:latin typeface="맑은 고딕"/>
               </a:rPr>
-              <a:t>‘#등산 상승, #피크닉 피크 통과’ 같은 결론을 자연어로 요약·설명</a:t>
+              <a:t>사후 랭킹이 아니라 예측 — 경쟁자보다 먼저 뜨는 태그에 올라탐</a:t>
             </a:r>
           </a:p>
           <a:p>
@@ -16319,7 +16504,7 @@
                 </a:solidFill>
                 <a:latin typeface="맑은 고딕"/>
               </a:rPr>
-              <a:t>콘텐츠 생성</a:t>
+              <a:t>근거 있는 의사결정</a:t>
             </a:r>
           </a:p>
           <a:p>
@@ -16335,7 +16520,7 @@
                 </a:solidFill>
                 <a:latin typeface="맑은 고딕"/>
               </a:rPr>
-              <a:t>추천 태그·게시 타이밍에 맞춘 캡션·기획안 초안 작성</a:t>
+              <a:t>감이 아니라 데이터 + 근거(RAG)로 — 내부 보고·클라이언트 설득이 쉬워짐</a:t>
             </a:r>
           </a:p>
           <a:p>
@@ -16351,7 +16536,7 @@
                 </a:solidFill>
                 <a:latin typeface="맑은 고딕"/>
               </a:rPr>
-              <a:t>사람 확인 게이트</a:t>
+              <a:t>데이터 락인(lock-in)</a:t>
             </a:r>
           </a:p>
           <a:p>
@@ -16367,7 +16552,7 @@
                 </a:solidFill>
                 <a:latin typeface="맑은 고딕"/>
               </a:rPr>
-              <a:t>발행 전 사람이 검수 — 최신 LLM(예: Claude Opus 4.8)도 항상 사람 승인 후 실행</a:t>
+              <a:t>쓸수록 계정별 성과가 쌓여 추천이 정교해지는 선순환 → 이탈 방지</a:t>
             </a:r>
           </a:p>
         </p:txBody>
@@ -16488,7 +16673,7 @@
                 </a:solidFill>
                 <a:latin typeface="Segoe UI"/>
               </a:rPr>
-              <a:t>07 · ARCHITECTURE</a:t>
+              <a:t>08 · CODE</a:t>
             </a:r>
           </a:p>
         </p:txBody>
@@ -16522,7 +16707,7 @@
                 </a:solidFill>
                 <a:latin typeface="맑은 고딕"/>
               </a:rPr>
-              <a:t>적용 아키텍처 — 트렌드 인텔리전스 시스템</a:t>
+              <a:t>핵심 코드 ①  데이터 → 평활화 → 차분</a:t>
             </a:r>
           </a:p>
         </p:txBody>
@@ -16573,27 +16758,57 @@
       </p:sp>
       <p:sp>
         <p:nvSpPr>
-          <p:cNvPr id="5" name="Rounded Rectangle 4"/>
+          <p:cNvPr id="5" name="TextBox 4"/>
+          <p:cNvSpPr txBox="1"/>
+          <p:nvPr/>
+        </p:nvSpPr>
+        <p:spPr>
+          <a:xfrm>
+            <a:off x="731520" y="1371600"/>
+            <a:ext cx="10789920" cy="320040"/>
+          </a:xfrm>
+          <a:prstGeom prst="rect">
+            <a:avLst/>
+          </a:prstGeom>
+          <a:noFill/>
+        </p:spPr>
+        <p:txBody>
+          <a:bodyPr wrap="square">
+            <a:spAutoFit/>
+          </a:bodyPr>
+          <a:lstStyle/>
+          <a:p>
+            <a:r>
+              <a:rPr sz="1350" b="1">
+                <a:solidFill>
+                  <a:srgbClr val="E1306C"/>
+                </a:solidFill>
+                <a:latin typeface="맑은 고딕"/>
+              </a:rPr>
+              <a:t>●  tidy 패널을 날짜×태그 행렬로 (pandas pivot)</a:t>
+            </a:r>
+          </a:p>
+        </p:txBody>
+      </p:sp>
+      <p:sp>
+        <p:nvSpPr>
+          <p:cNvPr id="6" name="Rectangle 5"/>
           <p:cNvSpPr/>
           <p:nvPr/>
         </p:nvSpPr>
         <p:spPr>
           <a:xfrm>
-            <a:off x="658368" y="2331720"/>
-            <a:ext cx="1927555" cy="2057400"/>
-          </a:xfrm>
-          <a:prstGeom prst="roundRect">
-            <a:avLst>
-              <a:gd name="adj" fmla="val 8000"/>
-            </a:avLst>
+            <a:off x="914400" y="1755648"/>
+            <a:ext cx="10424160" cy="457200"/>
+          </a:xfrm>
+          <a:prstGeom prst="rect">
+            <a:avLst/>
           </a:prstGeom>
           <a:solidFill>
-            <a:srgbClr val="F6F6F9"/>
+            <a:srgbClr val="1E1E26"/>
           </a:solidFill>
-          <a:ln w="12700">
-            <a:solidFill>
-              <a:srgbClr val="E6E6EA"/>
-            </a:solidFill>
+          <a:ln>
+            <a:noFill/>
           </a:ln>
           <a:effectLst/>
         </p:spPr>
@@ -16621,20 +16836,88 @@
       </p:sp>
       <p:sp>
         <p:nvSpPr>
-          <p:cNvPr id="6" name="Rectangle 5"/>
+          <p:cNvPr id="7" name="TextBox 6"/>
+          <p:cNvSpPr txBox="1"/>
+          <p:nvPr/>
+        </p:nvSpPr>
+        <p:spPr>
+          <a:xfrm>
+            <a:off x="1143000" y="1847088"/>
+            <a:ext cx="10058400" cy="310896"/>
+          </a:xfrm>
+          <a:prstGeom prst="rect">
+            <a:avLst/>
+          </a:prstGeom>
+          <a:noFill/>
+        </p:spPr>
+        <p:txBody>
+          <a:bodyPr wrap="square">
+            <a:spAutoFit/>
+          </a:bodyPr>
+          <a:lstStyle/>
+          <a:p>
+            <a:r>
+              <a:rPr sz="1200" b="0">
+                <a:solidFill>
+                  <a:srgbClr val="E8E8EE"/>
+                </a:solidFill>
+                <a:latin typeface="Consolas"/>
+              </a:rPr>
+              <a:t>wide = panel.pivot(index="date", columns="hashtag", values="ratio")</a:t>
+            </a:r>
+          </a:p>
+        </p:txBody>
+      </p:sp>
+      <p:sp>
+        <p:nvSpPr>
+          <p:cNvPr id="8" name="TextBox 7"/>
+          <p:cNvSpPr txBox="1"/>
+          <p:nvPr/>
+        </p:nvSpPr>
+        <p:spPr>
+          <a:xfrm>
+            <a:off x="731520" y="2377440"/>
+            <a:ext cx="10789920" cy="320040"/>
+          </a:xfrm>
+          <a:prstGeom prst="rect">
+            <a:avLst/>
+          </a:prstGeom>
+          <a:noFill/>
+        </p:spPr>
+        <p:txBody>
+          <a:bodyPr wrap="square">
+            <a:spAutoFit/>
+          </a:bodyPr>
+          <a:lstStyle/>
+          <a:p>
+            <a:r>
+              <a:rPr sz="1350" b="1">
+                <a:solidFill>
+                  <a:srgbClr val="E1306C"/>
+                </a:solidFill>
+                <a:latin typeface="맑은 고딕"/>
+              </a:rPr>
+              <a:t>●  이동평균 평활화 — 7일 중심 윈도우가 주간 주기를 상쇄</a:t>
+            </a:r>
+          </a:p>
+        </p:txBody>
+      </p:sp>
+      <p:sp>
+        <p:nvSpPr>
+          <p:cNvPr id="9" name="Rectangle 8"/>
           <p:cNvSpPr/>
           <p:nvPr/>
         </p:nvSpPr>
         <p:spPr>
           <a:xfrm>
-            <a:off x="658368" y="2331720"/>
-            <a:ext cx="1927555" cy="109728"/>
+            <a:off x="914400" y="2761488"/>
+            <a:ext cx="10424160" cy="457200"/>
           </a:xfrm>
           <a:prstGeom prst="rect">
             <a:avLst/>
           </a:prstGeom>
           <a:solidFill>
-            <a:srgbClr val="E1306C"/>
+            <a:srgbClr val="1E1E26"/>
           </a:solidFill>
           <a:ln>
             <a:noFill/>
@@ -16665,122 +16948,88 @@
       </p:sp>
       <p:sp>
         <p:nvSpPr>
-          <p:cNvPr id="7" name="TextBox 6"/>
-          <p:cNvSpPr txBox="1"/>
-          <p:nvPr/>
-        </p:nvSpPr>
-        <p:spPr>
-          <a:xfrm>
-            <a:off x="841248" y="2569464"/>
-            <a:ext cx="1561795" cy="365760"/>
-          </a:xfrm>
-          <a:prstGeom prst="rect">
-            <a:avLst/>
-          </a:prstGeom>
-          <a:noFill/>
-        </p:spPr>
-        <p:txBody>
-          <a:bodyPr wrap="square">
-            <a:spAutoFit/>
-          </a:bodyPr>
-          <a:lstStyle/>
-          <a:p>
-            <a:r>
-              <a:rPr sz="1500" b="1">
+          <p:cNvPr id="10" name="TextBox 9"/>
+          <p:cNvSpPr txBox="1"/>
+          <p:nvPr/>
+        </p:nvSpPr>
+        <p:spPr>
+          <a:xfrm>
+            <a:off x="1143000" y="2852928"/>
+            <a:ext cx="10058400" cy="310896"/>
+          </a:xfrm>
+          <a:prstGeom prst="rect">
+            <a:avLst/>
+          </a:prstGeom>
+          <a:noFill/>
+        </p:spPr>
+        <p:txBody>
+          <a:bodyPr wrap="square">
+            <a:spAutoFit/>
+          </a:bodyPr>
+          <a:lstStyle/>
+          <a:p>
+            <a:r>
+              <a:rPr sz="1200" b="0">
+                <a:solidFill>
+                  <a:srgbClr val="E8E8EE"/>
+                </a:solidFill>
+                <a:latin typeface="Consolas"/>
+              </a:rPr>
+              <a:t>ma7 = s.rolling(7, center=True).mean()   # 추세 + 노이즈 제거</a:t>
+            </a:r>
+          </a:p>
+        </p:txBody>
+      </p:sp>
+      <p:sp>
+        <p:nvSpPr>
+          <p:cNvPr id="11" name="TextBox 10"/>
+          <p:cNvSpPr txBox="1"/>
+          <p:nvPr/>
+        </p:nvSpPr>
+        <p:spPr>
+          <a:xfrm>
+            <a:off x="731520" y="3383280"/>
+            <a:ext cx="10789920" cy="320040"/>
+          </a:xfrm>
+          <a:prstGeom prst="rect">
+            <a:avLst/>
+          </a:prstGeom>
+          <a:noFill/>
+        </p:spPr>
+        <p:txBody>
+          <a:bodyPr wrap="square">
+            <a:spAutoFit/>
+          </a:bodyPr>
+          <a:lstStyle/>
+          <a:p>
+            <a:r>
+              <a:rPr sz="1350" b="1">
                 <a:solidFill>
                   <a:srgbClr val="E1306C"/>
                 </a:solidFill>
-                <a:latin typeface="Segoe UI"/>
-              </a:rPr>
-              <a:t>01</a:t>
-            </a:r>
-          </a:p>
-        </p:txBody>
-      </p:sp>
-      <p:sp>
-        <p:nvSpPr>
-          <p:cNvPr id="8" name="TextBox 7"/>
-          <p:cNvSpPr txBox="1"/>
-          <p:nvPr/>
-        </p:nvSpPr>
-        <p:spPr>
-          <a:xfrm>
-            <a:off x="841248" y="3008376"/>
-            <a:ext cx="1561795" cy="548640"/>
-          </a:xfrm>
-          <a:prstGeom prst="rect">
-            <a:avLst/>
-          </a:prstGeom>
-          <a:noFill/>
-        </p:spPr>
-        <p:txBody>
-          <a:bodyPr wrap="square">
-            <a:spAutoFit/>
-          </a:bodyPr>
-          <a:lstStyle/>
-          <a:p>
-            <a:r>
-              <a:rPr sz="1400" b="1">
-                <a:solidFill>
-                  <a:srgbClr val="1A1A1E"/>
-                </a:solidFill>
-                <a:latin typeface="맑은 고딕"/>
-              </a:rPr>
-              <a:t>데이터 수집</a:t>
-            </a:r>
-          </a:p>
-        </p:txBody>
-      </p:sp>
-      <p:sp>
-        <p:nvSpPr>
-          <p:cNvPr id="9" name="TextBox 8"/>
-          <p:cNvSpPr txBox="1"/>
-          <p:nvPr/>
-        </p:nvSpPr>
-        <p:spPr>
-          <a:xfrm>
-            <a:off x="841248" y="3520440"/>
-            <a:ext cx="1561795" cy="777240"/>
-          </a:xfrm>
-          <a:prstGeom prst="rect">
-            <a:avLst/>
-          </a:prstGeom>
-          <a:noFill/>
-        </p:spPr>
-        <p:txBody>
-          <a:bodyPr wrap="square">
-            <a:spAutoFit/>
-          </a:bodyPr>
-          <a:lstStyle/>
-          <a:p>
-            <a:r>
-              <a:rPr sz="1050" b="0">
-                <a:solidFill>
-                  <a:srgbClr val="666670"/>
-                </a:solidFill>
-                <a:latin typeface="맑은 고딕"/>
-              </a:rPr>
-              <a:t>네이버 데이터랩 · 인스타그램 API · 일별 패널</a:t>
-            </a:r>
-          </a:p>
-        </p:txBody>
-      </p:sp>
-      <p:sp>
-        <p:nvSpPr>
-          <p:cNvPr id="10" name="Right Arrow 9"/>
+                <a:latin typeface="맑은 고딕"/>
+              </a:rPr>
+              <a:t>●  1차 차분으로 정상화 (ARIMA의 d=1)</a:t>
+            </a:r>
+          </a:p>
+        </p:txBody>
+      </p:sp>
+      <p:sp>
+        <p:nvSpPr>
+          <p:cNvPr id="12" name="Rectangle 11"/>
           <p:cNvSpPr/>
           <p:nvPr/>
         </p:nvSpPr>
         <p:spPr>
           <a:xfrm>
-            <a:off x="2567635" y="3268980"/>
-            <a:ext cx="347472" cy="182880"/>
-          </a:xfrm>
-          <a:prstGeom prst="rightArrow">
+            <a:off x="914400" y="3767328"/>
+            <a:ext cx="10424160" cy="713232"/>
+          </a:xfrm>
+          <a:prstGeom prst="rect">
             <a:avLst/>
           </a:prstGeom>
           <a:solidFill>
-            <a:srgbClr val="9A9AA2"/>
+            <a:srgbClr val="1E1E26"/>
           </a:solidFill>
           <a:ln>
             <a:noFill/>
@@ -16811,27 +17060,102 @@
       </p:sp>
       <p:sp>
         <p:nvSpPr>
-          <p:cNvPr id="11" name="Rounded Rectangle 10"/>
+          <p:cNvPr id="13" name="TextBox 12"/>
+          <p:cNvSpPr txBox="1"/>
+          <p:nvPr/>
+        </p:nvSpPr>
+        <p:spPr>
+          <a:xfrm>
+            <a:off x="1143000" y="3858768"/>
+            <a:ext cx="10058400" cy="566928"/>
+          </a:xfrm>
+          <a:prstGeom prst="rect">
+            <a:avLst/>
+          </a:prstGeom>
+          <a:noFill/>
+        </p:spPr>
+        <p:txBody>
+          <a:bodyPr wrap="square">
+            <a:spAutoFit/>
+          </a:bodyPr>
+          <a:lstStyle/>
+          <a:p>
+            <a:r>
+              <a:rPr sz="1200" b="0">
+                <a:solidFill>
+                  <a:srgbClr val="E8E8EE"/>
+                </a:solidFill>
+                <a:latin typeface="Consolas"/>
+              </a:rPr>
+              <a:t>diff = s.diff()                          # X_t - X_{t-1}</a:t>
+            </a:r>
+          </a:p>
+          <a:p>
+            <a:r>
+              <a:rPr sz="1200" b="0">
+                <a:solidFill>
+                  <a:srgbClr val="E8E8EE"/>
+                </a:solidFill>
+                <a:latin typeface="Consolas"/>
+              </a:rPr>
+              <a:t>diff.rolling(28).mean()                  # 평균이 0에 붙는지 진단</a:t>
+            </a:r>
+          </a:p>
+        </p:txBody>
+      </p:sp>
+      <p:sp>
+        <p:nvSpPr>
+          <p:cNvPr id="14" name="TextBox 13"/>
+          <p:cNvSpPr txBox="1"/>
+          <p:nvPr/>
+        </p:nvSpPr>
+        <p:spPr>
+          <a:xfrm>
+            <a:off x="731520" y="4645152"/>
+            <a:ext cx="10789920" cy="320040"/>
+          </a:xfrm>
+          <a:prstGeom prst="rect">
+            <a:avLst/>
+          </a:prstGeom>
+          <a:noFill/>
+        </p:spPr>
+        <p:txBody>
+          <a:bodyPr wrap="square">
+            <a:spAutoFit/>
+          </a:bodyPr>
+          <a:lstStyle/>
+          <a:p>
+            <a:r>
+              <a:rPr sz="1350" b="1">
+                <a:solidFill>
+                  <a:srgbClr val="E1306C"/>
+                </a:solidFill>
+                <a:latin typeface="맑은 고딕"/>
+              </a:rPr>
+              <a:t>●  가법 분해 — 추세는 이동평균, 계절은 '같은 요일끼리 평균'</a:t>
+            </a:r>
+          </a:p>
+        </p:txBody>
+      </p:sp>
+      <p:sp>
+        <p:nvSpPr>
+          <p:cNvPr id="15" name="Rectangle 14"/>
           <p:cNvSpPr/>
           <p:nvPr/>
         </p:nvSpPr>
         <p:spPr>
           <a:xfrm>
-            <a:off x="2896819" y="2331720"/>
-            <a:ext cx="1927555" cy="2057400"/>
-          </a:xfrm>
-          <a:prstGeom prst="roundRect">
-            <a:avLst>
-              <a:gd name="adj" fmla="val 8000"/>
-            </a:avLst>
+            <a:off x="914400" y="5029200"/>
+            <a:ext cx="10424160" cy="969264"/>
+          </a:xfrm>
+          <a:prstGeom prst="rect">
+            <a:avLst/>
           </a:prstGeom>
           <a:solidFill>
-            <a:srgbClr val="F6F6F9"/>
+            <a:srgbClr val="1E1E26"/>
           </a:solidFill>
-          <a:ln w="12700">
-            <a:solidFill>
-              <a:srgbClr val="E6E6EA"/>
-            </a:solidFill>
+          <a:ln>
+            <a:noFill/>
           </a:ln>
           <a:effectLst/>
         </p:spPr>
@@ -16859,956 +17183,63 @@
       </p:sp>
       <p:sp>
         <p:nvSpPr>
-          <p:cNvPr id="12" name="Rectangle 11"/>
-          <p:cNvSpPr/>
-          <p:nvPr/>
-        </p:nvSpPr>
-        <p:spPr>
-          <a:xfrm>
-            <a:off x="2896819" y="2331720"/>
-            <a:ext cx="1927555" cy="109728"/>
-          </a:xfrm>
-          <a:prstGeom prst="rect">
-            <a:avLst/>
-          </a:prstGeom>
-          <a:solidFill>
-            <a:srgbClr val="6A3DB8"/>
-          </a:solidFill>
-          <a:ln>
-            <a:noFill/>
-          </a:ln>
-          <a:effectLst/>
-        </p:spPr>
-        <p:style>
-          <a:lnRef idx="1">
-            <a:schemeClr val="accent1"/>
-          </a:lnRef>
-          <a:fillRef idx="3">
-            <a:schemeClr val="accent1"/>
-          </a:fillRef>
-          <a:effectRef idx="2">
-            <a:schemeClr val="accent1"/>
-          </a:effectRef>
-          <a:fontRef idx="minor">
-            <a:schemeClr val="lt1"/>
-          </a:fontRef>
-        </p:style>
-        <p:txBody>
-          <a:bodyPr rtlCol="0" anchor="ctr"/>
-          <a:lstStyle/>
-          <a:p>
-            <a:pPr algn="ctr"/>
-          </a:p>
-        </p:txBody>
-      </p:sp>
-      <p:sp>
-        <p:nvSpPr>
-          <p:cNvPr id="13" name="TextBox 12"/>
-          <p:cNvSpPr txBox="1"/>
-          <p:nvPr/>
-        </p:nvSpPr>
-        <p:spPr>
-          <a:xfrm>
-            <a:off x="3079699" y="2569464"/>
-            <a:ext cx="1561795" cy="365760"/>
-          </a:xfrm>
-          <a:prstGeom prst="rect">
-            <a:avLst/>
-          </a:prstGeom>
-          <a:noFill/>
-        </p:spPr>
-        <p:txBody>
-          <a:bodyPr wrap="square">
-            <a:spAutoFit/>
-          </a:bodyPr>
-          <a:lstStyle/>
-          <a:p>
-            <a:r>
-              <a:rPr sz="1500" b="1">
-                <a:solidFill>
-                  <a:srgbClr val="6A3DB8"/>
-                </a:solidFill>
-                <a:latin typeface="Segoe UI"/>
-              </a:rPr>
-              <a:t>02</a:t>
-            </a:r>
-          </a:p>
-        </p:txBody>
-      </p:sp>
-      <p:sp>
-        <p:nvSpPr>
-          <p:cNvPr id="14" name="TextBox 13"/>
-          <p:cNvSpPr txBox="1"/>
-          <p:nvPr/>
-        </p:nvSpPr>
-        <p:spPr>
-          <a:xfrm>
-            <a:off x="3079699" y="3008376"/>
-            <a:ext cx="1561795" cy="548640"/>
-          </a:xfrm>
-          <a:prstGeom prst="rect">
-            <a:avLst/>
-          </a:prstGeom>
-          <a:noFill/>
-        </p:spPr>
-        <p:txBody>
-          <a:bodyPr wrap="square">
-            <a:spAutoFit/>
-          </a:bodyPr>
-          <a:lstStyle/>
-          <a:p>
-            <a:r>
-              <a:rPr sz="1400" b="1">
-                <a:solidFill>
-                  <a:srgbClr val="1A1A1E"/>
-                </a:solidFill>
-                <a:latin typeface="맑은 고딕"/>
-              </a:rPr>
-              <a:t>시계열 예측</a:t>
-            </a:r>
-          </a:p>
-        </p:txBody>
-      </p:sp>
-      <p:sp>
-        <p:nvSpPr>
-          <p:cNvPr id="15" name="TextBox 14"/>
-          <p:cNvSpPr txBox="1"/>
-          <p:nvPr/>
-        </p:nvSpPr>
-        <p:spPr>
-          <a:xfrm>
-            <a:off x="3079699" y="3520440"/>
-            <a:ext cx="1561795" cy="777240"/>
-          </a:xfrm>
-          <a:prstGeom prst="rect">
-            <a:avLst/>
-          </a:prstGeom>
-          <a:noFill/>
-        </p:spPr>
-        <p:txBody>
-          <a:bodyPr wrap="square">
-            <a:spAutoFit/>
-          </a:bodyPr>
-          <a:lstStyle/>
-          <a:p>
-            <a:r>
-              <a:rPr sz="1050" b="0">
-                <a:solidFill>
-                  <a:srgbClr val="666670"/>
-                </a:solidFill>
-                <a:latin typeface="맑은 고딕"/>
-              </a:rPr>
-              <a:t>SARIMA · LSTM · TFT 앙상블로 14일 전망</a:t>
-            </a:r>
-          </a:p>
-        </p:txBody>
-      </p:sp>
-      <p:sp>
-        <p:nvSpPr>
-          <p:cNvPr id="16" name="Right Arrow 15"/>
-          <p:cNvSpPr/>
-          <p:nvPr/>
-        </p:nvSpPr>
-        <p:spPr>
-          <a:xfrm>
-            <a:off x="4806086" y="3268980"/>
-            <a:ext cx="347472" cy="182880"/>
-          </a:xfrm>
-          <a:prstGeom prst="rightArrow">
-            <a:avLst/>
-          </a:prstGeom>
-          <a:solidFill>
-            <a:srgbClr val="9A9AA2"/>
-          </a:solidFill>
-          <a:ln>
-            <a:noFill/>
-          </a:ln>
-          <a:effectLst/>
-        </p:spPr>
-        <p:style>
-          <a:lnRef idx="1">
-            <a:schemeClr val="accent1"/>
-          </a:lnRef>
-          <a:fillRef idx="3">
-            <a:schemeClr val="accent1"/>
-          </a:fillRef>
-          <a:effectRef idx="2">
-            <a:schemeClr val="accent1"/>
-          </a:effectRef>
-          <a:fontRef idx="minor">
-            <a:schemeClr val="lt1"/>
-          </a:fontRef>
-        </p:style>
-        <p:txBody>
-          <a:bodyPr rtlCol="0" anchor="ctr"/>
-          <a:lstStyle/>
-          <a:p>
-            <a:pPr algn="ctr"/>
-          </a:p>
-        </p:txBody>
-      </p:sp>
-      <p:sp>
-        <p:nvSpPr>
-          <p:cNvPr id="17" name="Rounded Rectangle 16"/>
-          <p:cNvSpPr/>
-          <p:nvPr/>
-        </p:nvSpPr>
-        <p:spPr>
-          <a:xfrm>
-            <a:off x="5135270" y="2331720"/>
-            <a:ext cx="1927555" cy="2057400"/>
-          </a:xfrm>
-          <a:prstGeom prst="roundRect">
-            <a:avLst>
-              <a:gd name="adj" fmla="val 8000"/>
-            </a:avLst>
-          </a:prstGeom>
-          <a:solidFill>
-            <a:srgbClr val="F6F6F9"/>
-          </a:solidFill>
-          <a:ln w="12700">
-            <a:solidFill>
-              <a:srgbClr val="E6E6EA"/>
-            </a:solidFill>
-          </a:ln>
-          <a:effectLst/>
-        </p:spPr>
-        <p:style>
-          <a:lnRef idx="1">
-            <a:schemeClr val="accent1"/>
-          </a:lnRef>
-          <a:fillRef idx="3">
-            <a:schemeClr val="accent1"/>
-          </a:fillRef>
-          <a:effectRef idx="2">
-            <a:schemeClr val="accent1"/>
-          </a:effectRef>
-          <a:fontRef idx="minor">
-            <a:schemeClr val="lt1"/>
-          </a:fontRef>
-        </p:style>
-        <p:txBody>
-          <a:bodyPr rtlCol="0" anchor="ctr"/>
-          <a:lstStyle/>
-          <a:p>
-            <a:pPr algn="ctr"/>
-          </a:p>
-        </p:txBody>
-      </p:sp>
-      <p:sp>
-        <p:nvSpPr>
-          <p:cNvPr id="18" name="Rectangle 17"/>
-          <p:cNvSpPr/>
-          <p:nvPr/>
-        </p:nvSpPr>
-        <p:spPr>
-          <a:xfrm>
-            <a:off x="5135270" y="2331720"/>
-            <a:ext cx="1927555" cy="109728"/>
-          </a:xfrm>
-          <a:prstGeom prst="rect">
-            <a:avLst/>
-          </a:prstGeom>
-          <a:solidFill>
-            <a:srgbClr val="1A1A1E"/>
-          </a:solidFill>
-          <a:ln>
-            <a:noFill/>
-          </a:ln>
-          <a:effectLst/>
-        </p:spPr>
-        <p:style>
-          <a:lnRef idx="1">
-            <a:schemeClr val="accent1"/>
-          </a:lnRef>
-          <a:fillRef idx="3">
-            <a:schemeClr val="accent1"/>
-          </a:fillRef>
-          <a:effectRef idx="2">
-            <a:schemeClr val="accent1"/>
-          </a:effectRef>
-          <a:fontRef idx="minor">
-            <a:schemeClr val="lt1"/>
-          </a:fontRef>
-        </p:style>
-        <p:txBody>
-          <a:bodyPr rtlCol="0" anchor="ctr"/>
-          <a:lstStyle/>
-          <a:p>
-            <a:pPr algn="ctr"/>
-          </a:p>
-        </p:txBody>
-      </p:sp>
-      <p:sp>
-        <p:nvSpPr>
-          <p:cNvPr id="19" name="TextBox 18"/>
-          <p:cNvSpPr txBox="1"/>
-          <p:nvPr/>
-        </p:nvSpPr>
-        <p:spPr>
-          <a:xfrm>
-            <a:off x="5318150" y="2569464"/>
-            <a:ext cx="1561795" cy="365760"/>
-          </a:xfrm>
-          <a:prstGeom prst="rect">
-            <a:avLst/>
-          </a:prstGeom>
-          <a:noFill/>
-        </p:spPr>
-        <p:txBody>
-          <a:bodyPr wrap="square">
-            <a:spAutoFit/>
-          </a:bodyPr>
-          <a:lstStyle/>
-          <a:p>
-            <a:r>
-              <a:rPr sz="1500" b="1">
-                <a:solidFill>
-                  <a:srgbClr val="1A1A1E"/>
-                </a:solidFill>
-                <a:latin typeface="Segoe UI"/>
-              </a:rPr>
-              <a:t>03</a:t>
-            </a:r>
-          </a:p>
-        </p:txBody>
-      </p:sp>
-      <p:sp>
-        <p:nvSpPr>
-          <p:cNvPr id="20" name="TextBox 19"/>
-          <p:cNvSpPr txBox="1"/>
-          <p:nvPr/>
-        </p:nvSpPr>
-        <p:spPr>
-          <a:xfrm>
-            <a:off x="5318150" y="3008376"/>
-            <a:ext cx="1561795" cy="548640"/>
-          </a:xfrm>
-          <a:prstGeom prst="rect">
-            <a:avLst/>
-          </a:prstGeom>
-          <a:noFill/>
-        </p:spPr>
-        <p:txBody>
-          <a:bodyPr wrap="square">
-            <a:spAutoFit/>
-          </a:bodyPr>
-          <a:lstStyle/>
-          <a:p>
-            <a:r>
-              <a:rPr sz="1400" b="1">
-                <a:solidFill>
-                  <a:srgbClr val="1A1A1E"/>
-                </a:solidFill>
-                <a:latin typeface="맑은 고딕"/>
-              </a:rPr>
-              <a:t>지식베이스 (RAG)</a:t>
-            </a:r>
-          </a:p>
-        </p:txBody>
-      </p:sp>
-      <p:sp>
-        <p:nvSpPr>
-          <p:cNvPr id="21" name="TextBox 20"/>
-          <p:cNvSpPr txBox="1"/>
-          <p:nvPr/>
-        </p:nvSpPr>
-        <p:spPr>
-          <a:xfrm>
-            <a:off x="5318150" y="3520440"/>
-            <a:ext cx="1561795" cy="777240"/>
-          </a:xfrm>
-          <a:prstGeom prst="rect">
-            <a:avLst/>
-          </a:prstGeom>
-          <a:noFill/>
-        </p:spPr>
-        <p:txBody>
-          <a:bodyPr wrap="square">
-            <a:spAutoFit/>
-          </a:bodyPr>
-          <a:lstStyle/>
-          <a:p>
-            <a:r>
-              <a:rPr sz="1050" b="0">
-                <a:solidFill>
-                  <a:srgbClr val="666670"/>
-                </a:solidFill>
-                <a:latin typeface="맑은 고딕"/>
-              </a:rPr>
-              <a:t>벡터DB: 과거 트렌드 · 캠페인 성과 검색</a:t>
-            </a:r>
-          </a:p>
-        </p:txBody>
-      </p:sp>
-      <p:sp>
-        <p:nvSpPr>
-          <p:cNvPr id="22" name="Right Arrow 21"/>
-          <p:cNvSpPr/>
-          <p:nvPr/>
-        </p:nvSpPr>
-        <p:spPr>
-          <a:xfrm>
-            <a:off x="7044537" y="3268980"/>
-            <a:ext cx="347472" cy="182880"/>
-          </a:xfrm>
-          <a:prstGeom prst="rightArrow">
-            <a:avLst/>
-          </a:prstGeom>
-          <a:solidFill>
-            <a:srgbClr val="9A9AA2"/>
-          </a:solidFill>
-          <a:ln>
-            <a:noFill/>
-          </a:ln>
-          <a:effectLst/>
-        </p:spPr>
-        <p:style>
-          <a:lnRef idx="1">
-            <a:schemeClr val="accent1"/>
-          </a:lnRef>
-          <a:fillRef idx="3">
-            <a:schemeClr val="accent1"/>
-          </a:fillRef>
-          <a:effectRef idx="2">
-            <a:schemeClr val="accent1"/>
-          </a:effectRef>
-          <a:fontRef idx="minor">
-            <a:schemeClr val="lt1"/>
-          </a:fontRef>
-        </p:style>
-        <p:txBody>
-          <a:bodyPr rtlCol="0" anchor="ctr"/>
-          <a:lstStyle/>
-          <a:p>
-            <a:pPr algn="ctr"/>
-          </a:p>
-        </p:txBody>
-      </p:sp>
-      <p:sp>
-        <p:nvSpPr>
-          <p:cNvPr id="23" name="Rounded Rectangle 22"/>
-          <p:cNvSpPr/>
-          <p:nvPr/>
-        </p:nvSpPr>
-        <p:spPr>
-          <a:xfrm>
-            <a:off x="7373721" y="2331720"/>
-            <a:ext cx="1927555" cy="2057400"/>
-          </a:xfrm>
-          <a:prstGeom prst="roundRect">
-            <a:avLst>
-              <a:gd name="adj" fmla="val 8000"/>
-            </a:avLst>
-          </a:prstGeom>
-          <a:solidFill>
-            <a:srgbClr val="F6F6F9"/>
-          </a:solidFill>
-          <a:ln w="12700">
-            <a:solidFill>
-              <a:srgbClr val="E6E6EA"/>
-            </a:solidFill>
-          </a:ln>
-          <a:effectLst/>
-        </p:spPr>
-        <p:style>
-          <a:lnRef idx="1">
-            <a:schemeClr val="accent1"/>
-          </a:lnRef>
-          <a:fillRef idx="3">
-            <a:schemeClr val="accent1"/>
-          </a:fillRef>
-          <a:effectRef idx="2">
-            <a:schemeClr val="accent1"/>
-          </a:effectRef>
-          <a:fontRef idx="minor">
-            <a:schemeClr val="lt1"/>
-          </a:fontRef>
-        </p:style>
-        <p:txBody>
-          <a:bodyPr rtlCol="0" anchor="ctr"/>
-          <a:lstStyle/>
-          <a:p>
-            <a:pPr algn="ctr"/>
-          </a:p>
-        </p:txBody>
-      </p:sp>
-      <p:sp>
-        <p:nvSpPr>
-          <p:cNvPr id="24" name="Rectangle 23"/>
-          <p:cNvSpPr/>
-          <p:nvPr/>
-        </p:nvSpPr>
-        <p:spPr>
-          <a:xfrm>
-            <a:off x="7373721" y="2331720"/>
-            <a:ext cx="1927555" cy="109728"/>
-          </a:xfrm>
-          <a:prstGeom prst="rect">
-            <a:avLst/>
-          </a:prstGeom>
-          <a:solidFill>
-            <a:srgbClr val="E1306C"/>
-          </a:solidFill>
-          <a:ln>
-            <a:noFill/>
-          </a:ln>
-          <a:effectLst/>
-        </p:spPr>
-        <p:style>
-          <a:lnRef idx="1">
-            <a:schemeClr val="accent1"/>
-          </a:lnRef>
-          <a:fillRef idx="3">
-            <a:schemeClr val="accent1"/>
-          </a:fillRef>
-          <a:effectRef idx="2">
-            <a:schemeClr val="accent1"/>
-          </a:effectRef>
-          <a:fontRef idx="minor">
-            <a:schemeClr val="lt1"/>
-          </a:fontRef>
-        </p:style>
-        <p:txBody>
-          <a:bodyPr rtlCol="0" anchor="ctr"/>
-          <a:lstStyle/>
-          <a:p>
-            <a:pPr algn="ctr"/>
-          </a:p>
-        </p:txBody>
-      </p:sp>
-      <p:sp>
-        <p:nvSpPr>
-          <p:cNvPr id="25" name="TextBox 24"/>
-          <p:cNvSpPr txBox="1"/>
-          <p:nvPr/>
-        </p:nvSpPr>
-        <p:spPr>
-          <a:xfrm>
-            <a:off x="7556601" y="2569464"/>
-            <a:ext cx="1561795" cy="365760"/>
-          </a:xfrm>
-          <a:prstGeom prst="rect">
-            <a:avLst/>
-          </a:prstGeom>
-          <a:noFill/>
-        </p:spPr>
-        <p:txBody>
-          <a:bodyPr wrap="square">
-            <a:spAutoFit/>
-          </a:bodyPr>
-          <a:lstStyle/>
-          <a:p>
-            <a:r>
-              <a:rPr sz="1500" b="1">
-                <a:solidFill>
-                  <a:srgbClr val="E1306C"/>
-                </a:solidFill>
-                <a:latin typeface="Segoe UI"/>
-              </a:rPr>
-              <a:t>04</a:t>
-            </a:r>
-          </a:p>
-        </p:txBody>
-      </p:sp>
-      <p:sp>
-        <p:nvSpPr>
-          <p:cNvPr id="26" name="TextBox 25"/>
-          <p:cNvSpPr txBox="1"/>
-          <p:nvPr/>
-        </p:nvSpPr>
-        <p:spPr>
-          <a:xfrm>
-            <a:off x="7556601" y="3008376"/>
-            <a:ext cx="1561795" cy="548640"/>
-          </a:xfrm>
-          <a:prstGeom prst="rect">
-            <a:avLst/>
-          </a:prstGeom>
-          <a:noFill/>
-        </p:spPr>
-        <p:txBody>
-          <a:bodyPr wrap="square">
-            <a:spAutoFit/>
-          </a:bodyPr>
-          <a:lstStyle/>
-          <a:p>
-            <a:r>
-              <a:rPr sz="1400" b="1">
-                <a:solidFill>
-                  <a:srgbClr val="1A1A1E"/>
-                </a:solidFill>
-                <a:latin typeface="맑은 고딕"/>
-              </a:rPr>
-              <a:t>LLM 에이전트</a:t>
-            </a:r>
-          </a:p>
-        </p:txBody>
-      </p:sp>
-      <p:sp>
-        <p:nvSpPr>
-          <p:cNvPr id="27" name="TextBox 26"/>
-          <p:cNvSpPr txBox="1"/>
-          <p:nvPr/>
-        </p:nvSpPr>
-        <p:spPr>
-          <a:xfrm>
-            <a:off x="7556601" y="3520440"/>
-            <a:ext cx="1561795" cy="777240"/>
-          </a:xfrm>
-          <a:prstGeom prst="rect">
-            <a:avLst/>
-          </a:prstGeom>
-          <a:noFill/>
-        </p:spPr>
-        <p:txBody>
-          <a:bodyPr wrap="square">
-            <a:spAutoFit/>
-          </a:bodyPr>
-          <a:lstStyle/>
-          <a:p>
-            <a:r>
-              <a:rPr sz="1050" b="0">
-                <a:solidFill>
-                  <a:srgbClr val="666670"/>
-                </a:solidFill>
-                <a:latin typeface="맑은 고딕"/>
-              </a:rPr>
-              <a:t>근거 기반 인사이트 · 콘텐츠 초안 생성</a:t>
-            </a:r>
-          </a:p>
-        </p:txBody>
-      </p:sp>
-      <p:sp>
-        <p:nvSpPr>
-          <p:cNvPr id="28" name="Right Arrow 27"/>
-          <p:cNvSpPr/>
-          <p:nvPr/>
-        </p:nvSpPr>
-        <p:spPr>
-          <a:xfrm>
-            <a:off x="9282988" y="3268980"/>
-            <a:ext cx="347472" cy="182880"/>
-          </a:xfrm>
-          <a:prstGeom prst="rightArrow">
-            <a:avLst/>
-          </a:prstGeom>
-          <a:solidFill>
-            <a:srgbClr val="9A9AA2"/>
-          </a:solidFill>
-          <a:ln>
-            <a:noFill/>
-          </a:ln>
-          <a:effectLst/>
-        </p:spPr>
-        <p:style>
-          <a:lnRef idx="1">
-            <a:schemeClr val="accent1"/>
-          </a:lnRef>
-          <a:fillRef idx="3">
-            <a:schemeClr val="accent1"/>
-          </a:fillRef>
-          <a:effectRef idx="2">
-            <a:schemeClr val="accent1"/>
-          </a:effectRef>
-          <a:fontRef idx="minor">
-            <a:schemeClr val="lt1"/>
-          </a:fontRef>
-        </p:style>
-        <p:txBody>
-          <a:bodyPr rtlCol="0" anchor="ctr"/>
-          <a:lstStyle/>
-          <a:p>
-            <a:pPr algn="ctr"/>
-          </a:p>
-        </p:txBody>
-      </p:sp>
-      <p:sp>
-        <p:nvSpPr>
-          <p:cNvPr id="29" name="Rounded Rectangle 28"/>
-          <p:cNvSpPr/>
-          <p:nvPr/>
-        </p:nvSpPr>
-        <p:spPr>
-          <a:xfrm>
-            <a:off x="9612172" y="2331720"/>
-            <a:ext cx="1927555" cy="2057400"/>
-          </a:xfrm>
-          <a:prstGeom prst="roundRect">
-            <a:avLst>
-              <a:gd name="adj" fmla="val 8000"/>
-            </a:avLst>
-          </a:prstGeom>
-          <a:solidFill>
-            <a:srgbClr val="F6F6F9"/>
-          </a:solidFill>
-          <a:ln w="12700">
-            <a:solidFill>
-              <a:srgbClr val="E6E6EA"/>
-            </a:solidFill>
-          </a:ln>
-          <a:effectLst/>
-        </p:spPr>
-        <p:style>
-          <a:lnRef idx="1">
-            <a:schemeClr val="accent1"/>
-          </a:lnRef>
-          <a:fillRef idx="3">
-            <a:schemeClr val="accent1"/>
-          </a:fillRef>
-          <a:effectRef idx="2">
-            <a:schemeClr val="accent1"/>
-          </a:effectRef>
-          <a:fontRef idx="minor">
-            <a:schemeClr val="lt1"/>
-          </a:fontRef>
-        </p:style>
-        <p:txBody>
-          <a:bodyPr rtlCol="0" anchor="ctr"/>
-          <a:lstStyle/>
-          <a:p>
-            <a:pPr algn="ctr"/>
-          </a:p>
-        </p:txBody>
-      </p:sp>
-      <p:sp>
-        <p:nvSpPr>
-          <p:cNvPr id="30" name="Rectangle 29"/>
-          <p:cNvSpPr/>
-          <p:nvPr/>
-        </p:nvSpPr>
-        <p:spPr>
-          <a:xfrm>
-            <a:off x="9612172" y="2331720"/>
-            <a:ext cx="1927555" cy="109728"/>
-          </a:xfrm>
-          <a:prstGeom prst="rect">
-            <a:avLst/>
-          </a:prstGeom>
-          <a:solidFill>
-            <a:srgbClr val="6A3DB8"/>
-          </a:solidFill>
-          <a:ln>
-            <a:noFill/>
-          </a:ln>
-          <a:effectLst/>
-        </p:spPr>
-        <p:style>
-          <a:lnRef idx="1">
-            <a:schemeClr val="accent1"/>
-          </a:lnRef>
-          <a:fillRef idx="3">
-            <a:schemeClr val="accent1"/>
-          </a:fillRef>
-          <a:effectRef idx="2">
-            <a:schemeClr val="accent1"/>
-          </a:effectRef>
-          <a:fontRef idx="minor">
-            <a:schemeClr val="lt1"/>
-          </a:fontRef>
-        </p:style>
-        <p:txBody>
-          <a:bodyPr rtlCol="0" anchor="ctr"/>
-          <a:lstStyle/>
-          <a:p>
-            <a:pPr algn="ctr"/>
-          </a:p>
-        </p:txBody>
-      </p:sp>
-      <p:sp>
-        <p:nvSpPr>
-          <p:cNvPr id="31" name="TextBox 30"/>
-          <p:cNvSpPr txBox="1"/>
-          <p:nvPr/>
-        </p:nvSpPr>
-        <p:spPr>
-          <a:xfrm>
-            <a:off x="9795052" y="2569464"/>
-            <a:ext cx="1561795" cy="365760"/>
-          </a:xfrm>
-          <a:prstGeom prst="rect">
-            <a:avLst/>
-          </a:prstGeom>
-          <a:noFill/>
-        </p:spPr>
-        <p:txBody>
-          <a:bodyPr wrap="square">
-            <a:spAutoFit/>
-          </a:bodyPr>
-          <a:lstStyle/>
-          <a:p>
-            <a:r>
-              <a:rPr sz="1500" b="1">
-                <a:solidFill>
-                  <a:srgbClr val="6A3DB8"/>
-                </a:solidFill>
-                <a:latin typeface="Segoe UI"/>
-              </a:rPr>
-              <a:t>05</a:t>
-            </a:r>
-          </a:p>
-        </p:txBody>
-      </p:sp>
-      <p:sp>
-        <p:nvSpPr>
-          <p:cNvPr id="32" name="TextBox 31"/>
-          <p:cNvSpPr txBox="1"/>
-          <p:nvPr/>
-        </p:nvSpPr>
-        <p:spPr>
-          <a:xfrm>
-            <a:off x="9795052" y="3008376"/>
-            <a:ext cx="1561795" cy="548640"/>
-          </a:xfrm>
-          <a:prstGeom prst="rect">
-            <a:avLst/>
-          </a:prstGeom>
-          <a:noFill/>
-        </p:spPr>
-        <p:txBody>
-          <a:bodyPr wrap="square">
-            <a:spAutoFit/>
-          </a:bodyPr>
-          <a:lstStyle/>
-          <a:p>
-            <a:r>
-              <a:rPr sz="1400" b="1">
-                <a:solidFill>
-                  <a:srgbClr val="1A1A1E"/>
-                </a:solidFill>
-                <a:latin typeface="맑은 고딕"/>
-              </a:rPr>
-              <a:t>콘텐츠 추천</a:t>
-            </a:r>
-          </a:p>
-        </p:txBody>
-      </p:sp>
-      <p:sp>
-        <p:nvSpPr>
-          <p:cNvPr id="33" name="TextBox 32"/>
-          <p:cNvSpPr txBox="1"/>
-          <p:nvPr/>
-        </p:nvSpPr>
-        <p:spPr>
-          <a:xfrm>
-            <a:off x="9795052" y="3520440"/>
-            <a:ext cx="1561795" cy="777240"/>
-          </a:xfrm>
-          <a:prstGeom prst="rect">
-            <a:avLst/>
-          </a:prstGeom>
-          <a:noFill/>
-        </p:spPr>
-        <p:txBody>
-          <a:bodyPr wrap="square">
-            <a:spAutoFit/>
-          </a:bodyPr>
-          <a:lstStyle/>
-          <a:p>
-            <a:r>
-              <a:rPr sz="1050" b="0">
-                <a:solidFill>
-                  <a:srgbClr val="666670"/>
-                </a:solidFill>
-                <a:latin typeface="맑은 고딕"/>
-              </a:rPr>
-              <a:t>태그 · 타이밍 · 조합 액션 제안</a:t>
-            </a:r>
-          </a:p>
-        </p:txBody>
-      </p:sp>
-      <p:sp>
-        <p:nvSpPr>
-          <p:cNvPr id="34" name="Rounded Rectangle 33"/>
-          <p:cNvSpPr/>
-          <p:nvPr/>
-        </p:nvSpPr>
-        <p:spPr>
-          <a:xfrm>
-            <a:off x="658368" y="4800600"/>
-            <a:ext cx="10881360" cy="603504"/>
-          </a:xfrm>
-          <a:prstGeom prst="roundRect">
-            <a:avLst>
-              <a:gd name="adj" fmla="val 30000"/>
-            </a:avLst>
-          </a:prstGeom>
-          <a:solidFill>
-            <a:srgbClr val="FBE9F1"/>
-          </a:solidFill>
-          <a:ln>
-            <a:noFill/>
-          </a:ln>
-          <a:effectLst/>
-        </p:spPr>
-        <p:style>
-          <a:lnRef idx="1">
-            <a:schemeClr val="accent1"/>
-          </a:lnRef>
-          <a:fillRef idx="3">
-            <a:schemeClr val="accent1"/>
-          </a:fillRef>
-          <a:effectRef idx="2">
-            <a:schemeClr val="accent1"/>
-          </a:effectRef>
-          <a:fontRef idx="minor">
-            <a:schemeClr val="lt1"/>
-          </a:fontRef>
-        </p:style>
-        <p:txBody>
-          <a:bodyPr rtlCol="0" anchor="ctr"/>
-          <a:lstStyle/>
-          <a:p>
-            <a:pPr algn="ctr"/>
-          </a:p>
-        </p:txBody>
-      </p:sp>
-      <p:sp>
-        <p:nvSpPr>
-          <p:cNvPr id="35" name="TextBox 34"/>
-          <p:cNvSpPr txBox="1"/>
-          <p:nvPr/>
-        </p:nvSpPr>
-        <p:spPr>
-          <a:xfrm>
-            <a:off x="932688" y="4800600"/>
-            <a:ext cx="10332720" cy="603504"/>
-          </a:xfrm>
-          <a:prstGeom prst="rect">
-            <a:avLst/>
-          </a:prstGeom>
-          <a:noFill/>
-        </p:spPr>
-        <p:txBody>
-          <a:bodyPr wrap="square" anchor="ctr">
-            <a:spAutoFit/>
-          </a:bodyPr>
-          <a:lstStyle/>
-          <a:p>
-            <a:r>
-              <a:rPr sz="1300" b="1">
-                <a:solidFill>
-                  <a:srgbClr val="E1306C"/>
-                </a:solidFill>
-                <a:latin typeface="맑은 고딕"/>
-              </a:rPr>
-              <a:t>↺ 피드백 루프   </a:t>
-            </a:r>
-            <a:r>
-              <a:rPr sz="1250" b="0">
-                <a:solidFill>
-                  <a:srgbClr val="1A1A1E"/>
-                </a:solidFill>
-                <a:latin typeface="맑은 고딕"/>
-              </a:rPr>
-              <a:t>게시 성과를 다시 수집해 예측·추천 모델을 재학습 — 시스템이 스스로 정교해진다.</a:t>
-            </a:r>
-          </a:p>
-        </p:txBody>
-      </p:sp>
-      <p:sp>
-        <p:nvSpPr>
-          <p:cNvPr id="36" name="TextBox 35"/>
+          <p:cNvPr id="16" name="TextBox 15"/>
+          <p:cNvSpPr txBox="1"/>
+          <p:nvPr/>
+        </p:nvSpPr>
+        <p:spPr>
+          <a:xfrm>
+            <a:off x="1143000" y="5120640"/>
+            <a:ext cx="10058400" cy="822960"/>
+          </a:xfrm>
+          <a:prstGeom prst="rect">
+            <a:avLst/>
+          </a:prstGeom>
+          <a:noFill/>
+        </p:spPr>
+        <p:txBody>
+          <a:bodyPr wrap="square">
+            <a:spAutoFit/>
+          </a:bodyPr>
+          <a:lstStyle/>
+          <a:p>
+            <a:r>
+              <a:rPr sz="1200" b="0">
+                <a:solidFill>
+                  <a:srgbClr val="E8E8EE"/>
+                </a:solidFill>
+                <a:latin typeface="Consolas"/>
+              </a:rPr>
+              <a:t>trend    = s.rolling(7, center=True).mean()</a:t>
+            </a:r>
+          </a:p>
+          <a:p>
+            <a:r>
+              <a:rPr sz="1200" b="0">
+                <a:solidFill>
+                  <a:srgbClr val="E8E8EE"/>
+                </a:solidFill>
+                <a:latin typeface="Consolas"/>
+              </a:rPr>
+              <a:t>seasonal = (s - trend).groupby(s.index.weekday).transform("mean")</a:t>
+            </a:r>
+          </a:p>
+          <a:p>
+            <a:r>
+              <a:rPr sz="1200" b="0">
+                <a:solidFill>
+                  <a:srgbClr val="E8E8EE"/>
+                </a:solidFill>
+                <a:latin typeface="Consolas"/>
+              </a:rPr>
+              <a:t>residual = s - trend - seasonal          # 백색잡음이면 성공</a:t>
+            </a:r>
+          </a:p>
+        </p:txBody>
+      </p:sp>
+      <p:sp>
+        <p:nvSpPr>
+          <p:cNvPr id="17" name="TextBox 16"/>
           <p:cNvSpPr txBox="1"/>
           <p:nvPr/>
         </p:nvSpPr>
@@ -17842,7 +17273,7 @@
       </p:sp>
       <p:sp>
         <p:nvSpPr>
-          <p:cNvPr id="37" name="TextBox 36"/>
+          <p:cNvPr id="18" name="TextBox 17"/>
           <p:cNvSpPr txBox="1"/>
           <p:nvPr/>
         </p:nvSpPr>
@@ -17956,7 +17387,7 @@
                 </a:solidFill>
                 <a:latin typeface="맑은 고딕"/>
               </a:rPr>
-              <a:t>핵심 코드 ①  데이터 → 평활화 → 차분</a:t>
+              <a:t>핵심 코드 ②  ACF → 예측</a:t>
             </a:r>
           </a:p>
         </p:txBody>
@@ -18034,7 +17465,7 @@
                 </a:solidFill>
                 <a:latin typeface="맑은 고딕"/>
               </a:rPr>
-              <a:t>●  tidy 패널을 날짜×태그 행렬로 (pandas pivot)</a:t>
+              <a:t>●  표본 ACF 직접 구현 — ρ(k) = γ(k)/γ(0)</a:t>
             </a:r>
           </a:p>
         </p:txBody>
@@ -18048,7 +17479,7 @@
         <p:spPr>
           <a:xfrm>
             <a:off x="914400" y="1755648"/>
-            <a:ext cx="10424160" cy="457200"/>
+            <a:ext cx="10424160" cy="969264"/>
           </a:xfrm>
           <a:prstGeom prst="rect">
             <a:avLst/>
@@ -18092,7 +17523,7 @@
         <p:spPr>
           <a:xfrm>
             <a:off x="1143000" y="1847088"/>
-            <a:ext cx="10058400" cy="310896"/>
+            <a:ext cx="10058400" cy="822960"/>
           </a:xfrm>
           <a:prstGeom prst="rect">
             <a:avLst/>
@@ -18112,7 +17543,29 @@
                 </a:solidFill>
                 <a:latin typeface="Consolas"/>
               </a:rPr>
-              <a:t>wide = panel.pivot(index="date", columns="hashtag", values="ratio")</a:t>
+              <a:t>x = x - x.mean()</a:t>
+            </a:r>
+          </a:p>
+          <a:p>
+            <a:r>
+              <a:rPr sz="1200" b="0">
+                <a:solidFill>
+                  <a:srgbClr val="E8E8EE"/>
+                </a:solidFill>
+                <a:latin typeface="Consolas"/>
+              </a:rPr>
+              <a:t>rho_k = np.dot(x[:n-k], x[k:]) / np.dot(x, x)</a:t>
+            </a:r>
+          </a:p>
+          <a:p>
+            <a:r>
+              <a:rPr sz="1200" b="0">
+                <a:solidFill>
+                  <a:srgbClr val="E8E8EE"/>
+                </a:solidFill>
+                <a:latin typeface="Consolas"/>
+              </a:rPr>
+              <a:t>band  = 1.96 / np.sqrt(n)                # 백색잡음 95% 한계</a:t>
             </a:r>
           </a:p>
         </p:txBody>
@@ -18125,7 +17578,7 @@
         </p:nvSpPr>
         <p:spPr>
           <a:xfrm>
-            <a:off x="731520" y="2377440"/>
+            <a:off x="731520" y="2889504"/>
             <a:ext cx="10789920" cy="320040"/>
           </a:xfrm>
           <a:prstGeom prst="rect">
@@ -18146,7 +17599,7 @@
                 </a:solidFill>
                 <a:latin typeface="맑은 고딕"/>
               </a:rPr>
-              <a:t>●  이동평균 평활화 — 7일 중심 윈도우가 주간 주기를 상쇄</a:t>
+              <a:t>●  선형추세 적합 (최소제곱) + 요일 더미 계절성</a:t>
             </a:r>
           </a:p>
         </p:txBody>
@@ -18159,8 +17612,8 @@
         </p:nvSpPr>
         <p:spPr>
           <a:xfrm>
-            <a:off x="914400" y="2761488"/>
-            <a:ext cx="10424160" cy="457200"/>
+            <a:off x="914400" y="3273552"/>
+            <a:ext cx="10424160" cy="969264"/>
           </a:xfrm>
           <a:prstGeom prst="rect">
             <a:avLst/>
@@ -18203,8 +17656,8 @@
         </p:nvSpPr>
         <p:spPr>
           <a:xfrm>
-            <a:off x="1143000" y="2852928"/>
-            <a:ext cx="10058400" cy="310896"/>
+            <a:off x="1143000" y="3364992"/>
+            <a:ext cx="10058400" cy="822960"/>
           </a:xfrm>
           <a:prstGeom prst="rect">
             <a:avLst/>
@@ -18224,7 +17677,29 @@
                 </a:solidFill>
                 <a:latin typeface="Consolas"/>
               </a:rPr>
-              <a:t>ma7 = s.rolling(7, center=True).mean()   # 추세 + 노이즈 제거</a:t>
+              <a:t>coef = np.polyfit(t, s.values, 1)        # 기울기·절편</a:t>
+            </a:r>
+          </a:p>
+          <a:p>
+            <a:r>
+              <a:rPr sz="1200" b="0">
+                <a:solidFill>
+                  <a:srgbClr val="E8E8EE"/>
+                </a:solidFill>
+                <a:latin typeface="Consolas"/>
+              </a:rPr>
+              <a:t>seasonal = pd.Series(s.values - np.polyval(coef, t)) \</a:t>
+            </a:r>
+          </a:p>
+          <a:p>
+            <a:r>
+              <a:rPr sz="1200" b="0">
+                <a:solidFill>
+                  <a:srgbClr val="E8E8EE"/>
+                </a:solidFill>
+                <a:latin typeface="Consolas"/>
+              </a:rPr>
+              <a:t>             .groupby(s.index.weekday).mean()</a:t>
             </a:r>
           </a:p>
         </p:txBody>
@@ -18237,7 +17712,7 @@
         </p:nvSpPr>
         <p:spPr>
           <a:xfrm>
-            <a:off x="731520" y="3383280"/>
+            <a:off x="731520" y="4407408"/>
             <a:ext cx="10789920" cy="320040"/>
           </a:xfrm>
           <a:prstGeom prst="rect">
@@ -18258,7 +17733,7 @@
                 </a:solidFill>
                 <a:latin typeface="맑은 고딕"/>
               </a:rPr>
-              <a:t>●  1차 차분으로 정상화 (ARIMA의 d=1)</a:t>
+              <a:t>●  14일 외삽 + 95% 예측구간 (잔차 표준편차 기반)</a:t>
             </a:r>
           </a:p>
         </p:txBody>
@@ -18271,7 +17746,7 @@
         </p:nvSpPr>
         <p:spPr>
           <a:xfrm>
-            <a:off x="914400" y="3767328"/>
+            <a:off x="914400" y="4791456"/>
             <a:ext cx="10424160" cy="713232"/>
           </a:xfrm>
           <a:prstGeom prst="rect">
@@ -18315,7 +17790,7 @@
         </p:nvSpPr>
         <p:spPr>
           <a:xfrm>
-            <a:off x="1143000" y="3858768"/>
+            <a:off x="1143000" y="4882896"/>
             <a:ext cx="10058400" cy="566928"/>
           </a:xfrm>
           <a:prstGeom prst="rect">
@@ -18336,7 +17811,7 @@
                 </a:solidFill>
                 <a:latin typeface="Consolas"/>
               </a:rPr>
-              <a:t>diff = s.diff()                          # X_t - X_{t-1}</a:t>
+              <a:t>future = np.polyval(coef, future_t) + seasonal[future_weekday]</a:t>
             </a:r>
           </a:p>
           <a:p>
@@ -18347,7 +17822,7 @@
                 </a:solidFill>
                 <a:latin typeface="Consolas"/>
               </a:rPr>
-              <a:t>diff.rolling(28).mean()                  # 평균이 0에 붙는지 진단</a:t>
+              <a:t>lo, hi = future - 1.96*resid_std, future + 1.96*resid_std</a:t>
             </a:r>
           </a:p>
         </p:txBody>
@@ -18355,140 +17830,6 @@
       <p:sp>
         <p:nvSpPr>
           <p:cNvPr id="14" name="TextBox 13"/>
-          <p:cNvSpPr txBox="1"/>
-          <p:nvPr/>
-        </p:nvSpPr>
-        <p:spPr>
-          <a:xfrm>
-            <a:off x="731520" y="4645152"/>
-            <a:ext cx="10789920" cy="320040"/>
-          </a:xfrm>
-          <a:prstGeom prst="rect">
-            <a:avLst/>
-          </a:prstGeom>
-          <a:noFill/>
-        </p:spPr>
-        <p:txBody>
-          <a:bodyPr wrap="square">
-            <a:spAutoFit/>
-          </a:bodyPr>
-          <a:lstStyle/>
-          <a:p>
-            <a:r>
-              <a:rPr sz="1350" b="1">
-                <a:solidFill>
-                  <a:srgbClr val="E1306C"/>
-                </a:solidFill>
-                <a:latin typeface="맑은 고딕"/>
-              </a:rPr>
-              <a:t>●  가법 분해 — 추세는 이동평균, 계절은 '같은 요일끼리 평균'</a:t>
-            </a:r>
-          </a:p>
-        </p:txBody>
-      </p:sp>
-      <p:sp>
-        <p:nvSpPr>
-          <p:cNvPr id="15" name="Rectangle 14"/>
-          <p:cNvSpPr/>
-          <p:nvPr/>
-        </p:nvSpPr>
-        <p:spPr>
-          <a:xfrm>
-            <a:off x="914400" y="5029200"/>
-            <a:ext cx="10424160" cy="969264"/>
-          </a:xfrm>
-          <a:prstGeom prst="rect">
-            <a:avLst/>
-          </a:prstGeom>
-          <a:solidFill>
-            <a:srgbClr val="1E1E26"/>
-          </a:solidFill>
-          <a:ln>
-            <a:noFill/>
-          </a:ln>
-          <a:effectLst/>
-        </p:spPr>
-        <p:style>
-          <a:lnRef idx="1">
-            <a:schemeClr val="accent1"/>
-          </a:lnRef>
-          <a:fillRef idx="3">
-            <a:schemeClr val="accent1"/>
-          </a:fillRef>
-          <a:effectRef idx="2">
-            <a:schemeClr val="accent1"/>
-          </a:effectRef>
-          <a:fontRef idx="minor">
-            <a:schemeClr val="lt1"/>
-          </a:fontRef>
-        </p:style>
-        <p:txBody>
-          <a:bodyPr rtlCol="0" anchor="ctr"/>
-          <a:lstStyle/>
-          <a:p>
-            <a:pPr algn="ctr"/>
-          </a:p>
-        </p:txBody>
-      </p:sp>
-      <p:sp>
-        <p:nvSpPr>
-          <p:cNvPr id="16" name="TextBox 15"/>
-          <p:cNvSpPr txBox="1"/>
-          <p:nvPr/>
-        </p:nvSpPr>
-        <p:spPr>
-          <a:xfrm>
-            <a:off x="1143000" y="5120640"/>
-            <a:ext cx="10058400" cy="822960"/>
-          </a:xfrm>
-          <a:prstGeom prst="rect">
-            <a:avLst/>
-          </a:prstGeom>
-          <a:noFill/>
-        </p:spPr>
-        <p:txBody>
-          <a:bodyPr wrap="square">
-            <a:spAutoFit/>
-          </a:bodyPr>
-          <a:lstStyle/>
-          <a:p>
-            <a:r>
-              <a:rPr sz="1200" b="0">
-                <a:solidFill>
-                  <a:srgbClr val="E8E8EE"/>
-                </a:solidFill>
-                <a:latin typeface="Consolas"/>
-              </a:rPr>
-              <a:t>trend    = s.rolling(7, center=True).mean()</a:t>
-            </a:r>
-          </a:p>
-          <a:p>
-            <a:r>
-              <a:rPr sz="1200" b="0">
-                <a:solidFill>
-                  <a:srgbClr val="E8E8EE"/>
-                </a:solidFill>
-                <a:latin typeface="Consolas"/>
-              </a:rPr>
-              <a:t>seasonal = (s - trend).groupby(s.index.weekday).transform("mean")</a:t>
-            </a:r>
-          </a:p>
-          <a:p>
-            <a:r>
-              <a:rPr sz="1200" b="0">
-                <a:solidFill>
-                  <a:srgbClr val="E8E8EE"/>
-                </a:solidFill>
-                <a:latin typeface="Consolas"/>
-              </a:rPr>
-              <a:t>residual = s - trend - seasonal          # 백색잡음이면 성공</a:t>
-            </a:r>
-          </a:p>
-        </p:txBody>
-      </p:sp>
-      <p:sp>
-        <p:nvSpPr>
-          <p:cNvPr id="17" name="TextBox 16"/>
           <p:cNvSpPr txBox="1"/>
           <p:nvPr/>
         </p:nvSpPr>
@@ -18522,7 +17863,7 @@
       </p:sp>
       <p:sp>
         <p:nvSpPr>
-          <p:cNvPr id="18" name="TextBox 17"/>
+          <p:cNvPr id="15" name="TextBox 14"/>
           <p:cNvSpPr txBox="1"/>
           <p:nvPr/>
         </p:nvSpPr>
@@ -18602,7 +17943,7 @@
                 </a:solidFill>
                 <a:latin typeface="Segoe UI"/>
               </a:rPr>
-              <a:t>08 · CODE</a:t>
+              <a:t>08 · LIMITATIONS</a:t>
             </a:r>
           </a:p>
         </p:txBody>
@@ -18636,7 +17977,7 @@
                 </a:solidFill>
                 <a:latin typeface="맑은 고딕"/>
               </a:rPr>
-              <a:t>핵심 코드 ②  ACF → 예측</a:t>
+              <a:t>한계와 재현</a:t>
             </a:r>
           </a:p>
         </p:txBody>
@@ -18687,596 +18028,6 @@
       </p:sp>
       <p:sp>
         <p:nvSpPr>
-          <p:cNvPr id="5" name="TextBox 4"/>
-          <p:cNvSpPr txBox="1"/>
-          <p:nvPr/>
-        </p:nvSpPr>
-        <p:spPr>
-          <a:xfrm>
-            <a:off x="731520" y="1371600"/>
-            <a:ext cx="10789920" cy="320040"/>
-          </a:xfrm>
-          <a:prstGeom prst="rect">
-            <a:avLst/>
-          </a:prstGeom>
-          <a:noFill/>
-        </p:spPr>
-        <p:txBody>
-          <a:bodyPr wrap="square">
-            <a:spAutoFit/>
-          </a:bodyPr>
-          <a:lstStyle/>
-          <a:p>
-            <a:r>
-              <a:rPr sz="1350" b="1">
-                <a:solidFill>
-                  <a:srgbClr val="E1306C"/>
-                </a:solidFill>
-                <a:latin typeface="맑은 고딕"/>
-              </a:rPr>
-              <a:t>●  표본 ACF 직접 구현 — ρ(k) = γ(k)/γ(0)</a:t>
-            </a:r>
-          </a:p>
-        </p:txBody>
-      </p:sp>
-      <p:sp>
-        <p:nvSpPr>
-          <p:cNvPr id="6" name="Rectangle 5"/>
-          <p:cNvSpPr/>
-          <p:nvPr/>
-        </p:nvSpPr>
-        <p:spPr>
-          <a:xfrm>
-            <a:off x="914400" y="1755648"/>
-            <a:ext cx="10424160" cy="969264"/>
-          </a:xfrm>
-          <a:prstGeom prst="rect">
-            <a:avLst/>
-          </a:prstGeom>
-          <a:solidFill>
-            <a:srgbClr val="1E1E26"/>
-          </a:solidFill>
-          <a:ln>
-            <a:noFill/>
-          </a:ln>
-          <a:effectLst/>
-        </p:spPr>
-        <p:style>
-          <a:lnRef idx="1">
-            <a:schemeClr val="accent1"/>
-          </a:lnRef>
-          <a:fillRef idx="3">
-            <a:schemeClr val="accent1"/>
-          </a:fillRef>
-          <a:effectRef idx="2">
-            <a:schemeClr val="accent1"/>
-          </a:effectRef>
-          <a:fontRef idx="minor">
-            <a:schemeClr val="lt1"/>
-          </a:fontRef>
-        </p:style>
-        <p:txBody>
-          <a:bodyPr rtlCol="0" anchor="ctr"/>
-          <a:lstStyle/>
-          <a:p>
-            <a:pPr algn="ctr"/>
-          </a:p>
-        </p:txBody>
-      </p:sp>
-      <p:sp>
-        <p:nvSpPr>
-          <p:cNvPr id="7" name="TextBox 6"/>
-          <p:cNvSpPr txBox="1"/>
-          <p:nvPr/>
-        </p:nvSpPr>
-        <p:spPr>
-          <a:xfrm>
-            <a:off x="1143000" y="1847088"/>
-            <a:ext cx="10058400" cy="822960"/>
-          </a:xfrm>
-          <a:prstGeom prst="rect">
-            <a:avLst/>
-          </a:prstGeom>
-          <a:noFill/>
-        </p:spPr>
-        <p:txBody>
-          <a:bodyPr wrap="square">
-            <a:spAutoFit/>
-          </a:bodyPr>
-          <a:lstStyle/>
-          <a:p>
-            <a:r>
-              <a:rPr sz="1200" b="0">
-                <a:solidFill>
-                  <a:srgbClr val="E8E8EE"/>
-                </a:solidFill>
-                <a:latin typeface="Consolas"/>
-              </a:rPr>
-              <a:t>x = x - x.mean()</a:t>
-            </a:r>
-          </a:p>
-          <a:p>
-            <a:r>
-              <a:rPr sz="1200" b="0">
-                <a:solidFill>
-                  <a:srgbClr val="E8E8EE"/>
-                </a:solidFill>
-                <a:latin typeface="Consolas"/>
-              </a:rPr>
-              <a:t>rho_k = np.dot(x[:n-k], x[k:]) / np.dot(x, x)</a:t>
-            </a:r>
-          </a:p>
-          <a:p>
-            <a:r>
-              <a:rPr sz="1200" b="0">
-                <a:solidFill>
-                  <a:srgbClr val="E8E8EE"/>
-                </a:solidFill>
-                <a:latin typeface="Consolas"/>
-              </a:rPr>
-              <a:t>band  = 1.96 / np.sqrt(n)                # 백색잡음 95% 한계</a:t>
-            </a:r>
-          </a:p>
-        </p:txBody>
-      </p:sp>
-      <p:sp>
-        <p:nvSpPr>
-          <p:cNvPr id="8" name="TextBox 7"/>
-          <p:cNvSpPr txBox="1"/>
-          <p:nvPr/>
-        </p:nvSpPr>
-        <p:spPr>
-          <a:xfrm>
-            <a:off x="731520" y="2889504"/>
-            <a:ext cx="10789920" cy="320040"/>
-          </a:xfrm>
-          <a:prstGeom prst="rect">
-            <a:avLst/>
-          </a:prstGeom>
-          <a:noFill/>
-        </p:spPr>
-        <p:txBody>
-          <a:bodyPr wrap="square">
-            <a:spAutoFit/>
-          </a:bodyPr>
-          <a:lstStyle/>
-          <a:p>
-            <a:r>
-              <a:rPr sz="1350" b="1">
-                <a:solidFill>
-                  <a:srgbClr val="E1306C"/>
-                </a:solidFill>
-                <a:latin typeface="맑은 고딕"/>
-              </a:rPr>
-              <a:t>●  선형추세 적합 (최소제곱) + 요일 더미 계절성</a:t>
-            </a:r>
-          </a:p>
-        </p:txBody>
-      </p:sp>
-      <p:sp>
-        <p:nvSpPr>
-          <p:cNvPr id="9" name="Rectangle 8"/>
-          <p:cNvSpPr/>
-          <p:nvPr/>
-        </p:nvSpPr>
-        <p:spPr>
-          <a:xfrm>
-            <a:off x="914400" y="3273552"/>
-            <a:ext cx="10424160" cy="969264"/>
-          </a:xfrm>
-          <a:prstGeom prst="rect">
-            <a:avLst/>
-          </a:prstGeom>
-          <a:solidFill>
-            <a:srgbClr val="1E1E26"/>
-          </a:solidFill>
-          <a:ln>
-            <a:noFill/>
-          </a:ln>
-          <a:effectLst/>
-        </p:spPr>
-        <p:style>
-          <a:lnRef idx="1">
-            <a:schemeClr val="accent1"/>
-          </a:lnRef>
-          <a:fillRef idx="3">
-            <a:schemeClr val="accent1"/>
-          </a:fillRef>
-          <a:effectRef idx="2">
-            <a:schemeClr val="accent1"/>
-          </a:effectRef>
-          <a:fontRef idx="minor">
-            <a:schemeClr val="lt1"/>
-          </a:fontRef>
-        </p:style>
-        <p:txBody>
-          <a:bodyPr rtlCol="0" anchor="ctr"/>
-          <a:lstStyle/>
-          <a:p>
-            <a:pPr algn="ctr"/>
-          </a:p>
-        </p:txBody>
-      </p:sp>
-      <p:sp>
-        <p:nvSpPr>
-          <p:cNvPr id="10" name="TextBox 9"/>
-          <p:cNvSpPr txBox="1"/>
-          <p:nvPr/>
-        </p:nvSpPr>
-        <p:spPr>
-          <a:xfrm>
-            <a:off x="1143000" y="3364992"/>
-            <a:ext cx="10058400" cy="822960"/>
-          </a:xfrm>
-          <a:prstGeom prst="rect">
-            <a:avLst/>
-          </a:prstGeom>
-          <a:noFill/>
-        </p:spPr>
-        <p:txBody>
-          <a:bodyPr wrap="square">
-            <a:spAutoFit/>
-          </a:bodyPr>
-          <a:lstStyle/>
-          <a:p>
-            <a:r>
-              <a:rPr sz="1200" b="0">
-                <a:solidFill>
-                  <a:srgbClr val="E8E8EE"/>
-                </a:solidFill>
-                <a:latin typeface="Consolas"/>
-              </a:rPr>
-              <a:t>coef = np.polyfit(t, s.values, 1)        # 기울기·절편</a:t>
-            </a:r>
-          </a:p>
-          <a:p>
-            <a:r>
-              <a:rPr sz="1200" b="0">
-                <a:solidFill>
-                  <a:srgbClr val="E8E8EE"/>
-                </a:solidFill>
-                <a:latin typeface="Consolas"/>
-              </a:rPr>
-              <a:t>seasonal = pd.Series(s.values - np.polyval(coef, t)) \</a:t>
-            </a:r>
-          </a:p>
-          <a:p>
-            <a:r>
-              <a:rPr sz="1200" b="0">
-                <a:solidFill>
-                  <a:srgbClr val="E8E8EE"/>
-                </a:solidFill>
-                <a:latin typeface="Consolas"/>
-              </a:rPr>
-              <a:t>             .groupby(s.index.weekday).mean()</a:t>
-            </a:r>
-          </a:p>
-        </p:txBody>
-      </p:sp>
-      <p:sp>
-        <p:nvSpPr>
-          <p:cNvPr id="11" name="TextBox 10"/>
-          <p:cNvSpPr txBox="1"/>
-          <p:nvPr/>
-        </p:nvSpPr>
-        <p:spPr>
-          <a:xfrm>
-            <a:off x="731520" y="4407408"/>
-            <a:ext cx="10789920" cy="320040"/>
-          </a:xfrm>
-          <a:prstGeom prst="rect">
-            <a:avLst/>
-          </a:prstGeom>
-          <a:noFill/>
-        </p:spPr>
-        <p:txBody>
-          <a:bodyPr wrap="square">
-            <a:spAutoFit/>
-          </a:bodyPr>
-          <a:lstStyle/>
-          <a:p>
-            <a:r>
-              <a:rPr sz="1350" b="1">
-                <a:solidFill>
-                  <a:srgbClr val="E1306C"/>
-                </a:solidFill>
-                <a:latin typeface="맑은 고딕"/>
-              </a:rPr>
-              <a:t>●  14일 외삽 + 95% 예측구간 (잔차 표준편차 기반)</a:t>
-            </a:r>
-          </a:p>
-        </p:txBody>
-      </p:sp>
-      <p:sp>
-        <p:nvSpPr>
-          <p:cNvPr id="12" name="Rectangle 11"/>
-          <p:cNvSpPr/>
-          <p:nvPr/>
-        </p:nvSpPr>
-        <p:spPr>
-          <a:xfrm>
-            <a:off x="914400" y="4791456"/>
-            <a:ext cx="10424160" cy="713232"/>
-          </a:xfrm>
-          <a:prstGeom prst="rect">
-            <a:avLst/>
-          </a:prstGeom>
-          <a:solidFill>
-            <a:srgbClr val="1E1E26"/>
-          </a:solidFill>
-          <a:ln>
-            <a:noFill/>
-          </a:ln>
-          <a:effectLst/>
-        </p:spPr>
-        <p:style>
-          <a:lnRef idx="1">
-            <a:schemeClr val="accent1"/>
-          </a:lnRef>
-          <a:fillRef idx="3">
-            <a:schemeClr val="accent1"/>
-          </a:fillRef>
-          <a:effectRef idx="2">
-            <a:schemeClr val="accent1"/>
-          </a:effectRef>
-          <a:fontRef idx="minor">
-            <a:schemeClr val="lt1"/>
-          </a:fontRef>
-        </p:style>
-        <p:txBody>
-          <a:bodyPr rtlCol="0" anchor="ctr"/>
-          <a:lstStyle/>
-          <a:p>
-            <a:pPr algn="ctr"/>
-          </a:p>
-        </p:txBody>
-      </p:sp>
-      <p:sp>
-        <p:nvSpPr>
-          <p:cNvPr id="13" name="TextBox 12"/>
-          <p:cNvSpPr txBox="1"/>
-          <p:nvPr/>
-        </p:nvSpPr>
-        <p:spPr>
-          <a:xfrm>
-            <a:off x="1143000" y="4882896"/>
-            <a:ext cx="10058400" cy="566928"/>
-          </a:xfrm>
-          <a:prstGeom prst="rect">
-            <a:avLst/>
-          </a:prstGeom>
-          <a:noFill/>
-        </p:spPr>
-        <p:txBody>
-          <a:bodyPr wrap="square">
-            <a:spAutoFit/>
-          </a:bodyPr>
-          <a:lstStyle/>
-          <a:p>
-            <a:r>
-              <a:rPr sz="1200" b="0">
-                <a:solidFill>
-                  <a:srgbClr val="E8E8EE"/>
-                </a:solidFill>
-                <a:latin typeface="Consolas"/>
-              </a:rPr>
-              <a:t>future = np.polyval(coef, future_t) + seasonal[future_weekday]</a:t>
-            </a:r>
-          </a:p>
-          <a:p>
-            <a:r>
-              <a:rPr sz="1200" b="0">
-                <a:solidFill>
-                  <a:srgbClr val="E8E8EE"/>
-                </a:solidFill>
-                <a:latin typeface="Consolas"/>
-              </a:rPr>
-              <a:t>lo, hi = future - 1.96*resid_std, future + 1.96*resid_std</a:t>
-            </a:r>
-          </a:p>
-        </p:txBody>
-      </p:sp>
-      <p:sp>
-        <p:nvSpPr>
-          <p:cNvPr id="14" name="TextBox 13"/>
-          <p:cNvSpPr txBox="1"/>
-          <p:nvPr/>
-        </p:nvSpPr>
-        <p:spPr>
-          <a:xfrm>
-            <a:off x="640080" y="6437376"/>
-            <a:ext cx="8229600" cy="274320"/>
-          </a:xfrm>
-          <a:prstGeom prst="rect">
-            <a:avLst/>
-          </a:prstGeom>
-          <a:noFill/>
-        </p:spPr>
-        <p:txBody>
-          <a:bodyPr wrap="square">
-            <a:spAutoFit/>
-          </a:bodyPr>
-          <a:lstStyle/>
-          <a:p>
-            <a:r>
-              <a:rPr sz="900" b="0">
-                <a:solidFill>
-                  <a:srgbClr val="9A9AA2"/>
-                </a:solidFill>
-                <a:latin typeface="맑은 고딕"/>
-              </a:rPr>
-              <a:t>시계열 데이터 분석  ·  한국 해시태그 트렌드</a:t>
-            </a:r>
-          </a:p>
-        </p:txBody>
-      </p:sp>
-      <p:sp>
-        <p:nvSpPr>
-          <p:cNvPr id="15" name="TextBox 14"/>
-          <p:cNvSpPr txBox="1"/>
-          <p:nvPr/>
-        </p:nvSpPr>
-        <p:spPr>
-          <a:xfrm>
-            <a:off x="11002975" y="6437376"/>
-            <a:ext cx="822960" cy="274320"/>
-          </a:xfrm>
-          <a:prstGeom prst="rect">
-            <a:avLst/>
-          </a:prstGeom>
-          <a:noFill/>
-        </p:spPr>
-        <p:txBody>
-          <a:bodyPr wrap="square">
-            <a:spAutoFit/>
-          </a:bodyPr>
-          <a:lstStyle/>
-          <a:p>
-            <a:pPr algn="r"/>
-            <a:r>
-              <a:rPr sz="900" b="1">
-                <a:solidFill>
-                  <a:srgbClr val="E1306C"/>
-                </a:solidFill>
-                <a:latin typeface="맑은 고딕"/>
-              </a:rPr>
-              <a:t>28</a:t>
-            </a:r>
-          </a:p>
-        </p:txBody>
-      </p:sp>
-    </p:spTree>
-  </p:cSld>
-  <p:clrMapOvr>
-    <a:masterClrMapping/>
-  </p:clrMapOvr>
-</p:sld>
-</file>
-
-<file path=ppt/slides/slide34.xml><?xml version="1.0" encoding="utf-8"?>
-<p:sld xmlns:a="http://schemas.openxmlformats.org/drawingml/2006/main" xmlns:p="http://schemas.openxmlformats.org/presentationml/2006/main" xmlns:r="http://schemas.openxmlformats.org/officeDocument/2006/relationships">
-  <p:cSld>
-    <p:spTree>
-      <p:nvGrpSpPr>
-        <p:cNvPr id="1" name=""/>
-        <p:cNvGrpSpPr/>
-        <p:nvPr/>
-      </p:nvGrpSpPr>
-      <p:grpSpPr/>
-      <p:sp>
-        <p:nvSpPr>
-          <p:cNvPr id="2" name="TextBox 1"/>
-          <p:cNvSpPr txBox="1"/>
-          <p:nvPr/>
-        </p:nvSpPr>
-        <p:spPr>
-          <a:xfrm>
-            <a:off x="658368" y="384048"/>
-            <a:ext cx="10789920" cy="292608"/>
-          </a:xfrm>
-          <a:prstGeom prst="rect">
-            <a:avLst/>
-          </a:prstGeom>
-          <a:noFill/>
-        </p:spPr>
-        <p:txBody>
-          <a:bodyPr wrap="square">
-            <a:spAutoFit/>
-          </a:bodyPr>
-          <a:lstStyle/>
-          <a:p>
-            <a:r>
-              <a:rPr sz="1050" b="1">
-                <a:solidFill>
-                  <a:srgbClr val="E1306C"/>
-                </a:solidFill>
-                <a:latin typeface="Segoe UI"/>
-              </a:rPr>
-              <a:t>08 · LIMITATIONS</a:t>
-            </a:r>
-          </a:p>
-        </p:txBody>
-      </p:sp>
-      <p:sp>
-        <p:nvSpPr>
-          <p:cNvPr id="3" name="TextBox 2"/>
-          <p:cNvSpPr txBox="1"/>
-          <p:nvPr/>
-        </p:nvSpPr>
-        <p:spPr>
-          <a:xfrm>
-            <a:off x="640080" y="658368"/>
-            <a:ext cx="10881360" cy="640080"/>
-          </a:xfrm>
-          <a:prstGeom prst="rect">
-            <a:avLst/>
-          </a:prstGeom>
-          <a:noFill/>
-        </p:spPr>
-        <p:txBody>
-          <a:bodyPr wrap="square">
-            <a:spAutoFit/>
-          </a:bodyPr>
-          <a:lstStyle/>
-          <a:p>
-            <a:r>
-              <a:rPr sz="2700" b="1">
-                <a:solidFill>
-                  <a:srgbClr val="1A1A1E"/>
-                </a:solidFill>
-                <a:latin typeface="맑은 고딕"/>
-              </a:rPr>
-              <a:t>한계와 재현</a:t>
-            </a:r>
-          </a:p>
-        </p:txBody>
-      </p:sp>
-      <p:sp>
-        <p:nvSpPr>
-          <p:cNvPr id="4" name="Rectangle 3"/>
-          <p:cNvSpPr/>
-          <p:nvPr/>
-        </p:nvSpPr>
-        <p:spPr>
-          <a:xfrm>
-            <a:off x="658368" y="1298448"/>
-            <a:ext cx="10881360" cy="12700"/>
-          </a:xfrm>
-          <a:prstGeom prst="rect">
-            <a:avLst/>
-          </a:prstGeom>
-          <a:solidFill>
-            <a:srgbClr val="E6E6EA"/>
-          </a:solidFill>
-          <a:ln>
-            <a:noFill/>
-          </a:ln>
-          <a:effectLst/>
-        </p:spPr>
-        <p:style>
-          <a:lnRef idx="1">
-            <a:schemeClr val="accent1"/>
-          </a:lnRef>
-          <a:fillRef idx="3">
-            <a:schemeClr val="accent1"/>
-          </a:fillRef>
-          <a:effectRef idx="2">
-            <a:schemeClr val="accent1"/>
-          </a:effectRef>
-          <a:fontRef idx="minor">
-            <a:schemeClr val="lt1"/>
-          </a:fontRef>
-        </p:style>
-        <p:txBody>
-          <a:bodyPr rtlCol="0" anchor="ctr"/>
-          <a:lstStyle/>
-          <a:p>
-            <a:pPr algn="ctr"/>
-          </a:p>
-        </p:txBody>
-      </p:sp>
-      <p:sp>
-        <p:nvSpPr>
           <p:cNvPr id="5" name="Rounded Rectangle 4"/>
           <p:cNvSpPr/>
           <p:nvPr/>
@@ -19678,7 +18429,7 @@
                 </a:solidFill>
                 <a:latin typeface="맑은 고딕"/>
               </a:rPr>
-              <a:t>29</a:t>
+              <a:t>28</a:t>
             </a:r>
           </a:p>
         </p:txBody>
